--- a/pptx/Session_01_Tokens_v1.0.pptx
+++ b/pptx/Session_01_Tokens_v1.0.pptx
@@ -5,18 +5,19 @@
     <p:sldMasterId id="2147483648" r:id="rId1"/>
   </p:sldMasterIdLst>
   <p:sldIdLst>
-    <p:sldId id="256" r:id="rId7"/>
-    <p:sldId id="257" r:id="rId8"/>
-    <p:sldId id="258" r:id="rId9"/>
-    <p:sldId id="259" r:id="rId10"/>
-    <p:sldId id="260" r:id="rId11"/>
-    <p:sldId id="261" r:id="rId12"/>
-    <p:sldId id="262" r:id="rId13"/>
-    <p:sldId id="263" r:id="rId14"/>
-    <p:sldId id="264" r:id="rId15"/>
-    <p:sldId id="265" r:id="rId16"/>
+    <p:sldId id="266" r:id="rId2"/>
+    <p:sldId id="256" r:id="rId3"/>
+    <p:sldId id="257" r:id="rId4"/>
+    <p:sldId id="258" r:id="rId5"/>
+    <p:sldId id="259" r:id="rId6"/>
+    <p:sldId id="260" r:id="rId7"/>
+    <p:sldId id="261" r:id="rId8"/>
+    <p:sldId id="262" r:id="rId9"/>
+    <p:sldId id="263" r:id="rId10"/>
+    <p:sldId id="264" r:id="rId11"/>
+    <p:sldId id="265" r:id="rId12"/>
   </p:sldIdLst>
-  <p:sldSz cx="12191695" cy="6858000" type="screen4x3"/>
+  <p:sldSz cx="12192000" cy="6858000"/>
   <p:notesSz cx="6858000" cy="9144000"/>
   <p:defaultTextStyle>
     <a:defPPr>
@@ -113,6 +114,22 @@
       </a:defRPr>
     </a:lvl9pPr>
   </p:defaultTextStyle>
+  <p:extLst>
+    <p:ext uri="{EFAFB233-063F-42B5-8137-9DF3F51BA10A}">
+      <p15:sldGuideLst xmlns:p15="http://schemas.microsoft.com/office/powerpoint/2012/main">
+        <p15:guide id="1" orient="horz" pos="2160">
+          <p15:clr>
+            <a:srgbClr val="A4A3A4"/>
+          </p15:clr>
+        </p15:guide>
+        <p15:guide id="2" pos="2880">
+          <p15:clr>
+            <a:srgbClr val="A4A3A4"/>
+          </p15:clr>
+        </p15:guide>
+      </p15:sldGuideLst>
+    </p:ext>
+  </p:extLst>
 </p:presentation>
 </file>
 
@@ -154,10 +171,9 @@
           <a:lstStyle/>
           <a:p>
             <a:r>
-              <a:rPr lang="en-US" smtClean="0"/>
+              <a:rPr lang="en-US"/>
               <a:t>Click to edit Master title style</a:t>
             </a:r>
-            <a:endParaRPr lang="en-US"/>
           </a:p>
         </p:txBody>
       </p:sp>
@@ -273,10 +289,9 @@
           </a:lstStyle>
           <a:p>
             <a:r>
-              <a:rPr lang="en-US" smtClean="0"/>
+              <a:rPr lang="en-US"/>
               <a:t>Click to edit Master subtitle style</a:t>
             </a:r>
-            <a:endParaRPr lang="en-US"/>
           </a:p>
         </p:txBody>
       </p:sp>
@@ -297,7 +312,7 @@
           <a:p>
             <a:fld id="{5BCAD085-E8A6-8845-BD4E-CB4CCA059FC4}" type="datetimeFigureOut">
               <a:rPr lang="en-US" smtClean="0"/>
-              <a:t>1/27/13</a:t>
+              <a:t>5/23/2026</a:t>
             </a:fld>
             <a:endParaRPr lang="en-US"/>
           </a:p>
@@ -391,10 +406,9 @@
           <a:lstStyle/>
           <a:p>
             <a:r>
-              <a:rPr lang="en-US" smtClean="0"/>
+              <a:rPr lang="en-US"/>
               <a:t>Click to edit Master title style</a:t>
             </a:r>
-            <a:endParaRPr lang="en-US"/>
           </a:p>
         </p:txBody>
       </p:sp>
@@ -415,38 +429,37 @@
           <a:p>
             <a:pPr lvl="0"/>
             <a:r>
-              <a:rPr lang="en-US" smtClean="0"/>
+              <a:rPr lang="en-US"/>
               <a:t>Click to edit Master text styles</a:t>
             </a:r>
           </a:p>
           <a:p>
             <a:pPr lvl="1"/>
             <a:r>
-              <a:rPr lang="en-US" smtClean="0"/>
+              <a:rPr lang="en-US"/>
               <a:t>Second level</a:t>
             </a:r>
           </a:p>
           <a:p>
             <a:pPr lvl="2"/>
             <a:r>
-              <a:rPr lang="en-US" smtClean="0"/>
+              <a:rPr lang="en-US"/>
               <a:t>Third level</a:t>
             </a:r>
           </a:p>
           <a:p>
             <a:pPr lvl="3"/>
             <a:r>
-              <a:rPr lang="en-US" smtClean="0"/>
+              <a:rPr lang="en-US"/>
               <a:t>Fourth level</a:t>
             </a:r>
           </a:p>
           <a:p>
             <a:pPr lvl="4"/>
             <a:r>
-              <a:rPr lang="en-US" smtClean="0"/>
+              <a:rPr lang="en-US"/>
               <a:t>Fifth level</a:t>
             </a:r>
-            <a:endParaRPr lang="en-US"/>
           </a:p>
         </p:txBody>
       </p:sp>
@@ -467,7 +480,7 @@
           <a:p>
             <a:fld id="{5BCAD085-E8A6-8845-BD4E-CB4CCA059FC4}" type="datetimeFigureOut">
               <a:rPr lang="en-US" smtClean="0"/>
-              <a:t>1/27/13</a:t>
+              <a:t>5/23/2026</a:t>
             </a:fld>
             <a:endParaRPr lang="en-US"/>
           </a:p>
@@ -566,10 +579,9 @@
           <a:lstStyle/>
           <a:p>
             <a:r>
-              <a:rPr lang="en-US" smtClean="0"/>
+              <a:rPr lang="en-US"/>
               <a:t>Click to edit Master title style</a:t>
             </a:r>
-            <a:endParaRPr lang="en-US"/>
           </a:p>
         </p:txBody>
       </p:sp>
@@ -595,38 +607,37 @@
           <a:p>
             <a:pPr lvl="0"/>
             <a:r>
-              <a:rPr lang="en-US" smtClean="0"/>
+              <a:rPr lang="en-US"/>
               <a:t>Click to edit Master text styles</a:t>
             </a:r>
           </a:p>
           <a:p>
             <a:pPr lvl="1"/>
             <a:r>
-              <a:rPr lang="en-US" smtClean="0"/>
+              <a:rPr lang="en-US"/>
               <a:t>Second level</a:t>
             </a:r>
           </a:p>
           <a:p>
             <a:pPr lvl="2"/>
             <a:r>
-              <a:rPr lang="en-US" smtClean="0"/>
+              <a:rPr lang="en-US"/>
               <a:t>Third level</a:t>
             </a:r>
           </a:p>
           <a:p>
             <a:pPr lvl="3"/>
             <a:r>
-              <a:rPr lang="en-US" smtClean="0"/>
+              <a:rPr lang="en-US"/>
               <a:t>Fourth level</a:t>
             </a:r>
           </a:p>
           <a:p>
             <a:pPr lvl="4"/>
             <a:r>
-              <a:rPr lang="en-US" smtClean="0"/>
+              <a:rPr lang="en-US"/>
               <a:t>Fifth level</a:t>
             </a:r>
-            <a:endParaRPr lang="en-US"/>
           </a:p>
         </p:txBody>
       </p:sp>
@@ -647,7 +658,7 @@
           <a:p>
             <a:fld id="{5BCAD085-E8A6-8845-BD4E-CB4CCA059FC4}" type="datetimeFigureOut">
               <a:rPr lang="en-US" smtClean="0"/>
-              <a:t>1/27/13</a:t>
+              <a:t>5/23/2026</a:t>
             </a:fld>
             <a:endParaRPr lang="en-US"/>
           </a:p>
@@ -741,10 +752,9 @@
           <a:lstStyle/>
           <a:p>
             <a:r>
-              <a:rPr lang="en-US" smtClean="0"/>
+              <a:rPr lang="en-US"/>
               <a:t>Click to edit Master title style</a:t>
             </a:r>
-            <a:endParaRPr lang="en-US"/>
           </a:p>
         </p:txBody>
       </p:sp>
@@ -765,38 +775,37 @@
           <a:p>
             <a:pPr lvl="0"/>
             <a:r>
-              <a:rPr lang="en-US" smtClean="0"/>
+              <a:rPr lang="en-US"/>
               <a:t>Click to edit Master text styles</a:t>
             </a:r>
           </a:p>
           <a:p>
             <a:pPr lvl="1"/>
             <a:r>
-              <a:rPr lang="en-US" smtClean="0"/>
+              <a:rPr lang="en-US"/>
               <a:t>Second level</a:t>
             </a:r>
           </a:p>
           <a:p>
             <a:pPr lvl="2"/>
             <a:r>
-              <a:rPr lang="en-US" smtClean="0"/>
+              <a:rPr lang="en-US"/>
               <a:t>Third level</a:t>
             </a:r>
           </a:p>
           <a:p>
             <a:pPr lvl="3"/>
             <a:r>
-              <a:rPr lang="en-US" smtClean="0"/>
+              <a:rPr lang="en-US"/>
               <a:t>Fourth level</a:t>
             </a:r>
           </a:p>
           <a:p>
             <a:pPr lvl="4"/>
             <a:r>
-              <a:rPr lang="en-US" smtClean="0"/>
+              <a:rPr lang="en-US"/>
               <a:t>Fifth level</a:t>
             </a:r>
-            <a:endParaRPr lang="en-US"/>
           </a:p>
         </p:txBody>
       </p:sp>
@@ -817,7 +826,7 @@
           <a:p>
             <a:fld id="{5BCAD085-E8A6-8845-BD4E-CB4CCA059FC4}" type="datetimeFigureOut">
               <a:rPr lang="en-US" smtClean="0"/>
-              <a:t>1/27/13</a:t>
+              <a:t>5/23/2026</a:t>
             </a:fld>
             <a:endParaRPr lang="en-US"/>
           </a:p>
@@ -920,10 +929,9 @@
           </a:lstStyle>
           <a:p>
             <a:r>
-              <a:rPr lang="en-US" smtClean="0"/>
+              <a:rPr lang="en-US"/>
               <a:t>Click to edit Master title style</a:t>
             </a:r>
-            <a:endParaRPr lang="en-US"/>
           </a:p>
         </p:txBody>
       </p:sp>
@@ -1040,7 +1048,7 @@
           <a:p>
             <a:pPr lvl="0"/>
             <a:r>
-              <a:rPr lang="en-US" smtClean="0"/>
+              <a:rPr lang="en-US"/>
               <a:t>Click to edit Master text styles</a:t>
             </a:r>
           </a:p>
@@ -1063,7 +1071,7 @@
           <a:p>
             <a:fld id="{5BCAD085-E8A6-8845-BD4E-CB4CCA059FC4}" type="datetimeFigureOut">
               <a:rPr lang="en-US" smtClean="0"/>
-              <a:t>1/27/13</a:t>
+              <a:t>5/23/2026</a:t>
             </a:fld>
             <a:endParaRPr lang="en-US"/>
           </a:p>
@@ -1157,10 +1165,9 @@
           <a:lstStyle/>
           <a:p>
             <a:r>
-              <a:rPr lang="en-US" smtClean="0"/>
+              <a:rPr lang="en-US"/>
               <a:t>Click to edit Master title style</a:t>
             </a:r>
-            <a:endParaRPr lang="en-US"/>
           </a:p>
         </p:txBody>
       </p:sp>
@@ -1214,38 +1221,37 @@
           <a:p>
             <a:pPr lvl="0"/>
             <a:r>
-              <a:rPr lang="en-US" smtClean="0"/>
+              <a:rPr lang="en-US"/>
               <a:t>Click to edit Master text styles</a:t>
             </a:r>
           </a:p>
           <a:p>
             <a:pPr lvl="1"/>
             <a:r>
-              <a:rPr lang="en-US" smtClean="0"/>
+              <a:rPr lang="en-US"/>
               <a:t>Second level</a:t>
             </a:r>
           </a:p>
           <a:p>
             <a:pPr lvl="2"/>
             <a:r>
-              <a:rPr lang="en-US" smtClean="0"/>
+              <a:rPr lang="en-US"/>
               <a:t>Third level</a:t>
             </a:r>
           </a:p>
           <a:p>
             <a:pPr lvl="3"/>
             <a:r>
-              <a:rPr lang="en-US" smtClean="0"/>
+              <a:rPr lang="en-US"/>
               <a:t>Fourth level</a:t>
             </a:r>
           </a:p>
           <a:p>
             <a:pPr lvl="4"/>
             <a:r>
-              <a:rPr lang="en-US" smtClean="0"/>
+              <a:rPr lang="en-US"/>
               <a:t>Fifth level</a:t>
             </a:r>
-            <a:endParaRPr lang="en-US"/>
           </a:p>
         </p:txBody>
       </p:sp>
@@ -1299,38 +1305,37 @@
           <a:p>
             <a:pPr lvl="0"/>
             <a:r>
-              <a:rPr lang="en-US" smtClean="0"/>
+              <a:rPr lang="en-US"/>
               <a:t>Click to edit Master text styles</a:t>
             </a:r>
           </a:p>
           <a:p>
             <a:pPr lvl="1"/>
             <a:r>
-              <a:rPr lang="en-US" smtClean="0"/>
+              <a:rPr lang="en-US"/>
               <a:t>Second level</a:t>
             </a:r>
           </a:p>
           <a:p>
             <a:pPr lvl="2"/>
             <a:r>
-              <a:rPr lang="en-US" smtClean="0"/>
+              <a:rPr lang="en-US"/>
               <a:t>Third level</a:t>
             </a:r>
           </a:p>
           <a:p>
             <a:pPr lvl="3"/>
             <a:r>
-              <a:rPr lang="en-US" smtClean="0"/>
+              <a:rPr lang="en-US"/>
               <a:t>Fourth level</a:t>
             </a:r>
           </a:p>
           <a:p>
             <a:pPr lvl="4"/>
             <a:r>
-              <a:rPr lang="en-US" smtClean="0"/>
+              <a:rPr lang="en-US"/>
               <a:t>Fifth level</a:t>
             </a:r>
-            <a:endParaRPr lang="en-US"/>
           </a:p>
         </p:txBody>
       </p:sp>
@@ -1351,7 +1356,7 @@
           <a:p>
             <a:fld id="{5BCAD085-E8A6-8845-BD4E-CB4CCA059FC4}" type="datetimeFigureOut">
               <a:rPr lang="en-US" smtClean="0"/>
-              <a:t>1/27/13</a:t>
+              <a:t>5/23/2026</a:t>
             </a:fld>
             <a:endParaRPr lang="en-US"/>
           </a:p>
@@ -1449,10 +1454,9 @@
           </a:lstStyle>
           <a:p>
             <a:r>
-              <a:rPr lang="en-US" smtClean="0"/>
+              <a:rPr lang="en-US"/>
               <a:t>Click to edit Master title style</a:t>
             </a:r>
-            <a:endParaRPr lang="en-US"/>
           </a:p>
         </p:txBody>
       </p:sp>
@@ -1515,7 +1519,7 @@
           <a:p>
             <a:pPr lvl="0"/>
             <a:r>
-              <a:rPr lang="en-US" smtClean="0"/>
+              <a:rPr lang="en-US"/>
               <a:t>Click to edit Master text styles</a:t>
             </a:r>
           </a:p>
@@ -1571,38 +1575,37 @@
           <a:p>
             <a:pPr lvl="0"/>
             <a:r>
-              <a:rPr lang="en-US" smtClean="0"/>
+              <a:rPr lang="en-US"/>
               <a:t>Click to edit Master text styles</a:t>
             </a:r>
           </a:p>
           <a:p>
             <a:pPr lvl="1"/>
             <a:r>
-              <a:rPr lang="en-US" smtClean="0"/>
+              <a:rPr lang="en-US"/>
               <a:t>Second level</a:t>
             </a:r>
           </a:p>
           <a:p>
             <a:pPr lvl="2"/>
             <a:r>
-              <a:rPr lang="en-US" smtClean="0"/>
+              <a:rPr lang="en-US"/>
               <a:t>Third level</a:t>
             </a:r>
           </a:p>
           <a:p>
             <a:pPr lvl="3"/>
             <a:r>
-              <a:rPr lang="en-US" smtClean="0"/>
+              <a:rPr lang="en-US"/>
               <a:t>Fourth level</a:t>
             </a:r>
           </a:p>
           <a:p>
             <a:pPr lvl="4"/>
             <a:r>
-              <a:rPr lang="en-US" smtClean="0"/>
+              <a:rPr lang="en-US"/>
               <a:t>Fifth level</a:t>
             </a:r>
-            <a:endParaRPr lang="en-US"/>
           </a:p>
         </p:txBody>
       </p:sp>
@@ -1665,7 +1668,7 @@
           <a:p>
             <a:pPr lvl="0"/>
             <a:r>
-              <a:rPr lang="en-US" smtClean="0"/>
+              <a:rPr lang="en-US"/>
               <a:t>Click to edit Master text styles</a:t>
             </a:r>
           </a:p>
@@ -1721,38 +1724,37 @@
           <a:p>
             <a:pPr lvl="0"/>
             <a:r>
-              <a:rPr lang="en-US" smtClean="0"/>
+              <a:rPr lang="en-US"/>
               <a:t>Click to edit Master text styles</a:t>
             </a:r>
           </a:p>
           <a:p>
             <a:pPr lvl="1"/>
             <a:r>
-              <a:rPr lang="en-US" smtClean="0"/>
+              <a:rPr lang="en-US"/>
               <a:t>Second level</a:t>
             </a:r>
           </a:p>
           <a:p>
             <a:pPr lvl="2"/>
             <a:r>
-              <a:rPr lang="en-US" smtClean="0"/>
+              <a:rPr lang="en-US"/>
               <a:t>Third level</a:t>
             </a:r>
           </a:p>
           <a:p>
             <a:pPr lvl="3"/>
             <a:r>
-              <a:rPr lang="en-US" smtClean="0"/>
+              <a:rPr lang="en-US"/>
               <a:t>Fourth level</a:t>
             </a:r>
           </a:p>
           <a:p>
             <a:pPr lvl="4"/>
             <a:r>
-              <a:rPr lang="en-US" smtClean="0"/>
+              <a:rPr lang="en-US"/>
               <a:t>Fifth level</a:t>
             </a:r>
-            <a:endParaRPr lang="en-US"/>
           </a:p>
         </p:txBody>
       </p:sp>
@@ -1773,7 +1775,7 @@
           <a:p>
             <a:fld id="{5BCAD085-E8A6-8845-BD4E-CB4CCA059FC4}" type="datetimeFigureOut">
               <a:rPr lang="en-US" smtClean="0"/>
-              <a:t>1/27/13</a:t>
+              <a:t>5/23/2026</a:t>
             </a:fld>
             <a:endParaRPr lang="en-US"/>
           </a:p>
@@ -1867,10 +1869,9 @@
           <a:lstStyle/>
           <a:p>
             <a:r>
-              <a:rPr lang="en-US" smtClean="0"/>
+              <a:rPr lang="en-US"/>
               <a:t>Click to edit Master title style</a:t>
             </a:r>
-            <a:endParaRPr lang="en-US"/>
           </a:p>
         </p:txBody>
       </p:sp>
@@ -1891,7 +1892,7 @@
           <a:p>
             <a:fld id="{5BCAD085-E8A6-8845-BD4E-CB4CCA059FC4}" type="datetimeFigureOut">
               <a:rPr lang="en-US" smtClean="0"/>
-              <a:t>1/27/13</a:t>
+              <a:t>5/23/2026</a:t>
             </a:fld>
             <a:endParaRPr lang="en-US"/>
           </a:p>
@@ -1986,7 +1987,7 @@
           <a:p>
             <a:fld id="{5BCAD085-E8A6-8845-BD4E-CB4CCA059FC4}" type="datetimeFigureOut">
               <a:rPr lang="en-US" smtClean="0"/>
-              <a:t>1/27/13</a:t>
+              <a:t>5/23/2026</a:t>
             </a:fld>
             <a:endParaRPr lang="en-US"/>
           </a:p>
@@ -2089,10 +2090,9 @@
           </a:lstStyle>
           <a:p>
             <a:r>
-              <a:rPr lang="en-US" smtClean="0"/>
+              <a:rPr lang="en-US"/>
               <a:t>Click to edit Master title style</a:t>
             </a:r>
-            <a:endParaRPr lang="en-US"/>
           </a:p>
         </p:txBody>
       </p:sp>
@@ -2146,38 +2146,37 @@
           <a:p>
             <a:pPr lvl="0"/>
             <a:r>
-              <a:rPr lang="en-US" smtClean="0"/>
+              <a:rPr lang="en-US"/>
               <a:t>Click to edit Master text styles</a:t>
             </a:r>
           </a:p>
           <a:p>
             <a:pPr lvl="1"/>
             <a:r>
-              <a:rPr lang="en-US" smtClean="0"/>
+              <a:rPr lang="en-US"/>
               <a:t>Second level</a:t>
             </a:r>
           </a:p>
           <a:p>
             <a:pPr lvl="2"/>
             <a:r>
-              <a:rPr lang="en-US" smtClean="0"/>
+              <a:rPr lang="en-US"/>
               <a:t>Third level</a:t>
             </a:r>
           </a:p>
           <a:p>
             <a:pPr lvl="3"/>
             <a:r>
-              <a:rPr lang="en-US" smtClean="0"/>
+              <a:rPr lang="en-US"/>
               <a:t>Fourth level</a:t>
             </a:r>
           </a:p>
           <a:p>
             <a:pPr lvl="4"/>
             <a:r>
-              <a:rPr lang="en-US" smtClean="0"/>
+              <a:rPr lang="en-US"/>
               <a:t>Fifth level</a:t>
             </a:r>
-            <a:endParaRPr lang="en-US"/>
           </a:p>
         </p:txBody>
       </p:sp>
@@ -2240,7 +2239,7 @@
           <a:p>
             <a:pPr lvl="0"/>
             <a:r>
-              <a:rPr lang="en-US" smtClean="0"/>
+              <a:rPr lang="en-US"/>
               <a:t>Click to edit Master text styles</a:t>
             </a:r>
           </a:p>
@@ -2263,7 +2262,7 @@
           <a:p>
             <a:fld id="{5BCAD085-E8A6-8845-BD4E-CB4CCA059FC4}" type="datetimeFigureOut">
               <a:rPr lang="en-US" smtClean="0"/>
-              <a:t>1/27/13</a:t>
+              <a:t>5/23/2026</a:t>
             </a:fld>
             <a:endParaRPr lang="en-US"/>
           </a:p>
@@ -2366,10 +2365,9 @@
           </a:lstStyle>
           <a:p>
             <a:r>
-              <a:rPr lang="en-US" smtClean="0"/>
+              <a:rPr lang="en-US"/>
               <a:t>Click to edit Master title style</a:t>
             </a:r>
-            <a:endParaRPr lang="en-US"/>
           </a:p>
         </p:txBody>
       </p:sp>
@@ -2493,7 +2491,7 @@
           <a:p>
             <a:pPr lvl="0"/>
             <a:r>
-              <a:rPr lang="en-US" smtClean="0"/>
+              <a:rPr lang="en-US"/>
               <a:t>Click to edit Master text styles</a:t>
             </a:r>
           </a:p>
@@ -2516,7 +2514,7 @@
           <a:p>
             <a:fld id="{5BCAD085-E8A6-8845-BD4E-CB4CCA059FC4}" type="datetimeFigureOut">
               <a:rPr lang="en-US" smtClean="0"/>
-              <a:t>1/27/13</a:t>
+              <a:t>5/23/2026</a:t>
             </a:fld>
             <a:endParaRPr lang="en-US"/>
           </a:p>
@@ -2625,10 +2623,9 @@
           <a:lstStyle/>
           <a:p>
             <a:r>
-              <a:rPr lang="en-US" smtClean="0"/>
+              <a:rPr lang="en-US"/>
               <a:t>Click to edit Master title style</a:t>
             </a:r>
-            <a:endParaRPr lang="en-US"/>
           </a:p>
         </p:txBody>
       </p:sp>
@@ -2659,38 +2656,37 @@
           <a:p>
             <a:pPr lvl="0"/>
             <a:r>
-              <a:rPr lang="en-US" smtClean="0"/>
+              <a:rPr lang="en-US"/>
               <a:t>Click to edit Master text styles</a:t>
             </a:r>
           </a:p>
           <a:p>
             <a:pPr lvl="1"/>
             <a:r>
-              <a:rPr lang="en-US" smtClean="0"/>
+              <a:rPr lang="en-US"/>
               <a:t>Second level</a:t>
             </a:r>
           </a:p>
           <a:p>
             <a:pPr lvl="2"/>
             <a:r>
-              <a:rPr lang="en-US" smtClean="0"/>
+              <a:rPr lang="en-US"/>
               <a:t>Third level</a:t>
             </a:r>
           </a:p>
           <a:p>
             <a:pPr lvl="3"/>
             <a:r>
-              <a:rPr lang="en-US" smtClean="0"/>
+              <a:rPr lang="en-US"/>
               <a:t>Fourth level</a:t>
             </a:r>
           </a:p>
           <a:p>
             <a:pPr lvl="4"/>
             <a:r>
-              <a:rPr lang="en-US" smtClean="0"/>
+              <a:rPr lang="en-US"/>
               <a:t>Fifth level</a:t>
             </a:r>
-            <a:endParaRPr lang="en-US"/>
           </a:p>
         </p:txBody>
       </p:sp>
@@ -2729,7 +2725,7 @@
           <a:p>
             <a:fld id="{5BCAD085-E8A6-8845-BD4E-CB4CCA059FC4}" type="datetimeFigureOut">
               <a:rPr lang="en-US" smtClean="0"/>
-              <a:t>1/27/13</a:t>
+              <a:t>5/23/2026</a:t>
             </a:fld>
             <a:endParaRPr lang="en-US"/>
           </a:p>
@@ -3088,7 +3084,908 @@
 </file>
 
 <file path=ppt/slides/slide1.xml><?xml version="1.0" encoding="utf-8"?>
-<p:sld xmlns:a="http://schemas.openxmlformats.org/drawingml/2006/main" xmlns:p="http://schemas.openxmlformats.org/presentationml/2006/main" xmlns:r="http://schemas.openxmlformats.org/officeDocument/2006/relationships">
+<p:sld xmlns:a="http://schemas.openxmlformats.org/drawingml/2006/main" xmlns:r="http://schemas.openxmlformats.org/officeDocument/2006/relationships" xmlns:p="http://schemas.openxmlformats.org/presentationml/2006/main">
+  <p:cSld>
+    <p:spTree>
+      <p:nvGrpSpPr>
+        <p:cNvPr id="1" name=""/>
+        <p:cNvGrpSpPr/>
+        <p:nvPr/>
+      </p:nvGrpSpPr>
+      <p:grpSpPr>
+        <a:xfrm>
+          <a:off x="0" y="0"/>
+          <a:ext cx="0" cy="0"/>
+          <a:chOff x="0" y="0"/>
+          <a:chExt cx="0" cy="0"/>
+        </a:xfrm>
+      </p:grpSpPr>
+      <p:sp>
+        <p:nvSpPr>
+          <p:cNvPr id="2" name="Title 1">
+            <a:extLst>
+              <a:ext uri="{FF2B5EF4-FFF2-40B4-BE49-F238E27FC236}">
+                <a16:creationId xmlns:a16="http://schemas.microsoft.com/office/drawing/2014/main" id="{54B40216-417D-AA01-6848-0003ED354B6D}"/>
+              </a:ext>
+            </a:extLst>
+          </p:cNvPr>
+          <p:cNvSpPr>
+            <a:spLocks noGrp="1"/>
+          </p:cNvSpPr>
+          <p:nvPr>
+            <p:ph type="title"/>
+          </p:nvPr>
+        </p:nvSpPr>
+        <p:spPr/>
+        <p:txBody>
+          <a:bodyPr>
+            <a:normAutofit fontScale="90000"/>
+          </a:bodyPr>
+          <a:lstStyle/>
+          <a:p>
+            <a:r>
+              <a:rPr lang="en-US" dirty="0"/>
+              <a:t>MAGPAI </a:t>
+            </a:r>
+            <a:br>
+              <a:rPr lang="en-US" dirty="0"/>
+            </a:br>
+            <a:r>
+              <a:rPr lang="en-US" dirty="0"/>
+              <a:t> </a:t>
+            </a:r>
+            <a:r>
+              <a:rPr lang="en-US" sz="1100" b="0" dirty="0"/>
+              <a:t>( mag practical AI , pronounced </a:t>
+            </a:r>
+            <a:r>
+              <a:rPr lang="en-US" sz="1050" b="0" dirty="0"/>
+              <a:t>(/ˈ</a:t>
+            </a:r>
+            <a:r>
+              <a:rPr lang="en-US" sz="1050" b="0" dirty="0" err="1"/>
+              <a:t>mæɡ.paɪ</a:t>
+            </a:r>
+            <a:r>
+              <a:rPr lang="en-US" sz="1050" b="0" dirty="0"/>
+              <a:t>/) </a:t>
+            </a:r>
+            <a:r>
+              <a:rPr lang="en-US" sz="1100" b="0" dirty="0"/>
+              <a:t>)</a:t>
+            </a:r>
+            <a:endParaRPr lang="en-US" b="0" dirty="0"/>
+          </a:p>
+        </p:txBody>
+      </p:sp>
+      <p:pic>
+        <p:nvPicPr>
+          <p:cNvPr id="6" name="Picture Placeholder 5">
+            <a:extLst>
+              <a:ext uri="{FF2B5EF4-FFF2-40B4-BE49-F238E27FC236}">
+                <a16:creationId xmlns:a16="http://schemas.microsoft.com/office/drawing/2014/main" id="{BC56227F-0E35-3518-A770-5486C9C41AE4}"/>
+              </a:ext>
+            </a:extLst>
+          </p:cNvPr>
+          <p:cNvPicPr>
+            <a:picLocks noGrp="1" noChangeAspect="1"/>
+          </p:cNvPicPr>
+          <p:nvPr>
+            <p:ph type="pic" idx="1"/>
+          </p:nvPr>
+        </p:nvPicPr>
+        <p:blipFill>
+          <a:blip r:embed="rId2"/>
+          <a:srcRect l="3333" r="3333"/>
+          <a:stretch>
+            <a:fillRect/>
+          </a:stretch>
+        </p:blipFill>
+        <p:spPr/>
+      </p:pic>
+      <p:sp>
+        <p:nvSpPr>
+          <p:cNvPr id="4" name="Text Placeholder 3">
+            <a:extLst>
+              <a:ext uri="{FF2B5EF4-FFF2-40B4-BE49-F238E27FC236}">
+                <a16:creationId xmlns:a16="http://schemas.microsoft.com/office/drawing/2014/main" id="{EC1F9436-B15D-60B6-5226-1A31DDDD29A9}"/>
+              </a:ext>
+            </a:extLst>
+          </p:cNvPr>
+          <p:cNvSpPr>
+            <a:spLocks noGrp="1"/>
+          </p:cNvSpPr>
+          <p:nvPr>
+            <p:ph type="body" sz="half" idx="2"/>
+          </p:nvPr>
+        </p:nvSpPr>
+        <p:spPr>
+          <a:xfrm>
+            <a:off x="1792288" y="5564188"/>
+            <a:ext cx="5486400" cy="804862"/>
+          </a:xfrm>
+        </p:spPr>
+        <p:txBody>
+          <a:bodyPr>
+            <a:normAutofit lnSpcReduction="10000"/>
+          </a:bodyPr>
+          <a:lstStyle/>
+          <a:p>
+            <a:r>
+              <a:rPr lang="en-US" dirty="0"/>
+              <a:t>AI Under the Covers Demo Series – v1.0</a:t>
+            </a:r>
+          </a:p>
+          <a:p>
+            <a:r>
+              <a:rPr lang="en-US" dirty="0"/>
+              <a:t>AI is not magic</a:t>
+            </a:r>
+          </a:p>
+          <a:p>
+            <a:r>
+              <a:rPr lang="en-US" dirty="0"/>
+              <a:t>Text </a:t>
+            </a:r>
+            <a:r>
+              <a:rPr lang="en-US" dirty="0">
+                <a:sym typeface="Wingdings" panose="05000000000000000000" pitchFamily="2" charset="2"/>
+              </a:rPr>
+              <a:t></a:t>
+            </a:r>
+            <a:r>
+              <a:rPr lang="en-US" dirty="0"/>
+              <a:t> Tokens </a:t>
+            </a:r>
+            <a:r>
+              <a:rPr lang="en-US" dirty="0">
+                <a:sym typeface="Wingdings" panose="05000000000000000000" pitchFamily="2" charset="2"/>
+              </a:rPr>
+              <a:t></a:t>
+            </a:r>
+            <a:r>
+              <a:rPr lang="en-US" dirty="0"/>
+              <a:t> Vectors </a:t>
+            </a:r>
+            <a:r>
+              <a:rPr lang="en-US" dirty="0">
+                <a:sym typeface="Wingdings" panose="05000000000000000000" pitchFamily="2" charset="2"/>
+              </a:rPr>
+              <a:t></a:t>
+            </a:r>
+            <a:r>
+              <a:rPr lang="en-US" dirty="0"/>
+              <a:t> Model Input</a:t>
+            </a:r>
+          </a:p>
+        </p:txBody>
+      </p:sp>
+    </p:spTree>
+    <p:extLst>
+      <p:ext uri="{BB962C8B-B14F-4D97-AF65-F5344CB8AC3E}">
+        <p14:creationId xmlns:p14="http://schemas.microsoft.com/office/powerpoint/2010/main" val="2628818209"/>
+      </p:ext>
+    </p:extLst>
+  </p:cSld>
+  <p:clrMapOvr>
+    <a:masterClrMapping/>
+  </p:clrMapOvr>
+</p:sld>
+</file>
+
+<file path=ppt/slides/slide10.xml><?xml version="1.0" encoding="utf-8"?>
+<p:sld xmlns:a="http://schemas.openxmlformats.org/drawingml/2006/main" xmlns:r="http://schemas.openxmlformats.org/officeDocument/2006/relationships" xmlns:p="http://schemas.openxmlformats.org/presentationml/2006/main">
+  <p:cSld>
+    <p:spTree>
+      <p:nvGrpSpPr>
+        <p:cNvPr id="1" name=""/>
+        <p:cNvGrpSpPr/>
+        <p:nvPr/>
+      </p:nvGrpSpPr>
+      <p:grpSpPr>
+        <a:xfrm>
+          <a:off x="0" y="0"/>
+          <a:ext cx="0" cy="0"/>
+          <a:chOff x="0" y="0"/>
+          <a:chExt cx="0" cy="0"/>
+        </a:xfrm>
+      </p:grpSpPr>
+      <p:sp>
+        <p:nvSpPr>
+          <p:cNvPr id="2" name="TextBox 1"/>
+          <p:cNvSpPr txBox="1"/>
+          <p:nvPr/>
+        </p:nvSpPr>
+        <p:spPr>
+          <a:xfrm>
+            <a:off x="502920" y="320040"/>
+            <a:ext cx="11247120" cy="548640"/>
+          </a:xfrm>
+          <a:prstGeom prst="rect">
+            <a:avLst/>
+          </a:prstGeom>
+          <a:noFill/>
+        </p:spPr>
+        <p:txBody>
+          <a:bodyPr wrap="none">
+            <a:spAutoFit/>
+          </a:bodyPr>
+          <a:lstStyle/>
+          <a:p>
+            <a:pPr>
+              <a:defRPr sz="3000" b="1">
+                <a:solidFill>
+                  <a:srgbClr val="0B2F5B"/>
+                </a:solidFill>
+              </a:defRPr>
+            </a:pPr>
+            <a:r>
+              <a:t>Live Demo Path</a:t>
+            </a:r>
+          </a:p>
+        </p:txBody>
+      </p:sp>
+      <p:sp>
+        <p:nvSpPr>
+          <p:cNvPr id="3" name="TextBox 2"/>
+          <p:cNvSpPr txBox="1"/>
+          <p:nvPr/>
+        </p:nvSpPr>
+        <p:spPr>
+          <a:xfrm>
+            <a:off x="530352" y="868680"/>
+            <a:ext cx="10972800" cy="365760"/>
+          </a:xfrm>
+          <a:prstGeom prst="rect">
+            <a:avLst/>
+          </a:prstGeom>
+          <a:noFill/>
+        </p:spPr>
+        <p:txBody>
+          <a:bodyPr wrap="none">
+            <a:spAutoFit/>
+          </a:bodyPr>
+          <a:lstStyle/>
+          <a:p>
+            <a:pPr>
+              <a:defRPr sz="1600">
+                <a:solidFill>
+                  <a:srgbClr val="52616B"/>
+                </a:solidFill>
+              </a:defRPr>
+            </a:pPr>
+            <a:r>
+              <a:t>VS Code runs the demos</a:t>
+            </a:r>
+          </a:p>
+        </p:txBody>
+      </p:sp>
+      <p:sp>
+        <p:nvSpPr>
+          <p:cNvPr id="4" name="Rounded Rectangle 3"/>
+          <p:cNvSpPr/>
+          <p:nvPr/>
+        </p:nvSpPr>
+        <p:spPr>
+          <a:xfrm>
+            <a:off x="914400" y="1188720"/>
+            <a:ext cx="10424160" cy="1280160"/>
+          </a:xfrm>
+          <a:prstGeom prst="roundRect">
+            <a:avLst/>
+          </a:prstGeom>
+          <a:solidFill>
+            <a:srgbClr val="F5F8FC"/>
+          </a:solidFill>
+          <a:ln>
+            <a:solidFill>
+              <a:srgbClr val="BED2E6"/>
+            </a:solidFill>
+          </a:ln>
+        </p:spPr>
+        <p:style>
+          <a:lnRef idx="1">
+            <a:schemeClr val="accent1"/>
+          </a:lnRef>
+          <a:fillRef idx="3">
+            <a:schemeClr val="accent1"/>
+          </a:fillRef>
+          <a:effectRef idx="2">
+            <a:schemeClr val="accent1"/>
+          </a:effectRef>
+          <a:fontRef idx="minor">
+            <a:schemeClr val="lt1"/>
+          </a:fontRef>
+        </p:style>
+        <p:txBody>
+          <a:bodyPr lIns="182880" tIns="109728" rIns="182880" rtlCol="0" anchor="ctr"/>
+          <a:lstStyle/>
+          <a:p>
+            <a:pPr algn="ctr">
+              <a:defRPr sz="2500">
+                <a:solidFill>
+                  <a:srgbClr val="172B4D"/>
+                </a:solidFill>
+                <a:latin typeface="Consolas"/>
+              </a:defRPr>
+            </a:pPr>
+            <a:r>
+              <a:t>Sentence → Tokens → Token IDs → Embedding Table → Vector Matrix</a:t>
+            </a:r>
+          </a:p>
+        </p:txBody>
+      </p:sp>
+      <p:sp>
+        <p:nvSpPr>
+          <p:cNvPr id="5" name="Rounded Rectangle 4"/>
+          <p:cNvSpPr/>
+          <p:nvPr/>
+        </p:nvSpPr>
+        <p:spPr>
+          <a:xfrm>
+            <a:off x="914400" y="2834640"/>
+            <a:ext cx="3200400" cy="1417320"/>
+          </a:xfrm>
+          <a:prstGeom prst="roundRect">
+            <a:avLst/>
+          </a:prstGeom>
+          <a:solidFill>
+            <a:srgbClr val="FFFFFF"/>
+          </a:solidFill>
+          <a:ln w="19050">
+            <a:solidFill>
+              <a:srgbClr val="0B5CAD"/>
+            </a:solidFill>
+          </a:ln>
+        </p:spPr>
+        <p:style>
+          <a:lnRef idx="1">
+            <a:schemeClr val="accent1"/>
+          </a:lnRef>
+          <a:fillRef idx="3">
+            <a:schemeClr val="accent1"/>
+          </a:fillRef>
+          <a:effectRef idx="2">
+            <a:schemeClr val="accent1"/>
+          </a:effectRef>
+          <a:fontRef idx="minor">
+            <a:schemeClr val="lt1"/>
+          </a:fontRef>
+        </p:style>
+        <p:txBody>
+          <a:bodyPr lIns="137160" tIns="91440" rIns="137160" rtlCol="0" anchor="ctr"/>
+          <a:lstStyle/>
+          <a:p>
+            <a:pPr algn="ctr">
+              <a:defRPr sz="1800" b="1">
+                <a:solidFill>
+                  <a:srgbClr val="0B2F5B"/>
+                </a:solidFill>
+              </a:defRPr>
+            </a:pPr>
+            <a:r>
+              <a:t>Demo 1</a:t>
+            </a:r>
+          </a:p>
+          <a:p>
+            <a:pPr>
+              <a:spcAft>
+                <a:spcPts val="200"/>
+              </a:spcAft>
+              <a:defRPr sz="1700">
+                <a:solidFill>
+                  <a:srgbClr val="172B4D"/>
+                </a:solidFill>
+              </a:defRPr>
+            </a:pPr>
+            <a:r>
+              <a:t>token_demo.py</a:t>
+            </a:r>
+          </a:p>
+          <a:p>
+            <a:pPr>
+              <a:spcAft>
+                <a:spcPts val="200"/>
+              </a:spcAft>
+              <a:defRPr sz="1700">
+                <a:solidFill>
+                  <a:srgbClr val="172B4D"/>
+                </a:solidFill>
+              </a:defRPr>
+            </a:pPr>
+            <a:r>
+              <a:t>Terminal pipeline</a:t>
+            </a:r>
+          </a:p>
+        </p:txBody>
+      </p:sp>
+      <p:sp>
+        <p:nvSpPr>
+          <p:cNvPr id="6" name="Rounded Rectangle 5"/>
+          <p:cNvSpPr/>
+          <p:nvPr/>
+        </p:nvSpPr>
+        <p:spPr>
+          <a:xfrm>
+            <a:off x="4480560" y="2834640"/>
+            <a:ext cx="3200400" cy="1417320"/>
+          </a:xfrm>
+          <a:prstGeom prst="roundRect">
+            <a:avLst/>
+          </a:prstGeom>
+          <a:solidFill>
+            <a:srgbClr val="FFFFFF"/>
+          </a:solidFill>
+          <a:ln w="19050">
+            <a:solidFill>
+              <a:srgbClr val="0B5CAD"/>
+            </a:solidFill>
+          </a:ln>
+        </p:spPr>
+        <p:style>
+          <a:lnRef idx="1">
+            <a:schemeClr val="accent1"/>
+          </a:lnRef>
+          <a:fillRef idx="3">
+            <a:schemeClr val="accent1"/>
+          </a:fillRef>
+          <a:effectRef idx="2">
+            <a:schemeClr val="accent1"/>
+          </a:effectRef>
+          <a:fontRef idx="minor">
+            <a:schemeClr val="lt1"/>
+          </a:fontRef>
+        </p:style>
+        <p:txBody>
+          <a:bodyPr lIns="137160" tIns="91440" rIns="137160" rtlCol="0" anchor="ctr"/>
+          <a:lstStyle/>
+          <a:p>
+            <a:pPr algn="ctr">
+              <a:defRPr sz="1800" b="1">
+                <a:solidFill>
+                  <a:srgbClr val="0B2F5B"/>
+                </a:solidFill>
+              </a:defRPr>
+            </a:pPr>
+            <a:r>
+              <a:t>Demo 2</a:t>
+            </a:r>
+          </a:p>
+          <a:p>
+            <a:pPr>
+              <a:spcAft>
+                <a:spcPts val="200"/>
+              </a:spcAft>
+              <a:defRPr sz="1700">
+                <a:solidFill>
+                  <a:srgbClr val="172B4D"/>
+                </a:solidFill>
+              </a:defRPr>
+            </a:pPr>
+            <a:r>
+              <a:t>token_streamlit_app.py</a:t>
+            </a:r>
+          </a:p>
+          <a:p>
+            <a:pPr>
+              <a:spcAft>
+                <a:spcPts val="200"/>
+              </a:spcAft>
+              <a:defRPr sz="1700">
+                <a:solidFill>
+                  <a:srgbClr val="172B4D"/>
+                </a:solidFill>
+              </a:defRPr>
+            </a:pPr>
+            <a:r>
+              <a:t>Visual table</a:t>
+            </a:r>
+          </a:p>
+        </p:txBody>
+      </p:sp>
+      <p:sp>
+        <p:nvSpPr>
+          <p:cNvPr id="7" name="Rounded Rectangle 6"/>
+          <p:cNvSpPr/>
+          <p:nvPr/>
+        </p:nvSpPr>
+        <p:spPr>
+          <a:xfrm>
+            <a:off x="8046720" y="2834640"/>
+            <a:ext cx="3200400" cy="1417320"/>
+          </a:xfrm>
+          <a:prstGeom prst="roundRect">
+            <a:avLst/>
+          </a:prstGeom>
+          <a:solidFill>
+            <a:srgbClr val="FFFFFF"/>
+          </a:solidFill>
+          <a:ln w="19050">
+            <a:solidFill>
+              <a:srgbClr val="0B5CAD"/>
+            </a:solidFill>
+          </a:ln>
+        </p:spPr>
+        <p:style>
+          <a:lnRef idx="1">
+            <a:schemeClr val="accent1"/>
+          </a:lnRef>
+          <a:fillRef idx="3">
+            <a:schemeClr val="accent1"/>
+          </a:fillRef>
+          <a:effectRef idx="2">
+            <a:schemeClr val="accent1"/>
+          </a:effectRef>
+          <a:fontRef idx="minor">
+            <a:schemeClr val="lt1"/>
+          </a:fontRef>
+        </p:style>
+        <p:txBody>
+          <a:bodyPr lIns="137160" tIns="91440" rIns="137160" rtlCol="0" anchor="ctr"/>
+          <a:lstStyle/>
+          <a:p>
+            <a:pPr algn="ctr">
+              <a:defRPr sz="1800" b="1">
+                <a:solidFill>
+                  <a:srgbClr val="0B2F5B"/>
+                </a:solidFill>
+              </a:defRPr>
+            </a:pPr>
+            <a:r>
+              <a:t>Demo 3</a:t>
+            </a:r>
+          </a:p>
+          <a:p>
+            <a:pPr>
+              <a:spcAft>
+                <a:spcPts val="200"/>
+              </a:spcAft>
+              <a:defRPr sz="1700">
+                <a:solidFill>
+                  <a:srgbClr val="172B4D"/>
+                </a:solidFill>
+              </a:defRPr>
+            </a:pPr>
+            <a:r>
+              <a:t>embedding_lookup_linear_algebra_demo.py</a:t>
+            </a:r>
+          </a:p>
+          <a:p>
+            <a:pPr>
+              <a:spcAft>
+                <a:spcPts val="200"/>
+              </a:spcAft>
+              <a:defRPr sz="1700">
+                <a:solidFill>
+                  <a:srgbClr val="172B4D"/>
+                </a:solidFill>
+              </a:defRPr>
+            </a:pPr>
+            <a:r>
+              <a:t>Lookup vs matrix multiply</a:t>
+            </a:r>
+          </a:p>
+        </p:txBody>
+      </p:sp>
+      <p:sp>
+        <p:nvSpPr>
+          <p:cNvPr id="8" name="TextBox 7"/>
+          <p:cNvSpPr txBox="1"/>
+          <p:nvPr/>
+        </p:nvSpPr>
+        <p:spPr>
+          <a:xfrm>
+            <a:off x="320040" y="6473952"/>
+            <a:ext cx="11521440" cy="228600"/>
+          </a:xfrm>
+          <a:prstGeom prst="rect">
+            <a:avLst/>
+          </a:prstGeom>
+          <a:noFill/>
+        </p:spPr>
+        <p:txBody>
+          <a:bodyPr wrap="none">
+            <a:spAutoFit/>
+          </a:bodyPr>
+          <a:lstStyle/>
+          <a:p>
+            <a:pPr>
+              <a:defRPr sz="900">
+                <a:solidFill>
+                  <a:srgbClr val="52616B"/>
+                </a:solidFill>
+              </a:defRPr>
+            </a:pPr>
+            <a:r>
+              <a:t>MAGPAI Session 1 - Tokens - v1.0 | javaboy-vk | 2026-05-22 | Slide 9</a:t>
+            </a:r>
+          </a:p>
+        </p:txBody>
+      </p:sp>
+    </p:spTree>
+  </p:cSld>
+  <p:clrMapOvr>
+    <a:masterClrMapping/>
+  </p:clrMapOvr>
+</p:sld>
+</file>
+
+<file path=ppt/slides/slide11.xml><?xml version="1.0" encoding="utf-8"?>
+<p:sld xmlns:a="http://schemas.openxmlformats.org/drawingml/2006/main" xmlns:r="http://schemas.openxmlformats.org/officeDocument/2006/relationships" xmlns:p="http://schemas.openxmlformats.org/presentationml/2006/main">
+  <p:cSld>
+    <p:spTree>
+      <p:nvGrpSpPr>
+        <p:cNvPr id="1" name=""/>
+        <p:cNvGrpSpPr/>
+        <p:nvPr/>
+      </p:nvGrpSpPr>
+      <p:grpSpPr>
+        <a:xfrm>
+          <a:off x="0" y="0"/>
+          <a:ext cx="0" cy="0"/>
+          <a:chOff x="0" y="0"/>
+          <a:chExt cx="0" cy="0"/>
+        </a:xfrm>
+      </p:grpSpPr>
+      <p:sp>
+        <p:nvSpPr>
+          <p:cNvPr id="2" name="TextBox 1"/>
+          <p:cNvSpPr txBox="1"/>
+          <p:nvPr/>
+        </p:nvSpPr>
+        <p:spPr>
+          <a:xfrm>
+            <a:off x="502920" y="320040"/>
+            <a:ext cx="11247120" cy="548640"/>
+          </a:xfrm>
+          <a:prstGeom prst="rect">
+            <a:avLst/>
+          </a:prstGeom>
+          <a:noFill/>
+        </p:spPr>
+        <p:txBody>
+          <a:bodyPr wrap="none">
+            <a:spAutoFit/>
+          </a:bodyPr>
+          <a:lstStyle/>
+          <a:p>
+            <a:pPr>
+              <a:defRPr sz="3000" b="1">
+                <a:solidFill>
+                  <a:srgbClr val="0B2F5B"/>
+                </a:solidFill>
+              </a:defRPr>
+            </a:pPr>
+            <a:r>
+              <a:t>Audience Takeaway</a:t>
+            </a:r>
+          </a:p>
+        </p:txBody>
+      </p:sp>
+      <p:sp>
+        <p:nvSpPr>
+          <p:cNvPr id="3" name="TextBox 2"/>
+          <p:cNvSpPr txBox="1"/>
+          <p:nvPr/>
+        </p:nvSpPr>
+        <p:spPr>
+          <a:xfrm>
+            <a:off x="530352" y="868680"/>
+            <a:ext cx="10972800" cy="365760"/>
+          </a:xfrm>
+          <a:prstGeom prst="rect">
+            <a:avLst/>
+          </a:prstGeom>
+          <a:noFill/>
+        </p:spPr>
+        <p:txBody>
+          <a:bodyPr wrap="none">
+            <a:spAutoFit/>
+          </a:bodyPr>
+          <a:lstStyle/>
+          <a:p>
+            <a:pPr>
+              <a:defRPr sz="1600">
+                <a:solidFill>
+                  <a:srgbClr val="52616B"/>
+                </a:solidFill>
+              </a:defRPr>
+            </a:pPr>
+            <a:r>
+              <a:t>The first stable mental model</a:t>
+            </a:r>
+          </a:p>
+        </p:txBody>
+      </p:sp>
+      <p:sp>
+        <p:nvSpPr>
+          <p:cNvPr id="4" name="Rounded Rectangle 3"/>
+          <p:cNvSpPr/>
+          <p:nvPr/>
+        </p:nvSpPr>
+        <p:spPr>
+          <a:xfrm>
+            <a:off x="914400" y="1463040"/>
+            <a:ext cx="10424160" cy="1097280"/>
+          </a:xfrm>
+          <a:prstGeom prst="roundRect">
+            <a:avLst/>
+          </a:prstGeom>
+          <a:solidFill>
+            <a:srgbClr val="F5F8FC"/>
+          </a:solidFill>
+          <a:ln>
+            <a:solidFill>
+              <a:srgbClr val="BED2E6"/>
+            </a:solidFill>
+          </a:ln>
+        </p:spPr>
+        <p:style>
+          <a:lnRef idx="1">
+            <a:schemeClr val="accent1"/>
+          </a:lnRef>
+          <a:fillRef idx="3">
+            <a:schemeClr val="accent1"/>
+          </a:fillRef>
+          <a:effectRef idx="2">
+            <a:schemeClr val="accent1"/>
+          </a:effectRef>
+          <a:fontRef idx="minor">
+            <a:schemeClr val="lt1"/>
+          </a:fontRef>
+        </p:style>
+        <p:txBody>
+          <a:bodyPr lIns="182880" tIns="109728" rIns="182880" rtlCol="0" anchor="ctr"/>
+          <a:lstStyle/>
+          <a:p>
+            <a:pPr algn="ctr">
+              <a:defRPr sz="2700">
+                <a:solidFill>
+                  <a:srgbClr val="172B4D"/>
+                </a:solidFill>
+                <a:latin typeface="Consolas"/>
+              </a:defRPr>
+            </a:pPr>
+            <a:r>
+              <a:t>A model never sees “sales” as a word.</a:t>
+            </a:r>
+            <a:br/>
+            <a:r>
+              <a:t>It sees a numeric pattern.</a:t>
+            </a:r>
+          </a:p>
+        </p:txBody>
+      </p:sp>
+      <p:sp>
+        <p:nvSpPr>
+          <p:cNvPr id="5" name="Rounded Rectangle 4"/>
+          <p:cNvSpPr/>
+          <p:nvPr/>
+        </p:nvSpPr>
+        <p:spPr>
+          <a:xfrm>
+            <a:off x="914400" y="2971800"/>
+            <a:ext cx="10424160" cy="1600200"/>
+          </a:xfrm>
+          <a:prstGeom prst="roundRect">
+            <a:avLst/>
+          </a:prstGeom>
+          <a:solidFill>
+            <a:srgbClr val="F5F8FC"/>
+          </a:solidFill>
+          <a:ln>
+            <a:solidFill>
+              <a:srgbClr val="BED2E6"/>
+            </a:solidFill>
+          </a:ln>
+        </p:spPr>
+        <p:style>
+          <a:lnRef idx="1">
+            <a:schemeClr val="accent1"/>
+          </a:lnRef>
+          <a:fillRef idx="3">
+            <a:schemeClr val="accent1"/>
+          </a:fillRef>
+          <a:effectRef idx="2">
+            <a:schemeClr val="accent1"/>
+          </a:effectRef>
+          <a:fontRef idx="minor">
+            <a:schemeClr val="lt1"/>
+          </a:fontRef>
+        </p:style>
+        <p:txBody>
+          <a:bodyPr lIns="182880" tIns="109728" rIns="182880" rtlCol="0" anchor="ctr"/>
+          <a:lstStyle/>
+          <a:p>
+            <a:pPr algn="ctr">
+              <a:defRPr sz="2200">
+                <a:solidFill>
+                  <a:srgbClr val="172B4D"/>
+                </a:solidFill>
+                <a:latin typeface="Consolas"/>
+              </a:defRPr>
+            </a:pPr>
+            <a:r>
+              <a:rPr dirty="0"/>
+              <a:t>Text becomes tokens.</a:t>
+            </a:r>
+            <a:br>
+              <a:rPr dirty="0"/>
+            </a:br>
+            <a:r>
+              <a:rPr dirty="0"/>
+              <a:t>Tokens become IDs.</a:t>
+            </a:r>
+            <a:br>
+              <a:rPr dirty="0"/>
+            </a:br>
+            <a:r>
+              <a:rPr dirty="0"/>
+              <a:t>IDs become vectors.</a:t>
+            </a:r>
+            <a:br>
+              <a:rPr dirty="0"/>
+            </a:br>
+            <a:r>
+              <a:rPr dirty="0"/>
+              <a:t>Vectors become </a:t>
+            </a:r>
+            <a:r>
+              <a:rPr lang="en-US" dirty="0"/>
+              <a:t>input to the NN </a:t>
+            </a:r>
+            <a:r>
+              <a:rPr dirty="0"/>
+              <a:t>model.</a:t>
+            </a:r>
+          </a:p>
+        </p:txBody>
+      </p:sp>
+      <p:sp>
+        <p:nvSpPr>
+          <p:cNvPr id="6" name="TextBox 5"/>
+          <p:cNvSpPr txBox="1"/>
+          <p:nvPr/>
+        </p:nvSpPr>
+        <p:spPr>
+          <a:xfrm>
+            <a:off x="320040" y="6473952"/>
+            <a:ext cx="11521440" cy="228600"/>
+          </a:xfrm>
+          <a:prstGeom prst="rect">
+            <a:avLst/>
+          </a:prstGeom>
+          <a:noFill/>
+        </p:spPr>
+        <p:txBody>
+          <a:bodyPr wrap="none">
+            <a:spAutoFit/>
+          </a:bodyPr>
+          <a:lstStyle/>
+          <a:p>
+            <a:pPr>
+              <a:defRPr sz="900">
+                <a:solidFill>
+                  <a:srgbClr val="52616B"/>
+                </a:solidFill>
+              </a:defRPr>
+            </a:pPr>
+            <a:r>
+              <a:t>MAGPAI Session 1 - Tokens - v1.0 | javaboy-vk | 2026-05-22 | Slide 10</a:t>
+            </a:r>
+          </a:p>
+        </p:txBody>
+      </p:sp>
+    </p:spTree>
+  </p:cSld>
+  <p:clrMapOvr>
+    <a:masterClrMapping/>
+  </p:clrMapOvr>
+</p:sld>
+</file>
+
+<file path=ppt/slides/slide2.xml><?xml version="1.0" encoding="utf-8"?>
+<p:sld xmlns:a="http://schemas.openxmlformats.org/drawingml/2006/main" xmlns:r="http://schemas.openxmlformats.org/officeDocument/2006/relationships" xmlns:p="http://schemas.openxmlformats.org/presentationml/2006/main">
   <p:cSld>
     <p:bg>
       <p:bgPr>
@@ -3104,7 +4001,14 @@
         <p:cNvGrpSpPr/>
         <p:nvPr/>
       </p:nvGrpSpPr>
-      <p:grpSpPr/>
+      <p:grpSpPr>
+        <a:xfrm>
+          <a:off x="0" y="0"/>
+          <a:ext cx="0" cy="0"/>
+          <a:chOff x="0" y="0"/>
+          <a:chExt cx="0" cy="0"/>
+        </a:xfrm>
+      </p:grpSpPr>
       <p:sp>
         <p:nvSpPr>
           <p:cNvPr id="2" name="TextBox 1"/>
@@ -3219,7 +4123,7 @@
         <p:spPr>
           <a:xfrm>
             <a:off x="2743200" y="3657600"/>
-            <a:ext cx="6675120" cy="1005840"/>
+            <a:ext cx="6889750" cy="1005840"/>
           </a:xfrm>
           <a:prstGeom prst="roundRect">
             <a:avLst/>
@@ -3248,7 +4152,7 @@
           </a:fontRef>
         </p:style>
         <p:txBody>
-          <a:bodyPr rtlCol="0" anchor="ctr" lIns="137160" rIns="137160" tIns="91440"/>
+          <a:bodyPr lIns="137160" tIns="91440" rIns="137160" rtlCol="0" anchor="ctr"/>
           <a:lstStyle/>
           <a:p>
             <a:pPr algn="ctr">
@@ -3322,8 +4226,8 @@
 </p:sld>
 </file>
 
-<file path=ppt/slides/slide10.xml><?xml version="1.0" encoding="utf-8"?>
-<p:sld xmlns:a="http://schemas.openxmlformats.org/drawingml/2006/main" xmlns:p="http://schemas.openxmlformats.org/presentationml/2006/main" xmlns:r="http://schemas.openxmlformats.org/officeDocument/2006/relationships">
+<file path=ppt/slides/slide3.xml><?xml version="1.0" encoding="utf-8"?>
+<p:sld xmlns:a="http://schemas.openxmlformats.org/drawingml/2006/main" xmlns:r="http://schemas.openxmlformats.org/officeDocument/2006/relationships" xmlns:p="http://schemas.openxmlformats.org/presentationml/2006/main">
   <p:cSld>
     <p:spTree>
       <p:nvGrpSpPr>
@@ -3331,7 +4235,14 @@
         <p:cNvGrpSpPr/>
         <p:nvPr/>
       </p:nvGrpSpPr>
-      <p:grpSpPr/>
+      <p:grpSpPr>
+        <a:xfrm>
+          <a:off x="0" y="0"/>
+          <a:ext cx="0" cy="0"/>
+          <a:chOff x="0" y="0"/>
+          <a:chExt cx="0" cy="0"/>
+        </a:xfrm>
+      </p:grpSpPr>
       <p:sp>
         <p:nvSpPr>
           <p:cNvPr id="2" name="TextBox 1"/>
@@ -3362,7 +4273,7 @@
               </a:defRPr>
             </a:pPr>
             <a:r>
-              <a:t>Audience Takeaway</a:t>
+              <a:t>The Big Idea</a:t>
             </a:r>
           </a:p>
         </p:txBody>
@@ -3397,7 +4308,7 @@
               </a:defRPr>
             </a:pPr>
             <a:r>
-              <a:t>The first stable mental model</a:t>
+              <a:t>People read words. AI models process numbers.</a:t>
             </a:r>
           </a:p>
         </p:txBody>
@@ -3410,8 +4321,8 @@
         </p:nvSpPr>
         <p:spPr>
           <a:xfrm>
-            <a:off x="914400" y="1463040"/>
-            <a:ext cx="10424160" cy="1097280"/>
+            <a:off x="914400" y="1828800"/>
+            <a:ext cx="10424160" cy="914400"/>
           </a:xfrm>
           <a:prstGeom prst="roundRect">
             <a:avLst/>
@@ -3440,11 +4351,11 @@
           </a:fontRef>
         </p:style>
         <p:txBody>
-          <a:bodyPr rtlCol="0" anchor="ctr" lIns="182880" rIns="182880" tIns="109728"/>
+          <a:bodyPr lIns="182880" tIns="109728" rIns="182880" rtlCol="0" anchor="ctr"/>
           <a:lstStyle/>
           <a:p>
             <a:pPr algn="ctr">
-              <a:defRPr sz="2700">
+              <a:defRPr sz="2600">
                 <a:solidFill>
                   <a:srgbClr val="172B4D"/>
                 </a:solidFill>
@@ -3452,11 +4363,7 @@
               </a:defRPr>
             </a:pPr>
             <a:r>
-              <a:t>A model never sees “sales” as a word.</a:t>
-            </a:r>
-            <a:br/>
-            <a:r>
-              <a:t>It sees a numeric pattern.</a:t>
+              <a:t>Text  →  Tokens  →  Token IDs  →  Vectors  →  Model</a:t>
             </a:r>
           </a:p>
         </p:txBody>
@@ -3469,8 +4376,276 @@
         </p:nvSpPr>
         <p:spPr>
           <a:xfrm>
-            <a:off x="914400" y="2971800"/>
-            <a:ext cx="10424160" cy="1600200"/>
+            <a:off x="914400" y="3383280"/>
+            <a:ext cx="4937760" cy="1280160"/>
+          </a:xfrm>
+          <a:prstGeom prst="roundRect">
+            <a:avLst/>
+          </a:prstGeom>
+          <a:solidFill>
+            <a:srgbClr val="EAF3FF"/>
+          </a:solidFill>
+          <a:ln w="19050">
+            <a:solidFill>
+              <a:srgbClr val="0B5CAD"/>
+            </a:solidFill>
+          </a:ln>
+        </p:spPr>
+        <p:style>
+          <a:lnRef idx="1">
+            <a:schemeClr val="accent1"/>
+          </a:lnRef>
+          <a:fillRef idx="3">
+            <a:schemeClr val="accent1"/>
+          </a:fillRef>
+          <a:effectRef idx="2">
+            <a:schemeClr val="accent1"/>
+          </a:effectRef>
+          <a:fontRef idx="minor">
+            <a:schemeClr val="lt1"/>
+          </a:fontRef>
+        </p:style>
+        <p:txBody>
+          <a:bodyPr lIns="137160" tIns="91440" rIns="137160" rtlCol="0" anchor="ctr"/>
+          <a:lstStyle/>
+          <a:p>
+            <a:pPr algn="ctr">
+              <a:defRPr sz="1900" b="1">
+                <a:solidFill>
+                  <a:srgbClr val="0B2F5B"/>
+                </a:solidFill>
+              </a:defRPr>
+            </a:pPr>
+            <a:r>
+              <a:t>Human view</a:t>
+            </a:r>
+          </a:p>
+          <a:p>
+            <a:pPr>
+              <a:spcAft>
+                <a:spcPts val="200"/>
+              </a:spcAft>
+              <a:defRPr sz="1800">
+                <a:solidFill>
+                  <a:srgbClr val="172B4D"/>
+                </a:solidFill>
+              </a:defRPr>
+            </a:pPr>
+            <a:r>
+              <a:t>We see words, grammar, context, and meaning.</a:t>
+            </a:r>
+          </a:p>
+        </p:txBody>
+      </p:sp>
+      <p:sp>
+        <p:nvSpPr>
+          <p:cNvPr id="6" name="Rounded Rectangle 5"/>
+          <p:cNvSpPr/>
+          <p:nvPr/>
+        </p:nvSpPr>
+        <p:spPr>
+          <a:xfrm>
+            <a:off x="6400800" y="3383280"/>
+            <a:ext cx="4937760" cy="1280160"/>
+          </a:xfrm>
+          <a:prstGeom prst="roundRect">
+            <a:avLst/>
+          </a:prstGeom>
+          <a:solidFill>
+            <a:srgbClr val="EAF3FF"/>
+          </a:solidFill>
+          <a:ln w="19050">
+            <a:solidFill>
+              <a:srgbClr val="0B5CAD"/>
+            </a:solidFill>
+          </a:ln>
+        </p:spPr>
+        <p:style>
+          <a:lnRef idx="1">
+            <a:schemeClr val="accent1"/>
+          </a:lnRef>
+          <a:fillRef idx="3">
+            <a:schemeClr val="accent1"/>
+          </a:fillRef>
+          <a:effectRef idx="2">
+            <a:schemeClr val="accent1"/>
+          </a:effectRef>
+          <a:fontRef idx="minor">
+            <a:schemeClr val="lt1"/>
+          </a:fontRef>
+        </p:style>
+        <p:txBody>
+          <a:bodyPr lIns="137160" tIns="91440" rIns="137160" rtlCol="0" anchor="ctr"/>
+          <a:lstStyle/>
+          <a:p>
+            <a:pPr algn="ctr">
+              <a:defRPr sz="1900" b="1">
+                <a:solidFill>
+                  <a:srgbClr val="0B2F5B"/>
+                </a:solidFill>
+              </a:defRPr>
+            </a:pPr>
+            <a:r>
+              <a:t>Model view</a:t>
+            </a:r>
+          </a:p>
+          <a:p>
+            <a:pPr>
+              <a:spcAft>
+                <a:spcPts val="200"/>
+              </a:spcAft>
+              <a:defRPr sz="1800">
+                <a:solidFill>
+                  <a:srgbClr val="172B4D"/>
+                </a:solidFill>
+              </a:defRPr>
+            </a:pPr>
+            <a:r>
+              <a:t>The model needs numbers before it can compute anything.</a:t>
+            </a:r>
+          </a:p>
+        </p:txBody>
+      </p:sp>
+      <p:sp>
+        <p:nvSpPr>
+          <p:cNvPr id="7" name="TextBox 6"/>
+          <p:cNvSpPr txBox="1"/>
+          <p:nvPr/>
+        </p:nvSpPr>
+        <p:spPr>
+          <a:xfrm>
+            <a:off x="320040" y="6473952"/>
+            <a:ext cx="11521440" cy="228600"/>
+          </a:xfrm>
+          <a:prstGeom prst="rect">
+            <a:avLst/>
+          </a:prstGeom>
+          <a:noFill/>
+        </p:spPr>
+        <p:txBody>
+          <a:bodyPr wrap="none">
+            <a:spAutoFit/>
+          </a:bodyPr>
+          <a:lstStyle/>
+          <a:p>
+            <a:pPr>
+              <a:defRPr sz="900">
+                <a:solidFill>
+                  <a:srgbClr val="52616B"/>
+                </a:solidFill>
+              </a:defRPr>
+            </a:pPr>
+            <a:r>
+              <a:t>MAGPAI Session 1 - Tokens - v1.0 | javaboy-vk | 2026-05-22 | Slide 2</a:t>
+            </a:r>
+          </a:p>
+        </p:txBody>
+      </p:sp>
+    </p:spTree>
+  </p:cSld>
+  <p:clrMapOvr>
+    <a:masterClrMapping/>
+  </p:clrMapOvr>
+</p:sld>
+</file>
+
+<file path=ppt/slides/slide4.xml><?xml version="1.0" encoding="utf-8"?>
+<p:sld xmlns:a="http://schemas.openxmlformats.org/drawingml/2006/main" xmlns:r="http://schemas.openxmlformats.org/officeDocument/2006/relationships" xmlns:p="http://schemas.openxmlformats.org/presentationml/2006/main">
+  <p:cSld>
+    <p:spTree>
+      <p:nvGrpSpPr>
+        <p:cNvPr id="1" name=""/>
+        <p:cNvGrpSpPr/>
+        <p:nvPr/>
+      </p:nvGrpSpPr>
+      <p:grpSpPr>
+        <a:xfrm>
+          <a:off x="0" y="0"/>
+          <a:ext cx="0" cy="0"/>
+          <a:chOff x="0" y="0"/>
+          <a:chExt cx="0" cy="0"/>
+        </a:xfrm>
+      </p:grpSpPr>
+      <p:sp>
+        <p:nvSpPr>
+          <p:cNvPr id="2" name="TextBox 1"/>
+          <p:cNvSpPr txBox="1"/>
+          <p:nvPr/>
+        </p:nvSpPr>
+        <p:spPr>
+          <a:xfrm>
+            <a:off x="502920" y="320040"/>
+            <a:ext cx="11247120" cy="548640"/>
+          </a:xfrm>
+          <a:prstGeom prst="rect">
+            <a:avLst/>
+          </a:prstGeom>
+          <a:noFill/>
+        </p:spPr>
+        <p:txBody>
+          <a:bodyPr wrap="none">
+            <a:spAutoFit/>
+          </a:bodyPr>
+          <a:lstStyle/>
+          <a:p>
+            <a:pPr>
+              <a:defRPr sz="3000" b="1">
+                <a:solidFill>
+                  <a:srgbClr val="0B2F5B"/>
+                </a:solidFill>
+              </a:defRPr>
+            </a:pPr>
+            <a:r>
+              <a:t>Starting Sentence</a:t>
+            </a:r>
+          </a:p>
+        </p:txBody>
+      </p:sp>
+      <p:sp>
+        <p:nvSpPr>
+          <p:cNvPr id="3" name="TextBox 2"/>
+          <p:cNvSpPr txBox="1"/>
+          <p:nvPr/>
+        </p:nvSpPr>
+        <p:spPr>
+          <a:xfrm>
+            <a:off x="530352" y="868680"/>
+            <a:ext cx="10972800" cy="365760"/>
+          </a:xfrm>
+          <a:prstGeom prst="rect">
+            <a:avLst/>
+          </a:prstGeom>
+          <a:noFill/>
+        </p:spPr>
+        <p:txBody>
+          <a:bodyPr wrap="none">
+            <a:spAutoFit/>
+          </a:bodyPr>
+          <a:lstStyle/>
+          <a:p>
+            <a:pPr>
+              <a:defRPr sz="1600">
+                <a:solidFill>
+                  <a:srgbClr val="52616B"/>
+                </a:solidFill>
+              </a:defRPr>
+            </a:pPr>
+            <a:r>
+              <a:t>A simple business statement</a:t>
+            </a:r>
+          </a:p>
+        </p:txBody>
+      </p:sp>
+      <p:sp>
+        <p:nvSpPr>
+          <p:cNvPr id="4" name="Rounded Rectangle 3"/>
+          <p:cNvSpPr/>
+          <p:nvPr/>
+        </p:nvSpPr>
+        <p:spPr>
+          <a:xfrm>
+            <a:off x="1005840" y="1737360"/>
+            <a:ext cx="10149840" cy="914400"/>
           </a:xfrm>
           <a:prstGeom prst="roundRect">
             <a:avLst/>
@@ -3499,11 +4674,11 @@
           </a:fontRef>
         </p:style>
         <p:txBody>
-          <a:bodyPr rtlCol="0" anchor="ctr" lIns="182880" rIns="182880" tIns="109728"/>
+          <a:bodyPr lIns="182880" tIns="109728" rIns="182880" rtlCol="0" anchor="ctr"/>
           <a:lstStyle/>
           <a:p>
             <a:pPr algn="ctr">
-              <a:defRPr sz="2200">
+              <a:defRPr sz="3000">
                 <a:solidFill>
                   <a:srgbClr val="172B4D"/>
                 </a:solidFill>
@@ -3511,19 +4686,76 @@
               </a:defRPr>
             </a:pPr>
             <a:r>
-              <a:t>Text becomes tokens.</a:t>
-            </a:r>
-            <a:br/>
-            <a:r>
-              <a:t>Tokens become IDs.</a:t>
-            </a:r>
-            <a:br/>
-            <a:r>
-              <a:t>IDs become vectors.</a:t>
-            </a:r>
-            <a:br/>
-            <a:r>
-              <a:t>Vectors become model input.</a:t>
+              <a:t>"Sales are up in Chicago"</a:t>
+            </a:r>
+          </a:p>
+        </p:txBody>
+      </p:sp>
+      <p:sp>
+        <p:nvSpPr>
+          <p:cNvPr id="5" name="Rounded Rectangle 4"/>
+          <p:cNvSpPr/>
+          <p:nvPr/>
+        </p:nvSpPr>
+        <p:spPr>
+          <a:xfrm>
+            <a:off x="1005840" y="3108960"/>
+            <a:ext cx="10149840" cy="1463040"/>
+          </a:xfrm>
+          <a:prstGeom prst="roundRect">
+            <a:avLst/>
+          </a:prstGeom>
+          <a:solidFill>
+            <a:srgbClr val="FFFFFF"/>
+          </a:solidFill>
+          <a:ln w="19050">
+            <a:solidFill>
+              <a:srgbClr val="0B5CAD"/>
+            </a:solidFill>
+          </a:ln>
+        </p:spPr>
+        <p:style>
+          <a:lnRef idx="1">
+            <a:schemeClr val="accent1"/>
+          </a:lnRef>
+          <a:fillRef idx="3">
+            <a:schemeClr val="accent1"/>
+          </a:fillRef>
+          <a:effectRef idx="2">
+            <a:schemeClr val="accent1"/>
+          </a:effectRef>
+          <a:fontRef idx="minor">
+            <a:schemeClr val="lt1"/>
+          </a:fontRef>
+        </p:style>
+        <p:txBody>
+          <a:bodyPr lIns="137160" tIns="91440" rIns="137160" rtlCol="0" anchor="ctr"/>
+          <a:lstStyle/>
+          <a:p>
+            <a:pPr algn="ctr">
+              <a:defRPr sz="1900" b="1">
+                <a:solidFill>
+                  <a:srgbClr val="0B2F5B"/>
+                </a:solidFill>
+              </a:defRPr>
+            </a:pPr>
+            <a:r>
+              <a:t>Teaching point</a:t>
+            </a:r>
+          </a:p>
+          <a:p>
+            <a:pPr>
+              <a:spcAft>
+                <a:spcPts val="200"/>
+              </a:spcAft>
+              <a:defRPr sz="1800">
+                <a:solidFill>
+                  <a:srgbClr val="172B4D"/>
+                </a:solidFill>
+              </a:defRPr>
+            </a:pPr>
+            <a:r>
+              <a:t>This looks simple to us, but the model cannot process this raw English sentence directly. It first has to be converted into a numeric representation.</a:t>
             </a:r>
           </a:p>
         </p:txBody>
@@ -3558,7 +4790,7 @@
               </a:defRPr>
             </a:pPr>
             <a:r>
-              <a:t>MAGPAI Session 1 - Tokens - v1.0 | javaboy-vk | 2026-05-22 | Slide 10</a:t>
+              <a:t>MAGPAI Session 1 - Tokens - v1.0 | javaboy-vk | 2026-05-22 | Slide 3</a:t>
             </a:r>
           </a:p>
         </p:txBody>
@@ -3571,8 +4803,8 @@
 </p:sld>
 </file>
 
-<file path=ppt/slides/slide2.xml><?xml version="1.0" encoding="utf-8"?>
-<p:sld xmlns:a="http://schemas.openxmlformats.org/drawingml/2006/main" xmlns:p="http://schemas.openxmlformats.org/presentationml/2006/main" xmlns:r="http://schemas.openxmlformats.org/officeDocument/2006/relationships">
+<file path=ppt/slides/slide5.xml><?xml version="1.0" encoding="utf-8"?>
+<p:sld xmlns:a="http://schemas.openxmlformats.org/drawingml/2006/main" xmlns:r="http://schemas.openxmlformats.org/officeDocument/2006/relationships" xmlns:p="http://schemas.openxmlformats.org/presentationml/2006/main">
   <p:cSld>
     <p:spTree>
       <p:nvGrpSpPr>
@@ -3580,7 +4812,14 @@
         <p:cNvGrpSpPr/>
         <p:nvPr/>
       </p:nvGrpSpPr>
-      <p:grpSpPr/>
+      <p:grpSpPr>
+        <a:xfrm>
+          <a:off x="0" y="0"/>
+          <a:ext cx="0" cy="0"/>
+          <a:chOff x="0" y="0"/>
+          <a:chExt cx="0" cy="0"/>
+        </a:xfrm>
+      </p:grpSpPr>
       <p:sp>
         <p:nvSpPr>
           <p:cNvPr id="2" name="TextBox 1"/>
@@ -3611,7 +4850,7 @@
               </a:defRPr>
             </a:pPr>
             <a:r>
-              <a:t>The Big Idea</a:t>
+              <a:t>Tokenizer Step 1 - Tokens</a:t>
             </a:r>
           </a:p>
         </p:txBody>
@@ -3646,7 +4885,7 @@
               </a:defRPr>
             </a:pPr>
             <a:r>
-              <a:t>People read words. AI models process numbers.</a:t>
+              <a:t>Break the sentence into known pieces</a:t>
             </a:r>
           </a:p>
         </p:txBody>
@@ -3659,8 +4898,8 @@
         </p:nvSpPr>
         <p:spPr>
           <a:xfrm>
-            <a:off x="914400" y="1828800"/>
-            <a:ext cx="10424160" cy="914400"/>
+            <a:off x="914400" y="1463040"/>
+            <a:ext cx="10424160" cy="1097280"/>
           </a:xfrm>
           <a:prstGeom prst="roundRect">
             <a:avLst/>
@@ -3689,7 +4928,7 @@
           </a:fontRef>
         </p:style>
         <p:txBody>
-          <a:bodyPr rtlCol="0" anchor="ctr" lIns="182880" rIns="182880" tIns="109728"/>
+          <a:bodyPr lIns="182880" tIns="109728" rIns="182880" rtlCol="0" anchor="ctr"/>
           <a:lstStyle/>
           <a:p>
             <a:pPr algn="ctr">
@@ -3701,7 +4940,7 @@
               </a:defRPr>
             </a:pPr>
             <a:r>
-              <a:t>Text  →  Tokens  →  Token IDs  →  Vectors  →  Model</a:t>
+              <a:t>["sales", "are", "up", "in", "chicago"]</a:t>
             </a:r>
           </a:p>
         </p:txBody>
@@ -3714,8 +4953,8 @@
         </p:nvSpPr>
         <p:spPr>
           <a:xfrm>
-            <a:off x="914400" y="3383280"/>
-            <a:ext cx="4937760" cy="1280160"/>
+            <a:off x="914400" y="2971800"/>
+            <a:ext cx="4846320" cy="1554480"/>
           </a:xfrm>
           <a:prstGeom prst="roundRect">
             <a:avLst/>
@@ -3744,18 +4983,18 @@
           </a:fontRef>
         </p:style>
         <p:txBody>
-          <a:bodyPr rtlCol="0" anchor="ctr" lIns="137160" rIns="137160" tIns="91440"/>
+          <a:bodyPr lIns="137160" tIns="91440" rIns="137160" rtlCol="0" anchor="ctr"/>
           <a:lstStyle/>
           <a:p>
             <a:pPr algn="ctr">
-              <a:defRPr sz="1900" b="1">
+              <a:defRPr sz="1800" b="1">
                 <a:solidFill>
                   <a:srgbClr val="0B2F5B"/>
                 </a:solidFill>
               </a:defRPr>
             </a:pPr>
             <a:r>
-              <a:t>Human view</a:t>
+              <a:t>Demo simplification</a:t>
             </a:r>
           </a:p>
           <a:p>
@@ -3763,14 +5002,14 @@
               <a:spcAft>
                 <a:spcPts val="200"/>
               </a:spcAft>
-              <a:defRPr sz="1800">
+              <a:defRPr sz="1700">
                 <a:solidFill>
                   <a:srgbClr val="172B4D"/>
                 </a:solidFill>
               </a:defRPr>
             </a:pPr>
             <a:r>
-              <a:t>We see words, grammar, context, and meaning.</a:t>
+              <a:t>For Session 1, we use word-level tokens because it makes the concept visible.</a:t>
             </a:r>
           </a:p>
         </p:txBody>
@@ -3783,8 +5022,8 @@
         </p:nvSpPr>
         <p:spPr>
           <a:xfrm>
-            <a:off x="6400800" y="3383280"/>
-            <a:ext cx="4937760" cy="1280160"/>
+            <a:off x="6492240" y="2971800"/>
+            <a:ext cx="4846320" cy="1554480"/>
           </a:xfrm>
           <a:prstGeom prst="roundRect">
             <a:avLst/>
@@ -3813,18 +5052,18 @@
           </a:fontRef>
         </p:style>
         <p:txBody>
-          <a:bodyPr rtlCol="0" anchor="ctr" lIns="137160" rIns="137160" tIns="91440"/>
+          <a:bodyPr lIns="137160" tIns="91440" rIns="137160" rtlCol="0" anchor="ctr"/>
           <a:lstStyle/>
           <a:p>
             <a:pPr algn="ctr">
-              <a:defRPr sz="1900" b="1">
+              <a:defRPr sz="1800" b="1">
                 <a:solidFill>
                   <a:srgbClr val="0B2F5B"/>
                 </a:solidFill>
               </a:defRPr>
             </a:pPr>
             <a:r>
-              <a:t>Model view</a:t>
+              <a:t>Real LLM tokenizers</a:t>
             </a:r>
           </a:p>
           <a:p>
@@ -3832,14 +5071,14 @@
               <a:spcAft>
                 <a:spcPts val="200"/>
               </a:spcAft>
-              <a:defRPr sz="1800">
+              <a:defRPr sz="1700">
                 <a:solidFill>
                   <a:srgbClr val="172B4D"/>
                 </a:solidFill>
               </a:defRPr>
             </a:pPr>
             <a:r>
-              <a:t>The model needs numbers before it can compute anything.</a:t>
+              <a:t>Real tokenizers may use word pieces, subwords, punctuation, spaces, and special tokens.</a:t>
             </a:r>
           </a:p>
         </p:txBody>
@@ -3874,7 +5113,7 @@
               </a:defRPr>
             </a:pPr>
             <a:r>
-              <a:t>MAGPAI Session 1 - Tokens - v1.0 | javaboy-vk | 2026-05-22 | Slide 2</a:t>
+              <a:t>MAGPAI Session 1 - Tokens - v1.0 | javaboy-vk | 2026-05-22 | Slide 4</a:t>
             </a:r>
           </a:p>
         </p:txBody>
@@ -3887,8 +5126,8 @@
 </p:sld>
 </file>
 
-<file path=ppt/slides/slide3.xml><?xml version="1.0" encoding="utf-8"?>
-<p:sld xmlns:a="http://schemas.openxmlformats.org/drawingml/2006/main" xmlns:p="http://schemas.openxmlformats.org/presentationml/2006/main" xmlns:r="http://schemas.openxmlformats.org/officeDocument/2006/relationships">
+<file path=ppt/slides/slide6.xml><?xml version="1.0" encoding="utf-8"?>
+<p:sld xmlns:a="http://schemas.openxmlformats.org/drawingml/2006/main" xmlns:r="http://schemas.openxmlformats.org/officeDocument/2006/relationships" xmlns:p="http://schemas.openxmlformats.org/presentationml/2006/main">
   <p:cSld>
     <p:spTree>
       <p:nvGrpSpPr>
@@ -3896,7 +5135,14 @@
         <p:cNvGrpSpPr/>
         <p:nvPr/>
       </p:nvGrpSpPr>
-      <p:grpSpPr/>
+      <p:grpSpPr>
+        <a:xfrm>
+          <a:off x="0" y="0"/>
+          <a:ext cx="0" cy="0"/>
+          <a:chOff x="0" y="0"/>
+          <a:chExt cx="0" cy="0"/>
+        </a:xfrm>
+      </p:grpSpPr>
       <p:sp>
         <p:nvSpPr>
           <p:cNvPr id="2" name="TextBox 1"/>
@@ -3927,7 +5173,7 @@
               </a:defRPr>
             </a:pPr>
             <a:r>
-              <a:t>Starting Sentence</a:t>
+              <a:t>Tokenizer Step 2 - Token IDs</a:t>
             </a:r>
           </a:p>
         </p:txBody>
@@ -3962,7 +5208,7 @@
               </a:defRPr>
             </a:pPr>
             <a:r>
-              <a:t>A simple business statement</a:t>
+              <a:t>Use the vocabulary lookup table</a:t>
             </a:r>
           </a:p>
         </p:txBody>
@@ -3975,8 +5221,8 @@
         </p:nvSpPr>
         <p:spPr>
           <a:xfrm>
-            <a:off x="1005840" y="1737360"/>
-            <a:ext cx="10149840" cy="914400"/>
+            <a:off x="822960" y="1234440"/>
+            <a:ext cx="5212080" cy="2468880"/>
           </a:xfrm>
           <a:prstGeom prst="roundRect">
             <a:avLst/>
@@ -4005,11 +5251,11 @@
           </a:fontRef>
         </p:style>
         <p:txBody>
-          <a:bodyPr rtlCol="0" anchor="ctr" lIns="182880" rIns="182880" tIns="109728"/>
+          <a:bodyPr lIns="182880" tIns="109728" rIns="182880" rtlCol="0" anchor="ctr"/>
           <a:lstStyle/>
           <a:p>
             <a:pPr algn="ctr">
-              <a:defRPr sz="3000">
+              <a:defRPr sz="1800">
                 <a:solidFill>
                   <a:srgbClr val="172B4D"/>
                 </a:solidFill>
@@ -4017,7 +5263,32 @@
               </a:defRPr>
             </a:pPr>
             <a:r>
-              <a:t>"Sales are up in Chicago"</a:t>
+              <a:t>Vocabulary</a:t>
+            </a:r>
+            <a:br/>
+            <a:br/>
+            <a:r>
+              <a:t>"&lt;PAD&gt;"   → 0</a:t>
+            </a:r>
+            <a:br/>
+            <a:r>
+              <a:t>"sales"   → 1</a:t>
+            </a:r>
+            <a:br/>
+            <a:r>
+              <a:t>"are"     → 2</a:t>
+            </a:r>
+            <a:br/>
+            <a:r>
+              <a:t>"up"      → 3</a:t>
+            </a:r>
+            <a:br/>
+            <a:r>
+              <a:t>"in"      → 4</a:t>
+            </a:r>
+            <a:br/>
+            <a:r>
+              <a:t>"chicago" → 5</a:t>
             </a:r>
           </a:p>
         </p:txBody>
@@ -4030,8 +5301,71 @@
         </p:nvSpPr>
         <p:spPr>
           <a:xfrm>
-            <a:off x="1005840" y="3108960"/>
-            <a:ext cx="10149840" cy="1463040"/>
+            <a:off x="6400800" y="1234440"/>
+            <a:ext cx="4937760" cy="2468880"/>
+          </a:xfrm>
+          <a:prstGeom prst="roundRect">
+            <a:avLst/>
+          </a:prstGeom>
+          <a:solidFill>
+            <a:srgbClr val="F5F8FC"/>
+          </a:solidFill>
+          <a:ln>
+            <a:solidFill>
+              <a:srgbClr val="BED2E6"/>
+            </a:solidFill>
+          </a:ln>
+        </p:spPr>
+        <p:style>
+          <a:lnRef idx="1">
+            <a:schemeClr val="accent1"/>
+          </a:lnRef>
+          <a:fillRef idx="3">
+            <a:schemeClr val="accent1"/>
+          </a:fillRef>
+          <a:effectRef idx="2">
+            <a:schemeClr val="accent1"/>
+          </a:effectRef>
+          <a:fontRef idx="minor">
+            <a:schemeClr val="lt1"/>
+          </a:fontRef>
+        </p:style>
+        <p:txBody>
+          <a:bodyPr lIns="182880" tIns="109728" rIns="182880" rtlCol="0" anchor="ctr"/>
+          <a:lstStyle/>
+          <a:p>
+            <a:pPr algn="ctr">
+              <a:defRPr sz="2200">
+                <a:solidFill>
+                  <a:srgbClr val="172B4D"/>
+                </a:solidFill>
+                <a:latin typeface="Consolas"/>
+              </a:defRPr>
+            </a:pPr>
+            <a:r>
+              <a:t>["sales", "are", "up", "in", "chicago"]</a:t>
+            </a:r>
+            <a:br/>
+            <a:r>
+              <a:t>        ↓</a:t>
+            </a:r>
+            <a:br/>
+            <a:r>
+              <a:t>[1, 2, 3, 4, 5]</a:t>
+            </a:r>
+          </a:p>
+        </p:txBody>
+      </p:sp>
+      <p:sp>
+        <p:nvSpPr>
+          <p:cNvPr id="6" name="Rounded Rectangle 5"/>
+          <p:cNvSpPr/>
+          <p:nvPr/>
+        </p:nvSpPr>
+        <p:spPr>
+          <a:xfrm>
+            <a:off x="1097280" y="4206240"/>
+            <a:ext cx="9966960" cy="914400"/>
           </a:xfrm>
           <a:prstGeom prst="roundRect">
             <a:avLst/>
@@ -4060,7 +5394,7 @@
           </a:fontRef>
         </p:style>
         <p:txBody>
-          <a:bodyPr rtlCol="0" anchor="ctr" lIns="137160" rIns="137160" tIns="91440"/>
+          <a:bodyPr lIns="137160" tIns="91440" rIns="137160" rtlCol="0" anchor="ctr"/>
           <a:lstStyle/>
           <a:p>
             <a:pPr algn="ctr">
@@ -4086,14 +5420,14 @@
               </a:defRPr>
             </a:pPr>
             <a:r>
-              <a:t>This looks simple to us, but the model cannot process this raw English sentence directly. It first has to be converted into a numeric representation.</a:t>
-            </a:r>
-          </a:p>
-        </p:txBody>
-      </p:sp>
-      <p:sp>
-        <p:nvSpPr>
-          <p:cNvPr id="6" name="TextBox 5"/>
+              <a:t>The tokenizer does not define meaning. It maps known text pieces to integer IDs.</a:t>
+            </a:r>
+          </a:p>
+        </p:txBody>
+      </p:sp>
+      <p:sp>
+        <p:nvSpPr>
+          <p:cNvPr id="7" name="TextBox 6"/>
           <p:cNvSpPr txBox="1"/>
           <p:nvPr/>
         </p:nvSpPr>
@@ -4121,7 +5455,7 @@
               </a:defRPr>
             </a:pPr>
             <a:r>
-              <a:t>MAGPAI Session 1 - Tokens - v1.0 | javaboy-vk | 2026-05-22 | Slide 3</a:t>
+              <a:t>MAGPAI Session 1 - Tokens - v1.0 | javaboy-vk | 2026-05-22 | Slide 5</a:t>
             </a:r>
           </a:p>
         </p:txBody>
@@ -4134,8 +5468,8 @@
 </p:sld>
 </file>
 
-<file path=ppt/slides/slide4.xml><?xml version="1.0" encoding="utf-8"?>
-<p:sld xmlns:a="http://schemas.openxmlformats.org/drawingml/2006/main" xmlns:p="http://schemas.openxmlformats.org/presentationml/2006/main" xmlns:r="http://schemas.openxmlformats.org/officeDocument/2006/relationships">
+<file path=ppt/slides/slide7.xml><?xml version="1.0" encoding="utf-8"?>
+<p:sld xmlns:a="http://schemas.openxmlformats.org/drawingml/2006/main" xmlns:r="http://schemas.openxmlformats.org/officeDocument/2006/relationships" xmlns:p="http://schemas.openxmlformats.org/presentationml/2006/main">
   <p:cSld>
     <p:spTree>
       <p:nvGrpSpPr>
@@ -4143,7 +5477,14 @@
         <p:cNvGrpSpPr/>
         <p:nvPr/>
       </p:nvGrpSpPr>
-      <p:grpSpPr/>
+      <p:grpSpPr>
+        <a:xfrm>
+          <a:off x="0" y="0"/>
+          <a:ext cx="0" cy="0"/>
+          <a:chOff x="0" y="0"/>
+          <a:chExt cx="0" cy="0"/>
+        </a:xfrm>
+      </p:grpSpPr>
       <p:sp>
         <p:nvSpPr>
           <p:cNvPr id="2" name="TextBox 1"/>
@@ -4174,7 +5515,7 @@
               </a:defRPr>
             </a:pPr>
             <a:r>
-              <a:t>Tokenizer Step 1 - Tokens</a:t>
+              <a:t>Embedding Lookup</a:t>
             </a:r>
           </a:p>
         </p:txBody>
@@ -4209,7 +5550,7 @@
               </a:defRPr>
             </a:pPr>
             <a:r>
-              <a:t>Break the sentence into known pieces</a:t>
+              <a:t>Token IDs become vectors</a:t>
             </a:r>
           </a:p>
         </p:txBody>
@@ -4222,8 +5563,8 @@
         </p:nvSpPr>
         <p:spPr>
           <a:xfrm>
-            <a:off x="914400" y="1463040"/>
-            <a:ext cx="10424160" cy="1097280"/>
+            <a:off x="914400" y="1280160"/>
+            <a:ext cx="10424160" cy="1965960"/>
           </a:xfrm>
           <a:prstGeom prst="roundRect">
             <a:avLst/>
@@ -4252,11 +5593,11 @@
           </a:fontRef>
         </p:style>
         <p:txBody>
-          <a:bodyPr rtlCol="0" anchor="ctr" lIns="182880" rIns="182880" tIns="109728"/>
+          <a:bodyPr lIns="182880" tIns="109728" rIns="182880" rtlCol="0" anchor="ctr"/>
           <a:lstStyle/>
           <a:p>
             <a:pPr algn="ctr">
-              <a:defRPr sz="2600">
+              <a:defRPr sz="2200">
                 <a:solidFill>
                   <a:srgbClr val="172B4D"/>
                 </a:solidFill>
@@ -4264,7 +5605,15 @@
               </a:defRPr>
             </a:pPr>
             <a:r>
-              <a:t>["sales", "are", "up", "in", "chicago"]</a:t>
+              <a:t>1 → [ 0.21, -0.44,  0.78,  0.12]</a:t>
+            </a:r>
+            <a:br/>
+            <a:r>
+              <a:t>2 → [ 0.03,  0.91, -0.14,  0.36]</a:t>
+            </a:r>
+            <a:br/>
+            <a:r>
+              <a:t>3 → [-0.62,  0.18,  0.45, -0.09]</a:t>
             </a:r>
           </a:p>
         </p:txBody>
@@ -4277,8 +5626,8 @@
         </p:nvSpPr>
         <p:spPr>
           <a:xfrm>
-            <a:off x="914400" y="2971800"/>
-            <a:ext cx="4846320" cy="1554480"/>
+            <a:off x="914400" y="3749039"/>
+            <a:ext cx="10424160" cy="1097280"/>
           </a:xfrm>
           <a:prstGeom prst="roundRect">
             <a:avLst/>
@@ -4307,18 +5656,18 @@
           </a:fontRef>
         </p:style>
         <p:txBody>
-          <a:bodyPr rtlCol="0" anchor="ctr" lIns="137160" rIns="137160" tIns="91440"/>
+          <a:bodyPr lIns="137160" tIns="91440" rIns="137160" rtlCol="0" anchor="ctr"/>
           <a:lstStyle/>
           <a:p>
             <a:pPr algn="ctr">
-              <a:defRPr sz="1800" b="1">
+              <a:defRPr sz="1900" b="1">
                 <a:solidFill>
                   <a:srgbClr val="0B2F5B"/>
                 </a:solidFill>
               </a:defRPr>
             </a:pPr>
             <a:r>
-              <a:t>Demo simplification</a:t>
+              <a:t>Teaching point</a:t>
             </a:r>
           </a:p>
           <a:p>
@@ -4326,18 +5675,240 @@
               <a:spcAft>
                 <a:spcPts val="200"/>
               </a:spcAft>
-              <a:defRPr sz="1700">
+              <a:defRPr sz="1800">
                 <a:solidFill>
                   <a:srgbClr val="172B4D"/>
                 </a:solidFill>
               </a:defRPr>
             </a:pPr>
             <a:r>
-              <a:t>For Session 1, we use word-level tokens because it makes the concept visible.</a:t>
-            </a:r>
-          </a:p>
-        </p:txBody>
-      </p:sp>
+              <a:t>The token ID is an index. It selects a row from the embedding matrix. The selected row is the token vector.</a:t>
+            </a:r>
+          </a:p>
+        </p:txBody>
+      </p:sp>
+      <p:sp>
+        <p:nvSpPr>
+          <p:cNvPr id="6" name="TextBox 5"/>
+          <p:cNvSpPr txBox="1"/>
+          <p:nvPr/>
+        </p:nvSpPr>
+        <p:spPr>
+          <a:xfrm>
+            <a:off x="320040" y="6473952"/>
+            <a:ext cx="11521440" cy="228600"/>
+          </a:xfrm>
+          <a:prstGeom prst="rect">
+            <a:avLst/>
+          </a:prstGeom>
+          <a:noFill/>
+        </p:spPr>
+        <p:txBody>
+          <a:bodyPr wrap="none">
+            <a:spAutoFit/>
+          </a:bodyPr>
+          <a:lstStyle/>
+          <a:p>
+            <a:pPr>
+              <a:defRPr sz="900">
+                <a:solidFill>
+                  <a:srgbClr val="52616B"/>
+                </a:solidFill>
+              </a:defRPr>
+            </a:pPr>
+            <a:r>
+              <a:t>MAGPAI Session 1 - Tokens - v1.0 | javaboy-vk | 2026-05-22 | Slide 6</a:t>
+            </a:r>
+          </a:p>
+        </p:txBody>
+      </p:sp>
+    </p:spTree>
+  </p:cSld>
+  <p:clrMapOvr>
+    <a:masterClrMapping/>
+  </p:clrMapOvr>
+</p:sld>
+</file>
+
+<file path=ppt/slides/slide8.xml><?xml version="1.0" encoding="utf-8"?>
+<p:sld xmlns:a="http://schemas.openxmlformats.org/drawingml/2006/main" xmlns:r="http://schemas.openxmlformats.org/officeDocument/2006/relationships" xmlns:p="http://schemas.openxmlformats.org/presentationml/2006/main">
+  <p:cSld>
+    <p:spTree>
+      <p:nvGrpSpPr>
+        <p:cNvPr id="1" name=""/>
+        <p:cNvGrpSpPr/>
+        <p:nvPr/>
+      </p:nvGrpSpPr>
+      <p:grpSpPr>
+        <a:xfrm>
+          <a:off x="0" y="0"/>
+          <a:ext cx="0" cy="0"/>
+          <a:chOff x="0" y="0"/>
+          <a:chExt cx="0" cy="0"/>
+        </a:xfrm>
+      </p:grpSpPr>
+      <p:sp>
+        <p:nvSpPr>
+          <p:cNvPr id="2" name="TextBox 1"/>
+          <p:cNvSpPr txBox="1"/>
+          <p:nvPr/>
+        </p:nvSpPr>
+        <p:spPr>
+          <a:xfrm>
+            <a:off x="502920" y="320040"/>
+            <a:ext cx="11247120" cy="548640"/>
+          </a:xfrm>
+          <a:prstGeom prst="rect">
+            <a:avLst/>
+          </a:prstGeom>
+          <a:noFill/>
+        </p:spPr>
+        <p:txBody>
+          <a:bodyPr wrap="none">
+            <a:spAutoFit/>
+          </a:bodyPr>
+          <a:lstStyle/>
+          <a:p>
+            <a:pPr>
+              <a:defRPr sz="3000" b="1">
+                <a:solidFill>
+                  <a:srgbClr val="0B2F5B"/>
+                </a:solidFill>
+              </a:defRPr>
+            </a:pPr>
+            <a:r>
+              <a:t>How Token ID 1 Becomes a Vector</a:t>
+            </a:r>
+          </a:p>
+        </p:txBody>
+      </p:sp>
+      <p:sp>
+        <p:nvSpPr>
+          <p:cNvPr id="3" name="TextBox 2"/>
+          <p:cNvSpPr txBox="1"/>
+          <p:nvPr/>
+        </p:nvSpPr>
+        <p:spPr>
+          <a:xfrm>
+            <a:off x="530352" y="868680"/>
+            <a:ext cx="10972800" cy="365760"/>
+          </a:xfrm>
+          <a:prstGeom prst="rect">
+            <a:avLst/>
+          </a:prstGeom>
+          <a:noFill/>
+        </p:spPr>
+        <p:txBody>
+          <a:bodyPr wrap="none">
+            <a:spAutoFit/>
+          </a:bodyPr>
+          <a:lstStyle/>
+          <a:p>
+            <a:pPr>
+              <a:defRPr sz="1600">
+                <a:solidFill>
+                  <a:srgbClr val="52616B"/>
+                </a:solidFill>
+              </a:defRPr>
+            </a:pPr>
+            <a:r>
+              <a:t>The algorithm is a row lookup</a:t>
+            </a:r>
+          </a:p>
+        </p:txBody>
+      </p:sp>
+      <p:sp>
+        <p:nvSpPr>
+          <p:cNvPr id="4" name="Rounded Rectangle 3"/>
+          <p:cNvSpPr/>
+          <p:nvPr/>
+        </p:nvSpPr>
+        <p:spPr>
+          <a:xfrm>
+            <a:off x="885190" y="1234440"/>
+            <a:ext cx="3657600" cy="914400"/>
+          </a:xfrm>
+          <a:prstGeom prst="roundRect">
+            <a:avLst/>
+          </a:prstGeom>
+          <a:solidFill>
+            <a:srgbClr val="F5F8FC"/>
+          </a:solidFill>
+          <a:ln>
+            <a:solidFill>
+              <a:srgbClr val="BED2E6"/>
+            </a:solidFill>
+          </a:ln>
+        </p:spPr>
+        <p:style>
+          <a:lnRef idx="1">
+            <a:schemeClr val="accent1"/>
+          </a:lnRef>
+          <a:fillRef idx="3">
+            <a:schemeClr val="accent1"/>
+          </a:fillRef>
+          <a:effectRef idx="2">
+            <a:schemeClr val="accent1"/>
+          </a:effectRef>
+          <a:fontRef idx="minor">
+            <a:schemeClr val="lt1"/>
+          </a:fontRef>
+        </p:style>
+        <p:txBody>
+          <a:bodyPr lIns="182880" tIns="109728" rIns="182880" rtlCol="0" anchor="ctr"/>
+          <a:lstStyle/>
+          <a:p>
+            <a:pPr algn="ctr">
+              <a:defRPr sz="2500">
+                <a:solidFill>
+                  <a:srgbClr val="172B4D"/>
+                </a:solidFill>
+                <a:latin typeface="Consolas"/>
+              </a:defRPr>
+            </a:pPr>
+            <a:r>
+              <a:t>Token ID 1</a:t>
+            </a:r>
+          </a:p>
+        </p:txBody>
+      </p:sp>
+      <p:cxnSp>
+        <p:nvCxnSpPr>
+          <p:cNvPr id="5" name="Connector 4"/>
+          <p:cNvCxnSpPr>
+            <a:cxnSpLocks/>
+          </p:cNvCxnSpPr>
+          <p:nvPr/>
+        </p:nvCxnSpPr>
+        <p:spPr>
+          <a:xfrm>
+            <a:off x="4588510" y="1691640"/>
+            <a:ext cx="675640" cy="0"/>
+          </a:xfrm>
+          <a:prstGeom prst="line">
+            <a:avLst/>
+          </a:prstGeom>
+          <a:ln w="38100">
+            <a:solidFill>
+              <a:srgbClr val="0B5CAD"/>
+            </a:solidFill>
+          </a:ln>
+        </p:spPr>
+        <p:style>
+          <a:lnRef idx="2">
+            <a:schemeClr val="accent1"/>
+          </a:lnRef>
+          <a:fillRef idx="0">
+            <a:schemeClr val="accent1"/>
+          </a:fillRef>
+          <a:effectRef idx="1">
+            <a:schemeClr val="accent1"/>
+          </a:effectRef>
+          <a:fontRef idx="minor">
+            <a:schemeClr val="tx1"/>
+          </a:fontRef>
+        </p:style>
+      </p:cxnSp>
       <p:sp>
         <p:nvSpPr>
           <p:cNvPr id="6" name="Rounded Rectangle 5"/>
@@ -4346,8 +5917,416 @@
         </p:nvSpPr>
         <p:spPr>
           <a:xfrm>
-            <a:off x="6492240" y="2971800"/>
-            <a:ext cx="4846320" cy="1554480"/>
+            <a:off x="5309870" y="1234440"/>
+            <a:ext cx="2743200" cy="914400"/>
+          </a:xfrm>
+          <a:prstGeom prst="roundRect">
+            <a:avLst/>
+          </a:prstGeom>
+          <a:solidFill>
+            <a:srgbClr val="F5F8FC"/>
+          </a:solidFill>
+          <a:ln>
+            <a:solidFill>
+              <a:srgbClr val="BED2E6"/>
+            </a:solidFill>
+          </a:ln>
+        </p:spPr>
+        <p:style>
+          <a:lnRef idx="1">
+            <a:schemeClr val="accent1"/>
+          </a:lnRef>
+          <a:fillRef idx="3">
+            <a:schemeClr val="accent1"/>
+          </a:fillRef>
+          <a:effectRef idx="2">
+            <a:schemeClr val="accent1"/>
+          </a:effectRef>
+          <a:fontRef idx="minor">
+            <a:schemeClr val="lt1"/>
+          </a:fontRef>
+        </p:style>
+        <p:txBody>
+          <a:bodyPr lIns="182880" tIns="109728" rIns="182880" rtlCol="0" anchor="ctr"/>
+          <a:lstStyle/>
+          <a:p>
+            <a:pPr algn="ctr">
+              <a:defRPr sz="2500">
+                <a:solidFill>
+                  <a:srgbClr val="172B4D"/>
+                </a:solidFill>
+                <a:latin typeface="Consolas"/>
+              </a:defRPr>
+            </a:pPr>
+            <a:r>
+              <a:t>E[1]</a:t>
+            </a:r>
+          </a:p>
+        </p:txBody>
+      </p:sp>
+      <p:cxnSp>
+        <p:nvCxnSpPr>
+          <p:cNvPr id="7" name="Connector 6"/>
+          <p:cNvCxnSpPr/>
+          <p:nvPr/>
+        </p:nvCxnSpPr>
+        <p:spPr>
+          <a:xfrm>
+            <a:off x="8053070" y="1691640"/>
+            <a:ext cx="685800" cy="0"/>
+          </a:xfrm>
+          <a:prstGeom prst="line">
+            <a:avLst/>
+          </a:prstGeom>
+          <a:ln w="38100">
+            <a:solidFill>
+              <a:srgbClr val="0B5CAD"/>
+            </a:solidFill>
+          </a:ln>
+        </p:spPr>
+        <p:style>
+          <a:lnRef idx="2">
+            <a:schemeClr val="accent1"/>
+          </a:lnRef>
+          <a:fillRef idx="0">
+            <a:schemeClr val="accent1"/>
+          </a:fillRef>
+          <a:effectRef idx="1">
+            <a:schemeClr val="accent1"/>
+          </a:effectRef>
+          <a:fontRef idx="minor">
+            <a:schemeClr val="tx1"/>
+          </a:fontRef>
+        </p:style>
+      </p:cxnSp>
+      <p:sp>
+        <p:nvSpPr>
+          <p:cNvPr id="8" name="Rounded Rectangle 7"/>
+          <p:cNvSpPr/>
+          <p:nvPr/>
+        </p:nvSpPr>
+        <p:spPr>
+          <a:xfrm>
+            <a:off x="8745982" y="1234440"/>
+            <a:ext cx="2802890" cy="914400"/>
+          </a:xfrm>
+          <a:prstGeom prst="roundRect">
+            <a:avLst/>
+          </a:prstGeom>
+          <a:solidFill>
+            <a:srgbClr val="F5F8FC"/>
+          </a:solidFill>
+          <a:ln>
+            <a:solidFill>
+              <a:srgbClr val="BED2E6"/>
+            </a:solidFill>
+          </a:ln>
+        </p:spPr>
+        <p:style>
+          <a:lnRef idx="1">
+            <a:schemeClr val="accent1"/>
+          </a:lnRef>
+          <a:fillRef idx="3">
+            <a:schemeClr val="accent1"/>
+          </a:fillRef>
+          <a:effectRef idx="2">
+            <a:schemeClr val="accent1"/>
+          </a:effectRef>
+          <a:fontRef idx="minor">
+            <a:schemeClr val="lt1"/>
+          </a:fontRef>
+        </p:style>
+        <p:txBody>
+          <a:bodyPr lIns="182880" tIns="109728" rIns="182880" rtlCol="0" anchor="ctr"/>
+          <a:lstStyle/>
+          <a:p>
+            <a:pPr>
+              <a:defRPr sz="1600">
+                <a:solidFill>
+                  <a:srgbClr val="172B4D"/>
+                </a:solidFill>
+                <a:latin typeface="Consolas"/>
+              </a:defRPr>
+            </a:pPr>
+            <a:r>
+              <a:rPr dirty="0"/>
+              <a:t>[0.21,0.44,0.78,0.12]</a:t>
+            </a:r>
+          </a:p>
+        </p:txBody>
+      </p:sp>
+      <p:sp>
+        <p:nvSpPr>
+          <p:cNvPr id="9" name="Rounded Rectangle 8"/>
+          <p:cNvSpPr/>
+          <p:nvPr/>
+        </p:nvSpPr>
+        <p:spPr>
+          <a:xfrm>
+            <a:off x="914400" y="3200400"/>
+            <a:ext cx="10424160" cy="1325880"/>
+          </a:xfrm>
+          <a:prstGeom prst="roundRect">
+            <a:avLst/>
+          </a:prstGeom>
+          <a:solidFill>
+            <a:srgbClr val="FFFFFF"/>
+          </a:solidFill>
+          <a:ln w="19050">
+            <a:solidFill>
+              <a:srgbClr val="0B5CAD"/>
+            </a:solidFill>
+          </a:ln>
+        </p:spPr>
+        <p:style>
+          <a:lnRef idx="1">
+            <a:schemeClr val="accent1"/>
+          </a:lnRef>
+          <a:fillRef idx="3">
+            <a:schemeClr val="accent1"/>
+          </a:fillRef>
+          <a:effectRef idx="2">
+            <a:schemeClr val="accent1"/>
+          </a:effectRef>
+          <a:fontRef idx="minor">
+            <a:schemeClr val="lt1"/>
+          </a:fontRef>
+        </p:style>
+        <p:txBody>
+          <a:bodyPr lIns="137160" tIns="91440" rIns="137160" rtlCol="0" anchor="ctr"/>
+          <a:lstStyle/>
+          <a:p>
+            <a:pPr algn="ctr">
+              <a:defRPr sz="1900" b="1">
+                <a:solidFill>
+                  <a:srgbClr val="0B2F5B"/>
+                </a:solidFill>
+              </a:defRPr>
+            </a:pPr>
+            <a:r>
+              <a:t>Important distinction</a:t>
+            </a:r>
+          </a:p>
+          <a:p>
+            <a:pPr>
+              <a:spcAft>
+                <a:spcPts val="200"/>
+              </a:spcAft>
+              <a:defRPr sz="1800">
+                <a:solidFill>
+                  <a:srgbClr val="172B4D"/>
+                </a:solidFill>
+              </a:defRPr>
+            </a:pPr>
+            <a:r>
+              <a:t>The integer 1 does not contain the meaning of “sales.” It points to a learned row in the embedding matrix.</a:t>
+            </a:r>
+          </a:p>
+        </p:txBody>
+      </p:sp>
+      <p:sp>
+        <p:nvSpPr>
+          <p:cNvPr id="10" name="TextBox 9"/>
+          <p:cNvSpPr txBox="1"/>
+          <p:nvPr/>
+        </p:nvSpPr>
+        <p:spPr>
+          <a:xfrm>
+            <a:off x="320040" y="6473952"/>
+            <a:ext cx="11521440" cy="228600"/>
+          </a:xfrm>
+          <a:prstGeom prst="rect">
+            <a:avLst/>
+          </a:prstGeom>
+          <a:noFill/>
+        </p:spPr>
+        <p:txBody>
+          <a:bodyPr wrap="none">
+            <a:spAutoFit/>
+          </a:bodyPr>
+          <a:lstStyle/>
+          <a:p>
+            <a:pPr>
+              <a:defRPr sz="900">
+                <a:solidFill>
+                  <a:srgbClr val="52616B"/>
+                </a:solidFill>
+              </a:defRPr>
+            </a:pPr>
+            <a:r>
+              <a:t>MAGPAI Session 1 - Tokens - v1.0 | javaboy-vk | 2026-05-22 | Slide 7</a:t>
+            </a:r>
+          </a:p>
+        </p:txBody>
+      </p:sp>
+    </p:spTree>
+  </p:cSld>
+  <p:clrMapOvr>
+    <a:masterClrMapping/>
+  </p:clrMapOvr>
+</p:sld>
+</file>
+
+<file path=ppt/slides/slide9.xml><?xml version="1.0" encoding="utf-8"?>
+<p:sld xmlns:a="http://schemas.openxmlformats.org/drawingml/2006/main" xmlns:r="http://schemas.openxmlformats.org/officeDocument/2006/relationships" xmlns:p="http://schemas.openxmlformats.org/presentationml/2006/main">
+  <p:cSld>
+    <p:spTree>
+      <p:nvGrpSpPr>
+        <p:cNvPr id="1" name=""/>
+        <p:cNvGrpSpPr/>
+        <p:nvPr/>
+      </p:nvGrpSpPr>
+      <p:grpSpPr>
+        <a:xfrm>
+          <a:off x="0" y="0"/>
+          <a:ext cx="0" cy="0"/>
+          <a:chOff x="0" y="0"/>
+          <a:chExt cx="0" cy="0"/>
+        </a:xfrm>
+      </p:grpSpPr>
+      <p:sp>
+        <p:nvSpPr>
+          <p:cNvPr id="2" name="TextBox 1"/>
+          <p:cNvSpPr txBox="1"/>
+          <p:nvPr/>
+        </p:nvSpPr>
+        <p:spPr>
+          <a:xfrm>
+            <a:off x="502920" y="320040"/>
+            <a:ext cx="11247120" cy="548640"/>
+          </a:xfrm>
+          <a:prstGeom prst="rect">
+            <a:avLst/>
+          </a:prstGeom>
+          <a:noFill/>
+        </p:spPr>
+        <p:txBody>
+          <a:bodyPr wrap="none">
+            <a:spAutoFit/>
+          </a:bodyPr>
+          <a:lstStyle/>
+          <a:p>
+            <a:pPr>
+              <a:defRPr sz="3000" b="1">
+                <a:solidFill>
+                  <a:srgbClr val="0B2F5B"/>
+                </a:solidFill>
+              </a:defRPr>
+            </a:pPr>
+            <a:r>
+              <a:t>Linear Algebra View</a:t>
+            </a:r>
+          </a:p>
+        </p:txBody>
+      </p:sp>
+      <p:sp>
+        <p:nvSpPr>
+          <p:cNvPr id="3" name="TextBox 2"/>
+          <p:cNvSpPr txBox="1"/>
+          <p:nvPr/>
+        </p:nvSpPr>
+        <p:spPr>
+          <a:xfrm>
+            <a:off x="530352" y="868680"/>
+            <a:ext cx="10972800" cy="365760"/>
+          </a:xfrm>
+          <a:prstGeom prst="rect">
+            <a:avLst/>
+          </a:prstGeom>
+          <a:noFill/>
+        </p:spPr>
+        <p:txBody>
+          <a:bodyPr wrap="none">
+            <a:spAutoFit/>
+          </a:bodyPr>
+          <a:lstStyle/>
+          <a:p>
+            <a:pPr>
+              <a:defRPr sz="1600">
+                <a:solidFill>
+                  <a:srgbClr val="52616B"/>
+                </a:solidFill>
+              </a:defRPr>
+            </a:pPr>
+            <a:r>
+              <a:t>Embedding lookup is equivalent to one-hot matrix multiplication</a:t>
+            </a:r>
+          </a:p>
+        </p:txBody>
+      </p:sp>
+      <p:sp>
+        <p:nvSpPr>
+          <p:cNvPr id="4" name="Rounded Rectangle 3"/>
+          <p:cNvSpPr/>
+          <p:nvPr/>
+        </p:nvSpPr>
+        <p:spPr>
+          <a:xfrm>
+            <a:off x="822960" y="1234440"/>
+            <a:ext cx="10607040" cy="1920240"/>
+          </a:xfrm>
+          <a:prstGeom prst="roundRect">
+            <a:avLst/>
+          </a:prstGeom>
+          <a:solidFill>
+            <a:srgbClr val="F5F8FC"/>
+          </a:solidFill>
+          <a:ln>
+            <a:solidFill>
+              <a:srgbClr val="BED2E6"/>
+            </a:solidFill>
+          </a:ln>
+        </p:spPr>
+        <p:style>
+          <a:lnRef idx="1">
+            <a:schemeClr val="accent1"/>
+          </a:lnRef>
+          <a:fillRef idx="3">
+            <a:schemeClr val="accent1"/>
+          </a:fillRef>
+          <a:effectRef idx="2">
+            <a:schemeClr val="accent1"/>
+          </a:effectRef>
+          <a:fontRef idx="minor">
+            <a:schemeClr val="lt1"/>
+          </a:fontRef>
+        </p:style>
+        <p:txBody>
+          <a:bodyPr lIns="182880" tIns="109728" rIns="182880" rtlCol="0" anchor="ctr"/>
+          <a:lstStyle/>
+          <a:p>
+            <a:pPr algn="ctr">
+              <a:defRPr sz="2600">
+                <a:solidFill>
+                  <a:srgbClr val="172B4D"/>
+                </a:solidFill>
+                <a:latin typeface="Consolas"/>
+              </a:defRPr>
+            </a:pPr>
+            <a:r>
+              <a:t>[0, 1, 0, 0, 0, 0] × E</a:t>
+            </a:r>
+            <a:br/>
+            <a:r>
+              <a:t>=</a:t>
+            </a:r>
+            <a:br/>
+            <a:r>
+              <a:t>[0.21, -0.44, 0.78, 0.12]</a:t>
+            </a:r>
+          </a:p>
+        </p:txBody>
+      </p:sp>
+      <p:sp>
+        <p:nvSpPr>
+          <p:cNvPr id="5" name="Rounded Rectangle 4"/>
+          <p:cNvSpPr/>
+          <p:nvPr/>
+        </p:nvSpPr>
+        <p:spPr>
+          <a:xfrm>
+            <a:off x="914400" y="3749039"/>
+            <a:ext cx="10424160" cy="1188720"/>
           </a:xfrm>
           <a:prstGeom prst="roundRect">
             <a:avLst/>
@@ -4376,342 +6355,7 @@
           </a:fontRef>
         </p:style>
         <p:txBody>
-          <a:bodyPr rtlCol="0" anchor="ctr" lIns="137160" rIns="137160" tIns="91440"/>
-          <a:lstStyle/>
-          <a:p>
-            <a:pPr algn="ctr">
-              <a:defRPr sz="1800" b="1">
-                <a:solidFill>
-                  <a:srgbClr val="0B2F5B"/>
-                </a:solidFill>
-              </a:defRPr>
-            </a:pPr>
-            <a:r>
-              <a:t>Real LLM tokenizers</a:t>
-            </a:r>
-          </a:p>
-          <a:p>
-            <a:pPr>
-              <a:spcAft>
-                <a:spcPts val="200"/>
-              </a:spcAft>
-              <a:defRPr sz="1700">
-                <a:solidFill>
-                  <a:srgbClr val="172B4D"/>
-                </a:solidFill>
-              </a:defRPr>
-            </a:pPr>
-            <a:r>
-              <a:t>Real tokenizers may use word pieces, subwords, punctuation, spaces, and special tokens.</a:t>
-            </a:r>
-          </a:p>
-        </p:txBody>
-      </p:sp>
-      <p:sp>
-        <p:nvSpPr>
-          <p:cNvPr id="7" name="TextBox 6"/>
-          <p:cNvSpPr txBox="1"/>
-          <p:nvPr/>
-        </p:nvSpPr>
-        <p:spPr>
-          <a:xfrm>
-            <a:off x="320040" y="6473952"/>
-            <a:ext cx="11521440" cy="228600"/>
-          </a:xfrm>
-          <a:prstGeom prst="rect">
-            <a:avLst/>
-          </a:prstGeom>
-          <a:noFill/>
-        </p:spPr>
-        <p:txBody>
-          <a:bodyPr wrap="none">
-            <a:spAutoFit/>
-          </a:bodyPr>
-          <a:lstStyle/>
-          <a:p>
-            <a:pPr>
-              <a:defRPr sz="900">
-                <a:solidFill>
-                  <a:srgbClr val="52616B"/>
-                </a:solidFill>
-              </a:defRPr>
-            </a:pPr>
-            <a:r>
-              <a:t>MAGPAI Session 1 - Tokens - v1.0 | javaboy-vk | 2026-05-22 | Slide 4</a:t>
-            </a:r>
-          </a:p>
-        </p:txBody>
-      </p:sp>
-    </p:spTree>
-  </p:cSld>
-  <p:clrMapOvr>
-    <a:masterClrMapping/>
-  </p:clrMapOvr>
-</p:sld>
-</file>
-
-<file path=ppt/slides/slide5.xml><?xml version="1.0" encoding="utf-8"?>
-<p:sld xmlns:a="http://schemas.openxmlformats.org/drawingml/2006/main" xmlns:p="http://schemas.openxmlformats.org/presentationml/2006/main" xmlns:r="http://schemas.openxmlformats.org/officeDocument/2006/relationships">
-  <p:cSld>
-    <p:spTree>
-      <p:nvGrpSpPr>
-        <p:cNvPr id="1" name=""/>
-        <p:cNvGrpSpPr/>
-        <p:nvPr/>
-      </p:nvGrpSpPr>
-      <p:grpSpPr/>
-      <p:sp>
-        <p:nvSpPr>
-          <p:cNvPr id="2" name="TextBox 1"/>
-          <p:cNvSpPr txBox="1"/>
-          <p:nvPr/>
-        </p:nvSpPr>
-        <p:spPr>
-          <a:xfrm>
-            <a:off x="502920" y="320040"/>
-            <a:ext cx="11247120" cy="548640"/>
-          </a:xfrm>
-          <a:prstGeom prst="rect">
-            <a:avLst/>
-          </a:prstGeom>
-          <a:noFill/>
-        </p:spPr>
-        <p:txBody>
-          <a:bodyPr wrap="none">
-            <a:spAutoFit/>
-          </a:bodyPr>
-          <a:lstStyle/>
-          <a:p>
-            <a:pPr>
-              <a:defRPr sz="3000" b="1">
-                <a:solidFill>
-                  <a:srgbClr val="0B2F5B"/>
-                </a:solidFill>
-              </a:defRPr>
-            </a:pPr>
-            <a:r>
-              <a:t>Tokenizer Step 2 - Token IDs</a:t>
-            </a:r>
-          </a:p>
-        </p:txBody>
-      </p:sp>
-      <p:sp>
-        <p:nvSpPr>
-          <p:cNvPr id="3" name="TextBox 2"/>
-          <p:cNvSpPr txBox="1"/>
-          <p:nvPr/>
-        </p:nvSpPr>
-        <p:spPr>
-          <a:xfrm>
-            <a:off x="530352" y="868680"/>
-            <a:ext cx="10972800" cy="365760"/>
-          </a:xfrm>
-          <a:prstGeom prst="rect">
-            <a:avLst/>
-          </a:prstGeom>
-          <a:noFill/>
-        </p:spPr>
-        <p:txBody>
-          <a:bodyPr wrap="none">
-            <a:spAutoFit/>
-          </a:bodyPr>
-          <a:lstStyle/>
-          <a:p>
-            <a:pPr>
-              <a:defRPr sz="1600">
-                <a:solidFill>
-                  <a:srgbClr val="52616B"/>
-                </a:solidFill>
-              </a:defRPr>
-            </a:pPr>
-            <a:r>
-              <a:t>Use the vocabulary lookup table</a:t>
-            </a:r>
-          </a:p>
-        </p:txBody>
-      </p:sp>
-      <p:sp>
-        <p:nvSpPr>
-          <p:cNvPr id="4" name="Rounded Rectangle 3"/>
-          <p:cNvSpPr/>
-          <p:nvPr/>
-        </p:nvSpPr>
-        <p:spPr>
-          <a:xfrm>
-            <a:off x="822960" y="1234440"/>
-            <a:ext cx="5212080" cy="2468880"/>
-          </a:xfrm>
-          <a:prstGeom prst="roundRect">
-            <a:avLst/>
-          </a:prstGeom>
-          <a:solidFill>
-            <a:srgbClr val="F5F8FC"/>
-          </a:solidFill>
-          <a:ln>
-            <a:solidFill>
-              <a:srgbClr val="BED2E6"/>
-            </a:solidFill>
-          </a:ln>
-        </p:spPr>
-        <p:style>
-          <a:lnRef idx="1">
-            <a:schemeClr val="accent1"/>
-          </a:lnRef>
-          <a:fillRef idx="3">
-            <a:schemeClr val="accent1"/>
-          </a:fillRef>
-          <a:effectRef idx="2">
-            <a:schemeClr val="accent1"/>
-          </a:effectRef>
-          <a:fontRef idx="minor">
-            <a:schemeClr val="lt1"/>
-          </a:fontRef>
-        </p:style>
-        <p:txBody>
-          <a:bodyPr rtlCol="0" anchor="ctr" lIns="182880" rIns="182880" tIns="109728"/>
-          <a:lstStyle/>
-          <a:p>
-            <a:pPr algn="ctr">
-              <a:defRPr sz="1800">
-                <a:solidFill>
-                  <a:srgbClr val="172B4D"/>
-                </a:solidFill>
-                <a:latin typeface="Consolas"/>
-              </a:defRPr>
-            </a:pPr>
-            <a:r>
-              <a:t>Vocabulary</a:t>
-            </a:r>
-            <a:br/>
-            <a:br/>
-            <a:r>
-              <a:t>"&lt;PAD&gt;"   → 0</a:t>
-            </a:r>
-            <a:br/>
-            <a:r>
-              <a:t>"sales"   → 1</a:t>
-            </a:r>
-            <a:br/>
-            <a:r>
-              <a:t>"are"     → 2</a:t>
-            </a:r>
-            <a:br/>
-            <a:r>
-              <a:t>"up"      → 3</a:t>
-            </a:r>
-            <a:br/>
-            <a:r>
-              <a:t>"in"      → 4</a:t>
-            </a:r>
-            <a:br/>
-            <a:r>
-              <a:t>"chicago" → 5</a:t>
-            </a:r>
-          </a:p>
-        </p:txBody>
-      </p:sp>
-      <p:sp>
-        <p:nvSpPr>
-          <p:cNvPr id="5" name="Rounded Rectangle 4"/>
-          <p:cNvSpPr/>
-          <p:nvPr/>
-        </p:nvSpPr>
-        <p:spPr>
-          <a:xfrm>
-            <a:off x="6400800" y="1234440"/>
-            <a:ext cx="4937760" cy="2468880"/>
-          </a:xfrm>
-          <a:prstGeom prst="roundRect">
-            <a:avLst/>
-          </a:prstGeom>
-          <a:solidFill>
-            <a:srgbClr val="F5F8FC"/>
-          </a:solidFill>
-          <a:ln>
-            <a:solidFill>
-              <a:srgbClr val="BED2E6"/>
-            </a:solidFill>
-          </a:ln>
-        </p:spPr>
-        <p:style>
-          <a:lnRef idx="1">
-            <a:schemeClr val="accent1"/>
-          </a:lnRef>
-          <a:fillRef idx="3">
-            <a:schemeClr val="accent1"/>
-          </a:fillRef>
-          <a:effectRef idx="2">
-            <a:schemeClr val="accent1"/>
-          </a:effectRef>
-          <a:fontRef idx="minor">
-            <a:schemeClr val="lt1"/>
-          </a:fontRef>
-        </p:style>
-        <p:txBody>
-          <a:bodyPr rtlCol="0" anchor="ctr" lIns="182880" rIns="182880" tIns="109728"/>
-          <a:lstStyle/>
-          <a:p>
-            <a:pPr algn="ctr">
-              <a:defRPr sz="2200">
-                <a:solidFill>
-                  <a:srgbClr val="172B4D"/>
-                </a:solidFill>
-                <a:latin typeface="Consolas"/>
-              </a:defRPr>
-            </a:pPr>
-            <a:r>
-              <a:t>["sales", "are", "up", "in", "chicago"]</a:t>
-            </a:r>
-            <a:br/>
-            <a:r>
-              <a:t>        ↓</a:t>
-            </a:r>
-            <a:br/>
-            <a:r>
-              <a:t>[1, 2, 3, 4, 5]</a:t>
-            </a:r>
-          </a:p>
-        </p:txBody>
-      </p:sp>
-      <p:sp>
-        <p:nvSpPr>
-          <p:cNvPr id="6" name="Rounded Rectangle 5"/>
-          <p:cNvSpPr/>
-          <p:nvPr/>
-        </p:nvSpPr>
-        <p:spPr>
-          <a:xfrm>
-            <a:off x="1097280" y="4206240"/>
-            <a:ext cx="9966960" cy="914400"/>
-          </a:xfrm>
-          <a:prstGeom prst="roundRect">
-            <a:avLst/>
-          </a:prstGeom>
-          <a:solidFill>
-            <a:srgbClr val="FFFFFF"/>
-          </a:solidFill>
-          <a:ln w="19050">
-            <a:solidFill>
-              <a:srgbClr val="0B5CAD"/>
-            </a:solidFill>
-          </a:ln>
-        </p:spPr>
-        <p:style>
-          <a:lnRef idx="1">
-            <a:schemeClr val="accent1"/>
-          </a:lnRef>
-          <a:fillRef idx="3">
-            <a:schemeClr val="accent1"/>
-          </a:fillRef>
-          <a:effectRef idx="2">
-            <a:schemeClr val="accent1"/>
-          </a:effectRef>
-          <a:fontRef idx="minor">
-            <a:schemeClr val="lt1"/>
-          </a:fontRef>
-        </p:style>
-        <p:txBody>
-          <a:bodyPr rtlCol="0" anchor="ctr" lIns="137160" rIns="137160" tIns="91440"/>
+          <a:bodyPr lIns="137160" tIns="91440" rIns="137160" rtlCol="0" anchor="ctr"/>
           <a:lstStyle/>
           <a:p>
             <a:pPr algn="ctr">
@@ -4722,7 +6366,7 @@
               </a:defRPr>
             </a:pPr>
             <a:r>
-              <a:t>Teaching point</a:t>
+              <a:t>Runtime optimization</a:t>
             </a:r>
           </a:p>
           <a:p>
@@ -4737,14 +6381,14 @@
               </a:defRPr>
             </a:pPr>
             <a:r>
-              <a:t>The tokenizer does not define meaning. It maps known text pieces to integer IDs.</a:t>
-            </a:r>
-          </a:p>
-        </p:txBody>
-      </p:sp>
-      <p:sp>
-        <p:nvSpPr>
-          <p:cNvPr id="7" name="TextBox 6"/>
+              <a:t>In real code, the framework usually skips the one-hot vector and directly retrieves the row. It is faster and memory-efficient.</a:t>
+            </a:r>
+          </a:p>
+        </p:txBody>
+      </p:sp>
+      <p:sp>
+        <p:nvSpPr>
+          <p:cNvPr id="6" name="TextBox 5"/>
           <p:cNvSpPr txBox="1"/>
           <p:nvPr/>
         </p:nvSpPr>
@@ -4772,1386 +6416,7 @@
               </a:defRPr>
             </a:pPr>
             <a:r>
-              <a:t>MAGPAI Session 1 - Tokens - v1.0 | javaboy-vk | 2026-05-22 | Slide 5</a:t>
-            </a:r>
-          </a:p>
-        </p:txBody>
-      </p:sp>
-    </p:spTree>
-  </p:cSld>
-  <p:clrMapOvr>
-    <a:masterClrMapping/>
-  </p:clrMapOvr>
-</p:sld>
-</file>
-
-<file path=ppt/slides/slide6.xml><?xml version="1.0" encoding="utf-8"?>
-<p:sld xmlns:a="http://schemas.openxmlformats.org/drawingml/2006/main" xmlns:p="http://schemas.openxmlformats.org/presentationml/2006/main" xmlns:r="http://schemas.openxmlformats.org/officeDocument/2006/relationships">
-  <p:cSld>
-    <p:spTree>
-      <p:nvGrpSpPr>
-        <p:cNvPr id="1" name=""/>
-        <p:cNvGrpSpPr/>
-        <p:nvPr/>
-      </p:nvGrpSpPr>
-      <p:grpSpPr/>
-      <p:sp>
-        <p:nvSpPr>
-          <p:cNvPr id="2" name="TextBox 1"/>
-          <p:cNvSpPr txBox="1"/>
-          <p:nvPr/>
-        </p:nvSpPr>
-        <p:spPr>
-          <a:xfrm>
-            <a:off x="502920" y="320040"/>
-            <a:ext cx="11247120" cy="548640"/>
-          </a:xfrm>
-          <a:prstGeom prst="rect">
-            <a:avLst/>
-          </a:prstGeom>
-          <a:noFill/>
-        </p:spPr>
-        <p:txBody>
-          <a:bodyPr wrap="none">
-            <a:spAutoFit/>
-          </a:bodyPr>
-          <a:lstStyle/>
-          <a:p>
-            <a:pPr>
-              <a:defRPr sz="3000" b="1">
-                <a:solidFill>
-                  <a:srgbClr val="0B2F5B"/>
-                </a:solidFill>
-              </a:defRPr>
-            </a:pPr>
-            <a:r>
-              <a:t>Embedding Lookup</a:t>
-            </a:r>
-          </a:p>
-        </p:txBody>
-      </p:sp>
-      <p:sp>
-        <p:nvSpPr>
-          <p:cNvPr id="3" name="TextBox 2"/>
-          <p:cNvSpPr txBox="1"/>
-          <p:nvPr/>
-        </p:nvSpPr>
-        <p:spPr>
-          <a:xfrm>
-            <a:off x="530352" y="868680"/>
-            <a:ext cx="10972800" cy="365760"/>
-          </a:xfrm>
-          <a:prstGeom prst="rect">
-            <a:avLst/>
-          </a:prstGeom>
-          <a:noFill/>
-        </p:spPr>
-        <p:txBody>
-          <a:bodyPr wrap="none">
-            <a:spAutoFit/>
-          </a:bodyPr>
-          <a:lstStyle/>
-          <a:p>
-            <a:pPr>
-              <a:defRPr sz="1600">
-                <a:solidFill>
-                  <a:srgbClr val="52616B"/>
-                </a:solidFill>
-              </a:defRPr>
-            </a:pPr>
-            <a:r>
-              <a:t>Token IDs become vectors</a:t>
-            </a:r>
-          </a:p>
-        </p:txBody>
-      </p:sp>
-      <p:sp>
-        <p:nvSpPr>
-          <p:cNvPr id="4" name="Rounded Rectangle 3"/>
-          <p:cNvSpPr/>
-          <p:nvPr/>
-        </p:nvSpPr>
-        <p:spPr>
-          <a:xfrm>
-            <a:off x="914400" y="1280160"/>
-            <a:ext cx="10424160" cy="1965960"/>
-          </a:xfrm>
-          <a:prstGeom prst="roundRect">
-            <a:avLst/>
-          </a:prstGeom>
-          <a:solidFill>
-            <a:srgbClr val="F5F8FC"/>
-          </a:solidFill>
-          <a:ln>
-            <a:solidFill>
-              <a:srgbClr val="BED2E6"/>
-            </a:solidFill>
-          </a:ln>
-        </p:spPr>
-        <p:style>
-          <a:lnRef idx="1">
-            <a:schemeClr val="accent1"/>
-          </a:lnRef>
-          <a:fillRef idx="3">
-            <a:schemeClr val="accent1"/>
-          </a:fillRef>
-          <a:effectRef idx="2">
-            <a:schemeClr val="accent1"/>
-          </a:effectRef>
-          <a:fontRef idx="minor">
-            <a:schemeClr val="lt1"/>
-          </a:fontRef>
-        </p:style>
-        <p:txBody>
-          <a:bodyPr rtlCol="0" anchor="ctr" lIns="182880" rIns="182880" tIns="109728"/>
-          <a:lstStyle/>
-          <a:p>
-            <a:pPr algn="ctr">
-              <a:defRPr sz="2200">
-                <a:solidFill>
-                  <a:srgbClr val="172B4D"/>
-                </a:solidFill>
-                <a:latin typeface="Consolas"/>
-              </a:defRPr>
-            </a:pPr>
-            <a:r>
-              <a:t>1 → [ 0.21, -0.44,  0.78,  0.12]</a:t>
-            </a:r>
-            <a:br/>
-            <a:r>
-              <a:t>2 → [ 0.03,  0.91, -0.14,  0.36]</a:t>
-            </a:r>
-            <a:br/>
-            <a:r>
-              <a:t>3 → [-0.62,  0.18,  0.45, -0.09]</a:t>
-            </a:r>
-          </a:p>
-        </p:txBody>
-      </p:sp>
-      <p:sp>
-        <p:nvSpPr>
-          <p:cNvPr id="5" name="Rounded Rectangle 4"/>
-          <p:cNvSpPr/>
-          <p:nvPr/>
-        </p:nvSpPr>
-        <p:spPr>
-          <a:xfrm>
-            <a:off x="914400" y="3749039"/>
-            <a:ext cx="10424160" cy="1097280"/>
-          </a:xfrm>
-          <a:prstGeom prst="roundRect">
-            <a:avLst/>
-          </a:prstGeom>
-          <a:solidFill>
-            <a:srgbClr val="EAF3FF"/>
-          </a:solidFill>
-          <a:ln w="19050">
-            <a:solidFill>
-              <a:srgbClr val="0B5CAD"/>
-            </a:solidFill>
-          </a:ln>
-        </p:spPr>
-        <p:style>
-          <a:lnRef idx="1">
-            <a:schemeClr val="accent1"/>
-          </a:lnRef>
-          <a:fillRef idx="3">
-            <a:schemeClr val="accent1"/>
-          </a:fillRef>
-          <a:effectRef idx="2">
-            <a:schemeClr val="accent1"/>
-          </a:effectRef>
-          <a:fontRef idx="minor">
-            <a:schemeClr val="lt1"/>
-          </a:fontRef>
-        </p:style>
-        <p:txBody>
-          <a:bodyPr rtlCol="0" anchor="ctr" lIns="137160" rIns="137160" tIns="91440"/>
-          <a:lstStyle/>
-          <a:p>
-            <a:pPr algn="ctr">
-              <a:defRPr sz="1900" b="1">
-                <a:solidFill>
-                  <a:srgbClr val="0B2F5B"/>
-                </a:solidFill>
-              </a:defRPr>
-            </a:pPr>
-            <a:r>
-              <a:t>Teaching point</a:t>
-            </a:r>
-          </a:p>
-          <a:p>
-            <a:pPr>
-              <a:spcAft>
-                <a:spcPts val="200"/>
-              </a:spcAft>
-              <a:defRPr sz="1800">
-                <a:solidFill>
-                  <a:srgbClr val="172B4D"/>
-                </a:solidFill>
-              </a:defRPr>
-            </a:pPr>
-            <a:r>
-              <a:t>The token ID is an index. It selects a row from the embedding matrix. The selected row is the token vector.</a:t>
-            </a:r>
-          </a:p>
-        </p:txBody>
-      </p:sp>
-      <p:sp>
-        <p:nvSpPr>
-          <p:cNvPr id="6" name="TextBox 5"/>
-          <p:cNvSpPr txBox="1"/>
-          <p:nvPr/>
-        </p:nvSpPr>
-        <p:spPr>
-          <a:xfrm>
-            <a:off x="320040" y="6473952"/>
-            <a:ext cx="11521440" cy="228600"/>
-          </a:xfrm>
-          <a:prstGeom prst="rect">
-            <a:avLst/>
-          </a:prstGeom>
-          <a:noFill/>
-        </p:spPr>
-        <p:txBody>
-          <a:bodyPr wrap="none">
-            <a:spAutoFit/>
-          </a:bodyPr>
-          <a:lstStyle/>
-          <a:p>
-            <a:pPr>
-              <a:defRPr sz="900">
-                <a:solidFill>
-                  <a:srgbClr val="52616B"/>
-                </a:solidFill>
-              </a:defRPr>
-            </a:pPr>
-            <a:r>
-              <a:t>MAGPAI Session 1 - Tokens - v1.0 | javaboy-vk | 2026-05-22 | Slide 6</a:t>
-            </a:r>
-          </a:p>
-        </p:txBody>
-      </p:sp>
-    </p:spTree>
-  </p:cSld>
-  <p:clrMapOvr>
-    <a:masterClrMapping/>
-  </p:clrMapOvr>
-</p:sld>
-</file>
-
-<file path=ppt/slides/slide7.xml><?xml version="1.0" encoding="utf-8"?>
-<p:sld xmlns:a="http://schemas.openxmlformats.org/drawingml/2006/main" xmlns:p="http://schemas.openxmlformats.org/presentationml/2006/main" xmlns:r="http://schemas.openxmlformats.org/officeDocument/2006/relationships">
-  <p:cSld>
-    <p:spTree>
-      <p:nvGrpSpPr>
-        <p:cNvPr id="1" name=""/>
-        <p:cNvGrpSpPr/>
-        <p:nvPr/>
-      </p:nvGrpSpPr>
-      <p:grpSpPr/>
-      <p:sp>
-        <p:nvSpPr>
-          <p:cNvPr id="2" name="TextBox 1"/>
-          <p:cNvSpPr txBox="1"/>
-          <p:nvPr/>
-        </p:nvSpPr>
-        <p:spPr>
-          <a:xfrm>
-            <a:off x="502920" y="320040"/>
-            <a:ext cx="11247120" cy="548640"/>
-          </a:xfrm>
-          <a:prstGeom prst="rect">
-            <a:avLst/>
-          </a:prstGeom>
-          <a:noFill/>
-        </p:spPr>
-        <p:txBody>
-          <a:bodyPr wrap="none">
-            <a:spAutoFit/>
-          </a:bodyPr>
-          <a:lstStyle/>
-          <a:p>
-            <a:pPr>
-              <a:defRPr sz="3000" b="1">
-                <a:solidFill>
-                  <a:srgbClr val="0B2F5B"/>
-                </a:solidFill>
-              </a:defRPr>
-            </a:pPr>
-            <a:r>
-              <a:t>How Token ID 1 Becomes a Vector</a:t>
-            </a:r>
-          </a:p>
-        </p:txBody>
-      </p:sp>
-      <p:sp>
-        <p:nvSpPr>
-          <p:cNvPr id="3" name="TextBox 2"/>
-          <p:cNvSpPr txBox="1"/>
-          <p:nvPr/>
-        </p:nvSpPr>
-        <p:spPr>
-          <a:xfrm>
-            <a:off x="530352" y="868680"/>
-            <a:ext cx="10972800" cy="365760"/>
-          </a:xfrm>
-          <a:prstGeom prst="rect">
-            <a:avLst/>
-          </a:prstGeom>
-          <a:noFill/>
-        </p:spPr>
-        <p:txBody>
-          <a:bodyPr wrap="none">
-            <a:spAutoFit/>
-          </a:bodyPr>
-          <a:lstStyle/>
-          <a:p>
-            <a:pPr>
-              <a:defRPr sz="1600">
-                <a:solidFill>
-                  <a:srgbClr val="52616B"/>
-                </a:solidFill>
-              </a:defRPr>
-            </a:pPr>
-            <a:r>
-              <a:t>The algorithm is a row lookup</a:t>
-            </a:r>
-          </a:p>
-        </p:txBody>
-      </p:sp>
-      <p:sp>
-        <p:nvSpPr>
-          <p:cNvPr id="4" name="Rounded Rectangle 3"/>
-          <p:cNvSpPr/>
-          <p:nvPr/>
-        </p:nvSpPr>
-        <p:spPr>
-          <a:xfrm>
-            <a:off x="1005840" y="1234440"/>
-            <a:ext cx="3657600" cy="914400"/>
-          </a:xfrm>
-          <a:prstGeom prst="roundRect">
-            <a:avLst/>
-          </a:prstGeom>
-          <a:solidFill>
-            <a:srgbClr val="F5F8FC"/>
-          </a:solidFill>
-          <a:ln>
-            <a:solidFill>
-              <a:srgbClr val="BED2E6"/>
-            </a:solidFill>
-          </a:ln>
-        </p:spPr>
-        <p:style>
-          <a:lnRef idx="1">
-            <a:schemeClr val="accent1"/>
-          </a:lnRef>
-          <a:fillRef idx="3">
-            <a:schemeClr val="accent1"/>
-          </a:fillRef>
-          <a:effectRef idx="2">
-            <a:schemeClr val="accent1"/>
-          </a:effectRef>
-          <a:fontRef idx="minor">
-            <a:schemeClr val="lt1"/>
-          </a:fontRef>
-        </p:style>
-        <p:txBody>
-          <a:bodyPr rtlCol="0" anchor="ctr" lIns="182880" rIns="182880" tIns="109728"/>
-          <a:lstStyle/>
-          <a:p>
-            <a:pPr algn="ctr">
-              <a:defRPr sz="2500">
-                <a:solidFill>
-                  <a:srgbClr val="172B4D"/>
-                </a:solidFill>
-                <a:latin typeface="Consolas"/>
-              </a:defRPr>
-            </a:pPr>
-            <a:r>
-              <a:t>Token ID 1</a:t>
-            </a:r>
-          </a:p>
-        </p:txBody>
-      </p:sp>
-      <p:cxnSp>
-        <p:nvCxnSpPr>
-          <p:cNvPr id="5" name="Connector 4"/>
-          <p:cNvCxnSpPr/>
-          <p:nvPr/>
-        </p:nvCxnSpPr>
-        <p:spPr>
-          <a:xfrm>
-            <a:off x="4709160" y="1691640"/>
-            <a:ext cx="914400" cy="0"/>
-          </a:xfrm>
-          <a:prstGeom prst="line">
-            <a:avLst/>
-          </a:prstGeom>
-          <a:ln w="38100">
-            <a:solidFill>
-              <a:srgbClr val="0B5CAD"/>
-            </a:solidFill>
-          </a:ln>
-        </p:spPr>
-        <p:style>
-          <a:lnRef idx="2">
-            <a:schemeClr val="accent1"/>
-          </a:lnRef>
-          <a:fillRef idx="0">
-            <a:schemeClr val="accent1"/>
-          </a:fillRef>
-          <a:effectRef idx="1">
-            <a:schemeClr val="accent1"/>
-          </a:effectRef>
-          <a:fontRef idx="minor">
-            <a:schemeClr val="tx1"/>
-          </a:fontRef>
-        </p:style>
-      </p:cxnSp>
-      <p:sp>
-        <p:nvSpPr>
-          <p:cNvPr id="6" name="Rounded Rectangle 5"/>
-          <p:cNvSpPr/>
-          <p:nvPr/>
-        </p:nvSpPr>
-        <p:spPr>
-          <a:xfrm>
-            <a:off x="5715000" y="1234440"/>
-            <a:ext cx="2743200" cy="914400"/>
-          </a:xfrm>
-          <a:prstGeom prst="roundRect">
-            <a:avLst/>
-          </a:prstGeom>
-          <a:solidFill>
-            <a:srgbClr val="F5F8FC"/>
-          </a:solidFill>
-          <a:ln>
-            <a:solidFill>
-              <a:srgbClr val="BED2E6"/>
-            </a:solidFill>
-          </a:ln>
-        </p:spPr>
-        <p:style>
-          <a:lnRef idx="1">
-            <a:schemeClr val="accent1"/>
-          </a:lnRef>
-          <a:fillRef idx="3">
-            <a:schemeClr val="accent1"/>
-          </a:fillRef>
-          <a:effectRef idx="2">
-            <a:schemeClr val="accent1"/>
-          </a:effectRef>
-          <a:fontRef idx="minor">
-            <a:schemeClr val="lt1"/>
-          </a:fontRef>
-        </p:style>
-        <p:txBody>
-          <a:bodyPr rtlCol="0" anchor="ctr" lIns="182880" rIns="182880" tIns="109728"/>
-          <a:lstStyle/>
-          <a:p>
-            <a:pPr algn="ctr">
-              <a:defRPr sz="2500">
-                <a:solidFill>
-                  <a:srgbClr val="172B4D"/>
-                </a:solidFill>
-                <a:latin typeface="Consolas"/>
-              </a:defRPr>
-            </a:pPr>
-            <a:r>
-              <a:t>E[1]</a:t>
-            </a:r>
-          </a:p>
-        </p:txBody>
-      </p:sp>
-      <p:cxnSp>
-        <p:nvCxnSpPr>
-          <p:cNvPr id="7" name="Connector 6"/>
-          <p:cNvCxnSpPr/>
-          <p:nvPr/>
-        </p:nvCxnSpPr>
-        <p:spPr>
-          <a:xfrm>
-            <a:off x="8549640" y="1691640"/>
-            <a:ext cx="685800" cy="0"/>
-          </a:xfrm>
-          <a:prstGeom prst="line">
-            <a:avLst/>
-          </a:prstGeom>
-          <a:ln w="38100">
-            <a:solidFill>
-              <a:srgbClr val="0B5CAD"/>
-            </a:solidFill>
-          </a:ln>
-        </p:spPr>
-        <p:style>
-          <a:lnRef idx="2">
-            <a:schemeClr val="accent1"/>
-          </a:lnRef>
-          <a:fillRef idx="0">
-            <a:schemeClr val="accent1"/>
-          </a:fillRef>
-          <a:effectRef idx="1">
-            <a:schemeClr val="accent1"/>
-          </a:effectRef>
-          <a:fontRef idx="minor">
-            <a:schemeClr val="tx1"/>
-          </a:fontRef>
-        </p:style>
-      </p:cxnSp>
-      <p:sp>
-        <p:nvSpPr>
-          <p:cNvPr id="8" name="Rounded Rectangle 7"/>
-          <p:cNvSpPr/>
-          <p:nvPr/>
-        </p:nvSpPr>
-        <p:spPr>
-          <a:xfrm>
-            <a:off x="9281160" y="1234440"/>
-            <a:ext cx="2103120" cy="914400"/>
-          </a:xfrm>
-          <a:prstGeom prst="roundRect">
-            <a:avLst/>
-          </a:prstGeom>
-          <a:solidFill>
-            <a:srgbClr val="F5F8FC"/>
-          </a:solidFill>
-          <a:ln>
-            <a:solidFill>
-              <a:srgbClr val="BED2E6"/>
-            </a:solidFill>
-          </a:ln>
-        </p:spPr>
-        <p:style>
-          <a:lnRef idx="1">
-            <a:schemeClr val="accent1"/>
-          </a:lnRef>
-          <a:fillRef idx="3">
-            <a:schemeClr val="accent1"/>
-          </a:fillRef>
-          <a:effectRef idx="2">
-            <a:schemeClr val="accent1"/>
-          </a:effectRef>
-          <a:fontRef idx="minor">
-            <a:schemeClr val="lt1"/>
-          </a:fontRef>
-        </p:style>
-        <p:txBody>
-          <a:bodyPr rtlCol="0" anchor="ctr" lIns="182880" rIns="182880" tIns="109728"/>
-          <a:lstStyle/>
-          <a:p>
-            <a:pPr algn="ctr">
-              <a:defRPr sz="1600">
-                <a:solidFill>
-                  <a:srgbClr val="172B4D"/>
-                </a:solidFill>
-                <a:latin typeface="Consolas"/>
-              </a:defRPr>
-            </a:pPr>
-            <a:r>
-              <a:t>[0.21,</a:t>
-            </a:r>
-            <a:br/>
-            <a:r>
-              <a:t>-0.44,</a:t>
-            </a:r>
-            <a:br/>
-            <a:r>
-              <a:t>0.78,</a:t>
-            </a:r>
-            <a:br/>
-            <a:r>
-              <a:t>0.12]</a:t>
-            </a:r>
-          </a:p>
-        </p:txBody>
-      </p:sp>
-      <p:sp>
-        <p:nvSpPr>
-          <p:cNvPr id="9" name="Rounded Rectangle 8"/>
-          <p:cNvSpPr/>
-          <p:nvPr/>
-        </p:nvSpPr>
-        <p:spPr>
-          <a:xfrm>
-            <a:off x="914400" y="3200400"/>
-            <a:ext cx="10424160" cy="1325880"/>
-          </a:xfrm>
-          <a:prstGeom prst="roundRect">
-            <a:avLst/>
-          </a:prstGeom>
-          <a:solidFill>
-            <a:srgbClr val="FFFFFF"/>
-          </a:solidFill>
-          <a:ln w="19050">
-            <a:solidFill>
-              <a:srgbClr val="0B5CAD"/>
-            </a:solidFill>
-          </a:ln>
-        </p:spPr>
-        <p:style>
-          <a:lnRef idx="1">
-            <a:schemeClr val="accent1"/>
-          </a:lnRef>
-          <a:fillRef idx="3">
-            <a:schemeClr val="accent1"/>
-          </a:fillRef>
-          <a:effectRef idx="2">
-            <a:schemeClr val="accent1"/>
-          </a:effectRef>
-          <a:fontRef idx="minor">
-            <a:schemeClr val="lt1"/>
-          </a:fontRef>
-        </p:style>
-        <p:txBody>
-          <a:bodyPr rtlCol="0" anchor="ctr" lIns="137160" rIns="137160" tIns="91440"/>
-          <a:lstStyle/>
-          <a:p>
-            <a:pPr algn="ctr">
-              <a:defRPr sz="1900" b="1">
-                <a:solidFill>
-                  <a:srgbClr val="0B2F5B"/>
-                </a:solidFill>
-              </a:defRPr>
-            </a:pPr>
-            <a:r>
-              <a:t>Important distinction</a:t>
-            </a:r>
-          </a:p>
-          <a:p>
-            <a:pPr>
-              <a:spcAft>
-                <a:spcPts val="200"/>
-              </a:spcAft>
-              <a:defRPr sz="1800">
-                <a:solidFill>
-                  <a:srgbClr val="172B4D"/>
-                </a:solidFill>
-              </a:defRPr>
-            </a:pPr>
-            <a:r>
-              <a:t>The integer 1 does not contain the meaning of “sales.” It points to a learned row in the embedding matrix.</a:t>
-            </a:r>
-          </a:p>
-        </p:txBody>
-      </p:sp>
-      <p:sp>
-        <p:nvSpPr>
-          <p:cNvPr id="10" name="TextBox 9"/>
-          <p:cNvSpPr txBox="1"/>
-          <p:nvPr/>
-        </p:nvSpPr>
-        <p:spPr>
-          <a:xfrm>
-            <a:off x="320040" y="6473952"/>
-            <a:ext cx="11521440" cy="228600"/>
-          </a:xfrm>
-          <a:prstGeom prst="rect">
-            <a:avLst/>
-          </a:prstGeom>
-          <a:noFill/>
-        </p:spPr>
-        <p:txBody>
-          <a:bodyPr wrap="none">
-            <a:spAutoFit/>
-          </a:bodyPr>
-          <a:lstStyle/>
-          <a:p>
-            <a:pPr>
-              <a:defRPr sz="900">
-                <a:solidFill>
-                  <a:srgbClr val="52616B"/>
-                </a:solidFill>
-              </a:defRPr>
-            </a:pPr>
-            <a:r>
-              <a:t>MAGPAI Session 1 - Tokens - v1.0 | javaboy-vk | 2026-05-22 | Slide 7</a:t>
-            </a:r>
-          </a:p>
-        </p:txBody>
-      </p:sp>
-    </p:spTree>
-  </p:cSld>
-  <p:clrMapOvr>
-    <a:masterClrMapping/>
-  </p:clrMapOvr>
-</p:sld>
-</file>
-
-<file path=ppt/slides/slide8.xml><?xml version="1.0" encoding="utf-8"?>
-<p:sld xmlns:a="http://schemas.openxmlformats.org/drawingml/2006/main" xmlns:p="http://schemas.openxmlformats.org/presentationml/2006/main" xmlns:r="http://schemas.openxmlformats.org/officeDocument/2006/relationships">
-  <p:cSld>
-    <p:spTree>
-      <p:nvGrpSpPr>
-        <p:cNvPr id="1" name=""/>
-        <p:cNvGrpSpPr/>
-        <p:nvPr/>
-      </p:nvGrpSpPr>
-      <p:grpSpPr/>
-      <p:sp>
-        <p:nvSpPr>
-          <p:cNvPr id="2" name="TextBox 1"/>
-          <p:cNvSpPr txBox="1"/>
-          <p:nvPr/>
-        </p:nvSpPr>
-        <p:spPr>
-          <a:xfrm>
-            <a:off x="502920" y="320040"/>
-            <a:ext cx="11247120" cy="548640"/>
-          </a:xfrm>
-          <a:prstGeom prst="rect">
-            <a:avLst/>
-          </a:prstGeom>
-          <a:noFill/>
-        </p:spPr>
-        <p:txBody>
-          <a:bodyPr wrap="none">
-            <a:spAutoFit/>
-          </a:bodyPr>
-          <a:lstStyle/>
-          <a:p>
-            <a:pPr>
-              <a:defRPr sz="3000" b="1">
-                <a:solidFill>
-                  <a:srgbClr val="0B2F5B"/>
-                </a:solidFill>
-              </a:defRPr>
-            </a:pPr>
-            <a:r>
-              <a:t>Linear Algebra View</a:t>
-            </a:r>
-          </a:p>
-        </p:txBody>
-      </p:sp>
-      <p:sp>
-        <p:nvSpPr>
-          <p:cNvPr id="3" name="TextBox 2"/>
-          <p:cNvSpPr txBox="1"/>
-          <p:nvPr/>
-        </p:nvSpPr>
-        <p:spPr>
-          <a:xfrm>
-            <a:off x="530352" y="868680"/>
-            <a:ext cx="10972800" cy="365760"/>
-          </a:xfrm>
-          <a:prstGeom prst="rect">
-            <a:avLst/>
-          </a:prstGeom>
-          <a:noFill/>
-        </p:spPr>
-        <p:txBody>
-          <a:bodyPr wrap="none">
-            <a:spAutoFit/>
-          </a:bodyPr>
-          <a:lstStyle/>
-          <a:p>
-            <a:pPr>
-              <a:defRPr sz="1600">
-                <a:solidFill>
-                  <a:srgbClr val="52616B"/>
-                </a:solidFill>
-              </a:defRPr>
-            </a:pPr>
-            <a:r>
-              <a:t>Embedding lookup is equivalent to one-hot matrix multiplication</a:t>
-            </a:r>
-          </a:p>
-        </p:txBody>
-      </p:sp>
-      <p:sp>
-        <p:nvSpPr>
-          <p:cNvPr id="4" name="Rounded Rectangle 3"/>
-          <p:cNvSpPr/>
-          <p:nvPr/>
-        </p:nvSpPr>
-        <p:spPr>
-          <a:xfrm>
-            <a:off x="822960" y="1234440"/>
-            <a:ext cx="10607040" cy="1920240"/>
-          </a:xfrm>
-          <a:prstGeom prst="roundRect">
-            <a:avLst/>
-          </a:prstGeom>
-          <a:solidFill>
-            <a:srgbClr val="F5F8FC"/>
-          </a:solidFill>
-          <a:ln>
-            <a:solidFill>
-              <a:srgbClr val="BED2E6"/>
-            </a:solidFill>
-          </a:ln>
-        </p:spPr>
-        <p:style>
-          <a:lnRef idx="1">
-            <a:schemeClr val="accent1"/>
-          </a:lnRef>
-          <a:fillRef idx="3">
-            <a:schemeClr val="accent1"/>
-          </a:fillRef>
-          <a:effectRef idx="2">
-            <a:schemeClr val="accent1"/>
-          </a:effectRef>
-          <a:fontRef idx="minor">
-            <a:schemeClr val="lt1"/>
-          </a:fontRef>
-        </p:style>
-        <p:txBody>
-          <a:bodyPr rtlCol="0" anchor="ctr" lIns="182880" rIns="182880" tIns="109728"/>
-          <a:lstStyle/>
-          <a:p>
-            <a:pPr algn="ctr">
-              <a:defRPr sz="2600">
-                <a:solidFill>
-                  <a:srgbClr val="172B4D"/>
-                </a:solidFill>
-                <a:latin typeface="Consolas"/>
-              </a:defRPr>
-            </a:pPr>
-            <a:r>
-              <a:t>[0, 1, 0, 0, 0, 0] × E</a:t>
-            </a:r>
-            <a:br/>
-            <a:r>
-              <a:t>=</a:t>
-            </a:r>
-            <a:br/>
-            <a:r>
-              <a:t>[0.21, -0.44, 0.78, 0.12]</a:t>
-            </a:r>
-          </a:p>
-        </p:txBody>
-      </p:sp>
-      <p:sp>
-        <p:nvSpPr>
-          <p:cNvPr id="5" name="Rounded Rectangle 4"/>
-          <p:cNvSpPr/>
-          <p:nvPr/>
-        </p:nvSpPr>
-        <p:spPr>
-          <a:xfrm>
-            <a:off x="914400" y="3749039"/>
-            <a:ext cx="10424160" cy="1188720"/>
-          </a:xfrm>
-          <a:prstGeom prst="roundRect">
-            <a:avLst/>
-          </a:prstGeom>
-          <a:solidFill>
-            <a:srgbClr val="EAF3FF"/>
-          </a:solidFill>
-          <a:ln w="19050">
-            <a:solidFill>
-              <a:srgbClr val="0B5CAD"/>
-            </a:solidFill>
-          </a:ln>
-        </p:spPr>
-        <p:style>
-          <a:lnRef idx="1">
-            <a:schemeClr val="accent1"/>
-          </a:lnRef>
-          <a:fillRef idx="3">
-            <a:schemeClr val="accent1"/>
-          </a:fillRef>
-          <a:effectRef idx="2">
-            <a:schemeClr val="accent1"/>
-          </a:effectRef>
-          <a:fontRef idx="minor">
-            <a:schemeClr val="lt1"/>
-          </a:fontRef>
-        </p:style>
-        <p:txBody>
-          <a:bodyPr rtlCol="0" anchor="ctr" lIns="137160" rIns="137160" tIns="91440"/>
-          <a:lstStyle/>
-          <a:p>
-            <a:pPr algn="ctr">
-              <a:defRPr sz="1900" b="1">
-                <a:solidFill>
-                  <a:srgbClr val="0B2F5B"/>
-                </a:solidFill>
-              </a:defRPr>
-            </a:pPr>
-            <a:r>
-              <a:t>Runtime optimization</a:t>
-            </a:r>
-          </a:p>
-          <a:p>
-            <a:pPr>
-              <a:spcAft>
-                <a:spcPts val="200"/>
-              </a:spcAft>
-              <a:defRPr sz="1800">
-                <a:solidFill>
-                  <a:srgbClr val="172B4D"/>
-                </a:solidFill>
-              </a:defRPr>
-            </a:pPr>
-            <a:r>
-              <a:t>In real code, the framework usually skips the one-hot vector and directly retrieves the row. It is faster and memory-efficient.</a:t>
-            </a:r>
-          </a:p>
-        </p:txBody>
-      </p:sp>
-      <p:sp>
-        <p:nvSpPr>
-          <p:cNvPr id="6" name="TextBox 5"/>
-          <p:cNvSpPr txBox="1"/>
-          <p:nvPr/>
-        </p:nvSpPr>
-        <p:spPr>
-          <a:xfrm>
-            <a:off x="320040" y="6473952"/>
-            <a:ext cx="11521440" cy="228600"/>
-          </a:xfrm>
-          <a:prstGeom prst="rect">
-            <a:avLst/>
-          </a:prstGeom>
-          <a:noFill/>
-        </p:spPr>
-        <p:txBody>
-          <a:bodyPr wrap="none">
-            <a:spAutoFit/>
-          </a:bodyPr>
-          <a:lstStyle/>
-          <a:p>
-            <a:pPr>
-              <a:defRPr sz="900">
-                <a:solidFill>
-                  <a:srgbClr val="52616B"/>
-                </a:solidFill>
-              </a:defRPr>
-            </a:pPr>
-            <a:r>
               <a:t>MAGPAI Session 1 - Tokens - v1.0 | javaboy-vk | 2026-05-22 | Slide 8</a:t>
-            </a:r>
-          </a:p>
-        </p:txBody>
-      </p:sp>
-    </p:spTree>
-  </p:cSld>
-  <p:clrMapOvr>
-    <a:masterClrMapping/>
-  </p:clrMapOvr>
-</p:sld>
-</file>
-
-<file path=ppt/slides/slide9.xml><?xml version="1.0" encoding="utf-8"?>
-<p:sld xmlns:a="http://schemas.openxmlformats.org/drawingml/2006/main" xmlns:p="http://schemas.openxmlformats.org/presentationml/2006/main" xmlns:r="http://schemas.openxmlformats.org/officeDocument/2006/relationships">
-  <p:cSld>
-    <p:spTree>
-      <p:nvGrpSpPr>
-        <p:cNvPr id="1" name=""/>
-        <p:cNvGrpSpPr/>
-        <p:nvPr/>
-      </p:nvGrpSpPr>
-      <p:grpSpPr/>
-      <p:sp>
-        <p:nvSpPr>
-          <p:cNvPr id="2" name="TextBox 1"/>
-          <p:cNvSpPr txBox="1"/>
-          <p:nvPr/>
-        </p:nvSpPr>
-        <p:spPr>
-          <a:xfrm>
-            <a:off x="502920" y="320040"/>
-            <a:ext cx="11247120" cy="548640"/>
-          </a:xfrm>
-          <a:prstGeom prst="rect">
-            <a:avLst/>
-          </a:prstGeom>
-          <a:noFill/>
-        </p:spPr>
-        <p:txBody>
-          <a:bodyPr wrap="none">
-            <a:spAutoFit/>
-          </a:bodyPr>
-          <a:lstStyle/>
-          <a:p>
-            <a:pPr>
-              <a:defRPr sz="3000" b="1">
-                <a:solidFill>
-                  <a:srgbClr val="0B2F5B"/>
-                </a:solidFill>
-              </a:defRPr>
-            </a:pPr>
-            <a:r>
-              <a:t>Live Demo Path</a:t>
-            </a:r>
-          </a:p>
-        </p:txBody>
-      </p:sp>
-      <p:sp>
-        <p:nvSpPr>
-          <p:cNvPr id="3" name="TextBox 2"/>
-          <p:cNvSpPr txBox="1"/>
-          <p:nvPr/>
-        </p:nvSpPr>
-        <p:spPr>
-          <a:xfrm>
-            <a:off x="530352" y="868680"/>
-            <a:ext cx="10972800" cy="365760"/>
-          </a:xfrm>
-          <a:prstGeom prst="rect">
-            <a:avLst/>
-          </a:prstGeom>
-          <a:noFill/>
-        </p:spPr>
-        <p:txBody>
-          <a:bodyPr wrap="none">
-            <a:spAutoFit/>
-          </a:bodyPr>
-          <a:lstStyle/>
-          <a:p>
-            <a:pPr>
-              <a:defRPr sz="1600">
-                <a:solidFill>
-                  <a:srgbClr val="52616B"/>
-                </a:solidFill>
-              </a:defRPr>
-            </a:pPr>
-            <a:r>
-              <a:t>VS Code runs the demos</a:t>
-            </a:r>
-          </a:p>
-        </p:txBody>
-      </p:sp>
-      <p:sp>
-        <p:nvSpPr>
-          <p:cNvPr id="4" name="Rounded Rectangle 3"/>
-          <p:cNvSpPr/>
-          <p:nvPr/>
-        </p:nvSpPr>
-        <p:spPr>
-          <a:xfrm>
-            <a:off x="914400" y="1188720"/>
-            <a:ext cx="10424160" cy="1280160"/>
-          </a:xfrm>
-          <a:prstGeom prst="roundRect">
-            <a:avLst/>
-          </a:prstGeom>
-          <a:solidFill>
-            <a:srgbClr val="F5F8FC"/>
-          </a:solidFill>
-          <a:ln>
-            <a:solidFill>
-              <a:srgbClr val="BED2E6"/>
-            </a:solidFill>
-          </a:ln>
-        </p:spPr>
-        <p:style>
-          <a:lnRef idx="1">
-            <a:schemeClr val="accent1"/>
-          </a:lnRef>
-          <a:fillRef idx="3">
-            <a:schemeClr val="accent1"/>
-          </a:fillRef>
-          <a:effectRef idx="2">
-            <a:schemeClr val="accent1"/>
-          </a:effectRef>
-          <a:fontRef idx="minor">
-            <a:schemeClr val="lt1"/>
-          </a:fontRef>
-        </p:style>
-        <p:txBody>
-          <a:bodyPr rtlCol="0" anchor="ctr" lIns="182880" rIns="182880" tIns="109728"/>
-          <a:lstStyle/>
-          <a:p>
-            <a:pPr algn="ctr">
-              <a:defRPr sz="2500">
-                <a:solidFill>
-                  <a:srgbClr val="172B4D"/>
-                </a:solidFill>
-                <a:latin typeface="Consolas"/>
-              </a:defRPr>
-            </a:pPr>
-            <a:r>
-              <a:t>Sentence → Tokens → Token IDs → Embedding Table → Vector Matrix</a:t>
-            </a:r>
-          </a:p>
-        </p:txBody>
-      </p:sp>
-      <p:sp>
-        <p:nvSpPr>
-          <p:cNvPr id="5" name="Rounded Rectangle 4"/>
-          <p:cNvSpPr/>
-          <p:nvPr/>
-        </p:nvSpPr>
-        <p:spPr>
-          <a:xfrm>
-            <a:off x="914400" y="2834640"/>
-            <a:ext cx="3200400" cy="1417320"/>
-          </a:xfrm>
-          <a:prstGeom prst="roundRect">
-            <a:avLst/>
-          </a:prstGeom>
-          <a:solidFill>
-            <a:srgbClr val="FFFFFF"/>
-          </a:solidFill>
-          <a:ln w="19050">
-            <a:solidFill>
-              <a:srgbClr val="0B5CAD"/>
-            </a:solidFill>
-          </a:ln>
-        </p:spPr>
-        <p:style>
-          <a:lnRef idx="1">
-            <a:schemeClr val="accent1"/>
-          </a:lnRef>
-          <a:fillRef idx="3">
-            <a:schemeClr val="accent1"/>
-          </a:fillRef>
-          <a:effectRef idx="2">
-            <a:schemeClr val="accent1"/>
-          </a:effectRef>
-          <a:fontRef idx="minor">
-            <a:schemeClr val="lt1"/>
-          </a:fontRef>
-        </p:style>
-        <p:txBody>
-          <a:bodyPr rtlCol="0" anchor="ctr" lIns="137160" rIns="137160" tIns="91440"/>
-          <a:lstStyle/>
-          <a:p>
-            <a:pPr algn="ctr">
-              <a:defRPr sz="1800" b="1">
-                <a:solidFill>
-                  <a:srgbClr val="0B2F5B"/>
-                </a:solidFill>
-              </a:defRPr>
-            </a:pPr>
-            <a:r>
-              <a:t>Demo 1</a:t>
-            </a:r>
-          </a:p>
-          <a:p>
-            <a:pPr>
-              <a:spcAft>
-                <a:spcPts val="200"/>
-              </a:spcAft>
-              <a:defRPr sz="1700">
-                <a:solidFill>
-                  <a:srgbClr val="172B4D"/>
-                </a:solidFill>
-              </a:defRPr>
-            </a:pPr>
-            <a:r>
-              <a:t>token_demo.py</a:t>
-            </a:r>
-          </a:p>
-          <a:p>
-            <a:pPr>
-              <a:spcAft>
-                <a:spcPts val="200"/>
-              </a:spcAft>
-              <a:defRPr sz="1700">
-                <a:solidFill>
-                  <a:srgbClr val="172B4D"/>
-                </a:solidFill>
-              </a:defRPr>
-            </a:pPr>
-            <a:r>
-              <a:t>Terminal pipeline</a:t>
-            </a:r>
-          </a:p>
-        </p:txBody>
-      </p:sp>
-      <p:sp>
-        <p:nvSpPr>
-          <p:cNvPr id="6" name="Rounded Rectangle 5"/>
-          <p:cNvSpPr/>
-          <p:nvPr/>
-        </p:nvSpPr>
-        <p:spPr>
-          <a:xfrm>
-            <a:off x="4480560" y="2834640"/>
-            <a:ext cx="3200400" cy="1417320"/>
-          </a:xfrm>
-          <a:prstGeom prst="roundRect">
-            <a:avLst/>
-          </a:prstGeom>
-          <a:solidFill>
-            <a:srgbClr val="FFFFFF"/>
-          </a:solidFill>
-          <a:ln w="19050">
-            <a:solidFill>
-              <a:srgbClr val="0B5CAD"/>
-            </a:solidFill>
-          </a:ln>
-        </p:spPr>
-        <p:style>
-          <a:lnRef idx="1">
-            <a:schemeClr val="accent1"/>
-          </a:lnRef>
-          <a:fillRef idx="3">
-            <a:schemeClr val="accent1"/>
-          </a:fillRef>
-          <a:effectRef idx="2">
-            <a:schemeClr val="accent1"/>
-          </a:effectRef>
-          <a:fontRef idx="minor">
-            <a:schemeClr val="lt1"/>
-          </a:fontRef>
-        </p:style>
-        <p:txBody>
-          <a:bodyPr rtlCol="0" anchor="ctr" lIns="137160" rIns="137160" tIns="91440"/>
-          <a:lstStyle/>
-          <a:p>
-            <a:pPr algn="ctr">
-              <a:defRPr sz="1800" b="1">
-                <a:solidFill>
-                  <a:srgbClr val="0B2F5B"/>
-                </a:solidFill>
-              </a:defRPr>
-            </a:pPr>
-            <a:r>
-              <a:t>Demo 2</a:t>
-            </a:r>
-          </a:p>
-          <a:p>
-            <a:pPr>
-              <a:spcAft>
-                <a:spcPts val="200"/>
-              </a:spcAft>
-              <a:defRPr sz="1700">
-                <a:solidFill>
-                  <a:srgbClr val="172B4D"/>
-                </a:solidFill>
-              </a:defRPr>
-            </a:pPr>
-            <a:r>
-              <a:t>token_streamlit_app.py</a:t>
-            </a:r>
-          </a:p>
-          <a:p>
-            <a:pPr>
-              <a:spcAft>
-                <a:spcPts val="200"/>
-              </a:spcAft>
-              <a:defRPr sz="1700">
-                <a:solidFill>
-                  <a:srgbClr val="172B4D"/>
-                </a:solidFill>
-              </a:defRPr>
-            </a:pPr>
-            <a:r>
-              <a:t>Visual table</a:t>
-            </a:r>
-          </a:p>
-        </p:txBody>
-      </p:sp>
-      <p:sp>
-        <p:nvSpPr>
-          <p:cNvPr id="7" name="Rounded Rectangle 6"/>
-          <p:cNvSpPr/>
-          <p:nvPr/>
-        </p:nvSpPr>
-        <p:spPr>
-          <a:xfrm>
-            <a:off x="8046720" y="2834640"/>
-            <a:ext cx="3200400" cy="1417320"/>
-          </a:xfrm>
-          <a:prstGeom prst="roundRect">
-            <a:avLst/>
-          </a:prstGeom>
-          <a:solidFill>
-            <a:srgbClr val="FFFFFF"/>
-          </a:solidFill>
-          <a:ln w="19050">
-            <a:solidFill>
-              <a:srgbClr val="0B5CAD"/>
-            </a:solidFill>
-          </a:ln>
-        </p:spPr>
-        <p:style>
-          <a:lnRef idx="1">
-            <a:schemeClr val="accent1"/>
-          </a:lnRef>
-          <a:fillRef idx="3">
-            <a:schemeClr val="accent1"/>
-          </a:fillRef>
-          <a:effectRef idx="2">
-            <a:schemeClr val="accent1"/>
-          </a:effectRef>
-          <a:fontRef idx="minor">
-            <a:schemeClr val="lt1"/>
-          </a:fontRef>
-        </p:style>
-        <p:txBody>
-          <a:bodyPr rtlCol="0" anchor="ctr" lIns="137160" rIns="137160" tIns="91440"/>
-          <a:lstStyle/>
-          <a:p>
-            <a:pPr algn="ctr">
-              <a:defRPr sz="1800" b="1">
-                <a:solidFill>
-                  <a:srgbClr val="0B2F5B"/>
-                </a:solidFill>
-              </a:defRPr>
-            </a:pPr>
-            <a:r>
-              <a:t>Demo 3</a:t>
-            </a:r>
-          </a:p>
-          <a:p>
-            <a:pPr>
-              <a:spcAft>
-                <a:spcPts val="200"/>
-              </a:spcAft>
-              <a:defRPr sz="1700">
-                <a:solidFill>
-                  <a:srgbClr val="172B4D"/>
-                </a:solidFill>
-              </a:defRPr>
-            </a:pPr>
-            <a:r>
-              <a:t>embedding_lookup_linear_algebra_demo.py</a:t>
-            </a:r>
-          </a:p>
-          <a:p>
-            <a:pPr>
-              <a:spcAft>
-                <a:spcPts val="200"/>
-              </a:spcAft>
-              <a:defRPr sz="1700">
-                <a:solidFill>
-                  <a:srgbClr val="172B4D"/>
-                </a:solidFill>
-              </a:defRPr>
-            </a:pPr>
-            <a:r>
-              <a:t>Lookup vs matrix multiply</a:t>
-            </a:r>
-          </a:p>
-        </p:txBody>
-      </p:sp>
-      <p:sp>
-        <p:nvSpPr>
-          <p:cNvPr id="8" name="TextBox 7"/>
-          <p:cNvSpPr txBox="1"/>
-          <p:nvPr/>
-        </p:nvSpPr>
-        <p:spPr>
-          <a:xfrm>
-            <a:off x="320040" y="6473952"/>
-            <a:ext cx="11521440" cy="228600"/>
-          </a:xfrm>
-          <a:prstGeom prst="rect">
-            <a:avLst/>
-          </a:prstGeom>
-          <a:noFill/>
-        </p:spPr>
-        <p:txBody>
-          <a:bodyPr wrap="none">
-            <a:spAutoFit/>
-          </a:bodyPr>
-          <a:lstStyle/>
-          <a:p>
-            <a:pPr>
-              <a:defRPr sz="900">
-                <a:solidFill>
-                  <a:srgbClr val="52616B"/>
-                </a:solidFill>
-              </a:defRPr>
-            </a:pPr>
-            <a:r>
-              <a:t>MAGPAI Session 1 - Tokens - v1.0 | javaboy-vk | 2026-05-22 | Slide 9</a:t>
             </a:r>
           </a:p>
         </p:txBody>

--- a/pptx/Session_01_Tokens_v1.0.pptx
+++ b/pptx/Session_01_Tokens_v1.0.pptx
@@ -10,12 +10,18 @@
     <p:sldId id="257" r:id="rId4"/>
     <p:sldId id="258" r:id="rId5"/>
     <p:sldId id="259" r:id="rId6"/>
-    <p:sldId id="260" r:id="rId7"/>
-    <p:sldId id="261" r:id="rId8"/>
-    <p:sldId id="262" r:id="rId9"/>
-    <p:sldId id="263" r:id="rId10"/>
-    <p:sldId id="264" r:id="rId11"/>
-    <p:sldId id="265" r:id="rId12"/>
+    <p:sldId id="267" r:id="rId7"/>
+    <p:sldId id="260" r:id="rId8"/>
+    <p:sldId id="268" r:id="rId9"/>
+    <p:sldId id="261" r:id="rId10"/>
+    <p:sldId id="269" r:id="rId11"/>
+    <p:sldId id="262" r:id="rId12"/>
+    <p:sldId id="263" r:id="rId13"/>
+    <p:sldId id="270" r:id="rId14"/>
+    <p:sldId id="271" r:id="rId15"/>
+    <p:sldId id="272" r:id="rId16"/>
+    <p:sldId id="264" r:id="rId17"/>
+    <p:sldId id="265" r:id="rId18"/>
   </p:sldIdLst>
   <p:sldSz cx="12192000" cy="6858000"/>
   <p:notesSz cx="6858000" cy="9144000"/>
@@ -312,7 +318,7 @@
           <a:p>
             <a:fld id="{5BCAD085-E8A6-8845-BD4E-CB4CCA059FC4}" type="datetimeFigureOut">
               <a:rPr lang="en-US" smtClean="0"/>
-              <a:t>5/23/2026</a:t>
+              <a:t>5/24/2026</a:t>
             </a:fld>
             <a:endParaRPr lang="en-US"/>
           </a:p>
@@ -480,7 +486,7 @@
           <a:p>
             <a:fld id="{5BCAD085-E8A6-8845-BD4E-CB4CCA059FC4}" type="datetimeFigureOut">
               <a:rPr lang="en-US" smtClean="0"/>
-              <a:t>5/23/2026</a:t>
+              <a:t>5/24/2026</a:t>
             </a:fld>
             <a:endParaRPr lang="en-US"/>
           </a:p>
@@ -658,7 +664,7 @@
           <a:p>
             <a:fld id="{5BCAD085-E8A6-8845-BD4E-CB4CCA059FC4}" type="datetimeFigureOut">
               <a:rPr lang="en-US" smtClean="0"/>
-              <a:t>5/23/2026</a:t>
+              <a:t>5/24/2026</a:t>
             </a:fld>
             <a:endParaRPr lang="en-US"/>
           </a:p>
@@ -826,7 +832,7 @@
           <a:p>
             <a:fld id="{5BCAD085-E8A6-8845-BD4E-CB4CCA059FC4}" type="datetimeFigureOut">
               <a:rPr lang="en-US" smtClean="0"/>
-              <a:t>5/23/2026</a:t>
+              <a:t>5/24/2026</a:t>
             </a:fld>
             <a:endParaRPr lang="en-US"/>
           </a:p>
@@ -1071,7 +1077,7 @@
           <a:p>
             <a:fld id="{5BCAD085-E8A6-8845-BD4E-CB4CCA059FC4}" type="datetimeFigureOut">
               <a:rPr lang="en-US" smtClean="0"/>
-              <a:t>5/23/2026</a:t>
+              <a:t>5/24/2026</a:t>
             </a:fld>
             <a:endParaRPr lang="en-US"/>
           </a:p>
@@ -1356,7 +1362,7 @@
           <a:p>
             <a:fld id="{5BCAD085-E8A6-8845-BD4E-CB4CCA059FC4}" type="datetimeFigureOut">
               <a:rPr lang="en-US" smtClean="0"/>
-              <a:t>5/23/2026</a:t>
+              <a:t>5/24/2026</a:t>
             </a:fld>
             <a:endParaRPr lang="en-US"/>
           </a:p>
@@ -1775,7 +1781,7 @@
           <a:p>
             <a:fld id="{5BCAD085-E8A6-8845-BD4E-CB4CCA059FC4}" type="datetimeFigureOut">
               <a:rPr lang="en-US" smtClean="0"/>
-              <a:t>5/23/2026</a:t>
+              <a:t>5/24/2026</a:t>
             </a:fld>
             <a:endParaRPr lang="en-US"/>
           </a:p>
@@ -1892,7 +1898,7 @@
           <a:p>
             <a:fld id="{5BCAD085-E8A6-8845-BD4E-CB4CCA059FC4}" type="datetimeFigureOut">
               <a:rPr lang="en-US" smtClean="0"/>
-              <a:t>5/23/2026</a:t>
+              <a:t>5/24/2026</a:t>
             </a:fld>
             <a:endParaRPr lang="en-US"/>
           </a:p>
@@ -1987,7 +1993,7 @@
           <a:p>
             <a:fld id="{5BCAD085-E8A6-8845-BD4E-CB4CCA059FC4}" type="datetimeFigureOut">
               <a:rPr lang="en-US" smtClean="0"/>
-              <a:t>5/23/2026</a:t>
+              <a:t>5/24/2026</a:t>
             </a:fld>
             <a:endParaRPr lang="en-US"/>
           </a:p>
@@ -2262,7 +2268,7 @@
           <a:p>
             <a:fld id="{5BCAD085-E8A6-8845-BD4E-CB4CCA059FC4}" type="datetimeFigureOut">
               <a:rPr lang="en-US" smtClean="0"/>
-              <a:t>5/23/2026</a:t>
+              <a:t>5/24/2026</a:t>
             </a:fld>
             <a:endParaRPr lang="en-US"/>
           </a:p>
@@ -2514,7 +2520,7 @@
           <a:p>
             <a:fld id="{5BCAD085-E8A6-8845-BD4E-CB4CCA059FC4}" type="datetimeFigureOut">
               <a:rPr lang="en-US" smtClean="0"/>
-              <a:t>5/23/2026</a:t>
+              <a:t>5/24/2026</a:t>
             </a:fld>
             <a:endParaRPr lang="en-US"/>
           </a:p>
@@ -2725,7 +2731,7 @@
           <a:p>
             <a:fld id="{5BCAD085-E8A6-8845-BD4E-CB4CCA059FC4}" type="datetimeFigureOut">
               <a:rPr lang="en-US" smtClean="0"/>
-              <a:t>5/23/2026</a:t>
+              <a:t>5/24/2026</a:t>
             </a:fld>
             <a:endParaRPr lang="en-US"/>
           </a:p>
@@ -3292,84 +3298,86 @@
       </p:grpSpPr>
       <p:sp>
         <p:nvSpPr>
-          <p:cNvPr id="2" name="TextBox 1"/>
-          <p:cNvSpPr txBox="1"/>
-          <p:nvPr/>
-        </p:nvSpPr>
-        <p:spPr>
-          <a:xfrm>
-            <a:off x="502920" y="320040"/>
-            <a:ext cx="11247120" cy="548640"/>
+          <p:cNvPr id="2" name="Title"/>
+          <p:cNvSpPr/>
+          <p:nvPr/>
+        </p:nvSpPr>
+        <p:spPr>
+          <a:xfrm>
+            <a:off x="640080" y="365760"/>
+            <a:ext cx="10911840" cy="548640"/>
           </a:xfrm>
           <a:prstGeom prst="rect">
             <a:avLst/>
           </a:prstGeom>
           <a:noFill/>
-        </p:spPr>
-        <p:txBody>
-          <a:bodyPr wrap="none">
-            <a:spAutoFit/>
-          </a:bodyPr>
-          <a:lstStyle/>
-          <a:p>
-            <a:pPr>
-              <a:defRPr sz="3000" b="1">
+          <a:ln/>
+        </p:spPr>
+        <p:txBody>
+          <a:bodyPr lIns="0" tIns="0" rIns="0" bIns="0" rtlCol="0" anchor="t"/>
+          <a:lstStyle/>
+          <a:p>
+            <a:pPr algn="l">
+              <a:defRPr sz="3000"/>
+            </a:pPr>
+            <a:r>
+              <a:rPr sz="3000" b="1" dirty="0">
                 <a:solidFill>
                   <a:srgbClr val="0B2F5B"/>
                 </a:solidFill>
-              </a:defRPr>
-            </a:pPr>
-            <a:r>
-              <a:t>Live Demo Path</a:t>
-            </a:r>
-          </a:p>
-        </p:txBody>
-      </p:sp>
-      <p:sp>
-        <p:nvSpPr>
-          <p:cNvPr id="3" name="TextBox 2"/>
-          <p:cNvSpPr txBox="1"/>
-          <p:nvPr/>
-        </p:nvSpPr>
-        <p:spPr>
-          <a:xfrm>
-            <a:off x="530352" y="868680"/>
-            <a:ext cx="10972800" cy="365760"/>
+                <a:latin typeface="Aptos"/>
+              </a:rPr>
+              <a:t>What Is a Vector?</a:t>
+            </a:r>
+          </a:p>
+        </p:txBody>
+      </p:sp>
+      <p:sp>
+        <p:nvSpPr>
+          <p:cNvPr id="3" name="Subtitle"/>
+          <p:cNvSpPr/>
+          <p:nvPr/>
+        </p:nvSpPr>
+        <p:spPr>
+          <a:xfrm>
+            <a:off x="640080" y="868680"/>
+            <a:ext cx="10911840" cy="365760"/>
           </a:xfrm>
           <a:prstGeom prst="rect">
             <a:avLst/>
           </a:prstGeom>
           <a:noFill/>
-        </p:spPr>
-        <p:txBody>
-          <a:bodyPr wrap="none">
-            <a:spAutoFit/>
-          </a:bodyPr>
-          <a:lstStyle/>
-          <a:p>
-            <a:pPr>
-              <a:defRPr sz="1600">
-                <a:solidFill>
-                  <a:srgbClr val="52616B"/>
-                </a:solidFill>
-              </a:defRPr>
-            </a:pPr>
-            <a:r>
-              <a:t>VS Code runs the demos</a:t>
-            </a:r>
-          </a:p>
-        </p:txBody>
-      </p:sp>
-      <p:sp>
-        <p:nvSpPr>
-          <p:cNvPr id="4" name="Rounded Rectangle 3"/>
+          <a:ln/>
+        </p:spPr>
+        <p:txBody>
+          <a:bodyPr lIns="0" tIns="0" rIns="0" bIns="0" rtlCol="0" anchor="t"/>
+          <a:lstStyle/>
+          <a:p>
+            <a:pPr algn="l">
+              <a:defRPr sz="1600"/>
+            </a:pPr>
+            <a:r>
+              <a:rPr sz="1600" dirty="0">
+                <a:solidFill>
+                  <a:srgbClr val="5E6C84"/>
+                </a:solidFill>
+                <a:latin typeface="Aptos"/>
+              </a:rPr>
+              <a:t>A compact list of numbers the neural network can compute with</a:t>
+            </a:r>
+          </a:p>
+        </p:txBody>
+      </p:sp>
+      <p:sp>
+        <p:nvSpPr>
+          <p:cNvPr id="4" name="Vector"/>
           <p:cNvSpPr/>
           <p:nvPr/>
         </p:nvSpPr>
         <p:spPr>
           <a:xfrm>
-            <a:off x="914400" y="1188720"/>
-            <a:ext cx="10424160" cy="1280160"/>
+            <a:off x="822960" y="1371600"/>
+            <a:ext cx="3474720" cy="2194560"/>
           </a:xfrm>
           <a:prstGeom prst="roundRect">
             <a:avLst/>
@@ -3383,294 +3391,211 @@
             </a:solidFill>
           </a:ln>
         </p:spPr>
-        <p:style>
-          <a:lnRef idx="1">
-            <a:schemeClr val="accent1"/>
-          </a:lnRef>
-          <a:fillRef idx="3">
-            <a:schemeClr val="accent1"/>
-          </a:fillRef>
-          <a:effectRef idx="2">
-            <a:schemeClr val="accent1"/>
-          </a:effectRef>
-          <a:fontRef idx="minor">
-            <a:schemeClr val="lt1"/>
-          </a:fontRef>
-        </p:style>
-        <p:txBody>
-          <a:bodyPr lIns="182880" tIns="109728" rIns="182880" rtlCol="0" anchor="ctr"/>
-          <a:lstStyle/>
-          <a:p>
-            <a:pPr algn="ctr">
-              <a:defRPr sz="2500">
+        <p:txBody>
+          <a:bodyPr lIns="137160" tIns="137160" rIns="137160" bIns="137160" rtlCol="0" anchor="t"/>
+          <a:lstStyle/>
+          <a:p>
+            <a:pPr algn="l">
+              <a:defRPr sz="1750"/>
+            </a:pPr>
+            <a:r>
+              <a:rPr sz="1750" b="1" dirty="0">
+                <a:solidFill>
+                  <a:srgbClr val="0B2F5B"/>
+                </a:solidFill>
+                <a:latin typeface="Aptos"/>
+              </a:rPr>
+              <a:t>Vector</a:t>
+            </a:r>
+          </a:p>
+          <a:p>
+            <a:pPr algn="l">
+              <a:defRPr sz="1500"/>
+            </a:pPr>
+            <a:r>
+              <a:rPr sz="1500" dirty="0">
                 <a:solidFill>
                   <a:srgbClr val="172B4D"/>
                 </a:solidFill>
                 <a:latin typeface="Consolas"/>
-              </a:defRPr>
-            </a:pPr>
-            <a:r>
-              <a:t>Sentence → Tokens → Token IDs → Embedding Table → Vector Matrix</a:t>
-            </a:r>
-          </a:p>
-        </p:txBody>
-      </p:sp>
-      <p:sp>
-        <p:nvSpPr>
-          <p:cNvPr id="5" name="Rounded Rectangle 4"/>
+              </a:rPr>
+              <a:t>sales vector:</a:t>
+            </a:r>
+          </a:p>
+          <a:p>
+            <a:pPr algn="l">
+              <a:defRPr sz="1500"/>
+            </a:pPr>
+            <a:r>
+              <a:rPr sz="1500" dirty="0">
+                <a:solidFill>
+                  <a:srgbClr val="172B4D"/>
+                </a:solidFill>
+                <a:latin typeface="Consolas"/>
+              </a:rPr>
+              <a:t>[-0.62, 0.18, 0.45, -0.09]</a:t>
+            </a:r>
+          </a:p>
+        </p:txBody>
+      </p:sp>
+      <p:sp>
+        <p:nvSpPr>
+          <p:cNvPr id="5" name="Algorithm"/>
           <p:cNvSpPr/>
           <p:nvPr/>
         </p:nvSpPr>
         <p:spPr>
           <a:xfrm>
-            <a:off x="914400" y="2834640"/>
-            <a:ext cx="3200400" cy="1417320"/>
+            <a:off x="4846320" y="1188720"/>
+            <a:ext cx="5760720" cy="2560320"/>
           </a:xfrm>
           <a:prstGeom prst="roundRect">
             <a:avLst/>
           </a:prstGeom>
           <a:solidFill>
+            <a:srgbClr val="F5F8FC"/>
+          </a:solidFill>
+          <a:ln>
+            <a:solidFill>
+              <a:srgbClr val="BED2E6"/>
+            </a:solidFill>
+          </a:ln>
+        </p:spPr>
+        <p:txBody>
+          <a:bodyPr lIns="137160" tIns="137160" rIns="137160" bIns="137160" rtlCol="0" anchor="t"/>
+          <a:lstStyle/>
+          <a:p>
+            <a:pPr algn="l">
+              <a:defRPr sz="1750"/>
+            </a:pPr>
+            <a:r>
+              <a:rPr sz="1750" b="1" dirty="0">
+                <a:solidFill>
+                  <a:srgbClr val="0B2F5B"/>
+                </a:solidFill>
+                <a:latin typeface="Aptos"/>
+              </a:rPr>
+              <a:t>Demo algorithm for sales</a:t>
+            </a:r>
+          </a:p>
+          <a:p>
+            <a:pPr algn="l">
+              <a:defRPr sz="1500"/>
+            </a:pPr>
+            <a:r>
+              <a:rPr sz="1500" dirty="0">
+                <a:solidFill>
+                  <a:srgbClr val="172B4D"/>
+                </a:solidFill>
+                <a:latin typeface="Consolas"/>
+              </a:rPr>
+              <a:t>1. Token: "sales"</a:t>
+            </a:r>
+          </a:p>
+          <a:p>
+            <a:pPr algn="l">
+              <a:defRPr sz="1500"/>
+            </a:pPr>
+            <a:r>
+              <a:rPr sz="1500" dirty="0">
+                <a:solidFill>
+                  <a:srgbClr val="172B4D"/>
+                </a:solidFill>
+                <a:latin typeface="Consolas"/>
+              </a:rPr>
+              <a:t>2. Vocabulary lookup: "sales" -&gt; 3</a:t>
+            </a:r>
+          </a:p>
+          <a:p>
+            <a:pPr algn="l">
+              <a:defRPr sz="1500"/>
+            </a:pPr>
+            <a:r>
+              <a:rPr sz="1500" dirty="0">
+                <a:solidFill>
+                  <a:srgbClr val="172B4D"/>
+                </a:solidFill>
+                <a:latin typeface="Consolas"/>
+              </a:rPr>
+              <a:t>3. Embedding lookup: E[3]</a:t>
+            </a:r>
+          </a:p>
+          <a:p>
+            <a:pPr algn="l">
+              <a:defRPr sz="1500"/>
+            </a:pPr>
+            <a:r>
+              <a:rPr sz="1500" dirty="0">
+                <a:solidFill>
+                  <a:srgbClr val="172B4D"/>
+                </a:solidFill>
+                <a:latin typeface="Consolas"/>
+              </a:rPr>
+              <a:t>4. Output: [-0.62, 0.18, 0.45, -0.09]</a:t>
+            </a:r>
+          </a:p>
+        </p:txBody>
+      </p:sp>
+      <p:sp>
+        <p:nvSpPr>
+          <p:cNvPr id="6" name="Key takeaway"/>
+          <p:cNvSpPr/>
+          <p:nvPr/>
+        </p:nvSpPr>
+        <p:spPr>
+          <a:xfrm>
+            <a:off x="1097280" y="4206240"/>
+            <a:ext cx="9966960" cy="914400"/>
+          </a:xfrm>
+          <a:prstGeom prst="roundRect">
+            <a:avLst/>
+          </a:prstGeom>
+          <a:solidFill>
             <a:srgbClr val="FFFFFF"/>
           </a:solidFill>
-          <a:ln w="19050">
+          <a:ln>
             <a:solidFill>
               <a:srgbClr val="0B5CAD"/>
             </a:solidFill>
           </a:ln>
         </p:spPr>
-        <p:style>
-          <a:lnRef idx="1">
-            <a:schemeClr val="accent1"/>
-          </a:lnRef>
-          <a:fillRef idx="3">
-            <a:schemeClr val="accent1"/>
-          </a:fillRef>
-          <a:effectRef idx="2">
-            <a:schemeClr val="accent1"/>
-          </a:effectRef>
-          <a:fontRef idx="minor">
-            <a:schemeClr val="lt1"/>
-          </a:fontRef>
-        </p:style>
-        <p:txBody>
-          <a:bodyPr lIns="137160" tIns="91440" rIns="137160" rtlCol="0" anchor="ctr"/>
+        <p:txBody>
+          <a:bodyPr lIns="91440" tIns="91440" rIns="91440" bIns="91440" rtlCol="0" anchor="ctr"/>
           <a:lstStyle/>
           <a:p>
             <a:pPr algn="ctr">
-              <a:defRPr sz="1800" b="1">
+              <a:defRPr sz="1850"/>
+            </a:pPr>
+            <a:r>
+              <a:rPr sz="1850" b="1" dirty="0">
                 <a:solidFill>
                   <a:srgbClr val="0B2F5B"/>
                 </a:solidFill>
-              </a:defRPr>
-            </a:pPr>
-            <a:r>
-              <a:t>Demo 1</a:t>
-            </a:r>
-          </a:p>
-          <a:p>
-            <a:pPr>
-              <a:spcAft>
-                <a:spcPts val="200"/>
-              </a:spcAft>
-              <a:defRPr sz="1700">
+                <a:latin typeface="Aptos"/>
+              </a:rPr>
+              <a:t>Key takeaway</a:t>
+            </a:r>
+          </a:p>
+          <a:p>
+            <a:pPr algn="ctr">
+              <a:defRPr sz="1700"/>
+            </a:pPr>
+            <a:r>
+              <a:rPr sz="1700" dirty="0">
                 <a:solidFill>
                   <a:srgbClr val="172B4D"/>
                 </a:solidFill>
-              </a:defRPr>
-            </a:pPr>
-            <a:r>
-              <a:t>token_demo.py</a:t>
-            </a:r>
-          </a:p>
-          <a:p>
-            <a:pPr>
-              <a:spcAft>
-                <a:spcPts val="200"/>
-              </a:spcAft>
-              <a:defRPr sz="1700">
-                <a:solidFill>
-                  <a:srgbClr val="172B4D"/>
-                </a:solidFill>
-              </a:defRPr>
-            </a:pPr>
-            <a:r>
-              <a:t>Terminal pipeline</a:t>
-            </a:r>
-          </a:p>
-        </p:txBody>
-      </p:sp>
-      <p:sp>
-        <p:nvSpPr>
-          <p:cNvPr id="6" name="Rounded Rectangle 5"/>
+                <a:latin typeface="Aptos"/>
+              </a:rPr>
+              <a:t>A vector is the numeric representation that moves forward. The values are learned, then selected by ID.</a:t>
+            </a:r>
+          </a:p>
+        </p:txBody>
+      </p:sp>
+      <p:sp>
+        <p:nvSpPr>
+          <p:cNvPr id="40" name="Footer"/>
           <p:cNvSpPr/>
-          <p:nvPr/>
-        </p:nvSpPr>
-        <p:spPr>
-          <a:xfrm>
-            <a:off x="4480560" y="2834640"/>
-            <a:ext cx="3200400" cy="1417320"/>
-          </a:xfrm>
-          <a:prstGeom prst="roundRect">
-            <a:avLst/>
-          </a:prstGeom>
-          <a:solidFill>
-            <a:srgbClr val="FFFFFF"/>
-          </a:solidFill>
-          <a:ln w="19050">
-            <a:solidFill>
-              <a:srgbClr val="0B5CAD"/>
-            </a:solidFill>
-          </a:ln>
-        </p:spPr>
-        <p:style>
-          <a:lnRef idx="1">
-            <a:schemeClr val="accent1"/>
-          </a:lnRef>
-          <a:fillRef idx="3">
-            <a:schemeClr val="accent1"/>
-          </a:fillRef>
-          <a:effectRef idx="2">
-            <a:schemeClr val="accent1"/>
-          </a:effectRef>
-          <a:fontRef idx="minor">
-            <a:schemeClr val="lt1"/>
-          </a:fontRef>
-        </p:style>
-        <p:txBody>
-          <a:bodyPr lIns="137160" tIns="91440" rIns="137160" rtlCol="0" anchor="ctr"/>
-          <a:lstStyle/>
-          <a:p>
-            <a:pPr algn="ctr">
-              <a:defRPr sz="1800" b="1">
-                <a:solidFill>
-                  <a:srgbClr val="0B2F5B"/>
-                </a:solidFill>
-              </a:defRPr>
-            </a:pPr>
-            <a:r>
-              <a:t>Demo 2</a:t>
-            </a:r>
-          </a:p>
-          <a:p>
-            <a:pPr>
-              <a:spcAft>
-                <a:spcPts val="200"/>
-              </a:spcAft>
-              <a:defRPr sz="1700">
-                <a:solidFill>
-                  <a:srgbClr val="172B4D"/>
-                </a:solidFill>
-              </a:defRPr>
-            </a:pPr>
-            <a:r>
-              <a:t>token_streamlit_app.py</a:t>
-            </a:r>
-          </a:p>
-          <a:p>
-            <a:pPr>
-              <a:spcAft>
-                <a:spcPts val="200"/>
-              </a:spcAft>
-              <a:defRPr sz="1700">
-                <a:solidFill>
-                  <a:srgbClr val="172B4D"/>
-                </a:solidFill>
-              </a:defRPr>
-            </a:pPr>
-            <a:r>
-              <a:t>Visual table</a:t>
-            </a:r>
-          </a:p>
-        </p:txBody>
-      </p:sp>
-      <p:sp>
-        <p:nvSpPr>
-          <p:cNvPr id="7" name="Rounded Rectangle 6"/>
-          <p:cNvSpPr/>
-          <p:nvPr/>
-        </p:nvSpPr>
-        <p:spPr>
-          <a:xfrm>
-            <a:off x="8046720" y="2834640"/>
-            <a:ext cx="3200400" cy="1417320"/>
-          </a:xfrm>
-          <a:prstGeom prst="roundRect">
-            <a:avLst/>
-          </a:prstGeom>
-          <a:solidFill>
-            <a:srgbClr val="FFFFFF"/>
-          </a:solidFill>
-          <a:ln w="19050">
-            <a:solidFill>
-              <a:srgbClr val="0B5CAD"/>
-            </a:solidFill>
-          </a:ln>
-        </p:spPr>
-        <p:style>
-          <a:lnRef idx="1">
-            <a:schemeClr val="accent1"/>
-          </a:lnRef>
-          <a:fillRef idx="3">
-            <a:schemeClr val="accent1"/>
-          </a:fillRef>
-          <a:effectRef idx="2">
-            <a:schemeClr val="accent1"/>
-          </a:effectRef>
-          <a:fontRef idx="minor">
-            <a:schemeClr val="lt1"/>
-          </a:fontRef>
-        </p:style>
-        <p:txBody>
-          <a:bodyPr lIns="137160" tIns="91440" rIns="137160" rtlCol="0" anchor="ctr"/>
-          <a:lstStyle/>
-          <a:p>
-            <a:pPr algn="ctr">
-              <a:defRPr sz="1800" b="1">
-                <a:solidFill>
-                  <a:srgbClr val="0B2F5B"/>
-                </a:solidFill>
-              </a:defRPr>
-            </a:pPr>
-            <a:r>
-              <a:t>Demo 3</a:t>
-            </a:r>
-          </a:p>
-          <a:p>
-            <a:pPr>
-              <a:spcAft>
-                <a:spcPts val="200"/>
-              </a:spcAft>
-              <a:defRPr sz="1700">
-                <a:solidFill>
-                  <a:srgbClr val="172B4D"/>
-                </a:solidFill>
-              </a:defRPr>
-            </a:pPr>
-            <a:r>
-              <a:t>embedding_lookup_linear_algebra_demo.py</a:t>
-            </a:r>
-          </a:p>
-          <a:p>
-            <a:pPr>
-              <a:spcAft>
-                <a:spcPts val="200"/>
-              </a:spcAft>
-              <a:defRPr sz="1700">
-                <a:solidFill>
-                  <a:srgbClr val="172B4D"/>
-                </a:solidFill>
-              </a:defRPr>
-            </a:pPr>
-            <a:r>
-              <a:t>Lookup vs matrix multiply</a:t>
-            </a:r>
-          </a:p>
-        </p:txBody>
-      </p:sp>
-      <p:sp>
-        <p:nvSpPr>
-          <p:cNvPr id="8" name="TextBox 7"/>
-          <p:cNvSpPr txBox="1"/>
           <p:nvPr/>
         </p:nvSpPr>
         <p:spPr>
@@ -3682,21 +3607,22 @@
             <a:avLst/>
           </a:prstGeom>
           <a:noFill/>
-        </p:spPr>
-        <p:txBody>
-          <a:bodyPr wrap="none">
-            <a:spAutoFit/>
-          </a:bodyPr>
-          <a:lstStyle/>
-          <a:p>
-            <a:pPr>
-              <a:defRPr sz="900">
-                <a:solidFill>
-                  <a:srgbClr val="52616B"/>
-                </a:solidFill>
-              </a:defRPr>
-            </a:pPr>
-            <a:r>
+          <a:ln/>
+        </p:spPr>
+        <p:txBody>
+          <a:bodyPr lIns="0" tIns="0" rIns="0" bIns="0" rtlCol="0" anchor="t"/>
+          <a:lstStyle/>
+          <a:p>
+            <a:pPr algn="r">
+              <a:defRPr sz="850"/>
+            </a:pPr>
+            <a:r>
+              <a:rPr sz="850" dirty="0">
+                <a:solidFill>
+                  <a:srgbClr val="6B778C"/>
+                </a:solidFill>
+                <a:latin typeface="Aptos"/>
+              </a:rPr>
               <a:t>MAGPAI Session 1 - Tokens - v1.0 | javaboy-vk | 2026-05-22 | Slide 9</a:t>
             </a:r>
           </a:p>
@@ -3736,7 +3662,7 @@
         <p:spPr>
           <a:xfrm>
             <a:off x="502920" y="320040"/>
-            <a:ext cx="11247120" cy="548640"/>
+            <a:ext cx="5577745" cy="553998"/>
           </a:xfrm>
           <a:prstGeom prst="rect">
             <a:avLst/>
@@ -3757,7 +3683,16 @@
               </a:defRPr>
             </a:pPr>
             <a:r>
-              <a:t>Audience Takeaway</a:t>
+              <a:rPr dirty="0"/>
+              <a:t>How Token ID </a:t>
+            </a:r>
+            <a:r>
+              <a:rPr lang="en-US" dirty="0"/>
+              <a:t>3</a:t>
+            </a:r>
+            <a:r>
+              <a:rPr dirty="0"/>
+              <a:t> Becomes a Vector</a:t>
             </a:r>
           </a:p>
         </p:txBody>
@@ -3792,7 +3727,7 @@
               </a:defRPr>
             </a:pPr>
             <a:r>
-              <a:t>The first stable mental model</a:t>
+              <a:t>The algorithm is a row lookup</a:t>
             </a:r>
           </a:p>
         </p:txBody>
@@ -3805,8 +3740,8 @@
         </p:nvSpPr>
         <p:spPr>
           <a:xfrm>
-            <a:off x="914400" y="1463040"/>
-            <a:ext cx="10424160" cy="1097280"/>
+            <a:off x="731289" y="1234440"/>
+            <a:ext cx="3062113" cy="914400"/>
           </a:xfrm>
           <a:prstGeom prst="roundRect">
             <a:avLst/>
@@ -3839,7 +3774,7 @@
           <a:lstStyle/>
           <a:p>
             <a:pPr algn="ctr">
-              <a:defRPr sz="2700">
+              <a:defRPr sz="2500">
                 <a:solidFill>
                   <a:srgbClr val="172B4D"/>
                 </a:solidFill>
@@ -3847,25 +3782,64 @@
               </a:defRPr>
             </a:pPr>
             <a:r>
-              <a:t>A model never sees “sales” as a word.</a:t>
-            </a:r>
-            <a:br/>
-            <a:r>
-              <a:t>It sees a numeric pattern.</a:t>
-            </a:r>
-          </a:p>
-        </p:txBody>
-      </p:sp>
-      <p:sp>
-        <p:nvSpPr>
-          <p:cNvPr id="5" name="Rounded Rectangle 4"/>
+              <a:rPr dirty="0"/>
+              <a:t>Token ID </a:t>
+            </a:r>
+            <a:r>
+              <a:rPr lang="en-US" dirty="0"/>
+              <a:t>3</a:t>
+            </a:r>
+            <a:endParaRPr dirty="0"/>
+          </a:p>
+        </p:txBody>
+      </p:sp>
+      <p:cxnSp>
+        <p:nvCxnSpPr>
+          <p:cNvPr id="5" name="Connector 4"/>
+          <p:cNvCxnSpPr>
+            <a:cxnSpLocks/>
+          </p:cNvCxnSpPr>
+          <p:nvPr/>
+        </p:nvCxnSpPr>
+        <p:spPr>
+          <a:xfrm>
+            <a:off x="3793402" y="1691640"/>
+            <a:ext cx="675640" cy="0"/>
+          </a:xfrm>
+          <a:prstGeom prst="line">
+            <a:avLst/>
+          </a:prstGeom>
+          <a:ln w="38100">
+            <a:solidFill>
+              <a:srgbClr val="0B5CAD"/>
+            </a:solidFill>
+          </a:ln>
+        </p:spPr>
+        <p:style>
+          <a:lnRef idx="2">
+            <a:schemeClr val="accent1"/>
+          </a:lnRef>
+          <a:fillRef idx="0">
+            <a:schemeClr val="accent1"/>
+          </a:fillRef>
+          <a:effectRef idx="1">
+            <a:schemeClr val="accent1"/>
+          </a:effectRef>
+          <a:fontRef idx="minor">
+            <a:schemeClr val="tx1"/>
+          </a:fontRef>
+        </p:style>
+      </p:cxnSp>
+      <p:sp>
+        <p:nvSpPr>
+          <p:cNvPr id="6" name="Rounded Rectangle 5"/>
           <p:cNvSpPr/>
           <p:nvPr/>
         </p:nvSpPr>
         <p:spPr>
           <a:xfrm>
-            <a:off x="914400" y="2971800"/>
-            <a:ext cx="10424160" cy="1600200"/>
+            <a:off x="4496474" y="1234440"/>
+            <a:ext cx="2485901" cy="914400"/>
           </a:xfrm>
           <a:prstGeom prst="roundRect">
             <a:avLst/>
@@ -3898,6 +3872,3805 @@
           <a:lstStyle/>
           <a:p>
             <a:pPr algn="ctr">
+              <a:defRPr sz="2500">
+                <a:solidFill>
+                  <a:srgbClr val="172B4D"/>
+                </a:solidFill>
+                <a:latin typeface="Consolas"/>
+              </a:defRPr>
+            </a:pPr>
+            <a:r>
+              <a:rPr dirty="0"/>
+              <a:t>E[</a:t>
+            </a:r>
+            <a:r>
+              <a:rPr lang="en-US" dirty="0"/>
+              <a:t>3</a:t>
+            </a:r>
+            <a:r>
+              <a:rPr dirty="0"/>
+              <a:t>]</a:t>
+            </a:r>
+          </a:p>
+        </p:txBody>
+      </p:sp>
+      <p:cxnSp>
+        <p:nvCxnSpPr>
+          <p:cNvPr id="7" name="Connector 6"/>
+          <p:cNvCxnSpPr/>
+          <p:nvPr/>
+        </p:nvCxnSpPr>
+        <p:spPr>
+          <a:xfrm>
+            <a:off x="6982375" y="1691640"/>
+            <a:ext cx="685800" cy="0"/>
+          </a:xfrm>
+          <a:prstGeom prst="line">
+            <a:avLst/>
+          </a:prstGeom>
+          <a:ln w="38100">
+            <a:solidFill>
+              <a:srgbClr val="0B5CAD"/>
+            </a:solidFill>
+          </a:ln>
+        </p:spPr>
+        <p:style>
+          <a:lnRef idx="2">
+            <a:schemeClr val="accent1"/>
+          </a:lnRef>
+          <a:fillRef idx="0">
+            <a:schemeClr val="accent1"/>
+          </a:fillRef>
+          <a:effectRef idx="1">
+            <a:schemeClr val="accent1"/>
+          </a:effectRef>
+          <a:fontRef idx="minor">
+            <a:schemeClr val="tx1"/>
+          </a:fontRef>
+        </p:style>
+      </p:cxnSp>
+      <p:sp>
+        <p:nvSpPr>
+          <p:cNvPr id="8" name="Rounded Rectangle 7"/>
+          <p:cNvSpPr/>
+          <p:nvPr/>
+        </p:nvSpPr>
+        <p:spPr>
+          <a:xfrm>
+            <a:off x="7668174" y="1228555"/>
+            <a:ext cx="3670385" cy="914400"/>
+          </a:xfrm>
+          <a:prstGeom prst="roundRect">
+            <a:avLst/>
+          </a:prstGeom>
+          <a:solidFill>
+            <a:srgbClr val="F5F8FC"/>
+          </a:solidFill>
+          <a:ln>
+            <a:solidFill>
+              <a:srgbClr val="BED2E6"/>
+            </a:solidFill>
+          </a:ln>
+        </p:spPr>
+        <p:style>
+          <a:lnRef idx="1">
+            <a:schemeClr val="accent1"/>
+          </a:lnRef>
+          <a:fillRef idx="3">
+            <a:schemeClr val="accent1"/>
+          </a:fillRef>
+          <a:effectRef idx="2">
+            <a:schemeClr val="accent1"/>
+          </a:effectRef>
+          <a:fontRef idx="minor">
+            <a:schemeClr val="lt1"/>
+          </a:fontRef>
+        </p:style>
+        <p:txBody>
+          <a:bodyPr lIns="182880" tIns="109728" rIns="182880" rtlCol="0" anchor="ctr"/>
+          <a:lstStyle/>
+          <a:p>
+            <a:pPr>
+              <a:defRPr sz="1600">
+                <a:solidFill>
+                  <a:srgbClr val="172B4D"/>
+                </a:solidFill>
+                <a:latin typeface="Consolas"/>
+              </a:defRPr>
+            </a:pPr>
+            <a:r>
+              <a:rPr dirty="0"/>
+              <a:t>[</a:t>
+            </a:r>
+            <a:r>
+              <a:rPr lang="en-US" dirty="0"/>
+              <a:t>-0.62,  0.18,  0.45, -0.09</a:t>
+            </a:r>
+            <a:r>
+              <a:rPr dirty="0"/>
+              <a:t>]</a:t>
+            </a:r>
+          </a:p>
+        </p:txBody>
+      </p:sp>
+      <p:sp>
+        <p:nvSpPr>
+          <p:cNvPr id="9" name="Rounded Rectangle 8"/>
+          <p:cNvSpPr/>
+          <p:nvPr/>
+        </p:nvSpPr>
+        <p:spPr>
+          <a:xfrm>
+            <a:off x="914400" y="3200400"/>
+            <a:ext cx="10424160" cy="1325880"/>
+          </a:xfrm>
+          <a:prstGeom prst="roundRect">
+            <a:avLst/>
+          </a:prstGeom>
+          <a:solidFill>
+            <a:srgbClr val="FFFFFF"/>
+          </a:solidFill>
+          <a:ln w="19050">
+            <a:solidFill>
+              <a:srgbClr val="0B5CAD"/>
+            </a:solidFill>
+          </a:ln>
+        </p:spPr>
+        <p:style>
+          <a:lnRef idx="1">
+            <a:schemeClr val="accent1"/>
+          </a:lnRef>
+          <a:fillRef idx="3">
+            <a:schemeClr val="accent1"/>
+          </a:fillRef>
+          <a:effectRef idx="2">
+            <a:schemeClr val="accent1"/>
+          </a:effectRef>
+          <a:fontRef idx="minor">
+            <a:schemeClr val="lt1"/>
+          </a:fontRef>
+        </p:style>
+        <p:txBody>
+          <a:bodyPr lIns="137160" tIns="91440" rIns="137160" rtlCol="0" anchor="ctr"/>
+          <a:lstStyle/>
+          <a:p>
+            <a:pPr algn="ctr">
+              <a:defRPr sz="1900" b="1">
+                <a:solidFill>
+                  <a:srgbClr val="0B2F5B"/>
+                </a:solidFill>
+              </a:defRPr>
+            </a:pPr>
+            <a:r>
+              <a:rPr dirty="0"/>
+              <a:t>Important distinction</a:t>
+            </a:r>
+          </a:p>
+          <a:p>
+            <a:pPr>
+              <a:spcAft>
+                <a:spcPts val="200"/>
+              </a:spcAft>
+              <a:defRPr sz="1800">
+                <a:solidFill>
+                  <a:srgbClr val="172B4D"/>
+                </a:solidFill>
+              </a:defRPr>
+            </a:pPr>
+            <a:r>
+              <a:rPr dirty="0"/>
+              <a:t>The integer </a:t>
+            </a:r>
+            <a:r>
+              <a:rPr lang="en-US" dirty="0"/>
+              <a:t>3</a:t>
+            </a:r>
+            <a:r>
+              <a:rPr dirty="0"/>
+              <a:t> does not contain the meaning of “sales.” It points to a learned row in the embedding matrix.</a:t>
+            </a:r>
+          </a:p>
+        </p:txBody>
+      </p:sp>
+      <p:sp>
+        <p:nvSpPr>
+          <p:cNvPr id="10" name="TextBox 9"/>
+          <p:cNvSpPr txBox="1"/>
+          <p:nvPr/>
+        </p:nvSpPr>
+        <p:spPr>
+          <a:xfrm>
+            <a:off x="320040" y="6473952"/>
+            <a:ext cx="11521440" cy="228600"/>
+          </a:xfrm>
+          <a:prstGeom prst="rect">
+            <a:avLst/>
+          </a:prstGeom>
+          <a:noFill/>
+        </p:spPr>
+        <p:txBody>
+          <a:bodyPr wrap="none">
+            <a:spAutoFit/>
+          </a:bodyPr>
+          <a:lstStyle/>
+          <a:p>
+            <a:pPr>
+              <a:defRPr sz="900">
+                <a:solidFill>
+                  <a:srgbClr val="52616B"/>
+                </a:solidFill>
+              </a:defRPr>
+            </a:pPr>
+            <a:r>
+              <a:t>MAGPAI Session 1 - Tokens - v1.0 | javaboy-vk | 2026-05-22 | Slide 10</a:t>
+            </a:r>
+          </a:p>
+        </p:txBody>
+      </p:sp>
+    </p:spTree>
+  </p:cSld>
+  <p:clrMapOvr>
+    <a:masterClrMapping/>
+  </p:clrMapOvr>
+</p:sld>
+</file>
+
+<file path=ppt/slides/slide12.xml><?xml version="1.0" encoding="utf-8"?>
+<p:sld xmlns:a="http://schemas.openxmlformats.org/drawingml/2006/main" xmlns:r="http://schemas.openxmlformats.org/officeDocument/2006/relationships" xmlns:p="http://schemas.openxmlformats.org/presentationml/2006/main">
+  <p:cSld>
+    <p:spTree>
+      <p:nvGrpSpPr>
+        <p:cNvPr id="1" name=""/>
+        <p:cNvGrpSpPr/>
+        <p:nvPr/>
+      </p:nvGrpSpPr>
+      <p:grpSpPr>
+        <a:xfrm>
+          <a:off x="0" y="0"/>
+          <a:ext cx="0" cy="0"/>
+          <a:chOff x="0" y="0"/>
+          <a:chExt cx="0" cy="0"/>
+        </a:xfrm>
+      </p:grpSpPr>
+      <p:sp>
+        <p:nvSpPr>
+          <p:cNvPr id="2" name="TextBox 1"/>
+          <p:cNvSpPr txBox="1"/>
+          <p:nvPr/>
+        </p:nvSpPr>
+        <p:spPr>
+          <a:xfrm>
+            <a:off x="502920" y="320040"/>
+            <a:ext cx="11247120" cy="548640"/>
+          </a:xfrm>
+          <a:prstGeom prst="rect">
+            <a:avLst/>
+          </a:prstGeom>
+          <a:noFill/>
+        </p:spPr>
+        <p:txBody>
+          <a:bodyPr wrap="none">
+            <a:spAutoFit/>
+          </a:bodyPr>
+          <a:lstStyle/>
+          <a:p>
+            <a:pPr>
+              <a:defRPr sz="3000" b="1">
+                <a:solidFill>
+                  <a:srgbClr val="0B2F5B"/>
+                </a:solidFill>
+              </a:defRPr>
+            </a:pPr>
+            <a:r>
+              <a:t>Linear Algebra View</a:t>
+            </a:r>
+          </a:p>
+        </p:txBody>
+      </p:sp>
+      <p:sp>
+        <p:nvSpPr>
+          <p:cNvPr id="3" name="TextBox 2"/>
+          <p:cNvSpPr txBox="1"/>
+          <p:nvPr/>
+        </p:nvSpPr>
+        <p:spPr>
+          <a:xfrm>
+            <a:off x="530352" y="868680"/>
+            <a:ext cx="10972800" cy="365760"/>
+          </a:xfrm>
+          <a:prstGeom prst="rect">
+            <a:avLst/>
+          </a:prstGeom>
+          <a:noFill/>
+        </p:spPr>
+        <p:txBody>
+          <a:bodyPr wrap="none">
+            <a:spAutoFit/>
+          </a:bodyPr>
+          <a:lstStyle/>
+          <a:p>
+            <a:pPr>
+              <a:defRPr sz="1600">
+                <a:solidFill>
+                  <a:srgbClr val="52616B"/>
+                </a:solidFill>
+              </a:defRPr>
+            </a:pPr>
+            <a:r>
+              <a:t>Embedding lookup is equivalent to one-hot matrix multiplication</a:t>
+            </a:r>
+          </a:p>
+        </p:txBody>
+      </p:sp>
+      <p:sp>
+        <p:nvSpPr>
+          <p:cNvPr id="4" name="Rounded Rectangle 3"/>
+          <p:cNvSpPr/>
+          <p:nvPr/>
+        </p:nvSpPr>
+        <p:spPr>
+          <a:xfrm>
+            <a:off x="822960" y="1234440"/>
+            <a:ext cx="10607040" cy="1920240"/>
+          </a:xfrm>
+          <a:prstGeom prst="roundRect">
+            <a:avLst/>
+          </a:prstGeom>
+          <a:solidFill>
+            <a:srgbClr val="F5F8FC"/>
+          </a:solidFill>
+          <a:ln>
+            <a:solidFill>
+              <a:srgbClr val="BED2E6"/>
+            </a:solidFill>
+          </a:ln>
+        </p:spPr>
+        <p:style>
+          <a:lnRef idx="1">
+            <a:schemeClr val="accent1"/>
+          </a:lnRef>
+          <a:fillRef idx="3">
+            <a:schemeClr val="accent1"/>
+          </a:fillRef>
+          <a:effectRef idx="2">
+            <a:schemeClr val="accent1"/>
+          </a:effectRef>
+          <a:fontRef idx="minor">
+            <a:schemeClr val="lt1"/>
+          </a:fontRef>
+        </p:style>
+        <p:txBody>
+          <a:bodyPr lIns="182880" tIns="109728" rIns="182880" rtlCol="0" anchor="ctr"/>
+          <a:lstStyle/>
+          <a:p>
+            <a:pPr algn="ctr">
+              <a:defRPr sz="2600">
+                <a:solidFill>
+                  <a:srgbClr val="172B4D"/>
+                </a:solidFill>
+                <a:latin typeface="Consolas"/>
+              </a:defRPr>
+            </a:pPr>
+            <a:r>
+              <a:t>[0, 0, 0, 1, 0, 0, 0, 0] x E</a:t>
+            </a:r>
+            <a:br/>
+            <a:r>
+              <a:t>=</a:t>
+            </a:r>
+            <a:br/>
+            <a:r>
+              <a:t>[-0.62, 0.18, 0.45, -0.09]</a:t>
+            </a:r>
+          </a:p>
+        </p:txBody>
+      </p:sp>
+      <p:sp>
+        <p:nvSpPr>
+          <p:cNvPr id="5" name="Rounded Rectangle 4"/>
+          <p:cNvSpPr/>
+          <p:nvPr/>
+        </p:nvSpPr>
+        <p:spPr>
+          <a:xfrm>
+            <a:off x="914400" y="3749039"/>
+            <a:ext cx="10424160" cy="1188720"/>
+          </a:xfrm>
+          <a:prstGeom prst="roundRect">
+            <a:avLst/>
+          </a:prstGeom>
+          <a:solidFill>
+            <a:srgbClr val="EAF3FF"/>
+          </a:solidFill>
+          <a:ln w="19050">
+            <a:solidFill>
+              <a:srgbClr val="0B5CAD"/>
+            </a:solidFill>
+          </a:ln>
+        </p:spPr>
+        <p:style>
+          <a:lnRef idx="1">
+            <a:schemeClr val="accent1"/>
+          </a:lnRef>
+          <a:fillRef idx="3">
+            <a:schemeClr val="accent1"/>
+          </a:fillRef>
+          <a:effectRef idx="2">
+            <a:schemeClr val="accent1"/>
+          </a:effectRef>
+          <a:fontRef idx="minor">
+            <a:schemeClr val="lt1"/>
+          </a:fontRef>
+        </p:style>
+        <p:txBody>
+          <a:bodyPr lIns="137160" tIns="91440" rIns="137160" rtlCol="0" anchor="ctr"/>
+          <a:lstStyle/>
+          <a:p>
+            <a:pPr algn="ctr">
+              <a:defRPr sz="1900" b="1">
+                <a:solidFill>
+                  <a:srgbClr val="0B2F5B"/>
+                </a:solidFill>
+              </a:defRPr>
+            </a:pPr>
+            <a:r>
+              <a:t>Runtime optimization</a:t>
+            </a:r>
+          </a:p>
+          <a:p>
+            <a:pPr>
+              <a:spcAft>
+                <a:spcPts val="200"/>
+              </a:spcAft>
+              <a:defRPr sz="1800">
+                <a:solidFill>
+                  <a:srgbClr val="172B4D"/>
+                </a:solidFill>
+              </a:defRPr>
+            </a:pPr>
+            <a:r>
+              <a:t>In real code, the framework usually skips the one-hot vector and directly retrieves the row. It is faster and memory-efficient.</a:t>
+            </a:r>
+          </a:p>
+        </p:txBody>
+      </p:sp>
+      <p:sp>
+        <p:nvSpPr>
+          <p:cNvPr id="6" name="TextBox 5"/>
+          <p:cNvSpPr txBox="1"/>
+          <p:nvPr/>
+        </p:nvSpPr>
+        <p:spPr>
+          <a:xfrm>
+            <a:off x="320040" y="6473952"/>
+            <a:ext cx="11521440" cy="228600"/>
+          </a:xfrm>
+          <a:prstGeom prst="rect">
+            <a:avLst/>
+          </a:prstGeom>
+          <a:noFill/>
+        </p:spPr>
+        <p:txBody>
+          <a:bodyPr wrap="none">
+            <a:spAutoFit/>
+          </a:bodyPr>
+          <a:lstStyle/>
+          <a:p>
+            <a:pPr>
+              <a:defRPr sz="900">
+                <a:solidFill>
+                  <a:srgbClr val="52616B"/>
+                </a:solidFill>
+              </a:defRPr>
+            </a:pPr>
+            <a:r>
+              <a:t>MAGPAI Session 1 - Tokens - v1.0 | javaboy-vk | 2026-05-22 | Slide 11</a:t>
+            </a:r>
+          </a:p>
+        </p:txBody>
+      </p:sp>
+    </p:spTree>
+  </p:cSld>
+  <p:clrMapOvr>
+    <a:masterClrMapping/>
+  </p:clrMapOvr>
+</p:sld>
+</file>
+
+<file path=ppt/slides/slide13.xml><?xml version="1.0" encoding="utf-8"?>
+<p:sld xmlns:a="http://schemas.openxmlformats.org/drawingml/2006/main" xmlns:r="http://schemas.openxmlformats.org/officeDocument/2006/relationships" xmlns:p="http://schemas.openxmlformats.org/presentationml/2006/main">
+  <p:cSld>
+    <p:spTree>
+      <p:nvGrpSpPr>
+        <p:cNvPr id="1" name=""/>
+        <p:cNvGrpSpPr/>
+        <p:nvPr/>
+      </p:nvGrpSpPr>
+      <p:grpSpPr>
+        <a:xfrm>
+          <a:off x="0" y="0"/>
+          <a:ext cx="0" cy="0"/>
+          <a:chOff x="0" y="0"/>
+          <a:chExt cx="0" cy="0"/>
+        </a:xfrm>
+      </p:grpSpPr>
+      <p:sp>
+        <p:nvSpPr>
+          <p:cNvPr id="2" name="Title"/>
+          <p:cNvSpPr/>
+          <p:nvPr/>
+        </p:nvSpPr>
+        <p:spPr>
+          <a:xfrm>
+            <a:off x="640080" y="365760"/>
+            <a:ext cx="10911840" cy="548640"/>
+          </a:xfrm>
+          <a:prstGeom prst="rect">
+            <a:avLst/>
+          </a:prstGeom>
+          <a:noFill/>
+          <a:ln/>
+        </p:spPr>
+        <p:txBody>
+          <a:bodyPr lIns="0" tIns="0" rIns="0" bIns="0" rtlCol="0" anchor="t"/>
+          <a:lstStyle/>
+          <a:p>
+            <a:pPr algn="l">
+              <a:defRPr sz="3000"/>
+            </a:pPr>
+            <a:r>
+              <a:rPr sz="3000" b="1" dirty="0">
+                <a:solidFill>
+                  <a:srgbClr val="0B2F5B"/>
+                </a:solidFill>
+                <a:latin typeface="Aptos"/>
+              </a:rPr>
+              <a:t>What Is a Tensor?</a:t>
+            </a:r>
+          </a:p>
+        </p:txBody>
+      </p:sp>
+      <p:sp>
+        <p:nvSpPr>
+          <p:cNvPr id="3" name="Subtitle"/>
+          <p:cNvSpPr/>
+          <p:nvPr/>
+        </p:nvSpPr>
+        <p:spPr>
+          <a:xfrm>
+            <a:off x="640080" y="868680"/>
+            <a:ext cx="10911840" cy="365760"/>
+          </a:xfrm>
+          <a:prstGeom prst="rect">
+            <a:avLst/>
+          </a:prstGeom>
+          <a:noFill/>
+          <a:ln/>
+        </p:spPr>
+        <p:txBody>
+          <a:bodyPr lIns="0" tIns="0" rIns="0" bIns="0" rtlCol="0" anchor="t"/>
+          <a:lstStyle/>
+          <a:p>
+            <a:pPr algn="l">
+              <a:defRPr sz="1600"/>
+            </a:pPr>
+            <a:r>
+              <a:rPr sz="1600" dirty="0">
+                <a:solidFill>
+                  <a:srgbClr val="5E6C84"/>
+                </a:solidFill>
+                <a:latin typeface="Aptos"/>
+              </a:rPr>
+              <a:t>The NN input is a stored grid of token vectors</a:t>
+            </a:r>
+          </a:p>
+        </p:txBody>
+      </p:sp>
+      <p:sp>
+        <p:nvSpPr>
+          <p:cNvPr id="4" name="Vector"/>
+          <p:cNvSpPr/>
+          <p:nvPr/>
+        </p:nvSpPr>
+        <p:spPr>
+          <a:xfrm>
+            <a:off x="822960" y="1371600"/>
+            <a:ext cx="2926080" cy="1554480"/>
+          </a:xfrm>
+          <a:prstGeom prst="roundRect">
+            <a:avLst/>
+          </a:prstGeom>
+          <a:solidFill>
+            <a:srgbClr val="F5F8FC"/>
+          </a:solidFill>
+          <a:ln w="12700">
+            <a:solidFill>
+              <a:srgbClr val="BED2E6"/>
+            </a:solidFill>
+          </a:ln>
+        </p:spPr>
+        <p:txBody>
+          <a:bodyPr lIns="137160" tIns="137160" rIns="137160" bIns="137160" rtlCol="0" anchor="t"/>
+          <a:lstStyle/>
+          <a:p>
+            <a:pPr algn="l">
+              <a:defRPr sz="1700"/>
+            </a:pPr>
+            <a:r>
+              <a:rPr sz="1700" b="1" dirty="0">
+                <a:solidFill>
+                  <a:srgbClr val="0B2F5B"/>
+                </a:solidFill>
+                <a:latin typeface="Aptos"/>
+              </a:rPr>
+              <a:t>Vector</a:t>
+            </a:r>
+          </a:p>
+          <a:p>
+            <a:pPr algn="l">
+              <a:defRPr sz="1450"/>
+            </a:pPr>
+            <a:r>
+              <a:rPr sz="1450" dirty="0">
+                <a:solidFill>
+                  <a:srgbClr val="172B4D"/>
+                </a:solidFill>
+                <a:latin typeface="Consolas"/>
+              </a:rPr>
+              <a:t>1-D list</a:t>
+            </a:r>
+          </a:p>
+          <a:p>
+            <a:pPr algn="l">
+              <a:defRPr sz="1450"/>
+            </a:pPr>
+            <a:r>
+              <a:rPr sz="1450" dirty="0">
+                <a:solidFill>
+                  <a:srgbClr val="172B4D"/>
+                </a:solidFill>
+                <a:latin typeface="Consolas"/>
+              </a:rPr>
+              <a:t>[0.12, -0.08, 0.44]</a:t>
+            </a:r>
+          </a:p>
+        </p:txBody>
+      </p:sp>
+      <p:sp>
+        <p:nvSpPr>
+          <p:cNvPr id="5" name="Matrix"/>
+          <p:cNvSpPr/>
+          <p:nvPr/>
+        </p:nvSpPr>
+        <p:spPr>
+          <a:xfrm>
+            <a:off x="4480560" y="1371600"/>
+            <a:ext cx="2926080" cy="1554480"/>
+          </a:xfrm>
+          <a:prstGeom prst="roundRect">
+            <a:avLst/>
+          </a:prstGeom>
+          <a:solidFill>
+            <a:srgbClr val="F5F8FC"/>
+          </a:solidFill>
+          <a:ln w="12700">
+            <a:solidFill>
+              <a:srgbClr val="BED2E6"/>
+            </a:solidFill>
+          </a:ln>
+        </p:spPr>
+        <p:txBody>
+          <a:bodyPr lIns="137160" tIns="137160" rIns="137160" bIns="137160" rtlCol="0" anchor="t"/>
+          <a:lstStyle/>
+          <a:p>
+            <a:pPr algn="l">
+              <a:defRPr sz="1700"/>
+            </a:pPr>
+            <a:r>
+              <a:rPr sz="1700" b="1" dirty="0">
+                <a:solidFill>
+                  <a:srgbClr val="0B2F5B"/>
+                </a:solidFill>
+                <a:latin typeface="Aptos"/>
+              </a:rPr>
+              <a:t>Matrix</a:t>
+            </a:r>
+          </a:p>
+          <a:p>
+            <a:pPr algn="l">
+              <a:defRPr sz="1450"/>
+            </a:pPr>
+            <a:r>
+              <a:rPr sz="1450" dirty="0">
+                <a:solidFill>
+                  <a:srgbClr val="172B4D"/>
+                </a:solidFill>
+                <a:latin typeface="Consolas"/>
+              </a:rPr>
+              <a:t>2-D table</a:t>
+            </a:r>
+          </a:p>
+          <a:p>
+            <a:pPr algn="l">
+              <a:defRPr sz="1450"/>
+            </a:pPr>
+            <a:r>
+              <a:rPr sz="1450" dirty="0">
+                <a:solidFill>
+                  <a:srgbClr val="172B4D"/>
+                </a:solidFill>
+                <a:latin typeface="Consolas"/>
+              </a:rPr>
+              <a:t>rows x columns</a:t>
+            </a:r>
+          </a:p>
+        </p:txBody>
+      </p:sp>
+      <p:sp>
+        <p:nvSpPr>
+          <p:cNvPr id="6" name="Tensor"/>
+          <p:cNvSpPr/>
+          <p:nvPr/>
+        </p:nvSpPr>
+        <p:spPr>
+          <a:xfrm>
+            <a:off x="8138160" y="1371600"/>
+            <a:ext cx="2926080" cy="1554480"/>
+          </a:xfrm>
+          <a:prstGeom prst="roundRect">
+            <a:avLst/>
+          </a:prstGeom>
+          <a:solidFill>
+            <a:srgbClr val="F5F8FC"/>
+          </a:solidFill>
+          <a:ln w="12700">
+            <a:solidFill>
+              <a:srgbClr val="BED2E6"/>
+            </a:solidFill>
+          </a:ln>
+        </p:spPr>
+        <p:txBody>
+          <a:bodyPr lIns="137160" tIns="137160" rIns="137160" bIns="137160" rtlCol="0" anchor="t"/>
+          <a:lstStyle/>
+          <a:p>
+            <a:pPr algn="l">
+              <a:defRPr sz="1700"/>
+            </a:pPr>
+            <a:r>
+              <a:rPr sz="1700" b="1" dirty="0">
+                <a:solidFill>
+                  <a:srgbClr val="0B2F5B"/>
+                </a:solidFill>
+                <a:latin typeface="Aptos"/>
+              </a:rPr>
+              <a:t>Tensor</a:t>
+            </a:r>
+          </a:p>
+          <a:p>
+            <a:pPr algn="l">
+              <a:defRPr sz="1450"/>
+            </a:pPr>
+            <a:r>
+              <a:rPr sz="1450" dirty="0">
+                <a:solidFill>
+                  <a:srgbClr val="172B4D"/>
+                </a:solidFill>
+                <a:latin typeface="Consolas"/>
+              </a:rPr>
+              <a:t>General numeric container</a:t>
+            </a:r>
+          </a:p>
+          <a:p>
+            <a:pPr algn="l">
+              <a:defRPr sz="1450"/>
+            </a:pPr>
+            <a:r>
+              <a:rPr sz="1450" dirty="0">
+                <a:solidFill>
+                  <a:srgbClr val="172B4D"/>
+                </a:solidFill>
+                <a:latin typeface="Consolas"/>
+              </a:rPr>
+              <a:t>with shape metadata</a:t>
+            </a:r>
+          </a:p>
+        </p:txBody>
+      </p:sp>
+      <p:sp>
+        <p:nvSpPr>
+          <p:cNvPr id="7" name="Prompt Shape"/>
+          <p:cNvSpPr/>
+          <p:nvPr/>
+        </p:nvSpPr>
+        <p:spPr>
+          <a:xfrm>
+            <a:off x="1097280" y="3383280"/>
+            <a:ext cx="4572000" cy="1371600"/>
+          </a:xfrm>
+          <a:prstGeom prst="roundRect">
+            <a:avLst/>
+          </a:prstGeom>
+          <a:solidFill>
+            <a:srgbClr val="FFFFFF"/>
+          </a:solidFill>
+          <a:ln w="12700">
+            <a:solidFill>
+              <a:srgbClr val="BED2E6"/>
+            </a:solidFill>
+          </a:ln>
+        </p:spPr>
+        <p:txBody>
+          <a:bodyPr lIns="137160" tIns="137160" rIns="137160" bIns="137160" rtlCol="0" anchor="t"/>
+          <a:lstStyle/>
+          <a:p>
+            <a:pPr algn="l">
+              <a:defRPr sz="1700"/>
+            </a:pPr>
+            <a:r>
+              <a:rPr sz="1700" b="1" dirty="0">
+                <a:solidFill>
+                  <a:srgbClr val="0B2F5B"/>
+                </a:solidFill>
+                <a:latin typeface="Aptos"/>
+              </a:rPr>
+              <a:t>For this prompt</a:t>
+            </a:r>
+          </a:p>
+          <a:p>
+            <a:pPr algn="l">
+              <a:defRPr sz="1450"/>
+            </a:pPr>
+            <a:r>
+              <a:rPr sz="1450" dirty="0">
+                <a:solidFill>
+                  <a:srgbClr val="172B4D"/>
+                </a:solidFill>
+                <a:latin typeface="Consolas"/>
+              </a:rPr>
+              <a:t>7 tokens x 4 numbers per vector</a:t>
+            </a:r>
+          </a:p>
+          <a:p>
+            <a:pPr algn="l">
+              <a:defRPr sz="1450"/>
+            </a:pPr>
+            <a:r>
+              <a:rPr sz="1450" dirty="0">
+                <a:solidFill>
+                  <a:srgbClr val="172B4D"/>
+                </a:solidFill>
+                <a:latin typeface="Consolas"/>
+              </a:rPr>
+              <a:t>shape = [7, 4]</a:t>
+            </a:r>
+          </a:p>
+        </p:txBody>
+      </p:sp>
+      <p:sp>
+        <p:nvSpPr>
+          <p:cNvPr id="8" name="Activation Tensor"/>
+          <p:cNvSpPr/>
+          <p:nvPr/>
+        </p:nvSpPr>
+        <p:spPr>
+          <a:xfrm>
+            <a:off x="6217920" y="3383280"/>
+            <a:ext cx="4572000" cy="1371600"/>
+          </a:xfrm>
+          <a:prstGeom prst="roundRect">
+            <a:avLst/>
+          </a:prstGeom>
+          <a:solidFill>
+            <a:srgbClr val="FFFFFF"/>
+          </a:solidFill>
+          <a:ln w="12700">
+            <a:solidFill>
+              <a:srgbClr val="BED2E6"/>
+            </a:solidFill>
+          </a:ln>
+        </p:spPr>
+        <p:txBody>
+          <a:bodyPr lIns="137160" tIns="137160" rIns="137160" bIns="137160" rtlCol="0" anchor="t"/>
+          <a:lstStyle/>
+          <a:p>
+            <a:pPr algn="l">
+              <a:defRPr sz="1700"/>
+            </a:pPr>
+            <a:r>
+              <a:rPr sz="1700" b="1" dirty="0">
+                <a:solidFill>
+                  <a:srgbClr val="0B2F5B"/>
+                </a:solidFill>
+                <a:latin typeface="Aptos"/>
+              </a:rPr>
+              <a:t>How the NN sees it</a:t>
+            </a:r>
+          </a:p>
+          <a:p>
+            <a:pPr algn="l">
+              <a:defRPr sz="1450"/>
+            </a:pPr>
+            <a:r>
+              <a:rPr sz="1450" dirty="0">
+                <a:solidFill>
+                  <a:srgbClr val="172B4D"/>
+                </a:solidFill>
+                <a:latin typeface="Aptos"/>
+              </a:rPr>
+              <a:t>The framework stores the token-vector sequence as an activation tensor before the first neural-network layer.</a:t>
+            </a:r>
+          </a:p>
+        </p:txBody>
+      </p:sp>
+      <p:sp>
+        <p:nvSpPr>
+          <p:cNvPr id="9" name="Key takeaway"/>
+          <p:cNvSpPr/>
+          <p:nvPr/>
+        </p:nvSpPr>
+        <p:spPr>
+          <a:xfrm>
+            <a:off x="1097280" y="5212080"/>
+            <a:ext cx="9966960" cy="731520"/>
+          </a:xfrm>
+          <a:prstGeom prst="roundRect">
+            <a:avLst/>
+          </a:prstGeom>
+          <a:solidFill>
+            <a:srgbClr val="FFFFFF"/>
+          </a:solidFill>
+          <a:ln w="12700">
+            <a:solidFill>
+              <a:srgbClr val="0B5CAD"/>
+            </a:solidFill>
+          </a:ln>
+        </p:spPr>
+        <p:txBody>
+          <a:bodyPr lIns="91440" tIns="91440" rIns="91440" bIns="91440" rtlCol="0" anchor="ctr"/>
+          <a:lstStyle/>
+          <a:p>
+            <a:pPr algn="ctr">
+              <a:defRPr sz="1800"/>
+            </a:pPr>
+            <a:r>
+              <a:rPr sz="1800" b="1" dirty="0">
+                <a:solidFill>
+                  <a:srgbClr val="0B2F5B"/>
+                </a:solidFill>
+                <a:latin typeface="Aptos"/>
+              </a:rPr>
+              <a:t>Key takeaway</a:t>
+            </a:r>
+          </a:p>
+          <a:p>
+            <a:pPr algn="ctr">
+              <a:defRPr sz="1600"/>
+            </a:pPr>
+            <a:r>
+              <a:rPr sz="1600" dirty="0">
+                <a:solidFill>
+                  <a:srgbClr val="172B4D"/>
+                </a:solidFill>
+                <a:latin typeface="Aptos"/>
+              </a:rPr>
+              <a:t>A tensor is the in-memory numeric object that carries vectors into neural-network computation.</a:t>
+            </a:r>
+          </a:p>
+        </p:txBody>
+      </p:sp>
+      <p:sp>
+        <p:nvSpPr>
+          <p:cNvPr id="90" name="Footer"/>
+          <p:cNvSpPr/>
+          <p:nvPr/>
+        </p:nvSpPr>
+        <p:spPr>
+          <a:xfrm>
+            <a:off x="320040" y="6473952"/>
+            <a:ext cx="11521440" cy="228600"/>
+          </a:xfrm>
+          <a:prstGeom prst="rect">
+            <a:avLst/>
+          </a:prstGeom>
+          <a:noFill/>
+          <a:ln/>
+        </p:spPr>
+        <p:txBody>
+          <a:bodyPr lIns="0" tIns="0" rIns="0" bIns="0" rtlCol="0" anchor="t"/>
+          <a:lstStyle/>
+          <a:p>
+            <a:pPr algn="r">
+              <a:defRPr sz="850"/>
+            </a:pPr>
+            <a:r>
+              <a:rPr sz="850" dirty="0">
+                <a:solidFill>
+                  <a:srgbClr val="6B778C"/>
+                </a:solidFill>
+                <a:latin typeface="Aptos"/>
+              </a:rPr>
+              <a:t>MAGPAI Session 1 - Tokens - v1.0 | javaboy-vk | 2026-05-22 | Slide 12</a:t>
+            </a:r>
+          </a:p>
+        </p:txBody>
+      </p:sp>
+    </p:spTree>
+  </p:cSld>
+  <p:clrMapOvr>
+    <a:masterClrMapping/>
+  </p:clrMapOvr>
+</p:sld>
+</file>
+
+<file path=ppt/slides/slide14.xml><?xml version="1.0" encoding="utf-8"?>
+<p:sld xmlns:a="http://schemas.openxmlformats.org/drawingml/2006/main" xmlns:r="http://schemas.openxmlformats.org/officeDocument/2006/relationships" xmlns:p="http://schemas.openxmlformats.org/presentationml/2006/main">
+  <p:cSld>
+    <p:spTree>
+      <p:nvGrpSpPr>
+        <p:cNvPr id="1" name=""/>
+        <p:cNvGrpSpPr/>
+        <p:nvPr/>
+      </p:nvGrpSpPr>
+      <p:grpSpPr>
+        <a:xfrm>
+          <a:off x="0" y="0"/>
+          <a:ext cx="0" cy="0"/>
+          <a:chOff x="0" y="0"/>
+          <a:chExt cx="0" cy="0"/>
+        </a:xfrm>
+      </p:grpSpPr>
+      <p:sp>
+        <p:nvSpPr>
+          <p:cNvPr id="2" name="Title"/>
+          <p:cNvSpPr/>
+          <p:nvPr/>
+        </p:nvSpPr>
+        <p:spPr>
+          <a:xfrm>
+            <a:off x="640080" y="365760"/>
+            <a:ext cx="10911840" cy="548640"/>
+          </a:xfrm>
+          <a:prstGeom prst="rect">
+            <a:avLst/>
+          </a:prstGeom>
+          <a:noFill/>
+          <a:ln/>
+        </p:spPr>
+        <p:txBody>
+          <a:bodyPr lIns="0" tIns="0" rIns="0" bIns="0" rtlCol="0" anchor="t"/>
+          <a:lstStyle/>
+          <a:p>
+            <a:pPr algn="l">
+              <a:defRPr sz="3000"/>
+            </a:pPr>
+            <a:r>
+              <a:rPr sz="3000" b="1" dirty="0">
+                <a:solidFill>
+                  <a:srgbClr val="0B2F5B"/>
+                </a:solidFill>
+                <a:latin typeface="Aptos"/>
+              </a:rPr>
+              <a:t>Prompt Stored as an Input Tensor</a:t>
+            </a:r>
+          </a:p>
+        </p:txBody>
+      </p:sp>
+      <p:sp>
+        <p:nvSpPr>
+          <p:cNvPr id="3" name="Subtitle"/>
+          <p:cNvSpPr/>
+          <p:nvPr/>
+        </p:nvSpPr>
+        <p:spPr>
+          <a:xfrm>
+            <a:off x="640080" y="868680"/>
+            <a:ext cx="10911840" cy="365760"/>
+          </a:xfrm>
+          <a:prstGeom prst="rect">
+            <a:avLst/>
+          </a:prstGeom>
+          <a:noFill/>
+          <a:ln/>
+        </p:spPr>
+        <p:txBody>
+          <a:bodyPr lIns="0" tIns="0" rIns="0" bIns="0" rtlCol="0" anchor="t"/>
+          <a:lstStyle/>
+          <a:p>
+            <a:pPr algn="l">
+              <a:defRPr sz="1600"/>
+            </a:pPr>
+            <a:r>
+              <a:rPr sz="1600" dirty="0">
+                <a:solidFill>
+                  <a:srgbClr val="5E6C84"/>
+                </a:solidFill>
+                <a:latin typeface="Aptos"/>
+              </a:rPr>
+              <a:t>The original prompt becomes a 7 x 4 numeric grid before NN layers run</a:t>
+            </a:r>
+          </a:p>
+        </p:txBody>
+      </p:sp>
+      <p:sp>
+        <p:nvSpPr>
+          <p:cNvPr id="4" name="Prompt Text"/>
+          <p:cNvSpPr/>
+          <p:nvPr/>
+        </p:nvSpPr>
+        <p:spPr>
+          <a:xfrm>
+            <a:off x="822960" y="1280160"/>
+            <a:ext cx="4754880" cy="548640"/>
+          </a:xfrm>
+          <a:prstGeom prst="roundRect">
+            <a:avLst/>
+          </a:prstGeom>
+          <a:solidFill>
+            <a:srgbClr val="EAF2FF"/>
+          </a:solidFill>
+          <a:ln w="12700">
+            <a:solidFill>
+              <a:srgbClr val="0B5CAD"/>
+            </a:solidFill>
+          </a:ln>
+        </p:spPr>
+        <p:txBody>
+          <a:bodyPr lIns="91440" tIns="91440" rIns="91440" bIns="91440" rtlCol="0" anchor="ctr"/>
+          <a:lstStyle/>
+          <a:p>
+            <a:pPr algn="ctr">
+              <a:defRPr sz="1900"/>
+            </a:pPr>
+            <a:r>
+              <a:rPr sz="1900" b="1" dirty="0">
+                <a:solidFill>
+                  <a:srgbClr val="0B2F5B"/>
+                </a:solidFill>
+                <a:latin typeface="Consolas"/>
+              </a:rPr>
+              <a:t>are MAG sales up in chicago?</a:t>
+            </a:r>
+          </a:p>
+        </p:txBody>
+      </p:sp>
+      <p:sp>
+        <p:nvSpPr>
+          <p:cNvPr id="5" name="Arrow 1"/>
+          <p:cNvSpPr/>
+          <p:nvPr/>
+        </p:nvSpPr>
+        <p:spPr>
+          <a:xfrm>
+            <a:off x="5760720" y="1397280"/>
+            <a:ext cx="731520" cy="365760"/>
+          </a:xfrm>
+          <a:prstGeom prst="rect">
+            <a:avLst/>
+          </a:prstGeom>
+          <a:noFill/>
+          <a:ln/>
+        </p:spPr>
+        <p:txBody>
+          <a:bodyPr lIns="0" tIns="0" rIns="0" bIns="0" rtlCol="0" anchor="ctr"/>
+          <a:lstStyle/>
+          <a:p>
+            <a:pPr algn="ctr">
+              <a:defRPr sz="2100"/>
+            </a:pPr>
+            <a:r>
+              <a:rPr sz="2100" b="1" dirty="0">
+                <a:solidFill>
+                  <a:srgbClr val="0B5CAD"/>
+                </a:solidFill>
+                <a:latin typeface="Aptos"/>
+              </a:rPr>
+              <a:t>-&gt;</a:t>
+            </a:r>
+          </a:p>
+        </p:txBody>
+      </p:sp>
+      <p:sp>
+        <p:nvSpPr>
+          <p:cNvPr id="6" name="NN Box"/>
+          <p:cNvSpPr/>
+          <p:nvPr/>
+        </p:nvSpPr>
+        <p:spPr>
+          <a:xfrm>
+            <a:off x="9966960" y="2103120"/>
+            <a:ext cx="1280160" cy="2377440"/>
+          </a:xfrm>
+          <a:prstGeom prst="roundRect">
+            <a:avLst/>
+          </a:prstGeom>
+          <a:solidFill>
+            <a:srgbClr val="0B5CAD"/>
+          </a:solidFill>
+          <a:ln w="12700">
+            <a:solidFill>
+              <a:srgbClr val="0B5CAD"/>
+            </a:solidFill>
+          </a:ln>
+        </p:spPr>
+        <p:txBody>
+          <a:bodyPr lIns="91440" tIns="91440" rIns="91440" bIns="91440" rtlCol="0" anchor="ctr"/>
+          <a:lstStyle/>
+          <a:p>
+            <a:pPr algn="ctr">
+              <a:defRPr sz="1700"/>
+            </a:pPr>
+            <a:r>
+              <a:rPr sz="1700" b="1" dirty="0">
+                <a:solidFill>
+                  <a:srgbClr val="FFFFFF"/>
+                </a:solidFill>
+                <a:latin typeface="Aptos"/>
+              </a:rPr>
+              <a:t>NN layers
+start here</a:t>
+            </a:r>
+          </a:p>
+        </p:txBody>
+      </p:sp>
+      <p:sp>
+        <p:nvSpPr>
+          <p:cNvPr id="7" name="Arrow 2"/>
+          <p:cNvSpPr/>
+          <p:nvPr/>
+        </p:nvSpPr>
+        <p:spPr>
+          <a:xfrm>
+            <a:off x="9144000" y="3108960"/>
+            <a:ext cx="731520" cy="365760"/>
+          </a:xfrm>
+          <a:prstGeom prst="rect">
+            <a:avLst/>
+          </a:prstGeom>
+          <a:noFill/>
+          <a:ln/>
+        </p:spPr>
+        <p:txBody>
+          <a:bodyPr lIns="0" tIns="0" rIns="0" bIns="0" rtlCol="0" anchor="ctr"/>
+          <a:lstStyle/>
+          <a:p>
+            <a:pPr algn="ctr">
+              <a:defRPr sz="2100"/>
+            </a:pPr>
+            <a:r>
+              <a:rPr sz="2100" b="1" dirty="0">
+                <a:solidFill>
+                  <a:srgbClr val="0B5CAD"/>
+                </a:solidFill>
+                <a:latin typeface="Aptos"/>
+              </a:rPr>
+              <a:t>-&gt;</a:t>
+            </a:r>
+          </a:p>
+        </p:txBody>
+      </p:sp>
+      <p:sp>
+        <p:nvSpPr>
+          <p:cNvPr id="20" name="Cell 20"/>
+          <p:cNvSpPr/>
+          <p:nvPr/>
+        </p:nvSpPr>
+        <p:spPr>
+          <a:xfrm>
+            <a:off x="1158240" y="2194560"/>
+            <a:ext cx="1188720" cy="365760"/>
+          </a:xfrm>
+          <a:prstGeom prst="rect">
+            <a:avLst/>
+          </a:prstGeom>
+          <a:solidFill>
+            <a:srgbClr val="0B2F5B"/>
+          </a:solidFill>
+          <a:ln w="12700">
+            <a:solidFill>
+              <a:srgbClr val="D7E2EE"/>
+            </a:solidFill>
+          </a:ln>
+        </p:spPr>
+        <p:txBody>
+          <a:bodyPr lIns="27432" tIns="27432" rIns="27432" bIns="27432" rtlCol="0" anchor="ctr"/>
+          <a:lstStyle/>
+          <a:p>
+            <a:pPr algn="ctr">
+              <a:defRPr sz="1050"/>
+            </a:pPr>
+            <a:r>
+              <a:rPr sz="1050" b="1" dirty="0">
+                <a:solidFill>
+                  <a:srgbClr val="FFFFFF"/>
+                </a:solidFill>
+                <a:latin typeface="Consolas"/>
+              </a:rPr>
+              <a:t>token</a:t>
+            </a:r>
+          </a:p>
+        </p:txBody>
+      </p:sp>
+      <p:sp>
+        <p:nvSpPr>
+          <p:cNvPr id="21" name="Cell 21"/>
+          <p:cNvSpPr/>
+          <p:nvPr/>
+        </p:nvSpPr>
+        <p:spPr>
+          <a:xfrm>
+            <a:off x="2346960" y="2194560"/>
+            <a:ext cx="1188720" cy="365760"/>
+          </a:xfrm>
+          <a:prstGeom prst="rect">
+            <a:avLst/>
+          </a:prstGeom>
+          <a:solidFill>
+            <a:srgbClr val="0B2F5B"/>
+          </a:solidFill>
+          <a:ln w="12700">
+            <a:solidFill>
+              <a:srgbClr val="D7E2EE"/>
+            </a:solidFill>
+          </a:ln>
+        </p:spPr>
+        <p:txBody>
+          <a:bodyPr lIns="27432" tIns="27432" rIns="27432" bIns="27432" rtlCol="0" anchor="ctr"/>
+          <a:lstStyle/>
+          <a:p>
+            <a:pPr algn="ctr">
+              <a:defRPr sz="1050"/>
+            </a:pPr>
+            <a:r>
+              <a:rPr sz="1050" b="1" dirty="0">
+                <a:solidFill>
+                  <a:srgbClr val="FFFFFF"/>
+                </a:solidFill>
+                <a:latin typeface="Consolas"/>
+              </a:rPr>
+              <a:t>v1</a:t>
+            </a:r>
+          </a:p>
+        </p:txBody>
+      </p:sp>
+      <p:sp>
+        <p:nvSpPr>
+          <p:cNvPr id="22" name="Cell 22"/>
+          <p:cNvSpPr/>
+          <p:nvPr/>
+        </p:nvSpPr>
+        <p:spPr>
+          <a:xfrm>
+            <a:off x="3535680" y="2194560"/>
+            <a:ext cx="1188720" cy="365760"/>
+          </a:xfrm>
+          <a:prstGeom prst="rect">
+            <a:avLst/>
+          </a:prstGeom>
+          <a:solidFill>
+            <a:srgbClr val="0B2F5B"/>
+          </a:solidFill>
+          <a:ln w="12700">
+            <a:solidFill>
+              <a:srgbClr val="D7E2EE"/>
+            </a:solidFill>
+          </a:ln>
+        </p:spPr>
+        <p:txBody>
+          <a:bodyPr lIns="27432" tIns="27432" rIns="27432" bIns="27432" rtlCol="0" anchor="ctr"/>
+          <a:lstStyle/>
+          <a:p>
+            <a:pPr algn="ctr">
+              <a:defRPr sz="1050"/>
+            </a:pPr>
+            <a:r>
+              <a:rPr sz="1050" b="1" dirty="0">
+                <a:solidFill>
+                  <a:srgbClr val="FFFFFF"/>
+                </a:solidFill>
+                <a:latin typeface="Consolas"/>
+              </a:rPr>
+              <a:t>v2</a:t>
+            </a:r>
+          </a:p>
+        </p:txBody>
+      </p:sp>
+      <p:sp>
+        <p:nvSpPr>
+          <p:cNvPr id="23" name="Cell 23"/>
+          <p:cNvSpPr/>
+          <p:nvPr/>
+        </p:nvSpPr>
+        <p:spPr>
+          <a:xfrm>
+            <a:off x="4724400" y="2194560"/>
+            <a:ext cx="1188720" cy="365760"/>
+          </a:xfrm>
+          <a:prstGeom prst="rect">
+            <a:avLst/>
+          </a:prstGeom>
+          <a:solidFill>
+            <a:srgbClr val="0B2F5B"/>
+          </a:solidFill>
+          <a:ln w="12700">
+            <a:solidFill>
+              <a:srgbClr val="D7E2EE"/>
+            </a:solidFill>
+          </a:ln>
+        </p:spPr>
+        <p:txBody>
+          <a:bodyPr lIns="27432" tIns="27432" rIns="27432" bIns="27432" rtlCol="0" anchor="ctr"/>
+          <a:lstStyle/>
+          <a:p>
+            <a:pPr algn="ctr">
+              <a:defRPr sz="1050"/>
+            </a:pPr>
+            <a:r>
+              <a:rPr sz="1050" b="1" dirty="0">
+                <a:solidFill>
+                  <a:srgbClr val="FFFFFF"/>
+                </a:solidFill>
+                <a:latin typeface="Consolas"/>
+              </a:rPr>
+              <a:t>v3</a:t>
+            </a:r>
+          </a:p>
+        </p:txBody>
+      </p:sp>
+      <p:sp>
+        <p:nvSpPr>
+          <p:cNvPr id="24" name="Cell 24"/>
+          <p:cNvSpPr/>
+          <p:nvPr/>
+        </p:nvSpPr>
+        <p:spPr>
+          <a:xfrm>
+            <a:off x="5913120" y="2194560"/>
+            <a:ext cx="1188720" cy="365760"/>
+          </a:xfrm>
+          <a:prstGeom prst="rect">
+            <a:avLst/>
+          </a:prstGeom>
+          <a:solidFill>
+            <a:srgbClr val="0B2F5B"/>
+          </a:solidFill>
+          <a:ln w="12700">
+            <a:solidFill>
+              <a:srgbClr val="D7E2EE"/>
+            </a:solidFill>
+          </a:ln>
+        </p:spPr>
+        <p:txBody>
+          <a:bodyPr lIns="27432" tIns="27432" rIns="27432" bIns="27432" rtlCol="0" anchor="ctr"/>
+          <a:lstStyle/>
+          <a:p>
+            <a:pPr algn="ctr">
+              <a:defRPr sz="1050"/>
+            </a:pPr>
+            <a:r>
+              <a:rPr sz="1050" b="1" dirty="0">
+                <a:solidFill>
+                  <a:srgbClr val="FFFFFF"/>
+                </a:solidFill>
+                <a:latin typeface="Consolas"/>
+              </a:rPr>
+              <a:t>v4</a:t>
+            </a:r>
+          </a:p>
+        </p:txBody>
+      </p:sp>
+      <p:sp>
+        <p:nvSpPr>
+          <p:cNvPr id="25" name="Cell 25"/>
+          <p:cNvSpPr/>
+          <p:nvPr/>
+        </p:nvSpPr>
+        <p:spPr>
+          <a:xfrm>
+            <a:off x="1158240" y="2560320"/>
+            <a:ext cx="1188720" cy="365760"/>
+          </a:xfrm>
+          <a:prstGeom prst="rect">
+            <a:avLst/>
+          </a:prstGeom>
+          <a:solidFill>
+            <a:srgbClr val="F5F8FC"/>
+          </a:solidFill>
+          <a:ln w="12700">
+            <a:solidFill>
+              <a:srgbClr val="D7E2EE"/>
+            </a:solidFill>
+          </a:ln>
+        </p:spPr>
+        <p:txBody>
+          <a:bodyPr lIns="27432" tIns="27432" rIns="27432" bIns="27432" rtlCol="0" anchor="ctr"/>
+          <a:lstStyle/>
+          <a:p>
+            <a:pPr algn="ctr">
+              <a:defRPr sz="980"/>
+            </a:pPr>
+            <a:r>
+              <a:rPr sz="980" b="1" dirty="0">
+                <a:solidFill>
+                  <a:srgbClr val="172B4D"/>
+                </a:solidFill>
+                <a:latin typeface="Consolas"/>
+              </a:rPr>
+              <a:t>are</a:t>
+            </a:r>
+          </a:p>
+        </p:txBody>
+      </p:sp>
+      <p:sp>
+        <p:nvSpPr>
+          <p:cNvPr id="26" name="Cell 26"/>
+          <p:cNvSpPr/>
+          <p:nvPr/>
+        </p:nvSpPr>
+        <p:spPr>
+          <a:xfrm>
+            <a:off x="2346960" y="2560320"/>
+            <a:ext cx="1188720" cy="365760"/>
+          </a:xfrm>
+          <a:prstGeom prst="rect">
+            <a:avLst/>
+          </a:prstGeom>
+          <a:solidFill>
+            <a:srgbClr val="F5F8FC"/>
+          </a:solidFill>
+          <a:ln w="12700">
+            <a:solidFill>
+              <a:srgbClr val="D7E2EE"/>
+            </a:solidFill>
+          </a:ln>
+        </p:spPr>
+        <p:txBody>
+          <a:bodyPr lIns="27432" tIns="27432" rIns="27432" bIns="27432" rtlCol="0" anchor="ctr"/>
+          <a:lstStyle/>
+          <a:p>
+            <a:pPr algn="ctr">
+              <a:defRPr sz="980"/>
+            </a:pPr>
+            <a:r>
+              <a:rPr sz="980" dirty="0">
+                <a:solidFill>
+                  <a:srgbClr val="172B4D"/>
+                </a:solidFill>
+                <a:latin typeface="Consolas"/>
+              </a:rPr>
+              <a:t>0.21</a:t>
+            </a:r>
+          </a:p>
+        </p:txBody>
+      </p:sp>
+      <p:sp>
+        <p:nvSpPr>
+          <p:cNvPr id="27" name="Cell 27"/>
+          <p:cNvSpPr/>
+          <p:nvPr/>
+        </p:nvSpPr>
+        <p:spPr>
+          <a:xfrm>
+            <a:off x="3535680" y="2560320"/>
+            <a:ext cx="1188720" cy="365760"/>
+          </a:xfrm>
+          <a:prstGeom prst="rect">
+            <a:avLst/>
+          </a:prstGeom>
+          <a:solidFill>
+            <a:srgbClr val="F5F8FC"/>
+          </a:solidFill>
+          <a:ln w="12700">
+            <a:solidFill>
+              <a:srgbClr val="D7E2EE"/>
+            </a:solidFill>
+          </a:ln>
+        </p:spPr>
+        <p:txBody>
+          <a:bodyPr lIns="27432" tIns="27432" rIns="27432" bIns="27432" rtlCol="0" anchor="ctr"/>
+          <a:lstStyle/>
+          <a:p>
+            <a:pPr algn="ctr">
+              <a:defRPr sz="980"/>
+            </a:pPr>
+            <a:r>
+              <a:rPr sz="980" dirty="0">
+                <a:solidFill>
+                  <a:srgbClr val="172B4D"/>
+                </a:solidFill>
+                <a:latin typeface="Consolas"/>
+              </a:rPr>
+              <a:t>-0.44</a:t>
+            </a:r>
+          </a:p>
+        </p:txBody>
+      </p:sp>
+      <p:sp>
+        <p:nvSpPr>
+          <p:cNvPr id="28" name="Cell 28"/>
+          <p:cNvSpPr/>
+          <p:nvPr/>
+        </p:nvSpPr>
+        <p:spPr>
+          <a:xfrm>
+            <a:off x="4724400" y="2560320"/>
+            <a:ext cx="1188720" cy="365760"/>
+          </a:xfrm>
+          <a:prstGeom prst="rect">
+            <a:avLst/>
+          </a:prstGeom>
+          <a:solidFill>
+            <a:srgbClr val="F5F8FC"/>
+          </a:solidFill>
+          <a:ln w="12700">
+            <a:solidFill>
+              <a:srgbClr val="D7E2EE"/>
+            </a:solidFill>
+          </a:ln>
+        </p:spPr>
+        <p:txBody>
+          <a:bodyPr lIns="27432" tIns="27432" rIns="27432" bIns="27432" rtlCol="0" anchor="ctr"/>
+          <a:lstStyle/>
+          <a:p>
+            <a:pPr algn="ctr">
+              <a:defRPr sz="980"/>
+            </a:pPr>
+            <a:r>
+              <a:rPr sz="980" dirty="0">
+                <a:solidFill>
+                  <a:srgbClr val="172B4D"/>
+                </a:solidFill>
+                <a:latin typeface="Consolas"/>
+              </a:rPr>
+              <a:t>0.78</a:t>
+            </a:r>
+          </a:p>
+        </p:txBody>
+      </p:sp>
+      <p:sp>
+        <p:nvSpPr>
+          <p:cNvPr id="29" name="Cell 29"/>
+          <p:cNvSpPr/>
+          <p:nvPr/>
+        </p:nvSpPr>
+        <p:spPr>
+          <a:xfrm>
+            <a:off x="5913120" y="2560320"/>
+            <a:ext cx="1188720" cy="365760"/>
+          </a:xfrm>
+          <a:prstGeom prst="rect">
+            <a:avLst/>
+          </a:prstGeom>
+          <a:solidFill>
+            <a:srgbClr val="F5F8FC"/>
+          </a:solidFill>
+          <a:ln w="12700">
+            <a:solidFill>
+              <a:srgbClr val="D7E2EE"/>
+            </a:solidFill>
+          </a:ln>
+        </p:spPr>
+        <p:txBody>
+          <a:bodyPr lIns="27432" tIns="27432" rIns="27432" bIns="27432" rtlCol="0" anchor="ctr"/>
+          <a:lstStyle/>
+          <a:p>
+            <a:pPr algn="ctr">
+              <a:defRPr sz="980"/>
+            </a:pPr>
+            <a:r>
+              <a:rPr sz="980" dirty="0">
+                <a:solidFill>
+                  <a:srgbClr val="172B4D"/>
+                </a:solidFill>
+                <a:latin typeface="Consolas"/>
+              </a:rPr>
+              <a:t>0.12</a:t>
+            </a:r>
+          </a:p>
+        </p:txBody>
+      </p:sp>
+      <p:sp>
+        <p:nvSpPr>
+          <p:cNvPr id="30" name="Cell 30"/>
+          <p:cNvSpPr/>
+          <p:nvPr/>
+        </p:nvSpPr>
+        <p:spPr>
+          <a:xfrm>
+            <a:off x="1158240" y="2926080"/>
+            <a:ext cx="1188720" cy="365760"/>
+          </a:xfrm>
+          <a:prstGeom prst="rect">
+            <a:avLst/>
+          </a:prstGeom>
+          <a:solidFill>
+            <a:srgbClr val="FFFFFF"/>
+          </a:solidFill>
+          <a:ln w="12700">
+            <a:solidFill>
+              <a:srgbClr val="D7E2EE"/>
+            </a:solidFill>
+          </a:ln>
+        </p:spPr>
+        <p:txBody>
+          <a:bodyPr lIns="27432" tIns="27432" rIns="27432" bIns="27432" rtlCol="0" anchor="ctr"/>
+          <a:lstStyle/>
+          <a:p>
+            <a:pPr algn="ctr">
+              <a:defRPr sz="980"/>
+            </a:pPr>
+            <a:r>
+              <a:rPr sz="980" b="1" dirty="0">
+                <a:solidFill>
+                  <a:srgbClr val="172B4D"/>
+                </a:solidFill>
+                <a:latin typeface="Consolas"/>
+              </a:rPr>
+              <a:t>MAG</a:t>
+            </a:r>
+          </a:p>
+        </p:txBody>
+      </p:sp>
+      <p:sp>
+        <p:nvSpPr>
+          <p:cNvPr id="31" name="Cell 31"/>
+          <p:cNvSpPr/>
+          <p:nvPr/>
+        </p:nvSpPr>
+        <p:spPr>
+          <a:xfrm>
+            <a:off x="2346960" y="2926080"/>
+            <a:ext cx="1188720" cy="365760"/>
+          </a:xfrm>
+          <a:prstGeom prst="rect">
+            <a:avLst/>
+          </a:prstGeom>
+          <a:solidFill>
+            <a:srgbClr val="FFFFFF"/>
+          </a:solidFill>
+          <a:ln w="12700">
+            <a:solidFill>
+              <a:srgbClr val="D7E2EE"/>
+            </a:solidFill>
+          </a:ln>
+        </p:spPr>
+        <p:txBody>
+          <a:bodyPr lIns="27432" tIns="27432" rIns="27432" bIns="27432" rtlCol="0" anchor="ctr"/>
+          <a:lstStyle/>
+          <a:p>
+            <a:pPr algn="ctr">
+              <a:defRPr sz="980"/>
+            </a:pPr>
+            <a:r>
+              <a:rPr sz="980" dirty="0">
+                <a:solidFill>
+                  <a:srgbClr val="172B4D"/>
+                </a:solidFill>
+                <a:latin typeface="Consolas"/>
+              </a:rPr>
+              <a:t>0.03</a:t>
+            </a:r>
+          </a:p>
+        </p:txBody>
+      </p:sp>
+      <p:sp>
+        <p:nvSpPr>
+          <p:cNvPr id="32" name="Cell 32"/>
+          <p:cNvSpPr/>
+          <p:nvPr/>
+        </p:nvSpPr>
+        <p:spPr>
+          <a:xfrm>
+            <a:off x="3535680" y="2926080"/>
+            <a:ext cx="1188720" cy="365760"/>
+          </a:xfrm>
+          <a:prstGeom prst="rect">
+            <a:avLst/>
+          </a:prstGeom>
+          <a:solidFill>
+            <a:srgbClr val="FFFFFF"/>
+          </a:solidFill>
+          <a:ln w="12700">
+            <a:solidFill>
+              <a:srgbClr val="D7E2EE"/>
+            </a:solidFill>
+          </a:ln>
+        </p:spPr>
+        <p:txBody>
+          <a:bodyPr lIns="27432" tIns="27432" rIns="27432" bIns="27432" rtlCol="0" anchor="ctr"/>
+          <a:lstStyle/>
+          <a:p>
+            <a:pPr algn="ctr">
+              <a:defRPr sz="980"/>
+            </a:pPr>
+            <a:r>
+              <a:rPr sz="980" dirty="0">
+                <a:solidFill>
+                  <a:srgbClr val="172B4D"/>
+                </a:solidFill>
+                <a:latin typeface="Consolas"/>
+              </a:rPr>
+              <a:t>0.91</a:t>
+            </a:r>
+          </a:p>
+        </p:txBody>
+      </p:sp>
+      <p:sp>
+        <p:nvSpPr>
+          <p:cNvPr id="33" name="Cell 33"/>
+          <p:cNvSpPr/>
+          <p:nvPr/>
+        </p:nvSpPr>
+        <p:spPr>
+          <a:xfrm>
+            <a:off x="4724400" y="2926080"/>
+            <a:ext cx="1188720" cy="365760"/>
+          </a:xfrm>
+          <a:prstGeom prst="rect">
+            <a:avLst/>
+          </a:prstGeom>
+          <a:solidFill>
+            <a:srgbClr val="FFFFFF"/>
+          </a:solidFill>
+          <a:ln w="12700">
+            <a:solidFill>
+              <a:srgbClr val="D7E2EE"/>
+            </a:solidFill>
+          </a:ln>
+        </p:spPr>
+        <p:txBody>
+          <a:bodyPr lIns="27432" tIns="27432" rIns="27432" bIns="27432" rtlCol="0" anchor="ctr"/>
+          <a:lstStyle/>
+          <a:p>
+            <a:pPr algn="ctr">
+              <a:defRPr sz="980"/>
+            </a:pPr>
+            <a:r>
+              <a:rPr sz="980" dirty="0">
+                <a:solidFill>
+                  <a:srgbClr val="172B4D"/>
+                </a:solidFill>
+                <a:latin typeface="Consolas"/>
+              </a:rPr>
+              <a:t>-0.14</a:t>
+            </a:r>
+          </a:p>
+        </p:txBody>
+      </p:sp>
+      <p:sp>
+        <p:nvSpPr>
+          <p:cNvPr id="34" name="Cell 34"/>
+          <p:cNvSpPr/>
+          <p:nvPr/>
+        </p:nvSpPr>
+        <p:spPr>
+          <a:xfrm>
+            <a:off x="5913120" y="2926080"/>
+            <a:ext cx="1188720" cy="365760"/>
+          </a:xfrm>
+          <a:prstGeom prst="rect">
+            <a:avLst/>
+          </a:prstGeom>
+          <a:solidFill>
+            <a:srgbClr val="FFFFFF"/>
+          </a:solidFill>
+          <a:ln w="12700">
+            <a:solidFill>
+              <a:srgbClr val="D7E2EE"/>
+            </a:solidFill>
+          </a:ln>
+        </p:spPr>
+        <p:txBody>
+          <a:bodyPr lIns="27432" tIns="27432" rIns="27432" bIns="27432" rtlCol="0" anchor="ctr"/>
+          <a:lstStyle/>
+          <a:p>
+            <a:pPr algn="ctr">
+              <a:defRPr sz="980"/>
+            </a:pPr>
+            <a:r>
+              <a:rPr sz="980" dirty="0">
+                <a:solidFill>
+                  <a:srgbClr val="172B4D"/>
+                </a:solidFill>
+                <a:latin typeface="Consolas"/>
+              </a:rPr>
+              <a:t>0.36</a:t>
+            </a:r>
+          </a:p>
+        </p:txBody>
+      </p:sp>
+      <p:sp>
+        <p:nvSpPr>
+          <p:cNvPr id="35" name="Cell 35"/>
+          <p:cNvSpPr/>
+          <p:nvPr/>
+        </p:nvSpPr>
+        <p:spPr>
+          <a:xfrm>
+            <a:off x="1158240" y="3291840"/>
+            <a:ext cx="1188720" cy="365760"/>
+          </a:xfrm>
+          <a:prstGeom prst="rect">
+            <a:avLst/>
+          </a:prstGeom>
+          <a:solidFill>
+            <a:srgbClr val="FFF3D6"/>
+          </a:solidFill>
+          <a:ln w="12700">
+            <a:solidFill>
+              <a:srgbClr val="D7E2EE"/>
+            </a:solidFill>
+          </a:ln>
+        </p:spPr>
+        <p:txBody>
+          <a:bodyPr lIns="27432" tIns="27432" rIns="27432" bIns="27432" rtlCol="0" anchor="ctr"/>
+          <a:lstStyle/>
+          <a:p>
+            <a:pPr algn="ctr">
+              <a:defRPr sz="980"/>
+            </a:pPr>
+            <a:r>
+              <a:rPr sz="980" b="1" dirty="0">
+                <a:solidFill>
+                  <a:srgbClr val="172B4D"/>
+                </a:solidFill>
+                <a:latin typeface="Consolas"/>
+              </a:rPr>
+              <a:t>sales</a:t>
+            </a:r>
+          </a:p>
+        </p:txBody>
+      </p:sp>
+      <p:sp>
+        <p:nvSpPr>
+          <p:cNvPr id="36" name="Cell 36"/>
+          <p:cNvSpPr/>
+          <p:nvPr/>
+        </p:nvSpPr>
+        <p:spPr>
+          <a:xfrm>
+            <a:off x="2346960" y="3291840"/>
+            <a:ext cx="1188720" cy="365760"/>
+          </a:xfrm>
+          <a:prstGeom prst="rect">
+            <a:avLst/>
+          </a:prstGeom>
+          <a:solidFill>
+            <a:srgbClr val="FFF3D6"/>
+          </a:solidFill>
+          <a:ln w="12700">
+            <a:solidFill>
+              <a:srgbClr val="D7E2EE"/>
+            </a:solidFill>
+          </a:ln>
+        </p:spPr>
+        <p:txBody>
+          <a:bodyPr lIns="27432" tIns="27432" rIns="27432" bIns="27432" rtlCol="0" anchor="ctr"/>
+          <a:lstStyle/>
+          <a:p>
+            <a:pPr algn="ctr">
+              <a:defRPr sz="980"/>
+            </a:pPr>
+            <a:r>
+              <a:rPr sz="980" b="1" dirty="0">
+                <a:solidFill>
+                  <a:srgbClr val="172B4D"/>
+                </a:solidFill>
+                <a:latin typeface="Consolas"/>
+              </a:rPr>
+              <a:t>-0.62</a:t>
+            </a:r>
+          </a:p>
+        </p:txBody>
+      </p:sp>
+      <p:sp>
+        <p:nvSpPr>
+          <p:cNvPr id="37" name="Cell 37"/>
+          <p:cNvSpPr/>
+          <p:nvPr/>
+        </p:nvSpPr>
+        <p:spPr>
+          <a:xfrm>
+            <a:off x="3535680" y="3291840"/>
+            <a:ext cx="1188720" cy="365760"/>
+          </a:xfrm>
+          <a:prstGeom prst="rect">
+            <a:avLst/>
+          </a:prstGeom>
+          <a:solidFill>
+            <a:srgbClr val="FFF3D6"/>
+          </a:solidFill>
+          <a:ln w="12700">
+            <a:solidFill>
+              <a:srgbClr val="D7E2EE"/>
+            </a:solidFill>
+          </a:ln>
+        </p:spPr>
+        <p:txBody>
+          <a:bodyPr lIns="27432" tIns="27432" rIns="27432" bIns="27432" rtlCol="0" anchor="ctr"/>
+          <a:lstStyle/>
+          <a:p>
+            <a:pPr algn="ctr">
+              <a:defRPr sz="980"/>
+            </a:pPr>
+            <a:r>
+              <a:rPr sz="980" b="1" dirty="0">
+                <a:solidFill>
+                  <a:srgbClr val="172B4D"/>
+                </a:solidFill>
+                <a:latin typeface="Consolas"/>
+              </a:rPr>
+              <a:t>0.18</a:t>
+            </a:r>
+          </a:p>
+        </p:txBody>
+      </p:sp>
+      <p:sp>
+        <p:nvSpPr>
+          <p:cNvPr id="38" name="Cell 38"/>
+          <p:cNvSpPr/>
+          <p:nvPr/>
+        </p:nvSpPr>
+        <p:spPr>
+          <a:xfrm>
+            <a:off x="4724400" y="3291840"/>
+            <a:ext cx="1188720" cy="365760"/>
+          </a:xfrm>
+          <a:prstGeom prst="rect">
+            <a:avLst/>
+          </a:prstGeom>
+          <a:solidFill>
+            <a:srgbClr val="FFF3D6"/>
+          </a:solidFill>
+          <a:ln w="12700">
+            <a:solidFill>
+              <a:srgbClr val="D7E2EE"/>
+            </a:solidFill>
+          </a:ln>
+        </p:spPr>
+        <p:txBody>
+          <a:bodyPr lIns="27432" tIns="27432" rIns="27432" bIns="27432" rtlCol="0" anchor="ctr"/>
+          <a:lstStyle/>
+          <a:p>
+            <a:pPr algn="ctr">
+              <a:defRPr sz="980"/>
+            </a:pPr>
+            <a:r>
+              <a:rPr sz="980" b="1" dirty="0">
+                <a:solidFill>
+                  <a:srgbClr val="172B4D"/>
+                </a:solidFill>
+                <a:latin typeface="Consolas"/>
+              </a:rPr>
+              <a:t>0.45</a:t>
+            </a:r>
+          </a:p>
+        </p:txBody>
+      </p:sp>
+      <p:sp>
+        <p:nvSpPr>
+          <p:cNvPr id="39" name="Cell 39"/>
+          <p:cNvSpPr/>
+          <p:nvPr/>
+        </p:nvSpPr>
+        <p:spPr>
+          <a:xfrm>
+            <a:off x="5913120" y="3291840"/>
+            <a:ext cx="1188720" cy="365760"/>
+          </a:xfrm>
+          <a:prstGeom prst="rect">
+            <a:avLst/>
+          </a:prstGeom>
+          <a:solidFill>
+            <a:srgbClr val="FFF3D6"/>
+          </a:solidFill>
+          <a:ln w="12700">
+            <a:solidFill>
+              <a:srgbClr val="D7E2EE"/>
+            </a:solidFill>
+          </a:ln>
+        </p:spPr>
+        <p:txBody>
+          <a:bodyPr lIns="27432" tIns="27432" rIns="27432" bIns="27432" rtlCol="0" anchor="ctr"/>
+          <a:lstStyle/>
+          <a:p>
+            <a:pPr algn="ctr">
+              <a:defRPr sz="980"/>
+            </a:pPr>
+            <a:r>
+              <a:rPr sz="980" b="1" dirty="0">
+                <a:solidFill>
+                  <a:srgbClr val="172B4D"/>
+                </a:solidFill>
+                <a:latin typeface="Consolas"/>
+              </a:rPr>
+              <a:t>-0.09</a:t>
+            </a:r>
+          </a:p>
+        </p:txBody>
+      </p:sp>
+      <p:sp>
+        <p:nvSpPr>
+          <p:cNvPr id="40" name="Cell 40"/>
+          <p:cNvSpPr/>
+          <p:nvPr/>
+        </p:nvSpPr>
+        <p:spPr>
+          <a:xfrm>
+            <a:off x="1158240" y="3657600"/>
+            <a:ext cx="1188720" cy="365760"/>
+          </a:xfrm>
+          <a:prstGeom prst="rect">
+            <a:avLst/>
+          </a:prstGeom>
+          <a:solidFill>
+            <a:srgbClr val="FFFFFF"/>
+          </a:solidFill>
+          <a:ln w="12700">
+            <a:solidFill>
+              <a:srgbClr val="D7E2EE"/>
+            </a:solidFill>
+          </a:ln>
+        </p:spPr>
+        <p:txBody>
+          <a:bodyPr lIns="27432" tIns="27432" rIns="27432" bIns="27432" rtlCol="0" anchor="ctr"/>
+          <a:lstStyle/>
+          <a:p>
+            <a:pPr algn="ctr">
+              <a:defRPr sz="980"/>
+            </a:pPr>
+            <a:r>
+              <a:rPr sz="980" b="1" dirty="0">
+                <a:solidFill>
+                  <a:srgbClr val="172B4D"/>
+                </a:solidFill>
+                <a:latin typeface="Consolas"/>
+              </a:rPr>
+              <a:t>up</a:t>
+            </a:r>
+          </a:p>
+        </p:txBody>
+      </p:sp>
+      <p:sp>
+        <p:nvSpPr>
+          <p:cNvPr id="41" name="Cell 41"/>
+          <p:cNvSpPr/>
+          <p:nvPr/>
+        </p:nvSpPr>
+        <p:spPr>
+          <a:xfrm>
+            <a:off x="2346960" y="3657600"/>
+            <a:ext cx="1188720" cy="365760"/>
+          </a:xfrm>
+          <a:prstGeom prst="rect">
+            <a:avLst/>
+          </a:prstGeom>
+          <a:solidFill>
+            <a:srgbClr val="FFFFFF"/>
+          </a:solidFill>
+          <a:ln w="12700">
+            <a:solidFill>
+              <a:srgbClr val="D7E2EE"/>
+            </a:solidFill>
+          </a:ln>
+        </p:spPr>
+        <p:txBody>
+          <a:bodyPr lIns="27432" tIns="27432" rIns="27432" bIns="27432" rtlCol="0" anchor="ctr"/>
+          <a:lstStyle/>
+          <a:p>
+            <a:pPr algn="ctr">
+              <a:defRPr sz="980"/>
+            </a:pPr>
+            <a:r>
+              <a:rPr sz="980" dirty="0">
+                <a:solidFill>
+                  <a:srgbClr val="172B4D"/>
+                </a:solidFill>
+                <a:latin typeface="Consolas"/>
+              </a:rPr>
+              <a:t>-0.31</a:t>
+            </a:r>
+          </a:p>
+        </p:txBody>
+      </p:sp>
+      <p:sp>
+        <p:nvSpPr>
+          <p:cNvPr id="42" name="Cell 42"/>
+          <p:cNvSpPr/>
+          <p:nvPr/>
+        </p:nvSpPr>
+        <p:spPr>
+          <a:xfrm>
+            <a:off x="3535680" y="3657600"/>
+            <a:ext cx="1188720" cy="365760"/>
+          </a:xfrm>
+          <a:prstGeom prst="rect">
+            <a:avLst/>
+          </a:prstGeom>
+          <a:solidFill>
+            <a:srgbClr val="FFFFFF"/>
+          </a:solidFill>
+          <a:ln w="12700">
+            <a:solidFill>
+              <a:srgbClr val="D7E2EE"/>
+            </a:solidFill>
+          </a:ln>
+        </p:spPr>
+        <p:txBody>
+          <a:bodyPr lIns="27432" tIns="27432" rIns="27432" bIns="27432" rtlCol="0" anchor="ctr"/>
+          <a:lstStyle/>
+          <a:p>
+            <a:pPr algn="ctr">
+              <a:defRPr sz="980"/>
+            </a:pPr>
+            <a:r>
+              <a:rPr sz="980" dirty="0">
+                <a:solidFill>
+                  <a:srgbClr val="172B4D"/>
+                </a:solidFill>
+                <a:latin typeface="Consolas"/>
+              </a:rPr>
+              <a:t>0.67</a:t>
+            </a:r>
+          </a:p>
+        </p:txBody>
+      </p:sp>
+      <p:sp>
+        <p:nvSpPr>
+          <p:cNvPr id="43" name="Cell 43"/>
+          <p:cNvSpPr/>
+          <p:nvPr/>
+        </p:nvSpPr>
+        <p:spPr>
+          <a:xfrm>
+            <a:off x="4724400" y="3657600"/>
+            <a:ext cx="1188720" cy="365760"/>
+          </a:xfrm>
+          <a:prstGeom prst="rect">
+            <a:avLst/>
+          </a:prstGeom>
+          <a:solidFill>
+            <a:srgbClr val="FFFFFF"/>
+          </a:solidFill>
+          <a:ln w="12700">
+            <a:solidFill>
+              <a:srgbClr val="D7E2EE"/>
+            </a:solidFill>
+          </a:ln>
+        </p:spPr>
+        <p:txBody>
+          <a:bodyPr lIns="27432" tIns="27432" rIns="27432" bIns="27432" rtlCol="0" anchor="ctr"/>
+          <a:lstStyle/>
+          <a:p>
+            <a:pPr algn="ctr">
+              <a:defRPr sz="980"/>
+            </a:pPr>
+            <a:r>
+              <a:rPr sz="980" dirty="0">
+                <a:solidFill>
+                  <a:srgbClr val="172B4D"/>
+                </a:solidFill>
+                <a:latin typeface="Consolas"/>
+              </a:rPr>
+              <a:t>0.11</a:t>
+            </a:r>
+          </a:p>
+        </p:txBody>
+      </p:sp>
+      <p:sp>
+        <p:nvSpPr>
+          <p:cNvPr id="44" name="Cell 44"/>
+          <p:cNvSpPr/>
+          <p:nvPr/>
+        </p:nvSpPr>
+        <p:spPr>
+          <a:xfrm>
+            <a:off x="5913120" y="3657600"/>
+            <a:ext cx="1188720" cy="365760"/>
+          </a:xfrm>
+          <a:prstGeom prst="rect">
+            <a:avLst/>
+          </a:prstGeom>
+          <a:solidFill>
+            <a:srgbClr val="FFFFFF"/>
+          </a:solidFill>
+          <a:ln w="12700">
+            <a:solidFill>
+              <a:srgbClr val="D7E2EE"/>
+            </a:solidFill>
+          </a:ln>
+        </p:spPr>
+        <p:txBody>
+          <a:bodyPr lIns="27432" tIns="27432" rIns="27432" bIns="27432" rtlCol="0" anchor="ctr"/>
+          <a:lstStyle/>
+          <a:p>
+            <a:pPr algn="ctr">
+              <a:defRPr sz="980"/>
+            </a:pPr>
+            <a:r>
+              <a:rPr sz="980" dirty="0">
+                <a:solidFill>
+                  <a:srgbClr val="172B4D"/>
+                </a:solidFill>
+                <a:latin typeface="Consolas"/>
+              </a:rPr>
+              <a:t>0.28</a:t>
+            </a:r>
+          </a:p>
+        </p:txBody>
+      </p:sp>
+      <p:sp>
+        <p:nvSpPr>
+          <p:cNvPr id="45" name="Cell 45"/>
+          <p:cNvSpPr/>
+          <p:nvPr/>
+        </p:nvSpPr>
+        <p:spPr>
+          <a:xfrm>
+            <a:off x="1158240" y="4023360"/>
+            <a:ext cx="1188720" cy="365760"/>
+          </a:xfrm>
+          <a:prstGeom prst="rect">
+            <a:avLst/>
+          </a:prstGeom>
+          <a:solidFill>
+            <a:srgbClr val="F5F8FC"/>
+          </a:solidFill>
+          <a:ln w="12700">
+            <a:solidFill>
+              <a:srgbClr val="D7E2EE"/>
+            </a:solidFill>
+          </a:ln>
+        </p:spPr>
+        <p:txBody>
+          <a:bodyPr lIns="27432" tIns="27432" rIns="27432" bIns="27432" rtlCol="0" anchor="ctr"/>
+          <a:lstStyle/>
+          <a:p>
+            <a:pPr algn="ctr">
+              <a:defRPr sz="980"/>
+            </a:pPr>
+            <a:r>
+              <a:rPr sz="980" b="1" dirty="0">
+                <a:solidFill>
+                  <a:srgbClr val="172B4D"/>
+                </a:solidFill>
+                <a:latin typeface="Consolas"/>
+              </a:rPr>
+              <a:t>in</a:t>
+            </a:r>
+          </a:p>
+        </p:txBody>
+      </p:sp>
+      <p:sp>
+        <p:nvSpPr>
+          <p:cNvPr id="46" name="Cell 46"/>
+          <p:cNvSpPr/>
+          <p:nvPr/>
+        </p:nvSpPr>
+        <p:spPr>
+          <a:xfrm>
+            <a:off x="2346960" y="4023360"/>
+            <a:ext cx="1188720" cy="365760"/>
+          </a:xfrm>
+          <a:prstGeom prst="rect">
+            <a:avLst/>
+          </a:prstGeom>
+          <a:solidFill>
+            <a:srgbClr val="F5F8FC"/>
+          </a:solidFill>
+          <a:ln w="12700">
+            <a:solidFill>
+              <a:srgbClr val="D7E2EE"/>
+            </a:solidFill>
+          </a:ln>
+        </p:spPr>
+        <p:txBody>
+          <a:bodyPr lIns="27432" tIns="27432" rIns="27432" bIns="27432" rtlCol="0" anchor="ctr"/>
+          <a:lstStyle/>
+          <a:p>
+            <a:pPr algn="ctr">
+              <a:defRPr sz="980"/>
+            </a:pPr>
+            <a:r>
+              <a:rPr sz="980" dirty="0">
+                <a:solidFill>
+                  <a:srgbClr val="172B4D"/>
+                </a:solidFill>
+                <a:latin typeface="Consolas"/>
+              </a:rPr>
+              <a:t>0.08</a:t>
+            </a:r>
+          </a:p>
+        </p:txBody>
+      </p:sp>
+      <p:sp>
+        <p:nvSpPr>
+          <p:cNvPr id="47" name="Cell 47"/>
+          <p:cNvSpPr/>
+          <p:nvPr/>
+        </p:nvSpPr>
+        <p:spPr>
+          <a:xfrm>
+            <a:off x="3535680" y="4023360"/>
+            <a:ext cx="1188720" cy="365760"/>
+          </a:xfrm>
+          <a:prstGeom prst="rect">
+            <a:avLst/>
+          </a:prstGeom>
+          <a:solidFill>
+            <a:srgbClr val="F5F8FC"/>
+          </a:solidFill>
+          <a:ln w="12700">
+            <a:solidFill>
+              <a:srgbClr val="D7E2EE"/>
+            </a:solidFill>
+          </a:ln>
+        </p:spPr>
+        <p:txBody>
+          <a:bodyPr lIns="27432" tIns="27432" rIns="27432" bIns="27432" rtlCol="0" anchor="ctr"/>
+          <a:lstStyle/>
+          <a:p>
+            <a:pPr algn="ctr">
+              <a:defRPr sz="980"/>
+            </a:pPr>
+            <a:r>
+              <a:rPr sz="980" dirty="0">
+                <a:solidFill>
+                  <a:srgbClr val="172B4D"/>
+                </a:solidFill>
+                <a:latin typeface="Consolas"/>
+              </a:rPr>
+              <a:t>-0.15</a:t>
+            </a:r>
+          </a:p>
+        </p:txBody>
+      </p:sp>
+      <p:sp>
+        <p:nvSpPr>
+          <p:cNvPr id="48" name="Cell 48"/>
+          <p:cNvSpPr/>
+          <p:nvPr/>
+        </p:nvSpPr>
+        <p:spPr>
+          <a:xfrm>
+            <a:off x="4724400" y="4023360"/>
+            <a:ext cx="1188720" cy="365760"/>
+          </a:xfrm>
+          <a:prstGeom prst="rect">
+            <a:avLst/>
+          </a:prstGeom>
+          <a:solidFill>
+            <a:srgbClr val="F5F8FC"/>
+          </a:solidFill>
+          <a:ln w="12700">
+            <a:solidFill>
+              <a:srgbClr val="D7E2EE"/>
+            </a:solidFill>
+          </a:ln>
+        </p:spPr>
+        <p:txBody>
+          <a:bodyPr lIns="27432" tIns="27432" rIns="27432" bIns="27432" rtlCol="0" anchor="ctr"/>
+          <a:lstStyle/>
+          <a:p>
+            <a:pPr algn="ctr">
+              <a:defRPr sz="980"/>
+            </a:pPr>
+            <a:r>
+              <a:rPr sz="980" dirty="0">
+                <a:solidFill>
+                  <a:srgbClr val="172B4D"/>
+                </a:solidFill>
+                <a:latin typeface="Consolas"/>
+              </a:rPr>
+              <a:t>0.22</a:t>
+            </a:r>
+          </a:p>
+        </p:txBody>
+      </p:sp>
+      <p:sp>
+        <p:nvSpPr>
+          <p:cNvPr id="49" name="Cell 49"/>
+          <p:cNvSpPr/>
+          <p:nvPr/>
+        </p:nvSpPr>
+        <p:spPr>
+          <a:xfrm>
+            <a:off x="5913120" y="4023360"/>
+            <a:ext cx="1188720" cy="365760"/>
+          </a:xfrm>
+          <a:prstGeom prst="rect">
+            <a:avLst/>
+          </a:prstGeom>
+          <a:solidFill>
+            <a:srgbClr val="F5F8FC"/>
+          </a:solidFill>
+          <a:ln w="12700">
+            <a:solidFill>
+              <a:srgbClr val="D7E2EE"/>
+            </a:solidFill>
+          </a:ln>
+        </p:spPr>
+        <p:txBody>
+          <a:bodyPr lIns="27432" tIns="27432" rIns="27432" bIns="27432" rtlCol="0" anchor="ctr"/>
+          <a:lstStyle/>
+          <a:p>
+            <a:pPr algn="ctr">
+              <a:defRPr sz="980"/>
+            </a:pPr>
+            <a:r>
+              <a:rPr sz="980" dirty="0">
+                <a:solidFill>
+                  <a:srgbClr val="172B4D"/>
+                </a:solidFill>
+                <a:latin typeface="Consolas"/>
+              </a:rPr>
+              <a:t>0.64</a:t>
+            </a:r>
+          </a:p>
+        </p:txBody>
+      </p:sp>
+      <p:sp>
+        <p:nvSpPr>
+          <p:cNvPr id="50" name="Cell 50"/>
+          <p:cNvSpPr/>
+          <p:nvPr/>
+        </p:nvSpPr>
+        <p:spPr>
+          <a:xfrm>
+            <a:off x="1158240" y="4389120"/>
+            <a:ext cx="1188720" cy="365760"/>
+          </a:xfrm>
+          <a:prstGeom prst="rect">
+            <a:avLst/>
+          </a:prstGeom>
+          <a:solidFill>
+            <a:srgbClr val="FFFFFF"/>
+          </a:solidFill>
+          <a:ln w="12700">
+            <a:solidFill>
+              <a:srgbClr val="D7E2EE"/>
+            </a:solidFill>
+          </a:ln>
+        </p:spPr>
+        <p:txBody>
+          <a:bodyPr lIns="27432" tIns="27432" rIns="27432" bIns="27432" rtlCol="0" anchor="ctr"/>
+          <a:lstStyle/>
+          <a:p>
+            <a:pPr algn="ctr">
+              <a:defRPr sz="980"/>
+            </a:pPr>
+            <a:r>
+              <a:rPr sz="980" b="1" dirty="0">
+                <a:solidFill>
+                  <a:srgbClr val="172B4D"/>
+                </a:solidFill>
+                <a:latin typeface="Consolas"/>
+              </a:rPr>
+              <a:t>chicago</a:t>
+            </a:r>
+          </a:p>
+        </p:txBody>
+      </p:sp>
+      <p:sp>
+        <p:nvSpPr>
+          <p:cNvPr id="51" name="Cell 51"/>
+          <p:cNvSpPr/>
+          <p:nvPr/>
+        </p:nvSpPr>
+        <p:spPr>
+          <a:xfrm>
+            <a:off x="2346960" y="4389120"/>
+            <a:ext cx="1188720" cy="365760"/>
+          </a:xfrm>
+          <a:prstGeom prst="rect">
+            <a:avLst/>
+          </a:prstGeom>
+          <a:solidFill>
+            <a:srgbClr val="FFFFFF"/>
+          </a:solidFill>
+          <a:ln w="12700">
+            <a:solidFill>
+              <a:srgbClr val="D7E2EE"/>
+            </a:solidFill>
+          </a:ln>
+        </p:spPr>
+        <p:txBody>
+          <a:bodyPr lIns="27432" tIns="27432" rIns="27432" bIns="27432" rtlCol="0" anchor="ctr"/>
+          <a:lstStyle/>
+          <a:p>
+            <a:pPr algn="ctr">
+              <a:defRPr sz="980"/>
+            </a:pPr>
+            <a:r>
+              <a:rPr sz="980" dirty="0">
+                <a:solidFill>
+                  <a:srgbClr val="172B4D"/>
+                </a:solidFill>
+                <a:latin typeface="Consolas"/>
+              </a:rPr>
+              <a:t>0.41</a:t>
+            </a:r>
+          </a:p>
+        </p:txBody>
+      </p:sp>
+      <p:sp>
+        <p:nvSpPr>
+          <p:cNvPr id="52" name="Cell 52"/>
+          <p:cNvSpPr/>
+          <p:nvPr/>
+        </p:nvSpPr>
+        <p:spPr>
+          <a:xfrm>
+            <a:off x="3535680" y="4389120"/>
+            <a:ext cx="1188720" cy="365760"/>
+          </a:xfrm>
+          <a:prstGeom prst="rect">
+            <a:avLst/>
+          </a:prstGeom>
+          <a:solidFill>
+            <a:srgbClr val="FFFFFF"/>
+          </a:solidFill>
+          <a:ln w="12700">
+            <a:solidFill>
+              <a:srgbClr val="D7E2EE"/>
+            </a:solidFill>
+          </a:ln>
+        </p:spPr>
+        <p:txBody>
+          <a:bodyPr lIns="27432" tIns="27432" rIns="27432" bIns="27432" rtlCol="0" anchor="ctr"/>
+          <a:lstStyle/>
+          <a:p>
+            <a:pPr algn="ctr">
+              <a:defRPr sz="980"/>
+            </a:pPr>
+            <a:r>
+              <a:rPr sz="980" dirty="0">
+                <a:solidFill>
+                  <a:srgbClr val="172B4D"/>
+                </a:solidFill>
+                <a:latin typeface="Consolas"/>
+              </a:rPr>
+              <a:t>0.12</a:t>
+            </a:r>
+          </a:p>
+        </p:txBody>
+      </p:sp>
+      <p:sp>
+        <p:nvSpPr>
+          <p:cNvPr id="53" name="Cell 53"/>
+          <p:cNvSpPr/>
+          <p:nvPr/>
+        </p:nvSpPr>
+        <p:spPr>
+          <a:xfrm>
+            <a:off x="4724400" y="4389120"/>
+            <a:ext cx="1188720" cy="365760"/>
+          </a:xfrm>
+          <a:prstGeom prst="rect">
+            <a:avLst/>
+          </a:prstGeom>
+          <a:solidFill>
+            <a:srgbClr val="FFFFFF"/>
+          </a:solidFill>
+          <a:ln w="12700">
+            <a:solidFill>
+              <a:srgbClr val="D7E2EE"/>
+            </a:solidFill>
+          </a:ln>
+        </p:spPr>
+        <p:txBody>
+          <a:bodyPr lIns="27432" tIns="27432" rIns="27432" bIns="27432" rtlCol="0" anchor="ctr"/>
+          <a:lstStyle/>
+          <a:p>
+            <a:pPr algn="ctr">
+              <a:defRPr sz="980"/>
+            </a:pPr>
+            <a:r>
+              <a:rPr sz="980" dirty="0">
+                <a:solidFill>
+                  <a:srgbClr val="172B4D"/>
+                </a:solidFill>
+                <a:latin typeface="Consolas"/>
+              </a:rPr>
+              <a:t>-0.33</a:t>
+            </a:r>
+          </a:p>
+        </p:txBody>
+      </p:sp>
+      <p:sp>
+        <p:nvSpPr>
+          <p:cNvPr id="54" name="Cell 54"/>
+          <p:cNvSpPr/>
+          <p:nvPr/>
+        </p:nvSpPr>
+        <p:spPr>
+          <a:xfrm>
+            <a:off x="5913120" y="4389120"/>
+            <a:ext cx="1188720" cy="365760"/>
+          </a:xfrm>
+          <a:prstGeom prst="rect">
+            <a:avLst/>
+          </a:prstGeom>
+          <a:solidFill>
+            <a:srgbClr val="FFFFFF"/>
+          </a:solidFill>
+          <a:ln w="12700">
+            <a:solidFill>
+              <a:srgbClr val="D7E2EE"/>
+            </a:solidFill>
+          </a:ln>
+        </p:spPr>
+        <p:txBody>
+          <a:bodyPr lIns="27432" tIns="27432" rIns="27432" bIns="27432" rtlCol="0" anchor="ctr"/>
+          <a:lstStyle/>
+          <a:p>
+            <a:pPr algn="ctr">
+              <a:defRPr sz="980"/>
+            </a:pPr>
+            <a:r>
+              <a:rPr sz="980" dirty="0">
+                <a:solidFill>
+                  <a:srgbClr val="172B4D"/>
+                </a:solidFill>
+                <a:latin typeface="Consolas"/>
+              </a:rPr>
+              <a:t>0.57</a:t>
+            </a:r>
+          </a:p>
+        </p:txBody>
+      </p:sp>
+      <p:sp>
+        <p:nvSpPr>
+          <p:cNvPr id="55" name="Cell 55"/>
+          <p:cNvSpPr/>
+          <p:nvPr/>
+        </p:nvSpPr>
+        <p:spPr>
+          <a:xfrm>
+            <a:off x="1158240" y="4754880"/>
+            <a:ext cx="1188720" cy="365760"/>
+          </a:xfrm>
+          <a:prstGeom prst="rect">
+            <a:avLst/>
+          </a:prstGeom>
+          <a:solidFill>
+            <a:srgbClr val="F5F8FC"/>
+          </a:solidFill>
+          <a:ln w="12700">
+            <a:solidFill>
+              <a:srgbClr val="D7E2EE"/>
+            </a:solidFill>
+          </a:ln>
+        </p:spPr>
+        <p:txBody>
+          <a:bodyPr lIns="27432" tIns="27432" rIns="27432" bIns="27432" rtlCol="0" anchor="ctr"/>
+          <a:lstStyle/>
+          <a:p>
+            <a:pPr algn="ctr">
+              <a:defRPr sz="980"/>
+            </a:pPr>
+            <a:r>
+              <a:rPr sz="980" b="1" dirty="0">
+                <a:solidFill>
+                  <a:srgbClr val="172B4D"/>
+                </a:solidFill>
+                <a:latin typeface="Consolas"/>
+              </a:rPr>
+              <a:t>?</a:t>
+            </a:r>
+          </a:p>
+        </p:txBody>
+      </p:sp>
+      <p:sp>
+        <p:nvSpPr>
+          <p:cNvPr id="56" name="Cell 56"/>
+          <p:cNvSpPr/>
+          <p:nvPr/>
+        </p:nvSpPr>
+        <p:spPr>
+          <a:xfrm>
+            <a:off x="2346960" y="4754880"/>
+            <a:ext cx="1188720" cy="365760"/>
+          </a:xfrm>
+          <a:prstGeom prst="rect">
+            <a:avLst/>
+          </a:prstGeom>
+          <a:solidFill>
+            <a:srgbClr val="F5F8FC"/>
+          </a:solidFill>
+          <a:ln w="12700">
+            <a:solidFill>
+              <a:srgbClr val="D7E2EE"/>
+            </a:solidFill>
+          </a:ln>
+        </p:spPr>
+        <p:txBody>
+          <a:bodyPr lIns="27432" tIns="27432" rIns="27432" bIns="27432" rtlCol="0" anchor="ctr"/>
+          <a:lstStyle/>
+          <a:p>
+            <a:pPr algn="ctr">
+              <a:defRPr sz="980"/>
+            </a:pPr>
+            <a:r>
+              <a:rPr sz="980" dirty="0">
+                <a:solidFill>
+                  <a:srgbClr val="172B4D"/>
+                </a:solidFill>
+                <a:latin typeface="Consolas"/>
+              </a:rPr>
+              <a:t>-0.07</a:t>
+            </a:r>
+          </a:p>
+        </p:txBody>
+      </p:sp>
+      <p:sp>
+        <p:nvSpPr>
+          <p:cNvPr id="57" name="Cell 57"/>
+          <p:cNvSpPr/>
+          <p:nvPr/>
+        </p:nvSpPr>
+        <p:spPr>
+          <a:xfrm>
+            <a:off x="3535680" y="4754880"/>
+            <a:ext cx="1188720" cy="365760"/>
+          </a:xfrm>
+          <a:prstGeom prst="rect">
+            <a:avLst/>
+          </a:prstGeom>
+          <a:solidFill>
+            <a:srgbClr val="F5F8FC"/>
+          </a:solidFill>
+          <a:ln w="12700">
+            <a:solidFill>
+              <a:srgbClr val="D7E2EE"/>
+            </a:solidFill>
+          </a:ln>
+        </p:spPr>
+        <p:txBody>
+          <a:bodyPr lIns="27432" tIns="27432" rIns="27432" bIns="27432" rtlCol="0" anchor="ctr"/>
+          <a:lstStyle/>
+          <a:p>
+            <a:pPr algn="ctr">
+              <a:defRPr sz="980"/>
+            </a:pPr>
+            <a:r>
+              <a:rPr sz="980" dirty="0">
+                <a:solidFill>
+                  <a:srgbClr val="172B4D"/>
+                </a:solidFill>
+                <a:latin typeface="Consolas"/>
+              </a:rPr>
+              <a:t>0.04</a:t>
+            </a:r>
+          </a:p>
+        </p:txBody>
+      </p:sp>
+      <p:sp>
+        <p:nvSpPr>
+          <p:cNvPr id="58" name="Cell 58"/>
+          <p:cNvSpPr/>
+          <p:nvPr/>
+        </p:nvSpPr>
+        <p:spPr>
+          <a:xfrm>
+            <a:off x="4724400" y="4754880"/>
+            <a:ext cx="1188720" cy="365760"/>
+          </a:xfrm>
+          <a:prstGeom prst="rect">
+            <a:avLst/>
+          </a:prstGeom>
+          <a:solidFill>
+            <a:srgbClr val="F5F8FC"/>
+          </a:solidFill>
+          <a:ln w="12700">
+            <a:solidFill>
+              <a:srgbClr val="D7E2EE"/>
+            </a:solidFill>
+          </a:ln>
+        </p:spPr>
+        <p:txBody>
+          <a:bodyPr lIns="27432" tIns="27432" rIns="27432" bIns="27432" rtlCol="0" anchor="ctr"/>
+          <a:lstStyle/>
+          <a:p>
+            <a:pPr algn="ctr">
+              <a:defRPr sz="980"/>
+            </a:pPr>
+            <a:r>
+              <a:rPr sz="980" dirty="0">
+                <a:solidFill>
+                  <a:srgbClr val="172B4D"/>
+                </a:solidFill>
+                <a:latin typeface="Consolas"/>
+              </a:rPr>
+              <a:t>0.19</a:t>
+            </a:r>
+          </a:p>
+        </p:txBody>
+      </p:sp>
+      <p:sp>
+        <p:nvSpPr>
+          <p:cNvPr id="59" name="Cell 59"/>
+          <p:cNvSpPr/>
+          <p:nvPr/>
+        </p:nvSpPr>
+        <p:spPr>
+          <a:xfrm>
+            <a:off x="5913120" y="4754880"/>
+            <a:ext cx="1188720" cy="365760"/>
+          </a:xfrm>
+          <a:prstGeom prst="rect">
+            <a:avLst/>
+          </a:prstGeom>
+          <a:solidFill>
+            <a:srgbClr val="F5F8FC"/>
+          </a:solidFill>
+          <a:ln w="12700">
+            <a:solidFill>
+              <a:srgbClr val="D7E2EE"/>
+            </a:solidFill>
+          </a:ln>
+        </p:spPr>
+        <p:txBody>
+          <a:bodyPr lIns="27432" tIns="27432" rIns="27432" bIns="27432" rtlCol="0" anchor="ctr"/>
+          <a:lstStyle/>
+          <a:p>
+            <a:pPr algn="ctr">
+              <a:defRPr sz="980"/>
+            </a:pPr>
+            <a:r>
+              <a:rPr sz="980" dirty="0">
+                <a:solidFill>
+                  <a:srgbClr val="172B4D"/>
+                </a:solidFill>
+                <a:latin typeface="Consolas"/>
+              </a:rPr>
+              <a:t>-0.22</a:t>
+            </a:r>
+          </a:p>
+        </p:txBody>
+      </p:sp>
+      <p:sp>
+        <p:nvSpPr>
+          <p:cNvPr id="80" name="Shape Label"/>
+          <p:cNvSpPr/>
+          <p:nvPr/>
+        </p:nvSpPr>
+        <p:spPr>
+          <a:xfrm>
+            <a:off x="1158240" y="5212080"/>
+            <a:ext cx="5943600" cy="365760"/>
+          </a:xfrm>
+          <a:prstGeom prst="roundRect">
+            <a:avLst/>
+          </a:prstGeom>
+          <a:solidFill>
+            <a:srgbClr val="FFFFFF"/>
+          </a:solidFill>
+          <a:ln w="12700">
+            <a:solidFill>
+              <a:srgbClr val="0B5CAD"/>
+            </a:solidFill>
+          </a:ln>
+        </p:spPr>
+        <p:txBody>
+          <a:bodyPr lIns="45720" tIns="45720" rIns="45720" bIns="45720" rtlCol="0" anchor="ctr"/>
+          <a:lstStyle/>
+          <a:p>
+            <a:pPr algn="ctr">
+              <a:defRPr sz="1450"/>
+            </a:pPr>
+            <a:r>
+              <a:rPr sz="1450" b="1" dirty="0">
+                <a:solidFill>
+                  <a:srgbClr val="0B2F5B"/>
+                </a:solidFill>
+                <a:latin typeface="Consolas"/>
+              </a:rPr>
+              <a:t>activation tensor shape = [7 token positions, 4 vector dimensions]</a:t>
+            </a:r>
+          </a:p>
+        </p:txBody>
+      </p:sp>
+      <p:sp>
+        <p:nvSpPr>
+          <p:cNvPr id="81" name="Bridge"/>
+          <p:cNvSpPr/>
+          <p:nvPr/>
+        </p:nvSpPr>
+        <p:spPr>
+          <a:xfrm>
+            <a:off x="7437120" y="5212080"/>
+            <a:ext cx="3657600" cy="548640"/>
+          </a:xfrm>
+          <a:prstGeom prst="roundRect">
+            <a:avLst/>
+          </a:prstGeom>
+          <a:solidFill>
+            <a:srgbClr val="FFFFFF"/>
+          </a:solidFill>
+          <a:ln w="12700">
+            <a:solidFill>
+              <a:srgbClr val="BED2E6"/>
+            </a:solidFill>
+          </a:ln>
+        </p:spPr>
+        <p:txBody>
+          <a:bodyPr lIns="91440" tIns="91440" rIns="91440" bIns="91440" rtlCol="0" anchor="ctr"/>
+          <a:lstStyle/>
+          <a:p>
+            <a:pPr algn="ctr">
+              <a:defRPr sz="1500"/>
+            </a:pPr>
+            <a:r>
+              <a:rPr sz="1500" b="1" dirty="0">
+                <a:solidFill>
+                  <a:srgbClr val="172B4D"/>
+                </a:solidFill>
+                <a:latin typeface="Aptos"/>
+              </a:rPr>
+              <a:t>Next session: how layers transform this tensor.</a:t>
+            </a:r>
+          </a:p>
+        </p:txBody>
+      </p:sp>
+      <p:sp>
+        <p:nvSpPr>
+          <p:cNvPr id="90" name="Footer"/>
+          <p:cNvSpPr/>
+          <p:nvPr/>
+        </p:nvSpPr>
+        <p:spPr>
+          <a:xfrm>
+            <a:off x="320040" y="6473952"/>
+            <a:ext cx="11521440" cy="228600"/>
+          </a:xfrm>
+          <a:prstGeom prst="rect">
+            <a:avLst/>
+          </a:prstGeom>
+          <a:noFill/>
+          <a:ln/>
+        </p:spPr>
+        <p:txBody>
+          <a:bodyPr lIns="0" tIns="0" rIns="0" bIns="0" rtlCol="0" anchor="t"/>
+          <a:lstStyle/>
+          <a:p>
+            <a:pPr algn="r">
+              <a:defRPr sz="850"/>
+            </a:pPr>
+            <a:r>
+              <a:rPr sz="850" dirty="0">
+                <a:solidFill>
+                  <a:srgbClr val="6B778C"/>
+                </a:solidFill>
+                <a:latin typeface="Aptos"/>
+              </a:rPr>
+              <a:t>MAGPAI Session 1 - Tokens - v1.0 | javaboy-vk | 2026-05-22 | Slide 14</a:t>
+            </a:r>
+          </a:p>
+        </p:txBody>
+      </p:sp>
+    </p:spTree>
+  </p:cSld>
+  <p:clrMapOvr>
+    <a:masterClrMapping/>
+  </p:clrMapOvr>
+</p:sld>
+</file>
+
+<file path=ppt/slides/slide15.xml><?xml version="1.0" encoding="utf-8"?>
+<p:sld xmlns:a="http://schemas.openxmlformats.org/drawingml/2006/main" xmlns:r="http://schemas.openxmlformats.org/officeDocument/2006/relationships" xmlns:p="http://schemas.openxmlformats.org/presentationml/2006/main">
+  <p:cSld>
+    <p:spTree>
+      <p:nvGrpSpPr>
+        <p:cNvPr id="1" name=""/>
+        <p:cNvGrpSpPr/>
+        <p:nvPr/>
+      </p:nvGrpSpPr>
+      <p:grpSpPr>
+        <a:xfrm>
+          <a:off x="0" y="0"/>
+          <a:ext cx="0" cy="0"/>
+          <a:chOff x="0" y="0"/>
+          <a:chExt cx="0" cy="0"/>
+        </a:xfrm>
+      </p:grpSpPr>
+      <p:pic>
+        <p:nvPicPr>
+          <p:cNvPr id="2" name="MAGPAI From Question to Insight"/>
+          <p:cNvPicPr/>
+          <p:nvPr/>
+        </p:nvPicPr>
+        <p:blipFill>
+          <a:blip r:embed="rId2"/>
+          <a:stretch>
+            <a:fillRect/>
+          </a:stretch>
+        </p:blipFill>
+        <p:spPr>
+          <a:xfrm>
+            <a:off x="1466850" y="274320"/>
+            <a:ext cx="9258300" cy="6172200"/>
+          </a:xfrm>
+          <a:prstGeom prst="rect">
+            <a:avLst/>
+          </a:prstGeom>
+        </p:spPr>
+      </p:pic>
+      <p:sp>
+        <p:nvSpPr>
+          <p:cNvPr id="3" name="Footer"/>
+          <p:cNvSpPr txBox="1"/>
+          <p:nvPr/>
+        </p:nvSpPr>
+        <p:spPr>
+          <a:xfrm>
+            <a:off x="320040" y="6473952"/>
+            <a:ext cx="11521440" cy="228600"/>
+          </a:xfrm>
+          <a:prstGeom prst="rect">
+            <a:avLst/>
+          </a:prstGeom>
+          <a:noFill/>
+          <a:ln/>
+        </p:spPr>
+        <p:txBody>
+          <a:bodyPr lIns="0" tIns="0" rIns="0" bIns="0" rtlCol="0" anchor="t"/>
+          <a:lstStyle/>
+          <a:p>
+            <a:pPr algn="r"/>
+            <a:r>
+              <a:rPr sz="850" dirty="0">
+                <a:solidFill>
+                  <a:srgbClr val="6B778C"/>
+                </a:solidFill>
+                <a:latin typeface="Aptos"/>
+              </a:rPr>
+              <a:t>MAGPAI Session 1 - Tokens - v1.0 | javaboy-vk | 2026-05-22 | Slide 15</a:t>
+            </a:r>
+          </a:p>
+        </p:txBody>
+      </p:sp>
+    </p:spTree>
+  </p:cSld>
+  <p:clrMapOvr>
+    <a:masterClrMapping/>
+  </p:clrMapOvr>
+</p:sld>
+</file>
+
+<file path=ppt/slides/slide16.xml><?xml version="1.0" encoding="utf-8"?>
+<p:sld xmlns:a="http://schemas.openxmlformats.org/drawingml/2006/main" xmlns:r="http://schemas.openxmlformats.org/officeDocument/2006/relationships" xmlns:p="http://schemas.openxmlformats.org/presentationml/2006/main">
+  <p:cSld>
+    <p:spTree>
+      <p:nvGrpSpPr>
+        <p:cNvPr id="1" name=""/>
+        <p:cNvGrpSpPr/>
+        <p:nvPr/>
+      </p:nvGrpSpPr>
+      <p:grpSpPr>
+        <a:xfrm>
+          <a:off x="0" y="0"/>
+          <a:ext cx="0" cy="0"/>
+          <a:chOff x="0" y="0"/>
+          <a:chExt cx="0" cy="0"/>
+        </a:xfrm>
+      </p:grpSpPr>
+      <p:sp>
+        <p:nvSpPr>
+          <p:cNvPr id="2" name="TextBox 1"/>
+          <p:cNvSpPr txBox="1"/>
+          <p:nvPr/>
+        </p:nvSpPr>
+        <p:spPr>
+          <a:xfrm>
+            <a:off x="502920" y="320040"/>
+            <a:ext cx="11247120" cy="548640"/>
+          </a:xfrm>
+          <a:prstGeom prst="rect">
+            <a:avLst/>
+          </a:prstGeom>
+          <a:noFill/>
+        </p:spPr>
+        <p:txBody>
+          <a:bodyPr wrap="none">
+            <a:spAutoFit/>
+          </a:bodyPr>
+          <a:lstStyle/>
+          <a:p>
+            <a:pPr>
+              <a:defRPr sz="3000" b="1">
+                <a:solidFill>
+                  <a:srgbClr val="0B2F5B"/>
+                </a:solidFill>
+              </a:defRPr>
+            </a:pPr>
+            <a:r>
+              <a:t>Live Demo Path</a:t>
+            </a:r>
+          </a:p>
+        </p:txBody>
+      </p:sp>
+      <p:sp>
+        <p:nvSpPr>
+          <p:cNvPr id="3" name="TextBox 2"/>
+          <p:cNvSpPr txBox="1"/>
+          <p:nvPr/>
+        </p:nvSpPr>
+        <p:spPr>
+          <a:xfrm>
+            <a:off x="530352" y="868680"/>
+            <a:ext cx="10972800" cy="365760"/>
+          </a:xfrm>
+          <a:prstGeom prst="rect">
+            <a:avLst/>
+          </a:prstGeom>
+          <a:noFill/>
+        </p:spPr>
+        <p:txBody>
+          <a:bodyPr wrap="none">
+            <a:spAutoFit/>
+          </a:bodyPr>
+          <a:lstStyle/>
+          <a:p>
+            <a:pPr>
+              <a:defRPr sz="1600">
+                <a:solidFill>
+                  <a:srgbClr val="52616B"/>
+                </a:solidFill>
+              </a:defRPr>
+            </a:pPr>
+            <a:r>
+              <a:t>VS Code runs the demos</a:t>
+            </a:r>
+          </a:p>
+        </p:txBody>
+      </p:sp>
+      <p:sp>
+        <p:nvSpPr>
+          <p:cNvPr id="4" name="Rounded Rectangle 3"/>
+          <p:cNvSpPr/>
+          <p:nvPr/>
+        </p:nvSpPr>
+        <p:spPr>
+          <a:xfrm>
+            <a:off x="81481" y="1188720"/>
+            <a:ext cx="11887200" cy="1280160"/>
+          </a:xfrm>
+          <a:prstGeom prst="roundRect">
+            <a:avLst/>
+          </a:prstGeom>
+          <a:solidFill>
+            <a:srgbClr val="F5F8FC"/>
+          </a:solidFill>
+          <a:ln>
+            <a:solidFill>
+              <a:srgbClr val="BED2E6"/>
+            </a:solidFill>
+          </a:ln>
+        </p:spPr>
+        <p:style>
+          <a:lnRef idx="1">
+            <a:schemeClr val="accent1"/>
+          </a:lnRef>
+          <a:fillRef idx="3">
+            <a:schemeClr val="accent1"/>
+          </a:fillRef>
+          <a:effectRef idx="2">
+            <a:schemeClr val="accent1"/>
+          </a:effectRef>
+          <a:fontRef idx="minor">
+            <a:schemeClr val="lt1"/>
+          </a:fontRef>
+        </p:style>
+        <p:txBody>
+          <a:bodyPr lIns="182880" tIns="109728" rIns="182880" rtlCol="0" anchor="ctr"/>
+          <a:lstStyle/>
+          <a:p>
+            <a:pPr algn="ctr">
+              <a:defRPr sz="2500">
+                <a:solidFill>
+                  <a:srgbClr val="172B4D"/>
+                </a:solidFill>
+                <a:latin typeface="Consolas"/>
+              </a:defRPr>
+            </a:pPr>
+            <a:r>
+              <a:rPr dirty="0"/>
+              <a:t>Sentence ? Tokens ? Token IDs ? Embedding Table ? Input</a:t>
+            </a:r>
+            <a:r>
+              <a:rPr lang="en-US" dirty="0"/>
+              <a:t> </a:t>
+            </a:r>
+            <a:r>
+              <a:rPr dirty="0"/>
+              <a:t>Tensor</a:t>
+            </a:r>
+          </a:p>
+        </p:txBody>
+      </p:sp>
+      <p:sp>
+        <p:nvSpPr>
+          <p:cNvPr id="5" name="Rounded Rectangle 4"/>
+          <p:cNvSpPr/>
+          <p:nvPr/>
+        </p:nvSpPr>
+        <p:spPr>
+          <a:xfrm>
+            <a:off x="914400" y="2834640"/>
+            <a:ext cx="3200400" cy="1417320"/>
+          </a:xfrm>
+          <a:prstGeom prst="roundRect">
+            <a:avLst/>
+          </a:prstGeom>
+          <a:solidFill>
+            <a:srgbClr val="FFFFFF"/>
+          </a:solidFill>
+          <a:ln w="19050">
+            <a:solidFill>
+              <a:srgbClr val="0B5CAD"/>
+            </a:solidFill>
+          </a:ln>
+        </p:spPr>
+        <p:style>
+          <a:lnRef idx="1">
+            <a:schemeClr val="accent1"/>
+          </a:lnRef>
+          <a:fillRef idx="3">
+            <a:schemeClr val="accent1"/>
+          </a:fillRef>
+          <a:effectRef idx="2">
+            <a:schemeClr val="accent1"/>
+          </a:effectRef>
+          <a:fontRef idx="minor">
+            <a:schemeClr val="lt1"/>
+          </a:fontRef>
+        </p:style>
+        <p:txBody>
+          <a:bodyPr lIns="137160" tIns="91440" rIns="137160" rtlCol="0" anchor="ctr"/>
+          <a:lstStyle/>
+          <a:p>
+            <a:pPr algn="ctr">
+              <a:defRPr sz="1800" b="1">
+                <a:solidFill>
+                  <a:srgbClr val="0B2F5B"/>
+                </a:solidFill>
+              </a:defRPr>
+            </a:pPr>
+            <a:r>
+              <a:t>Demo 1</a:t>
+            </a:r>
+          </a:p>
+          <a:p>
+            <a:pPr>
+              <a:spcAft>
+                <a:spcPts val="200"/>
+              </a:spcAft>
+              <a:defRPr sz="1700">
+                <a:solidFill>
+                  <a:srgbClr val="172B4D"/>
+                </a:solidFill>
+              </a:defRPr>
+            </a:pPr>
+            <a:r>
+              <a:t>token_demo.py</a:t>
+            </a:r>
+          </a:p>
+          <a:p>
+            <a:pPr>
+              <a:spcAft>
+                <a:spcPts val="200"/>
+              </a:spcAft>
+              <a:defRPr sz="1700">
+                <a:solidFill>
+                  <a:srgbClr val="172B4D"/>
+                </a:solidFill>
+              </a:defRPr>
+            </a:pPr>
+            <a:r>
+              <a:t>Terminal pipeline</a:t>
+            </a:r>
+          </a:p>
+        </p:txBody>
+      </p:sp>
+      <p:sp>
+        <p:nvSpPr>
+          <p:cNvPr id="6" name="Rounded Rectangle 5"/>
+          <p:cNvSpPr/>
+          <p:nvPr/>
+        </p:nvSpPr>
+        <p:spPr>
+          <a:xfrm>
+            <a:off x="4480560" y="2834640"/>
+            <a:ext cx="3200400" cy="1417320"/>
+          </a:xfrm>
+          <a:prstGeom prst="roundRect">
+            <a:avLst/>
+          </a:prstGeom>
+          <a:solidFill>
+            <a:srgbClr val="FFFFFF"/>
+          </a:solidFill>
+          <a:ln w="19050">
+            <a:solidFill>
+              <a:srgbClr val="0B5CAD"/>
+            </a:solidFill>
+          </a:ln>
+        </p:spPr>
+        <p:style>
+          <a:lnRef idx="1">
+            <a:schemeClr val="accent1"/>
+          </a:lnRef>
+          <a:fillRef idx="3">
+            <a:schemeClr val="accent1"/>
+          </a:fillRef>
+          <a:effectRef idx="2">
+            <a:schemeClr val="accent1"/>
+          </a:effectRef>
+          <a:fontRef idx="minor">
+            <a:schemeClr val="lt1"/>
+          </a:fontRef>
+        </p:style>
+        <p:txBody>
+          <a:bodyPr lIns="137160" tIns="91440" rIns="137160" rtlCol="0" anchor="ctr"/>
+          <a:lstStyle/>
+          <a:p>
+            <a:pPr algn="ctr">
+              <a:defRPr sz="1800" b="1">
+                <a:solidFill>
+                  <a:srgbClr val="0B2F5B"/>
+                </a:solidFill>
+              </a:defRPr>
+            </a:pPr>
+            <a:r>
+              <a:t>Demo 2</a:t>
+            </a:r>
+          </a:p>
+          <a:p>
+            <a:pPr>
+              <a:spcAft>
+                <a:spcPts val="200"/>
+              </a:spcAft>
+              <a:defRPr sz="1700">
+                <a:solidFill>
+                  <a:srgbClr val="172B4D"/>
+                </a:solidFill>
+              </a:defRPr>
+            </a:pPr>
+            <a:r>
+              <a:t>token_streamlit_app.py</a:t>
+            </a:r>
+          </a:p>
+          <a:p>
+            <a:pPr>
+              <a:spcAft>
+                <a:spcPts val="200"/>
+              </a:spcAft>
+              <a:defRPr sz="1700">
+                <a:solidFill>
+                  <a:srgbClr val="172B4D"/>
+                </a:solidFill>
+              </a:defRPr>
+            </a:pPr>
+            <a:r>
+              <a:t>Visual table</a:t>
+            </a:r>
+          </a:p>
+        </p:txBody>
+      </p:sp>
+      <p:sp>
+        <p:nvSpPr>
+          <p:cNvPr id="7" name="Rounded Rectangle 6"/>
+          <p:cNvSpPr/>
+          <p:nvPr/>
+        </p:nvSpPr>
+        <p:spPr>
+          <a:xfrm>
+            <a:off x="8046720" y="2834640"/>
+            <a:ext cx="3200400" cy="1417320"/>
+          </a:xfrm>
+          <a:prstGeom prst="roundRect">
+            <a:avLst/>
+          </a:prstGeom>
+          <a:solidFill>
+            <a:srgbClr val="FFFFFF"/>
+          </a:solidFill>
+          <a:ln w="19050">
+            <a:solidFill>
+              <a:srgbClr val="0B5CAD"/>
+            </a:solidFill>
+          </a:ln>
+        </p:spPr>
+        <p:style>
+          <a:lnRef idx="1">
+            <a:schemeClr val="accent1"/>
+          </a:lnRef>
+          <a:fillRef idx="3">
+            <a:schemeClr val="accent1"/>
+          </a:fillRef>
+          <a:effectRef idx="2">
+            <a:schemeClr val="accent1"/>
+          </a:effectRef>
+          <a:fontRef idx="minor">
+            <a:schemeClr val="lt1"/>
+          </a:fontRef>
+        </p:style>
+        <p:txBody>
+          <a:bodyPr lIns="137160" tIns="91440" rIns="137160" rtlCol="0" anchor="ctr"/>
+          <a:lstStyle/>
+          <a:p>
+            <a:pPr algn="ctr">
+              <a:defRPr sz="1800" b="1">
+                <a:solidFill>
+                  <a:srgbClr val="0B2F5B"/>
+                </a:solidFill>
+              </a:defRPr>
+            </a:pPr>
+            <a:r>
+              <a:t>Demo 3</a:t>
+            </a:r>
+          </a:p>
+          <a:p>
+            <a:pPr>
+              <a:spcAft>
+                <a:spcPts val="200"/>
+              </a:spcAft>
+              <a:defRPr sz="1700">
+                <a:solidFill>
+                  <a:srgbClr val="172B4D"/>
+                </a:solidFill>
+              </a:defRPr>
+            </a:pPr>
+            <a:r>
+              <a:t>embedding_lookup_linear_algebra_demo.py</a:t>
+            </a:r>
+          </a:p>
+          <a:p>
+            <a:pPr>
+              <a:spcAft>
+                <a:spcPts val="200"/>
+              </a:spcAft>
+              <a:defRPr sz="1700">
+                <a:solidFill>
+                  <a:srgbClr val="172B4D"/>
+                </a:solidFill>
+              </a:defRPr>
+            </a:pPr>
+            <a:r>
+              <a:t>Lookup vs matrix multiply</a:t>
+            </a:r>
+          </a:p>
+        </p:txBody>
+      </p:sp>
+      <p:sp>
+        <p:nvSpPr>
+          <p:cNvPr id="8" name="TextBox 7"/>
+          <p:cNvSpPr txBox="1"/>
+          <p:nvPr/>
+        </p:nvSpPr>
+        <p:spPr>
+          <a:xfrm>
+            <a:off x="320040" y="6473952"/>
+            <a:ext cx="11521440" cy="228600"/>
+          </a:xfrm>
+          <a:prstGeom prst="rect">
+            <a:avLst/>
+          </a:prstGeom>
+          <a:noFill/>
+        </p:spPr>
+        <p:txBody>
+          <a:bodyPr wrap="none">
+            <a:spAutoFit/>
+          </a:bodyPr>
+          <a:lstStyle/>
+          <a:p>
+            <a:pPr>
+              <a:defRPr sz="900">
+                <a:solidFill>
+                  <a:srgbClr val="52616B"/>
+                </a:solidFill>
+              </a:defRPr>
+            </a:pPr>
+            <a:r>
+              <a:t>MAGPAI Session 1 - Tokens - v1.0 | javaboy-vk | 2026-05-22 | Slide 16</a:t>
+            </a:r>
+          </a:p>
+        </p:txBody>
+      </p:sp>
+    </p:spTree>
+  </p:cSld>
+  <p:clrMapOvr>
+    <a:masterClrMapping/>
+  </p:clrMapOvr>
+</p:sld>
+</file>
+
+<file path=ppt/slides/slide17.xml><?xml version="1.0" encoding="utf-8"?>
+<p:sld xmlns:a="http://schemas.openxmlformats.org/drawingml/2006/main" xmlns:r="http://schemas.openxmlformats.org/officeDocument/2006/relationships" xmlns:p="http://schemas.openxmlformats.org/presentationml/2006/main">
+  <p:cSld>
+    <p:spTree>
+      <p:nvGrpSpPr>
+        <p:cNvPr id="1" name=""/>
+        <p:cNvGrpSpPr/>
+        <p:nvPr/>
+      </p:nvGrpSpPr>
+      <p:grpSpPr>
+        <a:xfrm>
+          <a:off x="0" y="0"/>
+          <a:ext cx="0" cy="0"/>
+          <a:chOff x="0" y="0"/>
+          <a:chExt cx="0" cy="0"/>
+        </a:xfrm>
+      </p:grpSpPr>
+      <p:sp>
+        <p:nvSpPr>
+          <p:cNvPr id="2" name="TextBox 1"/>
+          <p:cNvSpPr txBox="1"/>
+          <p:nvPr/>
+        </p:nvSpPr>
+        <p:spPr>
+          <a:xfrm>
+            <a:off x="502920" y="320040"/>
+            <a:ext cx="11247120" cy="548640"/>
+          </a:xfrm>
+          <a:prstGeom prst="rect">
+            <a:avLst/>
+          </a:prstGeom>
+          <a:noFill/>
+        </p:spPr>
+        <p:txBody>
+          <a:bodyPr wrap="none">
+            <a:spAutoFit/>
+          </a:bodyPr>
+          <a:lstStyle/>
+          <a:p>
+            <a:pPr>
+              <a:defRPr sz="3000" b="1">
+                <a:solidFill>
+                  <a:srgbClr val="0B2F5B"/>
+                </a:solidFill>
+              </a:defRPr>
+            </a:pPr>
+            <a:r>
+              <a:t>Audience Takeaway</a:t>
+            </a:r>
+          </a:p>
+        </p:txBody>
+      </p:sp>
+      <p:sp>
+        <p:nvSpPr>
+          <p:cNvPr id="3" name="TextBox 2"/>
+          <p:cNvSpPr txBox="1"/>
+          <p:nvPr/>
+        </p:nvSpPr>
+        <p:spPr>
+          <a:xfrm>
+            <a:off x="530352" y="868680"/>
+            <a:ext cx="10972800" cy="365760"/>
+          </a:xfrm>
+          <a:prstGeom prst="rect">
+            <a:avLst/>
+          </a:prstGeom>
+          <a:noFill/>
+        </p:spPr>
+        <p:txBody>
+          <a:bodyPr wrap="none">
+            <a:spAutoFit/>
+          </a:bodyPr>
+          <a:lstStyle/>
+          <a:p>
+            <a:pPr>
+              <a:defRPr sz="1600">
+                <a:solidFill>
+                  <a:srgbClr val="52616B"/>
+                </a:solidFill>
+              </a:defRPr>
+            </a:pPr>
+            <a:r>
+              <a:t>The first stable mental model</a:t>
+            </a:r>
+          </a:p>
+        </p:txBody>
+      </p:sp>
+      <p:sp>
+        <p:nvSpPr>
+          <p:cNvPr id="4" name="Rounded Rectangle 3"/>
+          <p:cNvSpPr/>
+          <p:nvPr/>
+        </p:nvSpPr>
+        <p:spPr>
+          <a:xfrm>
+            <a:off x="914400" y="1463040"/>
+            <a:ext cx="10424160" cy="1097280"/>
+          </a:xfrm>
+          <a:prstGeom prst="roundRect">
+            <a:avLst/>
+          </a:prstGeom>
+          <a:solidFill>
+            <a:srgbClr val="F5F8FC"/>
+          </a:solidFill>
+          <a:ln>
+            <a:solidFill>
+              <a:srgbClr val="BED2E6"/>
+            </a:solidFill>
+          </a:ln>
+        </p:spPr>
+        <p:style>
+          <a:lnRef idx="1">
+            <a:schemeClr val="accent1"/>
+          </a:lnRef>
+          <a:fillRef idx="3">
+            <a:schemeClr val="accent1"/>
+          </a:fillRef>
+          <a:effectRef idx="2">
+            <a:schemeClr val="accent1"/>
+          </a:effectRef>
+          <a:fontRef idx="minor">
+            <a:schemeClr val="lt1"/>
+          </a:fontRef>
+        </p:style>
+        <p:txBody>
+          <a:bodyPr lIns="182880" tIns="109728" rIns="182880" rtlCol="0" anchor="ctr"/>
+          <a:lstStyle/>
+          <a:p>
+            <a:pPr algn="ctr">
+              <a:defRPr sz="2700">
+                <a:solidFill>
+                  <a:srgbClr val="172B4D"/>
+                </a:solidFill>
+                <a:latin typeface="Consolas"/>
+              </a:defRPr>
+            </a:pPr>
+            <a:r>
+              <a:t>A model never sees “sales” as a word.</a:t>
+            </a:r>
+            <a:br/>
+            <a:r>
+              <a:t>It sees a numeric pattern.</a:t>
+            </a:r>
+          </a:p>
+        </p:txBody>
+      </p:sp>
+      <p:sp>
+        <p:nvSpPr>
+          <p:cNvPr id="5" name="Rounded Rectangle 4"/>
+          <p:cNvSpPr/>
+          <p:nvPr/>
+        </p:nvSpPr>
+        <p:spPr>
+          <a:xfrm>
+            <a:off x="914400" y="2971800"/>
+            <a:ext cx="10424160" cy="1600200"/>
+          </a:xfrm>
+          <a:prstGeom prst="roundRect">
+            <a:avLst/>
+          </a:prstGeom>
+          <a:solidFill>
+            <a:srgbClr val="F5F8FC"/>
+          </a:solidFill>
+          <a:ln>
+            <a:solidFill>
+              <a:srgbClr val="BED2E6"/>
+            </a:solidFill>
+          </a:ln>
+        </p:spPr>
+        <p:style>
+          <a:lnRef idx="1">
+            <a:schemeClr val="accent1"/>
+          </a:lnRef>
+          <a:fillRef idx="3">
+            <a:schemeClr val="accent1"/>
+          </a:fillRef>
+          <a:effectRef idx="2">
+            <a:schemeClr val="accent1"/>
+          </a:effectRef>
+          <a:fontRef idx="minor">
+            <a:schemeClr val="lt1"/>
+          </a:fontRef>
+        </p:style>
+        <p:txBody>
+          <a:bodyPr lIns="182880" tIns="109728" rIns="182880" rtlCol="0" anchor="ctr"/>
+          <a:lstStyle/>
+          <a:p>
+            <a:pPr algn="ctr">
               <a:defRPr sz="2200">
                 <a:solidFill>
                   <a:srgbClr val="172B4D"/>
@@ -3928,11 +7701,11 @@
             </a:br>
             <a:r>
               <a:rPr dirty="0"/>
-              <a:t>Vectors become </a:t>
+              <a:t>Vectors become an </a:t>
             </a:r>
             <a:r>
               <a:rPr lang="en-US" dirty="0"/>
-              <a:t>input to the NN </a:t>
+              <a:t>input tensor for the NN </a:t>
             </a:r>
             <a:r>
               <a:rPr dirty="0"/>
@@ -3971,7 +7744,7 @@
               </a:defRPr>
             </a:pPr>
             <a:r>
-              <a:t>MAGPAI Session 1 - Tokens - v1.0 | javaboy-vk | 2026-05-22 | Slide 10</a:t>
+              <a:t>MAGPAI Session 1 - Tokens - v1.0 | javaboy-vk | 2026-05-22 | Slide 17</a:t>
             </a:r>
           </a:p>
         </p:txBody>
@@ -4227,29 +8000,29 @@
 </file>
 
 <file path=ppt/slides/slide3.xml><?xml version="1.0" encoding="utf-8"?>
-<p:sld xmlns:a="http://schemas.openxmlformats.org/drawingml/2006/main" xmlns:r="http://schemas.openxmlformats.org/officeDocument/2006/relationships" xmlns:p="http://schemas.openxmlformats.org/presentationml/2006/main">
-  <p:cSld>
-    <p:spTree>
-      <p:nvGrpSpPr>
-        <p:cNvPr id="1" name=""/>
-        <p:cNvGrpSpPr/>
-        <p:nvPr/>
-      </p:nvGrpSpPr>
-      <p:grpSpPr>
+<ns0:sld xmlns:a="http://schemas.openxmlformats.org/drawingml/2006/main" xmlns:ns0="http://schemas.openxmlformats.org/presentationml/2006/main">
+  <ns0:cSld>
+    <ns0:spTree>
+      <ns0:nvGrpSpPr>
+        <ns0:cNvPr id="1" name=""/>
+        <ns0:cNvGrpSpPr/>
+        <ns0:nvPr/>
+      </ns0:nvGrpSpPr>
+      <ns0:grpSpPr>
         <a:xfrm>
           <a:off x="0" y="0"/>
           <a:ext cx="0" cy="0"/>
           <a:chOff x="0" y="0"/>
           <a:chExt cx="0" cy="0"/>
         </a:xfrm>
-      </p:grpSpPr>
-      <p:sp>
-        <p:nvSpPr>
-          <p:cNvPr id="2" name="TextBox 1"/>
-          <p:cNvSpPr txBox="1"/>
-          <p:nvPr/>
-        </p:nvSpPr>
-        <p:spPr>
+      </ns0:grpSpPr>
+      <ns0:sp>
+        <ns0:nvSpPr>
+          <ns0:cNvPr id="2" name="TextBox 1"/>
+          <ns0:cNvSpPr txBox="1"/>
+          <ns0:nvPr/>
+        </ns0:nvSpPr>
+        <ns0:spPr>
           <a:xfrm>
             <a:off x="502920" y="320040"/>
             <a:ext cx="11247120" cy="548640"/>
@@ -4258,8 +8031,8 @@
             <a:avLst/>
           </a:prstGeom>
           <a:noFill/>
-        </p:spPr>
-        <p:txBody>
+        </ns0:spPr>
+        <ns0:txBody>
           <a:bodyPr wrap="none">
             <a:spAutoFit/>
           </a:bodyPr>
@@ -4276,15 +8049,15 @@
               <a:t>The Big Idea</a:t>
             </a:r>
           </a:p>
-        </p:txBody>
-      </p:sp>
-      <p:sp>
-        <p:nvSpPr>
-          <p:cNvPr id="3" name="TextBox 2"/>
-          <p:cNvSpPr txBox="1"/>
-          <p:nvPr/>
-        </p:nvSpPr>
-        <p:spPr>
+        </ns0:txBody>
+      </ns0:sp>
+      <ns0:sp>
+        <ns0:nvSpPr>
+          <ns0:cNvPr id="3" name="TextBox 2"/>
+          <ns0:cNvSpPr txBox="1"/>
+          <ns0:nvPr/>
+        </ns0:nvSpPr>
+        <ns0:spPr>
           <a:xfrm>
             <a:off x="530352" y="868680"/>
             <a:ext cx="10972800" cy="365760"/>
@@ -4293,8 +8066,8 @@
             <a:avLst/>
           </a:prstGeom>
           <a:noFill/>
-        </p:spPr>
-        <p:txBody>
+        </ns0:spPr>
+        <ns0:txBody>
           <a:bodyPr wrap="none">
             <a:spAutoFit/>
           </a:bodyPr>
@@ -4308,18 +8081,18 @@
               </a:defRPr>
             </a:pPr>
             <a:r>
-              <a:t>People read words. AI models process numbers.</a:t>
-            </a:r>
-          </a:p>
-        </p:txBody>
-      </p:sp>
-      <p:sp>
-        <p:nvSpPr>
-          <p:cNvPr id="4" name="Rounded Rectangle 3"/>
-          <p:cNvSpPr/>
-          <p:nvPr/>
-        </p:nvSpPr>
-        <p:spPr>
+              <a:t>People read words. Neural-network models process numbers.</a:t>
+            </a:r>
+          </a:p>
+        </ns0:txBody>
+      </ns0:sp>
+      <ns0:sp>
+        <ns0:nvSpPr>
+          <ns0:cNvPr id="4" name="Rounded Rectangle 3"/>
+          <ns0:cNvSpPr/>
+          <ns0:nvPr/>
+        </ns0:nvSpPr>
+        <ns0:spPr>
           <a:xfrm>
             <a:off x="914400" y="1828800"/>
             <a:ext cx="10424160" cy="914400"/>
@@ -4335,8 +8108,8 @@
               <a:srgbClr val="BED2E6"/>
             </a:solidFill>
           </a:ln>
-        </p:spPr>
-        <p:style>
+        </ns0:spPr>
+        <ns0:style>
           <a:lnRef idx="1">
             <a:schemeClr val="accent1"/>
           </a:lnRef>
@@ -4349,8 +8122,8 @@
           <a:fontRef idx="minor">
             <a:schemeClr val="lt1"/>
           </a:fontRef>
-        </p:style>
-        <p:txBody>
+        </ns0:style>
+        <ns0:txBody>
           <a:bodyPr lIns="182880" tIns="109728" rIns="182880" rtlCol="0" anchor="ctr"/>
           <a:lstStyle/>
           <a:p>
@@ -4363,18 +8136,18 @@
               </a:defRPr>
             </a:pPr>
             <a:r>
-              <a:t>Text  →  Tokens  →  Token IDs  →  Vectors  →  Model</a:t>
-            </a:r>
-          </a:p>
-        </p:txBody>
-      </p:sp>
-      <p:sp>
-        <p:nvSpPr>
-          <p:cNvPr id="5" name="Rounded Rectangle 4"/>
-          <p:cNvSpPr/>
-          <p:nvPr/>
-        </p:nvSpPr>
-        <p:spPr>
+              <a:t>Text -&gt; Tokens -&gt; Token IDs -&gt; Vectors -&gt; Neural Network</a:t>
+            </a:r>
+          </a:p>
+        </ns0:txBody>
+      </ns0:sp>
+      <ns0:sp>
+        <ns0:nvSpPr>
+          <ns0:cNvPr id="5" name="Rounded Rectangle 4"/>
+          <ns0:cNvSpPr/>
+          <ns0:nvPr/>
+        </ns0:nvSpPr>
+        <ns0:spPr>
           <a:xfrm>
             <a:off x="914400" y="3383280"/>
             <a:ext cx="4937760" cy="1280160"/>
@@ -4390,8 +8163,8 @@
               <a:srgbClr val="0B5CAD"/>
             </a:solidFill>
           </a:ln>
-        </p:spPr>
-        <p:style>
+        </ns0:spPr>
+        <ns0:style>
           <a:lnRef idx="1">
             <a:schemeClr val="accent1"/>
           </a:lnRef>
@@ -4404,8 +8177,8 @@
           <a:fontRef idx="minor">
             <a:schemeClr val="lt1"/>
           </a:fontRef>
-        </p:style>
-        <p:txBody>
+        </ns0:style>
+        <ns0:txBody>
           <a:bodyPr lIns="137160" tIns="91440" rIns="137160" rtlCol="0" anchor="ctr"/>
           <a:lstStyle/>
           <a:p>
@@ -4435,15 +8208,15 @@
               <a:t>We see words, grammar, context, and meaning.</a:t>
             </a:r>
           </a:p>
-        </p:txBody>
-      </p:sp>
-      <p:sp>
-        <p:nvSpPr>
-          <p:cNvPr id="6" name="Rounded Rectangle 5"/>
-          <p:cNvSpPr/>
-          <p:nvPr/>
-        </p:nvSpPr>
-        <p:spPr>
+        </ns0:txBody>
+      </ns0:sp>
+      <ns0:sp>
+        <ns0:nvSpPr>
+          <ns0:cNvPr id="6" name="Rounded Rectangle 5"/>
+          <ns0:cNvSpPr/>
+          <ns0:nvPr/>
+        </ns0:nvSpPr>
+        <ns0:spPr>
           <a:xfrm>
             <a:off x="6400800" y="3383280"/>
             <a:ext cx="4937760" cy="1280160"/>
@@ -4459,8 +8232,8 @@
               <a:srgbClr val="0B5CAD"/>
             </a:solidFill>
           </a:ln>
-        </p:spPr>
-        <p:style>
+        </ns0:spPr>
+        <ns0:style>
           <a:lnRef idx="1">
             <a:schemeClr val="accent1"/>
           </a:lnRef>
@@ -4473,8 +8246,8 @@
           <a:fontRef idx="minor">
             <a:schemeClr val="lt1"/>
           </a:fontRef>
-        </p:style>
-        <p:txBody>
+        </ns0:style>
+        <ns0:txBody>
           <a:bodyPr lIns="137160" tIns="91440" rIns="137160" rtlCol="0" anchor="ctr"/>
           <a:lstStyle/>
           <a:p>
@@ -4501,18 +8274,18 @@
               </a:defRPr>
             </a:pPr>
             <a:r>
-              <a:t>The model needs numbers before it can compute anything.</a:t>
-            </a:r>
-          </a:p>
-        </p:txBody>
-      </p:sp>
-      <p:sp>
-        <p:nvSpPr>
-          <p:cNvPr id="7" name="TextBox 6"/>
-          <p:cNvSpPr txBox="1"/>
-          <p:nvPr/>
-        </p:nvSpPr>
-        <p:spPr>
+              <a:t>Here, model means a machine-learning model: a learned function that takes numbers as input and computes an output.</a:t>
+            </a:r>
+          </a:p>
+        </ns0:txBody>
+      </ns0:sp>
+      <ns0:sp>
+        <ns0:nvSpPr>
+          <ns0:cNvPr id="7" name="TextBox 6"/>
+          <ns0:cNvSpPr txBox="1"/>
+          <ns0:nvPr/>
+        </ns0:nvSpPr>
+        <ns0:spPr>
           <a:xfrm>
             <a:off x="320040" y="6473952"/>
             <a:ext cx="11521440" cy="228600"/>
@@ -4521,8 +8294,8 @@
             <a:avLst/>
           </a:prstGeom>
           <a:noFill/>
-        </p:spPr>
-        <p:txBody>
+        </ns0:spPr>
+        <ns0:txBody>
           <a:bodyPr wrap="none">
             <a:spAutoFit/>
           </a:bodyPr>
@@ -4539,14 +8312,14 @@
               <a:t>MAGPAI Session 1 - Tokens - v1.0 | javaboy-vk | 2026-05-22 | Slide 2</a:t>
             </a:r>
           </a:p>
-        </p:txBody>
-      </p:sp>
-    </p:spTree>
-  </p:cSld>
-  <p:clrMapOvr>
+        </ns0:txBody>
+      </ns0:sp>
+    </ns0:spTree>
+  </ns0:cSld>
+  <ns0:clrMapOvr>
     <a:masterClrMapping/>
-  </p:clrMapOvr>
-</p:sld>
+  </ns0:clrMapOvr>
+</ns0:sld>
 </file>
 
 <file path=ppt/slides/slide4.xml><?xml version="1.0" encoding="utf-8"?>
@@ -4631,7 +8404,7 @@
               </a:defRPr>
             </a:pPr>
             <a:r>
-              <a:t>A simple business statement</a:t>
+              <a:t>A simple business question</a:t>
             </a:r>
           </a:p>
         </p:txBody>
@@ -4686,7 +8459,16 @@
               </a:defRPr>
             </a:pPr>
             <a:r>
-              <a:t>"Sales are up in Chicago"</a:t>
+              <a:rPr dirty="0"/>
+              <a:t>"</a:t>
+            </a:r>
+            <a:r>
+              <a:rPr lang="en-US" dirty="0"/>
+              <a:t>are MAG s</a:t>
+            </a:r>
+            <a:r>
+              <a:rPr dirty="0"/>
+              <a:t>ales up in chicago?"</a:t>
             </a:r>
           </a:p>
         </p:txBody>
@@ -4740,8 +8522,10 @@
               </a:defRPr>
             </a:pPr>
             <a:r>
-              <a:t>Teaching point</a:t>
-            </a:r>
+              <a:rPr lang="en-US" dirty="0"/>
+              <a:t>Key takeaway</a:t>
+            </a:r>
+            <a:endParaRPr dirty="0"/>
           </a:p>
           <a:p>
             <a:pPr>
@@ -4755,6 +8539,7 @@
               </a:defRPr>
             </a:pPr>
             <a:r>
+              <a:rPr dirty="0"/>
               <a:t>This looks simple to us, but the model cannot process this raw English sentence directly. It first has to be converted into a numeric representation.</a:t>
             </a:r>
           </a:p>
@@ -4940,7 +8725,24 @@
               </a:defRPr>
             </a:pPr>
             <a:r>
-              <a:t>["sales", "are", "up", "in", "chicago"]</a:t>
+              <a:rPr dirty="0"/>
+              <a:t>[</a:t>
+            </a:r>
+            <a:r>
+              <a:rPr lang="en-US" dirty="0"/>
+              <a:t>"are", "MAG", </a:t>
+            </a:r>
+            <a:r>
+              <a:rPr dirty="0"/>
+              <a:t>"sales", "up", "in", "</a:t>
+            </a:r>
+            <a:r>
+              <a:rPr dirty="0" err="1"/>
+              <a:t>chicago</a:t>
+            </a:r>
+            <a:r>
+              <a:rPr dirty="0"/>
+              <a:t>", "?"]</a:t>
             </a:r>
           </a:p>
         </p:txBody>
@@ -5145,84 +8947,86 @@
       </p:grpSpPr>
       <p:sp>
         <p:nvSpPr>
-          <p:cNvPr id="2" name="TextBox 1"/>
-          <p:cNvSpPr txBox="1"/>
-          <p:nvPr/>
-        </p:nvSpPr>
-        <p:spPr>
-          <a:xfrm>
-            <a:off x="502920" y="320040"/>
-            <a:ext cx="11247120" cy="548640"/>
+          <p:cNvPr id="2" name="Title"/>
+          <p:cNvSpPr/>
+          <p:nvPr/>
+        </p:nvSpPr>
+        <p:spPr>
+          <a:xfrm>
+            <a:off x="640080" y="365760"/>
+            <a:ext cx="10911840" cy="548640"/>
           </a:xfrm>
           <a:prstGeom prst="rect">
             <a:avLst/>
           </a:prstGeom>
           <a:noFill/>
-        </p:spPr>
-        <p:txBody>
-          <a:bodyPr wrap="none">
-            <a:spAutoFit/>
-          </a:bodyPr>
-          <a:lstStyle/>
-          <a:p>
-            <a:pPr>
-              <a:defRPr sz="3000" b="1">
+          <a:ln/>
+        </p:spPr>
+        <p:txBody>
+          <a:bodyPr lIns="0" tIns="0" rIns="0" bIns="0" rtlCol="0" anchor="t"/>
+          <a:lstStyle/>
+          <a:p>
+            <a:pPr algn="l">
+              <a:defRPr sz="3000"/>
+            </a:pPr>
+            <a:r>
+              <a:rPr sz="3000" b="1" dirty="0">
                 <a:solidFill>
                   <a:srgbClr val="0B2F5B"/>
                 </a:solidFill>
-              </a:defRPr>
-            </a:pPr>
-            <a:r>
-              <a:t>Tokenizer Step 2 - Token IDs</a:t>
-            </a:r>
-          </a:p>
-        </p:txBody>
-      </p:sp>
-      <p:sp>
-        <p:nvSpPr>
-          <p:cNvPr id="3" name="TextBox 2"/>
-          <p:cNvSpPr txBox="1"/>
-          <p:nvPr/>
-        </p:nvSpPr>
-        <p:spPr>
-          <a:xfrm>
-            <a:off x="530352" y="868680"/>
-            <a:ext cx="10972800" cy="365760"/>
+                <a:latin typeface="Aptos"/>
+              </a:rPr>
+              <a:t>What Are Tokens and Tokenizers?</a:t>
+            </a:r>
+          </a:p>
+        </p:txBody>
+      </p:sp>
+      <p:sp>
+        <p:nvSpPr>
+          <p:cNvPr id="3" name="Subtitle"/>
+          <p:cNvSpPr/>
+          <p:nvPr/>
+        </p:nvSpPr>
+        <p:spPr>
+          <a:xfrm>
+            <a:off x="640080" y="868680"/>
+            <a:ext cx="10911840" cy="365760"/>
           </a:xfrm>
           <a:prstGeom prst="rect">
             <a:avLst/>
           </a:prstGeom>
           <a:noFill/>
-        </p:spPr>
-        <p:txBody>
-          <a:bodyPr wrap="none">
-            <a:spAutoFit/>
-          </a:bodyPr>
-          <a:lstStyle/>
-          <a:p>
-            <a:pPr>
-              <a:defRPr sz="1600">
-                <a:solidFill>
-                  <a:srgbClr val="52616B"/>
-                </a:solidFill>
-              </a:defRPr>
-            </a:pPr>
-            <a:r>
-              <a:t>Use the vocabulary lookup table</a:t>
-            </a:r>
-          </a:p>
-        </p:txBody>
-      </p:sp>
-      <p:sp>
-        <p:nvSpPr>
-          <p:cNvPr id="4" name="Rounded Rectangle 3"/>
+          <a:ln/>
+        </p:spPr>
+        <p:txBody>
+          <a:bodyPr lIns="0" tIns="0" rIns="0" bIns="0" rtlCol="0" anchor="t"/>
+          <a:lstStyle/>
+          <a:p>
+            <a:pPr algn="l">
+              <a:defRPr sz="1600"/>
+            </a:pPr>
+            <a:r>
+              <a:rPr sz="1600" dirty="0">
+                <a:solidFill>
+                  <a:srgbClr val="5E6C84"/>
+                </a:solidFill>
+                <a:latin typeface="Aptos"/>
+              </a:rPr>
+              <a:t>The tokenizer is the first translation step</a:t>
+            </a:r>
+          </a:p>
+        </p:txBody>
+      </p:sp>
+      <p:sp>
+        <p:nvSpPr>
+          <p:cNvPr id="4" name="Token Card"/>
           <p:cNvSpPr/>
           <p:nvPr/>
         </p:nvSpPr>
         <p:spPr>
           <a:xfrm>
-            <a:off x="822960" y="1234440"/>
-            <a:ext cx="5212080" cy="2468880"/>
+            <a:off x="822960" y="1371600"/>
+            <a:ext cx="3291840" cy="1828800"/>
           </a:xfrm>
           <a:prstGeom prst="roundRect">
             <a:avLst/>
@@ -5236,73 +9040,49 @@
             </a:solidFill>
           </a:ln>
         </p:spPr>
-        <p:style>
-          <a:lnRef idx="1">
-            <a:schemeClr val="accent1"/>
-          </a:lnRef>
-          <a:fillRef idx="3">
-            <a:schemeClr val="accent1"/>
-          </a:fillRef>
-          <a:effectRef idx="2">
-            <a:schemeClr val="accent1"/>
-          </a:effectRef>
-          <a:fontRef idx="minor">
-            <a:schemeClr val="lt1"/>
-          </a:fontRef>
-        </p:style>
-        <p:txBody>
-          <a:bodyPr lIns="182880" tIns="109728" rIns="182880" rtlCol="0" anchor="ctr"/>
-          <a:lstStyle/>
-          <a:p>
-            <a:pPr algn="ctr">
-              <a:defRPr sz="1800">
+        <p:txBody>
+          <a:bodyPr lIns="137160" tIns="137160" rIns="137160" bIns="137160" rtlCol="0" anchor="t"/>
+          <a:lstStyle/>
+          <a:p>
+            <a:pPr algn="l">
+              <a:defRPr sz="1750"/>
+            </a:pPr>
+            <a:r>
+              <a:rPr sz="1750" b="1" dirty="0">
+                <a:solidFill>
+                  <a:srgbClr val="0B2F5B"/>
+                </a:solidFill>
+                <a:latin typeface="Aptos"/>
+              </a:rPr>
+              <a:t>Token</a:t>
+            </a:r>
+          </a:p>
+          <a:p>
+            <a:pPr algn="l">
+              <a:defRPr sz="1550"/>
+            </a:pPr>
+            <a:r>
+              <a:rPr sz="1550" dirty="0">
                 <a:solidFill>
                   <a:srgbClr val="172B4D"/>
                 </a:solidFill>
-                <a:latin typeface="Consolas"/>
-              </a:defRPr>
-            </a:pPr>
-            <a:r>
-              <a:t>Vocabulary</a:t>
-            </a:r>
-            <a:br/>
-            <a:br/>
-            <a:r>
-              <a:t>"&lt;PAD&gt;"   → 0</a:t>
-            </a:r>
-            <a:br/>
-            <a:r>
-              <a:t>"sales"   → 1</a:t>
-            </a:r>
-            <a:br/>
-            <a:r>
-              <a:t>"are"     → 2</a:t>
-            </a:r>
-            <a:br/>
-            <a:r>
-              <a:t>"up"      → 3</a:t>
-            </a:r>
-            <a:br/>
-            <a:r>
-              <a:t>"in"      → 4</a:t>
-            </a:r>
-            <a:br/>
-            <a:r>
-              <a:t>"chicago" → 5</a:t>
-            </a:r>
-          </a:p>
-        </p:txBody>
-      </p:sp>
-      <p:sp>
-        <p:nvSpPr>
-          <p:cNvPr id="5" name="Rounded Rectangle 4"/>
+                <a:latin typeface="Aptos"/>
+              </a:rPr>
+              <a:t>A token is a known text piece the model can look up: a word, word piece, punctuation mark, or special marker.</a:t>
+            </a:r>
+          </a:p>
+        </p:txBody>
+      </p:sp>
+      <p:sp>
+        <p:nvSpPr>
+          <p:cNvPr id="5" name="Tokenizer Card"/>
           <p:cNvSpPr/>
           <p:nvPr/>
         </p:nvSpPr>
         <p:spPr>
           <a:xfrm>
-            <a:off x="6400800" y="1234440"/>
-            <a:ext cx="4937760" cy="2468880"/>
+            <a:off x="4389120" y="1371600"/>
+            <a:ext cx="3291840" cy="1828800"/>
           </a:xfrm>
           <a:prstGeom prst="roundRect">
             <a:avLst/>
@@ -5316,49 +9096,112 @@
             </a:solidFill>
           </a:ln>
         </p:spPr>
-        <p:style>
-          <a:lnRef idx="1">
-            <a:schemeClr val="accent1"/>
-          </a:lnRef>
-          <a:fillRef idx="3">
-            <a:schemeClr val="accent1"/>
-          </a:fillRef>
-          <a:effectRef idx="2">
-            <a:schemeClr val="accent1"/>
-          </a:effectRef>
-          <a:fontRef idx="minor">
-            <a:schemeClr val="lt1"/>
-          </a:fontRef>
-        </p:style>
-        <p:txBody>
-          <a:bodyPr lIns="182880" tIns="109728" rIns="182880" rtlCol="0" anchor="ctr"/>
-          <a:lstStyle/>
-          <a:p>
-            <a:pPr algn="ctr">
-              <a:defRPr sz="2200">
+        <p:txBody>
+          <a:bodyPr lIns="137160" tIns="137160" rIns="137160" bIns="137160" rtlCol="0" anchor="t"/>
+          <a:lstStyle/>
+          <a:p>
+            <a:pPr algn="l">
+              <a:defRPr sz="1750"/>
+            </a:pPr>
+            <a:r>
+              <a:rPr sz="1750" b="1" dirty="0">
+                <a:solidFill>
+                  <a:srgbClr val="0B2F5B"/>
+                </a:solidFill>
+                <a:latin typeface="Aptos"/>
+              </a:rPr>
+              <a:t>Tokenizer</a:t>
+            </a:r>
+          </a:p>
+          <a:p>
+            <a:pPr algn="l">
+              <a:defRPr sz="1550"/>
+            </a:pPr>
+            <a:r>
+              <a:rPr sz="1550" dirty="0">
                 <a:solidFill>
                   <a:srgbClr val="172B4D"/>
                 </a:solidFill>
+                <a:latin typeface="Aptos"/>
+              </a:rPr>
+              <a:t>A tokenizer is the rule or system that breaks raw text into tokens and prepares them for lookup.</a:t>
+            </a:r>
+          </a:p>
+        </p:txBody>
+      </p:sp>
+      <p:sp>
+        <p:nvSpPr>
+          <p:cNvPr id="6" name="Demo Rule Card"/>
+          <p:cNvSpPr/>
+          <p:nvPr/>
+        </p:nvSpPr>
+        <p:spPr>
+          <a:xfrm>
+            <a:off x="7955280" y="1371600"/>
+            <a:ext cx="3291840" cy="1828800"/>
+          </a:xfrm>
+          <a:prstGeom prst="roundRect">
+            <a:avLst/>
+          </a:prstGeom>
+          <a:solidFill>
+            <a:srgbClr val="F5F8FC"/>
+          </a:solidFill>
+          <a:ln>
+            <a:solidFill>
+              <a:srgbClr val="BED2E6"/>
+            </a:solidFill>
+          </a:ln>
+        </p:spPr>
+        <p:txBody>
+          <a:bodyPr lIns="137160" tIns="137160" rIns="137160" bIns="137160" rtlCol="0" anchor="t"/>
+          <a:lstStyle/>
+          <a:p>
+            <a:pPr algn="l">
+              <a:defRPr sz="1750"/>
+            </a:pPr>
+            <a:r>
+              <a:rPr sz="1750" b="1" dirty="0">
+                <a:solidFill>
+                  <a:srgbClr val="0B2F5B"/>
+                </a:solidFill>
+                <a:latin typeface="Aptos"/>
+              </a:rPr>
+              <a:t>Demo rule</a:t>
+            </a:r>
+          </a:p>
+          <a:p>
+            <a:pPr algn="l">
+              <a:defRPr sz="1500"/>
+            </a:pPr>
+            <a:r>
+              <a:rPr sz="1500" dirty="0">
+                <a:solidFill>
+                  <a:srgbClr val="172B4D"/>
+                </a:solidFill>
                 <a:latin typeface="Consolas"/>
-              </a:defRPr>
-            </a:pPr>
-            <a:r>
-              <a:t>["sales", "are", "up", "in", "chicago"]</a:t>
-            </a:r>
-            <a:br/>
-            <a:r>
-              <a:t>        ↓</a:t>
-            </a:r>
-            <a:br/>
-            <a:r>
-              <a:t>[1, 2, 3, 4, 5]</a:t>
-            </a:r>
-          </a:p>
-        </p:txBody>
-      </p:sp>
-      <p:sp>
-        <p:nvSpPr>
-          <p:cNvPr id="6" name="Rounded Rectangle 5"/>
+              </a:rPr>
+              <a:t>Input:  are MAG sales up in chicago?</a:t>
+            </a:r>
+          </a:p>
+          <a:p>
+            <a:pPr algn="l">
+              <a:defRPr sz="1500"/>
+            </a:pPr>
+            <a:r>
+              <a:rPr sz="1500" dirty="0">
+                <a:solidFill>
+                  <a:srgbClr val="172B4D"/>
+                </a:solidFill>
+                <a:latin typeface="Consolas"/>
+              </a:rPr>
+              <a:t>Tokens: ["are", "MAG", "sales", "up", "in", "chicago", "?"]</a:t>
+            </a:r>
+          </a:p>
+        </p:txBody>
+      </p:sp>
+      <p:sp>
+        <p:nvSpPr>
+          <p:cNvPr id="7" name="Key takeaway"/>
           <p:cNvSpPr/>
           <p:nvPr/>
         </p:nvSpPr>
@@ -5373,62 +9216,49 @@
           <a:solidFill>
             <a:srgbClr val="FFFFFF"/>
           </a:solidFill>
-          <a:ln w="19050">
+          <a:ln>
             <a:solidFill>
               <a:srgbClr val="0B5CAD"/>
             </a:solidFill>
           </a:ln>
         </p:spPr>
-        <p:style>
-          <a:lnRef idx="1">
-            <a:schemeClr val="accent1"/>
-          </a:lnRef>
-          <a:fillRef idx="3">
-            <a:schemeClr val="accent1"/>
-          </a:fillRef>
-          <a:effectRef idx="2">
-            <a:schemeClr val="accent1"/>
-          </a:effectRef>
-          <a:fontRef idx="minor">
-            <a:schemeClr val="lt1"/>
-          </a:fontRef>
-        </p:style>
-        <p:txBody>
-          <a:bodyPr lIns="137160" tIns="91440" rIns="137160" rtlCol="0" anchor="ctr"/>
+        <p:txBody>
+          <a:bodyPr lIns="91440" tIns="91440" rIns="91440" bIns="91440" rtlCol="0" anchor="ctr"/>
           <a:lstStyle/>
           <a:p>
             <a:pPr algn="ctr">
-              <a:defRPr sz="1900" b="1">
+              <a:defRPr sz="1850"/>
+            </a:pPr>
+            <a:r>
+              <a:rPr sz="1850" b="1" dirty="0">
                 <a:solidFill>
                   <a:srgbClr val="0B2F5B"/>
                 </a:solidFill>
-              </a:defRPr>
-            </a:pPr>
-            <a:r>
-              <a:t>Teaching point</a:t>
-            </a:r>
-          </a:p>
-          <a:p>
-            <a:pPr>
-              <a:spcAft>
-                <a:spcPts val="200"/>
-              </a:spcAft>
-              <a:defRPr sz="1800">
+                <a:latin typeface="Aptos"/>
+              </a:rPr>
+              <a:t>Key takeaway</a:t>
+            </a:r>
+          </a:p>
+          <a:p>
+            <a:pPr algn="ctr">
+              <a:defRPr sz="1700"/>
+            </a:pPr>
+            <a:r>
+              <a:rPr sz="1700" dirty="0">
                 <a:solidFill>
                   <a:srgbClr val="172B4D"/>
                 </a:solidFill>
-              </a:defRPr>
-            </a:pPr>
-            <a:r>
-              <a:t>The tokenizer does not define meaning. It maps known text pieces to integer IDs.</a:t>
-            </a:r>
-          </a:p>
-        </p:txBody>
-      </p:sp>
-      <p:sp>
-        <p:nvSpPr>
-          <p:cNvPr id="7" name="TextBox 6"/>
-          <p:cNvSpPr txBox="1"/>
+                <a:latin typeface="Aptos"/>
+              </a:rPr>
+              <a:t>Tokenization does not understand meaning yet. It creates stable pieces that can be mapped to IDs.</a:t>
+            </a:r>
+          </a:p>
+        </p:txBody>
+      </p:sp>
+      <p:sp>
+        <p:nvSpPr>
+          <p:cNvPr id="40" name="Footer"/>
+          <p:cNvSpPr/>
           <p:nvPr/>
         </p:nvSpPr>
         <p:spPr>
@@ -5440,21 +9270,22 @@
             <a:avLst/>
           </a:prstGeom>
           <a:noFill/>
-        </p:spPr>
-        <p:txBody>
-          <a:bodyPr wrap="none">
-            <a:spAutoFit/>
-          </a:bodyPr>
-          <a:lstStyle/>
-          <a:p>
-            <a:pPr>
-              <a:defRPr sz="900">
-                <a:solidFill>
-                  <a:srgbClr val="52616B"/>
-                </a:solidFill>
-              </a:defRPr>
-            </a:pPr>
-            <a:r>
+          <a:ln/>
+        </p:spPr>
+        <p:txBody>
+          <a:bodyPr lIns="0" tIns="0" rIns="0" bIns="0" rtlCol="0" anchor="t"/>
+          <a:lstStyle/>
+          <a:p>
+            <a:pPr algn="r">
+              <a:defRPr sz="850"/>
+            </a:pPr>
+            <a:r>
+              <a:rPr sz="850" dirty="0">
+                <a:solidFill>
+                  <a:srgbClr val="6B778C"/>
+                </a:solidFill>
+                <a:latin typeface="Aptos"/>
+              </a:rPr>
               <a:t>MAGPAI Session 1 - Tokens - v1.0 | javaboy-vk | 2026-05-22 | Slide 5</a:t>
             </a:r>
           </a:p>
@@ -5515,7 +9346,7 @@
               </a:defRPr>
             </a:pPr>
             <a:r>
-              <a:t>Embedding Lookup</a:t>
+              <a:t>Tokenizer Step 2 - Token IDs</a:t>
             </a:r>
           </a:p>
         </p:txBody>
@@ -5550,7 +9381,7 @@
               </a:defRPr>
             </a:pPr>
             <a:r>
-              <a:t>Token IDs become vectors</a:t>
+              <a:t>Use the vocabulary lookup table</a:t>
             </a:r>
           </a:p>
         </p:txBody>
@@ -5563,8 +9394,8 @@
         </p:nvSpPr>
         <p:spPr>
           <a:xfrm>
-            <a:off x="914400" y="1280160"/>
-            <a:ext cx="10424160" cy="1965960"/>
+            <a:off x="822960" y="1234440"/>
+            <a:ext cx="5212080" cy="2468880"/>
           </a:xfrm>
           <a:prstGeom prst="roundRect">
             <a:avLst/>
@@ -5597,7 +9428,7 @@
           <a:lstStyle/>
           <a:p>
             <a:pPr algn="ctr">
-              <a:defRPr sz="2200">
+              <a:defRPr sz="1600">
                 <a:solidFill>
                   <a:srgbClr val="172B4D"/>
                 </a:solidFill>
@@ -5605,15 +9436,67 @@
               </a:defRPr>
             </a:pPr>
             <a:r>
-              <a:t>1 → [ 0.21, -0.44,  0.78,  0.12]</a:t>
-            </a:r>
-            <a:br/>
-            <a:r>
-              <a:t>2 → [ 0.03,  0.91, -0.14,  0.36]</a:t>
-            </a:r>
-            <a:br/>
-            <a:r>
-              <a:t>3 → [-0.62,  0.18,  0.45, -0.09]</a:t>
+              <a:rPr dirty="0"/>
+              <a:t>Vocabulary</a:t>
+            </a:r>
+            <a:br>
+              <a:rPr dirty="0"/>
+            </a:br>
+            <a:br>
+              <a:rPr dirty="0"/>
+            </a:br>
+            <a:r>
+              <a:rPr dirty="0"/>
+              <a:t>"&lt;PAD&gt;"   -&gt; 0</a:t>
+            </a:r>
+            <a:br>
+              <a:rPr dirty="0"/>
+            </a:br>
+            <a:r>
+              <a:rPr dirty="0"/>
+              <a:t>"are"     -&gt; 1</a:t>
+            </a:r>
+            <a:br>
+              <a:rPr dirty="0"/>
+            </a:br>
+            <a:r>
+              <a:rPr dirty="0"/>
+              <a:t>"MAG"     -&gt; 2</a:t>
+            </a:r>
+            <a:br>
+              <a:rPr dirty="0"/>
+            </a:br>
+            <a:r>
+              <a:rPr dirty="0"/>
+              <a:t>"sales"   -&gt; 3</a:t>
+            </a:r>
+            <a:br>
+              <a:rPr dirty="0"/>
+            </a:br>
+            <a:r>
+              <a:rPr dirty="0"/>
+              <a:t>"up"      -&gt; 4</a:t>
+            </a:r>
+            <a:br>
+              <a:rPr dirty="0"/>
+            </a:br>
+            <a:r>
+              <a:rPr dirty="0"/>
+              <a:t>"in"      -&gt; 5</a:t>
+            </a:r>
+            <a:br>
+              <a:rPr dirty="0"/>
+            </a:br>
+            <a:r>
+              <a:rPr dirty="0"/>
+              <a:t>"chicago" -&gt; 6</a:t>
+            </a:r>
+            <a:br>
+              <a:rPr dirty="0"/>
+            </a:br>
+            <a:r>
+              <a:rPr dirty="0"/>
+              <a:t>"?"       -&gt; 7</a:t>
             </a:r>
           </a:p>
         </p:txBody>
@@ -5626,18 +9509,18 @@
         </p:nvSpPr>
         <p:spPr>
           <a:xfrm>
-            <a:off x="914400" y="3749039"/>
-            <a:ext cx="10424160" cy="1097280"/>
+            <a:off x="6400800" y="1234440"/>
+            <a:ext cx="4937760" cy="2468880"/>
           </a:xfrm>
           <a:prstGeom prst="roundRect">
             <a:avLst/>
           </a:prstGeom>
           <a:solidFill>
-            <a:srgbClr val="EAF3FF"/>
-          </a:solidFill>
-          <a:ln w="19050">
+            <a:srgbClr val="F5F8FC"/>
+          </a:solidFill>
+          <a:ln>
             <a:solidFill>
-              <a:srgbClr val="0B5CAD"/>
+              <a:srgbClr val="BED2E6"/>
             </a:solidFill>
           </a:ln>
         </p:spPr>
@@ -5656,6 +9539,92 @@
           </a:fontRef>
         </p:style>
         <p:txBody>
+          <a:bodyPr lIns="182880" tIns="109728" rIns="182880" rtlCol="0" anchor="ctr"/>
+          <a:lstStyle/>
+          <a:p>
+            <a:pPr algn="ctr">
+              <a:defRPr sz="2200">
+                <a:solidFill>
+                  <a:srgbClr val="172B4D"/>
+                </a:solidFill>
+                <a:latin typeface="Consolas"/>
+              </a:defRPr>
+            </a:pPr>
+            <a:r>
+              <a:rPr dirty="0"/>
+              <a:t>[</a:t>
+            </a:r>
+            <a:r>
+              <a:rPr lang="en-US" dirty="0"/>
+              <a:t>"are", "MAG", </a:t>
+            </a:r>
+            <a:r>
+              <a:rPr dirty="0"/>
+              <a:t>"sales", "up", "in", "</a:t>
+            </a:r>
+            <a:r>
+              <a:rPr dirty="0" err="1"/>
+              <a:t>chicago</a:t>
+            </a:r>
+            <a:r>
+              <a:rPr dirty="0"/>
+              <a:t>", "?"]</a:t>
+            </a:r>
+            <a:br>
+              <a:rPr dirty="0"/>
+            </a:br>
+            <a:r>
+              <a:rPr dirty="0"/>
+              <a:t>        ↓</a:t>
+            </a:r>
+            <a:br>
+              <a:rPr dirty="0"/>
+            </a:br>
+            <a:r>
+              <a:rPr dirty="0"/>
+              <a:t>[1, 2, 3, 4, 5, 6, 7]</a:t>
+            </a:r>
+          </a:p>
+        </p:txBody>
+      </p:sp>
+      <p:sp>
+        <p:nvSpPr>
+          <p:cNvPr id="6" name="Rounded Rectangle 5"/>
+          <p:cNvSpPr/>
+          <p:nvPr/>
+        </p:nvSpPr>
+        <p:spPr>
+          <a:xfrm>
+            <a:off x="1097280" y="4206240"/>
+            <a:ext cx="9966960" cy="914400"/>
+          </a:xfrm>
+          <a:prstGeom prst="roundRect">
+            <a:avLst/>
+          </a:prstGeom>
+          <a:solidFill>
+            <a:srgbClr val="FFFFFF"/>
+          </a:solidFill>
+          <a:ln w="19050">
+            <a:solidFill>
+              <a:srgbClr val="0B5CAD"/>
+            </a:solidFill>
+          </a:ln>
+        </p:spPr>
+        <p:style>
+          <a:lnRef idx="1">
+            <a:schemeClr val="accent1"/>
+          </a:lnRef>
+          <a:fillRef idx="3">
+            <a:schemeClr val="accent1"/>
+          </a:fillRef>
+          <a:effectRef idx="2">
+            <a:schemeClr val="accent1"/>
+          </a:effectRef>
+          <a:fontRef idx="minor">
+            <a:schemeClr val="lt1"/>
+          </a:fontRef>
+        </p:style>
+        <p:txBody>
           <a:bodyPr lIns="137160" tIns="91440" rIns="137160" rtlCol="0" anchor="ctr"/>
           <a:lstStyle/>
           <a:p>
@@ -5667,7 +9636,8 @@
               </a:defRPr>
             </a:pPr>
             <a:r>
-              <a:t>Teaching point</a:t>
+              <a:rPr lang="en-US" dirty="0"/>
+              <a:t>Key takeaway</a:t>
             </a:r>
           </a:p>
           <a:p>
@@ -5682,14 +9652,15 @@
               </a:defRPr>
             </a:pPr>
             <a:r>
-              <a:t>The token ID is an index. It selects a row from the embedding matrix. The selected row is the token vector.</a:t>
-            </a:r>
-          </a:p>
-        </p:txBody>
-      </p:sp>
-      <p:sp>
-        <p:nvSpPr>
-          <p:cNvPr id="6" name="TextBox 5"/>
+              <a:rPr dirty="0"/>
+              <a:t>The tokenizer does not define meaning. It maps known text pieces to integer IDs.</a:t>
+            </a:r>
+          </a:p>
+        </p:txBody>
+      </p:sp>
+      <p:sp>
+        <p:nvSpPr>
+          <p:cNvPr id="7" name="TextBox 6"/>
           <p:cNvSpPr txBox="1"/>
           <p:nvPr/>
         </p:nvSpPr>
@@ -5749,84 +9720,86 @@
       </p:grpSpPr>
       <p:sp>
         <p:nvSpPr>
-          <p:cNvPr id="2" name="TextBox 1"/>
-          <p:cNvSpPr txBox="1"/>
-          <p:nvPr/>
-        </p:nvSpPr>
-        <p:spPr>
-          <a:xfrm>
-            <a:off x="502920" y="320040"/>
-            <a:ext cx="11247120" cy="548640"/>
+          <p:cNvPr id="2" name="Title"/>
+          <p:cNvSpPr/>
+          <p:nvPr/>
+        </p:nvSpPr>
+        <p:spPr>
+          <a:xfrm>
+            <a:off x="640080" y="365760"/>
+            <a:ext cx="10911840" cy="548640"/>
           </a:xfrm>
           <a:prstGeom prst="rect">
             <a:avLst/>
           </a:prstGeom>
           <a:noFill/>
-        </p:spPr>
-        <p:txBody>
-          <a:bodyPr wrap="none">
-            <a:spAutoFit/>
-          </a:bodyPr>
-          <a:lstStyle/>
-          <a:p>
-            <a:pPr>
-              <a:defRPr sz="3000" b="1">
+          <a:ln/>
+        </p:spPr>
+        <p:txBody>
+          <a:bodyPr lIns="0" tIns="0" rIns="0" bIns="0" rtlCol="0" anchor="t"/>
+          <a:lstStyle/>
+          <a:p>
+            <a:pPr algn="l">
+              <a:defRPr sz="3000"/>
+            </a:pPr>
+            <a:r>
+              <a:rPr sz="3000" b="1" dirty="0">
                 <a:solidFill>
                   <a:srgbClr val="0B2F5B"/>
                 </a:solidFill>
-              </a:defRPr>
-            </a:pPr>
-            <a:r>
-              <a:t>How Token ID 1 Becomes a Vector</a:t>
-            </a:r>
-          </a:p>
-        </p:txBody>
-      </p:sp>
-      <p:sp>
-        <p:nvSpPr>
-          <p:cNvPr id="3" name="TextBox 2"/>
-          <p:cNvSpPr txBox="1"/>
-          <p:nvPr/>
-        </p:nvSpPr>
-        <p:spPr>
-          <a:xfrm>
-            <a:off x="530352" y="868680"/>
-            <a:ext cx="10972800" cy="365760"/>
+                <a:latin typeface="Aptos"/>
+              </a:rPr>
+              <a:t>What Is an Embedding?</a:t>
+            </a:r>
+          </a:p>
+        </p:txBody>
+      </p:sp>
+      <p:sp>
+        <p:nvSpPr>
+          <p:cNvPr id="3" name="Subtitle"/>
+          <p:cNvSpPr/>
+          <p:nvPr/>
+        </p:nvSpPr>
+        <p:spPr>
+          <a:xfrm>
+            <a:off x="640080" y="868680"/>
+            <a:ext cx="10911840" cy="365760"/>
           </a:xfrm>
           <a:prstGeom prst="rect">
             <a:avLst/>
           </a:prstGeom>
           <a:noFill/>
-        </p:spPr>
-        <p:txBody>
-          <a:bodyPr wrap="none">
-            <a:spAutoFit/>
-          </a:bodyPr>
-          <a:lstStyle/>
-          <a:p>
-            <a:pPr>
-              <a:defRPr sz="1600">
-                <a:solidFill>
-                  <a:srgbClr val="52616B"/>
-                </a:solidFill>
-              </a:defRPr>
-            </a:pPr>
-            <a:r>
-              <a:t>The algorithm is a row lookup</a:t>
-            </a:r>
-          </a:p>
-        </p:txBody>
-      </p:sp>
-      <p:sp>
-        <p:nvSpPr>
-          <p:cNvPr id="4" name="Rounded Rectangle 3"/>
+          <a:ln/>
+        </p:spPr>
+        <p:txBody>
+          <a:bodyPr lIns="0" tIns="0" rIns="0" bIns="0" rtlCol="0" anchor="t"/>
+          <a:lstStyle/>
+          <a:p>
+            <a:pPr algn="l">
+              <a:defRPr sz="1600"/>
+            </a:pPr>
+            <a:r>
+              <a:rPr sz="1600" dirty="0">
+                <a:solidFill>
+                  <a:srgbClr val="5E6C84"/>
+                </a:solidFill>
+                <a:latin typeface="Aptos"/>
+              </a:rPr>
+              <a:t>A learned table that turns token IDs into numeric rows</a:t>
+            </a:r>
+          </a:p>
+        </p:txBody>
+      </p:sp>
+      <p:sp>
+        <p:nvSpPr>
+          <p:cNvPr id="4" name="Definition"/>
           <p:cNvSpPr/>
           <p:nvPr/>
         </p:nvSpPr>
         <p:spPr>
           <a:xfrm>
-            <a:off x="885190" y="1234440"/>
-            <a:ext cx="3657600" cy="914400"/>
+            <a:off x="822960" y="1371600"/>
+            <a:ext cx="3474720" cy="2194560"/>
           </a:xfrm>
           <a:prstGeom prst="roundRect">
             <a:avLst/>
@@ -5840,85 +9813,49 @@
             </a:solidFill>
           </a:ln>
         </p:spPr>
-        <p:style>
-          <a:lnRef idx="1">
-            <a:schemeClr val="accent1"/>
-          </a:lnRef>
-          <a:fillRef idx="3">
-            <a:schemeClr val="accent1"/>
-          </a:fillRef>
-          <a:effectRef idx="2">
-            <a:schemeClr val="accent1"/>
-          </a:effectRef>
-          <a:fontRef idx="minor">
-            <a:schemeClr val="lt1"/>
-          </a:fontRef>
-        </p:style>
-        <p:txBody>
-          <a:bodyPr lIns="182880" tIns="109728" rIns="182880" rtlCol="0" anchor="ctr"/>
-          <a:lstStyle/>
-          <a:p>
-            <a:pPr algn="ctr">
-              <a:defRPr sz="2500">
+        <p:txBody>
+          <a:bodyPr lIns="137160" tIns="137160" rIns="137160" bIns="137160" rtlCol="0" anchor="t"/>
+          <a:lstStyle/>
+          <a:p>
+            <a:pPr algn="l">
+              <a:defRPr sz="1750"/>
+            </a:pPr>
+            <a:r>
+              <a:rPr sz="1750" b="1" dirty="0">
+                <a:solidFill>
+                  <a:srgbClr val="0B2F5B"/>
+                </a:solidFill>
+                <a:latin typeface="Aptos"/>
+              </a:rPr>
+              <a:t>Embedding table</a:t>
+            </a:r>
+          </a:p>
+          <a:p>
+            <a:pPr algn="l">
+              <a:defRPr sz="1550"/>
+            </a:pPr>
+            <a:r>
+              <a:rPr sz="1550" dirty="0">
                 <a:solidFill>
                   <a:srgbClr val="172B4D"/>
                 </a:solidFill>
-                <a:latin typeface="Consolas"/>
-              </a:defRPr>
-            </a:pPr>
-            <a:r>
-              <a:t>Token ID 1</a:t>
-            </a:r>
-          </a:p>
-        </p:txBody>
-      </p:sp>
-      <p:cxnSp>
-        <p:nvCxnSpPr>
-          <p:cNvPr id="5" name="Connector 4"/>
-          <p:cNvCxnSpPr>
-            <a:cxnSpLocks/>
-          </p:cNvCxnSpPr>
-          <p:nvPr/>
-        </p:nvCxnSpPr>
-        <p:spPr>
-          <a:xfrm>
-            <a:off x="4588510" y="1691640"/>
-            <a:ext cx="675640" cy="0"/>
-          </a:xfrm>
-          <a:prstGeom prst="line">
-            <a:avLst/>
-          </a:prstGeom>
-          <a:ln w="38100">
-            <a:solidFill>
-              <a:srgbClr val="0B5CAD"/>
-            </a:solidFill>
-          </a:ln>
-        </p:spPr>
-        <p:style>
-          <a:lnRef idx="2">
-            <a:schemeClr val="accent1"/>
-          </a:lnRef>
-          <a:fillRef idx="0">
-            <a:schemeClr val="accent1"/>
-          </a:fillRef>
-          <a:effectRef idx="1">
-            <a:schemeClr val="accent1"/>
-          </a:effectRef>
-          <a:fontRef idx="minor">
-            <a:schemeClr val="tx1"/>
-          </a:fontRef>
-        </p:style>
-      </p:cxnSp>
-      <p:sp>
-        <p:nvSpPr>
-          <p:cNvPr id="6" name="Rounded Rectangle 5"/>
+                <a:latin typeface="Aptos"/>
+              </a:rPr>
+              <a:t>An embedding table is a matrix learned during training. Each token ID selects one row from that matrix.</a:t>
+            </a:r>
+          </a:p>
+        </p:txBody>
+      </p:sp>
+      <p:sp>
+        <p:nvSpPr>
+          <p:cNvPr id="5" name="Example Table"/>
           <p:cNvSpPr/>
           <p:nvPr/>
         </p:nvSpPr>
         <p:spPr>
           <a:xfrm>
-            <a:off x="5309870" y="1234440"/>
-            <a:ext cx="2743200" cy="914400"/>
+            <a:off x="4846320" y="1188720"/>
+            <a:ext cx="5760720" cy="2560320"/>
           </a:xfrm>
           <a:prstGeom prst="roundRect">
             <a:avLst/>
@@ -5932,202 +9869,141 @@
             </a:solidFill>
           </a:ln>
         </p:spPr>
-        <p:style>
-          <a:lnRef idx="1">
-            <a:schemeClr val="accent1"/>
-          </a:lnRef>
-          <a:fillRef idx="3">
-            <a:schemeClr val="accent1"/>
-          </a:fillRef>
-          <a:effectRef idx="2">
-            <a:schemeClr val="accent1"/>
-          </a:effectRef>
-          <a:fontRef idx="minor">
-            <a:schemeClr val="lt1"/>
-          </a:fontRef>
-        </p:style>
-        <p:txBody>
-          <a:bodyPr lIns="182880" tIns="109728" rIns="182880" rtlCol="0" anchor="ctr"/>
-          <a:lstStyle/>
-          <a:p>
-            <a:pPr algn="ctr">
-              <a:defRPr sz="2500">
+        <p:txBody>
+          <a:bodyPr lIns="137160" tIns="137160" rIns="137160" bIns="137160" rtlCol="0" anchor="t"/>
+          <a:lstStyle/>
+          <a:p>
+            <a:pPr algn="l">
+              <a:defRPr sz="1750"/>
+            </a:pPr>
+            <a:r>
+              <a:rPr sz="1750" b="1" dirty="0">
+                <a:solidFill>
+                  <a:srgbClr val="0B2F5B"/>
+                </a:solidFill>
+                <a:latin typeface="Aptos"/>
+              </a:rPr>
+              <a:t>Tiny example</a:t>
+            </a:r>
+          </a:p>
+          <a:p>
+            <a:pPr algn="l">
+              <a:defRPr sz="1500"/>
+            </a:pPr>
+            <a:r>
+              <a:rPr sz="1500" dirty="0">
                 <a:solidFill>
                   <a:srgbClr val="172B4D"/>
                 </a:solidFill>
                 <a:latin typeface="Consolas"/>
-              </a:defRPr>
-            </a:pPr>
-            <a:r>
-              <a:t>E[1]</a:t>
-            </a:r>
-          </a:p>
-        </p:txBody>
-      </p:sp>
-      <p:cxnSp>
-        <p:nvCxnSpPr>
-          <p:cNvPr id="7" name="Connector 6"/>
-          <p:cNvCxnSpPr/>
-          <p:nvPr/>
-        </p:nvCxnSpPr>
-        <p:spPr>
-          <a:xfrm>
-            <a:off x="8053070" y="1691640"/>
-            <a:ext cx="685800" cy="0"/>
-          </a:xfrm>
-          <a:prstGeom prst="line">
-            <a:avLst/>
-          </a:prstGeom>
-          <a:ln w="38100">
+              </a:rPr>
+              <a:t>ID   token      vector row</a:t>
+            </a:r>
+          </a:p>
+          <a:p>
+            <a:pPr algn="l">
+              <a:defRPr sz="1500"/>
+            </a:pPr>
+            <a:r>
+              <a:rPr sz="1500" dirty="0">
+                <a:solidFill>
+                  <a:srgbClr val="172B4D"/>
+                </a:solidFill>
+                <a:latin typeface="Consolas"/>
+              </a:rPr>
+              <a:t>1    are        [ 0.21, -0.44,  0.78,  0.12]</a:t>
+            </a:r>
+          </a:p>
+          <a:p>
+            <a:pPr algn="l">
+              <a:defRPr sz="1500"/>
+            </a:pPr>
+            <a:r>
+              <a:rPr sz="1500" dirty="0">
+                <a:solidFill>
+                  <a:srgbClr val="172B4D"/>
+                </a:solidFill>
+                <a:latin typeface="Consolas"/>
+              </a:rPr>
+              <a:t>2    MAG        [ 0.03,  0.91, -0.14,  0.36]</a:t>
+            </a:r>
+          </a:p>
+          <a:p>
+            <a:pPr algn="l">
+              <a:defRPr sz="1500"/>
+            </a:pPr>
+            <a:r>
+              <a:rPr sz="1500" dirty="0">
+                <a:solidFill>
+                  <a:srgbClr val="172B4D"/>
+                </a:solidFill>
+                <a:latin typeface="Consolas"/>
+              </a:rPr>
+              <a:t>3    sales      [-0.62,  0.18,  0.45, -0.09]</a:t>
+            </a:r>
+          </a:p>
+        </p:txBody>
+      </p:sp>
+      <p:sp>
+        <p:nvSpPr>
+          <p:cNvPr id="6" name="Key takeaway"/>
+          <p:cNvSpPr/>
+          <p:nvPr/>
+        </p:nvSpPr>
+        <p:spPr>
+          <a:xfrm>
+            <a:off x="1097280" y="4206240"/>
+            <a:ext cx="9966960" cy="914400"/>
+          </a:xfrm>
+          <a:prstGeom prst="roundRect">
+            <a:avLst/>
+          </a:prstGeom>
+          <a:solidFill>
+            <a:srgbClr val="FFFFFF"/>
+          </a:solidFill>
+          <a:ln>
             <a:solidFill>
               <a:srgbClr val="0B5CAD"/>
             </a:solidFill>
           </a:ln>
         </p:spPr>
-        <p:style>
-          <a:lnRef idx="2">
-            <a:schemeClr val="accent1"/>
-          </a:lnRef>
-          <a:fillRef idx="0">
-            <a:schemeClr val="accent1"/>
-          </a:fillRef>
-          <a:effectRef idx="1">
-            <a:schemeClr val="accent1"/>
-          </a:effectRef>
-          <a:fontRef idx="minor">
-            <a:schemeClr val="tx1"/>
-          </a:fontRef>
-        </p:style>
-      </p:cxnSp>
-      <p:sp>
-        <p:nvSpPr>
-          <p:cNvPr id="8" name="Rounded Rectangle 7"/>
+        <p:txBody>
+          <a:bodyPr lIns="91440" tIns="91440" rIns="91440" bIns="91440" rtlCol="0" anchor="ctr"/>
+          <a:lstStyle/>
+          <a:p>
+            <a:pPr algn="ctr">
+              <a:defRPr sz="1850"/>
+            </a:pPr>
+            <a:r>
+              <a:rPr sz="1850" b="1" dirty="0">
+                <a:solidFill>
+                  <a:srgbClr val="0B2F5B"/>
+                </a:solidFill>
+                <a:latin typeface="Aptos"/>
+              </a:rPr>
+              <a:t>Key takeaway</a:t>
+            </a:r>
+          </a:p>
+          <a:p>
+            <a:pPr algn="ctr">
+              <a:defRPr sz="1700"/>
+            </a:pPr>
+            <a:r>
+              <a:rPr sz="1700" dirty="0">
+                <a:solidFill>
+                  <a:srgbClr val="172B4D"/>
+                </a:solidFill>
+                <a:latin typeface="Aptos"/>
+              </a:rPr>
+              <a:t>During inference, we do not calculate these numbers from spelling. We look up the learned row.</a:t>
+            </a:r>
+          </a:p>
+        </p:txBody>
+      </p:sp>
+      <p:sp>
+        <p:nvSpPr>
+          <p:cNvPr id="40" name="Footer"/>
           <p:cNvSpPr/>
-          <p:nvPr/>
-        </p:nvSpPr>
-        <p:spPr>
-          <a:xfrm>
-            <a:off x="8745982" y="1234440"/>
-            <a:ext cx="2802890" cy="914400"/>
-          </a:xfrm>
-          <a:prstGeom prst="roundRect">
-            <a:avLst/>
-          </a:prstGeom>
-          <a:solidFill>
-            <a:srgbClr val="F5F8FC"/>
-          </a:solidFill>
-          <a:ln>
-            <a:solidFill>
-              <a:srgbClr val="BED2E6"/>
-            </a:solidFill>
-          </a:ln>
-        </p:spPr>
-        <p:style>
-          <a:lnRef idx="1">
-            <a:schemeClr val="accent1"/>
-          </a:lnRef>
-          <a:fillRef idx="3">
-            <a:schemeClr val="accent1"/>
-          </a:fillRef>
-          <a:effectRef idx="2">
-            <a:schemeClr val="accent1"/>
-          </a:effectRef>
-          <a:fontRef idx="minor">
-            <a:schemeClr val="lt1"/>
-          </a:fontRef>
-        </p:style>
-        <p:txBody>
-          <a:bodyPr lIns="182880" tIns="109728" rIns="182880" rtlCol="0" anchor="ctr"/>
-          <a:lstStyle/>
-          <a:p>
-            <a:pPr>
-              <a:defRPr sz="1600">
-                <a:solidFill>
-                  <a:srgbClr val="172B4D"/>
-                </a:solidFill>
-                <a:latin typeface="Consolas"/>
-              </a:defRPr>
-            </a:pPr>
-            <a:r>
-              <a:rPr dirty="0"/>
-              <a:t>[0.21,0.44,0.78,0.12]</a:t>
-            </a:r>
-          </a:p>
-        </p:txBody>
-      </p:sp>
-      <p:sp>
-        <p:nvSpPr>
-          <p:cNvPr id="9" name="Rounded Rectangle 8"/>
-          <p:cNvSpPr/>
-          <p:nvPr/>
-        </p:nvSpPr>
-        <p:spPr>
-          <a:xfrm>
-            <a:off x="914400" y="3200400"/>
-            <a:ext cx="10424160" cy="1325880"/>
-          </a:xfrm>
-          <a:prstGeom prst="roundRect">
-            <a:avLst/>
-          </a:prstGeom>
-          <a:solidFill>
-            <a:srgbClr val="FFFFFF"/>
-          </a:solidFill>
-          <a:ln w="19050">
-            <a:solidFill>
-              <a:srgbClr val="0B5CAD"/>
-            </a:solidFill>
-          </a:ln>
-        </p:spPr>
-        <p:style>
-          <a:lnRef idx="1">
-            <a:schemeClr val="accent1"/>
-          </a:lnRef>
-          <a:fillRef idx="3">
-            <a:schemeClr val="accent1"/>
-          </a:fillRef>
-          <a:effectRef idx="2">
-            <a:schemeClr val="accent1"/>
-          </a:effectRef>
-          <a:fontRef idx="minor">
-            <a:schemeClr val="lt1"/>
-          </a:fontRef>
-        </p:style>
-        <p:txBody>
-          <a:bodyPr lIns="137160" tIns="91440" rIns="137160" rtlCol="0" anchor="ctr"/>
-          <a:lstStyle/>
-          <a:p>
-            <a:pPr algn="ctr">
-              <a:defRPr sz="1900" b="1">
-                <a:solidFill>
-                  <a:srgbClr val="0B2F5B"/>
-                </a:solidFill>
-              </a:defRPr>
-            </a:pPr>
-            <a:r>
-              <a:t>Important distinction</a:t>
-            </a:r>
-          </a:p>
-          <a:p>
-            <a:pPr>
-              <a:spcAft>
-                <a:spcPts val="200"/>
-              </a:spcAft>
-              <a:defRPr sz="1800">
-                <a:solidFill>
-                  <a:srgbClr val="172B4D"/>
-                </a:solidFill>
-              </a:defRPr>
-            </a:pPr>
-            <a:r>
-              <a:t>The integer 1 does not contain the meaning of “sales.” It points to a learned row in the embedding matrix.</a:t>
-            </a:r>
-          </a:p>
-        </p:txBody>
-      </p:sp>
-      <p:sp>
-        <p:nvSpPr>
-          <p:cNvPr id="10" name="TextBox 9"/>
-          <p:cNvSpPr txBox="1"/>
           <p:nvPr/>
         </p:nvSpPr>
         <p:spPr>
@@ -6139,21 +10015,22 @@
             <a:avLst/>
           </a:prstGeom>
           <a:noFill/>
-        </p:spPr>
-        <p:txBody>
-          <a:bodyPr wrap="none">
-            <a:spAutoFit/>
-          </a:bodyPr>
-          <a:lstStyle/>
-          <a:p>
-            <a:pPr>
-              <a:defRPr sz="900">
-                <a:solidFill>
-                  <a:srgbClr val="52616B"/>
-                </a:solidFill>
-              </a:defRPr>
-            </a:pPr>
-            <a:r>
+          <a:ln/>
+        </p:spPr>
+        <p:txBody>
+          <a:bodyPr lIns="0" tIns="0" rIns="0" bIns="0" rtlCol="0" anchor="t"/>
+          <a:lstStyle/>
+          <a:p>
+            <a:pPr algn="r">
+              <a:defRPr sz="850"/>
+            </a:pPr>
+            <a:r>
+              <a:rPr sz="850" dirty="0">
+                <a:solidFill>
+                  <a:srgbClr val="6B778C"/>
+                </a:solidFill>
+                <a:latin typeface="Aptos"/>
+              </a:rPr>
               <a:t>MAGPAI Session 1 - Tokens - v1.0 | javaboy-vk | 2026-05-22 | Slide 7</a:t>
             </a:r>
           </a:p>
@@ -6214,7 +10091,7 @@
               </a:defRPr>
             </a:pPr>
             <a:r>
-              <a:t>Linear Algebra View</a:t>
+              <a:t>Embedding Lookup</a:t>
             </a:r>
           </a:p>
         </p:txBody>
@@ -6249,7 +10126,7 @@
               </a:defRPr>
             </a:pPr>
             <a:r>
-              <a:t>Embedding lookup is equivalent to one-hot matrix multiplication</a:t>
+              <a:t>Token IDs become vectors</a:t>
             </a:r>
           </a:p>
         </p:txBody>
@@ -6262,8 +10139,8 @@
         </p:nvSpPr>
         <p:spPr>
           <a:xfrm>
-            <a:off x="822960" y="1234440"/>
-            <a:ext cx="10607040" cy="1920240"/>
+            <a:off x="914400" y="1280160"/>
+            <a:ext cx="10424160" cy="1965960"/>
           </a:xfrm>
           <a:prstGeom prst="roundRect">
             <a:avLst/>
@@ -6296,7 +10173,7 @@
           <a:lstStyle/>
           <a:p>
             <a:pPr algn="ctr">
-              <a:defRPr sz="2600">
+              <a:defRPr sz="2200">
                 <a:solidFill>
                   <a:srgbClr val="172B4D"/>
                 </a:solidFill>
@@ -6304,15 +10181,22 @@
               </a:defRPr>
             </a:pPr>
             <a:r>
-              <a:t>[0, 1, 0, 0, 0, 0] × E</a:t>
-            </a:r>
-            <a:br/>
-            <a:r>
-              <a:t>=</a:t>
-            </a:r>
-            <a:br/>
-            <a:r>
-              <a:t>[0.21, -0.44, 0.78, 0.12]</a:t>
+              <a:rPr dirty="0"/>
+              <a:t>1 -&gt; [ 0.21, -0.44,  0.78,  0.12]</a:t>
+            </a:r>
+            <a:br>
+              <a:rPr dirty="0"/>
+            </a:br>
+            <a:r>
+              <a:rPr dirty="0"/>
+              <a:t>2 -&gt; [ 0.03,  0.91, -0.14,  0.36]</a:t>
+            </a:r>
+            <a:br>
+              <a:rPr dirty="0"/>
+            </a:br>
+            <a:r>
+              <a:rPr dirty="0"/>
+              <a:t>3 -&gt; [-0.62,  0.18,  0.45, -0.09]</a:t>
             </a:r>
           </a:p>
         </p:txBody>
@@ -6326,7 +10210,7 @@
         <p:spPr>
           <a:xfrm>
             <a:off x="914400" y="3749039"/>
-            <a:ext cx="10424160" cy="1188720"/>
+            <a:ext cx="10424160" cy="1097280"/>
           </a:xfrm>
           <a:prstGeom prst="roundRect">
             <a:avLst/>
@@ -6366,7 +10250,8 @@
               </a:defRPr>
             </a:pPr>
             <a:r>
-              <a:t>Runtime optimization</a:t>
+              <a:rPr lang="en-US" dirty="0"/>
+              <a:t>Key takeaway</a:t>
             </a:r>
           </a:p>
           <a:p>
@@ -6381,7 +10266,8 @@
               </a:defRPr>
             </a:pPr>
             <a:r>
-              <a:t>In real code, the framework usually skips the one-hot vector and directly retrieves the row. It is faster and memory-efficient.</a:t>
+              <a:rPr dirty="0"/>
+              <a:t>The token ID is an index. It selects a row from the embedding matrix. The selected row is the token vector.</a:t>
             </a:r>
           </a:p>
         </p:txBody>

--- a/pptx/Session_01_Tokens_v1.0.pptx
+++ b/pptx/Session_01_Tokens_v1.0.pptx
@@ -8275,14 +8275,6 @@
               <a:rPr dirty="0"/>
               <a:t>AI Under the hood | Slide 2</a:t>
             </a:r>
-            <a:r>
-              <a:rPr dirty="0" err="1"/>
-              <a:t/>
-            </a:r>
-            <a:r>
-              <a:rPr dirty="0"/>
-              <a:t/>
-            </a:r>
           </a:p>
         </p:txBody>
       </p:sp>
@@ -9665,7 +9657,7 @@
         </p:nvSpPr>
         <p:spPr>
           <a:xfrm>
-            <a:off x="1097280" y="4206240"/>
+            <a:off x="822960" y="5788152"/>
             <a:ext cx="9966960" cy="914400"/>
           </a:xfrm>
           <a:prstGeom prst="roundRect">
@@ -9745,6 +9737,762 @@
                 <a:latin typeface="Aptos"/>
               </a:rPr>
               <a:t>AI Under the hood | Slide 7</a:t>
+            </a:r>
+          </a:p>
+        </p:txBody>
+      </p:sp>
+      <p:sp>
+        <p:nvSpPr>
+          <p:cNvPr id="8" name="Token Card">
+            <a:extLst>
+              <a:ext uri="{FF2B5EF4-FFF2-40B4-BE49-F238E27FC236}">
+                <a16:creationId xmlns:a16="http://schemas.microsoft.com/office/drawing/2014/main" id="{C1C42F9A-1A19-5862-1361-FF3109AFEA5F}"/>
+              </a:ext>
+            </a:extLst>
+          </p:cNvPr>
+          <p:cNvSpPr/>
+          <p:nvPr/>
+        </p:nvSpPr>
+        <p:spPr>
+          <a:xfrm>
+            <a:off x="1645920" y="7237477"/>
+            <a:ext cx="10424160" cy="1828800"/>
+          </a:xfrm>
+          <a:prstGeom prst="roundRect">
+            <a:avLst/>
+          </a:prstGeom>
+          <a:solidFill>
+            <a:srgbClr val="F5F8FC"/>
+          </a:solidFill>
+          <a:ln>
+            <a:solidFill>
+              <a:srgbClr val="BED2E6"/>
+            </a:solidFill>
+          </a:ln>
+        </p:spPr>
+        <p:txBody>
+          <a:bodyPr lIns="137160" tIns="137160" rIns="137160" bIns="137160" rtlCol="0" anchor="t"/>
+          <a:lstStyle/>
+          <a:p>
+            <a:pPr algn="l">
+              <a:defRPr sz="1750"/>
+            </a:pPr>
+            <a:endParaRPr sz="1550" dirty="0">
+              <a:solidFill>
+                <a:srgbClr val="172B4D"/>
+              </a:solidFill>
+              <a:latin typeface="Aptos"/>
+            </a:endParaRPr>
+          </a:p>
+        </p:txBody>
+      </p:sp>
+      <p:pic>
+        <p:nvPicPr>
+          <p:cNvPr id="1025" name="Picture 2">
+            <a:extLst>
+              <a:ext uri="{FF2B5EF4-FFF2-40B4-BE49-F238E27FC236}">
+                <a16:creationId xmlns:a16="http://schemas.microsoft.com/office/drawing/2014/main" id="{4F95BBDA-590B-270B-BC04-AF1E191FAA3F}"/>
+              </a:ext>
+            </a:extLst>
+          </p:cNvPr>
+          <p:cNvPicPr>
+            <a:picLocks noChangeAspect="1" noChangeArrowheads="1"/>
+          </p:cNvPicPr>
+          <p:nvPr/>
+        </p:nvPicPr>
+        <p:blipFill>
+          <a:blip r:embed="rId2">
+            <a:extLst>
+              <a:ext uri="{28A0092B-C50C-407E-A947-70E740481C1C}">
+                <a14:useLocalDpi xmlns:a14="http://schemas.microsoft.com/office/drawing/2010/main" val="0"/>
+              </a:ext>
+            </a:extLst>
+          </a:blip>
+          <a:srcRect/>
+          <a:stretch>
+            <a:fillRect/>
+          </a:stretch>
+        </p:blipFill>
+        <p:spPr bwMode="auto">
+          <a:xfrm>
+            <a:off x="822960" y="3266555"/>
+            <a:ext cx="6651625" cy="525093"/>
+          </a:xfrm>
+          <a:prstGeom prst="rect">
+            <a:avLst/>
+          </a:prstGeom>
+          <a:noFill/>
+          <a:extLst>
+            <a:ext uri="{909E8E84-426E-40DD-AFC4-6F175D3DCCD1}">
+              <a14:hiddenFill xmlns:a14="http://schemas.microsoft.com/office/drawing/2010/main">
+                <a:solidFill>
+                  <a:srgbClr val="FFFFFF"/>
+                </a:solidFill>
+              </a14:hiddenFill>
+            </a:ext>
+          </a:extLst>
+        </p:spPr>
+      </p:pic>
+      <p:sp>
+        <p:nvSpPr>
+          <p:cNvPr id="10" name="Rectangle 3">
+            <a:extLst>
+              <a:ext uri="{FF2B5EF4-FFF2-40B4-BE49-F238E27FC236}">
+                <a16:creationId xmlns:a16="http://schemas.microsoft.com/office/drawing/2014/main" id="{6167B4C7-FC18-6352-3591-BE6185B0662D}"/>
+              </a:ext>
+            </a:extLst>
+          </p:cNvPr>
+          <p:cNvSpPr>
+            <a:spLocks noChangeArrowheads="1"/>
+          </p:cNvSpPr>
+          <p:nvPr/>
+        </p:nvSpPr>
+        <p:spPr bwMode="auto">
+          <a:xfrm>
+            <a:off x="778081" y="3956758"/>
+            <a:ext cx="6142387" cy="1600438"/>
+          </a:xfrm>
+          <a:prstGeom prst="rect">
+            <a:avLst/>
+          </a:prstGeom>
+          <a:noFill/>
+          <a:ln>
+            <a:noFill/>
+          </a:ln>
+          <a:effectLst/>
+          <a:extLst>
+            <a:ext uri="{909E8E84-426E-40DD-AFC4-6F175D3DCCD1}">
+              <a14:hiddenFill xmlns:a14="http://schemas.microsoft.com/office/drawing/2010/main">
+                <a:solidFill>
+                  <a:schemeClr val="accent1"/>
+                </a:solidFill>
+              </a14:hiddenFill>
+            </a:ext>
+            <a:ext uri="{91240B29-F687-4F45-9708-019B960494DF}">
+              <a14:hiddenLine xmlns:a14="http://schemas.microsoft.com/office/drawing/2010/main" w="9525">
+                <a:solidFill>
+                  <a:schemeClr val="tx1"/>
+                </a:solidFill>
+                <a:miter lim="800000"/>
+                <a:headEnd/>
+                <a:tailEnd/>
+              </a14:hiddenLine>
+            </a:ext>
+            <a:ext uri="{AF507438-7753-43E0-B8FC-AC1667EBCBE1}">
+              <a14:hiddenEffects xmlns:a14="http://schemas.microsoft.com/office/drawing/2010/main">
+                <a:effectLst>
+                  <a:outerShdw dist="35921" dir="2700000" algn="ctr" rotWithShape="0">
+                    <a:schemeClr val="bg2"/>
+                  </a:outerShdw>
+                </a:effectLst>
+              </a14:hiddenEffects>
+            </a:ext>
+          </a:extLst>
+        </p:spPr>
+        <p:txBody>
+          <a:bodyPr vert="horz" wrap="none" lIns="91440" tIns="45720" rIns="91440" bIns="45720" numCol="1" anchor="ctr" anchorCtr="0" compatLnSpc="1">
+            <a:prstTxWarp prst="textNoShape">
+              <a:avLst/>
+            </a:prstTxWarp>
+            <a:spAutoFit/>
+          </a:bodyPr>
+          <a:lstStyle/>
+          <a:p>
+            <a:pPr defTabSz="914400" eaLnBrk="0" fontAlgn="base" hangingPunct="0">
+              <a:spcBef>
+                <a:spcPct val="0"/>
+              </a:spcBef>
+              <a:spcAft>
+                <a:spcPct val="0"/>
+              </a:spcAft>
+            </a:pPr>
+            <a:r>
+              <a:rPr lang="en-US" sz="1400" b="0" dirty="0">
+                <a:solidFill>
+                  <a:srgbClr val="000000"/>
+                </a:solidFill>
+                <a:effectLst/>
+                <a:latin typeface="Aptos" panose="020B0004020202020204" pitchFamily="34" charset="0"/>
+              </a:rPr>
+              <a:t>The set of all tokens a model can work with is called the model’s </a:t>
+            </a:r>
+            <a:r>
+              <a:rPr lang="en-US" sz="1400" b="0" dirty="0">
+                <a:solidFill>
+                  <a:srgbClr val="000000"/>
+                </a:solidFill>
+                <a:effectLst/>
+                <a:highlight>
+                  <a:srgbClr val="FFFF00"/>
+                </a:highlight>
+                <a:latin typeface="Aptos" panose="020B0004020202020204" pitchFamily="34" charset="0"/>
+              </a:rPr>
+              <a:t>vocabulary</a:t>
+            </a:r>
+            <a:r>
+              <a:rPr lang="en-US" sz="1400" b="0" dirty="0">
+                <a:solidFill>
+                  <a:srgbClr val="000000"/>
+                </a:solidFill>
+                <a:effectLst/>
+                <a:latin typeface="Aptos" panose="020B0004020202020204" pitchFamily="34" charset="0"/>
+              </a:rPr>
+              <a:t>.</a:t>
+            </a:r>
+            <a:r>
+              <a:rPr lang="en-US" sz="1400" b="0" dirty="0">
+                <a:solidFill>
+                  <a:srgbClr val="000000"/>
+                </a:solidFill>
+                <a:effectLst/>
+                <a:latin typeface="Consolas" panose="020B0609020204030204" pitchFamily="49" charset="0"/>
+              </a:rPr>
+              <a:t> </a:t>
+            </a:r>
+          </a:p>
+          <a:p>
+            <a:pPr marL="0" marR="0" lvl="0" indent="0" algn="l" defTabSz="914400" rtl="0" eaLnBrk="0" fontAlgn="base" latinLnBrk="0" hangingPunct="0">
+              <a:lnSpc>
+                <a:spcPct val="100000"/>
+              </a:lnSpc>
+              <a:spcBef>
+                <a:spcPct val="0"/>
+              </a:spcBef>
+              <a:spcAft>
+                <a:spcPct val="0"/>
+              </a:spcAft>
+              <a:buClrTx/>
+              <a:buSzTx/>
+              <a:buFontTx/>
+              <a:buNone/>
+              <a:tabLst/>
+            </a:pPr>
+            <a:r>
+              <a:rPr kumimoji="0" lang="en-US" altLang="en-US" sz="1400" b="0" i="0" u="none" strike="noStrike" cap="none" normalizeH="0" baseline="0" dirty="0">
+                <a:ln>
+                  <a:noFill/>
+                </a:ln>
+                <a:solidFill>
+                  <a:schemeClr val="tx1"/>
+                </a:solidFill>
+                <a:effectLst/>
+                <a:latin typeface="Aptos" panose="020B0004020202020204" pitchFamily="34" charset="0"/>
+                <a:ea typeface="MS Mincho" panose="02020609040205080304" pitchFamily="49" charset="-128"/>
+                <a:cs typeface="Cambria" panose="02040503050406030204" pitchFamily="18" charset="0"/>
+              </a:rPr>
+              <a:t>The process of breaking an original text into tokens is called </a:t>
+            </a:r>
+            <a:r>
+              <a:rPr kumimoji="0" lang="en-US" altLang="en-US" sz="1400" b="0" i="0" u="none" strike="noStrike" cap="none" normalizeH="0" baseline="0" dirty="0">
+                <a:ln>
+                  <a:noFill/>
+                </a:ln>
+                <a:solidFill>
+                  <a:schemeClr val="tx1"/>
+                </a:solidFill>
+                <a:effectLst/>
+                <a:highlight>
+                  <a:srgbClr val="FFFF00"/>
+                </a:highlight>
+                <a:latin typeface="Aptos" panose="020B0004020202020204" pitchFamily="34" charset="0"/>
+                <a:ea typeface="MS Mincho" panose="02020609040205080304" pitchFamily="49" charset="-128"/>
+                <a:cs typeface="Cambria" panose="02040503050406030204" pitchFamily="18" charset="0"/>
+              </a:rPr>
+              <a:t>tokenization</a:t>
+            </a:r>
+            <a:r>
+              <a:rPr kumimoji="0" lang="en-US" altLang="en-US" sz="1400" b="0" i="0" u="none" strike="noStrike" cap="none" normalizeH="0" baseline="0" dirty="0">
+                <a:ln>
+                  <a:noFill/>
+                </a:ln>
+                <a:solidFill>
+                  <a:schemeClr val="tx1"/>
+                </a:solidFill>
+                <a:effectLst/>
+                <a:latin typeface="Aptos" panose="020B0004020202020204" pitchFamily="34" charset="0"/>
+                <a:ea typeface="MS Mincho" panose="02020609040205080304" pitchFamily="49" charset="-128"/>
+                <a:cs typeface="Cambria" panose="02040503050406030204" pitchFamily="18" charset="0"/>
+              </a:rPr>
+              <a:t>. </a:t>
+            </a:r>
+          </a:p>
+          <a:p>
+            <a:endParaRPr lang="en-US" sz="1400" dirty="0"/>
+          </a:p>
+          <a:p>
+            <a:r>
+              <a:rPr lang="en-US" sz="1400" dirty="0"/>
+              <a:t>An example phrase is:</a:t>
+            </a:r>
+          </a:p>
+          <a:p>
+            <a:r>
+              <a:rPr lang="en-US" sz="1400" b="1" dirty="0"/>
+              <a:t>“The unbelievable replay was replayed unbelievably.”</a:t>
+            </a:r>
+            <a:endParaRPr lang="en-US" sz="1400" dirty="0"/>
+          </a:p>
+          <a:p>
+            <a:pPr marL="0" marR="0" lvl="0" indent="0" algn="l" defTabSz="914400" rtl="0" eaLnBrk="0" fontAlgn="base" latinLnBrk="0" hangingPunct="0">
+              <a:lnSpc>
+                <a:spcPct val="100000"/>
+              </a:lnSpc>
+              <a:spcBef>
+                <a:spcPct val="0"/>
+              </a:spcBef>
+              <a:spcAft>
+                <a:spcPct val="0"/>
+              </a:spcAft>
+              <a:buClrTx/>
+              <a:buSzTx/>
+              <a:buFontTx/>
+              <a:buNone/>
+              <a:tabLst/>
+            </a:pPr>
+            <a:r>
+              <a:rPr kumimoji="0" lang="en-US" altLang="en-US" sz="1400" b="0" i="0" u="none" strike="noStrike" cap="none" normalizeH="0" baseline="0" dirty="0">
+                <a:ln>
+                  <a:noFill/>
+                </a:ln>
+                <a:solidFill>
+                  <a:schemeClr val="tx1"/>
+                </a:solidFill>
+                <a:effectLst/>
+                <a:latin typeface="Aptos" panose="020B0004020202020204" pitchFamily="34" charset="0"/>
+                <a:ea typeface="MS Mincho" panose="02020609040205080304" pitchFamily="49" charset="-128"/>
+                <a:cs typeface="Cambria" panose="02040503050406030204" pitchFamily="18" charset="0"/>
+              </a:rPr>
+              <a:t>The | </a:t>
+            </a:r>
+            <a:r>
+              <a:rPr kumimoji="0" lang="en-US" altLang="en-US" sz="1400" b="0" i="0" u="none" strike="noStrike" cap="none" normalizeH="0" baseline="0" dirty="0">
+                <a:ln>
+                  <a:noFill/>
+                </a:ln>
+                <a:solidFill>
+                  <a:schemeClr val="tx1"/>
+                </a:solidFill>
+                <a:effectLst/>
+                <a:highlight>
+                  <a:srgbClr val="00FFFF"/>
+                </a:highlight>
+                <a:latin typeface="Aptos" panose="020B0004020202020204" pitchFamily="34" charset="0"/>
+                <a:ea typeface="MS Mincho" panose="02020609040205080304" pitchFamily="49" charset="-128"/>
+                <a:cs typeface="Cambria" panose="02040503050406030204" pitchFamily="18" charset="0"/>
+              </a:rPr>
+              <a:t>un</a:t>
+            </a:r>
+            <a:r>
+              <a:rPr kumimoji="0" lang="en-US" altLang="en-US" sz="1400" b="0" i="0" u="none" strike="noStrike" cap="none" normalizeH="0" baseline="0" dirty="0">
+                <a:ln>
+                  <a:noFill/>
+                </a:ln>
+                <a:solidFill>
+                  <a:schemeClr val="tx1"/>
+                </a:solidFill>
+                <a:effectLst/>
+                <a:latin typeface="Aptos" panose="020B0004020202020204" pitchFamily="34" charset="0"/>
+                <a:ea typeface="MS Mincho" panose="02020609040205080304" pitchFamily="49" charset="-128"/>
+                <a:cs typeface="Cambria" panose="02040503050406030204" pitchFamily="18" charset="0"/>
+              </a:rPr>
+              <a:t> | </a:t>
+            </a:r>
+            <a:r>
+              <a:rPr kumimoji="0" lang="en-US" altLang="en-US" sz="1400" b="0" i="0" u="none" strike="noStrike" cap="none" normalizeH="0" baseline="0" dirty="0" err="1">
+                <a:ln>
+                  <a:noFill/>
+                </a:ln>
+                <a:solidFill>
+                  <a:schemeClr val="tx1"/>
+                </a:solidFill>
+                <a:effectLst/>
+                <a:highlight>
+                  <a:srgbClr val="FFFF00"/>
+                </a:highlight>
+                <a:latin typeface="Aptos" panose="020B0004020202020204" pitchFamily="34" charset="0"/>
+                <a:ea typeface="MS Mincho" panose="02020609040205080304" pitchFamily="49" charset="-128"/>
+                <a:cs typeface="Cambria" panose="02040503050406030204" pitchFamily="18" charset="0"/>
+              </a:rPr>
+              <a:t>believ</a:t>
+            </a:r>
+            <a:r>
+              <a:rPr kumimoji="0" lang="en-US" altLang="en-US" sz="1400" b="0" i="0" u="none" strike="noStrike" cap="none" normalizeH="0" baseline="0" dirty="0">
+                <a:ln>
+                  <a:noFill/>
+                </a:ln>
+                <a:solidFill>
+                  <a:schemeClr val="tx1"/>
+                </a:solidFill>
+                <a:effectLst/>
+                <a:latin typeface="Aptos" panose="020B0004020202020204" pitchFamily="34" charset="0"/>
+                <a:ea typeface="MS Mincho" panose="02020609040205080304" pitchFamily="49" charset="-128"/>
+                <a:cs typeface="Cambria" panose="02040503050406030204" pitchFamily="18" charset="0"/>
+              </a:rPr>
+              <a:t> | </a:t>
+            </a:r>
+            <a:r>
+              <a:rPr kumimoji="0" lang="en-US" altLang="en-US" sz="1400" b="0" i="0" u="none" strike="noStrike" cap="none" normalizeH="0" baseline="0" dirty="0">
+                <a:ln>
+                  <a:noFill/>
+                </a:ln>
+                <a:solidFill>
+                  <a:schemeClr val="tx1"/>
+                </a:solidFill>
+                <a:effectLst/>
+                <a:highlight>
+                  <a:srgbClr val="00FF00"/>
+                </a:highlight>
+                <a:latin typeface="Aptos" panose="020B0004020202020204" pitchFamily="34" charset="0"/>
+                <a:ea typeface="MS Mincho" panose="02020609040205080304" pitchFamily="49" charset="-128"/>
+                <a:cs typeface="Cambria" panose="02040503050406030204" pitchFamily="18" charset="0"/>
+              </a:rPr>
+              <a:t>able</a:t>
+            </a:r>
+            <a:r>
+              <a:rPr kumimoji="0" lang="en-US" altLang="en-US" sz="1400" b="0" i="0" u="none" strike="noStrike" cap="none" normalizeH="0" baseline="0" dirty="0">
+                <a:ln>
+                  <a:noFill/>
+                </a:ln>
+                <a:solidFill>
+                  <a:schemeClr val="tx1"/>
+                </a:solidFill>
+                <a:effectLst/>
+                <a:latin typeface="Aptos" panose="020B0004020202020204" pitchFamily="34" charset="0"/>
+                <a:ea typeface="MS Mincho" panose="02020609040205080304" pitchFamily="49" charset="-128"/>
+                <a:cs typeface="Cambria" panose="02040503050406030204" pitchFamily="18" charset="0"/>
+              </a:rPr>
+              <a:t> | </a:t>
+            </a:r>
+            <a:r>
+              <a:rPr kumimoji="0" lang="en-US" altLang="en-US" sz="1400" b="0" i="0" u="none" strike="noStrike" cap="none" normalizeH="0" baseline="0" dirty="0">
+                <a:ln>
+                  <a:noFill/>
+                </a:ln>
+                <a:solidFill>
+                  <a:schemeClr val="tx1"/>
+                </a:solidFill>
+                <a:effectLst/>
+                <a:highlight>
+                  <a:srgbClr val="C0C0C0"/>
+                </a:highlight>
+                <a:latin typeface="Aptos" panose="020B0004020202020204" pitchFamily="34" charset="0"/>
+                <a:ea typeface="MS Mincho" panose="02020609040205080304" pitchFamily="49" charset="-128"/>
+                <a:cs typeface="Cambria" panose="02040503050406030204" pitchFamily="18" charset="0"/>
+              </a:rPr>
+              <a:t>re</a:t>
+            </a:r>
+            <a:r>
+              <a:rPr kumimoji="0" lang="en-US" altLang="en-US" sz="1400" b="0" i="0" u="none" strike="noStrike" cap="none" normalizeH="0" baseline="0" dirty="0">
+                <a:ln>
+                  <a:noFill/>
+                </a:ln>
+                <a:solidFill>
+                  <a:schemeClr val="tx1"/>
+                </a:solidFill>
+                <a:effectLst/>
+                <a:latin typeface="Aptos" panose="020B0004020202020204" pitchFamily="34" charset="0"/>
+                <a:ea typeface="MS Mincho" panose="02020609040205080304" pitchFamily="49" charset="-128"/>
+                <a:cs typeface="Cambria" panose="02040503050406030204" pitchFamily="18" charset="0"/>
+              </a:rPr>
+              <a:t> | </a:t>
+            </a:r>
+            <a:r>
+              <a:rPr kumimoji="0" lang="en-US" altLang="en-US" sz="1400" b="0" i="0" u="none" strike="noStrike" cap="none" normalizeH="0" baseline="0" dirty="0">
+                <a:ln>
+                  <a:noFill/>
+                </a:ln>
+                <a:solidFill>
+                  <a:schemeClr val="tx1"/>
+                </a:solidFill>
+                <a:effectLst/>
+                <a:highlight>
+                  <a:srgbClr val="FF00FF"/>
+                </a:highlight>
+                <a:latin typeface="Aptos" panose="020B0004020202020204" pitchFamily="34" charset="0"/>
+                <a:ea typeface="MS Mincho" panose="02020609040205080304" pitchFamily="49" charset="-128"/>
+                <a:cs typeface="Cambria" panose="02040503050406030204" pitchFamily="18" charset="0"/>
+              </a:rPr>
+              <a:t>play</a:t>
+            </a:r>
+            <a:r>
+              <a:rPr kumimoji="0" lang="en-US" altLang="en-US" sz="1400" b="0" i="0" u="none" strike="noStrike" cap="none" normalizeH="0" baseline="0" dirty="0">
+                <a:ln>
+                  <a:noFill/>
+                </a:ln>
+                <a:solidFill>
+                  <a:schemeClr val="tx1"/>
+                </a:solidFill>
+                <a:effectLst/>
+                <a:latin typeface="Aptos" panose="020B0004020202020204" pitchFamily="34" charset="0"/>
+                <a:ea typeface="MS Mincho" panose="02020609040205080304" pitchFamily="49" charset="-128"/>
+                <a:cs typeface="Cambria" panose="02040503050406030204" pitchFamily="18" charset="0"/>
+              </a:rPr>
+              <a:t> | was | </a:t>
+            </a:r>
+            <a:r>
+              <a:rPr kumimoji="0" lang="en-US" altLang="en-US" sz="1400" b="0" i="0" u="none" strike="noStrike" cap="none" normalizeH="0" baseline="0" dirty="0">
+                <a:ln>
+                  <a:noFill/>
+                </a:ln>
+                <a:solidFill>
+                  <a:schemeClr val="tx1"/>
+                </a:solidFill>
+                <a:effectLst/>
+                <a:highlight>
+                  <a:srgbClr val="C0C0C0"/>
+                </a:highlight>
+                <a:latin typeface="Aptos" panose="020B0004020202020204" pitchFamily="34" charset="0"/>
+                <a:ea typeface="MS Mincho" panose="02020609040205080304" pitchFamily="49" charset="-128"/>
+                <a:cs typeface="Cambria" panose="02040503050406030204" pitchFamily="18" charset="0"/>
+              </a:rPr>
+              <a:t>re</a:t>
+            </a:r>
+            <a:r>
+              <a:rPr kumimoji="0" lang="en-US" altLang="en-US" sz="1400" b="0" i="0" u="none" strike="noStrike" cap="none" normalizeH="0" baseline="0" dirty="0">
+                <a:ln>
+                  <a:noFill/>
+                </a:ln>
+                <a:solidFill>
+                  <a:schemeClr val="tx1"/>
+                </a:solidFill>
+                <a:effectLst/>
+                <a:latin typeface="Aptos" panose="020B0004020202020204" pitchFamily="34" charset="0"/>
+                <a:ea typeface="MS Mincho" panose="02020609040205080304" pitchFamily="49" charset="-128"/>
+                <a:cs typeface="Cambria" panose="02040503050406030204" pitchFamily="18" charset="0"/>
+              </a:rPr>
+              <a:t> | </a:t>
+            </a:r>
+            <a:r>
+              <a:rPr kumimoji="0" lang="en-US" altLang="en-US" sz="1400" b="0" i="0" u="none" strike="noStrike" cap="none" normalizeH="0" baseline="0" dirty="0">
+                <a:ln>
+                  <a:noFill/>
+                </a:ln>
+                <a:solidFill>
+                  <a:schemeClr val="tx1"/>
+                </a:solidFill>
+                <a:effectLst/>
+                <a:highlight>
+                  <a:srgbClr val="FF00FF"/>
+                </a:highlight>
+                <a:latin typeface="Aptos" panose="020B0004020202020204" pitchFamily="34" charset="0"/>
+                <a:ea typeface="MS Mincho" panose="02020609040205080304" pitchFamily="49" charset="-128"/>
+                <a:cs typeface="Cambria" panose="02040503050406030204" pitchFamily="18" charset="0"/>
+              </a:rPr>
+              <a:t>play</a:t>
+            </a:r>
+            <a:r>
+              <a:rPr kumimoji="0" lang="en-US" altLang="en-US" sz="1400" b="0" i="0" u="none" strike="noStrike" cap="none" normalizeH="0" baseline="0" dirty="0">
+                <a:ln>
+                  <a:noFill/>
+                </a:ln>
+                <a:solidFill>
+                  <a:schemeClr val="tx1"/>
+                </a:solidFill>
+                <a:effectLst/>
+                <a:latin typeface="Aptos" panose="020B0004020202020204" pitchFamily="34" charset="0"/>
+                <a:ea typeface="MS Mincho" panose="02020609040205080304" pitchFamily="49" charset="-128"/>
+                <a:cs typeface="Cambria" panose="02040503050406030204" pitchFamily="18" charset="0"/>
+              </a:rPr>
+              <a:t> | ed | </a:t>
+            </a:r>
+            <a:r>
+              <a:rPr kumimoji="0" lang="en-US" altLang="en-US" sz="1400" b="0" i="0" u="none" strike="noStrike" cap="none" normalizeH="0" baseline="0" dirty="0">
+                <a:ln>
+                  <a:noFill/>
+                </a:ln>
+                <a:solidFill>
+                  <a:schemeClr val="tx1"/>
+                </a:solidFill>
+                <a:effectLst/>
+                <a:highlight>
+                  <a:srgbClr val="00FFFF"/>
+                </a:highlight>
+                <a:latin typeface="Aptos" panose="020B0004020202020204" pitchFamily="34" charset="0"/>
+                <a:ea typeface="MS Mincho" panose="02020609040205080304" pitchFamily="49" charset="-128"/>
+                <a:cs typeface="Cambria" panose="02040503050406030204" pitchFamily="18" charset="0"/>
+              </a:rPr>
+              <a:t>un</a:t>
+            </a:r>
+            <a:r>
+              <a:rPr kumimoji="0" lang="en-US" altLang="en-US" sz="1400" b="0" i="0" u="none" strike="noStrike" cap="none" normalizeH="0" baseline="0" dirty="0">
+                <a:ln>
+                  <a:noFill/>
+                </a:ln>
+                <a:solidFill>
+                  <a:schemeClr val="tx1"/>
+                </a:solidFill>
+                <a:effectLst/>
+                <a:latin typeface="Aptos" panose="020B0004020202020204" pitchFamily="34" charset="0"/>
+                <a:ea typeface="MS Mincho" panose="02020609040205080304" pitchFamily="49" charset="-128"/>
+                <a:cs typeface="Cambria" panose="02040503050406030204" pitchFamily="18" charset="0"/>
+              </a:rPr>
+              <a:t> | </a:t>
+            </a:r>
+            <a:r>
+              <a:rPr kumimoji="0" lang="en-US" altLang="en-US" sz="1400" b="0" i="0" u="none" strike="noStrike" cap="none" normalizeH="0" baseline="0" dirty="0" err="1">
+                <a:ln>
+                  <a:noFill/>
+                </a:ln>
+                <a:solidFill>
+                  <a:schemeClr val="tx1"/>
+                </a:solidFill>
+                <a:effectLst/>
+                <a:highlight>
+                  <a:srgbClr val="FFFF00"/>
+                </a:highlight>
+                <a:latin typeface="Aptos" panose="020B0004020202020204" pitchFamily="34" charset="0"/>
+                <a:ea typeface="MS Mincho" panose="02020609040205080304" pitchFamily="49" charset="-128"/>
+                <a:cs typeface="Cambria" panose="02040503050406030204" pitchFamily="18" charset="0"/>
+              </a:rPr>
+              <a:t>believ</a:t>
+            </a:r>
+            <a:r>
+              <a:rPr kumimoji="0" lang="en-US" altLang="en-US" sz="1400" b="0" i="0" u="none" strike="noStrike" cap="none" normalizeH="0" baseline="0" dirty="0">
+                <a:ln>
+                  <a:noFill/>
+                </a:ln>
+                <a:solidFill>
+                  <a:schemeClr val="tx1"/>
+                </a:solidFill>
+                <a:effectLst/>
+                <a:latin typeface="Aptos" panose="020B0004020202020204" pitchFamily="34" charset="0"/>
+                <a:ea typeface="MS Mincho" panose="02020609040205080304" pitchFamily="49" charset="-128"/>
+                <a:cs typeface="Cambria" panose="02040503050406030204" pitchFamily="18" charset="0"/>
+              </a:rPr>
+              <a:t> | </a:t>
+            </a:r>
+            <a:r>
+              <a:rPr kumimoji="0" lang="en-US" altLang="en-US" sz="1400" b="0" i="0" u="none" strike="noStrike" cap="none" normalizeH="0" baseline="0" dirty="0">
+                <a:ln>
+                  <a:noFill/>
+                </a:ln>
+                <a:solidFill>
+                  <a:schemeClr val="tx1"/>
+                </a:solidFill>
+                <a:effectLst/>
+                <a:highlight>
+                  <a:srgbClr val="00FF00"/>
+                </a:highlight>
+                <a:latin typeface="Aptos" panose="020B0004020202020204" pitchFamily="34" charset="0"/>
+                <a:ea typeface="MS Mincho" panose="02020609040205080304" pitchFamily="49" charset="-128"/>
+                <a:cs typeface="Cambria" panose="02040503050406030204" pitchFamily="18" charset="0"/>
+              </a:rPr>
+              <a:t>able</a:t>
+            </a:r>
+            <a:r>
+              <a:rPr kumimoji="0" lang="en-US" altLang="en-US" sz="1400" b="0" i="0" u="none" strike="noStrike" cap="none" normalizeH="0" baseline="0" dirty="0">
+                <a:ln>
+                  <a:noFill/>
+                </a:ln>
+                <a:solidFill>
+                  <a:schemeClr val="tx1"/>
+                </a:solidFill>
+                <a:effectLst/>
+                <a:latin typeface="Aptos" panose="020B0004020202020204" pitchFamily="34" charset="0"/>
+                <a:ea typeface="MS Mincho" panose="02020609040205080304" pitchFamily="49" charset="-128"/>
+                <a:cs typeface="Cambria" panose="02040503050406030204" pitchFamily="18" charset="0"/>
+              </a:rPr>
+              <a:t> | </a:t>
+            </a:r>
+            <a:r>
+              <a:rPr kumimoji="0" lang="en-US" altLang="en-US" sz="1400" b="0" i="0" u="none" strike="noStrike" cap="none" normalizeH="0" baseline="0" dirty="0" err="1">
+                <a:ln>
+                  <a:noFill/>
+                </a:ln>
+                <a:solidFill>
+                  <a:schemeClr val="tx1"/>
+                </a:solidFill>
+                <a:effectLst/>
+                <a:latin typeface="Aptos" panose="020B0004020202020204" pitchFamily="34" charset="0"/>
+                <a:ea typeface="MS Mincho" panose="02020609040205080304" pitchFamily="49" charset="-128"/>
+                <a:cs typeface="Cambria" panose="02040503050406030204" pitchFamily="18" charset="0"/>
+              </a:rPr>
+              <a:t>ly</a:t>
+            </a:r>
+            <a:endParaRPr kumimoji="0" lang="en-US" altLang="en-US" sz="1400" b="0" i="0" u="none" strike="noStrike" cap="none" normalizeH="0" baseline="0" dirty="0">
+              <a:ln>
+                <a:noFill/>
+              </a:ln>
+              <a:solidFill>
+                <a:schemeClr val="tx1"/>
+              </a:solidFill>
+              <a:effectLst/>
+              <a:latin typeface="Aptos" panose="020B0004020202020204" pitchFamily="34" charset="0"/>
+              <a:ea typeface="MS Mincho" panose="02020609040205080304" pitchFamily="49" charset="-128"/>
+              <a:cs typeface="Cambria" panose="02040503050406030204" pitchFamily="18" charset="0"/>
+            </a:endParaRPr>
+          </a:p>
+          <a:p>
+            <a:pPr marL="0" marR="0" lvl="0" indent="0" algn="l" defTabSz="914400" rtl="0" eaLnBrk="0" fontAlgn="base" latinLnBrk="0" hangingPunct="0">
+              <a:lnSpc>
+                <a:spcPct val="100000"/>
+              </a:lnSpc>
+              <a:spcBef>
+                <a:spcPct val="0"/>
+              </a:spcBef>
+              <a:spcAft>
+                <a:spcPct val="0"/>
+              </a:spcAft>
+              <a:buClrTx/>
+              <a:buSzTx/>
+              <a:buFontTx/>
+              <a:buNone/>
+              <a:tabLst/>
+            </a:pPr>
+            <a:r>
+              <a:rPr lang="en-US" sz="1400" dirty="0"/>
+              <a:t>The model can store </a:t>
+            </a:r>
+            <a:r>
+              <a:rPr lang="en-US" sz="1400" u="sng" dirty="0"/>
+              <a:t>reusable token fragments</a:t>
+            </a:r>
+            <a:endParaRPr kumimoji="0" lang="en-US" altLang="en-US" sz="1400" b="0" i="0" u="sng" strike="noStrike" cap="none" normalizeH="0" baseline="0" dirty="0">
+              <a:ln>
+                <a:noFill/>
+              </a:ln>
+              <a:solidFill>
+                <a:schemeClr val="tx1"/>
+              </a:solidFill>
+              <a:effectLst/>
+              <a:latin typeface="Aptos" panose="020B0004020202020204" pitchFamily="34" charset="0"/>
+              <a:ea typeface="MS Mincho" panose="02020609040205080304" pitchFamily="49" charset="-128"/>
+              <a:cs typeface="Cambria" panose="02040503050406030204" pitchFamily="18" charset="0"/>
+            </a:endParaRPr>
+          </a:p>
+        </p:txBody>
+      </p:sp>
+      <p:sp>
+        <p:nvSpPr>
+          <p:cNvPr id="12" name="TextBox 11">
+            <a:extLst>
+              <a:ext uri="{FF2B5EF4-FFF2-40B4-BE49-F238E27FC236}">
+                <a16:creationId xmlns:a16="http://schemas.microsoft.com/office/drawing/2014/main" id="{5B802190-2FB1-3317-D97F-381C8AC829A6}"/>
+              </a:ext>
+            </a:extLst>
+          </p:cNvPr>
+          <p:cNvSpPr txBox="1"/>
+          <p:nvPr/>
+        </p:nvSpPr>
+        <p:spPr>
+          <a:xfrm>
+            <a:off x="822960" y="3755395"/>
+            <a:ext cx="6097508" cy="261610"/>
+          </a:xfrm>
+          <a:prstGeom prst="rect">
+            <a:avLst/>
+          </a:prstGeom>
+          <a:noFill/>
+        </p:spPr>
+        <p:txBody>
+          <a:bodyPr wrap="square">
+            <a:spAutoFit/>
+          </a:bodyPr>
+          <a:lstStyle/>
+          <a:p>
+            <a:r>
+              <a:rPr lang="en-US" sz="1100" i="1" dirty="0"/>
+              <a:t>An example of how GPT-4 tokenizes a phrase.</a:t>
             </a:r>
           </a:p>
         </p:txBody>

--- a/pptx/Session_01_Tokens_v1.0.pptx
+++ b/pptx/Session_01_Tokens_v1.0.pptx
@@ -1,6 +1,6 @@
 
 <file path=ppt/presentation.xml><?xml version="1.0" encoding="utf-8"?>
-<p:presentation xmlns:a="http://schemas.openxmlformats.org/drawingml/2006/main" xmlns:r="http://schemas.openxmlformats.org/officeDocument/2006/relationships" xmlns:p="http://schemas.openxmlformats.org/presentationml/2006/main" saveSubsetFonts="1" autoCompressPictures="0">
+<p:presentation xmlns:a="http://schemas.openxmlformats.org/drawingml/2006/main" xmlns:ns3="http://schemas.microsoft.com/office/powerpoint/2012/main" xmlns:p="http://schemas.openxmlformats.org/presentationml/2006/main" xmlns:r="http://schemas.openxmlformats.org/officeDocument/2006/relationships" saveSubsetFonts="1" autoCompressPictures="0">
   <p:sldMasterIdLst>
     <p:sldMasterId id="2147483648" r:id="rId1"/>
   </p:sldMasterIdLst>
@@ -15,6 +15,7 @@
     <p:sldId id="267" r:id="rId9"/>
     <p:sldId id="260" r:id="rId10"/>
     <p:sldId id="268" r:id="rId11"/>
+    <p:sldId id="275" r:id="rId25"/>
     <p:sldId id="261" r:id="rId12"/>
     <p:sldId id="269" r:id="rId13"/>
     <p:sldId id="262" r:id="rId14"/>
@@ -124,18 +125,18 @@
   </p:defaultTextStyle>
   <p:extLst>
     <p:ext uri="{EFAFB233-063F-42B5-8137-9DF3F51BA10A}">
-      <p15:sldGuideLst xmlns:p15="http://schemas.microsoft.com/office/powerpoint/2012/main">
-        <p15:guide id="1" orient="horz" pos="2160">
-          <p15:clr>
+      <ns3:sldGuideLst>
+        <ns3:guide id="1" orient="horz" pos="2160">
+          <ns3:clr>
             <a:srgbClr val="A4A3A4"/>
-          </p15:clr>
-        </p15:guide>
-        <p15:guide id="2" pos="2880">
-          <p15:clr>
+          </ns3:clr>
+        </ns3:guide>
+        <ns3:guide id="2" pos="2880">
+          <ns3:clr>
             <a:srgbClr val="A4A3A4"/>
-          </p15:clr>
-        </p15:guide>
-      </p15:sldGuideLst>
+          </ns3:clr>
+        </ns3:guide>
+      </ns3:sldGuideLst>
     </p:ext>
   </p:extLst>
 </p:presentation>
@@ -320,7 +321,7 @@
           <a:p>
             <a:fld id="{5BCAD085-E8A6-8845-BD4E-CB4CCA059FC4}" type="datetimeFigureOut">
               <a:rPr lang="en-US" smtClean="0"/>
-              <a:t>5/25/2026</a:t>
+              <a:t>5/26/2026</a:t>
             </a:fld>
             <a:endParaRPr lang="en-US"/>
           </a:p>
@@ -488,7 +489,7 @@
           <a:p>
             <a:fld id="{5BCAD085-E8A6-8845-BD4E-CB4CCA059FC4}" type="datetimeFigureOut">
               <a:rPr lang="en-US" smtClean="0"/>
-              <a:t>5/25/2026</a:t>
+              <a:t>5/26/2026</a:t>
             </a:fld>
             <a:endParaRPr lang="en-US"/>
           </a:p>
@@ -666,7 +667,7 @@
           <a:p>
             <a:fld id="{5BCAD085-E8A6-8845-BD4E-CB4CCA059FC4}" type="datetimeFigureOut">
               <a:rPr lang="en-US" smtClean="0"/>
-              <a:t>5/25/2026</a:t>
+              <a:t>5/26/2026</a:t>
             </a:fld>
             <a:endParaRPr lang="en-US"/>
           </a:p>
@@ -834,7 +835,7 @@
           <a:p>
             <a:fld id="{5BCAD085-E8A6-8845-BD4E-CB4CCA059FC4}" type="datetimeFigureOut">
               <a:rPr lang="en-US" smtClean="0"/>
-              <a:t>5/25/2026</a:t>
+              <a:t>5/26/2026</a:t>
             </a:fld>
             <a:endParaRPr lang="en-US"/>
           </a:p>
@@ -1079,7 +1080,7 @@
           <a:p>
             <a:fld id="{5BCAD085-E8A6-8845-BD4E-CB4CCA059FC4}" type="datetimeFigureOut">
               <a:rPr lang="en-US" smtClean="0"/>
-              <a:t>5/25/2026</a:t>
+              <a:t>5/26/2026</a:t>
             </a:fld>
             <a:endParaRPr lang="en-US"/>
           </a:p>
@@ -1364,7 +1365,7 @@
           <a:p>
             <a:fld id="{5BCAD085-E8A6-8845-BD4E-CB4CCA059FC4}" type="datetimeFigureOut">
               <a:rPr lang="en-US" smtClean="0"/>
-              <a:t>5/25/2026</a:t>
+              <a:t>5/26/2026</a:t>
             </a:fld>
             <a:endParaRPr lang="en-US"/>
           </a:p>
@@ -1783,7 +1784,7 @@
           <a:p>
             <a:fld id="{5BCAD085-E8A6-8845-BD4E-CB4CCA059FC4}" type="datetimeFigureOut">
               <a:rPr lang="en-US" smtClean="0"/>
-              <a:t>5/25/2026</a:t>
+              <a:t>5/26/2026</a:t>
             </a:fld>
             <a:endParaRPr lang="en-US"/>
           </a:p>
@@ -1900,7 +1901,7 @@
           <a:p>
             <a:fld id="{5BCAD085-E8A6-8845-BD4E-CB4CCA059FC4}" type="datetimeFigureOut">
               <a:rPr lang="en-US" smtClean="0"/>
-              <a:t>5/25/2026</a:t>
+              <a:t>5/26/2026</a:t>
             </a:fld>
             <a:endParaRPr lang="en-US"/>
           </a:p>
@@ -1995,7 +1996,7 @@
           <a:p>
             <a:fld id="{5BCAD085-E8A6-8845-BD4E-CB4CCA059FC4}" type="datetimeFigureOut">
               <a:rPr lang="en-US" smtClean="0"/>
-              <a:t>5/25/2026</a:t>
+              <a:t>5/26/2026</a:t>
             </a:fld>
             <a:endParaRPr lang="en-US"/>
           </a:p>
@@ -2270,7 +2271,7 @@
           <a:p>
             <a:fld id="{5BCAD085-E8A6-8845-BD4E-CB4CCA059FC4}" type="datetimeFigureOut">
               <a:rPr lang="en-US" smtClean="0"/>
-              <a:t>5/25/2026</a:t>
+              <a:t>5/26/2026</a:t>
             </a:fld>
             <a:endParaRPr lang="en-US"/>
           </a:p>
@@ -2522,7 +2523,7 @@
           <a:p>
             <a:fld id="{5BCAD085-E8A6-8845-BD4E-CB4CCA059FC4}" type="datetimeFigureOut">
               <a:rPr lang="en-US" smtClean="0"/>
-              <a:t>5/25/2026</a:t>
+              <a:t>5/26/2026</a:t>
             </a:fld>
             <a:endParaRPr lang="en-US"/>
           </a:p>
@@ -2733,7 +2734,7 @@
           <a:p>
             <a:fld id="{5BCAD085-E8A6-8845-BD4E-CB4CCA059FC4}" type="datetimeFigureOut">
               <a:rPr lang="en-US" smtClean="0"/>
-              <a:t>5/25/2026</a:t>
+              <a:t>5/26/2026</a:t>
             </a:fld>
             <a:endParaRPr lang="en-US"/>
           </a:p>
@@ -3545,7 +3546,7 @@
         </p:nvSpPr>
         <p:spPr>
           <a:xfrm>
-            <a:off x="1097280" y="4206240"/>
+            <a:off x="822960" y="5577840"/>
             <a:ext cx="9966960" cy="914400"/>
           </a:xfrm>
           <a:prstGeom prst="roundRect">
@@ -3624,8 +3625,145 @@
                 </a:solidFill>
                 <a:latin typeface="Aptos"/>
               </a:rPr>
-              <a:t>AI Under the hood | Slide 9</a:t>
-            </a:r>
+              <a:t>AI Under the hood | Slide 10</a:t>
+            </a:r>
+          </a:p>
+        </p:txBody>
+      </p:sp>
+      <p:sp>
+        <p:nvSpPr>
+          <p:cNvPr id="9" name="Definition">
+            <a:extLst>
+              <a:ext uri="{FF2B5EF4-FFF2-40B4-BE49-F238E27FC236}">
+                <a16:creationId xmlns:a16="http://schemas.microsoft.com/office/drawing/2014/main" id="{0FCD2D10-DB6A-EBB2-1E45-F3B0AF2ABB4B}"/>
+              </a:ext>
+            </a:extLst>
+          </p:cNvPr>
+          <p:cNvSpPr/>
+          <p:nvPr/>
+        </p:nvSpPr>
+        <p:spPr>
+          <a:xfrm>
+            <a:off x="822959" y="3831882"/>
+            <a:ext cx="9784081" cy="1654518"/>
+          </a:xfrm>
+          <a:prstGeom prst="roundRect">
+            <a:avLst/>
+          </a:prstGeom>
+          <a:solidFill>
+            <a:srgbClr val="F5F8FC"/>
+          </a:solidFill>
+          <a:ln>
+            <a:solidFill>
+              <a:srgbClr val="BED2E6"/>
+            </a:solidFill>
+          </a:ln>
+        </p:spPr>
+        <p:txBody>
+          <a:bodyPr lIns="137160" tIns="137160" rIns="137160" bIns="137160" rtlCol="0" anchor="t"/>
+          <a:lstStyle/>
+          <a:p>
+            <a:pPr algn="l">
+              <a:defRPr sz="1750"/>
+            </a:pPr>
+            <a:r>
+              <a:rPr lang="en-US" sz="1550" dirty="0">
+                <a:solidFill>
+                  <a:srgbClr val="0B2F5B"/>
+                </a:solidFill>
+                <a:latin typeface="Aptos" panose="020B0004020202020204" pitchFamily="34" charset="0"/>
+              </a:rPr>
+              <a:t>A neural network contains a gigantic Embedding table matrix</a:t>
+            </a:r>
+          </a:p>
+          <a:p>
+            <a:pPr algn="l">
+              <a:defRPr sz="1750"/>
+            </a:pPr>
+            <a:endParaRPr lang="en-US" sz="1550" dirty="0">
+              <a:solidFill>
+                <a:srgbClr val="0B2F5B"/>
+              </a:solidFill>
+              <a:latin typeface="Aptos" panose="020B0004020202020204" pitchFamily="34" charset="0"/>
+            </a:endParaRPr>
+          </a:p>
+          <a:p>
+            <a:pPr algn="l">
+              <a:defRPr sz="1750"/>
+            </a:pPr>
+            <a:r>
+              <a:rPr lang="en-US" sz="1550" dirty="0">
+                <a:solidFill>
+                  <a:srgbClr val="0B2F5B"/>
+                </a:solidFill>
+                <a:latin typeface="Aptos" panose="020B0004020202020204" pitchFamily="34" charset="0"/>
+              </a:rPr>
+              <a:t>Example dimensions:  Vocabulary size * Embedding dimension</a:t>
+            </a:r>
+          </a:p>
+          <a:p>
+            <a:pPr algn="l">
+              <a:defRPr sz="1750"/>
+            </a:pPr>
+            <a:r>
+              <a:rPr lang="en-US" sz="1550" dirty="0">
+                <a:solidFill>
+                  <a:srgbClr val="0B2F5B"/>
+                </a:solidFill>
+                <a:latin typeface="Aptos" panose="020B0004020202020204" pitchFamily="34" charset="0"/>
+              </a:rPr>
+              <a:t>GPT4                                            100,256          *               1,536</a:t>
+            </a:r>
+          </a:p>
+          <a:p>
+            <a:pPr algn="l">
+              <a:defRPr sz="1750"/>
+            </a:pPr>
+            <a:endParaRPr lang="en-US" sz="1550" dirty="0">
+              <a:solidFill>
+                <a:srgbClr val="0B2F5B"/>
+              </a:solidFill>
+              <a:latin typeface="Aptos" panose="020B0004020202020204" pitchFamily="34" charset="0"/>
+            </a:endParaRPr>
+          </a:p>
+          <a:p>
+            <a:pPr algn="l">
+              <a:defRPr sz="1750"/>
+            </a:pPr>
+            <a:r>
+              <a:rPr lang="en-US" sz="1550" dirty="0">
+                <a:solidFill>
+                  <a:srgbClr val="0B2F5B"/>
+                </a:solidFill>
+                <a:latin typeface="Aptos" panose="020B0004020202020204" pitchFamily="34" charset="0"/>
+              </a:rPr>
+              <a:t>Meaning: each token is represented by 1,536 floating point numbers</a:t>
+            </a:r>
+            <a:endParaRPr lang="en-US" sz="1550" dirty="0">
+              <a:latin typeface="Aptos" panose="020B0004020202020204" pitchFamily="34" charset="0"/>
+            </a:endParaRPr>
+          </a:p>
+          <a:p>
+            <a:pPr algn="l">
+              <a:defRPr sz="1750"/>
+            </a:pPr>
+            <a:endParaRPr sz="1750" dirty="0">
+              <a:solidFill>
+                <a:srgbClr val="0B2F5B"/>
+              </a:solidFill>
+              <a:latin typeface="Aptos"/>
+            </a:endParaRPr>
+          </a:p>
+          <a:p>
+            <a:pPr algn="l">
+              <a:defRPr sz="1550"/>
+            </a:pPr>
+            <a:endParaRPr sz="1550" dirty="0">
+              <a:solidFill>
+                <a:srgbClr val="172B4D"/>
+              </a:solidFill>
+              <a:latin typeface="Aptos"/>
+            </a:endParaRPr>
           </a:p>
         </p:txBody>
       </p:sp>
@@ -3733,7 +3871,7 @@
         <p:spPr>
           <a:xfrm>
             <a:off x="914400" y="1280160"/>
-            <a:ext cx="10424160" cy="1965960"/>
+            <a:ext cx="10424160" cy="1616949"/>
           </a:xfrm>
           <a:prstGeom prst="roundRect">
             <a:avLst/>
@@ -3802,7 +3940,7 @@
         </p:nvSpPr>
         <p:spPr>
           <a:xfrm>
-            <a:off x="914400" y="3749039"/>
+            <a:off x="868680" y="5288128"/>
             <a:ext cx="10424160" cy="1097280"/>
           </a:xfrm>
           <a:prstGeom prst="roundRect">
@@ -3895,8 +4033,87 @@
               </a:defRPr>
             </a:pPr>
             <a:r>
-              <a:t>AI Under the hood | Slide 10</a:t>
-            </a:r>
+              <a:t>AI Under the hood | Slide 12</a:t>
+            </a:r>
+          </a:p>
+        </p:txBody>
+      </p:sp>
+      <p:sp>
+        <p:nvSpPr>
+          <p:cNvPr id="7" name="Rounded Rectangle 3">
+            <a:extLst>
+              <a:ext uri="{FF2B5EF4-FFF2-40B4-BE49-F238E27FC236}">
+                <a16:creationId xmlns:a16="http://schemas.microsoft.com/office/drawing/2014/main" id="{4D62C980-9521-DFEE-0DCD-FEEC67E8FE40}"/>
+              </a:ext>
+            </a:extLst>
+          </p:cNvPr>
+          <p:cNvSpPr/>
+          <p:nvPr/>
+        </p:nvSpPr>
+        <p:spPr>
+          <a:xfrm>
+            <a:off x="883920" y="3307531"/>
+            <a:ext cx="10424160" cy="1616949"/>
+          </a:xfrm>
+          <a:prstGeom prst="roundRect">
+            <a:avLst/>
+          </a:prstGeom>
+          <a:solidFill>
+            <a:srgbClr val="F5F8FC"/>
+          </a:solidFill>
+          <a:ln>
+            <a:solidFill>
+              <a:srgbClr val="BED2E6"/>
+            </a:solidFill>
+          </a:ln>
+        </p:spPr>
+        <p:style>
+          <a:lnRef idx="1">
+            <a:schemeClr val="accent1"/>
+          </a:lnRef>
+          <a:fillRef idx="3">
+            <a:schemeClr val="accent1"/>
+          </a:fillRef>
+          <a:effectRef idx="2">
+            <a:schemeClr val="accent1"/>
+          </a:effectRef>
+          <a:fontRef idx="minor">
+            <a:schemeClr val="lt1"/>
+          </a:fontRef>
+        </p:style>
+        <p:txBody>
+          <a:bodyPr lIns="182880" tIns="109728" rIns="182880" rtlCol="0" anchor="ctr"/>
+          <a:lstStyle/>
+          <a:p>
+            <a:pPr algn="ctr">
+              <a:defRPr sz="2200">
+                <a:solidFill>
+                  <a:srgbClr val="172B4D"/>
+                </a:solidFill>
+                <a:latin typeface="Consolas"/>
+              </a:defRPr>
+            </a:pPr>
+            <a:r>
+              <a:rPr lang="en-US" dirty="0"/>
+              <a:t>Conceptually: </a:t>
+            </a:r>
+            <a:r>
+              <a:rPr lang="en-US" dirty="0" err="1"/>
+              <a:t>EmbeddingMatrix</a:t>
+            </a:r>
+            <a:r>
+              <a:rPr lang="en-US" dirty="0"/>
+              <a:t>[ </a:t>
+            </a:r>
+            <a:r>
+              <a:rPr lang="en-US" dirty="0" err="1"/>
+              <a:t>token_id</a:t>
+            </a:r>
+            <a:r>
+              <a:rPr lang="en-US" dirty="0"/>
+              <a:t> ] returns a vector</a:t>
+            </a:r>
+            <a:endParaRPr dirty="0"/>
           </a:p>
         </p:txBody>
       </p:sp>
@@ -4076,7 +4293,7 @@
         <p:spPr>
           <a:xfrm>
             <a:off x="4846320" y="1188720"/>
-            <a:ext cx="5760720" cy="2560320"/>
+            <a:ext cx="5760720" cy="2377440"/>
           </a:xfrm>
           <a:prstGeom prst="roundRect">
             <a:avLst/>
@@ -4160,7 +4377,25 @@
                 </a:solidFill>
                 <a:latin typeface="Consolas"/>
               </a:rPr>
-              <a:t>4. Output: [-0.62, 0.18, 0.45, -0.09]</a:t>
+              <a:t>4. Output</a:t>
+            </a:r>
+            <a:r>
+              <a:rPr lang="en-US" sz="1500" dirty="0">
+                <a:solidFill>
+                  <a:srgbClr val="172B4D"/>
+                </a:solidFill>
+                <a:latin typeface="Consolas"/>
+              </a:rPr>
+              <a:t> Vector</a:t>
+            </a:r>
+            <a:r>
+              <a:rPr sz="1500" dirty="0">
+                <a:solidFill>
+                  <a:srgbClr val="172B4D"/>
+                </a:solidFill>
+                <a:latin typeface="Consolas"/>
+              </a:rPr>
+              <a:t>: [-0.62, 0.18, 0.45, -0.09]</a:t>
             </a:r>
           </a:p>
         </p:txBody>
@@ -4173,8 +4408,8 @@
         </p:nvSpPr>
         <p:spPr>
           <a:xfrm>
-            <a:off x="1097280" y="4206240"/>
-            <a:ext cx="9966960" cy="914400"/>
+            <a:off x="822960" y="4346840"/>
+            <a:ext cx="9966960" cy="1807072"/>
           </a:xfrm>
           <a:prstGeom prst="roundRect">
             <a:avLst/>
@@ -4204,6 +4439,12 @@
               </a:rPr>
               <a:t>Key takeaway</a:t>
             </a:r>
+            <a:endParaRPr lang="en-US" sz="1850" b="1" dirty="0">
+              <a:solidFill>
+                <a:srgbClr val="0B2F5B"/>
+              </a:solidFill>
+              <a:latin typeface="Aptos"/>
+            </a:endParaRPr>
           </a:p>
           <a:p>
             <a:pPr algn="ctr">
@@ -4216,8 +4457,86 @@
                 </a:solidFill>
                 <a:latin typeface="Aptos"/>
               </a:rPr>
-              <a:t>A vector is the numeric representation that moves forward. The values are learned, then selected by ID.</a:t>
-            </a:r>
+              <a:t>A vector is the numeric representation that moves forward. </a:t>
+            </a:r>
+            <a:endParaRPr lang="en-US" sz="1700" dirty="0">
+              <a:solidFill>
+                <a:srgbClr val="172B4D"/>
+              </a:solidFill>
+              <a:latin typeface="Aptos"/>
+            </a:endParaRPr>
+          </a:p>
+          <a:p>
+            <a:pPr algn="ctr">
+              <a:defRPr sz="1700"/>
+            </a:pPr>
+            <a:r>
+              <a:rPr sz="1700" dirty="0">
+                <a:solidFill>
+                  <a:srgbClr val="172B4D"/>
+                </a:solidFill>
+                <a:latin typeface="Aptos"/>
+              </a:rPr>
+              <a:t>The values are learned, then selected by ID.</a:t>
+            </a:r>
+            <a:endParaRPr lang="en-US" sz="1700" dirty="0">
+              <a:solidFill>
+                <a:srgbClr val="172B4D"/>
+              </a:solidFill>
+              <a:latin typeface="Aptos"/>
+            </a:endParaRPr>
+          </a:p>
+          <a:p>
+            <a:pPr algn="ctr">
+              <a:defRPr sz="1700"/>
+            </a:pPr>
+            <a:endParaRPr lang="en-US" sz="1700" dirty="0">
+              <a:solidFill>
+                <a:srgbClr val="172B4D"/>
+              </a:solidFill>
+              <a:latin typeface="Aptos"/>
+            </a:endParaRPr>
+          </a:p>
+          <a:p>
+            <a:pPr algn="ctr">
+              <a:defRPr sz="1700"/>
+            </a:pPr>
+            <a:r>
+              <a:rPr lang="en-US" sz="1700" dirty="0">
+                <a:solidFill>
+                  <a:srgbClr val="172B4D"/>
+                </a:solidFill>
+                <a:latin typeface="Aptos"/>
+              </a:rPr>
+              <a:t>The word “Sales” </a:t>
+            </a:r>
+            <a:r>
+              <a:rPr lang="en-US" sz="1700" dirty="0">
+                <a:solidFill>
+                  <a:srgbClr val="172B4D"/>
+                </a:solidFill>
+                <a:highlight>
+                  <a:srgbClr val="FFFF00"/>
+                </a:highlight>
+                <a:latin typeface="Aptos"/>
+              </a:rPr>
+              <a:t>now is a point in multidimensional space</a:t>
+            </a:r>
+            <a:r>
+              <a:rPr lang="en-US" sz="1700" dirty="0">
+                <a:solidFill>
+                  <a:srgbClr val="172B4D"/>
+                </a:solidFill>
+                <a:latin typeface="Aptos"/>
+              </a:rPr>
+              <a:t>.</a:t>
+            </a:r>
+            <a:endParaRPr sz="1700" dirty="0">
+              <a:solidFill>
+                <a:srgbClr val="172B4D"/>
+              </a:solidFill>
+              <a:latin typeface="Aptos"/>
+            </a:endParaRPr>
           </a:p>
         </p:txBody>
       </p:sp>
@@ -4252,7 +4571,7 @@
                 </a:solidFill>
                 <a:latin typeface="Aptos"/>
               </a:rPr>
-              <a:t>AI Under the hood | Slide 11</a:t>
+              <a:t>AI Under the hood | Slide 13</a:t>
             </a:r>
           </a:p>
         </p:txBody>
@@ -4731,7 +5050,7 @@
               </a:defRPr>
             </a:pPr>
             <a:r>
-              <a:t>AI Under the hood | Slide 12</a:t>
+              <a:t>AI Under the hood | Slide 14</a:t>
             </a:r>
           </a:p>
         </p:txBody>
@@ -4993,7 +5312,7 @@
               </a:defRPr>
             </a:pPr>
             <a:r>
-              <a:t>AI Under the hood | Slide 13</a:t>
+              <a:t>AI Under the hood | Slide 15</a:t>
             </a:r>
           </a:p>
         </p:txBody>
@@ -5518,7 +5837,7 @@
                 </a:solidFill>
                 <a:latin typeface="Aptos"/>
               </a:rPr>
-              <a:t>AI Under the hood | Slide 14</a:t>
+              <a:t>AI Under the hood | Slide 16</a:t>
             </a:r>
           </a:p>
         </p:txBody>
@@ -5687,6 +6006,15 @@
               <a:defRPr sz="2100"/>
             </a:pPr>
             <a:r>
+              <a:rPr lang="en-US" sz="2100" b="1" dirty="0">
+                <a:solidFill>
+                  <a:srgbClr val="0B5CAD"/>
+                </a:solidFill>
+                <a:latin typeface="Aptos"/>
+              </a:rPr>
+              <a:t>---</a:t>
+            </a:r>
+            <a:r>
               <a:rPr sz="2100" b="1" dirty="0">
                 <a:solidFill>
                   <a:srgbClr val="0B5CAD"/>
@@ -5766,6 +6094,15 @@
               <a:defRPr sz="2100"/>
             </a:pPr>
             <a:r>
+              <a:rPr lang="en-US" sz="2100" b="1" dirty="0">
+                <a:solidFill>
+                  <a:srgbClr val="0B5CAD"/>
+                </a:solidFill>
+                <a:latin typeface="Aptos"/>
+              </a:rPr>
+              <a:t>----</a:t>
+            </a:r>
+            <a:r>
               <a:rPr sz="2100" b="1" dirty="0">
                 <a:solidFill>
                   <a:srgbClr val="0B5CAD"/>
@@ -7572,7 +7909,7 @@
                 </a:solidFill>
                 <a:latin typeface="Aptos"/>
               </a:rPr>
-              <a:t>AI Under the hood | Slide 15</a:t>
+              <a:t>AI Under the hood | Slide 17</a:t>
             </a:r>
           </a:p>
         </p:txBody>
@@ -7653,7 +7990,7 @@
                 </a:solidFill>
                 <a:latin typeface="Aptos"/>
               </a:rPr>
-              <a:t>AI Under the hood | Slide 16</a:t>
+              <a:t>AI Under the hood | Slide 18</a:t>
             </a:r>
           </a:p>
         </p:txBody>
@@ -8099,7 +8436,7 @@
               </a:defRPr>
             </a:pPr>
             <a:r>
-              <a:t>AI Under the hood | Slide 17</a:t>
+              <a:t>AI Under the hood | Slide 19</a:t>
             </a:r>
           </a:p>
         </p:txBody>
@@ -8373,7 +8710,7 @@
               </a:defRPr>
             </a:pPr>
             <a:r>
-              <a:t>AI Under the hood | Slide 18</a:t>
+              <a:t>AI Under the hood | Slide 20</a:t>
             </a:r>
           </a:p>
         </p:txBody>
@@ -8454,7 +8791,7 @@
                 </a:solidFill>
                 <a:latin typeface="Aptos"/>
               </a:rPr>
-              <a:t>AI Under the hood | Slide 3</a:t>
+              <a:t>AI Under the hood | Slide 2</a:t>
             </a:r>
           </a:p>
         </p:txBody>
@@ -8537,6 +8874,592 @@
           <a:lstStyle/>
           <a:p>
             <a:endParaRPr lang="en-US" dirty="0"/>
+          </a:p>
+        </p:txBody>
+      </p:sp>
+    </p:spTree>
+  </p:cSld>
+  <p:clrMapOvr>
+    <a:masterClrMapping/>
+  </p:clrMapOvr>
+</p:sld>
+</file>
+
+<file path=ppt/slides/slide20.xml><?xml version="1.0" encoding="utf-8"?>
+<p:sld xmlns:a="http://schemas.openxmlformats.org/drawingml/2006/main" xmlns:r="http://schemas.openxmlformats.org/officeDocument/2006/relationships" xmlns:p="http://schemas.openxmlformats.org/presentationml/2006/main">
+  <p:cSld>
+    <p:spTree>
+      <p:nvGrpSpPr>
+        <p:cNvPr id="1" name=""/>
+        <p:cNvGrpSpPr/>
+        <p:nvPr/>
+      </p:nvGrpSpPr>
+      <p:grpSpPr>
+        <a:xfrm>
+          <a:off x="0" y="0"/>
+          <a:ext cx="0" cy="0"/>
+          <a:chOff x="0" y="0"/>
+          <a:chExt cx="0" cy="0"/>
+        </a:xfrm>
+      </p:grpSpPr>
+      <p:sp>
+        <p:nvSpPr>
+          <p:cNvPr id="2" name="Title"/>
+          <p:cNvSpPr txBox="1"/>
+          <p:nvPr/>
+        </p:nvSpPr>
+        <p:spPr>
+          <a:xfrm>
+            <a:off x="548640" y="274320"/>
+            <a:ext cx="11125200" cy="548640"/>
+          </a:xfrm>
+          <a:prstGeom prst="rect">
+            <a:avLst/>
+          </a:prstGeom>
+          <a:noFill/>
+          <a:ln/>
+        </p:spPr>
+        <p:txBody>
+          <a:bodyPr lIns="0" tIns="0" rIns="0" bIns="0" rtlCol="0" anchor="t"/>
+          <a:lstStyle/>
+          <a:p>
+            <a:pPr algn="l">
+              <a:defRPr sz="2600"/>
+            </a:pPr>
+            <a:r>
+              <a:rPr sz="2600" b="1" dirty="0">
+                <a:solidFill>
+                  <a:srgbClr val="0B2F5B"/>
+                </a:solidFill>
+                <a:latin typeface="Aptos"/>
+              </a:rPr>
+              <a:t>Embeddings: Learned Geometric Coordinates of Meaning</a:t>
+            </a:r>
+          </a:p>
+        </p:txBody>
+      </p:sp>
+      <p:sp>
+        <p:nvSpPr>
+          <p:cNvPr id="3" name="Subtitle"/>
+          <p:cNvSpPr txBox="1"/>
+          <p:nvPr/>
+        </p:nvSpPr>
+        <p:spPr>
+          <a:xfrm>
+            <a:off x="594360" y="777240"/>
+            <a:ext cx="10820400" cy="365760"/>
+          </a:xfrm>
+          <a:prstGeom prst="rect">
+            <a:avLst/>
+          </a:prstGeom>
+          <a:noFill/>
+          <a:ln/>
+        </p:spPr>
+        <p:txBody>
+          <a:bodyPr lIns="0" tIns="0" rIns="0" bIns="0" rtlCol="0" anchor="t"/>
+          <a:lstStyle/>
+          <a:p>
+            <a:pPr algn="l">
+              <a:defRPr sz="1550"/>
+            </a:pPr>
+            <a:r>
+              <a:rPr sz="1550" dirty="0">
+                <a:solidFill>
+                  <a:srgbClr val="52616B"/>
+                </a:solidFill>
+                <a:latin typeface="Aptos"/>
+              </a:rPr>
+              <a:t>Training turns random vectors into a map where distance carries semantics.</a:t>
+            </a:r>
+          </a:p>
+        </p:txBody>
+      </p:sp>
+      <p:sp>
+        <p:nvSpPr>
+          <p:cNvPr id="4" name="Initially Random"/>
+          <p:cNvSpPr/>
+          <p:nvPr/>
+        </p:nvSpPr>
+        <p:spPr>
+          <a:xfrm>
+            <a:off x="640080" y="1280160"/>
+            <a:ext cx="3291840" cy="1737360"/>
+          </a:xfrm>
+          <a:prstGeom prst="roundRect">
+            <a:avLst/>
+          </a:prstGeom>
+          <a:solidFill>
+            <a:srgbClr val="F5F8FC"/>
+          </a:solidFill>
+          <a:ln>
+            <a:solidFill>
+              <a:srgbClr val="BED2E6"/>
+            </a:solidFill>
+          </a:ln>
+        </p:spPr>
+        <p:txBody>
+          <a:bodyPr lIns="91440" tIns="91440" rIns="91440" bIns="91440" rtlCol="0" anchor="t"/>
+          <a:lstStyle/>
+          <a:p>
+            <a:pPr algn="l">
+              <a:defRPr sz="1700"/>
+            </a:pPr>
+            <a:r>
+              <a:rPr sz="1700" b="1" dirty="0">
+                <a:solidFill>
+                  <a:srgbClr val="0B2F5B"/>
+                </a:solidFill>
+                <a:latin typeface="Aptos"/>
+              </a:rPr>
+              <a:t>Initially</a:t>
+            </a:r>
+          </a:p>
+          <a:p>
+            <a:pPr algn="l">
+              <a:defRPr sz="1250"/>
+            </a:pPr>
+            <a:r>
+              <a:rPr sz="1250" dirty="0">
+                <a:solidFill>
+                  <a:srgbClr val="172B4D"/>
+                </a:solidFill>
+                <a:latin typeface="Consolas"/>
+              </a:rPr>
+              <a:t>MAG     = [random garbage]</a:t>
+            </a:r>
+            <a:br/>
+            <a:r>
+              <a:rPr sz="1250" dirty="0">
+                <a:solidFill>
+                  <a:srgbClr val="172B4D"/>
+                </a:solidFill>
+                <a:latin typeface="Consolas"/>
+              </a:rPr>
+              <a:t>sales   = [random garbage]</a:t>
+            </a:r>
+            <a:br/>
+            <a:r>
+              <a:rPr sz="1250" dirty="0">
+                <a:solidFill>
+                  <a:srgbClr val="172B4D"/>
+                </a:solidFill>
+                <a:latin typeface="Consolas"/>
+              </a:rPr>
+              <a:t>Chicago = [random garbage]</a:t>
+            </a:r>
+          </a:p>
+        </p:txBody>
+      </p:sp>
+      <p:sp>
+        <p:nvSpPr>
+          <p:cNvPr id="5" name="Training Contexts"/>
+          <p:cNvSpPr/>
+          <p:nvPr/>
+        </p:nvSpPr>
+        <p:spPr>
+          <a:xfrm>
+            <a:off x="4389120" y="1280160"/>
+            <a:ext cx="3200400" cy="1737360"/>
+          </a:xfrm>
+          <a:prstGeom prst="roundRect">
+            <a:avLst/>
+          </a:prstGeom>
+          <a:solidFill>
+            <a:srgbClr val="F5F8FC"/>
+          </a:solidFill>
+          <a:ln>
+            <a:solidFill>
+              <a:srgbClr val="BED2E6"/>
+            </a:solidFill>
+          </a:ln>
+        </p:spPr>
+        <p:txBody>
+          <a:bodyPr lIns="91440" tIns="91440" rIns="91440" bIns="91440" rtlCol="0" anchor="t"/>
+          <a:lstStyle/>
+          <a:p>
+            <a:pPr algn="l">
+              <a:defRPr sz="1700"/>
+            </a:pPr>
+            <a:r>
+              <a:rPr sz="1700" b="1" dirty="0">
+                <a:solidFill>
+                  <a:srgbClr val="0B2F5B"/>
+                </a:solidFill>
+                <a:latin typeface="Aptos"/>
+              </a:rPr>
+              <a:t>During training</a:t>
+            </a:r>
+          </a:p>
+          <a:p>
+            <a:pPr algn="l">
+              <a:defRPr sz="1350"/>
+            </a:pPr>
+            <a:r>
+              <a:rPr sz="1350" dirty="0">
+                <a:solidFill>
+                  <a:srgbClr val="172B4D"/>
+                </a:solidFill>
+                <a:latin typeface="Consolas"/>
+              </a:rPr>
+              <a:t>sales up</a:t>
+            </a:r>
+            <a:br/>
+            <a:r>
+              <a:rPr sz="1350" dirty="0">
+                <a:solidFill>
+                  <a:srgbClr val="172B4D"/>
+                </a:solidFill>
+                <a:latin typeface="Consolas"/>
+              </a:rPr>
+              <a:t>sales increased</a:t>
+            </a:r>
+            <a:br/>
+            <a:r>
+              <a:rPr sz="1350" dirty="0">
+                <a:solidFill>
+                  <a:srgbClr val="172B4D"/>
+                </a:solidFill>
+                <a:latin typeface="Consolas"/>
+              </a:rPr>
+              <a:t>revenue growth</a:t>
+            </a:r>
+            <a:br/>
+            <a:r>
+              <a:rPr sz="1350" dirty="0">
+                <a:solidFill>
+                  <a:srgbClr val="172B4D"/>
+                </a:solidFill>
+                <a:latin typeface="Consolas"/>
+              </a:rPr>
+              <a:t>Chicago region</a:t>
+            </a:r>
+          </a:p>
+        </p:txBody>
+      </p:sp>
+      <p:sp>
+        <p:nvSpPr>
+          <p:cNvPr id="6" name="Geometry Meaning"/>
+          <p:cNvSpPr/>
+          <p:nvPr/>
+        </p:nvSpPr>
+        <p:spPr>
+          <a:xfrm>
+            <a:off x="8138160" y="1280160"/>
+            <a:ext cx="3200400" cy="1737360"/>
+          </a:xfrm>
+          <a:prstGeom prst="roundRect">
+            <a:avLst/>
+          </a:prstGeom>
+          <a:solidFill>
+            <a:srgbClr val="EAF3FF"/>
+          </a:solidFill>
+          <a:ln>
+            <a:solidFill>
+              <a:srgbClr val="0B5CAD"/>
+            </a:solidFill>
+          </a:ln>
+        </p:spPr>
+        <p:txBody>
+          <a:bodyPr lIns="91440" tIns="91440" rIns="91440" bIns="91440" rtlCol="0" anchor="t"/>
+          <a:lstStyle/>
+          <a:p>
+            <a:pPr algn="l">
+              <a:defRPr sz="1700"/>
+            </a:pPr>
+            <a:r>
+              <a:rPr sz="1700" b="1" dirty="0">
+                <a:solidFill>
+                  <a:srgbClr val="0B2F5B"/>
+                </a:solidFill>
+                <a:latin typeface="Aptos"/>
+              </a:rPr>
+              <a:t>Backprop moves vectors</a:t>
+            </a:r>
+          </a:p>
+          <a:p>
+            <a:pPr algn="l">
+              <a:defRPr sz="1375"/>
+            </a:pPr>
+            <a:r>
+              <a:rPr sz="1375" dirty="0">
+                <a:solidFill>
+                  <a:srgbClr val="172B4D"/>
+                </a:solidFill>
+                <a:latin typeface="Aptos"/>
+              </a:rPr>
+              <a:t>similar words move closer</a:t>
+            </a:r>
+            <a:br/>
+            <a:r>
+              <a:rPr sz="1375" dirty="0">
+                <a:solidFill>
+                  <a:srgbClr val="172B4D"/>
+                </a:solidFill>
+                <a:latin typeface="Aptos"/>
+              </a:rPr>
+              <a:t>unrelated words move apart</a:t>
+            </a:r>
+            <a:br/>
+            <a:r>
+              <a:rPr sz="1375" dirty="0">
+                <a:solidFill>
+                  <a:srgbClr val="172B4D"/>
+                </a:solidFill>
+                <a:latin typeface="Aptos"/>
+              </a:rPr>
+              <a:t>geometry stores meaning</a:t>
+            </a:r>
+          </a:p>
+        </p:txBody>
+      </p:sp>
+      <p:sp>
+        <p:nvSpPr>
+          <p:cNvPr id="7" name="Visual Intuition"/>
+          <p:cNvSpPr/>
+          <p:nvPr/>
+        </p:nvSpPr>
+        <p:spPr>
+          <a:xfrm>
+            <a:off x="640080" y="3370320"/>
+            <a:ext cx="5029200" cy="2011680"/>
+          </a:xfrm>
+          <a:prstGeom prst="roundRect">
+            <a:avLst/>
+          </a:prstGeom>
+          <a:solidFill>
+            <a:srgbClr val="FFFFFF"/>
+          </a:solidFill>
+          <a:ln>
+            <a:solidFill>
+              <a:srgbClr val="BED2E6"/>
+            </a:solidFill>
+          </a:ln>
+        </p:spPr>
+        <p:txBody>
+          <a:bodyPr lIns="91440" tIns="91440" rIns="91440" bIns="91440" rtlCol="0" anchor="t"/>
+          <a:lstStyle/>
+          <a:p>
+            <a:pPr algn="l">
+              <a:defRPr sz="1650"/>
+            </a:pPr>
+            <a:r>
+              <a:rPr sz="1650" b="1" dirty="0">
+                <a:solidFill>
+                  <a:srgbClr val="0B2F5B"/>
+                </a:solidFill>
+                <a:latin typeface="Aptos"/>
+              </a:rPr>
+              <a:t>Visual intuition: distances encode relationships</a:t>
+            </a:r>
+          </a:p>
+          <a:p>
+            <a:pPr algn="l">
+              <a:defRPr sz="1250"/>
+            </a:pPr>
+            <a:r>
+              <a:rPr sz="1250" dirty="0">
+                <a:solidFill>
+                  <a:srgbClr val="172B4D"/>
+                </a:solidFill>
+                <a:latin typeface="Consolas"/>
+              </a:rPr>
+              <a:t>king   (2, 9, 4)    queen  (2, 9, 5)</a:t>
+            </a:r>
+            <a:br/>
+            <a:r>
+              <a:rPr sz="1250" dirty="0">
+                <a:solidFill>
+                  <a:srgbClr val="172B4D"/>
+                </a:solidFill>
+                <a:latin typeface="Consolas"/>
+              </a:rPr>
+              <a:t>man    (1, 4, 3)    woman  (1, 4, 4)</a:t>
+            </a:r>
+          </a:p>
+          <a:p>
+            <a:pPr algn="l">
+              <a:defRPr sz="1550"/>
+            </a:pPr>
+            <a:r>
+              <a:rPr sz="1550" b="1" dirty="0">
+                <a:solidFill>
+                  <a:srgbClr val="0B5CAD"/>
+                </a:solidFill>
+                <a:latin typeface="Consolas"/>
+              </a:rPr>
+              <a:t>king - man + woman ~= queen</a:t>
+            </a:r>
+          </a:p>
+        </p:txBody>
+      </p:sp>
+      <p:sp>
+        <p:nvSpPr>
+          <p:cNvPr id="8" name="Sentence Embeddings"/>
+          <p:cNvSpPr/>
+          <p:nvPr/>
+        </p:nvSpPr>
+        <p:spPr>
+          <a:xfrm>
+            <a:off x="5989320" y="3370320"/>
+            <a:ext cx="5394960" cy="2011680"/>
+          </a:xfrm>
+          <a:prstGeom prst="roundRect">
+            <a:avLst/>
+          </a:prstGeom>
+          <a:solidFill>
+            <a:srgbClr val="FFFFFF"/>
+          </a:solidFill>
+          <a:ln>
+            <a:solidFill>
+              <a:srgbClr val="BED2E6"/>
+            </a:solidFill>
+          </a:ln>
+        </p:spPr>
+        <p:txBody>
+          <a:bodyPr lIns="91440" tIns="91440" rIns="91440" bIns="91440" rtlCol="0" anchor="t"/>
+          <a:lstStyle/>
+          <a:p>
+            <a:pPr algn="l">
+              <a:defRPr sz="1650"/>
+            </a:pPr>
+            <a:r>
+              <a:rPr sz="1650" b="1" dirty="0">
+                <a:solidFill>
+                  <a:srgbClr val="0B2F5B"/>
+                </a:solidFill>
+                <a:latin typeface="Aptos"/>
+              </a:rPr>
+              <a:t>Sentence embeddings combine token vectors</a:t>
+            </a:r>
+          </a:p>
+          <a:p>
+            <a:pPr algn="l">
+              <a:defRPr sz="1250"/>
+            </a:pPr>
+            <a:r>
+              <a:rPr sz="1250" dirty="0">
+                <a:solidFill>
+                  <a:srgbClr val="172B4D"/>
+                </a:solidFill>
+                <a:latin typeface="Aptos"/>
+              </a:rPr>
+              <a:t>averaging | attention | transformers | pooling</a:t>
+            </a:r>
+          </a:p>
+          <a:p>
+            <a:pPr algn="l">
+              <a:defRPr sz="1200"/>
+            </a:pPr>
+            <a:r>
+              <a:rPr sz="1200" dirty="0">
+                <a:solidFill>
+                  <a:srgbClr val="172B4D"/>
+                </a:solidFill>
+                <a:latin typeface="Consolas"/>
+              </a:rPr>
+              <a:t>"MAG sales are up in Chicago"</a:t>
+            </a:r>
+            <a:br/>
+            <a:r>
+              <a:rPr sz="1200" dirty="0">
+                <a:solidFill>
+                  <a:srgbClr val="172B4D"/>
+                </a:solidFill>
+                <a:latin typeface="Consolas"/>
+              </a:rPr>
+              <a:t>-&gt; [0.192, -0.551, 0.882, ... 1536 dims ...]</a:t>
+            </a:r>
+          </a:p>
+          <a:p>
+            <a:pPr algn="l">
+              <a:defRPr sz="1225"/>
+            </a:pPr>
+            <a:r>
+              <a:rPr sz="1225" dirty="0">
+                <a:solidFill>
+                  <a:srgbClr val="52616B"/>
+                </a:solidFill>
+                <a:latin typeface="Aptos"/>
+              </a:rPr>
+              <a:t>captures business context, trend, location, and organization semantics</a:t>
+            </a:r>
+          </a:p>
+        </p:txBody>
+      </p:sp>
+      <p:sp>
+        <p:nvSpPr>
+          <p:cNvPr id="9" name="Why This Works"/>
+          <p:cNvSpPr/>
+          <p:nvPr/>
+        </p:nvSpPr>
+        <p:spPr>
+          <a:xfrm>
+            <a:off x="914400" y="5791200"/>
+            <a:ext cx="10393680" cy="548640"/>
+          </a:xfrm>
+          <a:prstGeom prst="roundRect">
+            <a:avLst/>
+          </a:prstGeom>
+          <a:solidFill>
+            <a:srgbClr val="F5F8FC"/>
+          </a:solidFill>
+          <a:ln>
+            <a:solidFill>
+              <a:srgbClr val="BED2E6"/>
+            </a:solidFill>
+          </a:ln>
+        </p:spPr>
+        <p:txBody>
+          <a:bodyPr lIns="91440" tIns="91440" rIns="91440" bIns="91440" rtlCol="0" anchor="ctr"/>
+          <a:lstStyle/>
+          <a:p>
+            <a:pPr algn="l">
+              <a:defRPr sz="1450"/>
+            </a:pPr>
+            <a:r>
+              <a:rPr sz="1450" dirty="0">
+                <a:solidFill>
+                  <a:srgbClr val="172B4D"/>
+                </a:solidFill>
+                <a:latin typeface="Aptos"/>
+              </a:rPr>
+              <a:t>Why it works: language has statistical structure. Context patterns -&gt; geometric relationships. Foundation for Word2Vec, GloVe, BERT, GPT, and LLMs.</a:t>
+            </a:r>
+          </a:p>
+        </p:txBody>
+      </p:sp>
+      <p:sp>
+        <p:nvSpPr>
+          <p:cNvPr id="10" name="Footer"/>
+          <p:cNvSpPr txBox="1"/>
+          <p:nvPr/>
+        </p:nvSpPr>
+        <p:spPr>
+          <a:xfrm>
+            <a:off x="320040" y="6473952"/>
+            <a:ext cx="11521440" cy="228600"/>
+          </a:xfrm>
+          <a:prstGeom prst="rect">
+            <a:avLst/>
+          </a:prstGeom>
+          <a:noFill/>
+        </p:spPr>
+        <p:txBody>
+          <a:bodyPr wrap="none">
+            <a:spAutoFit/>
+          </a:bodyPr>
+          <a:lstStyle/>
+          <a:p>
+            <a:pPr>
+              <a:defRPr sz="900">
+                <a:solidFill>
+                  <a:srgbClr val="52616B"/>
+                </a:solidFill>
+              </a:defRPr>
+            </a:pPr>
+            <a:r>
+              <a:t>AI Under the hood | Slide 11</a:t>
+            </a:r>
           </a:p>
         </p:txBody>
       </p:sp>
@@ -8957,7 +9880,7 @@
             </a:pPr>
             <a:r>
               <a:rPr dirty="0"/>
-              <a:t>AI Under the hood | Slide 2</a:t>
+              <a:t>AI Under the hood | Slide 4</a:t>
             </a:r>
           </a:p>
         </p:txBody>
@@ -9283,7 +10206,7 @@
               </a:defRPr>
             </a:pPr>
             <a:r>
-              <a:t>AI Under the hood | Slide 4</a:t>
+              <a:t>AI Under the hood | Slide 5</a:t>
             </a:r>
           </a:p>
         </p:txBody>
@@ -9609,7 +10532,7 @@
               </a:defRPr>
             </a:pPr>
             <a:r>
-              <a:t>AI Under the hood | Slide 5</a:t>
+              <a:t>AI Under the hood | Slide 6</a:t>
             </a:r>
           </a:p>
         </p:txBody>
@@ -9967,7 +10890,7 @@
               </a:defRPr>
             </a:pPr>
             <a:r>
-              <a:t>AI Under the hood | Slide 6</a:t>
+              <a:t>AI Under the hood | Slide 7</a:t>
             </a:r>
           </a:p>
         </p:txBody>
@@ -10338,7 +11261,7 @@
                 </a:solidFill>
                 <a:latin typeface="Aptos"/>
               </a:rPr>
-              <a:t>AI Under the hood | Slide 7</a:t>
+              <a:t>AI Under the hood | Slide 8</a:t>
             </a:r>
           </a:p>
         </p:txBody>
@@ -11383,7 +12306,11 @@
             </a:br>
             <a:r>
               <a:rPr dirty="0"/>
-              <a:t>        ↓</a:t>
+              <a:t>        </a:t>
+            </a:r>
+            <a:r>
+              <a:rPr lang="en-US" dirty="0"/>
+              <a:t>↓</a:t>
             </a:r>
             <a:br>
               <a:rPr dirty="0"/>
@@ -11496,7 +12423,7 @@
               </a:defRPr>
             </a:pPr>
             <a:r>
-              <a:t>AI Under the hood | Slide 8</a:t>
+              <a:t>AI Under the hood | Slide 9</a:t>
             </a:r>
           </a:p>
         </p:txBody>

--- a/pptx/Session_01_Tokens_v1.0.pptx
+++ b/pptx/Session_01_Tokens_v1.0.pptx
@@ -3589,9 +3589,21 @@
                 <a:solidFill>
                   <a:srgbClr val="172B4D"/>
                 </a:solidFill>
-                <a:latin typeface="Aptos"/>
-              </a:rPr>
-              <a:t>During inference, we do not calculate these numbers from spelling. We look up the learned row.</a:t>
+                <a:highlight>
+                  <a:srgbClr val="FFFF00"/>
+                </a:highlight>
+                <a:latin typeface="Aptos"/>
+              </a:rPr>
+              <a:t>During inference, we do not calculate these numbers from spelling. </a:t>
+            </a:r>
+            <a:r>
+              <a:rPr sz="1700" dirty="0">
+                <a:solidFill>
+                  <a:srgbClr val="172B4D"/>
+                </a:solidFill>
+                <a:latin typeface="Aptos"/>
+              </a:rPr>
+              <a:t>We look up the learned row.</a:t>
             </a:r>
           </a:p>
         </p:txBody>
@@ -3861,7 +3873,28 @@
                 </a:solidFill>
                 <a:latin typeface="Aptos"/>
               </a:rPr>
-              <a:t>Training turns random vectors into a map where distance carries semantics.</a:t>
+              <a:t>Training turns random vectors into a map where </a:t>
+            </a:r>
+            <a:r>
+              <a:rPr sz="1550" dirty="0">
+                <a:solidFill>
+                  <a:srgbClr val="52616B"/>
+                </a:solidFill>
+                <a:highlight>
+                  <a:srgbClr val="FFFF00"/>
+                </a:highlight>
+                <a:latin typeface="Aptos"/>
+              </a:rPr>
+              <a:t>distance carries semantics</a:t>
+            </a:r>
+            <a:r>
+              <a:rPr sz="1550" dirty="0">
+                <a:solidFill>
+                  <a:srgbClr val="52616B"/>
+                </a:solidFill>
+                <a:latin typeface="Aptos"/>
+              </a:rPr>
+              <a:t>.</a:t>
             </a:r>
           </a:p>
         </p:txBody>
@@ -4305,17 +4338,43 @@
           <a:bodyPr lIns="91440" tIns="91440" rIns="91440" bIns="91440" rtlCol="0" anchor="ctr"/>
           <a:lstStyle/>
           <a:p>
-            <a:pPr algn="l">
+            <a:pPr algn="ctr">
               <a:defRPr sz="1450"/>
             </a:pPr>
             <a:r>
+              <a:rPr sz="1450" b="1" dirty="0">
+                <a:solidFill>
+                  <a:srgbClr val="172B4D"/>
+                </a:solidFill>
+                <a:highlight>
+                  <a:srgbClr val="FFFF00"/>
+                </a:highlight>
+                <a:latin typeface="Aptos"/>
+              </a:rPr>
+              <a:t>Why it works: language has statistical structure. Context patterns -&gt; geometric relationships. </a:t>
+            </a:r>
+            <a:endParaRPr lang="en-US" sz="1450" b="1" dirty="0">
+              <a:solidFill>
+                <a:srgbClr val="172B4D"/>
+              </a:solidFill>
+              <a:highlight>
+                <a:srgbClr val="FFFF00"/>
+              </a:highlight>
+              <a:latin typeface="Aptos"/>
+            </a:endParaRPr>
+          </a:p>
+          <a:p>
+            <a:pPr algn="ctr">
+              <a:defRPr sz="1450"/>
+            </a:pPr>
+            <a:r>
               <a:rPr sz="1450" dirty="0">
                 <a:solidFill>
                   <a:srgbClr val="172B4D"/>
                 </a:solidFill>
                 <a:latin typeface="Aptos"/>
               </a:rPr>
-              <a:t>Why it works: language has statistical structure. Context patterns -&gt; geometric relationships. Foundation for Word2Vec, GloVe, BERT, GPT, and LLMs.</a:t>
+              <a:t>Foundation for Word2Vec, GloVe, BERT, GPT, and LLMs.</a:t>
             </a:r>
           </a:p>
         </p:txBody>
@@ -5094,21 +5153,24 @@
                 <a:solidFill>
                   <a:srgbClr val="172B4D"/>
                 </a:solidFill>
-                <a:latin typeface="Aptos"/>
-              </a:rPr>
-              <a:t>The word “Sales” </a:t>
-            </a:r>
-            <a:r>
-              <a:rPr lang="en-US" sz="1700" dirty="0">
-                <a:solidFill>
-                  <a:srgbClr val="172B4D"/>
-                </a:solidFill>
                 <a:highlight>
                   <a:srgbClr val="FFFF00"/>
                 </a:highlight>
                 <a:latin typeface="Aptos"/>
               </a:rPr>
-              <a:t>now is a point in multidimensional space</a:t>
+              <a:t>The word “Sales” now is a </a:t>
+            </a:r>
+            <a:r>
+              <a:rPr lang="en-US" sz="1700" u="sng" dirty="0">
+                <a:solidFill>
+                  <a:srgbClr val="172B4D"/>
+                </a:solidFill>
+                <a:highlight>
+                  <a:srgbClr val="FFFF00"/>
+                </a:highlight>
+                <a:latin typeface="Aptos"/>
+              </a:rPr>
+              <a:t>point in multidimensional space</a:t>
             </a:r>
             <a:r>
               <a:rPr lang="en-US" sz="1700" dirty="0">
@@ -5594,15 +5656,27 @@
               </a:defRPr>
             </a:pPr>
             <a:r>
-              <a:rPr dirty="0"/>
+              <a:rPr dirty="0">
+                <a:highlight>
+                  <a:srgbClr val="FFFF00"/>
+                </a:highlight>
+              </a:rPr>
               <a:t>The integer </a:t>
             </a:r>
             <a:r>
-              <a:rPr lang="en-US" dirty="0"/>
+              <a:rPr lang="en-US" dirty="0">
+                <a:highlight>
+                  <a:srgbClr val="FFFF00"/>
+                </a:highlight>
+              </a:rPr>
               <a:t>3</a:t>
             </a:r>
             <a:r>
-              <a:rPr dirty="0"/>
+              <a:rPr dirty="0">
+                <a:highlight>
+                  <a:srgbClr val="FFFF00"/>
+                </a:highlight>
+              </a:rPr>
               <a:t> does not contain the meaning of “sales.” It points to a learned row in the embedding matrix.</a:t>
             </a:r>
           </a:p>
@@ -7764,7 +7838,7 @@
         </p:nvSpPr>
         <p:spPr>
           <a:xfrm>
-            <a:off x="1715063" y="5995403"/>
+            <a:off x="2685447" y="6151138"/>
             <a:ext cx="8861337" cy="615553"/>
           </a:xfrm>
           <a:prstGeom prst="rect">
@@ -7791,6 +7865,9 @@
                 <a:solidFill>
                   <a:srgbClr val="0B2F5B"/>
                 </a:solidFill>
+                <a:highlight>
+                  <a:srgbClr val="FFFF00"/>
+                </a:highlight>
                 <a:latin typeface="Aptos"/>
               </a:rPr>
               <a:t>Embeddings convert language into geometry. </a:t>
@@ -7799,6 +7876,9 @@
               <a:solidFill>
                 <a:srgbClr val="0B2F5B"/>
               </a:solidFill>
+              <a:highlight>
+                <a:srgbClr val="FFFF00"/>
+              </a:highlight>
               <a:latin typeface="Aptos"/>
             </a:endParaRPr>
           </a:p>
@@ -7816,6 +7896,9 @@
                 <a:solidFill>
                   <a:srgbClr val="0B2F5B"/>
                 </a:solidFill>
+                <a:highlight>
+                  <a:srgbClr val="FFFF00"/>
+                </a:highlight>
                 <a:latin typeface="Aptos"/>
               </a:rPr>
               <a:t>The Transformer manipulates that geometry to infer meaning and predict the next token.</a:t>
@@ -15329,7 +15412,7 @@
             </a:r>
           </a:p>
           <a:p>
-            <a:pPr>
+            <a:pPr algn="ctr">
               <a:spcAft>
                 <a:spcPts val="200"/>
               </a:spcAft>
@@ -15340,7 +15423,11 @@
               </a:defRPr>
             </a:pPr>
             <a:r>
-              <a:rPr dirty="0"/>
+              <a:rPr dirty="0">
+                <a:highlight>
+                  <a:srgbClr val="FFFF00"/>
+                </a:highlight>
+              </a:rPr>
               <a:t>The tokenizer does not define meaning. It maps known text pieces to integer IDs.</a:t>
             </a:r>
           </a:p>

--- a/pptx/Session_01_Tokens_v1.0.pptx
+++ b/pptx/Session_01_Tokens_v1.0.pptx
@@ -323,7 +323,7 @@
           <a:p>
             <a:fld id="{5BCAD085-E8A6-8845-BD4E-CB4CCA059FC4}" type="datetimeFigureOut">
               <a:rPr lang="en-US" smtClean="0"/>
-              <a:t>5/30/2026</a:t>
+              <a:t>6/1/2026</a:t>
             </a:fld>
             <a:endParaRPr lang="en-US"/>
           </a:p>
@@ -491,7 +491,7 @@
           <a:p>
             <a:fld id="{5BCAD085-E8A6-8845-BD4E-CB4CCA059FC4}" type="datetimeFigureOut">
               <a:rPr lang="en-US" smtClean="0"/>
-              <a:t>5/30/2026</a:t>
+              <a:t>6/1/2026</a:t>
             </a:fld>
             <a:endParaRPr lang="en-US"/>
           </a:p>
@@ -669,7 +669,7 @@
           <a:p>
             <a:fld id="{5BCAD085-E8A6-8845-BD4E-CB4CCA059FC4}" type="datetimeFigureOut">
               <a:rPr lang="en-US" smtClean="0"/>
-              <a:t>5/30/2026</a:t>
+              <a:t>6/1/2026</a:t>
             </a:fld>
             <a:endParaRPr lang="en-US"/>
           </a:p>
@@ -837,7 +837,7 @@
           <a:p>
             <a:fld id="{5BCAD085-E8A6-8845-BD4E-CB4CCA059FC4}" type="datetimeFigureOut">
               <a:rPr lang="en-US" smtClean="0"/>
-              <a:t>5/30/2026</a:t>
+              <a:t>6/1/2026</a:t>
             </a:fld>
             <a:endParaRPr lang="en-US"/>
           </a:p>
@@ -1082,7 +1082,7 @@
           <a:p>
             <a:fld id="{5BCAD085-E8A6-8845-BD4E-CB4CCA059FC4}" type="datetimeFigureOut">
               <a:rPr lang="en-US" smtClean="0"/>
-              <a:t>5/30/2026</a:t>
+              <a:t>6/1/2026</a:t>
             </a:fld>
             <a:endParaRPr lang="en-US"/>
           </a:p>
@@ -1367,7 +1367,7 @@
           <a:p>
             <a:fld id="{5BCAD085-E8A6-8845-BD4E-CB4CCA059FC4}" type="datetimeFigureOut">
               <a:rPr lang="en-US" smtClean="0"/>
-              <a:t>5/30/2026</a:t>
+              <a:t>6/1/2026</a:t>
             </a:fld>
             <a:endParaRPr lang="en-US"/>
           </a:p>
@@ -1786,7 +1786,7 @@
           <a:p>
             <a:fld id="{5BCAD085-E8A6-8845-BD4E-CB4CCA059FC4}" type="datetimeFigureOut">
               <a:rPr lang="en-US" smtClean="0"/>
-              <a:t>5/30/2026</a:t>
+              <a:t>6/1/2026</a:t>
             </a:fld>
             <a:endParaRPr lang="en-US"/>
           </a:p>
@@ -1903,7 +1903,7 @@
           <a:p>
             <a:fld id="{5BCAD085-E8A6-8845-BD4E-CB4CCA059FC4}" type="datetimeFigureOut">
               <a:rPr lang="en-US" smtClean="0"/>
-              <a:t>5/30/2026</a:t>
+              <a:t>6/1/2026</a:t>
             </a:fld>
             <a:endParaRPr lang="en-US"/>
           </a:p>
@@ -1998,7 +1998,7 @@
           <a:p>
             <a:fld id="{5BCAD085-E8A6-8845-BD4E-CB4CCA059FC4}" type="datetimeFigureOut">
               <a:rPr lang="en-US" smtClean="0"/>
-              <a:t>5/30/2026</a:t>
+              <a:t>6/1/2026</a:t>
             </a:fld>
             <a:endParaRPr lang="en-US"/>
           </a:p>
@@ -2273,7 +2273,7 @@
           <a:p>
             <a:fld id="{5BCAD085-E8A6-8845-BD4E-CB4CCA059FC4}" type="datetimeFigureOut">
               <a:rPr lang="en-US" smtClean="0"/>
-              <a:t>5/30/2026</a:t>
+              <a:t>6/1/2026</a:t>
             </a:fld>
             <a:endParaRPr lang="en-US"/>
           </a:p>
@@ -2525,7 +2525,7 @@
           <a:p>
             <a:fld id="{5BCAD085-E8A6-8845-BD4E-CB4CCA059FC4}" type="datetimeFigureOut">
               <a:rPr lang="en-US" smtClean="0"/>
-              <a:t>5/30/2026</a:t>
+              <a:t>6/1/2026</a:t>
             </a:fld>
             <a:endParaRPr lang="en-US"/>
           </a:p>
@@ -2736,7 +2736,7 @@
           <a:p>
             <a:fld id="{5BCAD085-E8A6-8845-BD4E-CB4CCA059FC4}" type="datetimeFigureOut">
               <a:rPr lang="en-US" smtClean="0"/>
-              <a:t>5/30/2026</a:t>
+              <a:t>6/1/2026</a:t>
             </a:fld>
             <a:endParaRPr lang="en-US"/>
           </a:p>
@@ -3222,55 +3222,34 @@
         </p:nvSpPr>
         <p:spPr>
           <a:xfrm>
-            <a:off x="3068801" y="5564188"/>
-            <a:ext cx="5486400" cy="1072002"/>
+            <a:off x="3068800" y="5367338"/>
+            <a:ext cx="5739639" cy="1268852"/>
           </a:xfrm>
         </p:spPr>
         <p:txBody>
           <a:bodyPr>
-            <a:normAutofit lnSpcReduction="10000"/>
+            <a:normAutofit fontScale="77500" lnSpcReduction="20000"/>
           </a:bodyPr>
           <a:lstStyle/>
           <a:p>
             <a:r>
-              <a:rPr lang="en-US" dirty="0"/>
+              <a:rPr lang="en-US" b="1" dirty="0"/>
               <a:t>AI Under the Hood</a:t>
             </a:r>
           </a:p>
           <a:p>
-            <a:r>
-              <a:rPr lang="en-US" dirty="0"/>
-              <a:t>Text </a:t>
-            </a:r>
-            <a:r>
-              <a:rPr lang="en-US" dirty="0">
-                <a:sym typeface="Wingdings" panose="05000000000000000000" pitchFamily="2" charset="2"/>
-              </a:rPr>
-              <a:t></a:t>
-            </a:r>
-            <a:r>
-              <a:rPr lang="en-US" dirty="0"/>
-              <a:t> Tokens </a:t>
-            </a:r>
-            <a:r>
-              <a:rPr lang="en-US" dirty="0">
-                <a:sym typeface="Wingdings" panose="05000000000000000000" pitchFamily="2" charset="2"/>
-              </a:rPr>
-              <a:t></a:t>
-            </a:r>
-            <a:r>
-              <a:rPr lang="en-US" dirty="0"/>
-              <a:t> Vectors </a:t>
-            </a:r>
-            <a:r>
-              <a:rPr lang="en-US" dirty="0">
-                <a:sym typeface="Wingdings" panose="05000000000000000000" pitchFamily="2" charset="2"/>
-              </a:rPr>
-              <a:t></a:t>
-            </a:r>
-            <a:r>
-              <a:rPr lang="en-US" dirty="0"/>
-              <a:t> Model Input</a:t>
+            <a:endParaRPr lang="en-US" b="1" dirty="0"/>
+          </a:p>
+          <a:p>
+            <a:r>
+              <a:rPr lang="en-US" b="1" dirty="0"/>
+              <a:t>Following a Business Question Through Tokens, Embeddings, Neural Networks, and Inference</a:t>
+            </a:r>
+          </a:p>
+          <a:p>
+            <a:r>
+              <a:rPr lang="en-US" b="1" dirty="0"/>
+              <a:t>What Really Happens When You Ask AI a Question?</a:t>
             </a:r>
           </a:p>
           <a:p>
@@ -11425,7 +11404,7 @@
         <p:spPr>
           <a:xfrm>
             <a:off x="1158240" y="5212080"/>
-            <a:ext cx="5943600" cy="365760"/>
+            <a:ext cx="5943600" cy="621792"/>
           </a:xfrm>
           <a:prstGeom prst="roundRect">
             <a:avLst/>
@@ -11467,7 +11446,7 @@
         <p:spPr>
           <a:xfrm>
             <a:off x="7437120" y="5212080"/>
-            <a:ext cx="3657600" cy="548640"/>
+            <a:ext cx="3657600" cy="621792"/>
           </a:xfrm>
           <a:prstGeom prst="roundRect">
             <a:avLst/>

--- a/pptx/Session_01_Tokens_v1.0.pptx
+++ b/pptx/Session_01_Tokens_v1.0.pptx
@@ -21,12 +21,10 @@
     <p:sldId id="262" r:id="rId15"/>
     <p:sldId id="276" r:id="rId16"/>
     <p:sldId id="277" r:id="rId17"/>
-    <p:sldId id="263" r:id="rId18"/>
-    <p:sldId id="270" r:id="rId19"/>
-    <p:sldId id="271" r:id="rId20"/>
-    <p:sldId id="272" r:id="rId21"/>
-    <p:sldId id="264" r:id="rId22"/>
-    <p:sldId id="265" r:id="rId23"/>
+    <p:sldId id="270" r:id="rId18"/>
+    <p:sldId id="271" r:id="rId19"/>
+    <p:sldId id="272" r:id="rId20"/>
+    <p:sldId id="265" r:id="rId21"/>
   </p:sldIdLst>
   <p:sldSz cx="12192000" cy="6858000"/>
   <p:notesSz cx="6858000" cy="9144000"/>
@@ -323,7 +321,7 @@
           <a:p>
             <a:fld id="{5BCAD085-E8A6-8845-BD4E-CB4CCA059FC4}" type="datetimeFigureOut">
               <a:rPr lang="en-US" smtClean="0"/>
-              <a:t>6/1/2026</a:t>
+              <a:t>6/2/2026</a:t>
             </a:fld>
             <a:endParaRPr lang="en-US"/>
           </a:p>
@@ -491,7 +489,7 @@
           <a:p>
             <a:fld id="{5BCAD085-E8A6-8845-BD4E-CB4CCA059FC4}" type="datetimeFigureOut">
               <a:rPr lang="en-US" smtClean="0"/>
-              <a:t>6/1/2026</a:t>
+              <a:t>6/2/2026</a:t>
             </a:fld>
             <a:endParaRPr lang="en-US"/>
           </a:p>
@@ -669,7 +667,7 @@
           <a:p>
             <a:fld id="{5BCAD085-E8A6-8845-BD4E-CB4CCA059FC4}" type="datetimeFigureOut">
               <a:rPr lang="en-US" smtClean="0"/>
-              <a:t>6/1/2026</a:t>
+              <a:t>6/2/2026</a:t>
             </a:fld>
             <a:endParaRPr lang="en-US"/>
           </a:p>
@@ -837,7 +835,7 @@
           <a:p>
             <a:fld id="{5BCAD085-E8A6-8845-BD4E-CB4CCA059FC4}" type="datetimeFigureOut">
               <a:rPr lang="en-US" smtClean="0"/>
-              <a:t>6/1/2026</a:t>
+              <a:t>6/2/2026</a:t>
             </a:fld>
             <a:endParaRPr lang="en-US"/>
           </a:p>
@@ -1082,7 +1080,7 @@
           <a:p>
             <a:fld id="{5BCAD085-E8A6-8845-BD4E-CB4CCA059FC4}" type="datetimeFigureOut">
               <a:rPr lang="en-US" smtClean="0"/>
-              <a:t>6/1/2026</a:t>
+              <a:t>6/2/2026</a:t>
             </a:fld>
             <a:endParaRPr lang="en-US"/>
           </a:p>
@@ -1367,7 +1365,7 @@
           <a:p>
             <a:fld id="{5BCAD085-E8A6-8845-BD4E-CB4CCA059FC4}" type="datetimeFigureOut">
               <a:rPr lang="en-US" smtClean="0"/>
-              <a:t>6/1/2026</a:t>
+              <a:t>6/2/2026</a:t>
             </a:fld>
             <a:endParaRPr lang="en-US"/>
           </a:p>
@@ -1786,7 +1784,7 @@
           <a:p>
             <a:fld id="{5BCAD085-E8A6-8845-BD4E-CB4CCA059FC4}" type="datetimeFigureOut">
               <a:rPr lang="en-US" smtClean="0"/>
-              <a:t>6/1/2026</a:t>
+              <a:t>6/2/2026</a:t>
             </a:fld>
             <a:endParaRPr lang="en-US"/>
           </a:p>
@@ -1903,7 +1901,7 @@
           <a:p>
             <a:fld id="{5BCAD085-E8A6-8845-BD4E-CB4CCA059FC4}" type="datetimeFigureOut">
               <a:rPr lang="en-US" smtClean="0"/>
-              <a:t>6/1/2026</a:t>
+              <a:t>6/2/2026</a:t>
             </a:fld>
             <a:endParaRPr lang="en-US"/>
           </a:p>
@@ -1998,7 +1996,7 @@
           <a:p>
             <a:fld id="{5BCAD085-E8A6-8845-BD4E-CB4CCA059FC4}" type="datetimeFigureOut">
               <a:rPr lang="en-US" smtClean="0"/>
-              <a:t>6/1/2026</a:t>
+              <a:t>6/2/2026</a:t>
             </a:fld>
             <a:endParaRPr lang="en-US"/>
           </a:p>
@@ -2273,7 +2271,7 @@
           <a:p>
             <a:fld id="{5BCAD085-E8A6-8845-BD4E-CB4CCA059FC4}" type="datetimeFigureOut">
               <a:rPr lang="en-US" smtClean="0"/>
-              <a:t>6/1/2026</a:t>
+              <a:t>6/2/2026</a:t>
             </a:fld>
             <a:endParaRPr lang="en-US"/>
           </a:p>
@@ -2525,7 +2523,7 @@
           <a:p>
             <a:fld id="{5BCAD085-E8A6-8845-BD4E-CB4CCA059FC4}" type="datetimeFigureOut">
               <a:rPr lang="en-US" smtClean="0"/>
-              <a:t>6/1/2026</a:t>
+              <a:t>6/2/2026</a:t>
             </a:fld>
             <a:endParaRPr lang="en-US"/>
           </a:p>
@@ -2736,7 +2734,7 @@
           <a:p>
             <a:fld id="{5BCAD085-E8A6-8845-BD4E-CB4CCA059FC4}" type="datetimeFigureOut">
               <a:rPr lang="en-US" smtClean="0"/>
-              <a:t>6/1/2026</a:t>
+              <a:t>6/2/2026</a:t>
             </a:fld>
             <a:endParaRPr lang="en-US"/>
           </a:p>
@@ -8560,19 +8558,32 @@
               <a:rPr lang="en-US" sz="1200" dirty="0">
                 <a:latin typeface="Aptos" panose="020B0004020202020204" pitchFamily="34" charset="0"/>
               </a:rPr>
-              <a:t>GPT-4:</a:t>
-            </a:r>
-            <a:br>
+              <a:t>GPT-4:  Hundreds of billions of parameters (estimated)</a:t>
+            </a:r>
+          </a:p>
+          <a:p>
+            <a:pPr algn="ctr"/>
+            <a:r>
               <a:rPr lang="en-US" sz="1200" dirty="0">
                 <a:latin typeface="Aptos" panose="020B0004020202020204" pitchFamily="34" charset="0"/>
               </a:rPr>
-            </a:br>
+              <a:t>Llama 3: Tens to hundreds of billions of parameters</a:t>
+            </a:r>
+          </a:p>
+          <a:p>
+            <a:pPr algn="ctr"/>
             <a:r>
               <a:rPr lang="en-US" sz="1200" dirty="0">
                 <a:latin typeface="Aptos" panose="020B0004020202020204" pitchFamily="34" charset="0"/>
               </a:rPr>
-              <a:t>Hundreds of billions of parameters (estimated)</a:t>
-            </a:r>
+              <a:t>Mistral 7B: Approximately 7 billion parameters</a:t>
+            </a:r>
+          </a:p>
+          <a:p>
+            <a:pPr algn="ctr"/>
+            <a:endParaRPr lang="en-US" sz="1200" dirty="0">
+              <a:latin typeface="Aptos" panose="020B0004020202020204" pitchFamily="34" charset="0"/>
+            </a:endParaRPr>
           </a:p>
           <a:p>
             <a:pPr algn="ctr"/>
@@ -8580,38 +8591,14 @@
               <a:rPr lang="en-US" sz="1200" dirty="0">
                 <a:latin typeface="Aptos" panose="020B0004020202020204" pitchFamily="34" charset="0"/>
               </a:rPr>
-              <a:t>Llama 3:</a:t>
-            </a:r>
-            <a:br>
+              <a:t>MAGPAI: 32 parameters. </a:t>
+            </a:r>
+            <a:r>
               <a:rPr lang="en-US" sz="1200" dirty="0">
                 <a:latin typeface="Aptos" panose="020B0004020202020204" pitchFamily="34" charset="0"/>
-              </a:rPr>
-            </a:br>
-            <a:r>
-              <a:rPr lang="en-US" sz="1200" dirty="0">
-                <a:latin typeface="Aptos" panose="020B0004020202020204" pitchFamily="34" charset="0"/>
-              </a:rPr>
-              <a:t>Tens to hundreds of billions of parameters</a:t>
-            </a:r>
-          </a:p>
-          <a:p>
-            <a:pPr algn="ctr"/>
-            <a:r>
-              <a:rPr lang="en-US" sz="1200" dirty="0">
-                <a:latin typeface="Aptos" panose="020B0004020202020204" pitchFamily="34" charset="0"/>
-              </a:rPr>
-              <a:t>Mistral 7B:</a:t>
-            </a:r>
-            <a:br>
-              <a:rPr lang="en-US" sz="1200" dirty="0">
-                <a:latin typeface="Aptos" panose="020B0004020202020204" pitchFamily="34" charset="0"/>
-              </a:rPr>
-            </a:br>
-            <a:r>
-              <a:rPr lang="en-US" sz="1200" dirty="0">
-                <a:latin typeface="Aptos" panose="020B0004020202020204" pitchFamily="34" charset="0"/>
-              </a:rPr>
-              <a:t>Approximately 7 billion parameters</a:t>
+                <a:sym typeface="Wingdings" panose="05000000000000000000" pitchFamily="2" charset="2"/>
+              </a:rPr>
+              <a:t></a:t>
             </a:r>
           </a:p>
           <a:p>
@@ -8683,84 +8670,86 @@
       </p:grpSpPr>
       <p:sp>
         <p:nvSpPr>
-          <p:cNvPr id="2" name="TextBox 1"/>
-          <p:cNvSpPr txBox="1"/>
-          <p:nvPr/>
-        </p:nvSpPr>
-        <p:spPr>
-          <a:xfrm>
-            <a:off x="502920" y="320040"/>
-            <a:ext cx="11247120" cy="548640"/>
+          <p:cNvPr id="2" name="Title"/>
+          <p:cNvSpPr/>
+          <p:nvPr/>
+        </p:nvSpPr>
+        <p:spPr>
+          <a:xfrm>
+            <a:off x="640080" y="365760"/>
+            <a:ext cx="10911840" cy="548640"/>
           </a:xfrm>
           <a:prstGeom prst="rect">
             <a:avLst/>
           </a:prstGeom>
           <a:noFill/>
-        </p:spPr>
-        <p:txBody>
-          <a:bodyPr wrap="none">
-            <a:spAutoFit/>
-          </a:bodyPr>
-          <a:lstStyle/>
-          <a:p>
-            <a:pPr>
-              <a:defRPr sz="3000" b="1">
+          <a:ln/>
+        </p:spPr>
+        <p:txBody>
+          <a:bodyPr lIns="0" tIns="0" rIns="0" bIns="0" rtlCol="0" anchor="t"/>
+          <a:lstStyle/>
+          <a:p>
+            <a:pPr algn="l">
+              <a:defRPr sz="3000"/>
+            </a:pPr>
+            <a:r>
+              <a:rPr sz="3000" b="1" dirty="0">
                 <a:solidFill>
                   <a:srgbClr val="0B2F5B"/>
                 </a:solidFill>
-              </a:defRPr>
-            </a:pPr>
-            <a:r>
-              <a:t>Linear Algebra View</a:t>
-            </a:r>
-          </a:p>
-        </p:txBody>
-      </p:sp>
-      <p:sp>
-        <p:nvSpPr>
-          <p:cNvPr id="3" name="TextBox 2"/>
-          <p:cNvSpPr txBox="1"/>
-          <p:nvPr/>
-        </p:nvSpPr>
-        <p:spPr>
-          <a:xfrm>
-            <a:off x="530352" y="868680"/>
-            <a:ext cx="10972800" cy="365760"/>
+                <a:latin typeface="Aptos"/>
+              </a:rPr>
+              <a:t>What Is a Tensor?</a:t>
+            </a:r>
+          </a:p>
+        </p:txBody>
+      </p:sp>
+      <p:sp>
+        <p:nvSpPr>
+          <p:cNvPr id="3" name="Subtitle"/>
+          <p:cNvSpPr/>
+          <p:nvPr/>
+        </p:nvSpPr>
+        <p:spPr>
+          <a:xfrm>
+            <a:off x="640080" y="868680"/>
+            <a:ext cx="10911840" cy="365760"/>
           </a:xfrm>
           <a:prstGeom prst="rect">
             <a:avLst/>
           </a:prstGeom>
           <a:noFill/>
-        </p:spPr>
-        <p:txBody>
-          <a:bodyPr wrap="none">
-            <a:spAutoFit/>
-          </a:bodyPr>
-          <a:lstStyle/>
-          <a:p>
-            <a:pPr>
-              <a:defRPr sz="1600">
-                <a:solidFill>
-                  <a:srgbClr val="52616B"/>
-                </a:solidFill>
-              </a:defRPr>
-            </a:pPr>
-            <a:r>
-              <a:t>Embedding lookup is equivalent to one-hot matrix multiplication</a:t>
-            </a:r>
-          </a:p>
-        </p:txBody>
-      </p:sp>
-      <p:sp>
-        <p:nvSpPr>
-          <p:cNvPr id="4" name="Rounded Rectangle 3"/>
+          <a:ln/>
+        </p:spPr>
+        <p:txBody>
+          <a:bodyPr lIns="0" tIns="0" rIns="0" bIns="0" rtlCol="0" anchor="t"/>
+          <a:lstStyle/>
+          <a:p>
+            <a:pPr algn="l">
+              <a:defRPr sz="1600"/>
+            </a:pPr>
+            <a:r>
+              <a:rPr sz="1600" dirty="0">
+                <a:solidFill>
+                  <a:srgbClr val="5E6C84"/>
+                </a:solidFill>
+                <a:latin typeface="Aptos"/>
+              </a:rPr>
+              <a:t>The NN input is a stored grid of token vectors</a:t>
+            </a:r>
+          </a:p>
+        </p:txBody>
+      </p:sp>
+      <p:sp>
+        <p:nvSpPr>
+          <p:cNvPr id="4" name="Vector"/>
           <p:cNvSpPr/>
           <p:nvPr/>
         </p:nvSpPr>
         <p:spPr>
           <a:xfrm>
-            <a:off x="822960" y="1234440"/>
-            <a:ext cx="10607040" cy="1920240"/>
+            <a:off x="822960" y="1371600"/>
+            <a:ext cx="2926080" cy="1554480"/>
           </a:xfrm>
           <a:prstGeom prst="roundRect">
             <a:avLst/>
@@ -8768,125 +8757,385 @@
           <a:solidFill>
             <a:srgbClr val="F5F8FC"/>
           </a:solidFill>
-          <a:ln>
+          <a:ln w="12700">
             <a:solidFill>
               <a:srgbClr val="BED2E6"/>
             </a:solidFill>
           </a:ln>
         </p:spPr>
-        <p:style>
-          <a:lnRef idx="1">
-            <a:schemeClr val="accent1"/>
-          </a:lnRef>
-          <a:fillRef idx="3">
-            <a:schemeClr val="accent1"/>
-          </a:fillRef>
-          <a:effectRef idx="2">
-            <a:schemeClr val="accent1"/>
-          </a:effectRef>
-          <a:fontRef idx="minor">
-            <a:schemeClr val="lt1"/>
-          </a:fontRef>
-        </p:style>
-        <p:txBody>
-          <a:bodyPr lIns="182880" tIns="109728" rIns="182880" rtlCol="0" anchor="ctr"/>
-          <a:lstStyle/>
-          <a:p>
-            <a:pPr algn="ctr">
-              <a:defRPr sz="2600">
+        <p:txBody>
+          <a:bodyPr lIns="137160" tIns="137160" rIns="137160" bIns="137160" rtlCol="0" anchor="t"/>
+          <a:lstStyle/>
+          <a:p>
+            <a:pPr algn="l">
+              <a:defRPr sz="1700"/>
+            </a:pPr>
+            <a:r>
+              <a:rPr sz="1700" b="1" dirty="0">
+                <a:solidFill>
+                  <a:srgbClr val="0B2F5B"/>
+                </a:solidFill>
+                <a:latin typeface="Aptos"/>
+              </a:rPr>
+              <a:t>Vector</a:t>
+            </a:r>
+          </a:p>
+          <a:p>
+            <a:pPr algn="l">
+              <a:defRPr sz="1450"/>
+            </a:pPr>
+            <a:r>
+              <a:rPr sz="1450" dirty="0">
                 <a:solidFill>
                   <a:srgbClr val="172B4D"/>
                 </a:solidFill>
                 <a:latin typeface="Consolas"/>
-              </a:defRPr>
-            </a:pPr>
-            <a:r>
-              <a:t>[0, 0, 0, 1, 0, 0, 0, 0] x E</a:t>
-            </a:r>
-            <a:br/>
-            <a:r>
-              <a:t>=</a:t>
-            </a:r>
-            <a:br/>
-            <a:r>
-              <a:t>[-0.62, 0.18, 0.45, -0.09]</a:t>
-            </a:r>
-          </a:p>
-        </p:txBody>
-      </p:sp>
-      <p:sp>
-        <p:nvSpPr>
-          <p:cNvPr id="5" name="Rounded Rectangle 4"/>
+              </a:rPr>
+              <a:t>1-D list</a:t>
+            </a:r>
+          </a:p>
+          <a:p>
+            <a:pPr algn="l">
+              <a:defRPr sz="1450"/>
+            </a:pPr>
+            <a:r>
+              <a:rPr sz="1450" dirty="0">
+                <a:solidFill>
+                  <a:srgbClr val="172B4D"/>
+                </a:solidFill>
+                <a:latin typeface="Consolas"/>
+              </a:rPr>
+              <a:t>[0.12, -0.08, 0.44]</a:t>
+            </a:r>
+          </a:p>
+        </p:txBody>
+      </p:sp>
+      <p:sp>
+        <p:nvSpPr>
+          <p:cNvPr id="5" name="Matrix"/>
           <p:cNvSpPr/>
           <p:nvPr/>
         </p:nvSpPr>
         <p:spPr>
           <a:xfrm>
-            <a:off x="914400" y="3749039"/>
-            <a:ext cx="10424160" cy="1188720"/>
+            <a:off x="4480560" y="1371600"/>
+            <a:ext cx="2926080" cy="1554480"/>
           </a:xfrm>
           <a:prstGeom prst="roundRect">
             <a:avLst/>
           </a:prstGeom>
           <a:solidFill>
-            <a:srgbClr val="EAF3FF"/>
+            <a:srgbClr val="F5F8FC"/>
           </a:solidFill>
-          <a:ln w="19050">
+          <a:ln w="12700">
+            <a:solidFill>
+              <a:srgbClr val="BED2E6"/>
+            </a:solidFill>
+          </a:ln>
+        </p:spPr>
+        <p:txBody>
+          <a:bodyPr lIns="137160" tIns="137160" rIns="137160" bIns="137160" rtlCol="0" anchor="t"/>
+          <a:lstStyle/>
+          <a:p>
+            <a:pPr algn="l">
+              <a:defRPr sz="1700"/>
+            </a:pPr>
+            <a:r>
+              <a:rPr sz="1700" b="1" dirty="0">
+                <a:solidFill>
+                  <a:srgbClr val="0B2F5B"/>
+                </a:solidFill>
+                <a:latin typeface="Aptos"/>
+              </a:rPr>
+              <a:t>Matrix</a:t>
+            </a:r>
+          </a:p>
+          <a:p>
+            <a:pPr algn="l">
+              <a:defRPr sz="1450"/>
+            </a:pPr>
+            <a:r>
+              <a:rPr sz="1450" dirty="0">
+                <a:solidFill>
+                  <a:srgbClr val="172B4D"/>
+                </a:solidFill>
+                <a:latin typeface="Consolas"/>
+              </a:rPr>
+              <a:t>2-D table</a:t>
+            </a:r>
+          </a:p>
+          <a:p>
+            <a:pPr algn="l">
+              <a:defRPr sz="1450"/>
+            </a:pPr>
+            <a:r>
+              <a:rPr sz="1450" dirty="0">
+                <a:solidFill>
+                  <a:srgbClr val="172B4D"/>
+                </a:solidFill>
+                <a:latin typeface="Consolas"/>
+              </a:rPr>
+              <a:t>rows x columns</a:t>
+            </a:r>
+          </a:p>
+        </p:txBody>
+      </p:sp>
+      <p:sp>
+        <p:nvSpPr>
+          <p:cNvPr id="6" name="Tensor"/>
+          <p:cNvSpPr/>
+          <p:nvPr/>
+        </p:nvSpPr>
+        <p:spPr>
+          <a:xfrm>
+            <a:off x="8138160" y="1371600"/>
+            <a:ext cx="2926080" cy="1554480"/>
+          </a:xfrm>
+          <a:prstGeom prst="roundRect">
+            <a:avLst/>
+          </a:prstGeom>
+          <a:solidFill>
+            <a:srgbClr val="F5F8FC"/>
+          </a:solidFill>
+          <a:ln w="12700">
+            <a:solidFill>
+              <a:srgbClr val="BED2E6"/>
+            </a:solidFill>
+          </a:ln>
+        </p:spPr>
+        <p:txBody>
+          <a:bodyPr lIns="137160" tIns="137160" rIns="137160" bIns="137160" rtlCol="0" anchor="t"/>
+          <a:lstStyle/>
+          <a:p>
+            <a:pPr algn="l">
+              <a:defRPr sz="1700"/>
+            </a:pPr>
+            <a:r>
+              <a:rPr sz="1700" b="1" dirty="0">
+                <a:solidFill>
+                  <a:srgbClr val="0B2F5B"/>
+                </a:solidFill>
+                <a:latin typeface="Aptos"/>
+              </a:rPr>
+              <a:t>Tensor</a:t>
+            </a:r>
+          </a:p>
+          <a:p>
+            <a:pPr algn="l">
+              <a:defRPr sz="1450"/>
+            </a:pPr>
+            <a:r>
+              <a:rPr sz="1450" dirty="0">
+                <a:solidFill>
+                  <a:srgbClr val="172B4D"/>
+                </a:solidFill>
+                <a:latin typeface="Consolas"/>
+              </a:rPr>
+              <a:t>General numeric container</a:t>
+            </a:r>
+          </a:p>
+          <a:p>
+            <a:pPr algn="l">
+              <a:defRPr sz="1450"/>
+            </a:pPr>
+            <a:r>
+              <a:rPr sz="1450" dirty="0">
+                <a:solidFill>
+                  <a:srgbClr val="172B4D"/>
+                </a:solidFill>
+                <a:latin typeface="Consolas"/>
+              </a:rPr>
+              <a:t>with shape metadata</a:t>
+            </a:r>
+          </a:p>
+        </p:txBody>
+      </p:sp>
+      <p:sp>
+        <p:nvSpPr>
+          <p:cNvPr id="7" name="Prompt Shape"/>
+          <p:cNvSpPr/>
+          <p:nvPr/>
+        </p:nvSpPr>
+        <p:spPr>
+          <a:xfrm>
+            <a:off x="1097280" y="3383280"/>
+            <a:ext cx="4572000" cy="1371600"/>
+          </a:xfrm>
+          <a:prstGeom prst="roundRect">
+            <a:avLst/>
+          </a:prstGeom>
+          <a:solidFill>
+            <a:srgbClr val="FFFFFF"/>
+          </a:solidFill>
+          <a:ln w="12700">
+            <a:solidFill>
+              <a:srgbClr val="BED2E6"/>
+            </a:solidFill>
+          </a:ln>
+        </p:spPr>
+        <p:txBody>
+          <a:bodyPr lIns="137160" tIns="137160" rIns="137160" bIns="137160" rtlCol="0" anchor="t"/>
+          <a:lstStyle/>
+          <a:p>
+            <a:pPr algn="l">
+              <a:defRPr sz="1700"/>
+            </a:pPr>
+            <a:r>
+              <a:rPr sz="1700" b="1" dirty="0">
+                <a:solidFill>
+                  <a:srgbClr val="0B2F5B"/>
+                </a:solidFill>
+                <a:latin typeface="Aptos"/>
+              </a:rPr>
+              <a:t>For this prompt</a:t>
+            </a:r>
+          </a:p>
+          <a:p>
+            <a:pPr algn="l">
+              <a:defRPr sz="1450"/>
+            </a:pPr>
+            <a:r>
+              <a:rPr sz="1450" dirty="0">
+                <a:solidFill>
+                  <a:srgbClr val="172B4D"/>
+                </a:solidFill>
+                <a:latin typeface="Consolas"/>
+              </a:rPr>
+              <a:t>7 tokens x 4 numbers per vector</a:t>
+            </a:r>
+          </a:p>
+          <a:p>
+            <a:pPr algn="l">
+              <a:defRPr sz="1450"/>
+            </a:pPr>
+            <a:r>
+              <a:rPr sz="1450" dirty="0">
+                <a:solidFill>
+                  <a:srgbClr val="172B4D"/>
+                </a:solidFill>
+                <a:latin typeface="Consolas"/>
+              </a:rPr>
+              <a:t>shape = [7, 4]</a:t>
+            </a:r>
+          </a:p>
+        </p:txBody>
+      </p:sp>
+      <p:sp>
+        <p:nvSpPr>
+          <p:cNvPr id="8" name="Activation Tensor"/>
+          <p:cNvSpPr/>
+          <p:nvPr/>
+        </p:nvSpPr>
+        <p:spPr>
+          <a:xfrm>
+            <a:off x="6217920" y="3383280"/>
+            <a:ext cx="4572000" cy="1371600"/>
+          </a:xfrm>
+          <a:prstGeom prst="roundRect">
+            <a:avLst/>
+          </a:prstGeom>
+          <a:solidFill>
+            <a:srgbClr val="FFFFFF"/>
+          </a:solidFill>
+          <a:ln w="12700">
+            <a:solidFill>
+              <a:srgbClr val="BED2E6"/>
+            </a:solidFill>
+          </a:ln>
+        </p:spPr>
+        <p:txBody>
+          <a:bodyPr lIns="137160" tIns="137160" rIns="137160" bIns="137160" rtlCol="0" anchor="t"/>
+          <a:lstStyle/>
+          <a:p>
+            <a:pPr algn="l">
+              <a:defRPr sz="1700"/>
+            </a:pPr>
+            <a:r>
+              <a:rPr sz="1700" b="1" dirty="0">
+                <a:solidFill>
+                  <a:srgbClr val="0B2F5B"/>
+                </a:solidFill>
+                <a:latin typeface="Aptos"/>
+              </a:rPr>
+              <a:t>How the NN sees it</a:t>
+            </a:r>
+          </a:p>
+          <a:p>
+            <a:pPr algn="l">
+              <a:defRPr sz="1450"/>
+            </a:pPr>
+            <a:r>
+              <a:rPr sz="1450" dirty="0">
+                <a:solidFill>
+                  <a:srgbClr val="172B4D"/>
+                </a:solidFill>
+                <a:latin typeface="Aptos"/>
+              </a:rPr>
+              <a:t>The framework stores the token-vector sequence as an activation tensor before the first neural-network layer.</a:t>
+            </a:r>
+          </a:p>
+        </p:txBody>
+      </p:sp>
+      <p:sp>
+        <p:nvSpPr>
+          <p:cNvPr id="9" name="Key takeaway"/>
+          <p:cNvSpPr/>
+          <p:nvPr/>
+        </p:nvSpPr>
+        <p:spPr>
+          <a:xfrm>
+            <a:off x="1097280" y="5212080"/>
+            <a:ext cx="9966960" cy="731520"/>
+          </a:xfrm>
+          <a:prstGeom prst="roundRect">
+            <a:avLst/>
+          </a:prstGeom>
+          <a:solidFill>
+            <a:srgbClr val="FFFFFF"/>
+          </a:solidFill>
+          <a:ln w="12700">
             <a:solidFill>
               <a:srgbClr val="0B5CAD"/>
             </a:solidFill>
           </a:ln>
         </p:spPr>
-        <p:style>
-          <a:lnRef idx="1">
-            <a:schemeClr val="accent1"/>
-          </a:lnRef>
-          <a:fillRef idx="3">
-            <a:schemeClr val="accent1"/>
-          </a:fillRef>
-          <a:effectRef idx="2">
-            <a:schemeClr val="accent1"/>
-          </a:effectRef>
-          <a:fontRef idx="minor">
-            <a:schemeClr val="lt1"/>
-          </a:fontRef>
-        </p:style>
-        <p:txBody>
-          <a:bodyPr lIns="137160" tIns="91440" rIns="137160" rtlCol="0" anchor="ctr"/>
+        <p:txBody>
+          <a:bodyPr lIns="91440" tIns="91440" rIns="91440" bIns="91440" rtlCol="0" anchor="ctr"/>
           <a:lstStyle/>
           <a:p>
             <a:pPr algn="ctr">
-              <a:defRPr sz="1900" b="1">
+              <a:defRPr sz="1800"/>
+            </a:pPr>
+            <a:r>
+              <a:rPr sz="1800" b="1" dirty="0">
                 <a:solidFill>
                   <a:srgbClr val="0B2F5B"/>
                 </a:solidFill>
-              </a:defRPr>
-            </a:pPr>
-            <a:r>
-              <a:t>Runtime optimization</a:t>
-            </a:r>
-          </a:p>
-          <a:p>
-            <a:pPr>
-              <a:spcAft>
-                <a:spcPts val="200"/>
-              </a:spcAft>
-              <a:defRPr sz="1800">
+                <a:latin typeface="Aptos"/>
+              </a:rPr>
+              <a:t>Key takeaway</a:t>
+            </a:r>
+          </a:p>
+          <a:p>
+            <a:pPr algn="ctr">
+              <a:defRPr sz="1600"/>
+            </a:pPr>
+            <a:r>
+              <a:rPr sz="1600" dirty="0">
                 <a:solidFill>
                   <a:srgbClr val="172B4D"/>
                 </a:solidFill>
-              </a:defRPr>
-            </a:pPr>
-            <a:r>
-              <a:t>In real code, the framework usually skips the one-hot vector and directly retrieves the row. It is faster and memory-efficient.</a:t>
-            </a:r>
-          </a:p>
-        </p:txBody>
-      </p:sp>
-      <p:sp>
-        <p:nvSpPr>
-          <p:cNvPr id="6" name="TextBox 5"/>
-          <p:cNvSpPr txBox="1"/>
+                <a:latin typeface="Aptos"/>
+              </a:rPr>
+              <a:t>A tensor is the in-memory numeric object that carries vectors into neural-network computation.</a:t>
+            </a:r>
+          </a:p>
+        </p:txBody>
+      </p:sp>
+      <p:sp>
+        <p:nvSpPr>
+          <p:cNvPr id="90" name="Footer"/>
+          <p:cNvSpPr/>
           <p:nvPr/>
         </p:nvSpPr>
         <p:spPr>
@@ -8898,22 +9147,23 @@
             <a:avLst/>
           </a:prstGeom>
           <a:noFill/>
-        </p:spPr>
-        <p:txBody>
-          <a:bodyPr wrap="none">
-            <a:spAutoFit/>
-          </a:bodyPr>
-          <a:lstStyle/>
-          <a:p>
-            <a:pPr>
-              <a:defRPr sz="900">
-                <a:solidFill>
-                  <a:srgbClr val="52616B"/>
-                </a:solidFill>
-              </a:defRPr>
-            </a:pPr>
-            <a:r>
-              <a:t>AI Under the hood | Slide 17</a:t>
+          <a:ln/>
+        </p:spPr>
+        <p:txBody>
+          <a:bodyPr lIns="0" tIns="0" rIns="0" bIns="0" rtlCol="0" anchor="t"/>
+          <a:lstStyle/>
+          <a:p>
+            <a:pPr algn="r">
+              <a:defRPr sz="850"/>
+            </a:pPr>
+            <a:r>
+              <a:rPr sz="850" dirty="0">
+                <a:solidFill>
+                  <a:srgbClr val="6B778C"/>
+                </a:solidFill>
+                <a:latin typeface="Aptos"/>
+              </a:rPr>
+              <a:t>AI Under the hood | Slide 18</a:t>
             </a:r>
           </a:p>
         </p:txBody>
@@ -8974,7 +9224,7 @@
                 </a:solidFill>
                 <a:latin typeface="Aptos"/>
               </a:rPr>
-              <a:t>What Is a Tensor?</a:t>
+              <a:t>Prompt Stored as an Input Tensor</a:t>
             </a:r>
           </a:p>
         </p:txBody>
@@ -9010,23 +9260,444 @@
                 </a:solidFill>
                 <a:latin typeface="Aptos"/>
               </a:rPr>
-              <a:t>The NN input is a stored grid of token vectors</a:t>
-            </a:r>
-          </a:p>
-        </p:txBody>
-      </p:sp>
-      <p:sp>
-        <p:nvSpPr>
-          <p:cNvPr id="4" name="Vector"/>
+              <a:t>The original prompt becomes a 7 x 4 numeric grid before NN layers run</a:t>
+            </a:r>
+          </a:p>
+        </p:txBody>
+      </p:sp>
+      <p:sp>
+        <p:nvSpPr>
+          <p:cNvPr id="4" name="Prompt Text"/>
           <p:cNvSpPr/>
           <p:nvPr/>
         </p:nvSpPr>
         <p:spPr>
           <a:xfrm>
-            <a:off x="822960" y="1371600"/>
-            <a:ext cx="2926080" cy="1554480"/>
+            <a:off x="822960" y="1280160"/>
+            <a:ext cx="4754880" cy="548640"/>
           </a:xfrm>
           <a:prstGeom prst="roundRect">
+            <a:avLst/>
+          </a:prstGeom>
+          <a:solidFill>
+            <a:srgbClr val="EAF2FF"/>
+          </a:solidFill>
+          <a:ln w="12700">
+            <a:solidFill>
+              <a:srgbClr val="0B5CAD"/>
+            </a:solidFill>
+          </a:ln>
+        </p:spPr>
+        <p:txBody>
+          <a:bodyPr lIns="91440" tIns="91440" rIns="91440" bIns="91440" rtlCol="0" anchor="ctr"/>
+          <a:lstStyle/>
+          <a:p>
+            <a:pPr algn="ctr">
+              <a:defRPr sz="1900"/>
+            </a:pPr>
+            <a:r>
+              <a:rPr sz="1900" b="1" dirty="0">
+                <a:solidFill>
+                  <a:srgbClr val="0B2F5B"/>
+                </a:solidFill>
+                <a:latin typeface="Consolas"/>
+              </a:rPr>
+              <a:t>are MAG sales up in chicago?</a:t>
+            </a:r>
+          </a:p>
+        </p:txBody>
+      </p:sp>
+      <p:sp>
+        <p:nvSpPr>
+          <p:cNvPr id="5" name="Arrow 1"/>
+          <p:cNvSpPr/>
+          <p:nvPr/>
+        </p:nvSpPr>
+        <p:spPr>
+          <a:xfrm>
+            <a:off x="5760720" y="1397280"/>
+            <a:ext cx="731520" cy="365760"/>
+          </a:xfrm>
+          <a:prstGeom prst="rect">
+            <a:avLst/>
+          </a:prstGeom>
+          <a:noFill/>
+          <a:ln/>
+        </p:spPr>
+        <p:txBody>
+          <a:bodyPr lIns="0" tIns="0" rIns="0" bIns="0" rtlCol="0" anchor="ctr"/>
+          <a:lstStyle/>
+          <a:p>
+            <a:pPr algn="ctr">
+              <a:defRPr sz="2100"/>
+            </a:pPr>
+            <a:r>
+              <a:rPr lang="en-US" sz="2100" b="1" dirty="0">
+                <a:solidFill>
+                  <a:srgbClr val="0B5CAD"/>
+                </a:solidFill>
+                <a:latin typeface="Aptos"/>
+              </a:rPr>
+              <a:t>---</a:t>
+            </a:r>
+            <a:r>
+              <a:rPr sz="2100" b="1" dirty="0">
+                <a:solidFill>
+                  <a:srgbClr val="0B5CAD"/>
+                </a:solidFill>
+                <a:latin typeface="Aptos"/>
+              </a:rPr>
+              <a:t>-&gt;</a:t>
+            </a:r>
+          </a:p>
+        </p:txBody>
+      </p:sp>
+      <p:sp>
+        <p:nvSpPr>
+          <p:cNvPr id="6" name="NN Box"/>
+          <p:cNvSpPr/>
+          <p:nvPr/>
+        </p:nvSpPr>
+        <p:spPr>
+          <a:xfrm>
+            <a:off x="8398219" y="2404872"/>
+            <a:ext cx="1280160" cy="2377440"/>
+          </a:xfrm>
+          <a:prstGeom prst="roundRect">
+            <a:avLst/>
+          </a:prstGeom>
+          <a:solidFill>
+            <a:srgbClr val="0B5CAD"/>
+          </a:solidFill>
+          <a:ln w="12700">
+            <a:solidFill>
+              <a:srgbClr val="0B5CAD"/>
+            </a:solidFill>
+          </a:ln>
+        </p:spPr>
+        <p:txBody>
+          <a:bodyPr lIns="91440" tIns="91440" rIns="91440" bIns="91440" rtlCol="0" anchor="ctr"/>
+          <a:lstStyle/>
+          <a:p>
+            <a:pPr algn="ctr">
+              <a:defRPr sz="1700"/>
+            </a:pPr>
+            <a:r>
+              <a:rPr sz="1700" b="1" dirty="0">
+                <a:solidFill>
+                  <a:srgbClr val="FFFFFF"/>
+                </a:solidFill>
+                <a:latin typeface="Aptos"/>
+              </a:rPr>
+              <a:t>N</a:t>
+            </a:r>
+            <a:r>
+              <a:rPr lang="en-US" sz="1700" b="1" dirty="0">
+                <a:solidFill>
+                  <a:srgbClr val="FFFFFF"/>
+                </a:solidFill>
+                <a:latin typeface="Aptos"/>
+              </a:rPr>
+              <a:t>eural </a:t>
+            </a:r>
+            <a:r>
+              <a:rPr sz="1700" b="1" dirty="0">
+                <a:solidFill>
+                  <a:srgbClr val="FFFFFF"/>
+                </a:solidFill>
+                <a:latin typeface="Aptos"/>
+              </a:rPr>
+              <a:t>N</a:t>
+            </a:r>
+            <a:r>
+              <a:rPr lang="en-US" sz="1700" b="1" dirty="0">
+                <a:solidFill>
+                  <a:srgbClr val="FFFFFF"/>
+                </a:solidFill>
+                <a:latin typeface="Aptos"/>
+              </a:rPr>
+              <a:t>etwork</a:t>
+            </a:r>
+            <a:r>
+              <a:rPr sz="1700" b="1" dirty="0">
+                <a:solidFill>
+                  <a:srgbClr val="FFFFFF"/>
+                </a:solidFill>
+                <a:latin typeface="Aptos"/>
+              </a:rPr>
+              <a:t> layers
+start here</a:t>
+            </a:r>
+          </a:p>
+        </p:txBody>
+      </p:sp>
+      <p:sp>
+        <p:nvSpPr>
+          <p:cNvPr id="7" name="Arrow 2"/>
+          <p:cNvSpPr/>
+          <p:nvPr/>
+        </p:nvSpPr>
+        <p:spPr>
+          <a:xfrm>
+            <a:off x="7575259" y="3410712"/>
+            <a:ext cx="731520" cy="365760"/>
+          </a:xfrm>
+          <a:prstGeom prst="rect">
+            <a:avLst/>
+          </a:prstGeom>
+          <a:noFill/>
+          <a:ln/>
+        </p:spPr>
+        <p:txBody>
+          <a:bodyPr lIns="0" tIns="0" rIns="0" bIns="0" rtlCol="0" anchor="ctr"/>
+          <a:lstStyle/>
+          <a:p>
+            <a:pPr algn="ctr">
+              <a:defRPr sz="2100"/>
+            </a:pPr>
+            <a:r>
+              <a:rPr lang="en-US" sz="2100" b="1" dirty="0">
+                <a:solidFill>
+                  <a:srgbClr val="0B5CAD"/>
+                </a:solidFill>
+                <a:latin typeface="Aptos"/>
+              </a:rPr>
+              <a:t>----</a:t>
+            </a:r>
+            <a:r>
+              <a:rPr sz="2100" b="1" dirty="0">
+                <a:solidFill>
+                  <a:srgbClr val="0B5CAD"/>
+                </a:solidFill>
+                <a:latin typeface="Aptos"/>
+              </a:rPr>
+              <a:t>-&gt;</a:t>
+            </a:r>
+          </a:p>
+        </p:txBody>
+      </p:sp>
+      <p:sp>
+        <p:nvSpPr>
+          <p:cNvPr id="20" name="Cell 20"/>
+          <p:cNvSpPr/>
+          <p:nvPr/>
+        </p:nvSpPr>
+        <p:spPr>
+          <a:xfrm>
+            <a:off x="1158240" y="2194560"/>
+            <a:ext cx="1188720" cy="365760"/>
+          </a:xfrm>
+          <a:prstGeom prst="rect">
+            <a:avLst/>
+          </a:prstGeom>
+          <a:solidFill>
+            <a:srgbClr val="0B2F5B"/>
+          </a:solidFill>
+          <a:ln w="12700">
+            <a:solidFill>
+              <a:srgbClr val="D7E2EE"/>
+            </a:solidFill>
+          </a:ln>
+        </p:spPr>
+        <p:txBody>
+          <a:bodyPr lIns="27432" tIns="27432" rIns="27432" bIns="27432" rtlCol="0" anchor="ctr"/>
+          <a:lstStyle/>
+          <a:p>
+            <a:pPr algn="ctr">
+              <a:defRPr sz="1050"/>
+            </a:pPr>
+            <a:r>
+              <a:rPr sz="1050" b="1" dirty="0">
+                <a:solidFill>
+                  <a:srgbClr val="FFFFFF"/>
+                </a:solidFill>
+                <a:latin typeface="Consolas"/>
+              </a:rPr>
+              <a:t>token</a:t>
+            </a:r>
+          </a:p>
+        </p:txBody>
+      </p:sp>
+      <p:sp>
+        <p:nvSpPr>
+          <p:cNvPr id="21" name="Cell 21"/>
+          <p:cNvSpPr/>
+          <p:nvPr/>
+        </p:nvSpPr>
+        <p:spPr>
+          <a:xfrm>
+            <a:off x="2346960" y="2194560"/>
+            <a:ext cx="1188720" cy="365760"/>
+          </a:xfrm>
+          <a:prstGeom prst="rect">
+            <a:avLst/>
+          </a:prstGeom>
+          <a:solidFill>
+            <a:srgbClr val="0B2F5B"/>
+          </a:solidFill>
+          <a:ln w="12700">
+            <a:solidFill>
+              <a:srgbClr val="D7E2EE"/>
+            </a:solidFill>
+          </a:ln>
+        </p:spPr>
+        <p:txBody>
+          <a:bodyPr lIns="27432" tIns="27432" rIns="27432" bIns="27432" rtlCol="0" anchor="ctr"/>
+          <a:lstStyle/>
+          <a:p>
+            <a:pPr algn="ctr">
+              <a:defRPr sz="1050"/>
+            </a:pPr>
+            <a:r>
+              <a:rPr sz="1050" b="1" dirty="0">
+                <a:solidFill>
+                  <a:srgbClr val="FFFFFF"/>
+                </a:solidFill>
+                <a:latin typeface="Consolas"/>
+              </a:rPr>
+              <a:t>v1</a:t>
+            </a:r>
+          </a:p>
+        </p:txBody>
+      </p:sp>
+      <p:sp>
+        <p:nvSpPr>
+          <p:cNvPr id="22" name="Cell 22"/>
+          <p:cNvSpPr/>
+          <p:nvPr/>
+        </p:nvSpPr>
+        <p:spPr>
+          <a:xfrm>
+            <a:off x="3535680" y="2194560"/>
+            <a:ext cx="1188720" cy="365760"/>
+          </a:xfrm>
+          <a:prstGeom prst="rect">
+            <a:avLst/>
+          </a:prstGeom>
+          <a:solidFill>
+            <a:srgbClr val="0B2F5B"/>
+          </a:solidFill>
+          <a:ln w="12700">
+            <a:solidFill>
+              <a:srgbClr val="D7E2EE"/>
+            </a:solidFill>
+          </a:ln>
+        </p:spPr>
+        <p:txBody>
+          <a:bodyPr lIns="27432" tIns="27432" rIns="27432" bIns="27432" rtlCol="0" anchor="ctr"/>
+          <a:lstStyle/>
+          <a:p>
+            <a:pPr algn="ctr">
+              <a:defRPr sz="1050"/>
+            </a:pPr>
+            <a:r>
+              <a:rPr sz="1050" b="1" dirty="0">
+                <a:solidFill>
+                  <a:srgbClr val="FFFFFF"/>
+                </a:solidFill>
+                <a:latin typeface="Consolas"/>
+              </a:rPr>
+              <a:t>v2</a:t>
+            </a:r>
+          </a:p>
+        </p:txBody>
+      </p:sp>
+      <p:sp>
+        <p:nvSpPr>
+          <p:cNvPr id="23" name="Cell 23"/>
+          <p:cNvSpPr/>
+          <p:nvPr/>
+        </p:nvSpPr>
+        <p:spPr>
+          <a:xfrm>
+            <a:off x="4724400" y="2194560"/>
+            <a:ext cx="1188720" cy="365760"/>
+          </a:xfrm>
+          <a:prstGeom prst="rect">
+            <a:avLst/>
+          </a:prstGeom>
+          <a:solidFill>
+            <a:srgbClr val="0B2F5B"/>
+          </a:solidFill>
+          <a:ln w="12700">
+            <a:solidFill>
+              <a:srgbClr val="D7E2EE"/>
+            </a:solidFill>
+          </a:ln>
+        </p:spPr>
+        <p:txBody>
+          <a:bodyPr lIns="27432" tIns="27432" rIns="27432" bIns="27432" rtlCol="0" anchor="ctr"/>
+          <a:lstStyle/>
+          <a:p>
+            <a:pPr algn="ctr">
+              <a:defRPr sz="1050"/>
+            </a:pPr>
+            <a:r>
+              <a:rPr sz="1050" b="1" dirty="0">
+                <a:solidFill>
+                  <a:srgbClr val="FFFFFF"/>
+                </a:solidFill>
+                <a:latin typeface="Consolas"/>
+              </a:rPr>
+              <a:t>v3</a:t>
+            </a:r>
+          </a:p>
+        </p:txBody>
+      </p:sp>
+      <p:sp>
+        <p:nvSpPr>
+          <p:cNvPr id="24" name="Cell 24"/>
+          <p:cNvSpPr/>
+          <p:nvPr/>
+        </p:nvSpPr>
+        <p:spPr>
+          <a:xfrm>
+            <a:off x="5913120" y="2194560"/>
+            <a:ext cx="1188720" cy="365760"/>
+          </a:xfrm>
+          <a:prstGeom prst="rect">
+            <a:avLst/>
+          </a:prstGeom>
+          <a:solidFill>
+            <a:srgbClr val="0B2F5B"/>
+          </a:solidFill>
+          <a:ln w="12700">
+            <a:solidFill>
+              <a:srgbClr val="D7E2EE"/>
+            </a:solidFill>
+          </a:ln>
+        </p:spPr>
+        <p:txBody>
+          <a:bodyPr lIns="27432" tIns="27432" rIns="27432" bIns="27432" rtlCol="0" anchor="ctr"/>
+          <a:lstStyle/>
+          <a:p>
+            <a:pPr algn="ctr">
+              <a:defRPr sz="1050"/>
+            </a:pPr>
+            <a:r>
+              <a:rPr sz="1050" b="1" dirty="0">
+                <a:solidFill>
+                  <a:srgbClr val="FFFFFF"/>
+                </a:solidFill>
+                <a:latin typeface="Consolas"/>
+              </a:rPr>
+              <a:t>v4</a:t>
+            </a:r>
+          </a:p>
+        </p:txBody>
+      </p:sp>
+      <p:sp>
+        <p:nvSpPr>
+          <p:cNvPr id="25" name="Cell 25"/>
+          <p:cNvSpPr/>
+          <p:nvPr/>
+        </p:nvSpPr>
+        <p:spPr>
+          <a:xfrm>
+            <a:off x="1158240" y="2560320"/>
+            <a:ext cx="1188720" cy="365760"/>
+          </a:xfrm>
+          <a:prstGeom prst="rect">
             <a:avLst/>
           </a:prstGeom>
           <a:solidFill>
@@ -9034,69 +9705,41 @@
           </a:solidFill>
           <a:ln w="12700">
             <a:solidFill>
-              <a:srgbClr val="BED2E6"/>
+              <a:srgbClr val="D7E2EE"/>
             </a:solidFill>
           </a:ln>
         </p:spPr>
         <p:txBody>
-          <a:bodyPr lIns="137160" tIns="137160" rIns="137160" bIns="137160" rtlCol="0" anchor="t"/>
-          <a:lstStyle/>
-          <a:p>
-            <a:pPr algn="l">
-              <a:defRPr sz="1700"/>
-            </a:pPr>
-            <a:r>
-              <a:rPr sz="1700" b="1" dirty="0">
-                <a:solidFill>
-                  <a:srgbClr val="0B2F5B"/>
-                </a:solidFill>
-                <a:latin typeface="Aptos"/>
-              </a:rPr>
-              <a:t>Vector</a:t>
-            </a:r>
-          </a:p>
-          <a:p>
-            <a:pPr algn="l">
-              <a:defRPr sz="1450"/>
-            </a:pPr>
-            <a:r>
-              <a:rPr sz="1450" dirty="0">
+          <a:bodyPr lIns="27432" tIns="27432" rIns="27432" bIns="27432" rtlCol="0" anchor="ctr"/>
+          <a:lstStyle/>
+          <a:p>
+            <a:pPr algn="ctr">
+              <a:defRPr sz="980"/>
+            </a:pPr>
+            <a:r>
+              <a:rPr sz="980" b="1" dirty="0">
                 <a:solidFill>
                   <a:srgbClr val="172B4D"/>
                 </a:solidFill>
                 <a:latin typeface="Consolas"/>
               </a:rPr>
-              <a:t>1-D list</a:t>
-            </a:r>
-          </a:p>
-          <a:p>
-            <a:pPr algn="l">
-              <a:defRPr sz="1450"/>
-            </a:pPr>
-            <a:r>
-              <a:rPr sz="1450" dirty="0">
-                <a:solidFill>
-                  <a:srgbClr val="172B4D"/>
-                </a:solidFill>
-                <a:latin typeface="Consolas"/>
-              </a:rPr>
-              <a:t>[0.12, -0.08, 0.44]</a:t>
-            </a:r>
-          </a:p>
-        </p:txBody>
-      </p:sp>
-      <p:sp>
-        <p:nvSpPr>
-          <p:cNvPr id="5" name="Matrix"/>
+              <a:t>are</a:t>
+            </a:r>
+          </a:p>
+        </p:txBody>
+      </p:sp>
+      <p:sp>
+        <p:nvSpPr>
+          <p:cNvPr id="26" name="Cell 26"/>
           <p:cNvSpPr/>
           <p:nvPr/>
         </p:nvSpPr>
         <p:spPr>
           <a:xfrm>
-            <a:off x="4480560" y="1371600"/>
-            <a:ext cx="2926080" cy="1554480"/>
-          </a:xfrm>
-          <a:prstGeom prst="roundRect">
+            <a:off x="2346960" y="2560320"/>
+            <a:ext cx="1188720" cy="365760"/>
+          </a:xfrm>
+          <a:prstGeom prst="rect">
             <a:avLst/>
           </a:prstGeom>
           <a:solidFill>
@@ -9104,69 +9747,41 @@
           </a:solidFill>
           <a:ln w="12700">
             <a:solidFill>
-              <a:srgbClr val="BED2E6"/>
+              <a:srgbClr val="D7E2EE"/>
             </a:solidFill>
           </a:ln>
         </p:spPr>
         <p:txBody>
-          <a:bodyPr lIns="137160" tIns="137160" rIns="137160" bIns="137160" rtlCol="0" anchor="t"/>
-          <a:lstStyle/>
-          <a:p>
-            <a:pPr algn="l">
-              <a:defRPr sz="1700"/>
-            </a:pPr>
-            <a:r>
-              <a:rPr sz="1700" b="1" dirty="0">
-                <a:solidFill>
-                  <a:srgbClr val="0B2F5B"/>
-                </a:solidFill>
-                <a:latin typeface="Aptos"/>
-              </a:rPr>
-              <a:t>Matrix</a:t>
-            </a:r>
-          </a:p>
-          <a:p>
-            <a:pPr algn="l">
-              <a:defRPr sz="1450"/>
-            </a:pPr>
-            <a:r>
-              <a:rPr sz="1450" dirty="0">
+          <a:bodyPr lIns="27432" tIns="27432" rIns="27432" bIns="27432" rtlCol="0" anchor="ctr"/>
+          <a:lstStyle/>
+          <a:p>
+            <a:pPr algn="ctr">
+              <a:defRPr sz="980"/>
+            </a:pPr>
+            <a:r>
+              <a:rPr sz="980" dirty="0">
                 <a:solidFill>
                   <a:srgbClr val="172B4D"/>
                 </a:solidFill>
                 <a:latin typeface="Consolas"/>
               </a:rPr>
-              <a:t>2-D table</a:t>
-            </a:r>
-          </a:p>
-          <a:p>
-            <a:pPr algn="l">
-              <a:defRPr sz="1450"/>
-            </a:pPr>
-            <a:r>
-              <a:rPr sz="1450" dirty="0">
-                <a:solidFill>
-                  <a:srgbClr val="172B4D"/>
-                </a:solidFill>
-                <a:latin typeface="Consolas"/>
-              </a:rPr>
-              <a:t>rows x columns</a:t>
-            </a:r>
-          </a:p>
-        </p:txBody>
-      </p:sp>
-      <p:sp>
-        <p:nvSpPr>
-          <p:cNvPr id="6" name="Tensor"/>
+              <a:t>0.21</a:t>
+            </a:r>
+          </a:p>
+        </p:txBody>
+      </p:sp>
+      <p:sp>
+        <p:nvSpPr>
+          <p:cNvPr id="27" name="Cell 27"/>
           <p:cNvSpPr/>
           <p:nvPr/>
         </p:nvSpPr>
         <p:spPr>
           <a:xfrm>
-            <a:off x="8138160" y="1371600"/>
-            <a:ext cx="2926080" cy="1554480"/>
-          </a:xfrm>
-          <a:prstGeom prst="roundRect">
+            <a:off x="3535680" y="2560320"/>
+            <a:ext cx="1188720" cy="365760"/>
+          </a:xfrm>
+          <a:prstGeom prst="rect">
             <a:avLst/>
           </a:prstGeom>
           <a:solidFill>
@@ -9174,69 +9789,125 @@
           </a:solidFill>
           <a:ln w="12700">
             <a:solidFill>
-              <a:srgbClr val="BED2E6"/>
+              <a:srgbClr val="D7E2EE"/>
             </a:solidFill>
           </a:ln>
         </p:spPr>
         <p:txBody>
-          <a:bodyPr lIns="137160" tIns="137160" rIns="137160" bIns="137160" rtlCol="0" anchor="t"/>
-          <a:lstStyle/>
-          <a:p>
-            <a:pPr algn="l">
-              <a:defRPr sz="1700"/>
-            </a:pPr>
-            <a:r>
-              <a:rPr sz="1700" b="1" dirty="0">
-                <a:solidFill>
-                  <a:srgbClr val="0B2F5B"/>
-                </a:solidFill>
-                <a:latin typeface="Aptos"/>
-              </a:rPr>
-              <a:t>Tensor</a:t>
-            </a:r>
-          </a:p>
-          <a:p>
-            <a:pPr algn="l">
-              <a:defRPr sz="1450"/>
-            </a:pPr>
-            <a:r>
-              <a:rPr sz="1450" dirty="0">
+          <a:bodyPr lIns="27432" tIns="27432" rIns="27432" bIns="27432" rtlCol="0" anchor="ctr"/>
+          <a:lstStyle/>
+          <a:p>
+            <a:pPr algn="ctr">
+              <a:defRPr sz="980"/>
+            </a:pPr>
+            <a:r>
+              <a:rPr sz="980" dirty="0">
                 <a:solidFill>
                   <a:srgbClr val="172B4D"/>
                 </a:solidFill>
                 <a:latin typeface="Consolas"/>
               </a:rPr>
-              <a:t>General numeric container</a:t>
-            </a:r>
-          </a:p>
-          <a:p>
-            <a:pPr algn="l">
-              <a:defRPr sz="1450"/>
-            </a:pPr>
-            <a:r>
-              <a:rPr sz="1450" dirty="0">
+              <a:t>-0.44</a:t>
+            </a:r>
+          </a:p>
+        </p:txBody>
+      </p:sp>
+      <p:sp>
+        <p:nvSpPr>
+          <p:cNvPr id="28" name="Cell 28"/>
+          <p:cNvSpPr/>
+          <p:nvPr/>
+        </p:nvSpPr>
+        <p:spPr>
+          <a:xfrm>
+            <a:off x="4724400" y="2560320"/>
+            <a:ext cx="1188720" cy="365760"/>
+          </a:xfrm>
+          <a:prstGeom prst="rect">
+            <a:avLst/>
+          </a:prstGeom>
+          <a:solidFill>
+            <a:srgbClr val="F5F8FC"/>
+          </a:solidFill>
+          <a:ln w="12700">
+            <a:solidFill>
+              <a:srgbClr val="D7E2EE"/>
+            </a:solidFill>
+          </a:ln>
+        </p:spPr>
+        <p:txBody>
+          <a:bodyPr lIns="27432" tIns="27432" rIns="27432" bIns="27432" rtlCol="0" anchor="ctr"/>
+          <a:lstStyle/>
+          <a:p>
+            <a:pPr algn="ctr">
+              <a:defRPr sz="980"/>
+            </a:pPr>
+            <a:r>
+              <a:rPr sz="980" dirty="0">
                 <a:solidFill>
                   <a:srgbClr val="172B4D"/>
                 </a:solidFill>
                 <a:latin typeface="Consolas"/>
               </a:rPr>
-              <a:t>with shape metadata</a:t>
-            </a:r>
-          </a:p>
-        </p:txBody>
-      </p:sp>
-      <p:sp>
-        <p:nvSpPr>
-          <p:cNvPr id="7" name="Prompt Shape"/>
+              <a:t>0.78</a:t>
+            </a:r>
+          </a:p>
+        </p:txBody>
+      </p:sp>
+      <p:sp>
+        <p:nvSpPr>
+          <p:cNvPr id="29" name="Cell 29"/>
           <p:cNvSpPr/>
           <p:nvPr/>
         </p:nvSpPr>
         <p:spPr>
           <a:xfrm>
-            <a:off x="1097280" y="3383280"/>
-            <a:ext cx="4572000" cy="1371600"/>
-          </a:xfrm>
-          <a:prstGeom prst="roundRect">
+            <a:off x="5913120" y="2560320"/>
+            <a:ext cx="1188720" cy="365760"/>
+          </a:xfrm>
+          <a:prstGeom prst="rect">
+            <a:avLst/>
+          </a:prstGeom>
+          <a:solidFill>
+            <a:srgbClr val="F5F8FC"/>
+          </a:solidFill>
+          <a:ln w="12700">
+            <a:solidFill>
+              <a:srgbClr val="D7E2EE"/>
+            </a:solidFill>
+          </a:ln>
+        </p:spPr>
+        <p:txBody>
+          <a:bodyPr lIns="27432" tIns="27432" rIns="27432" bIns="27432" rtlCol="0" anchor="ctr"/>
+          <a:lstStyle/>
+          <a:p>
+            <a:pPr algn="ctr">
+              <a:defRPr sz="980"/>
+            </a:pPr>
+            <a:r>
+              <a:rPr sz="980" dirty="0">
+                <a:solidFill>
+                  <a:srgbClr val="172B4D"/>
+                </a:solidFill>
+                <a:latin typeface="Consolas"/>
+              </a:rPr>
+              <a:t>0.12</a:t>
+            </a:r>
+          </a:p>
+        </p:txBody>
+      </p:sp>
+      <p:sp>
+        <p:nvSpPr>
+          <p:cNvPr id="30" name="Cell 30"/>
+          <p:cNvSpPr/>
+          <p:nvPr/>
+        </p:nvSpPr>
+        <p:spPr>
+          <a:xfrm>
+            <a:off x="1158240" y="2926080"/>
+            <a:ext cx="1188720" cy="365760"/>
+          </a:xfrm>
+          <a:prstGeom prst="rect">
             <a:avLst/>
           </a:prstGeom>
           <a:solidFill>
@@ -9244,69 +9915,41 @@
           </a:solidFill>
           <a:ln w="12700">
             <a:solidFill>
-              <a:srgbClr val="BED2E6"/>
+              <a:srgbClr val="D7E2EE"/>
             </a:solidFill>
           </a:ln>
         </p:spPr>
         <p:txBody>
-          <a:bodyPr lIns="137160" tIns="137160" rIns="137160" bIns="137160" rtlCol="0" anchor="t"/>
-          <a:lstStyle/>
-          <a:p>
-            <a:pPr algn="l">
-              <a:defRPr sz="1700"/>
-            </a:pPr>
-            <a:r>
-              <a:rPr sz="1700" b="1" dirty="0">
-                <a:solidFill>
-                  <a:srgbClr val="0B2F5B"/>
-                </a:solidFill>
-                <a:latin typeface="Aptos"/>
-              </a:rPr>
-              <a:t>For this prompt</a:t>
-            </a:r>
-          </a:p>
-          <a:p>
-            <a:pPr algn="l">
-              <a:defRPr sz="1450"/>
-            </a:pPr>
-            <a:r>
-              <a:rPr sz="1450" dirty="0">
+          <a:bodyPr lIns="27432" tIns="27432" rIns="27432" bIns="27432" rtlCol="0" anchor="ctr"/>
+          <a:lstStyle/>
+          <a:p>
+            <a:pPr algn="ctr">
+              <a:defRPr sz="980"/>
+            </a:pPr>
+            <a:r>
+              <a:rPr sz="980" b="1" dirty="0">
                 <a:solidFill>
                   <a:srgbClr val="172B4D"/>
                 </a:solidFill>
                 <a:latin typeface="Consolas"/>
               </a:rPr>
-              <a:t>7 tokens x 4 numbers per vector</a:t>
-            </a:r>
-          </a:p>
-          <a:p>
-            <a:pPr algn="l">
-              <a:defRPr sz="1450"/>
-            </a:pPr>
-            <a:r>
-              <a:rPr sz="1450" dirty="0">
-                <a:solidFill>
-                  <a:srgbClr val="172B4D"/>
-                </a:solidFill>
-                <a:latin typeface="Consolas"/>
-              </a:rPr>
-              <a:t>shape = [7, 4]</a:t>
-            </a:r>
-          </a:p>
-        </p:txBody>
-      </p:sp>
-      <p:sp>
-        <p:nvSpPr>
-          <p:cNvPr id="8" name="Activation Tensor"/>
+              <a:t>MAG</a:t>
+            </a:r>
+          </a:p>
+        </p:txBody>
+      </p:sp>
+      <p:sp>
+        <p:nvSpPr>
+          <p:cNvPr id="31" name="Cell 31"/>
           <p:cNvSpPr/>
           <p:nvPr/>
         </p:nvSpPr>
         <p:spPr>
           <a:xfrm>
-            <a:off x="6217920" y="3383280"/>
-            <a:ext cx="4572000" cy="1371600"/>
-          </a:xfrm>
-          <a:prstGeom prst="roundRect">
+            <a:off x="2346960" y="2926080"/>
+            <a:ext cx="1188720" cy="365760"/>
+          </a:xfrm>
+          <a:prstGeom prst="rect">
             <a:avLst/>
           </a:prstGeom>
           <a:solidFill>
@@ -9314,53 +9957,1215 @@
           </a:solidFill>
           <a:ln w="12700">
             <a:solidFill>
-              <a:srgbClr val="BED2E6"/>
+              <a:srgbClr val="D7E2EE"/>
             </a:solidFill>
           </a:ln>
         </p:spPr>
         <p:txBody>
-          <a:bodyPr lIns="137160" tIns="137160" rIns="137160" bIns="137160" rtlCol="0" anchor="t"/>
-          <a:lstStyle/>
-          <a:p>
-            <a:pPr algn="l">
-              <a:defRPr sz="1700"/>
-            </a:pPr>
-            <a:r>
-              <a:rPr sz="1700" b="1" dirty="0">
-                <a:solidFill>
-                  <a:srgbClr val="0B2F5B"/>
-                </a:solidFill>
-                <a:latin typeface="Aptos"/>
-              </a:rPr>
-              <a:t>How the NN sees it</a:t>
-            </a:r>
-          </a:p>
-          <a:p>
-            <a:pPr algn="l">
-              <a:defRPr sz="1450"/>
-            </a:pPr>
-            <a:r>
-              <a:rPr sz="1450" dirty="0">
+          <a:bodyPr lIns="27432" tIns="27432" rIns="27432" bIns="27432" rtlCol="0" anchor="ctr"/>
+          <a:lstStyle/>
+          <a:p>
+            <a:pPr algn="ctr">
+              <a:defRPr sz="980"/>
+            </a:pPr>
+            <a:r>
+              <a:rPr sz="980" dirty="0">
                 <a:solidFill>
                   <a:srgbClr val="172B4D"/>
                 </a:solidFill>
-                <a:latin typeface="Aptos"/>
-              </a:rPr>
-              <a:t>The framework stores the token-vector sequence as an activation tensor before the first neural-network layer.</a:t>
-            </a:r>
-          </a:p>
-        </p:txBody>
-      </p:sp>
-      <p:sp>
-        <p:nvSpPr>
-          <p:cNvPr id="9" name="Key takeaway"/>
+                <a:latin typeface="Consolas"/>
+              </a:rPr>
+              <a:t>0.03</a:t>
+            </a:r>
+          </a:p>
+        </p:txBody>
+      </p:sp>
+      <p:sp>
+        <p:nvSpPr>
+          <p:cNvPr id="32" name="Cell 32"/>
           <p:cNvSpPr/>
           <p:nvPr/>
         </p:nvSpPr>
         <p:spPr>
           <a:xfrm>
-            <a:off x="1097280" y="5212080"/>
-            <a:ext cx="9966960" cy="731520"/>
+            <a:off x="3535680" y="2926080"/>
+            <a:ext cx="1188720" cy="365760"/>
+          </a:xfrm>
+          <a:prstGeom prst="rect">
+            <a:avLst/>
+          </a:prstGeom>
+          <a:solidFill>
+            <a:srgbClr val="FFFFFF"/>
+          </a:solidFill>
+          <a:ln w="12700">
+            <a:solidFill>
+              <a:srgbClr val="D7E2EE"/>
+            </a:solidFill>
+          </a:ln>
+        </p:spPr>
+        <p:txBody>
+          <a:bodyPr lIns="27432" tIns="27432" rIns="27432" bIns="27432" rtlCol="0" anchor="ctr"/>
+          <a:lstStyle/>
+          <a:p>
+            <a:pPr algn="ctr">
+              <a:defRPr sz="980"/>
+            </a:pPr>
+            <a:r>
+              <a:rPr sz="980" dirty="0">
+                <a:solidFill>
+                  <a:srgbClr val="172B4D"/>
+                </a:solidFill>
+                <a:latin typeface="Consolas"/>
+              </a:rPr>
+              <a:t>0.91</a:t>
+            </a:r>
+          </a:p>
+        </p:txBody>
+      </p:sp>
+      <p:sp>
+        <p:nvSpPr>
+          <p:cNvPr id="33" name="Cell 33"/>
+          <p:cNvSpPr/>
+          <p:nvPr/>
+        </p:nvSpPr>
+        <p:spPr>
+          <a:xfrm>
+            <a:off x="4724400" y="2926080"/>
+            <a:ext cx="1188720" cy="365760"/>
+          </a:xfrm>
+          <a:prstGeom prst="rect">
+            <a:avLst/>
+          </a:prstGeom>
+          <a:solidFill>
+            <a:srgbClr val="FFFFFF"/>
+          </a:solidFill>
+          <a:ln w="12700">
+            <a:solidFill>
+              <a:srgbClr val="D7E2EE"/>
+            </a:solidFill>
+          </a:ln>
+        </p:spPr>
+        <p:txBody>
+          <a:bodyPr lIns="27432" tIns="27432" rIns="27432" bIns="27432" rtlCol="0" anchor="ctr"/>
+          <a:lstStyle/>
+          <a:p>
+            <a:pPr algn="ctr">
+              <a:defRPr sz="980"/>
+            </a:pPr>
+            <a:r>
+              <a:rPr sz="980" dirty="0">
+                <a:solidFill>
+                  <a:srgbClr val="172B4D"/>
+                </a:solidFill>
+                <a:latin typeface="Consolas"/>
+              </a:rPr>
+              <a:t>-0.14</a:t>
+            </a:r>
+          </a:p>
+        </p:txBody>
+      </p:sp>
+      <p:sp>
+        <p:nvSpPr>
+          <p:cNvPr id="34" name="Cell 34"/>
+          <p:cNvSpPr/>
+          <p:nvPr/>
+        </p:nvSpPr>
+        <p:spPr>
+          <a:xfrm>
+            <a:off x="5913120" y="2926080"/>
+            <a:ext cx="1188720" cy="365760"/>
+          </a:xfrm>
+          <a:prstGeom prst="rect">
+            <a:avLst/>
+          </a:prstGeom>
+          <a:solidFill>
+            <a:srgbClr val="FFFFFF"/>
+          </a:solidFill>
+          <a:ln w="12700">
+            <a:solidFill>
+              <a:srgbClr val="D7E2EE"/>
+            </a:solidFill>
+          </a:ln>
+        </p:spPr>
+        <p:txBody>
+          <a:bodyPr lIns="27432" tIns="27432" rIns="27432" bIns="27432" rtlCol="0" anchor="ctr"/>
+          <a:lstStyle/>
+          <a:p>
+            <a:pPr algn="ctr">
+              <a:defRPr sz="980"/>
+            </a:pPr>
+            <a:r>
+              <a:rPr sz="980" dirty="0">
+                <a:solidFill>
+                  <a:srgbClr val="172B4D"/>
+                </a:solidFill>
+                <a:latin typeface="Consolas"/>
+              </a:rPr>
+              <a:t>0.36</a:t>
+            </a:r>
+          </a:p>
+        </p:txBody>
+      </p:sp>
+      <p:sp>
+        <p:nvSpPr>
+          <p:cNvPr id="35" name="Cell 35"/>
+          <p:cNvSpPr/>
+          <p:nvPr/>
+        </p:nvSpPr>
+        <p:spPr>
+          <a:xfrm>
+            <a:off x="1158240" y="3291840"/>
+            <a:ext cx="1188720" cy="365760"/>
+          </a:xfrm>
+          <a:prstGeom prst="rect">
+            <a:avLst/>
+          </a:prstGeom>
+          <a:solidFill>
+            <a:srgbClr val="FFF3D6"/>
+          </a:solidFill>
+          <a:ln w="12700">
+            <a:solidFill>
+              <a:srgbClr val="D7E2EE"/>
+            </a:solidFill>
+          </a:ln>
+        </p:spPr>
+        <p:txBody>
+          <a:bodyPr lIns="27432" tIns="27432" rIns="27432" bIns="27432" rtlCol="0" anchor="ctr"/>
+          <a:lstStyle/>
+          <a:p>
+            <a:pPr algn="ctr">
+              <a:defRPr sz="980"/>
+            </a:pPr>
+            <a:r>
+              <a:rPr sz="980" b="1" dirty="0">
+                <a:solidFill>
+                  <a:srgbClr val="172B4D"/>
+                </a:solidFill>
+                <a:latin typeface="Consolas"/>
+              </a:rPr>
+              <a:t>sales</a:t>
+            </a:r>
+          </a:p>
+        </p:txBody>
+      </p:sp>
+      <p:sp>
+        <p:nvSpPr>
+          <p:cNvPr id="36" name="Cell 36"/>
+          <p:cNvSpPr/>
+          <p:nvPr/>
+        </p:nvSpPr>
+        <p:spPr>
+          <a:xfrm>
+            <a:off x="2346960" y="3291840"/>
+            <a:ext cx="1188720" cy="365760"/>
+          </a:xfrm>
+          <a:prstGeom prst="rect">
+            <a:avLst/>
+          </a:prstGeom>
+          <a:solidFill>
+            <a:srgbClr val="FFF3D6"/>
+          </a:solidFill>
+          <a:ln w="12700">
+            <a:solidFill>
+              <a:srgbClr val="D7E2EE"/>
+            </a:solidFill>
+          </a:ln>
+        </p:spPr>
+        <p:txBody>
+          <a:bodyPr lIns="27432" tIns="27432" rIns="27432" bIns="27432" rtlCol="0" anchor="ctr"/>
+          <a:lstStyle/>
+          <a:p>
+            <a:pPr algn="ctr">
+              <a:defRPr sz="980"/>
+            </a:pPr>
+            <a:r>
+              <a:rPr sz="980" b="1" dirty="0">
+                <a:solidFill>
+                  <a:srgbClr val="172B4D"/>
+                </a:solidFill>
+                <a:latin typeface="Consolas"/>
+              </a:rPr>
+              <a:t>-0.62</a:t>
+            </a:r>
+          </a:p>
+        </p:txBody>
+      </p:sp>
+      <p:sp>
+        <p:nvSpPr>
+          <p:cNvPr id="37" name="Cell 37"/>
+          <p:cNvSpPr/>
+          <p:nvPr/>
+        </p:nvSpPr>
+        <p:spPr>
+          <a:xfrm>
+            <a:off x="3535680" y="3291840"/>
+            <a:ext cx="1188720" cy="365760"/>
+          </a:xfrm>
+          <a:prstGeom prst="rect">
+            <a:avLst/>
+          </a:prstGeom>
+          <a:solidFill>
+            <a:srgbClr val="FFF3D6"/>
+          </a:solidFill>
+          <a:ln w="12700">
+            <a:solidFill>
+              <a:srgbClr val="D7E2EE"/>
+            </a:solidFill>
+          </a:ln>
+        </p:spPr>
+        <p:txBody>
+          <a:bodyPr lIns="27432" tIns="27432" rIns="27432" bIns="27432" rtlCol="0" anchor="ctr"/>
+          <a:lstStyle/>
+          <a:p>
+            <a:pPr algn="ctr">
+              <a:defRPr sz="980"/>
+            </a:pPr>
+            <a:r>
+              <a:rPr sz="980" b="1" dirty="0">
+                <a:solidFill>
+                  <a:srgbClr val="172B4D"/>
+                </a:solidFill>
+                <a:latin typeface="Consolas"/>
+              </a:rPr>
+              <a:t>0.18</a:t>
+            </a:r>
+          </a:p>
+        </p:txBody>
+      </p:sp>
+      <p:sp>
+        <p:nvSpPr>
+          <p:cNvPr id="38" name="Cell 38"/>
+          <p:cNvSpPr/>
+          <p:nvPr/>
+        </p:nvSpPr>
+        <p:spPr>
+          <a:xfrm>
+            <a:off x="4724400" y="3291840"/>
+            <a:ext cx="1188720" cy="365760"/>
+          </a:xfrm>
+          <a:prstGeom prst="rect">
+            <a:avLst/>
+          </a:prstGeom>
+          <a:solidFill>
+            <a:srgbClr val="FFF3D6"/>
+          </a:solidFill>
+          <a:ln w="12700">
+            <a:solidFill>
+              <a:srgbClr val="D7E2EE"/>
+            </a:solidFill>
+          </a:ln>
+        </p:spPr>
+        <p:txBody>
+          <a:bodyPr lIns="27432" tIns="27432" rIns="27432" bIns="27432" rtlCol="0" anchor="ctr"/>
+          <a:lstStyle/>
+          <a:p>
+            <a:pPr algn="ctr">
+              <a:defRPr sz="980"/>
+            </a:pPr>
+            <a:r>
+              <a:rPr sz="980" b="1" dirty="0">
+                <a:solidFill>
+                  <a:srgbClr val="172B4D"/>
+                </a:solidFill>
+                <a:latin typeface="Consolas"/>
+              </a:rPr>
+              <a:t>0.45</a:t>
+            </a:r>
+          </a:p>
+        </p:txBody>
+      </p:sp>
+      <p:sp>
+        <p:nvSpPr>
+          <p:cNvPr id="39" name="Cell 39"/>
+          <p:cNvSpPr/>
+          <p:nvPr/>
+        </p:nvSpPr>
+        <p:spPr>
+          <a:xfrm>
+            <a:off x="5913120" y="3291840"/>
+            <a:ext cx="1188720" cy="365760"/>
+          </a:xfrm>
+          <a:prstGeom prst="rect">
+            <a:avLst/>
+          </a:prstGeom>
+          <a:solidFill>
+            <a:srgbClr val="FFF3D6"/>
+          </a:solidFill>
+          <a:ln w="12700">
+            <a:solidFill>
+              <a:srgbClr val="D7E2EE"/>
+            </a:solidFill>
+          </a:ln>
+        </p:spPr>
+        <p:txBody>
+          <a:bodyPr lIns="27432" tIns="27432" rIns="27432" bIns="27432" rtlCol="0" anchor="ctr"/>
+          <a:lstStyle/>
+          <a:p>
+            <a:pPr algn="ctr">
+              <a:defRPr sz="980"/>
+            </a:pPr>
+            <a:r>
+              <a:rPr sz="980" b="1" dirty="0">
+                <a:solidFill>
+                  <a:srgbClr val="172B4D"/>
+                </a:solidFill>
+                <a:latin typeface="Consolas"/>
+              </a:rPr>
+              <a:t>-0.09</a:t>
+            </a:r>
+          </a:p>
+        </p:txBody>
+      </p:sp>
+      <p:sp>
+        <p:nvSpPr>
+          <p:cNvPr id="40" name="Cell 40"/>
+          <p:cNvSpPr/>
+          <p:nvPr/>
+        </p:nvSpPr>
+        <p:spPr>
+          <a:xfrm>
+            <a:off x="1158240" y="3657600"/>
+            <a:ext cx="1188720" cy="365760"/>
+          </a:xfrm>
+          <a:prstGeom prst="rect">
+            <a:avLst/>
+          </a:prstGeom>
+          <a:solidFill>
+            <a:srgbClr val="FFFFFF"/>
+          </a:solidFill>
+          <a:ln w="12700">
+            <a:solidFill>
+              <a:srgbClr val="D7E2EE"/>
+            </a:solidFill>
+          </a:ln>
+        </p:spPr>
+        <p:txBody>
+          <a:bodyPr lIns="27432" tIns="27432" rIns="27432" bIns="27432" rtlCol="0" anchor="ctr"/>
+          <a:lstStyle/>
+          <a:p>
+            <a:pPr algn="ctr">
+              <a:defRPr sz="980"/>
+            </a:pPr>
+            <a:r>
+              <a:rPr sz="980" b="1" dirty="0">
+                <a:solidFill>
+                  <a:srgbClr val="172B4D"/>
+                </a:solidFill>
+                <a:latin typeface="Consolas"/>
+              </a:rPr>
+              <a:t>up</a:t>
+            </a:r>
+          </a:p>
+        </p:txBody>
+      </p:sp>
+      <p:sp>
+        <p:nvSpPr>
+          <p:cNvPr id="41" name="Cell 41"/>
+          <p:cNvSpPr/>
+          <p:nvPr/>
+        </p:nvSpPr>
+        <p:spPr>
+          <a:xfrm>
+            <a:off x="2346960" y="3657600"/>
+            <a:ext cx="1188720" cy="365760"/>
+          </a:xfrm>
+          <a:prstGeom prst="rect">
+            <a:avLst/>
+          </a:prstGeom>
+          <a:solidFill>
+            <a:srgbClr val="FFFFFF"/>
+          </a:solidFill>
+          <a:ln w="12700">
+            <a:solidFill>
+              <a:srgbClr val="D7E2EE"/>
+            </a:solidFill>
+          </a:ln>
+        </p:spPr>
+        <p:txBody>
+          <a:bodyPr lIns="27432" tIns="27432" rIns="27432" bIns="27432" rtlCol="0" anchor="ctr"/>
+          <a:lstStyle/>
+          <a:p>
+            <a:pPr algn="ctr">
+              <a:defRPr sz="980"/>
+            </a:pPr>
+            <a:r>
+              <a:rPr sz="980" dirty="0">
+                <a:solidFill>
+                  <a:srgbClr val="172B4D"/>
+                </a:solidFill>
+                <a:latin typeface="Consolas"/>
+              </a:rPr>
+              <a:t>-0.31</a:t>
+            </a:r>
+          </a:p>
+        </p:txBody>
+      </p:sp>
+      <p:sp>
+        <p:nvSpPr>
+          <p:cNvPr id="42" name="Cell 42"/>
+          <p:cNvSpPr/>
+          <p:nvPr/>
+        </p:nvSpPr>
+        <p:spPr>
+          <a:xfrm>
+            <a:off x="3535680" y="3657600"/>
+            <a:ext cx="1188720" cy="365760"/>
+          </a:xfrm>
+          <a:prstGeom prst="rect">
+            <a:avLst/>
+          </a:prstGeom>
+          <a:solidFill>
+            <a:srgbClr val="FFFFFF"/>
+          </a:solidFill>
+          <a:ln w="12700">
+            <a:solidFill>
+              <a:srgbClr val="D7E2EE"/>
+            </a:solidFill>
+          </a:ln>
+        </p:spPr>
+        <p:txBody>
+          <a:bodyPr lIns="27432" tIns="27432" rIns="27432" bIns="27432" rtlCol="0" anchor="ctr"/>
+          <a:lstStyle/>
+          <a:p>
+            <a:pPr algn="ctr">
+              <a:defRPr sz="980"/>
+            </a:pPr>
+            <a:r>
+              <a:rPr sz="980" dirty="0">
+                <a:solidFill>
+                  <a:srgbClr val="172B4D"/>
+                </a:solidFill>
+                <a:latin typeface="Consolas"/>
+              </a:rPr>
+              <a:t>0.67</a:t>
+            </a:r>
+          </a:p>
+        </p:txBody>
+      </p:sp>
+      <p:sp>
+        <p:nvSpPr>
+          <p:cNvPr id="43" name="Cell 43"/>
+          <p:cNvSpPr/>
+          <p:nvPr/>
+        </p:nvSpPr>
+        <p:spPr>
+          <a:xfrm>
+            <a:off x="4724400" y="3657600"/>
+            <a:ext cx="1188720" cy="365760"/>
+          </a:xfrm>
+          <a:prstGeom prst="rect">
+            <a:avLst/>
+          </a:prstGeom>
+          <a:solidFill>
+            <a:srgbClr val="FFFFFF"/>
+          </a:solidFill>
+          <a:ln w="12700">
+            <a:solidFill>
+              <a:srgbClr val="D7E2EE"/>
+            </a:solidFill>
+          </a:ln>
+        </p:spPr>
+        <p:txBody>
+          <a:bodyPr lIns="27432" tIns="27432" rIns="27432" bIns="27432" rtlCol="0" anchor="ctr"/>
+          <a:lstStyle/>
+          <a:p>
+            <a:pPr algn="ctr">
+              <a:defRPr sz="980"/>
+            </a:pPr>
+            <a:r>
+              <a:rPr sz="980" dirty="0">
+                <a:solidFill>
+                  <a:srgbClr val="172B4D"/>
+                </a:solidFill>
+                <a:latin typeface="Consolas"/>
+              </a:rPr>
+              <a:t>0.11</a:t>
+            </a:r>
+          </a:p>
+        </p:txBody>
+      </p:sp>
+      <p:sp>
+        <p:nvSpPr>
+          <p:cNvPr id="44" name="Cell 44"/>
+          <p:cNvSpPr/>
+          <p:nvPr/>
+        </p:nvSpPr>
+        <p:spPr>
+          <a:xfrm>
+            <a:off x="5913120" y="3657600"/>
+            <a:ext cx="1188720" cy="365760"/>
+          </a:xfrm>
+          <a:prstGeom prst="rect">
+            <a:avLst/>
+          </a:prstGeom>
+          <a:solidFill>
+            <a:srgbClr val="FFFFFF"/>
+          </a:solidFill>
+          <a:ln w="12700">
+            <a:solidFill>
+              <a:srgbClr val="D7E2EE"/>
+            </a:solidFill>
+          </a:ln>
+        </p:spPr>
+        <p:txBody>
+          <a:bodyPr lIns="27432" tIns="27432" rIns="27432" bIns="27432" rtlCol="0" anchor="ctr"/>
+          <a:lstStyle/>
+          <a:p>
+            <a:pPr algn="ctr">
+              <a:defRPr sz="980"/>
+            </a:pPr>
+            <a:r>
+              <a:rPr sz="980" dirty="0">
+                <a:solidFill>
+                  <a:srgbClr val="172B4D"/>
+                </a:solidFill>
+                <a:latin typeface="Consolas"/>
+              </a:rPr>
+              <a:t>0.28</a:t>
+            </a:r>
+          </a:p>
+        </p:txBody>
+      </p:sp>
+      <p:sp>
+        <p:nvSpPr>
+          <p:cNvPr id="45" name="Cell 45"/>
+          <p:cNvSpPr/>
+          <p:nvPr/>
+        </p:nvSpPr>
+        <p:spPr>
+          <a:xfrm>
+            <a:off x="1158240" y="4023360"/>
+            <a:ext cx="1188720" cy="365760"/>
+          </a:xfrm>
+          <a:prstGeom prst="rect">
+            <a:avLst/>
+          </a:prstGeom>
+          <a:solidFill>
+            <a:srgbClr val="F5F8FC"/>
+          </a:solidFill>
+          <a:ln w="12700">
+            <a:solidFill>
+              <a:srgbClr val="D7E2EE"/>
+            </a:solidFill>
+          </a:ln>
+        </p:spPr>
+        <p:txBody>
+          <a:bodyPr lIns="27432" tIns="27432" rIns="27432" bIns="27432" rtlCol="0" anchor="ctr"/>
+          <a:lstStyle/>
+          <a:p>
+            <a:pPr algn="ctr">
+              <a:defRPr sz="980"/>
+            </a:pPr>
+            <a:r>
+              <a:rPr sz="980" b="1" dirty="0">
+                <a:solidFill>
+                  <a:srgbClr val="172B4D"/>
+                </a:solidFill>
+                <a:latin typeface="Consolas"/>
+              </a:rPr>
+              <a:t>in</a:t>
+            </a:r>
+          </a:p>
+        </p:txBody>
+      </p:sp>
+      <p:sp>
+        <p:nvSpPr>
+          <p:cNvPr id="46" name="Cell 46"/>
+          <p:cNvSpPr/>
+          <p:nvPr/>
+        </p:nvSpPr>
+        <p:spPr>
+          <a:xfrm>
+            <a:off x="2346960" y="4023360"/>
+            <a:ext cx="1188720" cy="365760"/>
+          </a:xfrm>
+          <a:prstGeom prst="rect">
+            <a:avLst/>
+          </a:prstGeom>
+          <a:solidFill>
+            <a:srgbClr val="F5F8FC"/>
+          </a:solidFill>
+          <a:ln w="12700">
+            <a:solidFill>
+              <a:srgbClr val="D7E2EE"/>
+            </a:solidFill>
+          </a:ln>
+        </p:spPr>
+        <p:txBody>
+          <a:bodyPr lIns="27432" tIns="27432" rIns="27432" bIns="27432" rtlCol="0" anchor="ctr"/>
+          <a:lstStyle/>
+          <a:p>
+            <a:pPr algn="ctr">
+              <a:defRPr sz="980"/>
+            </a:pPr>
+            <a:r>
+              <a:rPr sz="980" dirty="0">
+                <a:solidFill>
+                  <a:srgbClr val="172B4D"/>
+                </a:solidFill>
+                <a:latin typeface="Consolas"/>
+              </a:rPr>
+              <a:t>0.08</a:t>
+            </a:r>
+          </a:p>
+        </p:txBody>
+      </p:sp>
+      <p:sp>
+        <p:nvSpPr>
+          <p:cNvPr id="47" name="Cell 47"/>
+          <p:cNvSpPr/>
+          <p:nvPr/>
+        </p:nvSpPr>
+        <p:spPr>
+          <a:xfrm>
+            <a:off x="3535680" y="4023360"/>
+            <a:ext cx="1188720" cy="365760"/>
+          </a:xfrm>
+          <a:prstGeom prst="rect">
+            <a:avLst/>
+          </a:prstGeom>
+          <a:solidFill>
+            <a:srgbClr val="F5F8FC"/>
+          </a:solidFill>
+          <a:ln w="12700">
+            <a:solidFill>
+              <a:srgbClr val="D7E2EE"/>
+            </a:solidFill>
+          </a:ln>
+        </p:spPr>
+        <p:txBody>
+          <a:bodyPr lIns="27432" tIns="27432" rIns="27432" bIns="27432" rtlCol="0" anchor="ctr"/>
+          <a:lstStyle/>
+          <a:p>
+            <a:pPr algn="ctr">
+              <a:defRPr sz="980"/>
+            </a:pPr>
+            <a:r>
+              <a:rPr sz="980" dirty="0">
+                <a:solidFill>
+                  <a:srgbClr val="172B4D"/>
+                </a:solidFill>
+                <a:latin typeface="Consolas"/>
+              </a:rPr>
+              <a:t>-0.15</a:t>
+            </a:r>
+          </a:p>
+        </p:txBody>
+      </p:sp>
+      <p:sp>
+        <p:nvSpPr>
+          <p:cNvPr id="48" name="Cell 48"/>
+          <p:cNvSpPr/>
+          <p:nvPr/>
+        </p:nvSpPr>
+        <p:spPr>
+          <a:xfrm>
+            <a:off x="4724400" y="4023360"/>
+            <a:ext cx="1188720" cy="365760"/>
+          </a:xfrm>
+          <a:prstGeom prst="rect">
+            <a:avLst/>
+          </a:prstGeom>
+          <a:solidFill>
+            <a:srgbClr val="F5F8FC"/>
+          </a:solidFill>
+          <a:ln w="12700">
+            <a:solidFill>
+              <a:srgbClr val="D7E2EE"/>
+            </a:solidFill>
+          </a:ln>
+        </p:spPr>
+        <p:txBody>
+          <a:bodyPr lIns="27432" tIns="27432" rIns="27432" bIns="27432" rtlCol="0" anchor="ctr"/>
+          <a:lstStyle/>
+          <a:p>
+            <a:pPr algn="ctr">
+              <a:defRPr sz="980"/>
+            </a:pPr>
+            <a:r>
+              <a:rPr sz="980" dirty="0">
+                <a:solidFill>
+                  <a:srgbClr val="172B4D"/>
+                </a:solidFill>
+                <a:latin typeface="Consolas"/>
+              </a:rPr>
+              <a:t>0.22</a:t>
+            </a:r>
+          </a:p>
+        </p:txBody>
+      </p:sp>
+      <p:sp>
+        <p:nvSpPr>
+          <p:cNvPr id="49" name="Cell 49"/>
+          <p:cNvSpPr/>
+          <p:nvPr/>
+        </p:nvSpPr>
+        <p:spPr>
+          <a:xfrm>
+            <a:off x="5913120" y="4023360"/>
+            <a:ext cx="1188720" cy="365760"/>
+          </a:xfrm>
+          <a:prstGeom prst="rect">
+            <a:avLst/>
+          </a:prstGeom>
+          <a:solidFill>
+            <a:srgbClr val="F5F8FC"/>
+          </a:solidFill>
+          <a:ln w="12700">
+            <a:solidFill>
+              <a:srgbClr val="D7E2EE"/>
+            </a:solidFill>
+          </a:ln>
+        </p:spPr>
+        <p:txBody>
+          <a:bodyPr lIns="27432" tIns="27432" rIns="27432" bIns="27432" rtlCol="0" anchor="ctr"/>
+          <a:lstStyle/>
+          <a:p>
+            <a:pPr algn="ctr">
+              <a:defRPr sz="980"/>
+            </a:pPr>
+            <a:r>
+              <a:rPr sz="980" dirty="0">
+                <a:solidFill>
+                  <a:srgbClr val="172B4D"/>
+                </a:solidFill>
+                <a:latin typeface="Consolas"/>
+              </a:rPr>
+              <a:t>0.64</a:t>
+            </a:r>
+          </a:p>
+        </p:txBody>
+      </p:sp>
+      <p:sp>
+        <p:nvSpPr>
+          <p:cNvPr id="50" name="Cell 50"/>
+          <p:cNvSpPr/>
+          <p:nvPr/>
+        </p:nvSpPr>
+        <p:spPr>
+          <a:xfrm>
+            <a:off x="1158240" y="4389120"/>
+            <a:ext cx="1188720" cy="365760"/>
+          </a:xfrm>
+          <a:prstGeom prst="rect">
+            <a:avLst/>
+          </a:prstGeom>
+          <a:solidFill>
+            <a:srgbClr val="FFFFFF"/>
+          </a:solidFill>
+          <a:ln w="12700">
+            <a:solidFill>
+              <a:srgbClr val="D7E2EE"/>
+            </a:solidFill>
+          </a:ln>
+        </p:spPr>
+        <p:txBody>
+          <a:bodyPr lIns="27432" tIns="27432" rIns="27432" bIns="27432" rtlCol="0" anchor="ctr"/>
+          <a:lstStyle/>
+          <a:p>
+            <a:pPr algn="ctr">
+              <a:defRPr sz="980"/>
+            </a:pPr>
+            <a:r>
+              <a:rPr sz="980" b="1" dirty="0">
+                <a:solidFill>
+                  <a:srgbClr val="172B4D"/>
+                </a:solidFill>
+                <a:latin typeface="Consolas"/>
+              </a:rPr>
+              <a:t>chicago</a:t>
+            </a:r>
+          </a:p>
+        </p:txBody>
+      </p:sp>
+      <p:sp>
+        <p:nvSpPr>
+          <p:cNvPr id="51" name="Cell 51"/>
+          <p:cNvSpPr/>
+          <p:nvPr/>
+        </p:nvSpPr>
+        <p:spPr>
+          <a:xfrm>
+            <a:off x="2346960" y="4389120"/>
+            <a:ext cx="1188720" cy="365760"/>
+          </a:xfrm>
+          <a:prstGeom prst="rect">
+            <a:avLst/>
+          </a:prstGeom>
+          <a:solidFill>
+            <a:srgbClr val="FFFFFF"/>
+          </a:solidFill>
+          <a:ln w="12700">
+            <a:solidFill>
+              <a:srgbClr val="D7E2EE"/>
+            </a:solidFill>
+          </a:ln>
+        </p:spPr>
+        <p:txBody>
+          <a:bodyPr lIns="27432" tIns="27432" rIns="27432" bIns="27432" rtlCol="0" anchor="ctr"/>
+          <a:lstStyle/>
+          <a:p>
+            <a:pPr algn="ctr">
+              <a:defRPr sz="980"/>
+            </a:pPr>
+            <a:r>
+              <a:rPr sz="980" dirty="0">
+                <a:solidFill>
+                  <a:srgbClr val="172B4D"/>
+                </a:solidFill>
+                <a:latin typeface="Consolas"/>
+              </a:rPr>
+              <a:t>0.41</a:t>
+            </a:r>
+          </a:p>
+        </p:txBody>
+      </p:sp>
+      <p:sp>
+        <p:nvSpPr>
+          <p:cNvPr id="52" name="Cell 52"/>
+          <p:cNvSpPr/>
+          <p:nvPr/>
+        </p:nvSpPr>
+        <p:spPr>
+          <a:xfrm>
+            <a:off x="3535680" y="4389120"/>
+            <a:ext cx="1188720" cy="365760"/>
+          </a:xfrm>
+          <a:prstGeom prst="rect">
+            <a:avLst/>
+          </a:prstGeom>
+          <a:solidFill>
+            <a:srgbClr val="FFFFFF"/>
+          </a:solidFill>
+          <a:ln w="12700">
+            <a:solidFill>
+              <a:srgbClr val="D7E2EE"/>
+            </a:solidFill>
+          </a:ln>
+        </p:spPr>
+        <p:txBody>
+          <a:bodyPr lIns="27432" tIns="27432" rIns="27432" bIns="27432" rtlCol="0" anchor="ctr"/>
+          <a:lstStyle/>
+          <a:p>
+            <a:pPr algn="ctr">
+              <a:defRPr sz="980"/>
+            </a:pPr>
+            <a:r>
+              <a:rPr sz="980" dirty="0">
+                <a:solidFill>
+                  <a:srgbClr val="172B4D"/>
+                </a:solidFill>
+                <a:latin typeface="Consolas"/>
+              </a:rPr>
+              <a:t>0.12</a:t>
+            </a:r>
+          </a:p>
+        </p:txBody>
+      </p:sp>
+      <p:sp>
+        <p:nvSpPr>
+          <p:cNvPr id="53" name="Cell 53"/>
+          <p:cNvSpPr/>
+          <p:nvPr/>
+        </p:nvSpPr>
+        <p:spPr>
+          <a:xfrm>
+            <a:off x="4724400" y="4389120"/>
+            <a:ext cx="1188720" cy="365760"/>
+          </a:xfrm>
+          <a:prstGeom prst="rect">
+            <a:avLst/>
+          </a:prstGeom>
+          <a:solidFill>
+            <a:srgbClr val="FFFFFF"/>
+          </a:solidFill>
+          <a:ln w="12700">
+            <a:solidFill>
+              <a:srgbClr val="D7E2EE"/>
+            </a:solidFill>
+          </a:ln>
+        </p:spPr>
+        <p:txBody>
+          <a:bodyPr lIns="27432" tIns="27432" rIns="27432" bIns="27432" rtlCol="0" anchor="ctr"/>
+          <a:lstStyle/>
+          <a:p>
+            <a:pPr algn="ctr">
+              <a:defRPr sz="980"/>
+            </a:pPr>
+            <a:r>
+              <a:rPr sz="980" dirty="0">
+                <a:solidFill>
+                  <a:srgbClr val="172B4D"/>
+                </a:solidFill>
+                <a:latin typeface="Consolas"/>
+              </a:rPr>
+              <a:t>-0.33</a:t>
+            </a:r>
+          </a:p>
+        </p:txBody>
+      </p:sp>
+      <p:sp>
+        <p:nvSpPr>
+          <p:cNvPr id="54" name="Cell 54"/>
+          <p:cNvSpPr/>
+          <p:nvPr/>
+        </p:nvSpPr>
+        <p:spPr>
+          <a:xfrm>
+            <a:off x="5913120" y="4389120"/>
+            <a:ext cx="1188720" cy="365760"/>
+          </a:xfrm>
+          <a:prstGeom prst="rect">
+            <a:avLst/>
+          </a:prstGeom>
+          <a:solidFill>
+            <a:srgbClr val="FFFFFF"/>
+          </a:solidFill>
+          <a:ln w="12700">
+            <a:solidFill>
+              <a:srgbClr val="D7E2EE"/>
+            </a:solidFill>
+          </a:ln>
+        </p:spPr>
+        <p:txBody>
+          <a:bodyPr lIns="27432" tIns="27432" rIns="27432" bIns="27432" rtlCol="0" anchor="ctr"/>
+          <a:lstStyle/>
+          <a:p>
+            <a:pPr algn="ctr">
+              <a:defRPr sz="980"/>
+            </a:pPr>
+            <a:r>
+              <a:rPr sz="980" dirty="0">
+                <a:solidFill>
+                  <a:srgbClr val="172B4D"/>
+                </a:solidFill>
+                <a:latin typeface="Consolas"/>
+              </a:rPr>
+              <a:t>0.57</a:t>
+            </a:r>
+          </a:p>
+        </p:txBody>
+      </p:sp>
+      <p:sp>
+        <p:nvSpPr>
+          <p:cNvPr id="55" name="Cell 55"/>
+          <p:cNvSpPr/>
+          <p:nvPr/>
+        </p:nvSpPr>
+        <p:spPr>
+          <a:xfrm>
+            <a:off x="1158240" y="4754880"/>
+            <a:ext cx="1188720" cy="365760"/>
+          </a:xfrm>
+          <a:prstGeom prst="rect">
+            <a:avLst/>
+          </a:prstGeom>
+          <a:solidFill>
+            <a:srgbClr val="F5F8FC"/>
+          </a:solidFill>
+          <a:ln w="12700">
+            <a:solidFill>
+              <a:srgbClr val="D7E2EE"/>
+            </a:solidFill>
+          </a:ln>
+        </p:spPr>
+        <p:txBody>
+          <a:bodyPr lIns="27432" tIns="27432" rIns="27432" bIns="27432" rtlCol="0" anchor="ctr"/>
+          <a:lstStyle/>
+          <a:p>
+            <a:pPr algn="ctr">
+              <a:defRPr sz="980"/>
+            </a:pPr>
+            <a:r>
+              <a:rPr sz="980" b="1" dirty="0">
+                <a:solidFill>
+                  <a:srgbClr val="172B4D"/>
+                </a:solidFill>
+                <a:latin typeface="Consolas"/>
+              </a:rPr>
+              <a:t>?</a:t>
+            </a:r>
+          </a:p>
+        </p:txBody>
+      </p:sp>
+      <p:sp>
+        <p:nvSpPr>
+          <p:cNvPr id="56" name="Cell 56"/>
+          <p:cNvSpPr/>
+          <p:nvPr/>
+        </p:nvSpPr>
+        <p:spPr>
+          <a:xfrm>
+            <a:off x="2346960" y="4754880"/>
+            <a:ext cx="1188720" cy="365760"/>
+          </a:xfrm>
+          <a:prstGeom prst="rect">
+            <a:avLst/>
+          </a:prstGeom>
+          <a:solidFill>
+            <a:srgbClr val="F5F8FC"/>
+          </a:solidFill>
+          <a:ln w="12700">
+            <a:solidFill>
+              <a:srgbClr val="D7E2EE"/>
+            </a:solidFill>
+          </a:ln>
+        </p:spPr>
+        <p:txBody>
+          <a:bodyPr lIns="27432" tIns="27432" rIns="27432" bIns="27432" rtlCol="0" anchor="ctr"/>
+          <a:lstStyle/>
+          <a:p>
+            <a:pPr algn="ctr">
+              <a:defRPr sz="980"/>
+            </a:pPr>
+            <a:r>
+              <a:rPr sz="980" dirty="0">
+                <a:solidFill>
+                  <a:srgbClr val="172B4D"/>
+                </a:solidFill>
+                <a:latin typeface="Consolas"/>
+              </a:rPr>
+              <a:t>-0.07</a:t>
+            </a:r>
+          </a:p>
+        </p:txBody>
+      </p:sp>
+      <p:sp>
+        <p:nvSpPr>
+          <p:cNvPr id="57" name="Cell 57"/>
+          <p:cNvSpPr/>
+          <p:nvPr/>
+        </p:nvSpPr>
+        <p:spPr>
+          <a:xfrm>
+            <a:off x="3535680" y="4754880"/>
+            <a:ext cx="1188720" cy="365760"/>
+          </a:xfrm>
+          <a:prstGeom prst="rect">
+            <a:avLst/>
+          </a:prstGeom>
+          <a:solidFill>
+            <a:srgbClr val="F5F8FC"/>
+          </a:solidFill>
+          <a:ln w="12700">
+            <a:solidFill>
+              <a:srgbClr val="D7E2EE"/>
+            </a:solidFill>
+          </a:ln>
+        </p:spPr>
+        <p:txBody>
+          <a:bodyPr lIns="27432" tIns="27432" rIns="27432" bIns="27432" rtlCol="0" anchor="ctr"/>
+          <a:lstStyle/>
+          <a:p>
+            <a:pPr algn="ctr">
+              <a:defRPr sz="980"/>
+            </a:pPr>
+            <a:r>
+              <a:rPr sz="980" dirty="0">
+                <a:solidFill>
+                  <a:srgbClr val="172B4D"/>
+                </a:solidFill>
+                <a:latin typeface="Consolas"/>
+              </a:rPr>
+              <a:t>0.04</a:t>
+            </a:r>
+          </a:p>
+        </p:txBody>
+      </p:sp>
+      <p:sp>
+        <p:nvSpPr>
+          <p:cNvPr id="58" name="Cell 58"/>
+          <p:cNvSpPr/>
+          <p:nvPr/>
+        </p:nvSpPr>
+        <p:spPr>
+          <a:xfrm>
+            <a:off x="4724400" y="4754880"/>
+            <a:ext cx="1188720" cy="365760"/>
+          </a:xfrm>
+          <a:prstGeom prst="rect">
+            <a:avLst/>
+          </a:prstGeom>
+          <a:solidFill>
+            <a:srgbClr val="F5F8FC"/>
+          </a:solidFill>
+          <a:ln w="12700">
+            <a:solidFill>
+              <a:srgbClr val="D7E2EE"/>
+            </a:solidFill>
+          </a:ln>
+        </p:spPr>
+        <p:txBody>
+          <a:bodyPr lIns="27432" tIns="27432" rIns="27432" bIns="27432" rtlCol="0" anchor="ctr"/>
+          <a:lstStyle/>
+          <a:p>
+            <a:pPr algn="ctr">
+              <a:defRPr sz="980"/>
+            </a:pPr>
+            <a:r>
+              <a:rPr sz="980" dirty="0">
+                <a:solidFill>
+                  <a:srgbClr val="172B4D"/>
+                </a:solidFill>
+                <a:latin typeface="Consolas"/>
+              </a:rPr>
+              <a:t>0.19</a:t>
+            </a:r>
+          </a:p>
+        </p:txBody>
+      </p:sp>
+      <p:sp>
+        <p:nvSpPr>
+          <p:cNvPr id="59" name="Cell 59"/>
+          <p:cNvSpPr/>
+          <p:nvPr/>
+        </p:nvSpPr>
+        <p:spPr>
+          <a:xfrm>
+            <a:off x="5913120" y="4754880"/>
+            <a:ext cx="1188720" cy="365760"/>
+          </a:xfrm>
+          <a:prstGeom prst="rect">
+            <a:avLst/>
+          </a:prstGeom>
+          <a:solidFill>
+            <a:srgbClr val="F5F8FC"/>
+          </a:solidFill>
+          <a:ln w="12700">
+            <a:solidFill>
+              <a:srgbClr val="D7E2EE"/>
+            </a:solidFill>
+          </a:ln>
+        </p:spPr>
+        <p:txBody>
+          <a:bodyPr lIns="27432" tIns="27432" rIns="27432" bIns="27432" rtlCol="0" anchor="ctr"/>
+          <a:lstStyle/>
+          <a:p>
+            <a:pPr algn="ctr">
+              <a:defRPr sz="980"/>
+            </a:pPr>
+            <a:r>
+              <a:rPr sz="980" dirty="0">
+                <a:solidFill>
+                  <a:srgbClr val="172B4D"/>
+                </a:solidFill>
+                <a:latin typeface="Consolas"/>
+              </a:rPr>
+              <a:t>-0.22</a:t>
+            </a:r>
+          </a:p>
+        </p:txBody>
+      </p:sp>
+      <p:sp>
+        <p:nvSpPr>
+          <p:cNvPr id="80" name="Shape Label"/>
+          <p:cNvSpPr/>
+          <p:nvPr/>
+        </p:nvSpPr>
+        <p:spPr>
+          <a:xfrm>
+            <a:off x="1158240" y="5212080"/>
+            <a:ext cx="6937136" cy="621792"/>
           </a:xfrm>
           <a:prstGeom prst="roundRect">
             <a:avLst/>
@@ -9375,34 +11180,20 @@
           </a:ln>
         </p:spPr>
         <p:txBody>
-          <a:bodyPr lIns="91440" tIns="91440" rIns="91440" bIns="91440" rtlCol="0" anchor="ctr"/>
+          <a:bodyPr lIns="45720" tIns="45720" rIns="45720" bIns="45720" rtlCol="0" anchor="ctr"/>
           <a:lstStyle/>
           <a:p>
             <a:pPr algn="ctr">
-              <a:defRPr sz="1800"/>
-            </a:pPr>
-            <a:r>
-              <a:rPr sz="1800" b="1" dirty="0">
+              <a:defRPr sz="1450"/>
+            </a:pPr>
+            <a:r>
+              <a:rPr sz="1450" b="1" dirty="0">
                 <a:solidFill>
                   <a:srgbClr val="0B2F5B"/>
                 </a:solidFill>
-                <a:latin typeface="Aptos"/>
-              </a:rPr>
-              <a:t>Key takeaway</a:t>
-            </a:r>
-          </a:p>
-          <a:p>
-            <a:pPr algn="ctr">
-              <a:defRPr sz="1600"/>
-            </a:pPr>
-            <a:r>
-              <a:rPr sz="1600" dirty="0">
-                <a:solidFill>
-                  <a:srgbClr val="172B4D"/>
-                </a:solidFill>
-                <a:latin typeface="Aptos"/>
-              </a:rPr>
-              <a:t>A tensor is the in-memory numeric object that carries vectors into neural-network computation.</a:t>
+                <a:latin typeface="Consolas"/>
+              </a:rPr>
+              <a:t>activation tensor shape = [7 token positions, 4 vector dimensions]</a:t>
             </a:r>
           </a:p>
         </p:txBody>
@@ -9438,7 +11229,7 @@
                 </a:solidFill>
                 <a:latin typeface="Aptos"/>
               </a:rPr>
-              <a:t>AI Under the hood | Slide 18</a:t>
+              <a:t>AI Under the hood | Slide 19</a:t>
             </a:r>
           </a:p>
         </p:txBody>
@@ -9468,16 +11259,38 @@
           <a:chExt cx="0" cy="0"/>
         </a:xfrm>
       </p:grpSpPr>
-      <p:sp>
-        <p:nvSpPr>
-          <p:cNvPr id="2" name="Title"/>
-          <p:cNvSpPr/>
-          <p:nvPr/>
-        </p:nvSpPr>
-        <p:spPr>
-          <a:xfrm>
-            <a:off x="640080" y="365760"/>
-            <a:ext cx="10911840" cy="548640"/>
+      <p:pic>
+        <p:nvPicPr>
+          <p:cNvPr id="2" name="MAGPAI From Question to Insight"/>
+          <p:cNvPicPr/>
+          <p:nvPr/>
+        </p:nvPicPr>
+        <p:blipFill>
+          <a:blip r:embed="rId2"/>
+          <a:stretch>
+            <a:fillRect/>
+          </a:stretch>
+        </p:blipFill>
+        <p:spPr>
+          <a:xfrm>
+            <a:off x="1466850" y="274320"/>
+            <a:ext cx="9258300" cy="6172200"/>
+          </a:xfrm>
+          <a:prstGeom prst="rect">
+            <a:avLst/>
+          </a:prstGeom>
+        </p:spPr>
+      </p:pic>
+      <p:sp>
+        <p:nvSpPr>
+          <p:cNvPr id="3" name="Footer"/>
+          <p:cNvSpPr txBox="1"/>
+          <p:nvPr/>
+        </p:nvSpPr>
+        <p:spPr>
+          <a:xfrm>
+            <a:off x="320040" y="6473952"/>
+            <a:ext cx="11521440" cy="228600"/>
           </a:xfrm>
           <a:prstGeom prst="rect">
             <a:avLst/>
@@ -9489,2020 +11302,7 @@
           <a:bodyPr lIns="0" tIns="0" rIns="0" bIns="0" rtlCol="0" anchor="t"/>
           <a:lstStyle/>
           <a:p>
-            <a:pPr algn="l">
-              <a:defRPr sz="3000"/>
-            </a:pPr>
-            <a:r>
-              <a:rPr sz="3000" b="1" dirty="0">
-                <a:solidFill>
-                  <a:srgbClr val="0B2F5B"/>
-                </a:solidFill>
-                <a:latin typeface="Aptos"/>
-              </a:rPr>
-              <a:t>Prompt Stored as an Input Tensor</a:t>
-            </a:r>
-          </a:p>
-        </p:txBody>
-      </p:sp>
-      <p:sp>
-        <p:nvSpPr>
-          <p:cNvPr id="3" name="Subtitle"/>
-          <p:cNvSpPr/>
-          <p:nvPr/>
-        </p:nvSpPr>
-        <p:spPr>
-          <a:xfrm>
-            <a:off x="640080" y="868680"/>
-            <a:ext cx="10911840" cy="365760"/>
-          </a:xfrm>
-          <a:prstGeom prst="rect">
-            <a:avLst/>
-          </a:prstGeom>
-          <a:noFill/>
-          <a:ln/>
-        </p:spPr>
-        <p:txBody>
-          <a:bodyPr lIns="0" tIns="0" rIns="0" bIns="0" rtlCol="0" anchor="t"/>
-          <a:lstStyle/>
-          <a:p>
-            <a:pPr algn="l">
-              <a:defRPr sz="1600"/>
-            </a:pPr>
-            <a:r>
-              <a:rPr sz="1600" dirty="0">
-                <a:solidFill>
-                  <a:srgbClr val="5E6C84"/>
-                </a:solidFill>
-                <a:latin typeface="Aptos"/>
-              </a:rPr>
-              <a:t>The original prompt becomes a 7 x 4 numeric grid before NN layers run</a:t>
-            </a:r>
-          </a:p>
-        </p:txBody>
-      </p:sp>
-      <p:sp>
-        <p:nvSpPr>
-          <p:cNvPr id="4" name="Prompt Text"/>
-          <p:cNvSpPr/>
-          <p:nvPr/>
-        </p:nvSpPr>
-        <p:spPr>
-          <a:xfrm>
-            <a:off x="822960" y="1280160"/>
-            <a:ext cx="4754880" cy="548640"/>
-          </a:xfrm>
-          <a:prstGeom prst="roundRect">
-            <a:avLst/>
-          </a:prstGeom>
-          <a:solidFill>
-            <a:srgbClr val="EAF2FF"/>
-          </a:solidFill>
-          <a:ln w="12700">
-            <a:solidFill>
-              <a:srgbClr val="0B5CAD"/>
-            </a:solidFill>
-          </a:ln>
-        </p:spPr>
-        <p:txBody>
-          <a:bodyPr lIns="91440" tIns="91440" rIns="91440" bIns="91440" rtlCol="0" anchor="ctr"/>
-          <a:lstStyle/>
-          <a:p>
-            <a:pPr algn="ctr">
-              <a:defRPr sz="1900"/>
-            </a:pPr>
-            <a:r>
-              <a:rPr sz="1900" b="1" dirty="0">
-                <a:solidFill>
-                  <a:srgbClr val="0B2F5B"/>
-                </a:solidFill>
-                <a:latin typeface="Consolas"/>
-              </a:rPr>
-              <a:t>are MAG sales up in chicago?</a:t>
-            </a:r>
-          </a:p>
-        </p:txBody>
-      </p:sp>
-      <p:sp>
-        <p:nvSpPr>
-          <p:cNvPr id="5" name="Arrow 1"/>
-          <p:cNvSpPr/>
-          <p:nvPr/>
-        </p:nvSpPr>
-        <p:spPr>
-          <a:xfrm>
-            <a:off x="5760720" y="1397280"/>
-            <a:ext cx="731520" cy="365760"/>
-          </a:xfrm>
-          <a:prstGeom prst="rect">
-            <a:avLst/>
-          </a:prstGeom>
-          <a:noFill/>
-          <a:ln/>
-        </p:spPr>
-        <p:txBody>
-          <a:bodyPr lIns="0" tIns="0" rIns="0" bIns="0" rtlCol="0" anchor="ctr"/>
-          <a:lstStyle/>
-          <a:p>
-            <a:pPr algn="ctr">
-              <a:defRPr sz="2100"/>
-            </a:pPr>
-            <a:r>
-              <a:rPr lang="en-US" sz="2100" b="1" dirty="0">
-                <a:solidFill>
-                  <a:srgbClr val="0B5CAD"/>
-                </a:solidFill>
-                <a:latin typeface="Aptos"/>
-              </a:rPr>
-              <a:t>---</a:t>
-            </a:r>
-            <a:r>
-              <a:rPr sz="2100" b="1" dirty="0">
-                <a:solidFill>
-                  <a:srgbClr val="0B5CAD"/>
-                </a:solidFill>
-                <a:latin typeface="Aptos"/>
-              </a:rPr>
-              <a:t>-&gt;</a:t>
-            </a:r>
-          </a:p>
-        </p:txBody>
-      </p:sp>
-      <p:sp>
-        <p:nvSpPr>
-          <p:cNvPr id="6" name="NN Box"/>
-          <p:cNvSpPr/>
-          <p:nvPr/>
-        </p:nvSpPr>
-        <p:spPr>
-          <a:xfrm>
-            <a:off x="9966960" y="2103120"/>
-            <a:ext cx="1280160" cy="2377440"/>
-          </a:xfrm>
-          <a:prstGeom prst="roundRect">
-            <a:avLst/>
-          </a:prstGeom>
-          <a:solidFill>
-            <a:srgbClr val="0B5CAD"/>
-          </a:solidFill>
-          <a:ln w="12700">
-            <a:solidFill>
-              <a:srgbClr val="0B5CAD"/>
-            </a:solidFill>
-          </a:ln>
-        </p:spPr>
-        <p:txBody>
-          <a:bodyPr lIns="91440" tIns="91440" rIns="91440" bIns="91440" rtlCol="0" anchor="ctr"/>
-          <a:lstStyle/>
-          <a:p>
-            <a:pPr algn="ctr">
-              <a:defRPr sz="1700"/>
-            </a:pPr>
-            <a:r>
-              <a:rPr sz="1700" b="1" dirty="0">
-                <a:solidFill>
-                  <a:srgbClr val="FFFFFF"/>
-                </a:solidFill>
-                <a:latin typeface="Aptos"/>
-              </a:rPr>
-              <a:t>NN layers
-start here</a:t>
-            </a:r>
-          </a:p>
-        </p:txBody>
-      </p:sp>
-      <p:sp>
-        <p:nvSpPr>
-          <p:cNvPr id="7" name="Arrow 2"/>
-          <p:cNvSpPr/>
-          <p:nvPr/>
-        </p:nvSpPr>
-        <p:spPr>
-          <a:xfrm>
-            <a:off x="9144000" y="3108960"/>
-            <a:ext cx="731520" cy="365760"/>
-          </a:xfrm>
-          <a:prstGeom prst="rect">
-            <a:avLst/>
-          </a:prstGeom>
-          <a:noFill/>
-          <a:ln/>
-        </p:spPr>
-        <p:txBody>
-          <a:bodyPr lIns="0" tIns="0" rIns="0" bIns="0" rtlCol="0" anchor="ctr"/>
-          <a:lstStyle/>
-          <a:p>
-            <a:pPr algn="ctr">
-              <a:defRPr sz="2100"/>
-            </a:pPr>
-            <a:r>
-              <a:rPr lang="en-US" sz="2100" b="1" dirty="0">
-                <a:solidFill>
-                  <a:srgbClr val="0B5CAD"/>
-                </a:solidFill>
-                <a:latin typeface="Aptos"/>
-              </a:rPr>
-              <a:t>----</a:t>
-            </a:r>
-            <a:r>
-              <a:rPr sz="2100" b="1" dirty="0">
-                <a:solidFill>
-                  <a:srgbClr val="0B5CAD"/>
-                </a:solidFill>
-                <a:latin typeface="Aptos"/>
-              </a:rPr>
-              <a:t>-&gt;</a:t>
-            </a:r>
-          </a:p>
-        </p:txBody>
-      </p:sp>
-      <p:sp>
-        <p:nvSpPr>
-          <p:cNvPr id="20" name="Cell 20"/>
-          <p:cNvSpPr/>
-          <p:nvPr/>
-        </p:nvSpPr>
-        <p:spPr>
-          <a:xfrm>
-            <a:off x="1158240" y="2194560"/>
-            <a:ext cx="1188720" cy="365760"/>
-          </a:xfrm>
-          <a:prstGeom prst="rect">
-            <a:avLst/>
-          </a:prstGeom>
-          <a:solidFill>
-            <a:srgbClr val="0B2F5B"/>
-          </a:solidFill>
-          <a:ln w="12700">
-            <a:solidFill>
-              <a:srgbClr val="D7E2EE"/>
-            </a:solidFill>
-          </a:ln>
-        </p:spPr>
-        <p:txBody>
-          <a:bodyPr lIns="27432" tIns="27432" rIns="27432" bIns="27432" rtlCol="0" anchor="ctr"/>
-          <a:lstStyle/>
-          <a:p>
-            <a:pPr algn="ctr">
-              <a:defRPr sz="1050"/>
-            </a:pPr>
-            <a:r>
-              <a:rPr sz="1050" b="1" dirty="0">
-                <a:solidFill>
-                  <a:srgbClr val="FFFFFF"/>
-                </a:solidFill>
-                <a:latin typeface="Consolas"/>
-              </a:rPr>
-              <a:t>token</a:t>
-            </a:r>
-          </a:p>
-        </p:txBody>
-      </p:sp>
-      <p:sp>
-        <p:nvSpPr>
-          <p:cNvPr id="21" name="Cell 21"/>
-          <p:cNvSpPr/>
-          <p:nvPr/>
-        </p:nvSpPr>
-        <p:spPr>
-          <a:xfrm>
-            <a:off x="2346960" y="2194560"/>
-            <a:ext cx="1188720" cy="365760"/>
-          </a:xfrm>
-          <a:prstGeom prst="rect">
-            <a:avLst/>
-          </a:prstGeom>
-          <a:solidFill>
-            <a:srgbClr val="0B2F5B"/>
-          </a:solidFill>
-          <a:ln w="12700">
-            <a:solidFill>
-              <a:srgbClr val="D7E2EE"/>
-            </a:solidFill>
-          </a:ln>
-        </p:spPr>
-        <p:txBody>
-          <a:bodyPr lIns="27432" tIns="27432" rIns="27432" bIns="27432" rtlCol="0" anchor="ctr"/>
-          <a:lstStyle/>
-          <a:p>
-            <a:pPr algn="ctr">
-              <a:defRPr sz="1050"/>
-            </a:pPr>
-            <a:r>
-              <a:rPr sz="1050" b="1" dirty="0">
-                <a:solidFill>
-                  <a:srgbClr val="FFFFFF"/>
-                </a:solidFill>
-                <a:latin typeface="Consolas"/>
-              </a:rPr>
-              <a:t>v1</a:t>
-            </a:r>
-          </a:p>
-        </p:txBody>
-      </p:sp>
-      <p:sp>
-        <p:nvSpPr>
-          <p:cNvPr id="22" name="Cell 22"/>
-          <p:cNvSpPr/>
-          <p:nvPr/>
-        </p:nvSpPr>
-        <p:spPr>
-          <a:xfrm>
-            <a:off x="3535680" y="2194560"/>
-            <a:ext cx="1188720" cy="365760"/>
-          </a:xfrm>
-          <a:prstGeom prst="rect">
-            <a:avLst/>
-          </a:prstGeom>
-          <a:solidFill>
-            <a:srgbClr val="0B2F5B"/>
-          </a:solidFill>
-          <a:ln w="12700">
-            <a:solidFill>
-              <a:srgbClr val="D7E2EE"/>
-            </a:solidFill>
-          </a:ln>
-        </p:spPr>
-        <p:txBody>
-          <a:bodyPr lIns="27432" tIns="27432" rIns="27432" bIns="27432" rtlCol="0" anchor="ctr"/>
-          <a:lstStyle/>
-          <a:p>
-            <a:pPr algn="ctr">
-              <a:defRPr sz="1050"/>
-            </a:pPr>
-            <a:r>
-              <a:rPr sz="1050" b="1" dirty="0">
-                <a:solidFill>
-                  <a:srgbClr val="FFFFFF"/>
-                </a:solidFill>
-                <a:latin typeface="Consolas"/>
-              </a:rPr>
-              <a:t>v2</a:t>
-            </a:r>
-          </a:p>
-        </p:txBody>
-      </p:sp>
-      <p:sp>
-        <p:nvSpPr>
-          <p:cNvPr id="23" name="Cell 23"/>
-          <p:cNvSpPr/>
-          <p:nvPr/>
-        </p:nvSpPr>
-        <p:spPr>
-          <a:xfrm>
-            <a:off x="4724400" y="2194560"/>
-            <a:ext cx="1188720" cy="365760"/>
-          </a:xfrm>
-          <a:prstGeom prst="rect">
-            <a:avLst/>
-          </a:prstGeom>
-          <a:solidFill>
-            <a:srgbClr val="0B2F5B"/>
-          </a:solidFill>
-          <a:ln w="12700">
-            <a:solidFill>
-              <a:srgbClr val="D7E2EE"/>
-            </a:solidFill>
-          </a:ln>
-        </p:spPr>
-        <p:txBody>
-          <a:bodyPr lIns="27432" tIns="27432" rIns="27432" bIns="27432" rtlCol="0" anchor="ctr"/>
-          <a:lstStyle/>
-          <a:p>
-            <a:pPr algn="ctr">
-              <a:defRPr sz="1050"/>
-            </a:pPr>
-            <a:r>
-              <a:rPr sz="1050" b="1" dirty="0">
-                <a:solidFill>
-                  <a:srgbClr val="FFFFFF"/>
-                </a:solidFill>
-                <a:latin typeface="Consolas"/>
-              </a:rPr>
-              <a:t>v3</a:t>
-            </a:r>
-          </a:p>
-        </p:txBody>
-      </p:sp>
-      <p:sp>
-        <p:nvSpPr>
-          <p:cNvPr id="24" name="Cell 24"/>
-          <p:cNvSpPr/>
-          <p:nvPr/>
-        </p:nvSpPr>
-        <p:spPr>
-          <a:xfrm>
-            <a:off x="5913120" y="2194560"/>
-            <a:ext cx="1188720" cy="365760"/>
-          </a:xfrm>
-          <a:prstGeom prst="rect">
-            <a:avLst/>
-          </a:prstGeom>
-          <a:solidFill>
-            <a:srgbClr val="0B2F5B"/>
-          </a:solidFill>
-          <a:ln w="12700">
-            <a:solidFill>
-              <a:srgbClr val="D7E2EE"/>
-            </a:solidFill>
-          </a:ln>
-        </p:spPr>
-        <p:txBody>
-          <a:bodyPr lIns="27432" tIns="27432" rIns="27432" bIns="27432" rtlCol="0" anchor="ctr"/>
-          <a:lstStyle/>
-          <a:p>
-            <a:pPr algn="ctr">
-              <a:defRPr sz="1050"/>
-            </a:pPr>
-            <a:r>
-              <a:rPr sz="1050" b="1" dirty="0">
-                <a:solidFill>
-                  <a:srgbClr val="FFFFFF"/>
-                </a:solidFill>
-                <a:latin typeface="Consolas"/>
-              </a:rPr>
-              <a:t>v4</a:t>
-            </a:r>
-          </a:p>
-        </p:txBody>
-      </p:sp>
-      <p:sp>
-        <p:nvSpPr>
-          <p:cNvPr id="25" name="Cell 25"/>
-          <p:cNvSpPr/>
-          <p:nvPr/>
-        </p:nvSpPr>
-        <p:spPr>
-          <a:xfrm>
-            <a:off x="1158240" y="2560320"/>
-            <a:ext cx="1188720" cy="365760"/>
-          </a:xfrm>
-          <a:prstGeom prst="rect">
-            <a:avLst/>
-          </a:prstGeom>
-          <a:solidFill>
-            <a:srgbClr val="F5F8FC"/>
-          </a:solidFill>
-          <a:ln w="12700">
-            <a:solidFill>
-              <a:srgbClr val="D7E2EE"/>
-            </a:solidFill>
-          </a:ln>
-        </p:spPr>
-        <p:txBody>
-          <a:bodyPr lIns="27432" tIns="27432" rIns="27432" bIns="27432" rtlCol="0" anchor="ctr"/>
-          <a:lstStyle/>
-          <a:p>
-            <a:pPr algn="ctr">
-              <a:defRPr sz="980"/>
-            </a:pPr>
-            <a:r>
-              <a:rPr sz="980" b="1" dirty="0">
-                <a:solidFill>
-                  <a:srgbClr val="172B4D"/>
-                </a:solidFill>
-                <a:latin typeface="Consolas"/>
-              </a:rPr>
-              <a:t>are</a:t>
-            </a:r>
-          </a:p>
-        </p:txBody>
-      </p:sp>
-      <p:sp>
-        <p:nvSpPr>
-          <p:cNvPr id="26" name="Cell 26"/>
-          <p:cNvSpPr/>
-          <p:nvPr/>
-        </p:nvSpPr>
-        <p:spPr>
-          <a:xfrm>
-            <a:off x="2346960" y="2560320"/>
-            <a:ext cx="1188720" cy="365760"/>
-          </a:xfrm>
-          <a:prstGeom prst="rect">
-            <a:avLst/>
-          </a:prstGeom>
-          <a:solidFill>
-            <a:srgbClr val="F5F8FC"/>
-          </a:solidFill>
-          <a:ln w="12700">
-            <a:solidFill>
-              <a:srgbClr val="D7E2EE"/>
-            </a:solidFill>
-          </a:ln>
-        </p:spPr>
-        <p:txBody>
-          <a:bodyPr lIns="27432" tIns="27432" rIns="27432" bIns="27432" rtlCol="0" anchor="ctr"/>
-          <a:lstStyle/>
-          <a:p>
-            <a:pPr algn="ctr">
-              <a:defRPr sz="980"/>
-            </a:pPr>
-            <a:r>
-              <a:rPr sz="980" dirty="0">
-                <a:solidFill>
-                  <a:srgbClr val="172B4D"/>
-                </a:solidFill>
-                <a:latin typeface="Consolas"/>
-              </a:rPr>
-              <a:t>0.21</a:t>
-            </a:r>
-          </a:p>
-        </p:txBody>
-      </p:sp>
-      <p:sp>
-        <p:nvSpPr>
-          <p:cNvPr id="27" name="Cell 27"/>
-          <p:cNvSpPr/>
-          <p:nvPr/>
-        </p:nvSpPr>
-        <p:spPr>
-          <a:xfrm>
-            <a:off x="3535680" y="2560320"/>
-            <a:ext cx="1188720" cy="365760"/>
-          </a:xfrm>
-          <a:prstGeom prst="rect">
-            <a:avLst/>
-          </a:prstGeom>
-          <a:solidFill>
-            <a:srgbClr val="F5F8FC"/>
-          </a:solidFill>
-          <a:ln w="12700">
-            <a:solidFill>
-              <a:srgbClr val="D7E2EE"/>
-            </a:solidFill>
-          </a:ln>
-        </p:spPr>
-        <p:txBody>
-          <a:bodyPr lIns="27432" tIns="27432" rIns="27432" bIns="27432" rtlCol="0" anchor="ctr"/>
-          <a:lstStyle/>
-          <a:p>
-            <a:pPr algn="ctr">
-              <a:defRPr sz="980"/>
-            </a:pPr>
-            <a:r>
-              <a:rPr sz="980" dirty="0">
-                <a:solidFill>
-                  <a:srgbClr val="172B4D"/>
-                </a:solidFill>
-                <a:latin typeface="Consolas"/>
-              </a:rPr>
-              <a:t>-0.44</a:t>
-            </a:r>
-          </a:p>
-        </p:txBody>
-      </p:sp>
-      <p:sp>
-        <p:nvSpPr>
-          <p:cNvPr id="28" name="Cell 28"/>
-          <p:cNvSpPr/>
-          <p:nvPr/>
-        </p:nvSpPr>
-        <p:spPr>
-          <a:xfrm>
-            <a:off x="4724400" y="2560320"/>
-            <a:ext cx="1188720" cy="365760"/>
-          </a:xfrm>
-          <a:prstGeom prst="rect">
-            <a:avLst/>
-          </a:prstGeom>
-          <a:solidFill>
-            <a:srgbClr val="F5F8FC"/>
-          </a:solidFill>
-          <a:ln w="12700">
-            <a:solidFill>
-              <a:srgbClr val="D7E2EE"/>
-            </a:solidFill>
-          </a:ln>
-        </p:spPr>
-        <p:txBody>
-          <a:bodyPr lIns="27432" tIns="27432" rIns="27432" bIns="27432" rtlCol="0" anchor="ctr"/>
-          <a:lstStyle/>
-          <a:p>
-            <a:pPr algn="ctr">
-              <a:defRPr sz="980"/>
-            </a:pPr>
-            <a:r>
-              <a:rPr sz="980" dirty="0">
-                <a:solidFill>
-                  <a:srgbClr val="172B4D"/>
-                </a:solidFill>
-                <a:latin typeface="Consolas"/>
-              </a:rPr>
-              <a:t>0.78</a:t>
-            </a:r>
-          </a:p>
-        </p:txBody>
-      </p:sp>
-      <p:sp>
-        <p:nvSpPr>
-          <p:cNvPr id="29" name="Cell 29"/>
-          <p:cNvSpPr/>
-          <p:nvPr/>
-        </p:nvSpPr>
-        <p:spPr>
-          <a:xfrm>
-            <a:off x="5913120" y="2560320"/>
-            <a:ext cx="1188720" cy="365760"/>
-          </a:xfrm>
-          <a:prstGeom prst="rect">
-            <a:avLst/>
-          </a:prstGeom>
-          <a:solidFill>
-            <a:srgbClr val="F5F8FC"/>
-          </a:solidFill>
-          <a:ln w="12700">
-            <a:solidFill>
-              <a:srgbClr val="D7E2EE"/>
-            </a:solidFill>
-          </a:ln>
-        </p:spPr>
-        <p:txBody>
-          <a:bodyPr lIns="27432" tIns="27432" rIns="27432" bIns="27432" rtlCol="0" anchor="ctr"/>
-          <a:lstStyle/>
-          <a:p>
-            <a:pPr algn="ctr">
-              <a:defRPr sz="980"/>
-            </a:pPr>
-            <a:r>
-              <a:rPr sz="980" dirty="0">
-                <a:solidFill>
-                  <a:srgbClr val="172B4D"/>
-                </a:solidFill>
-                <a:latin typeface="Consolas"/>
-              </a:rPr>
-              <a:t>0.12</a:t>
-            </a:r>
-          </a:p>
-        </p:txBody>
-      </p:sp>
-      <p:sp>
-        <p:nvSpPr>
-          <p:cNvPr id="30" name="Cell 30"/>
-          <p:cNvSpPr/>
-          <p:nvPr/>
-        </p:nvSpPr>
-        <p:spPr>
-          <a:xfrm>
-            <a:off x="1158240" y="2926080"/>
-            <a:ext cx="1188720" cy="365760"/>
-          </a:xfrm>
-          <a:prstGeom prst="rect">
-            <a:avLst/>
-          </a:prstGeom>
-          <a:solidFill>
-            <a:srgbClr val="FFFFFF"/>
-          </a:solidFill>
-          <a:ln w="12700">
-            <a:solidFill>
-              <a:srgbClr val="D7E2EE"/>
-            </a:solidFill>
-          </a:ln>
-        </p:spPr>
-        <p:txBody>
-          <a:bodyPr lIns="27432" tIns="27432" rIns="27432" bIns="27432" rtlCol="0" anchor="ctr"/>
-          <a:lstStyle/>
-          <a:p>
-            <a:pPr algn="ctr">
-              <a:defRPr sz="980"/>
-            </a:pPr>
-            <a:r>
-              <a:rPr sz="980" b="1" dirty="0">
-                <a:solidFill>
-                  <a:srgbClr val="172B4D"/>
-                </a:solidFill>
-                <a:latin typeface="Consolas"/>
-              </a:rPr>
-              <a:t>MAG</a:t>
-            </a:r>
-          </a:p>
-        </p:txBody>
-      </p:sp>
-      <p:sp>
-        <p:nvSpPr>
-          <p:cNvPr id="31" name="Cell 31"/>
-          <p:cNvSpPr/>
-          <p:nvPr/>
-        </p:nvSpPr>
-        <p:spPr>
-          <a:xfrm>
-            <a:off x="2346960" y="2926080"/>
-            <a:ext cx="1188720" cy="365760"/>
-          </a:xfrm>
-          <a:prstGeom prst="rect">
-            <a:avLst/>
-          </a:prstGeom>
-          <a:solidFill>
-            <a:srgbClr val="FFFFFF"/>
-          </a:solidFill>
-          <a:ln w="12700">
-            <a:solidFill>
-              <a:srgbClr val="D7E2EE"/>
-            </a:solidFill>
-          </a:ln>
-        </p:spPr>
-        <p:txBody>
-          <a:bodyPr lIns="27432" tIns="27432" rIns="27432" bIns="27432" rtlCol="0" anchor="ctr"/>
-          <a:lstStyle/>
-          <a:p>
-            <a:pPr algn="ctr">
-              <a:defRPr sz="980"/>
-            </a:pPr>
-            <a:r>
-              <a:rPr sz="980" dirty="0">
-                <a:solidFill>
-                  <a:srgbClr val="172B4D"/>
-                </a:solidFill>
-                <a:latin typeface="Consolas"/>
-              </a:rPr>
-              <a:t>0.03</a:t>
-            </a:r>
-          </a:p>
-        </p:txBody>
-      </p:sp>
-      <p:sp>
-        <p:nvSpPr>
-          <p:cNvPr id="32" name="Cell 32"/>
-          <p:cNvSpPr/>
-          <p:nvPr/>
-        </p:nvSpPr>
-        <p:spPr>
-          <a:xfrm>
-            <a:off x="3535680" y="2926080"/>
-            <a:ext cx="1188720" cy="365760"/>
-          </a:xfrm>
-          <a:prstGeom prst="rect">
-            <a:avLst/>
-          </a:prstGeom>
-          <a:solidFill>
-            <a:srgbClr val="FFFFFF"/>
-          </a:solidFill>
-          <a:ln w="12700">
-            <a:solidFill>
-              <a:srgbClr val="D7E2EE"/>
-            </a:solidFill>
-          </a:ln>
-        </p:spPr>
-        <p:txBody>
-          <a:bodyPr lIns="27432" tIns="27432" rIns="27432" bIns="27432" rtlCol="0" anchor="ctr"/>
-          <a:lstStyle/>
-          <a:p>
-            <a:pPr algn="ctr">
-              <a:defRPr sz="980"/>
-            </a:pPr>
-            <a:r>
-              <a:rPr sz="980" dirty="0">
-                <a:solidFill>
-                  <a:srgbClr val="172B4D"/>
-                </a:solidFill>
-                <a:latin typeface="Consolas"/>
-              </a:rPr>
-              <a:t>0.91</a:t>
-            </a:r>
-          </a:p>
-        </p:txBody>
-      </p:sp>
-      <p:sp>
-        <p:nvSpPr>
-          <p:cNvPr id="33" name="Cell 33"/>
-          <p:cNvSpPr/>
-          <p:nvPr/>
-        </p:nvSpPr>
-        <p:spPr>
-          <a:xfrm>
-            <a:off x="4724400" y="2926080"/>
-            <a:ext cx="1188720" cy="365760"/>
-          </a:xfrm>
-          <a:prstGeom prst="rect">
-            <a:avLst/>
-          </a:prstGeom>
-          <a:solidFill>
-            <a:srgbClr val="FFFFFF"/>
-          </a:solidFill>
-          <a:ln w="12700">
-            <a:solidFill>
-              <a:srgbClr val="D7E2EE"/>
-            </a:solidFill>
-          </a:ln>
-        </p:spPr>
-        <p:txBody>
-          <a:bodyPr lIns="27432" tIns="27432" rIns="27432" bIns="27432" rtlCol="0" anchor="ctr"/>
-          <a:lstStyle/>
-          <a:p>
-            <a:pPr algn="ctr">
-              <a:defRPr sz="980"/>
-            </a:pPr>
-            <a:r>
-              <a:rPr sz="980" dirty="0">
-                <a:solidFill>
-                  <a:srgbClr val="172B4D"/>
-                </a:solidFill>
-                <a:latin typeface="Consolas"/>
-              </a:rPr>
-              <a:t>-0.14</a:t>
-            </a:r>
-          </a:p>
-        </p:txBody>
-      </p:sp>
-      <p:sp>
-        <p:nvSpPr>
-          <p:cNvPr id="34" name="Cell 34"/>
-          <p:cNvSpPr/>
-          <p:nvPr/>
-        </p:nvSpPr>
-        <p:spPr>
-          <a:xfrm>
-            <a:off x="5913120" y="2926080"/>
-            <a:ext cx="1188720" cy="365760"/>
-          </a:xfrm>
-          <a:prstGeom prst="rect">
-            <a:avLst/>
-          </a:prstGeom>
-          <a:solidFill>
-            <a:srgbClr val="FFFFFF"/>
-          </a:solidFill>
-          <a:ln w="12700">
-            <a:solidFill>
-              <a:srgbClr val="D7E2EE"/>
-            </a:solidFill>
-          </a:ln>
-        </p:spPr>
-        <p:txBody>
-          <a:bodyPr lIns="27432" tIns="27432" rIns="27432" bIns="27432" rtlCol="0" anchor="ctr"/>
-          <a:lstStyle/>
-          <a:p>
-            <a:pPr algn="ctr">
-              <a:defRPr sz="980"/>
-            </a:pPr>
-            <a:r>
-              <a:rPr sz="980" dirty="0">
-                <a:solidFill>
-                  <a:srgbClr val="172B4D"/>
-                </a:solidFill>
-                <a:latin typeface="Consolas"/>
-              </a:rPr>
-              <a:t>0.36</a:t>
-            </a:r>
-          </a:p>
-        </p:txBody>
-      </p:sp>
-      <p:sp>
-        <p:nvSpPr>
-          <p:cNvPr id="35" name="Cell 35"/>
-          <p:cNvSpPr/>
-          <p:nvPr/>
-        </p:nvSpPr>
-        <p:spPr>
-          <a:xfrm>
-            <a:off x="1158240" y="3291840"/>
-            <a:ext cx="1188720" cy="365760"/>
-          </a:xfrm>
-          <a:prstGeom prst="rect">
-            <a:avLst/>
-          </a:prstGeom>
-          <a:solidFill>
-            <a:srgbClr val="FFF3D6"/>
-          </a:solidFill>
-          <a:ln w="12700">
-            <a:solidFill>
-              <a:srgbClr val="D7E2EE"/>
-            </a:solidFill>
-          </a:ln>
-        </p:spPr>
-        <p:txBody>
-          <a:bodyPr lIns="27432" tIns="27432" rIns="27432" bIns="27432" rtlCol="0" anchor="ctr"/>
-          <a:lstStyle/>
-          <a:p>
-            <a:pPr algn="ctr">
-              <a:defRPr sz="980"/>
-            </a:pPr>
-            <a:r>
-              <a:rPr sz="980" b="1" dirty="0">
-                <a:solidFill>
-                  <a:srgbClr val="172B4D"/>
-                </a:solidFill>
-                <a:latin typeface="Consolas"/>
-              </a:rPr>
-              <a:t>sales</a:t>
-            </a:r>
-          </a:p>
-        </p:txBody>
-      </p:sp>
-      <p:sp>
-        <p:nvSpPr>
-          <p:cNvPr id="36" name="Cell 36"/>
-          <p:cNvSpPr/>
-          <p:nvPr/>
-        </p:nvSpPr>
-        <p:spPr>
-          <a:xfrm>
-            <a:off x="2346960" y="3291840"/>
-            <a:ext cx="1188720" cy="365760"/>
-          </a:xfrm>
-          <a:prstGeom prst="rect">
-            <a:avLst/>
-          </a:prstGeom>
-          <a:solidFill>
-            <a:srgbClr val="FFF3D6"/>
-          </a:solidFill>
-          <a:ln w="12700">
-            <a:solidFill>
-              <a:srgbClr val="D7E2EE"/>
-            </a:solidFill>
-          </a:ln>
-        </p:spPr>
-        <p:txBody>
-          <a:bodyPr lIns="27432" tIns="27432" rIns="27432" bIns="27432" rtlCol="0" anchor="ctr"/>
-          <a:lstStyle/>
-          <a:p>
-            <a:pPr algn="ctr">
-              <a:defRPr sz="980"/>
-            </a:pPr>
-            <a:r>
-              <a:rPr sz="980" b="1" dirty="0">
-                <a:solidFill>
-                  <a:srgbClr val="172B4D"/>
-                </a:solidFill>
-                <a:latin typeface="Consolas"/>
-              </a:rPr>
-              <a:t>-0.62</a:t>
-            </a:r>
-          </a:p>
-        </p:txBody>
-      </p:sp>
-      <p:sp>
-        <p:nvSpPr>
-          <p:cNvPr id="37" name="Cell 37"/>
-          <p:cNvSpPr/>
-          <p:nvPr/>
-        </p:nvSpPr>
-        <p:spPr>
-          <a:xfrm>
-            <a:off x="3535680" y="3291840"/>
-            <a:ext cx="1188720" cy="365760"/>
-          </a:xfrm>
-          <a:prstGeom prst="rect">
-            <a:avLst/>
-          </a:prstGeom>
-          <a:solidFill>
-            <a:srgbClr val="FFF3D6"/>
-          </a:solidFill>
-          <a:ln w="12700">
-            <a:solidFill>
-              <a:srgbClr val="D7E2EE"/>
-            </a:solidFill>
-          </a:ln>
-        </p:spPr>
-        <p:txBody>
-          <a:bodyPr lIns="27432" tIns="27432" rIns="27432" bIns="27432" rtlCol="0" anchor="ctr"/>
-          <a:lstStyle/>
-          <a:p>
-            <a:pPr algn="ctr">
-              <a:defRPr sz="980"/>
-            </a:pPr>
-            <a:r>
-              <a:rPr sz="980" b="1" dirty="0">
-                <a:solidFill>
-                  <a:srgbClr val="172B4D"/>
-                </a:solidFill>
-                <a:latin typeface="Consolas"/>
-              </a:rPr>
-              <a:t>0.18</a:t>
-            </a:r>
-          </a:p>
-        </p:txBody>
-      </p:sp>
-      <p:sp>
-        <p:nvSpPr>
-          <p:cNvPr id="38" name="Cell 38"/>
-          <p:cNvSpPr/>
-          <p:nvPr/>
-        </p:nvSpPr>
-        <p:spPr>
-          <a:xfrm>
-            <a:off x="4724400" y="3291840"/>
-            <a:ext cx="1188720" cy="365760"/>
-          </a:xfrm>
-          <a:prstGeom prst="rect">
-            <a:avLst/>
-          </a:prstGeom>
-          <a:solidFill>
-            <a:srgbClr val="FFF3D6"/>
-          </a:solidFill>
-          <a:ln w="12700">
-            <a:solidFill>
-              <a:srgbClr val="D7E2EE"/>
-            </a:solidFill>
-          </a:ln>
-        </p:spPr>
-        <p:txBody>
-          <a:bodyPr lIns="27432" tIns="27432" rIns="27432" bIns="27432" rtlCol="0" anchor="ctr"/>
-          <a:lstStyle/>
-          <a:p>
-            <a:pPr algn="ctr">
-              <a:defRPr sz="980"/>
-            </a:pPr>
-            <a:r>
-              <a:rPr sz="980" b="1" dirty="0">
-                <a:solidFill>
-                  <a:srgbClr val="172B4D"/>
-                </a:solidFill>
-                <a:latin typeface="Consolas"/>
-              </a:rPr>
-              <a:t>0.45</a:t>
-            </a:r>
-          </a:p>
-        </p:txBody>
-      </p:sp>
-      <p:sp>
-        <p:nvSpPr>
-          <p:cNvPr id="39" name="Cell 39"/>
-          <p:cNvSpPr/>
-          <p:nvPr/>
-        </p:nvSpPr>
-        <p:spPr>
-          <a:xfrm>
-            <a:off x="5913120" y="3291840"/>
-            <a:ext cx="1188720" cy="365760"/>
-          </a:xfrm>
-          <a:prstGeom prst="rect">
-            <a:avLst/>
-          </a:prstGeom>
-          <a:solidFill>
-            <a:srgbClr val="FFF3D6"/>
-          </a:solidFill>
-          <a:ln w="12700">
-            <a:solidFill>
-              <a:srgbClr val="D7E2EE"/>
-            </a:solidFill>
-          </a:ln>
-        </p:spPr>
-        <p:txBody>
-          <a:bodyPr lIns="27432" tIns="27432" rIns="27432" bIns="27432" rtlCol="0" anchor="ctr"/>
-          <a:lstStyle/>
-          <a:p>
-            <a:pPr algn="ctr">
-              <a:defRPr sz="980"/>
-            </a:pPr>
-            <a:r>
-              <a:rPr sz="980" b="1" dirty="0">
-                <a:solidFill>
-                  <a:srgbClr val="172B4D"/>
-                </a:solidFill>
-                <a:latin typeface="Consolas"/>
-              </a:rPr>
-              <a:t>-0.09</a:t>
-            </a:r>
-          </a:p>
-        </p:txBody>
-      </p:sp>
-      <p:sp>
-        <p:nvSpPr>
-          <p:cNvPr id="40" name="Cell 40"/>
-          <p:cNvSpPr/>
-          <p:nvPr/>
-        </p:nvSpPr>
-        <p:spPr>
-          <a:xfrm>
-            <a:off x="1158240" y="3657600"/>
-            <a:ext cx="1188720" cy="365760"/>
-          </a:xfrm>
-          <a:prstGeom prst="rect">
-            <a:avLst/>
-          </a:prstGeom>
-          <a:solidFill>
-            <a:srgbClr val="FFFFFF"/>
-          </a:solidFill>
-          <a:ln w="12700">
-            <a:solidFill>
-              <a:srgbClr val="D7E2EE"/>
-            </a:solidFill>
-          </a:ln>
-        </p:spPr>
-        <p:txBody>
-          <a:bodyPr lIns="27432" tIns="27432" rIns="27432" bIns="27432" rtlCol="0" anchor="ctr"/>
-          <a:lstStyle/>
-          <a:p>
-            <a:pPr algn="ctr">
-              <a:defRPr sz="980"/>
-            </a:pPr>
-            <a:r>
-              <a:rPr sz="980" b="1" dirty="0">
-                <a:solidFill>
-                  <a:srgbClr val="172B4D"/>
-                </a:solidFill>
-                <a:latin typeface="Consolas"/>
-              </a:rPr>
-              <a:t>up</a:t>
-            </a:r>
-          </a:p>
-        </p:txBody>
-      </p:sp>
-      <p:sp>
-        <p:nvSpPr>
-          <p:cNvPr id="41" name="Cell 41"/>
-          <p:cNvSpPr/>
-          <p:nvPr/>
-        </p:nvSpPr>
-        <p:spPr>
-          <a:xfrm>
-            <a:off x="2346960" y="3657600"/>
-            <a:ext cx="1188720" cy="365760"/>
-          </a:xfrm>
-          <a:prstGeom prst="rect">
-            <a:avLst/>
-          </a:prstGeom>
-          <a:solidFill>
-            <a:srgbClr val="FFFFFF"/>
-          </a:solidFill>
-          <a:ln w="12700">
-            <a:solidFill>
-              <a:srgbClr val="D7E2EE"/>
-            </a:solidFill>
-          </a:ln>
-        </p:spPr>
-        <p:txBody>
-          <a:bodyPr lIns="27432" tIns="27432" rIns="27432" bIns="27432" rtlCol="0" anchor="ctr"/>
-          <a:lstStyle/>
-          <a:p>
-            <a:pPr algn="ctr">
-              <a:defRPr sz="980"/>
-            </a:pPr>
-            <a:r>
-              <a:rPr sz="980" dirty="0">
-                <a:solidFill>
-                  <a:srgbClr val="172B4D"/>
-                </a:solidFill>
-                <a:latin typeface="Consolas"/>
-              </a:rPr>
-              <a:t>-0.31</a:t>
-            </a:r>
-          </a:p>
-        </p:txBody>
-      </p:sp>
-      <p:sp>
-        <p:nvSpPr>
-          <p:cNvPr id="42" name="Cell 42"/>
-          <p:cNvSpPr/>
-          <p:nvPr/>
-        </p:nvSpPr>
-        <p:spPr>
-          <a:xfrm>
-            <a:off x="3535680" y="3657600"/>
-            <a:ext cx="1188720" cy="365760"/>
-          </a:xfrm>
-          <a:prstGeom prst="rect">
-            <a:avLst/>
-          </a:prstGeom>
-          <a:solidFill>
-            <a:srgbClr val="FFFFFF"/>
-          </a:solidFill>
-          <a:ln w="12700">
-            <a:solidFill>
-              <a:srgbClr val="D7E2EE"/>
-            </a:solidFill>
-          </a:ln>
-        </p:spPr>
-        <p:txBody>
-          <a:bodyPr lIns="27432" tIns="27432" rIns="27432" bIns="27432" rtlCol="0" anchor="ctr"/>
-          <a:lstStyle/>
-          <a:p>
-            <a:pPr algn="ctr">
-              <a:defRPr sz="980"/>
-            </a:pPr>
-            <a:r>
-              <a:rPr sz="980" dirty="0">
-                <a:solidFill>
-                  <a:srgbClr val="172B4D"/>
-                </a:solidFill>
-                <a:latin typeface="Consolas"/>
-              </a:rPr>
-              <a:t>0.67</a:t>
-            </a:r>
-          </a:p>
-        </p:txBody>
-      </p:sp>
-      <p:sp>
-        <p:nvSpPr>
-          <p:cNvPr id="43" name="Cell 43"/>
-          <p:cNvSpPr/>
-          <p:nvPr/>
-        </p:nvSpPr>
-        <p:spPr>
-          <a:xfrm>
-            <a:off x="4724400" y="3657600"/>
-            <a:ext cx="1188720" cy="365760"/>
-          </a:xfrm>
-          <a:prstGeom prst="rect">
-            <a:avLst/>
-          </a:prstGeom>
-          <a:solidFill>
-            <a:srgbClr val="FFFFFF"/>
-          </a:solidFill>
-          <a:ln w="12700">
-            <a:solidFill>
-              <a:srgbClr val="D7E2EE"/>
-            </a:solidFill>
-          </a:ln>
-        </p:spPr>
-        <p:txBody>
-          <a:bodyPr lIns="27432" tIns="27432" rIns="27432" bIns="27432" rtlCol="0" anchor="ctr"/>
-          <a:lstStyle/>
-          <a:p>
-            <a:pPr algn="ctr">
-              <a:defRPr sz="980"/>
-            </a:pPr>
-            <a:r>
-              <a:rPr sz="980" dirty="0">
-                <a:solidFill>
-                  <a:srgbClr val="172B4D"/>
-                </a:solidFill>
-                <a:latin typeface="Consolas"/>
-              </a:rPr>
-              <a:t>0.11</a:t>
-            </a:r>
-          </a:p>
-        </p:txBody>
-      </p:sp>
-      <p:sp>
-        <p:nvSpPr>
-          <p:cNvPr id="44" name="Cell 44"/>
-          <p:cNvSpPr/>
-          <p:nvPr/>
-        </p:nvSpPr>
-        <p:spPr>
-          <a:xfrm>
-            <a:off x="5913120" y="3657600"/>
-            <a:ext cx="1188720" cy="365760"/>
-          </a:xfrm>
-          <a:prstGeom prst="rect">
-            <a:avLst/>
-          </a:prstGeom>
-          <a:solidFill>
-            <a:srgbClr val="FFFFFF"/>
-          </a:solidFill>
-          <a:ln w="12700">
-            <a:solidFill>
-              <a:srgbClr val="D7E2EE"/>
-            </a:solidFill>
-          </a:ln>
-        </p:spPr>
-        <p:txBody>
-          <a:bodyPr lIns="27432" tIns="27432" rIns="27432" bIns="27432" rtlCol="0" anchor="ctr"/>
-          <a:lstStyle/>
-          <a:p>
-            <a:pPr algn="ctr">
-              <a:defRPr sz="980"/>
-            </a:pPr>
-            <a:r>
-              <a:rPr sz="980" dirty="0">
-                <a:solidFill>
-                  <a:srgbClr val="172B4D"/>
-                </a:solidFill>
-                <a:latin typeface="Consolas"/>
-              </a:rPr>
-              <a:t>0.28</a:t>
-            </a:r>
-          </a:p>
-        </p:txBody>
-      </p:sp>
-      <p:sp>
-        <p:nvSpPr>
-          <p:cNvPr id="45" name="Cell 45"/>
-          <p:cNvSpPr/>
-          <p:nvPr/>
-        </p:nvSpPr>
-        <p:spPr>
-          <a:xfrm>
-            <a:off x="1158240" y="4023360"/>
-            <a:ext cx="1188720" cy="365760"/>
-          </a:xfrm>
-          <a:prstGeom prst="rect">
-            <a:avLst/>
-          </a:prstGeom>
-          <a:solidFill>
-            <a:srgbClr val="F5F8FC"/>
-          </a:solidFill>
-          <a:ln w="12700">
-            <a:solidFill>
-              <a:srgbClr val="D7E2EE"/>
-            </a:solidFill>
-          </a:ln>
-        </p:spPr>
-        <p:txBody>
-          <a:bodyPr lIns="27432" tIns="27432" rIns="27432" bIns="27432" rtlCol="0" anchor="ctr"/>
-          <a:lstStyle/>
-          <a:p>
-            <a:pPr algn="ctr">
-              <a:defRPr sz="980"/>
-            </a:pPr>
-            <a:r>
-              <a:rPr sz="980" b="1" dirty="0">
-                <a:solidFill>
-                  <a:srgbClr val="172B4D"/>
-                </a:solidFill>
-                <a:latin typeface="Consolas"/>
-              </a:rPr>
-              <a:t>in</a:t>
-            </a:r>
-          </a:p>
-        </p:txBody>
-      </p:sp>
-      <p:sp>
-        <p:nvSpPr>
-          <p:cNvPr id="46" name="Cell 46"/>
-          <p:cNvSpPr/>
-          <p:nvPr/>
-        </p:nvSpPr>
-        <p:spPr>
-          <a:xfrm>
-            <a:off x="2346960" y="4023360"/>
-            <a:ext cx="1188720" cy="365760"/>
-          </a:xfrm>
-          <a:prstGeom prst="rect">
-            <a:avLst/>
-          </a:prstGeom>
-          <a:solidFill>
-            <a:srgbClr val="F5F8FC"/>
-          </a:solidFill>
-          <a:ln w="12700">
-            <a:solidFill>
-              <a:srgbClr val="D7E2EE"/>
-            </a:solidFill>
-          </a:ln>
-        </p:spPr>
-        <p:txBody>
-          <a:bodyPr lIns="27432" tIns="27432" rIns="27432" bIns="27432" rtlCol="0" anchor="ctr"/>
-          <a:lstStyle/>
-          <a:p>
-            <a:pPr algn="ctr">
-              <a:defRPr sz="980"/>
-            </a:pPr>
-            <a:r>
-              <a:rPr sz="980" dirty="0">
-                <a:solidFill>
-                  <a:srgbClr val="172B4D"/>
-                </a:solidFill>
-                <a:latin typeface="Consolas"/>
-              </a:rPr>
-              <a:t>0.08</a:t>
-            </a:r>
-          </a:p>
-        </p:txBody>
-      </p:sp>
-      <p:sp>
-        <p:nvSpPr>
-          <p:cNvPr id="47" name="Cell 47"/>
-          <p:cNvSpPr/>
-          <p:nvPr/>
-        </p:nvSpPr>
-        <p:spPr>
-          <a:xfrm>
-            <a:off x="3535680" y="4023360"/>
-            <a:ext cx="1188720" cy="365760"/>
-          </a:xfrm>
-          <a:prstGeom prst="rect">
-            <a:avLst/>
-          </a:prstGeom>
-          <a:solidFill>
-            <a:srgbClr val="F5F8FC"/>
-          </a:solidFill>
-          <a:ln w="12700">
-            <a:solidFill>
-              <a:srgbClr val="D7E2EE"/>
-            </a:solidFill>
-          </a:ln>
-        </p:spPr>
-        <p:txBody>
-          <a:bodyPr lIns="27432" tIns="27432" rIns="27432" bIns="27432" rtlCol="0" anchor="ctr"/>
-          <a:lstStyle/>
-          <a:p>
-            <a:pPr algn="ctr">
-              <a:defRPr sz="980"/>
-            </a:pPr>
-            <a:r>
-              <a:rPr sz="980" dirty="0">
-                <a:solidFill>
-                  <a:srgbClr val="172B4D"/>
-                </a:solidFill>
-                <a:latin typeface="Consolas"/>
-              </a:rPr>
-              <a:t>-0.15</a:t>
-            </a:r>
-          </a:p>
-        </p:txBody>
-      </p:sp>
-      <p:sp>
-        <p:nvSpPr>
-          <p:cNvPr id="48" name="Cell 48"/>
-          <p:cNvSpPr/>
-          <p:nvPr/>
-        </p:nvSpPr>
-        <p:spPr>
-          <a:xfrm>
-            <a:off x="4724400" y="4023360"/>
-            <a:ext cx="1188720" cy="365760"/>
-          </a:xfrm>
-          <a:prstGeom prst="rect">
-            <a:avLst/>
-          </a:prstGeom>
-          <a:solidFill>
-            <a:srgbClr val="F5F8FC"/>
-          </a:solidFill>
-          <a:ln w="12700">
-            <a:solidFill>
-              <a:srgbClr val="D7E2EE"/>
-            </a:solidFill>
-          </a:ln>
-        </p:spPr>
-        <p:txBody>
-          <a:bodyPr lIns="27432" tIns="27432" rIns="27432" bIns="27432" rtlCol="0" anchor="ctr"/>
-          <a:lstStyle/>
-          <a:p>
-            <a:pPr algn="ctr">
-              <a:defRPr sz="980"/>
-            </a:pPr>
-            <a:r>
-              <a:rPr sz="980" dirty="0">
-                <a:solidFill>
-                  <a:srgbClr val="172B4D"/>
-                </a:solidFill>
-                <a:latin typeface="Consolas"/>
-              </a:rPr>
-              <a:t>0.22</a:t>
-            </a:r>
-          </a:p>
-        </p:txBody>
-      </p:sp>
-      <p:sp>
-        <p:nvSpPr>
-          <p:cNvPr id="49" name="Cell 49"/>
-          <p:cNvSpPr/>
-          <p:nvPr/>
-        </p:nvSpPr>
-        <p:spPr>
-          <a:xfrm>
-            <a:off x="5913120" y="4023360"/>
-            <a:ext cx="1188720" cy="365760"/>
-          </a:xfrm>
-          <a:prstGeom prst="rect">
-            <a:avLst/>
-          </a:prstGeom>
-          <a:solidFill>
-            <a:srgbClr val="F5F8FC"/>
-          </a:solidFill>
-          <a:ln w="12700">
-            <a:solidFill>
-              <a:srgbClr val="D7E2EE"/>
-            </a:solidFill>
-          </a:ln>
-        </p:spPr>
-        <p:txBody>
-          <a:bodyPr lIns="27432" tIns="27432" rIns="27432" bIns="27432" rtlCol="0" anchor="ctr"/>
-          <a:lstStyle/>
-          <a:p>
-            <a:pPr algn="ctr">
-              <a:defRPr sz="980"/>
-            </a:pPr>
-            <a:r>
-              <a:rPr sz="980" dirty="0">
-                <a:solidFill>
-                  <a:srgbClr val="172B4D"/>
-                </a:solidFill>
-                <a:latin typeface="Consolas"/>
-              </a:rPr>
-              <a:t>0.64</a:t>
-            </a:r>
-          </a:p>
-        </p:txBody>
-      </p:sp>
-      <p:sp>
-        <p:nvSpPr>
-          <p:cNvPr id="50" name="Cell 50"/>
-          <p:cNvSpPr/>
-          <p:nvPr/>
-        </p:nvSpPr>
-        <p:spPr>
-          <a:xfrm>
-            <a:off x="1158240" y="4389120"/>
-            <a:ext cx="1188720" cy="365760"/>
-          </a:xfrm>
-          <a:prstGeom prst="rect">
-            <a:avLst/>
-          </a:prstGeom>
-          <a:solidFill>
-            <a:srgbClr val="FFFFFF"/>
-          </a:solidFill>
-          <a:ln w="12700">
-            <a:solidFill>
-              <a:srgbClr val="D7E2EE"/>
-            </a:solidFill>
-          </a:ln>
-        </p:spPr>
-        <p:txBody>
-          <a:bodyPr lIns="27432" tIns="27432" rIns="27432" bIns="27432" rtlCol="0" anchor="ctr"/>
-          <a:lstStyle/>
-          <a:p>
-            <a:pPr algn="ctr">
-              <a:defRPr sz="980"/>
-            </a:pPr>
-            <a:r>
-              <a:rPr sz="980" b="1" dirty="0">
-                <a:solidFill>
-                  <a:srgbClr val="172B4D"/>
-                </a:solidFill>
-                <a:latin typeface="Consolas"/>
-              </a:rPr>
-              <a:t>chicago</a:t>
-            </a:r>
-          </a:p>
-        </p:txBody>
-      </p:sp>
-      <p:sp>
-        <p:nvSpPr>
-          <p:cNvPr id="51" name="Cell 51"/>
-          <p:cNvSpPr/>
-          <p:nvPr/>
-        </p:nvSpPr>
-        <p:spPr>
-          <a:xfrm>
-            <a:off x="2346960" y="4389120"/>
-            <a:ext cx="1188720" cy="365760"/>
-          </a:xfrm>
-          <a:prstGeom prst="rect">
-            <a:avLst/>
-          </a:prstGeom>
-          <a:solidFill>
-            <a:srgbClr val="FFFFFF"/>
-          </a:solidFill>
-          <a:ln w="12700">
-            <a:solidFill>
-              <a:srgbClr val="D7E2EE"/>
-            </a:solidFill>
-          </a:ln>
-        </p:spPr>
-        <p:txBody>
-          <a:bodyPr lIns="27432" tIns="27432" rIns="27432" bIns="27432" rtlCol="0" anchor="ctr"/>
-          <a:lstStyle/>
-          <a:p>
-            <a:pPr algn="ctr">
-              <a:defRPr sz="980"/>
-            </a:pPr>
-            <a:r>
-              <a:rPr sz="980" dirty="0">
-                <a:solidFill>
-                  <a:srgbClr val="172B4D"/>
-                </a:solidFill>
-                <a:latin typeface="Consolas"/>
-              </a:rPr>
-              <a:t>0.41</a:t>
-            </a:r>
-          </a:p>
-        </p:txBody>
-      </p:sp>
-      <p:sp>
-        <p:nvSpPr>
-          <p:cNvPr id="52" name="Cell 52"/>
-          <p:cNvSpPr/>
-          <p:nvPr/>
-        </p:nvSpPr>
-        <p:spPr>
-          <a:xfrm>
-            <a:off x="3535680" y="4389120"/>
-            <a:ext cx="1188720" cy="365760"/>
-          </a:xfrm>
-          <a:prstGeom prst="rect">
-            <a:avLst/>
-          </a:prstGeom>
-          <a:solidFill>
-            <a:srgbClr val="FFFFFF"/>
-          </a:solidFill>
-          <a:ln w="12700">
-            <a:solidFill>
-              <a:srgbClr val="D7E2EE"/>
-            </a:solidFill>
-          </a:ln>
-        </p:spPr>
-        <p:txBody>
-          <a:bodyPr lIns="27432" tIns="27432" rIns="27432" bIns="27432" rtlCol="0" anchor="ctr"/>
-          <a:lstStyle/>
-          <a:p>
-            <a:pPr algn="ctr">
-              <a:defRPr sz="980"/>
-            </a:pPr>
-            <a:r>
-              <a:rPr sz="980" dirty="0">
-                <a:solidFill>
-                  <a:srgbClr val="172B4D"/>
-                </a:solidFill>
-                <a:latin typeface="Consolas"/>
-              </a:rPr>
-              <a:t>0.12</a:t>
-            </a:r>
-          </a:p>
-        </p:txBody>
-      </p:sp>
-      <p:sp>
-        <p:nvSpPr>
-          <p:cNvPr id="53" name="Cell 53"/>
-          <p:cNvSpPr/>
-          <p:nvPr/>
-        </p:nvSpPr>
-        <p:spPr>
-          <a:xfrm>
-            <a:off x="4724400" y="4389120"/>
-            <a:ext cx="1188720" cy="365760"/>
-          </a:xfrm>
-          <a:prstGeom prst="rect">
-            <a:avLst/>
-          </a:prstGeom>
-          <a:solidFill>
-            <a:srgbClr val="FFFFFF"/>
-          </a:solidFill>
-          <a:ln w="12700">
-            <a:solidFill>
-              <a:srgbClr val="D7E2EE"/>
-            </a:solidFill>
-          </a:ln>
-        </p:spPr>
-        <p:txBody>
-          <a:bodyPr lIns="27432" tIns="27432" rIns="27432" bIns="27432" rtlCol="0" anchor="ctr"/>
-          <a:lstStyle/>
-          <a:p>
-            <a:pPr algn="ctr">
-              <a:defRPr sz="980"/>
-            </a:pPr>
-            <a:r>
-              <a:rPr sz="980" dirty="0">
-                <a:solidFill>
-                  <a:srgbClr val="172B4D"/>
-                </a:solidFill>
-                <a:latin typeface="Consolas"/>
-              </a:rPr>
-              <a:t>-0.33</a:t>
-            </a:r>
-          </a:p>
-        </p:txBody>
-      </p:sp>
-      <p:sp>
-        <p:nvSpPr>
-          <p:cNvPr id="54" name="Cell 54"/>
-          <p:cNvSpPr/>
-          <p:nvPr/>
-        </p:nvSpPr>
-        <p:spPr>
-          <a:xfrm>
-            <a:off x="5913120" y="4389120"/>
-            <a:ext cx="1188720" cy="365760"/>
-          </a:xfrm>
-          <a:prstGeom prst="rect">
-            <a:avLst/>
-          </a:prstGeom>
-          <a:solidFill>
-            <a:srgbClr val="FFFFFF"/>
-          </a:solidFill>
-          <a:ln w="12700">
-            <a:solidFill>
-              <a:srgbClr val="D7E2EE"/>
-            </a:solidFill>
-          </a:ln>
-        </p:spPr>
-        <p:txBody>
-          <a:bodyPr lIns="27432" tIns="27432" rIns="27432" bIns="27432" rtlCol="0" anchor="ctr"/>
-          <a:lstStyle/>
-          <a:p>
-            <a:pPr algn="ctr">
-              <a:defRPr sz="980"/>
-            </a:pPr>
-            <a:r>
-              <a:rPr sz="980" dirty="0">
-                <a:solidFill>
-                  <a:srgbClr val="172B4D"/>
-                </a:solidFill>
-                <a:latin typeface="Consolas"/>
-              </a:rPr>
-              <a:t>0.57</a:t>
-            </a:r>
-          </a:p>
-        </p:txBody>
-      </p:sp>
-      <p:sp>
-        <p:nvSpPr>
-          <p:cNvPr id="55" name="Cell 55"/>
-          <p:cNvSpPr/>
-          <p:nvPr/>
-        </p:nvSpPr>
-        <p:spPr>
-          <a:xfrm>
-            <a:off x="1158240" y="4754880"/>
-            <a:ext cx="1188720" cy="365760"/>
-          </a:xfrm>
-          <a:prstGeom prst="rect">
-            <a:avLst/>
-          </a:prstGeom>
-          <a:solidFill>
-            <a:srgbClr val="F5F8FC"/>
-          </a:solidFill>
-          <a:ln w="12700">
-            <a:solidFill>
-              <a:srgbClr val="D7E2EE"/>
-            </a:solidFill>
-          </a:ln>
-        </p:spPr>
-        <p:txBody>
-          <a:bodyPr lIns="27432" tIns="27432" rIns="27432" bIns="27432" rtlCol="0" anchor="ctr"/>
-          <a:lstStyle/>
-          <a:p>
-            <a:pPr algn="ctr">
-              <a:defRPr sz="980"/>
-            </a:pPr>
-            <a:r>
-              <a:rPr sz="980" b="1" dirty="0">
-                <a:solidFill>
-                  <a:srgbClr val="172B4D"/>
-                </a:solidFill>
-                <a:latin typeface="Consolas"/>
-              </a:rPr>
-              <a:t>?</a:t>
-            </a:r>
-          </a:p>
-        </p:txBody>
-      </p:sp>
-      <p:sp>
-        <p:nvSpPr>
-          <p:cNvPr id="56" name="Cell 56"/>
-          <p:cNvSpPr/>
-          <p:nvPr/>
-        </p:nvSpPr>
-        <p:spPr>
-          <a:xfrm>
-            <a:off x="2346960" y="4754880"/>
-            <a:ext cx="1188720" cy="365760"/>
-          </a:xfrm>
-          <a:prstGeom prst="rect">
-            <a:avLst/>
-          </a:prstGeom>
-          <a:solidFill>
-            <a:srgbClr val="F5F8FC"/>
-          </a:solidFill>
-          <a:ln w="12700">
-            <a:solidFill>
-              <a:srgbClr val="D7E2EE"/>
-            </a:solidFill>
-          </a:ln>
-        </p:spPr>
-        <p:txBody>
-          <a:bodyPr lIns="27432" tIns="27432" rIns="27432" bIns="27432" rtlCol="0" anchor="ctr"/>
-          <a:lstStyle/>
-          <a:p>
-            <a:pPr algn="ctr">
-              <a:defRPr sz="980"/>
-            </a:pPr>
-            <a:r>
-              <a:rPr sz="980" dirty="0">
-                <a:solidFill>
-                  <a:srgbClr val="172B4D"/>
-                </a:solidFill>
-                <a:latin typeface="Consolas"/>
-              </a:rPr>
-              <a:t>-0.07</a:t>
-            </a:r>
-          </a:p>
-        </p:txBody>
-      </p:sp>
-      <p:sp>
-        <p:nvSpPr>
-          <p:cNvPr id="57" name="Cell 57"/>
-          <p:cNvSpPr/>
-          <p:nvPr/>
-        </p:nvSpPr>
-        <p:spPr>
-          <a:xfrm>
-            <a:off x="3535680" y="4754880"/>
-            <a:ext cx="1188720" cy="365760"/>
-          </a:xfrm>
-          <a:prstGeom prst="rect">
-            <a:avLst/>
-          </a:prstGeom>
-          <a:solidFill>
-            <a:srgbClr val="F5F8FC"/>
-          </a:solidFill>
-          <a:ln w="12700">
-            <a:solidFill>
-              <a:srgbClr val="D7E2EE"/>
-            </a:solidFill>
-          </a:ln>
-        </p:spPr>
-        <p:txBody>
-          <a:bodyPr lIns="27432" tIns="27432" rIns="27432" bIns="27432" rtlCol="0" anchor="ctr"/>
-          <a:lstStyle/>
-          <a:p>
-            <a:pPr algn="ctr">
-              <a:defRPr sz="980"/>
-            </a:pPr>
-            <a:r>
-              <a:rPr sz="980" dirty="0">
-                <a:solidFill>
-                  <a:srgbClr val="172B4D"/>
-                </a:solidFill>
-                <a:latin typeface="Consolas"/>
-              </a:rPr>
-              <a:t>0.04</a:t>
-            </a:r>
-          </a:p>
-        </p:txBody>
-      </p:sp>
-      <p:sp>
-        <p:nvSpPr>
-          <p:cNvPr id="58" name="Cell 58"/>
-          <p:cNvSpPr/>
-          <p:nvPr/>
-        </p:nvSpPr>
-        <p:spPr>
-          <a:xfrm>
-            <a:off x="4724400" y="4754880"/>
-            <a:ext cx="1188720" cy="365760"/>
-          </a:xfrm>
-          <a:prstGeom prst="rect">
-            <a:avLst/>
-          </a:prstGeom>
-          <a:solidFill>
-            <a:srgbClr val="F5F8FC"/>
-          </a:solidFill>
-          <a:ln w="12700">
-            <a:solidFill>
-              <a:srgbClr val="D7E2EE"/>
-            </a:solidFill>
-          </a:ln>
-        </p:spPr>
-        <p:txBody>
-          <a:bodyPr lIns="27432" tIns="27432" rIns="27432" bIns="27432" rtlCol="0" anchor="ctr"/>
-          <a:lstStyle/>
-          <a:p>
-            <a:pPr algn="ctr">
-              <a:defRPr sz="980"/>
-            </a:pPr>
-            <a:r>
-              <a:rPr sz="980" dirty="0">
-                <a:solidFill>
-                  <a:srgbClr val="172B4D"/>
-                </a:solidFill>
-                <a:latin typeface="Consolas"/>
-              </a:rPr>
-              <a:t>0.19</a:t>
-            </a:r>
-          </a:p>
-        </p:txBody>
-      </p:sp>
-      <p:sp>
-        <p:nvSpPr>
-          <p:cNvPr id="59" name="Cell 59"/>
-          <p:cNvSpPr/>
-          <p:nvPr/>
-        </p:nvSpPr>
-        <p:spPr>
-          <a:xfrm>
-            <a:off x="5913120" y="4754880"/>
-            <a:ext cx="1188720" cy="365760"/>
-          </a:xfrm>
-          <a:prstGeom prst="rect">
-            <a:avLst/>
-          </a:prstGeom>
-          <a:solidFill>
-            <a:srgbClr val="F5F8FC"/>
-          </a:solidFill>
-          <a:ln w="12700">
-            <a:solidFill>
-              <a:srgbClr val="D7E2EE"/>
-            </a:solidFill>
-          </a:ln>
-        </p:spPr>
-        <p:txBody>
-          <a:bodyPr lIns="27432" tIns="27432" rIns="27432" bIns="27432" rtlCol="0" anchor="ctr"/>
-          <a:lstStyle/>
-          <a:p>
-            <a:pPr algn="ctr">
-              <a:defRPr sz="980"/>
-            </a:pPr>
-            <a:r>
-              <a:rPr sz="980" dirty="0">
-                <a:solidFill>
-                  <a:srgbClr val="172B4D"/>
-                </a:solidFill>
-                <a:latin typeface="Consolas"/>
-              </a:rPr>
-              <a:t>-0.22</a:t>
-            </a:r>
-          </a:p>
-        </p:txBody>
-      </p:sp>
-      <p:sp>
-        <p:nvSpPr>
-          <p:cNvPr id="80" name="Shape Label"/>
-          <p:cNvSpPr/>
-          <p:nvPr/>
-        </p:nvSpPr>
-        <p:spPr>
-          <a:xfrm>
-            <a:off x="1158240" y="5212080"/>
-            <a:ext cx="5943600" cy="621792"/>
-          </a:xfrm>
-          <a:prstGeom prst="roundRect">
-            <a:avLst/>
-          </a:prstGeom>
-          <a:solidFill>
-            <a:srgbClr val="FFFFFF"/>
-          </a:solidFill>
-          <a:ln w="12700">
-            <a:solidFill>
-              <a:srgbClr val="0B5CAD"/>
-            </a:solidFill>
-          </a:ln>
-        </p:spPr>
-        <p:txBody>
-          <a:bodyPr lIns="45720" tIns="45720" rIns="45720" bIns="45720" rtlCol="0" anchor="ctr"/>
-          <a:lstStyle/>
-          <a:p>
-            <a:pPr algn="ctr">
-              <a:defRPr sz="1450"/>
-            </a:pPr>
-            <a:r>
-              <a:rPr sz="1450" b="1" dirty="0">
-                <a:solidFill>
-                  <a:srgbClr val="0B2F5B"/>
-                </a:solidFill>
-                <a:latin typeface="Consolas"/>
-              </a:rPr>
-              <a:t>activation tensor shape = [7 token positions, 4 vector dimensions]</a:t>
-            </a:r>
-          </a:p>
-        </p:txBody>
-      </p:sp>
-      <p:sp>
-        <p:nvSpPr>
-          <p:cNvPr id="81" name="Bridge"/>
-          <p:cNvSpPr/>
-          <p:nvPr/>
-        </p:nvSpPr>
-        <p:spPr>
-          <a:xfrm>
-            <a:off x="7437120" y="5212080"/>
-            <a:ext cx="3657600" cy="621792"/>
-          </a:xfrm>
-          <a:prstGeom prst="roundRect">
-            <a:avLst/>
-          </a:prstGeom>
-          <a:solidFill>
-            <a:srgbClr val="FFFFFF"/>
-          </a:solidFill>
-          <a:ln w="12700">
-            <a:solidFill>
-              <a:srgbClr val="BED2E6"/>
-            </a:solidFill>
-          </a:ln>
-        </p:spPr>
-        <p:txBody>
-          <a:bodyPr lIns="91440" tIns="91440" rIns="91440" bIns="91440" rtlCol="0" anchor="ctr"/>
-          <a:lstStyle/>
-          <a:p>
-            <a:pPr algn="ctr">
-              <a:defRPr sz="1500"/>
-            </a:pPr>
-            <a:r>
-              <a:rPr sz="1500" b="1" dirty="0">
-                <a:solidFill>
-                  <a:srgbClr val="172B4D"/>
-                </a:solidFill>
-                <a:latin typeface="Aptos"/>
-              </a:rPr>
-              <a:t>Next session: how layers transform this tensor.</a:t>
-            </a:r>
-          </a:p>
-        </p:txBody>
-      </p:sp>
-      <p:sp>
-        <p:nvSpPr>
-          <p:cNvPr id="90" name="Footer"/>
-          <p:cNvSpPr/>
-          <p:nvPr/>
-        </p:nvSpPr>
-        <p:spPr>
-          <a:xfrm>
-            <a:off x="320040" y="6473952"/>
-            <a:ext cx="11521440" cy="228600"/>
-          </a:xfrm>
-          <a:prstGeom prst="rect">
-            <a:avLst/>
-          </a:prstGeom>
-          <a:noFill/>
-          <a:ln/>
-        </p:spPr>
-        <p:txBody>
-          <a:bodyPr lIns="0" tIns="0" rIns="0" bIns="0" rtlCol="0" anchor="t"/>
-          <a:lstStyle/>
-          <a:p>
-            <a:pPr algn="r">
-              <a:defRPr sz="850"/>
-            </a:pPr>
+            <a:pPr algn="r"/>
             <a:r>
               <a:rPr sz="850" dirty="0">
                 <a:solidFill>
@@ -11510,7 +11310,7 @@
                 </a:solidFill>
                 <a:latin typeface="Aptos"/>
               </a:rPr>
-              <a:t>AI Under the hood | Slide 19</a:t>
+              <a:t>AI Under the hood | Slide 20</a:t>
             </a:r>
           </a:p>
         </p:txBody>
@@ -11686,533 +11486,6 @@
 </file>
 
 <file path=ppt/slides/slide20.xml><?xml version="1.0" encoding="utf-8"?>
-<p:sld xmlns:a="http://schemas.openxmlformats.org/drawingml/2006/main" xmlns:r="http://schemas.openxmlformats.org/officeDocument/2006/relationships" xmlns:p="http://schemas.openxmlformats.org/presentationml/2006/main">
-  <p:cSld>
-    <p:spTree>
-      <p:nvGrpSpPr>
-        <p:cNvPr id="1" name=""/>
-        <p:cNvGrpSpPr/>
-        <p:nvPr/>
-      </p:nvGrpSpPr>
-      <p:grpSpPr>
-        <a:xfrm>
-          <a:off x="0" y="0"/>
-          <a:ext cx="0" cy="0"/>
-          <a:chOff x="0" y="0"/>
-          <a:chExt cx="0" cy="0"/>
-        </a:xfrm>
-      </p:grpSpPr>
-      <p:pic>
-        <p:nvPicPr>
-          <p:cNvPr id="2" name="MAGPAI From Question to Insight"/>
-          <p:cNvPicPr/>
-          <p:nvPr/>
-        </p:nvPicPr>
-        <p:blipFill>
-          <a:blip r:embed="rId2"/>
-          <a:stretch>
-            <a:fillRect/>
-          </a:stretch>
-        </p:blipFill>
-        <p:spPr>
-          <a:xfrm>
-            <a:off x="1466850" y="274320"/>
-            <a:ext cx="9258300" cy="6172200"/>
-          </a:xfrm>
-          <a:prstGeom prst="rect">
-            <a:avLst/>
-          </a:prstGeom>
-        </p:spPr>
-      </p:pic>
-      <p:sp>
-        <p:nvSpPr>
-          <p:cNvPr id="3" name="Footer"/>
-          <p:cNvSpPr txBox="1"/>
-          <p:nvPr/>
-        </p:nvSpPr>
-        <p:spPr>
-          <a:xfrm>
-            <a:off x="320040" y="6473952"/>
-            <a:ext cx="11521440" cy="228600"/>
-          </a:xfrm>
-          <a:prstGeom prst="rect">
-            <a:avLst/>
-          </a:prstGeom>
-          <a:noFill/>
-          <a:ln/>
-        </p:spPr>
-        <p:txBody>
-          <a:bodyPr lIns="0" tIns="0" rIns="0" bIns="0" rtlCol="0" anchor="t"/>
-          <a:lstStyle/>
-          <a:p>
-            <a:pPr algn="r"/>
-            <a:r>
-              <a:rPr sz="850" dirty="0">
-                <a:solidFill>
-                  <a:srgbClr val="6B778C"/>
-                </a:solidFill>
-                <a:latin typeface="Aptos"/>
-              </a:rPr>
-              <a:t>AI Under the hood | Slide 20</a:t>
-            </a:r>
-          </a:p>
-        </p:txBody>
-      </p:sp>
-    </p:spTree>
-  </p:cSld>
-  <p:clrMapOvr>
-    <a:masterClrMapping/>
-  </p:clrMapOvr>
-</p:sld>
-</file>
-
-<file path=ppt/slides/slide21.xml><?xml version="1.0" encoding="utf-8"?>
-<p:sld xmlns:a="http://schemas.openxmlformats.org/drawingml/2006/main" xmlns:r="http://schemas.openxmlformats.org/officeDocument/2006/relationships" xmlns:p="http://schemas.openxmlformats.org/presentationml/2006/main">
-  <p:cSld>
-    <p:spTree>
-      <p:nvGrpSpPr>
-        <p:cNvPr id="1" name=""/>
-        <p:cNvGrpSpPr/>
-        <p:nvPr/>
-      </p:nvGrpSpPr>
-      <p:grpSpPr>
-        <a:xfrm>
-          <a:off x="0" y="0"/>
-          <a:ext cx="0" cy="0"/>
-          <a:chOff x="0" y="0"/>
-          <a:chExt cx="0" cy="0"/>
-        </a:xfrm>
-      </p:grpSpPr>
-      <p:sp>
-        <p:nvSpPr>
-          <p:cNvPr id="2" name="TextBox 1"/>
-          <p:cNvSpPr txBox="1"/>
-          <p:nvPr/>
-        </p:nvSpPr>
-        <p:spPr>
-          <a:xfrm>
-            <a:off x="502920" y="320040"/>
-            <a:ext cx="11247120" cy="548640"/>
-          </a:xfrm>
-          <a:prstGeom prst="rect">
-            <a:avLst/>
-          </a:prstGeom>
-          <a:noFill/>
-        </p:spPr>
-        <p:txBody>
-          <a:bodyPr wrap="none">
-            <a:spAutoFit/>
-          </a:bodyPr>
-          <a:lstStyle/>
-          <a:p>
-            <a:pPr>
-              <a:defRPr sz="3000" b="1">
-                <a:solidFill>
-                  <a:srgbClr val="0B2F5B"/>
-                </a:solidFill>
-              </a:defRPr>
-            </a:pPr>
-            <a:r>
-              <a:t>Live Demo Path</a:t>
-            </a:r>
-          </a:p>
-        </p:txBody>
-      </p:sp>
-      <p:sp>
-        <p:nvSpPr>
-          <p:cNvPr id="3" name="TextBox 2"/>
-          <p:cNvSpPr txBox="1"/>
-          <p:nvPr/>
-        </p:nvSpPr>
-        <p:spPr>
-          <a:xfrm>
-            <a:off x="530352" y="868680"/>
-            <a:ext cx="10972800" cy="365760"/>
-          </a:xfrm>
-          <a:prstGeom prst="rect">
-            <a:avLst/>
-          </a:prstGeom>
-          <a:noFill/>
-        </p:spPr>
-        <p:txBody>
-          <a:bodyPr wrap="none">
-            <a:spAutoFit/>
-          </a:bodyPr>
-          <a:lstStyle/>
-          <a:p>
-            <a:pPr>
-              <a:defRPr sz="1600">
-                <a:solidFill>
-                  <a:srgbClr val="52616B"/>
-                </a:solidFill>
-              </a:defRPr>
-            </a:pPr>
-            <a:r>
-              <a:t>VS Code runs the demos</a:t>
-            </a:r>
-          </a:p>
-        </p:txBody>
-      </p:sp>
-      <p:sp>
-        <p:nvSpPr>
-          <p:cNvPr id="4" name="Rounded Rectangle 3"/>
-          <p:cNvSpPr/>
-          <p:nvPr/>
-        </p:nvSpPr>
-        <p:spPr>
-          <a:xfrm>
-            <a:off x="81481" y="1188720"/>
-            <a:ext cx="11887200" cy="1280160"/>
-          </a:xfrm>
-          <a:prstGeom prst="roundRect">
-            <a:avLst/>
-          </a:prstGeom>
-          <a:solidFill>
-            <a:srgbClr val="F5F8FC"/>
-          </a:solidFill>
-          <a:ln>
-            <a:solidFill>
-              <a:srgbClr val="BED2E6"/>
-            </a:solidFill>
-          </a:ln>
-        </p:spPr>
-        <p:style>
-          <a:lnRef idx="1">
-            <a:schemeClr val="accent1"/>
-          </a:lnRef>
-          <a:fillRef idx="3">
-            <a:schemeClr val="accent1"/>
-          </a:fillRef>
-          <a:effectRef idx="2">
-            <a:schemeClr val="accent1"/>
-          </a:effectRef>
-          <a:fontRef idx="minor">
-            <a:schemeClr val="lt1"/>
-          </a:fontRef>
-        </p:style>
-        <p:txBody>
-          <a:bodyPr lIns="182880" tIns="109728" rIns="182880" rtlCol="0" anchor="ctr"/>
-          <a:lstStyle/>
-          <a:p>
-            <a:pPr algn="ctr">
-              <a:defRPr sz="2500">
-                <a:solidFill>
-                  <a:srgbClr val="172B4D"/>
-                </a:solidFill>
-                <a:latin typeface="Consolas"/>
-              </a:defRPr>
-            </a:pPr>
-            <a:r>
-              <a:rPr dirty="0"/>
-              <a:t>Sentence ? Tokens ? Token IDs ? Embedding Table ? Input</a:t>
-            </a:r>
-            <a:r>
-              <a:rPr lang="en-US" dirty="0"/>
-              <a:t> </a:t>
-            </a:r>
-            <a:r>
-              <a:rPr dirty="0"/>
-              <a:t>Tensor</a:t>
-            </a:r>
-          </a:p>
-        </p:txBody>
-      </p:sp>
-      <p:sp>
-        <p:nvSpPr>
-          <p:cNvPr id="5" name="Rounded Rectangle 4"/>
-          <p:cNvSpPr/>
-          <p:nvPr/>
-        </p:nvSpPr>
-        <p:spPr>
-          <a:xfrm>
-            <a:off x="914400" y="2834640"/>
-            <a:ext cx="3200400" cy="1417320"/>
-          </a:xfrm>
-          <a:prstGeom prst="roundRect">
-            <a:avLst/>
-          </a:prstGeom>
-          <a:solidFill>
-            <a:srgbClr val="FFFFFF"/>
-          </a:solidFill>
-          <a:ln w="19050">
-            <a:solidFill>
-              <a:srgbClr val="0B5CAD"/>
-            </a:solidFill>
-          </a:ln>
-        </p:spPr>
-        <p:style>
-          <a:lnRef idx="1">
-            <a:schemeClr val="accent1"/>
-          </a:lnRef>
-          <a:fillRef idx="3">
-            <a:schemeClr val="accent1"/>
-          </a:fillRef>
-          <a:effectRef idx="2">
-            <a:schemeClr val="accent1"/>
-          </a:effectRef>
-          <a:fontRef idx="minor">
-            <a:schemeClr val="lt1"/>
-          </a:fontRef>
-        </p:style>
-        <p:txBody>
-          <a:bodyPr lIns="137160" tIns="91440" rIns="137160" rtlCol="0" anchor="ctr"/>
-          <a:lstStyle/>
-          <a:p>
-            <a:pPr algn="ctr">
-              <a:defRPr sz="1800" b="1">
-                <a:solidFill>
-                  <a:srgbClr val="0B2F5B"/>
-                </a:solidFill>
-              </a:defRPr>
-            </a:pPr>
-            <a:r>
-              <a:t>Demo 1</a:t>
-            </a:r>
-          </a:p>
-          <a:p>
-            <a:pPr>
-              <a:spcAft>
-                <a:spcPts val="200"/>
-              </a:spcAft>
-              <a:defRPr sz="1700">
-                <a:solidFill>
-                  <a:srgbClr val="172B4D"/>
-                </a:solidFill>
-              </a:defRPr>
-            </a:pPr>
-            <a:r>
-              <a:t>token_demo.py</a:t>
-            </a:r>
-          </a:p>
-          <a:p>
-            <a:pPr>
-              <a:spcAft>
-                <a:spcPts val="200"/>
-              </a:spcAft>
-              <a:defRPr sz="1700">
-                <a:solidFill>
-                  <a:srgbClr val="172B4D"/>
-                </a:solidFill>
-              </a:defRPr>
-            </a:pPr>
-            <a:r>
-              <a:t>Terminal pipeline</a:t>
-            </a:r>
-          </a:p>
-        </p:txBody>
-      </p:sp>
-      <p:sp>
-        <p:nvSpPr>
-          <p:cNvPr id="6" name="Rounded Rectangle 5"/>
-          <p:cNvSpPr/>
-          <p:nvPr/>
-        </p:nvSpPr>
-        <p:spPr>
-          <a:xfrm>
-            <a:off x="4480560" y="2834640"/>
-            <a:ext cx="3200400" cy="1417320"/>
-          </a:xfrm>
-          <a:prstGeom prst="roundRect">
-            <a:avLst/>
-          </a:prstGeom>
-          <a:solidFill>
-            <a:srgbClr val="FFFFFF"/>
-          </a:solidFill>
-          <a:ln w="19050">
-            <a:solidFill>
-              <a:srgbClr val="0B5CAD"/>
-            </a:solidFill>
-          </a:ln>
-        </p:spPr>
-        <p:style>
-          <a:lnRef idx="1">
-            <a:schemeClr val="accent1"/>
-          </a:lnRef>
-          <a:fillRef idx="3">
-            <a:schemeClr val="accent1"/>
-          </a:fillRef>
-          <a:effectRef idx="2">
-            <a:schemeClr val="accent1"/>
-          </a:effectRef>
-          <a:fontRef idx="minor">
-            <a:schemeClr val="lt1"/>
-          </a:fontRef>
-        </p:style>
-        <p:txBody>
-          <a:bodyPr lIns="137160" tIns="91440" rIns="137160" rtlCol="0" anchor="ctr"/>
-          <a:lstStyle/>
-          <a:p>
-            <a:pPr algn="ctr">
-              <a:defRPr sz="1800" b="1">
-                <a:solidFill>
-                  <a:srgbClr val="0B2F5B"/>
-                </a:solidFill>
-              </a:defRPr>
-            </a:pPr>
-            <a:r>
-              <a:t>Demo 2</a:t>
-            </a:r>
-          </a:p>
-          <a:p>
-            <a:pPr>
-              <a:spcAft>
-                <a:spcPts val="200"/>
-              </a:spcAft>
-              <a:defRPr sz="1700">
-                <a:solidFill>
-                  <a:srgbClr val="172B4D"/>
-                </a:solidFill>
-              </a:defRPr>
-            </a:pPr>
-            <a:r>
-              <a:t>token_streamlit_app.py</a:t>
-            </a:r>
-          </a:p>
-          <a:p>
-            <a:pPr>
-              <a:spcAft>
-                <a:spcPts val="200"/>
-              </a:spcAft>
-              <a:defRPr sz="1700">
-                <a:solidFill>
-                  <a:srgbClr val="172B4D"/>
-                </a:solidFill>
-              </a:defRPr>
-            </a:pPr>
-            <a:r>
-              <a:t>Visual table</a:t>
-            </a:r>
-          </a:p>
-        </p:txBody>
-      </p:sp>
-      <p:sp>
-        <p:nvSpPr>
-          <p:cNvPr id="7" name="Rounded Rectangle 6"/>
-          <p:cNvSpPr/>
-          <p:nvPr/>
-        </p:nvSpPr>
-        <p:spPr>
-          <a:xfrm>
-            <a:off x="8046720" y="2834640"/>
-            <a:ext cx="3200400" cy="1417320"/>
-          </a:xfrm>
-          <a:prstGeom prst="roundRect">
-            <a:avLst/>
-          </a:prstGeom>
-          <a:solidFill>
-            <a:srgbClr val="FFFFFF"/>
-          </a:solidFill>
-          <a:ln w="19050">
-            <a:solidFill>
-              <a:srgbClr val="0B5CAD"/>
-            </a:solidFill>
-          </a:ln>
-        </p:spPr>
-        <p:style>
-          <a:lnRef idx="1">
-            <a:schemeClr val="accent1"/>
-          </a:lnRef>
-          <a:fillRef idx="3">
-            <a:schemeClr val="accent1"/>
-          </a:fillRef>
-          <a:effectRef idx="2">
-            <a:schemeClr val="accent1"/>
-          </a:effectRef>
-          <a:fontRef idx="minor">
-            <a:schemeClr val="lt1"/>
-          </a:fontRef>
-        </p:style>
-        <p:txBody>
-          <a:bodyPr lIns="137160" tIns="91440" rIns="137160" rtlCol="0" anchor="ctr"/>
-          <a:lstStyle/>
-          <a:p>
-            <a:pPr algn="ctr">
-              <a:defRPr sz="1800" b="1">
-                <a:solidFill>
-                  <a:srgbClr val="0B2F5B"/>
-                </a:solidFill>
-              </a:defRPr>
-            </a:pPr>
-            <a:r>
-              <a:t>Demo 3</a:t>
-            </a:r>
-          </a:p>
-          <a:p>
-            <a:pPr>
-              <a:spcAft>
-                <a:spcPts val="200"/>
-              </a:spcAft>
-              <a:defRPr sz="1700">
-                <a:solidFill>
-                  <a:srgbClr val="172B4D"/>
-                </a:solidFill>
-              </a:defRPr>
-            </a:pPr>
-            <a:r>
-              <a:t>embedding_lookup_linear_algebra_demo.py</a:t>
-            </a:r>
-          </a:p>
-          <a:p>
-            <a:pPr>
-              <a:spcAft>
-                <a:spcPts val="200"/>
-              </a:spcAft>
-              <a:defRPr sz="1700">
-                <a:solidFill>
-                  <a:srgbClr val="172B4D"/>
-                </a:solidFill>
-              </a:defRPr>
-            </a:pPr>
-            <a:r>
-              <a:t>Lookup vs matrix multiply</a:t>
-            </a:r>
-          </a:p>
-        </p:txBody>
-      </p:sp>
-      <p:sp>
-        <p:nvSpPr>
-          <p:cNvPr id="8" name="TextBox 7"/>
-          <p:cNvSpPr txBox="1"/>
-          <p:nvPr/>
-        </p:nvSpPr>
-        <p:spPr>
-          <a:xfrm>
-            <a:off x="320040" y="6473952"/>
-            <a:ext cx="11521440" cy="228600"/>
-          </a:xfrm>
-          <a:prstGeom prst="rect">
-            <a:avLst/>
-          </a:prstGeom>
-          <a:noFill/>
-        </p:spPr>
-        <p:txBody>
-          <a:bodyPr wrap="none">
-            <a:spAutoFit/>
-          </a:bodyPr>
-          <a:lstStyle/>
-          <a:p>
-            <a:pPr>
-              <a:defRPr sz="900">
-                <a:solidFill>
-                  <a:srgbClr val="52616B"/>
-                </a:solidFill>
-              </a:defRPr>
-            </a:pPr>
-            <a:r>
-              <a:t>AI Under the hood | Slide 21</a:t>
-            </a:r>
-          </a:p>
-        </p:txBody>
-      </p:sp>
-    </p:spTree>
-  </p:cSld>
-  <p:clrMapOvr>
-    <a:masterClrMapping/>
-  </p:clrMapOvr>
-</p:sld>
-</file>
-
-<file path=ppt/slides/slide22.xml><?xml version="1.0" encoding="utf-8"?>
 <p:sld xmlns:a="http://schemas.openxmlformats.org/drawingml/2006/main" xmlns:r="http://schemas.openxmlformats.org/officeDocument/2006/relationships" xmlns:p="http://schemas.openxmlformats.org/presentationml/2006/main">
   <p:cSld>
     <p:spTree>
@@ -15345,8 +14618,8 @@
         </p:nvSpPr>
         <p:spPr>
           <a:xfrm>
-            <a:off x="1097280" y="4206240"/>
-            <a:ext cx="9966960" cy="914400"/>
+            <a:off x="822960" y="3926678"/>
+            <a:ext cx="10515600" cy="914400"/>
           </a:xfrm>
           <a:prstGeom prst="roundRect">
             <a:avLst/>
@@ -15444,6 +14717,112 @@
             <a:r>
               <a:t>AI Under the hood | Slide 9</a:t>
             </a:r>
+          </a:p>
+        </p:txBody>
+      </p:sp>
+      <p:sp>
+        <p:nvSpPr>
+          <p:cNvPr id="8" name="Rounded Rectangle 5">
+            <a:extLst>
+              <a:ext uri="{FF2B5EF4-FFF2-40B4-BE49-F238E27FC236}">
+                <a16:creationId xmlns:a16="http://schemas.microsoft.com/office/drawing/2014/main" id="{416B00A0-17ED-A2D9-D460-7611C951090B}"/>
+              </a:ext>
+            </a:extLst>
+          </p:cNvPr>
+          <p:cNvSpPr/>
+          <p:nvPr/>
+        </p:nvSpPr>
+        <p:spPr>
+          <a:xfrm>
+            <a:off x="822960" y="5166360"/>
+            <a:ext cx="10515600" cy="914400"/>
+          </a:xfrm>
+          <a:prstGeom prst="roundRect">
+            <a:avLst/>
+          </a:prstGeom>
+          <a:solidFill>
+            <a:srgbClr val="FFFFFF"/>
+          </a:solidFill>
+          <a:ln w="19050">
+            <a:solidFill>
+              <a:srgbClr val="0B5CAD"/>
+            </a:solidFill>
+          </a:ln>
+        </p:spPr>
+        <p:style>
+          <a:lnRef idx="1">
+            <a:schemeClr val="accent1"/>
+          </a:lnRef>
+          <a:fillRef idx="3">
+            <a:schemeClr val="accent1"/>
+          </a:fillRef>
+          <a:effectRef idx="2">
+            <a:schemeClr val="accent1"/>
+          </a:effectRef>
+          <a:fontRef idx="minor">
+            <a:schemeClr val="lt1"/>
+          </a:fontRef>
+        </p:style>
+        <p:txBody>
+          <a:bodyPr lIns="137160" tIns="91440" rIns="137160" rtlCol="0" anchor="ctr"/>
+          <a:lstStyle/>
+          <a:p>
+            <a:pPr algn="ctr">
+              <a:defRPr sz="1900" b="1">
+                <a:solidFill>
+                  <a:srgbClr val="0B2F5B"/>
+                </a:solidFill>
+              </a:defRPr>
+            </a:pPr>
+            <a:r>
+              <a:rPr lang="en-US" dirty="0"/>
+              <a:t>Key takeaway</a:t>
+            </a:r>
+          </a:p>
+          <a:p>
+            <a:pPr algn="ctr">
+              <a:spcAft>
+                <a:spcPts val="200"/>
+              </a:spcAft>
+              <a:defRPr sz="1800">
+                <a:solidFill>
+                  <a:srgbClr val="172B4D"/>
+                </a:solidFill>
+              </a:defRPr>
+            </a:pPr>
+            <a:r>
+              <a:rPr lang="en-US" dirty="0">
+                <a:highlight>
+                  <a:srgbClr val="FFFF00"/>
+                </a:highlight>
+              </a:rPr>
+              <a:t>The vocabulary is the dictionary that allows text to become numbers. </a:t>
+            </a:r>
+          </a:p>
+          <a:p>
+            <a:pPr algn="ctr">
+              <a:spcAft>
+                <a:spcPts val="200"/>
+              </a:spcAft>
+              <a:defRPr sz="1800">
+                <a:solidFill>
+                  <a:srgbClr val="172B4D"/>
+                </a:solidFill>
+              </a:defRPr>
+            </a:pPr>
+            <a:r>
+              <a:rPr lang="en-US" dirty="0">
+                <a:highlight>
+                  <a:srgbClr val="FFFF00"/>
+                </a:highlight>
+              </a:rPr>
+              <a:t>Once text becomes token IDs, the neural network can finally start learning.</a:t>
+            </a:r>
+            <a:endParaRPr dirty="0">
+              <a:highlight>
+                <a:srgbClr val="FFFF00"/>
+              </a:highlight>
+            </a:endParaRPr>
           </a:p>
         </p:txBody>
       </p:sp>

--- a/pptx/Session_01_Tokens_v1.0.pptx
+++ b/pptx/Session_01_Tokens_v1.0.pptx
@@ -14,17 +14,16 @@
     <p:sldId id="259" r:id="rId8"/>
     <p:sldId id="267" r:id="rId9"/>
     <p:sldId id="260" r:id="rId10"/>
-    <p:sldId id="268" r:id="rId11"/>
-    <p:sldId id="275" r:id="rId12"/>
-    <p:sldId id="261" r:id="rId13"/>
-    <p:sldId id="269" r:id="rId14"/>
-    <p:sldId id="262" r:id="rId15"/>
+    <p:sldId id="269" r:id="rId11"/>
+    <p:sldId id="262" r:id="rId12"/>
+    <p:sldId id="268" r:id="rId13"/>
+    <p:sldId id="275" r:id="rId14"/>
+    <p:sldId id="261" r:id="rId15"/>
     <p:sldId id="276" r:id="rId16"/>
     <p:sldId id="277" r:id="rId17"/>
     <p:sldId id="270" r:id="rId18"/>
     <p:sldId id="271" r:id="rId19"/>
-    <p:sldId id="272" r:id="rId20"/>
-    <p:sldId id="265" r:id="rId21"/>
+    <p:sldId id="278" r:id="rId20"/>
   </p:sldIdLst>
   <p:sldSz cx="12192000" cy="6858000"/>
   <p:notesSz cx="6858000" cy="9144000"/>
@@ -321,7 +320,7 @@
           <a:p>
             <a:fld id="{5BCAD085-E8A6-8845-BD4E-CB4CCA059FC4}" type="datetimeFigureOut">
               <a:rPr lang="en-US" smtClean="0"/>
-              <a:t>6/2/2026</a:t>
+              <a:t>6/4/2026</a:t>
             </a:fld>
             <a:endParaRPr lang="en-US"/>
           </a:p>
@@ -489,7 +488,7 @@
           <a:p>
             <a:fld id="{5BCAD085-E8A6-8845-BD4E-CB4CCA059FC4}" type="datetimeFigureOut">
               <a:rPr lang="en-US" smtClean="0"/>
-              <a:t>6/2/2026</a:t>
+              <a:t>6/4/2026</a:t>
             </a:fld>
             <a:endParaRPr lang="en-US"/>
           </a:p>
@@ -667,7 +666,7 @@
           <a:p>
             <a:fld id="{5BCAD085-E8A6-8845-BD4E-CB4CCA059FC4}" type="datetimeFigureOut">
               <a:rPr lang="en-US" smtClean="0"/>
-              <a:t>6/2/2026</a:t>
+              <a:t>6/4/2026</a:t>
             </a:fld>
             <a:endParaRPr lang="en-US"/>
           </a:p>
@@ -835,7 +834,7 @@
           <a:p>
             <a:fld id="{5BCAD085-E8A6-8845-BD4E-CB4CCA059FC4}" type="datetimeFigureOut">
               <a:rPr lang="en-US" smtClean="0"/>
-              <a:t>6/2/2026</a:t>
+              <a:t>6/4/2026</a:t>
             </a:fld>
             <a:endParaRPr lang="en-US"/>
           </a:p>
@@ -1080,7 +1079,7 @@
           <a:p>
             <a:fld id="{5BCAD085-E8A6-8845-BD4E-CB4CCA059FC4}" type="datetimeFigureOut">
               <a:rPr lang="en-US" smtClean="0"/>
-              <a:t>6/2/2026</a:t>
+              <a:t>6/4/2026</a:t>
             </a:fld>
             <a:endParaRPr lang="en-US"/>
           </a:p>
@@ -1365,7 +1364,7 @@
           <a:p>
             <a:fld id="{5BCAD085-E8A6-8845-BD4E-CB4CCA059FC4}" type="datetimeFigureOut">
               <a:rPr lang="en-US" smtClean="0"/>
-              <a:t>6/2/2026</a:t>
+              <a:t>6/4/2026</a:t>
             </a:fld>
             <a:endParaRPr lang="en-US"/>
           </a:p>
@@ -1784,7 +1783,7 @@
           <a:p>
             <a:fld id="{5BCAD085-E8A6-8845-BD4E-CB4CCA059FC4}" type="datetimeFigureOut">
               <a:rPr lang="en-US" smtClean="0"/>
-              <a:t>6/2/2026</a:t>
+              <a:t>6/4/2026</a:t>
             </a:fld>
             <a:endParaRPr lang="en-US"/>
           </a:p>
@@ -1901,7 +1900,7 @@
           <a:p>
             <a:fld id="{5BCAD085-E8A6-8845-BD4E-CB4CCA059FC4}" type="datetimeFigureOut">
               <a:rPr lang="en-US" smtClean="0"/>
-              <a:t>6/2/2026</a:t>
+              <a:t>6/4/2026</a:t>
             </a:fld>
             <a:endParaRPr lang="en-US"/>
           </a:p>
@@ -1996,7 +1995,7 @@
           <a:p>
             <a:fld id="{5BCAD085-E8A6-8845-BD4E-CB4CCA059FC4}" type="datetimeFigureOut">
               <a:rPr lang="en-US" smtClean="0"/>
-              <a:t>6/2/2026</a:t>
+              <a:t>6/4/2026</a:t>
             </a:fld>
             <a:endParaRPr lang="en-US"/>
           </a:p>
@@ -2271,7 +2270,7 @@
           <a:p>
             <a:fld id="{5BCAD085-E8A6-8845-BD4E-CB4CCA059FC4}" type="datetimeFigureOut">
               <a:rPr lang="en-US" smtClean="0"/>
-              <a:t>6/2/2026</a:t>
+              <a:t>6/4/2026</a:t>
             </a:fld>
             <a:endParaRPr lang="en-US"/>
           </a:p>
@@ -2523,7 +2522,7 @@
           <a:p>
             <a:fld id="{5BCAD085-E8A6-8845-BD4E-CB4CCA059FC4}" type="datetimeFigureOut">
               <a:rPr lang="en-US" smtClean="0"/>
-              <a:t>6/2/2026</a:t>
+              <a:t>6/4/2026</a:t>
             </a:fld>
             <a:endParaRPr lang="en-US"/>
           </a:p>
@@ -2734,7 +2733,7 @@
           <a:p>
             <a:fld id="{5BCAD085-E8A6-8845-BD4E-CB4CCA059FC4}" type="datetimeFigureOut">
               <a:rPr lang="en-US" smtClean="0"/>
-              <a:t>6/2/2026</a:t>
+              <a:t>6/4/2026</a:t>
             </a:fld>
             <a:endParaRPr lang="en-US"/>
           </a:p>
@@ -3322,7 +3321,7 @@
                 </a:solidFill>
                 <a:latin typeface="Aptos"/>
               </a:rPr>
-              <a:t>What Is an Embedding?</a:t>
+              <a:t>What Is a Vector?</a:t>
             </a:r>
           </a:p>
         </p:txBody>
@@ -3358,14 +3357,14 @@
                 </a:solidFill>
                 <a:latin typeface="Aptos"/>
               </a:rPr>
-              <a:t>A learned table that turns token IDs into numeric rows</a:t>
-            </a:r>
-          </a:p>
-        </p:txBody>
-      </p:sp>
-      <p:sp>
-        <p:nvSpPr>
-          <p:cNvPr id="4" name="Definition"/>
+              <a:t>A compact list of numbers the neural network can compute with</a:t>
+            </a:r>
+          </a:p>
+        </p:txBody>
+      </p:sp>
+      <p:sp>
+        <p:nvSpPr>
+          <p:cNvPr id="4" name="Vector"/>
           <p:cNvSpPr/>
           <p:nvPr/>
         </p:nvSpPr>
@@ -3400,35 +3399,49 @@
                 </a:solidFill>
                 <a:latin typeface="Aptos"/>
               </a:rPr>
-              <a:t>Embedding table</a:t>
+              <a:t>Vector</a:t>
             </a:r>
           </a:p>
           <a:p>
             <a:pPr algn="l">
-              <a:defRPr sz="1550"/>
-            </a:pPr>
-            <a:r>
-              <a:rPr sz="1550" dirty="0">
+              <a:defRPr sz="1500"/>
+            </a:pPr>
+            <a:r>
+              <a:rPr sz="1500" dirty="0">
                 <a:solidFill>
                   <a:srgbClr val="172B4D"/>
                 </a:solidFill>
-                <a:latin typeface="Aptos"/>
-              </a:rPr>
-              <a:t>An embedding table is a matrix learned during training. Each token ID selects one row from that matrix.</a:t>
-            </a:r>
-          </a:p>
-        </p:txBody>
-      </p:sp>
-      <p:sp>
-        <p:nvSpPr>
-          <p:cNvPr id="5" name="Example Table"/>
+                <a:latin typeface="Consolas"/>
+              </a:rPr>
+              <a:t>sales vector:</a:t>
+            </a:r>
+          </a:p>
+          <a:p>
+            <a:pPr algn="l">
+              <a:defRPr sz="1500"/>
+            </a:pPr>
+            <a:r>
+              <a:rPr sz="1500" dirty="0">
+                <a:solidFill>
+                  <a:srgbClr val="172B4D"/>
+                </a:solidFill>
+                <a:latin typeface="Consolas"/>
+              </a:rPr>
+              <a:t>[-0.62, 0.18, 0.45, -0.09]</a:t>
+            </a:r>
+          </a:p>
+        </p:txBody>
+      </p:sp>
+      <p:sp>
+        <p:nvSpPr>
+          <p:cNvPr id="5" name="Algorithm"/>
           <p:cNvSpPr/>
           <p:nvPr/>
         </p:nvSpPr>
         <p:spPr>
           <a:xfrm>
             <a:off x="4846320" y="1188720"/>
-            <a:ext cx="5760720" cy="2560320"/>
+            <a:ext cx="5760720" cy="2377440"/>
           </a:xfrm>
           <a:prstGeom prst="roundRect">
             <a:avLst/>
@@ -3456,7 +3469,7 @@
                 </a:solidFill>
                 <a:latin typeface="Aptos"/>
               </a:rPr>
-              <a:t>Tiny example</a:t>
+              <a:t>Demo algorithm for sales</a:t>
             </a:r>
           </a:p>
           <a:p>
@@ -3470,7 +3483,7 @@
                 </a:solidFill>
                 <a:latin typeface="Consolas"/>
               </a:rPr>
-              <a:t>ID   token      vector row</a:t>
+              <a:t>1. Token: "sales"</a:t>
             </a:r>
           </a:p>
           <a:p>
@@ -3484,7 +3497,7 @@
                 </a:solidFill>
                 <a:latin typeface="Consolas"/>
               </a:rPr>
-              <a:t>1    are        [ 0.21, -0.44,  0.78,  0.12]</a:t>
+              <a:t>2. Vocabulary lookup: "sales" -&gt; 3</a:t>
             </a:r>
           </a:p>
           <a:p>
@@ -3498,7 +3511,7 @@
                 </a:solidFill>
                 <a:latin typeface="Consolas"/>
               </a:rPr>
-              <a:t>2    MAG        [ 0.03,  0.91, -0.14,  0.36]</a:t>
+              <a:t>3. Embedding lookup: E[3]</a:t>
             </a:r>
           </a:p>
           <a:p>
@@ -3512,7 +3525,25 @@
                 </a:solidFill>
                 <a:latin typeface="Consolas"/>
               </a:rPr>
-              <a:t>3    sales      [-0.62,  0.18,  0.45, -0.09]</a:t>
+              <a:t>4. Output</a:t>
+            </a:r>
+            <a:r>
+              <a:rPr lang="en-US" sz="1500" dirty="0">
+                <a:solidFill>
+                  <a:srgbClr val="172B4D"/>
+                </a:solidFill>
+                <a:latin typeface="Consolas"/>
+              </a:rPr>
+              <a:t> Vector</a:t>
+            </a:r>
+            <a:r>
+              <a:rPr sz="1500" dirty="0">
+                <a:solidFill>
+                  <a:srgbClr val="172B4D"/>
+                </a:solidFill>
+                <a:latin typeface="Consolas"/>
+              </a:rPr>
+              <a:t>: [-0.62, 0.18, 0.45, -0.09]</a:t>
             </a:r>
           </a:p>
         </p:txBody>
@@ -3525,8 +3556,8 @@
         </p:nvSpPr>
         <p:spPr>
           <a:xfrm>
-            <a:off x="822960" y="5577840"/>
-            <a:ext cx="9966960" cy="914400"/>
+            <a:off x="822960" y="4346840"/>
+            <a:ext cx="9966960" cy="1807072"/>
           </a:xfrm>
           <a:prstGeom prst="roundRect">
             <a:avLst/>
@@ -3556,189 +3587,7 @@
               </a:rPr>
               <a:t>Key takeaway</a:t>
             </a:r>
-          </a:p>
-          <a:p>
-            <a:pPr algn="ctr">
-              <a:defRPr sz="1700"/>
-            </a:pPr>
-            <a:r>
-              <a:rPr sz="1700" dirty="0">
-                <a:solidFill>
-                  <a:srgbClr val="172B4D"/>
-                </a:solidFill>
-                <a:highlight>
-                  <a:srgbClr val="FFFF00"/>
-                </a:highlight>
-                <a:latin typeface="Aptos"/>
-              </a:rPr>
-              <a:t>During inference, we do not calculate these numbers from spelling. </a:t>
-            </a:r>
-            <a:r>
-              <a:rPr sz="1700" dirty="0">
-                <a:solidFill>
-                  <a:srgbClr val="172B4D"/>
-                </a:solidFill>
-                <a:latin typeface="Aptos"/>
-              </a:rPr>
-              <a:t>We look up the learned row.</a:t>
-            </a:r>
-          </a:p>
-        </p:txBody>
-      </p:sp>
-      <p:sp>
-        <p:nvSpPr>
-          <p:cNvPr id="40" name="Footer"/>
-          <p:cNvSpPr/>
-          <p:nvPr/>
-        </p:nvSpPr>
-        <p:spPr>
-          <a:xfrm>
-            <a:off x="320040" y="6473952"/>
-            <a:ext cx="11521440" cy="228600"/>
-          </a:xfrm>
-          <a:prstGeom prst="rect">
-            <a:avLst/>
-          </a:prstGeom>
-          <a:noFill/>
-          <a:ln/>
-        </p:spPr>
-        <p:txBody>
-          <a:bodyPr lIns="0" tIns="0" rIns="0" bIns="0" rtlCol="0" anchor="t"/>
-          <a:lstStyle/>
-          <a:p>
-            <a:pPr algn="r">
-              <a:defRPr sz="850"/>
-            </a:pPr>
-            <a:r>
-              <a:rPr sz="850" dirty="0">
-                <a:solidFill>
-                  <a:srgbClr val="6B778C"/>
-                </a:solidFill>
-                <a:latin typeface="Aptos"/>
-              </a:rPr>
-              <a:t>AI Under the hood | Slide 10</a:t>
-            </a:r>
-          </a:p>
-        </p:txBody>
-      </p:sp>
-      <p:sp>
-        <p:nvSpPr>
-          <p:cNvPr id="9" name="Definition">
-            <a:extLst>
-              <a:ext uri="{FF2B5EF4-FFF2-40B4-BE49-F238E27FC236}">
-                <a16:creationId xmlns:a16="http://schemas.microsoft.com/office/drawing/2014/main" id="{0FCD2D10-DB6A-EBB2-1E45-F3B0AF2ABB4B}"/>
-              </a:ext>
-            </a:extLst>
-          </p:cNvPr>
-          <p:cNvSpPr/>
-          <p:nvPr/>
-        </p:nvSpPr>
-        <p:spPr>
-          <a:xfrm>
-            <a:off x="822959" y="3831882"/>
-            <a:ext cx="9784081" cy="1654518"/>
-          </a:xfrm>
-          <a:prstGeom prst="roundRect">
-            <a:avLst/>
-          </a:prstGeom>
-          <a:solidFill>
-            <a:srgbClr val="F5F8FC"/>
-          </a:solidFill>
-          <a:ln>
-            <a:solidFill>
-              <a:srgbClr val="BED2E6"/>
-            </a:solidFill>
-          </a:ln>
-        </p:spPr>
-        <p:txBody>
-          <a:bodyPr lIns="137160" tIns="137160" rIns="137160" bIns="137160" rtlCol="0" anchor="t"/>
-          <a:lstStyle/>
-          <a:p>
-            <a:pPr algn="l">
-              <a:defRPr sz="1750"/>
-            </a:pPr>
-            <a:r>
-              <a:rPr lang="en-US" sz="1550" dirty="0">
-                <a:solidFill>
-                  <a:srgbClr val="0B2F5B"/>
-                </a:solidFill>
-                <a:latin typeface="Aptos" panose="020B0004020202020204" pitchFamily="34" charset="0"/>
-              </a:rPr>
-              <a:t>A neural network contains a gigantic Embedding table matrix</a:t>
-            </a:r>
-          </a:p>
-          <a:p>
-            <a:pPr algn="l">
-              <a:defRPr sz="1750"/>
-            </a:pPr>
-            <a:endParaRPr lang="en-US" sz="1550" dirty="0">
-              <a:solidFill>
-                <a:srgbClr val="0B2F5B"/>
-              </a:solidFill>
-              <a:latin typeface="Aptos" panose="020B0004020202020204" pitchFamily="34" charset="0"/>
-            </a:endParaRPr>
-          </a:p>
-          <a:p>
-            <a:pPr algn="l">
-              <a:defRPr sz="1750"/>
-            </a:pPr>
-            <a:r>
-              <a:rPr lang="en-US" sz="1550" dirty="0">
-                <a:solidFill>
-                  <a:srgbClr val="0B2F5B"/>
-                </a:solidFill>
-                <a:latin typeface="Aptos" panose="020B0004020202020204" pitchFamily="34" charset="0"/>
-              </a:rPr>
-              <a:t>Example dimensions:  Vocabulary size * Embedding dimension</a:t>
-            </a:r>
-          </a:p>
-          <a:p>
-            <a:pPr algn="l">
-              <a:defRPr sz="1750"/>
-            </a:pPr>
-            <a:r>
-              <a:rPr lang="en-US" sz="1550" dirty="0">
-                <a:solidFill>
-                  <a:srgbClr val="0B2F5B"/>
-                </a:solidFill>
-                <a:latin typeface="Aptos" panose="020B0004020202020204" pitchFamily="34" charset="0"/>
-              </a:rPr>
-              <a:t>GPT4                                            100,256          *               1,536</a:t>
-            </a:r>
-          </a:p>
-          <a:p>
-            <a:pPr algn="l">
-              <a:defRPr sz="1750"/>
-            </a:pPr>
-            <a:endParaRPr lang="en-US" sz="1550" dirty="0">
-              <a:solidFill>
-                <a:srgbClr val="0B2F5B"/>
-              </a:solidFill>
-              <a:latin typeface="Aptos" panose="020B0004020202020204" pitchFamily="34" charset="0"/>
-            </a:endParaRPr>
-          </a:p>
-          <a:p>
-            <a:pPr algn="l">
-              <a:defRPr sz="1750"/>
-            </a:pPr>
-            <a:r>
-              <a:rPr lang="en-US" sz="1550" dirty="0">
-                <a:solidFill>
-                  <a:srgbClr val="0B2F5B"/>
-                </a:solidFill>
-                <a:latin typeface="Aptos" panose="020B0004020202020204" pitchFamily="34" charset="0"/>
-              </a:rPr>
-              <a:t>Meaning: each token is represented by 1,536 floating point numbers</a:t>
-            </a:r>
-            <a:endParaRPr lang="en-US" sz="1550" dirty="0">
-              <a:latin typeface="Aptos" panose="020B0004020202020204" pitchFamily="34" charset="0"/>
-            </a:endParaRPr>
-          </a:p>
-          <a:p>
-            <a:pPr algn="l">
-              <a:defRPr sz="1750"/>
-            </a:pPr>
-            <a:endParaRPr sz="1750" dirty="0">
+            <a:endParaRPr lang="en-US" sz="1850" b="1" dirty="0">
               <a:solidFill>
                 <a:srgbClr val="0B2F5B"/>
               </a:solidFill>
@@ -3746,15 +3595,135 @@
             </a:endParaRPr>
           </a:p>
           <a:p>
-            <a:pPr algn="l">
-              <a:defRPr sz="1550"/>
-            </a:pPr>
-            <a:endParaRPr sz="1550" dirty="0">
+            <a:pPr algn="ctr">
+              <a:defRPr sz="1700"/>
+            </a:pPr>
+            <a:r>
+              <a:rPr sz="1700" dirty="0">
+                <a:solidFill>
+                  <a:srgbClr val="172B4D"/>
+                </a:solidFill>
+                <a:latin typeface="Aptos"/>
+              </a:rPr>
+              <a:t>A vector is the numeric representation that moves forward. </a:t>
+            </a:r>
+            <a:endParaRPr lang="en-US" sz="1700" dirty="0">
               <a:solidFill>
                 <a:srgbClr val="172B4D"/>
               </a:solidFill>
               <a:latin typeface="Aptos"/>
             </a:endParaRPr>
+          </a:p>
+          <a:p>
+            <a:pPr algn="ctr">
+              <a:defRPr sz="1700"/>
+            </a:pPr>
+            <a:r>
+              <a:rPr sz="1700" dirty="0">
+                <a:solidFill>
+                  <a:srgbClr val="172B4D"/>
+                </a:solidFill>
+                <a:latin typeface="Aptos"/>
+              </a:rPr>
+              <a:t>The values are learned, then selected by ID.</a:t>
+            </a:r>
+            <a:endParaRPr lang="en-US" sz="1700" dirty="0">
+              <a:solidFill>
+                <a:srgbClr val="172B4D"/>
+              </a:solidFill>
+              <a:latin typeface="Aptos"/>
+            </a:endParaRPr>
+          </a:p>
+          <a:p>
+            <a:pPr algn="ctr">
+              <a:defRPr sz="1700"/>
+            </a:pPr>
+            <a:endParaRPr lang="en-US" sz="1700" dirty="0">
+              <a:solidFill>
+                <a:srgbClr val="172B4D"/>
+              </a:solidFill>
+              <a:latin typeface="Aptos"/>
+            </a:endParaRPr>
+          </a:p>
+          <a:p>
+            <a:pPr algn="ctr">
+              <a:defRPr sz="1700"/>
+            </a:pPr>
+            <a:r>
+              <a:rPr lang="en-US" sz="1700" dirty="0">
+                <a:solidFill>
+                  <a:srgbClr val="172B4D"/>
+                </a:solidFill>
+                <a:highlight>
+                  <a:srgbClr val="FFFF00"/>
+                </a:highlight>
+                <a:latin typeface="Aptos"/>
+              </a:rPr>
+              <a:t>The word “Sales” now is a </a:t>
+            </a:r>
+            <a:r>
+              <a:rPr lang="en-US" sz="1700" u="sng" dirty="0">
+                <a:solidFill>
+                  <a:srgbClr val="172B4D"/>
+                </a:solidFill>
+                <a:highlight>
+                  <a:srgbClr val="FFFF00"/>
+                </a:highlight>
+                <a:latin typeface="Aptos"/>
+              </a:rPr>
+              <a:t>point in multidimensional space</a:t>
+            </a:r>
+            <a:r>
+              <a:rPr lang="en-US" sz="1700" dirty="0">
+                <a:solidFill>
+                  <a:srgbClr val="172B4D"/>
+                </a:solidFill>
+                <a:latin typeface="Aptos"/>
+              </a:rPr>
+              <a:t>.</a:t>
+            </a:r>
+            <a:endParaRPr sz="1700" dirty="0">
+              <a:solidFill>
+                <a:srgbClr val="172B4D"/>
+              </a:solidFill>
+              <a:latin typeface="Aptos"/>
+            </a:endParaRPr>
+          </a:p>
+        </p:txBody>
+      </p:sp>
+      <p:sp>
+        <p:nvSpPr>
+          <p:cNvPr id="40" name="Footer"/>
+          <p:cNvSpPr/>
+          <p:nvPr/>
+        </p:nvSpPr>
+        <p:spPr>
+          <a:xfrm>
+            <a:off x="320040" y="6473952"/>
+            <a:ext cx="11521440" cy="228600"/>
+          </a:xfrm>
+          <a:prstGeom prst="rect">
+            <a:avLst/>
+          </a:prstGeom>
+          <a:noFill/>
+          <a:ln/>
+        </p:spPr>
+        <p:txBody>
+          <a:bodyPr lIns="0" tIns="0" rIns="0" bIns="0" rtlCol="0" anchor="t"/>
+          <a:lstStyle/>
+          <a:p>
+            <a:pPr algn="r">
+              <a:defRPr sz="850"/>
+            </a:pPr>
+            <a:r>
+              <a:rPr sz="850" dirty="0">
+                <a:solidFill>
+                  <a:srgbClr val="6B778C"/>
+                </a:solidFill>
+                <a:latin typeface="Aptos"/>
+              </a:rPr>
+              <a:t>AI Under the hood | Slide 13</a:t>
+            </a:r>
           </a:p>
         </p:txBody>
       </p:sp>
@@ -3785,107 +3754,93 @@
       </p:grpSpPr>
       <p:sp>
         <p:nvSpPr>
-          <p:cNvPr id="2" name="Title"/>
+          <p:cNvPr id="2" name="TextBox 1"/>
           <p:cNvSpPr txBox="1"/>
           <p:nvPr/>
         </p:nvSpPr>
         <p:spPr>
           <a:xfrm>
-            <a:off x="548640" y="274320"/>
-            <a:ext cx="11125200" cy="548640"/>
+            <a:off x="502920" y="320040"/>
+            <a:ext cx="5577745" cy="553998"/>
           </a:xfrm>
           <a:prstGeom prst="rect">
             <a:avLst/>
           </a:prstGeom>
           <a:noFill/>
-          <a:ln/>
-        </p:spPr>
-        <p:txBody>
-          <a:bodyPr lIns="0" tIns="0" rIns="0" bIns="0" rtlCol="0" anchor="t"/>
-          <a:lstStyle/>
-          <a:p>
-            <a:pPr algn="l">
-              <a:defRPr sz="2600"/>
-            </a:pPr>
-            <a:r>
-              <a:rPr sz="2600" b="1" dirty="0">
+        </p:spPr>
+        <p:txBody>
+          <a:bodyPr wrap="none">
+            <a:spAutoFit/>
+          </a:bodyPr>
+          <a:lstStyle/>
+          <a:p>
+            <a:pPr>
+              <a:defRPr sz="3000" b="1">
                 <a:solidFill>
                   <a:srgbClr val="0B2F5B"/>
                 </a:solidFill>
-                <a:latin typeface="Aptos"/>
-              </a:rPr>
-              <a:t>Embeddings: Learned Geometric Coordinates of Meaning</a:t>
-            </a:r>
-          </a:p>
-        </p:txBody>
-      </p:sp>
-      <p:sp>
-        <p:nvSpPr>
-          <p:cNvPr id="3" name="Subtitle"/>
+              </a:defRPr>
+            </a:pPr>
+            <a:r>
+              <a:rPr dirty="0"/>
+              <a:t>How Token ID </a:t>
+            </a:r>
+            <a:r>
+              <a:rPr lang="en-US" dirty="0"/>
+              <a:t>3</a:t>
+            </a:r>
+            <a:r>
+              <a:rPr dirty="0"/>
+              <a:t> Becomes a Vector</a:t>
+            </a:r>
+          </a:p>
+        </p:txBody>
+      </p:sp>
+      <p:sp>
+        <p:nvSpPr>
+          <p:cNvPr id="3" name="TextBox 2"/>
           <p:cNvSpPr txBox="1"/>
           <p:nvPr/>
         </p:nvSpPr>
         <p:spPr>
           <a:xfrm>
-            <a:off x="594360" y="777240"/>
-            <a:ext cx="10820400" cy="365760"/>
+            <a:off x="530352" y="868680"/>
+            <a:ext cx="10972800" cy="365760"/>
           </a:xfrm>
           <a:prstGeom prst="rect">
             <a:avLst/>
           </a:prstGeom>
           <a:noFill/>
-          <a:ln/>
-        </p:spPr>
-        <p:txBody>
-          <a:bodyPr lIns="0" tIns="0" rIns="0" bIns="0" rtlCol="0" anchor="t"/>
-          <a:lstStyle/>
-          <a:p>
-            <a:pPr algn="l">
-              <a:defRPr sz="1550"/>
-            </a:pPr>
-            <a:r>
-              <a:rPr sz="1550" dirty="0">
+        </p:spPr>
+        <p:txBody>
+          <a:bodyPr wrap="none">
+            <a:spAutoFit/>
+          </a:bodyPr>
+          <a:lstStyle/>
+          <a:p>
+            <a:pPr>
+              <a:defRPr sz="1600">
                 <a:solidFill>
                   <a:srgbClr val="52616B"/>
                 </a:solidFill>
-                <a:latin typeface="Aptos"/>
-              </a:rPr>
-              <a:t>Training turns random vectors into a map where </a:t>
-            </a:r>
-            <a:r>
-              <a:rPr sz="1550" dirty="0">
-                <a:solidFill>
-                  <a:srgbClr val="52616B"/>
-                </a:solidFill>
-                <a:highlight>
-                  <a:srgbClr val="FFFF00"/>
-                </a:highlight>
-                <a:latin typeface="Aptos"/>
-              </a:rPr>
-              <a:t>distance carries semantics</a:t>
-            </a:r>
-            <a:r>
-              <a:rPr sz="1550" dirty="0">
-                <a:solidFill>
-                  <a:srgbClr val="52616B"/>
-                </a:solidFill>
-                <a:latin typeface="Aptos"/>
-              </a:rPr>
-              <a:t>.</a:t>
-            </a:r>
-          </a:p>
-        </p:txBody>
-      </p:sp>
-      <p:sp>
-        <p:nvSpPr>
-          <p:cNvPr id="4" name="Initially Random"/>
+              </a:defRPr>
+            </a:pPr>
+            <a:r>
+              <a:t>The algorithm is a row lookup</a:t>
+            </a:r>
+          </a:p>
+        </p:txBody>
+      </p:sp>
+      <p:sp>
+        <p:nvSpPr>
+          <p:cNvPr id="4" name="Rounded Rectangle 3"/>
           <p:cNvSpPr/>
           <p:nvPr/>
         </p:nvSpPr>
         <p:spPr>
           <a:xfrm>
-            <a:off x="640080" y="1280160"/>
-            <a:ext cx="3291840" cy="1737360"/>
+            <a:off x="731289" y="1234440"/>
+            <a:ext cx="3062113" cy="914400"/>
           </a:xfrm>
           <a:prstGeom prst="roundRect">
             <a:avLst/>
@@ -3899,69 +3854,91 @@
             </a:solidFill>
           </a:ln>
         </p:spPr>
-        <p:txBody>
-          <a:bodyPr lIns="91440" tIns="91440" rIns="91440" bIns="91440" rtlCol="0" anchor="t"/>
-          <a:lstStyle/>
-          <a:p>
-            <a:pPr algn="l">
-              <a:defRPr sz="1700"/>
-            </a:pPr>
-            <a:r>
-              <a:rPr sz="1700" b="1" dirty="0">
-                <a:solidFill>
-                  <a:srgbClr val="0B2F5B"/>
-                </a:solidFill>
-                <a:latin typeface="Aptos"/>
-              </a:rPr>
-              <a:t>Initially</a:t>
-            </a:r>
-          </a:p>
-          <a:p>
-            <a:pPr algn="l">
-              <a:defRPr sz="1250"/>
-            </a:pPr>
-            <a:r>
-              <a:rPr sz="1250" dirty="0">
+        <p:style>
+          <a:lnRef idx="1">
+            <a:schemeClr val="accent1"/>
+          </a:lnRef>
+          <a:fillRef idx="3">
+            <a:schemeClr val="accent1"/>
+          </a:fillRef>
+          <a:effectRef idx="2">
+            <a:schemeClr val="accent1"/>
+          </a:effectRef>
+          <a:fontRef idx="minor">
+            <a:schemeClr val="lt1"/>
+          </a:fontRef>
+        </p:style>
+        <p:txBody>
+          <a:bodyPr lIns="182880" tIns="109728" rIns="182880" rtlCol="0" anchor="ctr"/>
+          <a:lstStyle/>
+          <a:p>
+            <a:pPr algn="ctr">
+              <a:defRPr sz="2500">
                 <a:solidFill>
                   <a:srgbClr val="172B4D"/>
                 </a:solidFill>
                 <a:latin typeface="Consolas"/>
-              </a:rPr>
-              <a:t>MAG     = [random garbage]</a:t>
-            </a:r>
-            <a:br/>
-            <a:r>
-              <a:rPr sz="1250" dirty="0">
-                <a:solidFill>
-                  <a:srgbClr val="172B4D"/>
-                </a:solidFill>
-                <a:latin typeface="Consolas"/>
-              </a:rPr>
-              <a:t>sales   = [random garbage]</a:t>
-            </a:r>
-            <a:br/>
-            <a:r>
-              <a:rPr sz="1250" dirty="0">
-                <a:solidFill>
-                  <a:srgbClr val="172B4D"/>
-                </a:solidFill>
-                <a:latin typeface="Consolas"/>
-              </a:rPr>
-              <a:t>Chicago = [random garbage]</a:t>
-            </a:r>
-          </a:p>
-        </p:txBody>
-      </p:sp>
-      <p:sp>
-        <p:nvSpPr>
-          <p:cNvPr id="5" name="Training Contexts"/>
+              </a:defRPr>
+            </a:pPr>
+            <a:r>
+              <a:rPr dirty="0"/>
+              <a:t>Token ID </a:t>
+            </a:r>
+            <a:r>
+              <a:rPr lang="en-US" dirty="0"/>
+              <a:t>3</a:t>
+            </a:r>
+            <a:endParaRPr dirty="0"/>
+          </a:p>
+        </p:txBody>
+      </p:sp>
+      <p:cxnSp>
+        <p:nvCxnSpPr>
+          <p:cNvPr id="5" name="Connector 4"/>
+          <p:cNvCxnSpPr>
+            <a:cxnSpLocks/>
+          </p:cNvCxnSpPr>
+          <p:nvPr/>
+        </p:nvCxnSpPr>
+        <p:spPr>
+          <a:xfrm>
+            <a:off x="3793402" y="1691640"/>
+            <a:ext cx="675640" cy="0"/>
+          </a:xfrm>
+          <a:prstGeom prst="line">
+            <a:avLst/>
+          </a:prstGeom>
+          <a:ln w="38100">
+            <a:solidFill>
+              <a:srgbClr val="0B5CAD"/>
+            </a:solidFill>
+          </a:ln>
+        </p:spPr>
+        <p:style>
+          <a:lnRef idx="2">
+            <a:schemeClr val="accent1"/>
+          </a:lnRef>
+          <a:fillRef idx="0">
+            <a:schemeClr val="accent1"/>
+          </a:fillRef>
+          <a:effectRef idx="1">
+            <a:schemeClr val="accent1"/>
+          </a:effectRef>
+          <a:fontRef idx="minor">
+            <a:schemeClr val="tx1"/>
+          </a:fontRef>
+        </p:style>
+      </p:cxnSp>
+      <p:sp>
+        <p:nvSpPr>
+          <p:cNvPr id="6" name="Rounded Rectangle 5"/>
           <p:cNvSpPr/>
           <p:nvPr/>
         </p:nvSpPr>
         <p:spPr>
           <a:xfrm>
-            <a:off x="4389120" y="1280160"/>
-            <a:ext cx="3200400" cy="1737360"/>
+            <a:off x="4496474" y="1234440"/>
+            <a:ext cx="2485901" cy="914400"/>
           </a:xfrm>
           <a:prstGeom prst="roundRect">
             <a:avLst/>
@@ -3975,329 +3952,92 @@
             </a:solidFill>
           </a:ln>
         </p:spPr>
-        <p:txBody>
-          <a:bodyPr lIns="91440" tIns="91440" rIns="91440" bIns="91440" rtlCol="0" anchor="t"/>
-          <a:lstStyle/>
-          <a:p>
-            <a:pPr algn="l">
-              <a:defRPr sz="1700"/>
-            </a:pPr>
-            <a:r>
-              <a:rPr sz="1700" b="1" dirty="0">
-                <a:solidFill>
-                  <a:srgbClr val="0B2F5B"/>
-                </a:solidFill>
-                <a:latin typeface="Aptos"/>
-              </a:rPr>
-              <a:t>During training</a:t>
-            </a:r>
-          </a:p>
-          <a:p>
-            <a:pPr algn="l">
-              <a:defRPr sz="1350"/>
-            </a:pPr>
-            <a:r>
-              <a:rPr sz="1350" dirty="0">
+        <p:style>
+          <a:lnRef idx="1">
+            <a:schemeClr val="accent1"/>
+          </a:lnRef>
+          <a:fillRef idx="3">
+            <a:schemeClr val="accent1"/>
+          </a:fillRef>
+          <a:effectRef idx="2">
+            <a:schemeClr val="accent1"/>
+          </a:effectRef>
+          <a:fontRef idx="minor">
+            <a:schemeClr val="lt1"/>
+          </a:fontRef>
+        </p:style>
+        <p:txBody>
+          <a:bodyPr lIns="182880" tIns="109728" rIns="182880" rtlCol="0" anchor="ctr"/>
+          <a:lstStyle/>
+          <a:p>
+            <a:pPr algn="ctr">
+              <a:defRPr sz="2500">
                 <a:solidFill>
                   <a:srgbClr val="172B4D"/>
                 </a:solidFill>
                 <a:latin typeface="Consolas"/>
-              </a:rPr>
-              <a:t>sales up</a:t>
-            </a:r>
-            <a:br/>
-            <a:r>
-              <a:rPr sz="1350" dirty="0">
-                <a:solidFill>
-                  <a:srgbClr val="172B4D"/>
-                </a:solidFill>
-                <a:latin typeface="Consolas"/>
-              </a:rPr>
-              <a:t>sales increased</a:t>
-            </a:r>
-            <a:br/>
-            <a:r>
-              <a:rPr sz="1350" dirty="0">
-                <a:solidFill>
-                  <a:srgbClr val="172B4D"/>
-                </a:solidFill>
-                <a:latin typeface="Consolas"/>
-              </a:rPr>
-              <a:t>revenue growth</a:t>
-            </a:r>
-            <a:br/>
-            <a:r>
-              <a:rPr sz="1350" dirty="0">
-                <a:solidFill>
-                  <a:srgbClr val="172B4D"/>
-                </a:solidFill>
-                <a:latin typeface="Consolas"/>
-              </a:rPr>
-              <a:t>Chicago region</a:t>
-            </a:r>
-          </a:p>
-        </p:txBody>
-      </p:sp>
-      <p:sp>
-        <p:nvSpPr>
-          <p:cNvPr id="6" name="Geometry Meaning"/>
-          <p:cNvSpPr/>
-          <p:nvPr/>
-        </p:nvSpPr>
-        <p:spPr>
-          <a:xfrm>
-            <a:off x="8138160" y="1280160"/>
-            <a:ext cx="3200400" cy="1737360"/>
-          </a:xfrm>
-          <a:prstGeom prst="roundRect">
-            <a:avLst/>
-          </a:prstGeom>
-          <a:solidFill>
-            <a:srgbClr val="EAF3FF"/>
-          </a:solidFill>
-          <a:ln>
+              </a:defRPr>
+            </a:pPr>
+            <a:r>
+              <a:rPr dirty="0"/>
+              <a:t>E[</a:t>
+            </a:r>
+            <a:r>
+              <a:rPr lang="en-US" dirty="0"/>
+              <a:t>3</a:t>
+            </a:r>
+            <a:r>
+              <a:rPr dirty="0"/>
+              <a:t>]</a:t>
+            </a:r>
+          </a:p>
+        </p:txBody>
+      </p:sp>
+      <p:cxnSp>
+        <p:nvCxnSpPr>
+          <p:cNvPr id="7" name="Connector 6"/>
+          <p:cNvCxnSpPr/>
+          <p:nvPr/>
+        </p:nvCxnSpPr>
+        <p:spPr>
+          <a:xfrm>
+            <a:off x="6982375" y="1691640"/>
+            <a:ext cx="685800" cy="0"/>
+          </a:xfrm>
+          <a:prstGeom prst="line">
+            <a:avLst/>
+          </a:prstGeom>
+          <a:ln w="38100">
             <a:solidFill>
               <a:srgbClr val="0B5CAD"/>
             </a:solidFill>
           </a:ln>
         </p:spPr>
-        <p:txBody>
-          <a:bodyPr lIns="91440" tIns="91440" rIns="91440" bIns="91440" rtlCol="0" anchor="t"/>
-          <a:lstStyle/>
-          <a:p>
-            <a:pPr algn="l">
-              <a:defRPr sz="1700"/>
-            </a:pPr>
-            <a:r>
-              <a:rPr sz="1700" b="1" dirty="0">
-                <a:solidFill>
-                  <a:srgbClr val="0B2F5B"/>
-                </a:solidFill>
-                <a:latin typeface="Aptos"/>
-              </a:rPr>
-              <a:t>Backprop moves vectors</a:t>
-            </a:r>
-          </a:p>
-          <a:p>
-            <a:pPr algn="l">
-              <a:defRPr sz="1375"/>
-            </a:pPr>
-            <a:r>
-              <a:rPr sz="1375" dirty="0">
-                <a:solidFill>
-                  <a:srgbClr val="172B4D"/>
-                </a:solidFill>
-                <a:latin typeface="Aptos"/>
-              </a:rPr>
-              <a:t>similar words move closer</a:t>
-            </a:r>
-            <a:br/>
-            <a:r>
-              <a:rPr sz="1375" dirty="0">
-                <a:solidFill>
-                  <a:srgbClr val="172B4D"/>
-                </a:solidFill>
-                <a:latin typeface="Aptos"/>
-              </a:rPr>
-              <a:t>unrelated words move apart</a:t>
-            </a:r>
-            <a:br/>
-            <a:r>
-              <a:rPr sz="1375" dirty="0">
-                <a:solidFill>
-                  <a:srgbClr val="172B4D"/>
-                </a:solidFill>
-                <a:latin typeface="Aptos"/>
-              </a:rPr>
-              <a:t>geometry stores meaning</a:t>
-            </a:r>
-          </a:p>
-        </p:txBody>
-      </p:sp>
-      <p:sp>
-        <p:nvSpPr>
-          <p:cNvPr id="7" name="Visual Intuition"/>
+        <p:style>
+          <a:lnRef idx="2">
+            <a:schemeClr val="accent1"/>
+          </a:lnRef>
+          <a:fillRef idx="0">
+            <a:schemeClr val="accent1"/>
+          </a:fillRef>
+          <a:effectRef idx="1">
+            <a:schemeClr val="accent1"/>
+          </a:effectRef>
+          <a:fontRef idx="minor">
+            <a:schemeClr val="tx1"/>
+          </a:fontRef>
+        </p:style>
+      </p:cxnSp>
+      <p:sp>
+        <p:nvSpPr>
+          <p:cNvPr id="8" name="Rounded Rectangle 7"/>
           <p:cNvSpPr/>
           <p:nvPr/>
         </p:nvSpPr>
         <p:spPr>
           <a:xfrm>
-            <a:off x="640080" y="3370320"/>
-            <a:ext cx="5029200" cy="2011680"/>
-          </a:xfrm>
-          <a:prstGeom prst="roundRect">
-            <a:avLst/>
-          </a:prstGeom>
-          <a:solidFill>
-            <a:srgbClr val="FFFFFF"/>
-          </a:solidFill>
-          <a:ln>
-            <a:solidFill>
-              <a:srgbClr val="BED2E6"/>
-            </a:solidFill>
-          </a:ln>
-        </p:spPr>
-        <p:txBody>
-          <a:bodyPr lIns="91440" tIns="91440" rIns="91440" bIns="91440" rtlCol="0" anchor="t"/>
-          <a:lstStyle/>
-          <a:p>
-            <a:pPr algn="l">
-              <a:defRPr sz="1650"/>
-            </a:pPr>
-            <a:r>
-              <a:rPr sz="1650" b="1" dirty="0">
-                <a:solidFill>
-                  <a:srgbClr val="0B2F5B"/>
-                </a:solidFill>
-                <a:latin typeface="Aptos"/>
-              </a:rPr>
-              <a:t>Visual intuition: distances encode relationships</a:t>
-            </a:r>
-          </a:p>
-          <a:p>
-            <a:pPr algn="l">
-              <a:defRPr sz="1250"/>
-            </a:pPr>
-            <a:r>
-              <a:rPr sz="1250" dirty="0">
-                <a:solidFill>
-                  <a:srgbClr val="172B4D"/>
-                </a:solidFill>
-                <a:latin typeface="Consolas"/>
-              </a:rPr>
-              <a:t>king   (2, 9, 4)    queen  (2, 9, 5)</a:t>
-            </a:r>
-            <a:br/>
-            <a:r>
-              <a:rPr sz="1250" dirty="0">
-                <a:solidFill>
-                  <a:srgbClr val="172B4D"/>
-                </a:solidFill>
-                <a:latin typeface="Consolas"/>
-              </a:rPr>
-              <a:t>man    (1, 4, 3)    woman  (1, 4, 4)</a:t>
-            </a:r>
-          </a:p>
-          <a:p>
-            <a:pPr algn="l">
-              <a:defRPr sz="1550"/>
-            </a:pPr>
-            <a:r>
-              <a:rPr sz="1550" b="1" dirty="0">
-                <a:solidFill>
-                  <a:srgbClr val="0B5CAD"/>
-                </a:solidFill>
-                <a:latin typeface="Consolas"/>
-              </a:rPr>
-              <a:t>king - man + woman ~= queen</a:t>
-            </a:r>
-          </a:p>
-        </p:txBody>
-      </p:sp>
-      <p:sp>
-        <p:nvSpPr>
-          <p:cNvPr id="8" name="Sentence Embeddings"/>
-          <p:cNvSpPr/>
-          <p:nvPr/>
-        </p:nvSpPr>
-        <p:spPr>
-          <a:xfrm>
-            <a:off x="5989320" y="3370320"/>
-            <a:ext cx="5394960" cy="2011680"/>
-          </a:xfrm>
-          <a:prstGeom prst="roundRect">
-            <a:avLst/>
-          </a:prstGeom>
-          <a:solidFill>
-            <a:srgbClr val="FFFFFF"/>
-          </a:solidFill>
-          <a:ln>
-            <a:solidFill>
-              <a:srgbClr val="BED2E6"/>
-            </a:solidFill>
-          </a:ln>
-        </p:spPr>
-        <p:txBody>
-          <a:bodyPr lIns="91440" tIns="91440" rIns="91440" bIns="91440" rtlCol="0" anchor="t"/>
-          <a:lstStyle/>
-          <a:p>
-            <a:pPr algn="l">
-              <a:defRPr sz="1650"/>
-            </a:pPr>
-            <a:r>
-              <a:rPr sz="1650" b="1" dirty="0">
-                <a:solidFill>
-                  <a:srgbClr val="0B2F5B"/>
-                </a:solidFill>
-                <a:latin typeface="Aptos"/>
-              </a:rPr>
-              <a:t>Sentence embeddings combine token vectors</a:t>
-            </a:r>
-          </a:p>
-          <a:p>
-            <a:pPr algn="l">
-              <a:defRPr sz="1250"/>
-            </a:pPr>
-            <a:r>
-              <a:rPr sz="1250" dirty="0">
-                <a:solidFill>
-                  <a:srgbClr val="172B4D"/>
-                </a:solidFill>
-                <a:latin typeface="Aptos"/>
-              </a:rPr>
-              <a:t>averaging | attention | transformers | pooling</a:t>
-            </a:r>
-          </a:p>
-          <a:p>
-            <a:pPr algn="l">
-              <a:defRPr sz="1200"/>
-            </a:pPr>
-            <a:r>
-              <a:rPr sz="1200" dirty="0">
-                <a:solidFill>
-                  <a:srgbClr val="172B4D"/>
-                </a:solidFill>
-                <a:latin typeface="Consolas"/>
-              </a:rPr>
-              <a:t>"MAG sales are up in Chicago"</a:t>
-            </a:r>
-            <a:br/>
-            <a:r>
-              <a:rPr sz="1200" dirty="0">
-                <a:solidFill>
-                  <a:srgbClr val="172B4D"/>
-                </a:solidFill>
-                <a:latin typeface="Consolas"/>
-              </a:rPr>
-              <a:t>-&gt; [0.192, -0.551, 0.882, ... 1536 dims ...]</a:t>
-            </a:r>
-          </a:p>
-          <a:p>
-            <a:pPr algn="l">
-              <a:defRPr sz="1225"/>
-            </a:pPr>
-            <a:r>
-              <a:rPr sz="1225" dirty="0">
-                <a:solidFill>
-                  <a:srgbClr val="52616B"/>
-                </a:solidFill>
-                <a:latin typeface="Aptos"/>
-              </a:rPr>
-              <a:t>captures business context, trend, location, and organization semantics</a:t>
-            </a:r>
-          </a:p>
-        </p:txBody>
-      </p:sp>
-      <p:sp>
-        <p:nvSpPr>
-          <p:cNvPr id="9" name="Why This Works"/>
-          <p:cNvSpPr/>
-          <p:nvPr/>
-        </p:nvSpPr>
-        <p:spPr>
-          <a:xfrm>
-            <a:off x="914400" y="5791200"/>
-            <a:ext cx="10393680" cy="548640"/>
+            <a:off x="7668174" y="1228555"/>
+            <a:ext cx="3670385" cy="914400"/>
           </a:xfrm>
           <a:prstGeom prst="roundRect">
             <a:avLst/>
@@ -4311,54 +4051,141 @@
             </a:solidFill>
           </a:ln>
         </p:spPr>
-        <p:txBody>
-          <a:bodyPr lIns="91440" tIns="91440" rIns="91440" bIns="91440" rtlCol="0" anchor="ctr"/>
+        <p:style>
+          <a:lnRef idx="1">
+            <a:schemeClr val="accent1"/>
+          </a:lnRef>
+          <a:fillRef idx="3">
+            <a:schemeClr val="accent1"/>
+          </a:fillRef>
+          <a:effectRef idx="2">
+            <a:schemeClr val="accent1"/>
+          </a:effectRef>
+          <a:fontRef idx="minor">
+            <a:schemeClr val="lt1"/>
+          </a:fontRef>
+        </p:style>
+        <p:txBody>
+          <a:bodyPr lIns="182880" tIns="109728" rIns="182880" rtlCol="0" anchor="ctr"/>
+          <a:lstStyle/>
+          <a:p>
+            <a:pPr>
+              <a:defRPr sz="1600">
+                <a:solidFill>
+                  <a:srgbClr val="172B4D"/>
+                </a:solidFill>
+                <a:latin typeface="Consolas"/>
+              </a:defRPr>
+            </a:pPr>
+            <a:r>
+              <a:rPr dirty="0"/>
+              <a:t>[</a:t>
+            </a:r>
+            <a:r>
+              <a:rPr lang="en-US" dirty="0"/>
+              <a:t>-0.62,  0.18,  0.45, -0.09</a:t>
+            </a:r>
+            <a:r>
+              <a:rPr dirty="0"/>
+              <a:t>]</a:t>
+            </a:r>
+          </a:p>
+        </p:txBody>
+      </p:sp>
+      <p:sp>
+        <p:nvSpPr>
+          <p:cNvPr id="9" name="Rounded Rectangle 8"/>
+          <p:cNvSpPr/>
+          <p:nvPr/>
+        </p:nvSpPr>
+        <p:spPr>
+          <a:xfrm>
+            <a:off x="914400" y="3200400"/>
+            <a:ext cx="10424160" cy="1325880"/>
+          </a:xfrm>
+          <a:prstGeom prst="roundRect">
+            <a:avLst/>
+          </a:prstGeom>
+          <a:solidFill>
+            <a:srgbClr val="FFFFFF"/>
+          </a:solidFill>
+          <a:ln w="19050">
+            <a:solidFill>
+              <a:srgbClr val="0B5CAD"/>
+            </a:solidFill>
+          </a:ln>
+        </p:spPr>
+        <p:style>
+          <a:lnRef idx="1">
+            <a:schemeClr val="accent1"/>
+          </a:lnRef>
+          <a:fillRef idx="3">
+            <a:schemeClr val="accent1"/>
+          </a:fillRef>
+          <a:effectRef idx="2">
+            <a:schemeClr val="accent1"/>
+          </a:effectRef>
+          <a:fontRef idx="minor">
+            <a:schemeClr val="lt1"/>
+          </a:fontRef>
+        </p:style>
+        <p:txBody>
+          <a:bodyPr lIns="137160" tIns="91440" rIns="137160" rtlCol="0" anchor="ctr"/>
           <a:lstStyle/>
           <a:p>
             <a:pPr algn="ctr">
-              <a:defRPr sz="1450"/>
-            </a:pPr>
-            <a:r>
-              <a:rPr sz="1450" b="1" dirty="0">
+              <a:defRPr sz="1900" b="1">
+                <a:solidFill>
+                  <a:srgbClr val="0B2F5B"/>
+                </a:solidFill>
+              </a:defRPr>
+            </a:pPr>
+            <a:r>
+              <a:rPr dirty="0"/>
+              <a:t>Important distinction</a:t>
+            </a:r>
+          </a:p>
+          <a:p>
+            <a:pPr>
+              <a:spcAft>
+                <a:spcPts val="200"/>
+              </a:spcAft>
+              <a:defRPr sz="1800">
                 <a:solidFill>
                   <a:srgbClr val="172B4D"/>
                 </a:solidFill>
+              </a:defRPr>
+            </a:pPr>
+            <a:r>
+              <a:rPr dirty="0">
                 <a:highlight>
                   <a:srgbClr val="FFFF00"/>
                 </a:highlight>
-                <a:latin typeface="Aptos"/>
-              </a:rPr>
-              <a:t>Why it works: language has statistical structure. Context patterns -&gt; geometric relationships. </a:t>
-            </a:r>
-            <a:endParaRPr lang="en-US" sz="1450" b="1" dirty="0">
-              <a:solidFill>
-                <a:srgbClr val="172B4D"/>
-              </a:solidFill>
-              <a:highlight>
-                <a:srgbClr val="FFFF00"/>
-              </a:highlight>
-              <a:latin typeface="Aptos"/>
-            </a:endParaRPr>
-          </a:p>
-          <a:p>
-            <a:pPr algn="ctr">
-              <a:defRPr sz="1450"/>
-            </a:pPr>
-            <a:r>
-              <a:rPr sz="1450" dirty="0">
-                <a:solidFill>
-                  <a:srgbClr val="172B4D"/>
-                </a:solidFill>
-                <a:latin typeface="Aptos"/>
-              </a:rPr>
-              <a:t>Foundation for Word2Vec, GloVe, BERT, GPT, and LLMs.</a:t>
-            </a:r>
-          </a:p>
-        </p:txBody>
-      </p:sp>
-      <p:sp>
-        <p:nvSpPr>
-          <p:cNvPr id="10" name="Footer"/>
+              </a:rPr>
+              <a:t>The integer </a:t>
+            </a:r>
+            <a:r>
+              <a:rPr lang="en-US" dirty="0">
+                <a:highlight>
+                  <a:srgbClr val="FFFF00"/>
+                </a:highlight>
+              </a:rPr>
+              <a:t>3</a:t>
+            </a:r>
+            <a:r>
+              <a:rPr dirty="0">
+                <a:highlight>
+                  <a:srgbClr val="FFFF00"/>
+                </a:highlight>
+              </a:rPr>
+              <a:t> does not contain the meaning of “sales.” It points to a learned row in the embedding matrix.</a:t>
+            </a:r>
+          </a:p>
+        </p:txBody>
+      </p:sp>
+      <p:sp>
+        <p:nvSpPr>
+          <p:cNvPr id="10" name="TextBox 9"/>
           <p:cNvSpPr txBox="1"/>
           <p:nvPr/>
         </p:nvSpPr>
@@ -4386,7 +4213,7 @@
               </a:defRPr>
             </a:pPr>
             <a:r>
-              <a:t>AI Under the hood | Slide 11</a:t>
+              <a:t>AI Under the hood | Slide 14</a:t>
             </a:r>
           </a:p>
         </p:txBody>
@@ -4418,84 +4245,86 @@
       </p:grpSpPr>
       <p:sp>
         <p:nvSpPr>
-          <p:cNvPr id="2" name="TextBox 1"/>
-          <p:cNvSpPr txBox="1"/>
-          <p:nvPr/>
-        </p:nvSpPr>
-        <p:spPr>
-          <a:xfrm>
-            <a:off x="502920" y="320040"/>
-            <a:ext cx="11247120" cy="548640"/>
+          <p:cNvPr id="2" name="Title"/>
+          <p:cNvSpPr/>
+          <p:nvPr/>
+        </p:nvSpPr>
+        <p:spPr>
+          <a:xfrm>
+            <a:off x="640080" y="365760"/>
+            <a:ext cx="10911840" cy="548640"/>
           </a:xfrm>
           <a:prstGeom prst="rect">
             <a:avLst/>
           </a:prstGeom>
           <a:noFill/>
-        </p:spPr>
-        <p:txBody>
-          <a:bodyPr wrap="none">
-            <a:spAutoFit/>
-          </a:bodyPr>
-          <a:lstStyle/>
-          <a:p>
-            <a:pPr>
-              <a:defRPr sz="3000" b="1">
+          <a:ln/>
+        </p:spPr>
+        <p:txBody>
+          <a:bodyPr lIns="0" tIns="0" rIns="0" bIns="0" rtlCol="0" anchor="t"/>
+          <a:lstStyle/>
+          <a:p>
+            <a:pPr algn="l">
+              <a:defRPr sz="3000"/>
+            </a:pPr>
+            <a:r>
+              <a:rPr sz="3000" b="1" dirty="0">
                 <a:solidFill>
                   <a:srgbClr val="0B2F5B"/>
                 </a:solidFill>
-              </a:defRPr>
-            </a:pPr>
-            <a:r>
-              <a:t>Embedding Lookup</a:t>
-            </a:r>
-          </a:p>
-        </p:txBody>
-      </p:sp>
-      <p:sp>
-        <p:nvSpPr>
-          <p:cNvPr id="3" name="TextBox 2"/>
-          <p:cNvSpPr txBox="1"/>
-          <p:nvPr/>
-        </p:nvSpPr>
-        <p:spPr>
-          <a:xfrm>
-            <a:off x="530352" y="868680"/>
-            <a:ext cx="10972800" cy="365760"/>
+                <a:latin typeface="Aptos"/>
+              </a:rPr>
+              <a:t>What Is an Embedding?</a:t>
+            </a:r>
+          </a:p>
+        </p:txBody>
+      </p:sp>
+      <p:sp>
+        <p:nvSpPr>
+          <p:cNvPr id="3" name="Subtitle"/>
+          <p:cNvSpPr/>
+          <p:nvPr/>
+        </p:nvSpPr>
+        <p:spPr>
+          <a:xfrm>
+            <a:off x="640080" y="868680"/>
+            <a:ext cx="10911840" cy="365760"/>
           </a:xfrm>
           <a:prstGeom prst="rect">
             <a:avLst/>
           </a:prstGeom>
           <a:noFill/>
-        </p:spPr>
-        <p:txBody>
-          <a:bodyPr wrap="none">
-            <a:spAutoFit/>
-          </a:bodyPr>
-          <a:lstStyle/>
-          <a:p>
-            <a:pPr>
-              <a:defRPr sz="1600">
-                <a:solidFill>
-                  <a:srgbClr val="52616B"/>
-                </a:solidFill>
-              </a:defRPr>
-            </a:pPr>
-            <a:r>
-              <a:t>Token IDs become vectors</a:t>
-            </a:r>
-          </a:p>
-        </p:txBody>
-      </p:sp>
-      <p:sp>
-        <p:nvSpPr>
-          <p:cNvPr id="4" name="Rounded Rectangle 3"/>
+          <a:ln/>
+        </p:spPr>
+        <p:txBody>
+          <a:bodyPr lIns="0" tIns="0" rIns="0" bIns="0" rtlCol="0" anchor="t"/>
+          <a:lstStyle/>
+          <a:p>
+            <a:pPr algn="l">
+              <a:defRPr sz="1600"/>
+            </a:pPr>
+            <a:r>
+              <a:rPr sz="1600" dirty="0">
+                <a:solidFill>
+                  <a:srgbClr val="5E6C84"/>
+                </a:solidFill>
+                <a:latin typeface="Aptos"/>
+              </a:rPr>
+              <a:t>A learned table that turns token IDs into numeric rows</a:t>
+            </a:r>
+          </a:p>
+        </p:txBody>
+      </p:sp>
+      <p:sp>
+        <p:nvSpPr>
+          <p:cNvPr id="4" name="Definition"/>
           <p:cNvSpPr/>
           <p:nvPr/>
         </p:nvSpPr>
         <p:spPr>
           <a:xfrm>
-            <a:off x="914400" y="1280160"/>
-            <a:ext cx="10424160" cy="1616949"/>
+            <a:off x="822960" y="1371600"/>
+            <a:ext cx="3474720" cy="2194560"/>
           </a:xfrm>
           <a:prstGeom prst="roundRect">
             <a:avLst/>
@@ -4509,175 +4338,49 @@
             </a:solidFill>
           </a:ln>
         </p:spPr>
-        <p:style>
-          <a:lnRef idx="1">
-            <a:schemeClr val="accent1"/>
-          </a:lnRef>
-          <a:fillRef idx="3">
-            <a:schemeClr val="accent1"/>
-          </a:fillRef>
-          <a:effectRef idx="2">
-            <a:schemeClr val="accent1"/>
-          </a:effectRef>
-          <a:fontRef idx="minor">
-            <a:schemeClr val="lt1"/>
-          </a:fontRef>
-        </p:style>
-        <p:txBody>
-          <a:bodyPr lIns="182880" tIns="109728" rIns="182880" rtlCol="0" anchor="ctr"/>
-          <a:lstStyle/>
-          <a:p>
-            <a:pPr algn="ctr">
-              <a:defRPr sz="2200">
+        <p:txBody>
+          <a:bodyPr lIns="137160" tIns="137160" rIns="137160" bIns="137160" rtlCol="0" anchor="t"/>
+          <a:lstStyle/>
+          <a:p>
+            <a:pPr algn="l">
+              <a:defRPr sz="1750"/>
+            </a:pPr>
+            <a:r>
+              <a:rPr sz="1750" b="1" dirty="0">
+                <a:solidFill>
+                  <a:srgbClr val="0B2F5B"/>
+                </a:solidFill>
+                <a:latin typeface="Aptos"/>
+              </a:rPr>
+              <a:t>Embedding table</a:t>
+            </a:r>
+          </a:p>
+          <a:p>
+            <a:pPr algn="l">
+              <a:defRPr sz="1550"/>
+            </a:pPr>
+            <a:r>
+              <a:rPr sz="1550" dirty="0">
                 <a:solidFill>
                   <a:srgbClr val="172B4D"/>
                 </a:solidFill>
-                <a:latin typeface="Consolas"/>
-              </a:defRPr>
-            </a:pPr>
-            <a:r>
-              <a:rPr dirty="0"/>
-              <a:t>1 -&gt; [ 0.21, -0.44,  0.78,  0.12]</a:t>
-            </a:r>
-            <a:br>
-              <a:rPr dirty="0"/>
-            </a:br>
-            <a:r>
-              <a:rPr dirty="0"/>
-              <a:t>2 -&gt; [ 0.03,  0.91, -0.14,  0.36]</a:t>
-            </a:r>
-            <a:br>
-              <a:rPr dirty="0"/>
-            </a:br>
-            <a:r>
-              <a:rPr dirty="0"/>
-              <a:t>3 -&gt; [-0.62,  0.18,  0.45, -0.09]</a:t>
-            </a:r>
-          </a:p>
-        </p:txBody>
-      </p:sp>
-      <p:sp>
-        <p:nvSpPr>
-          <p:cNvPr id="5" name="Rounded Rectangle 4"/>
+                <a:latin typeface="Aptos"/>
+              </a:rPr>
+              <a:t>An embedding table is a matrix learned during training. Each token ID selects one row from that matrix.</a:t>
+            </a:r>
+          </a:p>
+        </p:txBody>
+      </p:sp>
+      <p:sp>
+        <p:nvSpPr>
+          <p:cNvPr id="5" name="Example Table"/>
           <p:cNvSpPr/>
           <p:nvPr/>
         </p:nvSpPr>
         <p:spPr>
           <a:xfrm>
-            <a:off x="868680" y="5288128"/>
-            <a:ext cx="10424160" cy="1097280"/>
-          </a:xfrm>
-          <a:prstGeom prst="roundRect">
-            <a:avLst/>
-          </a:prstGeom>
-          <a:solidFill>
-            <a:srgbClr val="EAF3FF"/>
-          </a:solidFill>
-          <a:ln w="19050">
-            <a:solidFill>
-              <a:srgbClr val="0B5CAD"/>
-            </a:solidFill>
-          </a:ln>
-        </p:spPr>
-        <p:style>
-          <a:lnRef idx="1">
-            <a:schemeClr val="accent1"/>
-          </a:lnRef>
-          <a:fillRef idx="3">
-            <a:schemeClr val="accent1"/>
-          </a:fillRef>
-          <a:effectRef idx="2">
-            <a:schemeClr val="accent1"/>
-          </a:effectRef>
-          <a:fontRef idx="minor">
-            <a:schemeClr val="lt1"/>
-          </a:fontRef>
-        </p:style>
-        <p:txBody>
-          <a:bodyPr lIns="137160" tIns="91440" rIns="137160" rtlCol="0" anchor="ctr"/>
-          <a:lstStyle/>
-          <a:p>
-            <a:pPr algn="ctr">
-              <a:defRPr sz="1900" b="1">
-                <a:solidFill>
-                  <a:srgbClr val="0B2F5B"/>
-                </a:solidFill>
-              </a:defRPr>
-            </a:pPr>
-            <a:r>
-              <a:rPr lang="en-US" dirty="0"/>
-              <a:t>Key takeaway</a:t>
-            </a:r>
-          </a:p>
-          <a:p>
-            <a:pPr>
-              <a:spcAft>
-                <a:spcPts val="200"/>
-              </a:spcAft>
-              <a:defRPr sz="1800">
-                <a:solidFill>
-                  <a:srgbClr val="172B4D"/>
-                </a:solidFill>
-              </a:defRPr>
-            </a:pPr>
-            <a:r>
-              <a:rPr dirty="0"/>
-              <a:t>The token ID is an index. It selects a row from the embedding matrix. The selected row is the token vector.</a:t>
-            </a:r>
-          </a:p>
-        </p:txBody>
-      </p:sp>
-      <p:sp>
-        <p:nvSpPr>
-          <p:cNvPr id="6" name="TextBox 5"/>
-          <p:cNvSpPr txBox="1"/>
-          <p:nvPr/>
-        </p:nvSpPr>
-        <p:spPr>
-          <a:xfrm>
-            <a:off x="320040" y="6473952"/>
-            <a:ext cx="11521440" cy="228600"/>
-          </a:xfrm>
-          <a:prstGeom prst="rect">
-            <a:avLst/>
-          </a:prstGeom>
-          <a:noFill/>
-        </p:spPr>
-        <p:txBody>
-          <a:bodyPr wrap="none">
-            <a:spAutoFit/>
-          </a:bodyPr>
-          <a:lstStyle/>
-          <a:p>
-            <a:pPr>
-              <a:defRPr sz="900">
-                <a:solidFill>
-                  <a:srgbClr val="52616B"/>
-                </a:solidFill>
-              </a:defRPr>
-            </a:pPr>
-            <a:r>
-              <a:t>AI Under the hood | Slide 12</a:t>
-            </a:r>
-          </a:p>
-        </p:txBody>
-      </p:sp>
-      <p:sp>
-        <p:nvSpPr>
-          <p:cNvPr id="7" name="Rounded Rectangle 3">
-            <a:extLst>
-              <a:ext uri="{FF2B5EF4-FFF2-40B4-BE49-F238E27FC236}">
-                <a16:creationId xmlns:a16="http://schemas.microsoft.com/office/drawing/2014/main" id="{4D62C980-9521-DFEE-0DCD-FEEC67E8FE40}"/>
-              </a:ext>
-            </a:extLst>
-          </p:cNvPr>
-          <p:cNvSpPr/>
-          <p:nvPr/>
-        </p:nvSpPr>
-        <p:spPr>
-          <a:xfrm>
-            <a:off x="883920" y="3307531"/>
-            <a:ext cx="10424160" cy="1616949"/>
+            <a:off x="4846320" y="1188720"/>
+            <a:ext cx="5760720" cy="2560320"/>
           </a:xfrm>
           <a:prstGeom prst="roundRect">
             <a:avLst/>
@@ -4691,53 +4394,319 @@
             </a:solidFill>
           </a:ln>
         </p:spPr>
-        <p:style>
-          <a:lnRef idx="1">
-            <a:schemeClr val="accent1"/>
-          </a:lnRef>
-          <a:fillRef idx="3">
-            <a:schemeClr val="accent1"/>
-          </a:fillRef>
-          <a:effectRef idx="2">
-            <a:schemeClr val="accent1"/>
-          </a:effectRef>
-          <a:fontRef idx="minor">
-            <a:schemeClr val="lt1"/>
-          </a:fontRef>
-        </p:style>
-        <p:txBody>
-          <a:bodyPr lIns="182880" tIns="109728" rIns="182880" rtlCol="0" anchor="ctr"/>
+        <p:txBody>
+          <a:bodyPr lIns="137160" tIns="137160" rIns="137160" bIns="137160" rtlCol="0" anchor="t"/>
+          <a:lstStyle/>
+          <a:p>
+            <a:pPr algn="l">
+              <a:defRPr sz="1750"/>
+            </a:pPr>
+            <a:r>
+              <a:rPr sz="1750" b="1" dirty="0">
+                <a:solidFill>
+                  <a:srgbClr val="0B2F5B"/>
+                </a:solidFill>
+                <a:latin typeface="Aptos"/>
+              </a:rPr>
+              <a:t>Tiny example</a:t>
+            </a:r>
+          </a:p>
+          <a:p>
+            <a:pPr algn="l">
+              <a:defRPr sz="1500"/>
+            </a:pPr>
+            <a:r>
+              <a:rPr sz="1500" dirty="0">
+                <a:solidFill>
+                  <a:srgbClr val="172B4D"/>
+                </a:solidFill>
+                <a:latin typeface="Consolas"/>
+              </a:rPr>
+              <a:t>ID   token      vector row</a:t>
+            </a:r>
+          </a:p>
+          <a:p>
+            <a:pPr algn="l">
+              <a:defRPr sz="1500"/>
+            </a:pPr>
+            <a:r>
+              <a:rPr sz="1500" dirty="0">
+                <a:solidFill>
+                  <a:srgbClr val="172B4D"/>
+                </a:solidFill>
+                <a:latin typeface="Consolas"/>
+              </a:rPr>
+              <a:t>1    are        [ 0.21, -0.44,  0.78,  0.12]</a:t>
+            </a:r>
+          </a:p>
+          <a:p>
+            <a:pPr algn="l">
+              <a:defRPr sz="1500"/>
+            </a:pPr>
+            <a:r>
+              <a:rPr sz="1500" dirty="0">
+                <a:solidFill>
+                  <a:srgbClr val="172B4D"/>
+                </a:solidFill>
+                <a:latin typeface="Consolas"/>
+              </a:rPr>
+              <a:t>2    MAG        [ 0.03,  0.91, -0.14,  0.36]</a:t>
+            </a:r>
+          </a:p>
+          <a:p>
+            <a:pPr algn="l">
+              <a:defRPr sz="1500"/>
+            </a:pPr>
+            <a:r>
+              <a:rPr sz="1500" dirty="0">
+                <a:solidFill>
+                  <a:srgbClr val="172B4D"/>
+                </a:solidFill>
+                <a:latin typeface="Consolas"/>
+              </a:rPr>
+              <a:t>3    sales      [-0.62,  0.18,  0.45, -0.09]</a:t>
+            </a:r>
+          </a:p>
+        </p:txBody>
+      </p:sp>
+      <p:sp>
+        <p:nvSpPr>
+          <p:cNvPr id="6" name="Key takeaway"/>
+          <p:cNvSpPr/>
+          <p:nvPr/>
+        </p:nvSpPr>
+        <p:spPr>
+          <a:xfrm>
+            <a:off x="822960" y="5577840"/>
+            <a:ext cx="9966960" cy="914400"/>
+          </a:xfrm>
+          <a:prstGeom prst="roundRect">
+            <a:avLst/>
+          </a:prstGeom>
+          <a:solidFill>
+            <a:srgbClr val="FFFFFF"/>
+          </a:solidFill>
+          <a:ln>
+            <a:solidFill>
+              <a:srgbClr val="0B5CAD"/>
+            </a:solidFill>
+          </a:ln>
+        </p:spPr>
+        <p:txBody>
+          <a:bodyPr lIns="91440" tIns="91440" rIns="91440" bIns="91440" rtlCol="0" anchor="ctr"/>
           <a:lstStyle/>
           <a:p>
             <a:pPr algn="ctr">
-              <a:defRPr sz="2200">
+              <a:defRPr sz="1850"/>
+            </a:pPr>
+            <a:r>
+              <a:rPr sz="1850" b="1" dirty="0">
+                <a:solidFill>
+                  <a:srgbClr val="0B2F5B"/>
+                </a:solidFill>
+                <a:latin typeface="Aptos"/>
+              </a:rPr>
+              <a:t>Key takeaway</a:t>
+            </a:r>
+          </a:p>
+          <a:p>
+            <a:pPr algn="ctr">
+              <a:defRPr sz="1700"/>
+            </a:pPr>
+            <a:r>
+              <a:rPr sz="1700" dirty="0">
                 <a:solidFill>
                   <a:srgbClr val="172B4D"/>
                 </a:solidFill>
-                <a:latin typeface="Consolas"/>
-              </a:defRPr>
-            </a:pPr>
-            <a:r>
-              <a:rPr lang="en-US" dirty="0"/>
-              <a:t>Conceptually: </a:t>
-            </a:r>
-            <a:r>
-              <a:rPr lang="en-US" dirty="0" err="1"/>
-              <a:t>EmbeddingMatrix</a:t>
-            </a:r>
-            <a:r>
-              <a:rPr lang="en-US" dirty="0"/>
-              <a:t>[ </a:t>
-            </a:r>
-            <a:r>
-              <a:rPr lang="en-US" dirty="0" err="1"/>
-              <a:t>token_id</a:t>
-            </a:r>
-            <a:r>
-              <a:rPr lang="en-US" dirty="0"/>
-              <a:t> ] returns a vector</a:t>
-            </a:r>
-            <a:endParaRPr dirty="0"/>
+                <a:highlight>
+                  <a:srgbClr val="FFFF00"/>
+                </a:highlight>
+                <a:latin typeface="Aptos"/>
+              </a:rPr>
+              <a:t>During inference, we do not calculate these numbers from spelling. </a:t>
+            </a:r>
+            <a:r>
+              <a:rPr sz="1700" dirty="0">
+                <a:solidFill>
+                  <a:srgbClr val="172B4D"/>
+                </a:solidFill>
+                <a:latin typeface="Aptos"/>
+              </a:rPr>
+              <a:t>We look up the learned row.</a:t>
+            </a:r>
+          </a:p>
+        </p:txBody>
+      </p:sp>
+      <p:sp>
+        <p:nvSpPr>
+          <p:cNvPr id="40" name="Footer"/>
+          <p:cNvSpPr/>
+          <p:nvPr/>
+        </p:nvSpPr>
+        <p:spPr>
+          <a:xfrm>
+            <a:off x="320040" y="6473952"/>
+            <a:ext cx="11521440" cy="228600"/>
+          </a:xfrm>
+          <a:prstGeom prst="rect">
+            <a:avLst/>
+          </a:prstGeom>
+          <a:noFill/>
+          <a:ln/>
+        </p:spPr>
+        <p:txBody>
+          <a:bodyPr lIns="0" tIns="0" rIns="0" bIns="0" rtlCol="0" anchor="t"/>
+          <a:lstStyle/>
+          <a:p>
+            <a:pPr algn="r">
+              <a:defRPr sz="850"/>
+            </a:pPr>
+            <a:r>
+              <a:rPr sz="850" dirty="0">
+                <a:solidFill>
+                  <a:srgbClr val="6B778C"/>
+                </a:solidFill>
+                <a:latin typeface="Aptos"/>
+              </a:rPr>
+              <a:t>AI Under the hood | Slide 10</a:t>
+            </a:r>
+          </a:p>
+        </p:txBody>
+      </p:sp>
+      <p:sp>
+        <p:nvSpPr>
+          <p:cNvPr id="9" name="Definition">
+            <a:extLst>
+              <a:ext uri="{FF2B5EF4-FFF2-40B4-BE49-F238E27FC236}">
+                <a16:creationId xmlns:a16="http://schemas.microsoft.com/office/drawing/2014/main" id="{0FCD2D10-DB6A-EBB2-1E45-F3B0AF2ABB4B}"/>
+              </a:ext>
+            </a:extLst>
+          </p:cNvPr>
+          <p:cNvSpPr/>
+          <p:nvPr/>
+        </p:nvSpPr>
+        <p:spPr>
+          <a:xfrm>
+            <a:off x="822959" y="3831882"/>
+            <a:ext cx="9784081" cy="1654518"/>
+          </a:xfrm>
+          <a:prstGeom prst="roundRect">
+            <a:avLst/>
+          </a:prstGeom>
+          <a:solidFill>
+            <a:srgbClr val="F5F8FC"/>
+          </a:solidFill>
+          <a:ln>
+            <a:solidFill>
+              <a:srgbClr val="BED2E6"/>
+            </a:solidFill>
+          </a:ln>
+        </p:spPr>
+        <p:txBody>
+          <a:bodyPr lIns="137160" tIns="137160" rIns="137160" bIns="137160" rtlCol="0" anchor="t"/>
+          <a:lstStyle/>
+          <a:p>
+            <a:pPr algn="l">
+              <a:defRPr sz="1750"/>
+            </a:pPr>
+            <a:r>
+              <a:rPr lang="en-US" sz="1550" dirty="0">
+                <a:solidFill>
+                  <a:srgbClr val="0B2F5B"/>
+                </a:solidFill>
+                <a:latin typeface="Aptos" panose="020B0004020202020204" pitchFamily="34" charset="0"/>
+              </a:rPr>
+              <a:t>A neural network contains a gigantic Embedding table matrix</a:t>
+            </a:r>
+          </a:p>
+          <a:p>
+            <a:pPr algn="l">
+              <a:defRPr sz="1750"/>
+            </a:pPr>
+            <a:endParaRPr lang="en-US" sz="1550" dirty="0">
+              <a:solidFill>
+                <a:srgbClr val="0B2F5B"/>
+              </a:solidFill>
+              <a:latin typeface="Aptos" panose="020B0004020202020204" pitchFamily="34" charset="0"/>
+            </a:endParaRPr>
+          </a:p>
+          <a:p>
+            <a:pPr algn="l">
+              <a:defRPr sz="1750"/>
+            </a:pPr>
+            <a:r>
+              <a:rPr lang="en-US" sz="1550" dirty="0">
+                <a:solidFill>
+                  <a:srgbClr val="0B2F5B"/>
+                </a:solidFill>
+                <a:latin typeface="Aptos" panose="020B0004020202020204" pitchFamily="34" charset="0"/>
+              </a:rPr>
+              <a:t>Example dimensions:  Vocabulary size * Embedding dimension</a:t>
+            </a:r>
+          </a:p>
+          <a:p>
+            <a:pPr algn="l">
+              <a:defRPr sz="1750"/>
+            </a:pPr>
+            <a:r>
+              <a:rPr lang="en-US" sz="1550" dirty="0">
+                <a:solidFill>
+                  <a:srgbClr val="0B2F5B"/>
+                </a:solidFill>
+                <a:latin typeface="Aptos" panose="020B0004020202020204" pitchFamily="34" charset="0"/>
+              </a:rPr>
+              <a:t>GPT4                                            100,256          *               1,536</a:t>
+            </a:r>
+          </a:p>
+          <a:p>
+            <a:pPr algn="l">
+              <a:defRPr sz="1750"/>
+            </a:pPr>
+            <a:endParaRPr lang="en-US" sz="1550" dirty="0">
+              <a:solidFill>
+                <a:srgbClr val="0B2F5B"/>
+              </a:solidFill>
+              <a:latin typeface="Aptos" panose="020B0004020202020204" pitchFamily="34" charset="0"/>
+            </a:endParaRPr>
+          </a:p>
+          <a:p>
+            <a:pPr algn="l">
+              <a:defRPr sz="1750"/>
+            </a:pPr>
+            <a:r>
+              <a:rPr lang="en-US" sz="1550" dirty="0">
+                <a:solidFill>
+                  <a:srgbClr val="0B2F5B"/>
+                </a:solidFill>
+                <a:latin typeface="Aptos" panose="020B0004020202020204" pitchFamily="34" charset="0"/>
+              </a:rPr>
+              <a:t>Meaning: each token is represented by 1,536 floating point numbers</a:t>
+            </a:r>
+            <a:endParaRPr lang="en-US" sz="1550" dirty="0">
+              <a:latin typeface="Aptos" panose="020B0004020202020204" pitchFamily="34" charset="0"/>
+            </a:endParaRPr>
+          </a:p>
+          <a:p>
+            <a:pPr algn="l">
+              <a:defRPr sz="1750"/>
+            </a:pPr>
+            <a:endParaRPr sz="1750" dirty="0">
+              <a:solidFill>
+                <a:srgbClr val="0B2F5B"/>
+              </a:solidFill>
+              <a:latin typeface="Aptos"/>
+            </a:endParaRPr>
+          </a:p>
+          <a:p>
+            <a:pPr algn="l">
+              <a:defRPr sz="1550"/>
+            </a:pPr>
+            <a:endParaRPr sz="1550" dirty="0">
+              <a:solidFill>
+                <a:srgbClr val="172B4D"/>
+              </a:solidFill>
+              <a:latin typeface="Aptos"/>
+            </a:endParaRPr>
           </a:p>
         </p:txBody>
       </p:sp>
@@ -4769,13 +4738,13 @@
       <p:sp>
         <p:nvSpPr>
           <p:cNvPr id="2" name="Title"/>
-          <p:cNvSpPr/>
-          <p:nvPr/>
-        </p:nvSpPr>
-        <p:spPr>
-          <a:xfrm>
-            <a:off x="640080" y="365760"/>
-            <a:ext cx="10911840" cy="548640"/>
+          <p:cNvSpPr txBox="1"/>
+          <p:nvPr/>
+        </p:nvSpPr>
+        <p:spPr>
+          <a:xfrm>
+            <a:off x="548640" y="274320"/>
+            <a:ext cx="11125200" cy="548640"/>
           </a:xfrm>
           <a:prstGeom prst="rect">
             <a:avLst/>
@@ -4788,16 +4757,16 @@
           <a:lstStyle/>
           <a:p>
             <a:pPr algn="l">
-              <a:defRPr sz="3000"/>
-            </a:pPr>
-            <a:r>
-              <a:rPr sz="3000" b="1" dirty="0">
+              <a:defRPr sz="2600"/>
+            </a:pPr>
+            <a:r>
+              <a:rPr sz="2600" b="1" dirty="0">
                 <a:solidFill>
                   <a:srgbClr val="0B2F5B"/>
                 </a:solidFill>
                 <a:latin typeface="Aptos"/>
               </a:rPr>
-              <a:t>What Is a Vector?</a:t>
+              <a:t>Embeddings: Learned Geometric Coordinates of Meaning</a:t>
             </a:r>
           </a:p>
         </p:txBody>
@@ -4805,13 +4774,13 @@
       <p:sp>
         <p:nvSpPr>
           <p:cNvPr id="3" name="Subtitle"/>
-          <p:cNvSpPr/>
-          <p:nvPr/>
-        </p:nvSpPr>
-        <p:spPr>
-          <a:xfrm>
-            <a:off x="640080" y="868680"/>
-            <a:ext cx="10911840" cy="365760"/>
+          <p:cNvSpPr txBox="1"/>
+          <p:nvPr/>
+        </p:nvSpPr>
+        <p:spPr>
+          <a:xfrm>
+            <a:off x="594360" y="777240"/>
+            <a:ext cx="10820400" cy="365760"/>
           </a:xfrm>
           <a:prstGeom prst="rect">
             <a:avLst/>
@@ -4824,30 +4793,51 @@
           <a:lstStyle/>
           <a:p>
             <a:pPr algn="l">
-              <a:defRPr sz="1600"/>
-            </a:pPr>
-            <a:r>
-              <a:rPr sz="1600" dirty="0">
-                <a:solidFill>
-                  <a:srgbClr val="5E6C84"/>
-                </a:solidFill>
-                <a:latin typeface="Aptos"/>
-              </a:rPr>
-              <a:t>A compact list of numbers the neural network can compute with</a:t>
-            </a:r>
-          </a:p>
-        </p:txBody>
-      </p:sp>
-      <p:sp>
-        <p:nvSpPr>
-          <p:cNvPr id="4" name="Vector"/>
+              <a:defRPr sz="1550"/>
+            </a:pPr>
+            <a:r>
+              <a:rPr sz="1550" dirty="0">
+                <a:solidFill>
+                  <a:srgbClr val="52616B"/>
+                </a:solidFill>
+                <a:latin typeface="Aptos"/>
+              </a:rPr>
+              <a:t>Training turns random vectors into a map where </a:t>
+            </a:r>
+            <a:r>
+              <a:rPr sz="1550" dirty="0">
+                <a:solidFill>
+                  <a:srgbClr val="52616B"/>
+                </a:solidFill>
+                <a:highlight>
+                  <a:srgbClr val="FFFF00"/>
+                </a:highlight>
+                <a:latin typeface="Aptos"/>
+              </a:rPr>
+              <a:t>distance carries semantics</a:t>
+            </a:r>
+            <a:r>
+              <a:rPr sz="1550" dirty="0">
+                <a:solidFill>
+                  <a:srgbClr val="52616B"/>
+                </a:solidFill>
+                <a:latin typeface="Aptos"/>
+              </a:rPr>
+              <a:t>.</a:t>
+            </a:r>
+          </a:p>
+        </p:txBody>
+      </p:sp>
+      <p:sp>
+        <p:nvSpPr>
+          <p:cNvPr id="4" name="Initially Random"/>
           <p:cNvSpPr/>
           <p:nvPr/>
         </p:nvSpPr>
         <p:spPr>
           <a:xfrm>
-            <a:off x="822960" y="1371600"/>
-            <a:ext cx="3474720" cy="2194560"/>
+            <a:off x="640080" y="1280160"/>
+            <a:ext cx="3291840" cy="1737360"/>
           </a:xfrm>
           <a:prstGeom prst="roundRect">
             <a:avLst/>
@@ -4862,62 +4852,68 @@
           </a:ln>
         </p:spPr>
         <p:txBody>
-          <a:bodyPr lIns="137160" tIns="137160" rIns="137160" bIns="137160" rtlCol="0" anchor="t"/>
+          <a:bodyPr lIns="91440" tIns="91440" rIns="91440" bIns="91440" rtlCol="0" anchor="t"/>
           <a:lstStyle/>
           <a:p>
             <a:pPr algn="l">
-              <a:defRPr sz="1750"/>
-            </a:pPr>
-            <a:r>
-              <a:rPr sz="1750" b="1" dirty="0">
+              <a:defRPr sz="1700"/>
+            </a:pPr>
+            <a:r>
+              <a:rPr sz="1700" b="1" dirty="0">
                 <a:solidFill>
                   <a:srgbClr val="0B2F5B"/>
                 </a:solidFill>
                 <a:latin typeface="Aptos"/>
               </a:rPr>
-              <a:t>Vector</a:t>
+              <a:t>Initially</a:t>
             </a:r>
           </a:p>
           <a:p>
             <a:pPr algn="l">
-              <a:defRPr sz="1500"/>
-            </a:pPr>
-            <a:r>
-              <a:rPr sz="1500" dirty="0">
+              <a:defRPr sz="1250"/>
+            </a:pPr>
+            <a:r>
+              <a:rPr sz="1250" dirty="0">
                 <a:solidFill>
                   <a:srgbClr val="172B4D"/>
                 </a:solidFill>
                 <a:latin typeface="Consolas"/>
               </a:rPr>
-              <a:t>sales vector:</a:t>
-            </a:r>
-          </a:p>
-          <a:p>
-            <a:pPr algn="l">
-              <a:defRPr sz="1500"/>
-            </a:pPr>
-            <a:r>
-              <a:rPr sz="1500" dirty="0">
+              <a:t>MAG     = [random garbage]</a:t>
+            </a:r>
+            <a:br/>
+            <a:r>
+              <a:rPr sz="1250" dirty="0">
                 <a:solidFill>
                   <a:srgbClr val="172B4D"/>
                 </a:solidFill>
                 <a:latin typeface="Consolas"/>
               </a:rPr>
-              <a:t>[-0.62, 0.18, 0.45, -0.09]</a:t>
-            </a:r>
-          </a:p>
-        </p:txBody>
-      </p:sp>
-      <p:sp>
-        <p:nvSpPr>
-          <p:cNvPr id="5" name="Algorithm"/>
+              <a:t>sales   = [random garbage]</a:t>
+            </a:r>
+            <a:br/>
+            <a:r>
+              <a:rPr sz="1250" dirty="0">
+                <a:solidFill>
+                  <a:srgbClr val="172B4D"/>
+                </a:solidFill>
+                <a:latin typeface="Consolas"/>
+              </a:rPr>
+              <a:t>Chicago = [random garbage]</a:t>
+            </a:r>
+          </a:p>
+        </p:txBody>
+      </p:sp>
+      <p:sp>
+        <p:nvSpPr>
+          <p:cNvPr id="5" name="Training Contexts"/>
           <p:cNvSpPr/>
           <p:nvPr/>
         </p:nvSpPr>
         <p:spPr>
           <a:xfrm>
-            <a:off x="4846320" y="1188720"/>
-            <a:ext cx="5760720" cy="2377440"/>
+            <a:off x="4389120" y="1280160"/>
+            <a:ext cx="3200400" cy="1737360"/>
           </a:xfrm>
           <a:prstGeom prst="roundRect">
             <a:avLst/>
@@ -4932,114 +4928,84 @@
           </a:ln>
         </p:spPr>
         <p:txBody>
-          <a:bodyPr lIns="137160" tIns="137160" rIns="137160" bIns="137160" rtlCol="0" anchor="t"/>
+          <a:bodyPr lIns="91440" tIns="91440" rIns="91440" bIns="91440" rtlCol="0" anchor="t"/>
           <a:lstStyle/>
           <a:p>
             <a:pPr algn="l">
-              <a:defRPr sz="1750"/>
-            </a:pPr>
-            <a:r>
-              <a:rPr sz="1750" b="1" dirty="0">
+              <a:defRPr sz="1700"/>
+            </a:pPr>
+            <a:r>
+              <a:rPr sz="1700" b="1" dirty="0">
                 <a:solidFill>
                   <a:srgbClr val="0B2F5B"/>
                 </a:solidFill>
                 <a:latin typeface="Aptos"/>
               </a:rPr>
-              <a:t>Demo algorithm for sales</a:t>
+              <a:t>During training</a:t>
             </a:r>
           </a:p>
           <a:p>
             <a:pPr algn="l">
-              <a:defRPr sz="1500"/>
-            </a:pPr>
-            <a:r>
-              <a:rPr sz="1500" dirty="0">
+              <a:defRPr sz="1350"/>
+            </a:pPr>
+            <a:r>
+              <a:rPr sz="1350" dirty="0">
                 <a:solidFill>
                   <a:srgbClr val="172B4D"/>
                 </a:solidFill>
                 <a:latin typeface="Consolas"/>
               </a:rPr>
-              <a:t>1. Token: "sales"</a:t>
-            </a:r>
-          </a:p>
-          <a:p>
-            <a:pPr algn="l">
-              <a:defRPr sz="1500"/>
-            </a:pPr>
-            <a:r>
-              <a:rPr sz="1500" dirty="0">
+              <a:t>sales up</a:t>
+            </a:r>
+            <a:br/>
+            <a:r>
+              <a:rPr sz="1350" dirty="0">
                 <a:solidFill>
                   <a:srgbClr val="172B4D"/>
                 </a:solidFill>
                 <a:latin typeface="Consolas"/>
               </a:rPr>
-              <a:t>2. Vocabulary lookup: "sales" -&gt; 3</a:t>
-            </a:r>
-          </a:p>
-          <a:p>
-            <a:pPr algn="l">
-              <a:defRPr sz="1500"/>
-            </a:pPr>
-            <a:r>
-              <a:rPr sz="1500" dirty="0">
+              <a:t>sales increased</a:t>
+            </a:r>
+            <a:br/>
+            <a:r>
+              <a:rPr sz="1350" dirty="0">
                 <a:solidFill>
                   <a:srgbClr val="172B4D"/>
                 </a:solidFill>
                 <a:latin typeface="Consolas"/>
               </a:rPr>
-              <a:t>3. Embedding lookup: E[3]</a:t>
-            </a:r>
-          </a:p>
-          <a:p>
-            <a:pPr algn="l">
-              <a:defRPr sz="1500"/>
-            </a:pPr>
-            <a:r>
-              <a:rPr sz="1500" dirty="0">
+              <a:t>revenue growth</a:t>
+            </a:r>
+            <a:br/>
+            <a:r>
+              <a:rPr sz="1350" dirty="0">
                 <a:solidFill>
                   <a:srgbClr val="172B4D"/>
                 </a:solidFill>
                 <a:latin typeface="Consolas"/>
               </a:rPr>
-              <a:t>4. Output</a:t>
-            </a:r>
-            <a:r>
-              <a:rPr lang="en-US" sz="1500" dirty="0">
-                <a:solidFill>
-                  <a:srgbClr val="172B4D"/>
-                </a:solidFill>
-                <a:latin typeface="Consolas"/>
-              </a:rPr>
-              <a:t> Vector</a:t>
-            </a:r>
-            <a:r>
-              <a:rPr sz="1500" dirty="0">
-                <a:solidFill>
-                  <a:srgbClr val="172B4D"/>
-                </a:solidFill>
-                <a:latin typeface="Consolas"/>
-              </a:rPr>
-              <a:t>: [-0.62, 0.18, 0.45, -0.09]</a:t>
-            </a:r>
-          </a:p>
-        </p:txBody>
-      </p:sp>
-      <p:sp>
-        <p:nvSpPr>
-          <p:cNvPr id="6" name="Key takeaway"/>
+              <a:t>Chicago region</a:t>
+            </a:r>
+          </a:p>
+        </p:txBody>
+      </p:sp>
+      <p:sp>
+        <p:nvSpPr>
+          <p:cNvPr id="6" name="Geometry Meaning"/>
           <p:cNvSpPr/>
           <p:nvPr/>
         </p:nvSpPr>
         <p:spPr>
           <a:xfrm>
-            <a:off x="822960" y="4346840"/>
-            <a:ext cx="9966960" cy="1807072"/>
+            <a:off x="8138160" y="1280160"/>
+            <a:ext cx="3200400" cy="1737360"/>
           </a:xfrm>
           <a:prstGeom prst="roundRect">
             <a:avLst/>
           </a:prstGeom>
           <a:solidFill>
-            <a:srgbClr val="FFFFFF"/>
+            <a:srgbClr val="EAF3FF"/>
           </a:solidFill>
           <a:ln>
             <a:solidFill>
@@ -5048,129 +5014,304 @@
           </a:ln>
         </p:spPr>
         <p:txBody>
+          <a:bodyPr lIns="91440" tIns="91440" rIns="91440" bIns="91440" rtlCol="0" anchor="t"/>
+          <a:lstStyle/>
+          <a:p>
+            <a:pPr algn="l">
+              <a:defRPr sz="1700"/>
+            </a:pPr>
+            <a:r>
+              <a:rPr sz="1700" b="1" dirty="0">
+                <a:solidFill>
+                  <a:srgbClr val="0B2F5B"/>
+                </a:solidFill>
+                <a:latin typeface="Aptos"/>
+              </a:rPr>
+              <a:t>Backprop moves vectors</a:t>
+            </a:r>
+          </a:p>
+          <a:p>
+            <a:pPr algn="l">
+              <a:defRPr sz="1375"/>
+            </a:pPr>
+            <a:r>
+              <a:rPr sz="1375" dirty="0">
+                <a:solidFill>
+                  <a:srgbClr val="172B4D"/>
+                </a:solidFill>
+                <a:latin typeface="Aptos"/>
+              </a:rPr>
+              <a:t>similar words move closer</a:t>
+            </a:r>
+            <a:br/>
+            <a:r>
+              <a:rPr sz="1375" dirty="0">
+                <a:solidFill>
+                  <a:srgbClr val="172B4D"/>
+                </a:solidFill>
+                <a:latin typeface="Aptos"/>
+              </a:rPr>
+              <a:t>unrelated words move apart</a:t>
+            </a:r>
+            <a:br/>
+            <a:r>
+              <a:rPr sz="1375" dirty="0">
+                <a:solidFill>
+                  <a:srgbClr val="172B4D"/>
+                </a:solidFill>
+                <a:latin typeface="Aptos"/>
+              </a:rPr>
+              <a:t>geometry stores meaning</a:t>
+            </a:r>
+          </a:p>
+        </p:txBody>
+      </p:sp>
+      <p:sp>
+        <p:nvSpPr>
+          <p:cNvPr id="7" name="Visual Intuition"/>
+          <p:cNvSpPr/>
+          <p:nvPr/>
+        </p:nvSpPr>
+        <p:spPr>
+          <a:xfrm>
+            <a:off x="640080" y="3370320"/>
+            <a:ext cx="5029200" cy="2011680"/>
+          </a:xfrm>
+          <a:prstGeom prst="roundRect">
+            <a:avLst/>
+          </a:prstGeom>
+          <a:solidFill>
+            <a:srgbClr val="FFFFFF"/>
+          </a:solidFill>
+          <a:ln>
+            <a:solidFill>
+              <a:srgbClr val="BED2E6"/>
+            </a:solidFill>
+          </a:ln>
+        </p:spPr>
+        <p:txBody>
+          <a:bodyPr lIns="91440" tIns="91440" rIns="91440" bIns="91440" rtlCol="0" anchor="t"/>
+          <a:lstStyle/>
+          <a:p>
+            <a:pPr algn="l">
+              <a:defRPr sz="1650"/>
+            </a:pPr>
+            <a:r>
+              <a:rPr sz="1650" b="1" dirty="0">
+                <a:solidFill>
+                  <a:srgbClr val="0B2F5B"/>
+                </a:solidFill>
+                <a:latin typeface="Aptos"/>
+              </a:rPr>
+              <a:t>Visual intuition: distances encode relationships</a:t>
+            </a:r>
+          </a:p>
+          <a:p>
+            <a:pPr algn="l">
+              <a:defRPr sz="1250"/>
+            </a:pPr>
+            <a:r>
+              <a:rPr sz="1250" dirty="0">
+                <a:solidFill>
+                  <a:srgbClr val="172B4D"/>
+                </a:solidFill>
+                <a:latin typeface="Consolas"/>
+              </a:rPr>
+              <a:t>king   (2, 9, 4)    queen  (2, 9, 5)</a:t>
+            </a:r>
+            <a:br/>
+            <a:r>
+              <a:rPr sz="1250" dirty="0">
+                <a:solidFill>
+                  <a:srgbClr val="172B4D"/>
+                </a:solidFill>
+                <a:latin typeface="Consolas"/>
+              </a:rPr>
+              <a:t>man    (1, 4, 3)    woman  (1, 4, 4)</a:t>
+            </a:r>
+          </a:p>
+          <a:p>
+            <a:pPr algn="l">
+              <a:defRPr sz="1550"/>
+            </a:pPr>
+            <a:r>
+              <a:rPr sz="1550" b="1" dirty="0">
+                <a:solidFill>
+                  <a:srgbClr val="0B5CAD"/>
+                </a:solidFill>
+                <a:latin typeface="Consolas"/>
+              </a:rPr>
+              <a:t>king - man + woman ~= queen</a:t>
+            </a:r>
+          </a:p>
+        </p:txBody>
+      </p:sp>
+      <p:sp>
+        <p:nvSpPr>
+          <p:cNvPr id="8" name="Sentence Embeddings"/>
+          <p:cNvSpPr/>
+          <p:nvPr/>
+        </p:nvSpPr>
+        <p:spPr>
+          <a:xfrm>
+            <a:off x="5989320" y="3370320"/>
+            <a:ext cx="5394960" cy="2011680"/>
+          </a:xfrm>
+          <a:prstGeom prst="roundRect">
+            <a:avLst/>
+          </a:prstGeom>
+          <a:solidFill>
+            <a:srgbClr val="FFFFFF"/>
+          </a:solidFill>
+          <a:ln>
+            <a:solidFill>
+              <a:srgbClr val="BED2E6"/>
+            </a:solidFill>
+          </a:ln>
+        </p:spPr>
+        <p:txBody>
+          <a:bodyPr lIns="91440" tIns="91440" rIns="91440" bIns="91440" rtlCol="0" anchor="t"/>
+          <a:lstStyle/>
+          <a:p>
+            <a:pPr algn="l">
+              <a:defRPr sz="1650"/>
+            </a:pPr>
+            <a:r>
+              <a:rPr sz="1650" b="1" dirty="0">
+                <a:solidFill>
+                  <a:srgbClr val="0B2F5B"/>
+                </a:solidFill>
+                <a:latin typeface="Aptos"/>
+              </a:rPr>
+              <a:t>Sentence embeddings combine token vectors</a:t>
+            </a:r>
+          </a:p>
+          <a:p>
+            <a:pPr algn="l">
+              <a:defRPr sz="1250"/>
+            </a:pPr>
+            <a:r>
+              <a:rPr sz="1250" dirty="0">
+                <a:solidFill>
+                  <a:srgbClr val="172B4D"/>
+                </a:solidFill>
+                <a:latin typeface="Aptos"/>
+              </a:rPr>
+              <a:t>averaging | attention | transformers | pooling</a:t>
+            </a:r>
+          </a:p>
+          <a:p>
+            <a:pPr algn="l">
+              <a:defRPr sz="1200"/>
+            </a:pPr>
+            <a:r>
+              <a:rPr sz="1200" dirty="0">
+                <a:solidFill>
+                  <a:srgbClr val="172B4D"/>
+                </a:solidFill>
+                <a:latin typeface="Consolas"/>
+              </a:rPr>
+              <a:t>"MAG sales are up in Chicago"</a:t>
+            </a:r>
+            <a:br/>
+            <a:r>
+              <a:rPr sz="1200" dirty="0">
+                <a:solidFill>
+                  <a:srgbClr val="172B4D"/>
+                </a:solidFill>
+                <a:latin typeface="Consolas"/>
+              </a:rPr>
+              <a:t>-&gt; [0.192, -0.551, 0.882, ... 1536 dims ...]</a:t>
+            </a:r>
+          </a:p>
+          <a:p>
+            <a:pPr algn="l">
+              <a:defRPr sz="1225"/>
+            </a:pPr>
+            <a:r>
+              <a:rPr sz="1225" dirty="0">
+                <a:solidFill>
+                  <a:srgbClr val="52616B"/>
+                </a:solidFill>
+                <a:latin typeface="Aptos"/>
+              </a:rPr>
+              <a:t>captures business context, trend, location, and organization semantics</a:t>
+            </a:r>
+          </a:p>
+        </p:txBody>
+      </p:sp>
+      <p:sp>
+        <p:nvSpPr>
+          <p:cNvPr id="9" name="Why This Works"/>
+          <p:cNvSpPr/>
+          <p:nvPr/>
+        </p:nvSpPr>
+        <p:spPr>
+          <a:xfrm>
+            <a:off x="914400" y="5791200"/>
+            <a:ext cx="10393680" cy="548640"/>
+          </a:xfrm>
+          <a:prstGeom prst="roundRect">
+            <a:avLst/>
+          </a:prstGeom>
+          <a:solidFill>
+            <a:srgbClr val="F5F8FC"/>
+          </a:solidFill>
+          <a:ln>
+            <a:solidFill>
+              <a:srgbClr val="BED2E6"/>
+            </a:solidFill>
+          </a:ln>
+        </p:spPr>
+        <p:txBody>
           <a:bodyPr lIns="91440" tIns="91440" rIns="91440" bIns="91440" rtlCol="0" anchor="ctr"/>
           <a:lstStyle/>
           <a:p>
             <a:pPr algn="ctr">
-              <a:defRPr sz="1850"/>
-            </a:pPr>
-            <a:r>
-              <a:rPr sz="1850" b="1" dirty="0">
-                <a:solidFill>
-                  <a:srgbClr val="0B2F5B"/>
-                </a:solidFill>
-                <a:latin typeface="Aptos"/>
-              </a:rPr>
-              <a:t>Key takeaway</a:t>
-            </a:r>
-            <a:endParaRPr lang="en-US" sz="1850" b="1" dirty="0">
-              <a:solidFill>
-                <a:srgbClr val="0B2F5B"/>
-              </a:solidFill>
-              <a:latin typeface="Aptos"/>
-            </a:endParaRPr>
-          </a:p>
-          <a:p>
-            <a:pPr algn="ctr">
-              <a:defRPr sz="1700"/>
-            </a:pPr>
-            <a:r>
-              <a:rPr sz="1700" dirty="0">
+              <a:defRPr sz="1450"/>
+            </a:pPr>
+            <a:r>
+              <a:rPr sz="1450" b="1" dirty="0">
                 <a:solidFill>
                   <a:srgbClr val="172B4D"/>
                 </a:solidFill>
-                <a:latin typeface="Aptos"/>
-              </a:rPr>
-              <a:t>A vector is the numeric representation that moves forward. </a:t>
-            </a:r>
-            <a:endParaRPr lang="en-US" sz="1700" dirty="0">
+                <a:highlight>
+                  <a:srgbClr val="FFFF00"/>
+                </a:highlight>
+                <a:latin typeface="Aptos"/>
+              </a:rPr>
+              <a:t>Why it works: language has statistical structure. Context patterns -&gt; geometric relationships. </a:t>
+            </a:r>
+            <a:endParaRPr lang="en-US" sz="1450" b="1" dirty="0">
               <a:solidFill>
                 <a:srgbClr val="172B4D"/>
               </a:solidFill>
+              <a:highlight>
+                <a:srgbClr val="FFFF00"/>
+              </a:highlight>
               <a:latin typeface="Aptos"/>
             </a:endParaRPr>
           </a:p>
           <a:p>
             <a:pPr algn="ctr">
-              <a:defRPr sz="1700"/>
-            </a:pPr>
-            <a:r>
-              <a:rPr sz="1700" dirty="0">
+              <a:defRPr sz="1450"/>
+            </a:pPr>
+            <a:r>
+              <a:rPr sz="1450" dirty="0">
                 <a:solidFill>
                   <a:srgbClr val="172B4D"/>
                 </a:solidFill>
                 <a:latin typeface="Aptos"/>
               </a:rPr>
-              <a:t>The values are learned, then selected by ID.</a:t>
-            </a:r>
-            <a:endParaRPr lang="en-US" sz="1700" dirty="0">
-              <a:solidFill>
-                <a:srgbClr val="172B4D"/>
-              </a:solidFill>
-              <a:latin typeface="Aptos"/>
-            </a:endParaRPr>
-          </a:p>
-          <a:p>
-            <a:pPr algn="ctr">
-              <a:defRPr sz="1700"/>
-            </a:pPr>
-            <a:endParaRPr lang="en-US" sz="1700" dirty="0">
-              <a:solidFill>
-                <a:srgbClr val="172B4D"/>
-              </a:solidFill>
-              <a:latin typeface="Aptos"/>
-            </a:endParaRPr>
-          </a:p>
-          <a:p>
-            <a:pPr algn="ctr">
-              <a:defRPr sz="1700"/>
-            </a:pPr>
-            <a:r>
-              <a:rPr lang="en-US" sz="1700" dirty="0">
-                <a:solidFill>
-                  <a:srgbClr val="172B4D"/>
-                </a:solidFill>
-                <a:highlight>
-                  <a:srgbClr val="FFFF00"/>
-                </a:highlight>
-                <a:latin typeface="Aptos"/>
-              </a:rPr>
-              <a:t>The word “Sales” now is a </a:t>
-            </a:r>
-            <a:r>
-              <a:rPr lang="en-US" sz="1700" u="sng" dirty="0">
-                <a:solidFill>
-                  <a:srgbClr val="172B4D"/>
-                </a:solidFill>
-                <a:highlight>
-                  <a:srgbClr val="FFFF00"/>
-                </a:highlight>
-                <a:latin typeface="Aptos"/>
-              </a:rPr>
-              <a:t>point in multidimensional space</a:t>
-            </a:r>
-            <a:r>
-              <a:rPr lang="en-US" sz="1700" dirty="0">
-                <a:solidFill>
-                  <a:srgbClr val="172B4D"/>
-                </a:solidFill>
-                <a:latin typeface="Aptos"/>
-              </a:rPr>
-              <a:t>.</a:t>
-            </a:r>
-            <a:endParaRPr sz="1700" dirty="0">
-              <a:solidFill>
-                <a:srgbClr val="172B4D"/>
-              </a:solidFill>
-              <a:latin typeface="Aptos"/>
-            </a:endParaRPr>
-          </a:p>
-        </p:txBody>
-      </p:sp>
-      <p:sp>
-        <p:nvSpPr>
-          <p:cNvPr id="40" name="Footer"/>
-          <p:cNvSpPr/>
+              <a:t>Foundation for Word2Vec, GloVe, BERT, GPT, and LLMs.</a:t>
+            </a:r>
+          </a:p>
+        </p:txBody>
+      </p:sp>
+      <p:sp>
+        <p:nvSpPr>
+          <p:cNvPr id="10" name="Footer"/>
+          <p:cNvSpPr txBox="1"/>
           <p:nvPr/>
         </p:nvSpPr>
         <p:spPr>
@@ -5182,23 +5323,22 @@
             <a:avLst/>
           </a:prstGeom>
           <a:noFill/>
-          <a:ln/>
-        </p:spPr>
-        <p:txBody>
-          <a:bodyPr lIns="0" tIns="0" rIns="0" bIns="0" rtlCol="0" anchor="t"/>
-          <a:lstStyle/>
-          <a:p>
-            <a:pPr algn="r">
-              <a:defRPr sz="850"/>
-            </a:pPr>
-            <a:r>
-              <a:rPr sz="850" dirty="0">
-                <a:solidFill>
-                  <a:srgbClr val="6B778C"/>
-                </a:solidFill>
-                <a:latin typeface="Aptos"/>
-              </a:rPr>
-              <a:t>AI Under the hood | Slide 13</a:t>
+        </p:spPr>
+        <p:txBody>
+          <a:bodyPr wrap="none">
+            <a:spAutoFit/>
+          </a:bodyPr>
+          <a:lstStyle/>
+          <a:p>
+            <a:pPr>
+              <a:defRPr sz="900">
+                <a:solidFill>
+                  <a:srgbClr val="52616B"/>
+                </a:solidFill>
+              </a:defRPr>
+            </a:pPr>
+            <a:r>
+              <a:t>AI Under the hood | Slide 11</a:t>
             </a:r>
           </a:p>
         </p:txBody>
@@ -5237,7 +5377,7 @@
         <p:spPr>
           <a:xfrm>
             <a:off x="502920" y="320040"/>
-            <a:ext cx="5577745" cy="553998"/>
+            <a:ext cx="11247120" cy="548640"/>
           </a:xfrm>
           <a:prstGeom prst="rect">
             <a:avLst/>
@@ -5258,16 +5398,7 @@
               </a:defRPr>
             </a:pPr>
             <a:r>
-              <a:rPr dirty="0"/>
-              <a:t>How Token ID </a:t>
-            </a:r>
-            <a:r>
-              <a:rPr lang="en-US" dirty="0"/>
-              <a:t>3</a:t>
-            </a:r>
-            <a:r>
-              <a:rPr dirty="0"/>
-              <a:t> Becomes a Vector</a:t>
+              <a:t>Embedding Lookup</a:t>
             </a:r>
           </a:p>
         </p:txBody>
@@ -5302,7 +5433,7 @@
               </a:defRPr>
             </a:pPr>
             <a:r>
-              <a:t>The algorithm is a row lookup</a:t>
+              <a:t>Token IDs become vectors</a:t>
             </a:r>
           </a:p>
         </p:txBody>
@@ -5315,8 +5446,8 @@
         </p:nvSpPr>
         <p:spPr>
           <a:xfrm>
-            <a:off x="731289" y="1234440"/>
-            <a:ext cx="3062113" cy="914400"/>
+            <a:off x="914400" y="1280160"/>
+            <a:ext cx="10424160" cy="1616949"/>
           </a:xfrm>
           <a:prstGeom prst="roundRect">
             <a:avLst/>
@@ -5349,7 +5480,7 @@
           <a:lstStyle/>
           <a:p>
             <a:pPr algn="ctr">
-              <a:defRPr sz="2500">
+              <a:defRPr sz="2200">
                 <a:solidFill>
                   <a:srgbClr val="172B4D"/>
                 </a:solidFill>
@@ -5358,73 +5489,45 @@
             </a:pPr>
             <a:r>
               <a:rPr dirty="0"/>
-              <a:t>Token ID </a:t>
-            </a:r>
-            <a:r>
-              <a:rPr lang="en-US" dirty="0"/>
-              <a:t>3</a:t>
-            </a:r>
-            <a:endParaRPr dirty="0"/>
-          </a:p>
-        </p:txBody>
-      </p:sp>
-      <p:cxnSp>
-        <p:nvCxnSpPr>
-          <p:cNvPr id="5" name="Connector 4"/>
-          <p:cNvCxnSpPr>
-            <a:cxnSpLocks/>
-          </p:cNvCxnSpPr>
-          <p:nvPr/>
-        </p:nvCxnSpPr>
-        <p:spPr>
-          <a:xfrm>
-            <a:off x="3793402" y="1691640"/>
-            <a:ext cx="675640" cy="0"/>
-          </a:xfrm>
-          <a:prstGeom prst="line">
-            <a:avLst/>
-          </a:prstGeom>
-          <a:ln w="38100">
+              <a:t>1 -&gt; [ 0.21, -0.44,  0.78,  0.12]</a:t>
+            </a:r>
+            <a:br>
+              <a:rPr dirty="0"/>
+            </a:br>
+            <a:r>
+              <a:rPr dirty="0"/>
+              <a:t>2 -&gt; [ 0.03,  0.91, -0.14,  0.36]</a:t>
+            </a:r>
+            <a:br>
+              <a:rPr dirty="0"/>
+            </a:br>
+            <a:r>
+              <a:rPr dirty="0"/>
+              <a:t>3 -&gt; [-0.62,  0.18,  0.45, -0.09]</a:t>
+            </a:r>
+          </a:p>
+        </p:txBody>
+      </p:sp>
+      <p:sp>
+        <p:nvSpPr>
+          <p:cNvPr id="5" name="Rounded Rectangle 4"/>
+          <p:cNvSpPr/>
+          <p:nvPr/>
+        </p:nvSpPr>
+        <p:spPr>
+          <a:xfrm>
+            <a:off x="868680" y="5288128"/>
+            <a:ext cx="10424160" cy="1097280"/>
+          </a:xfrm>
+          <a:prstGeom prst="roundRect">
+            <a:avLst/>
+          </a:prstGeom>
+          <a:solidFill>
+            <a:srgbClr val="EAF3FF"/>
+          </a:solidFill>
+          <a:ln w="19050">
             <a:solidFill>
               <a:srgbClr val="0B5CAD"/>
-            </a:solidFill>
-          </a:ln>
-        </p:spPr>
-        <p:style>
-          <a:lnRef idx="2">
-            <a:schemeClr val="accent1"/>
-          </a:lnRef>
-          <a:fillRef idx="0">
-            <a:schemeClr val="accent1"/>
-          </a:fillRef>
-          <a:effectRef idx="1">
-            <a:schemeClr val="accent1"/>
-          </a:effectRef>
-          <a:fontRef idx="minor">
-            <a:schemeClr val="tx1"/>
-          </a:fontRef>
-        </p:style>
-      </p:cxnSp>
-      <p:sp>
-        <p:nvSpPr>
-          <p:cNvPr id="6" name="Rounded Rectangle 5"/>
-          <p:cNvSpPr/>
-          <p:nvPr/>
-        </p:nvSpPr>
-        <p:spPr>
-          <a:xfrm>
-            <a:off x="4496474" y="1234440"/>
-            <a:ext cx="2485901" cy="914400"/>
-          </a:xfrm>
-          <a:prstGeom prst="roundRect">
-            <a:avLst/>
-          </a:prstGeom>
-          <a:solidFill>
-            <a:srgbClr val="F5F8FC"/>
-          </a:solidFill>
-          <a:ln>
-            <a:solidFill>
-              <a:srgbClr val="BED2E6"/>
             </a:solidFill>
           </a:ln>
         </p:spPr>
@@ -5443,77 +5546,90 @@
           </a:fontRef>
         </p:style>
         <p:txBody>
-          <a:bodyPr lIns="182880" tIns="109728" rIns="182880" rtlCol="0" anchor="ctr"/>
+          <a:bodyPr lIns="137160" tIns="91440" rIns="137160" rtlCol="0" anchor="ctr"/>
           <a:lstStyle/>
           <a:p>
             <a:pPr algn="ctr">
-              <a:defRPr sz="2500">
+              <a:defRPr sz="1900" b="1">
+                <a:solidFill>
+                  <a:srgbClr val="0B2F5B"/>
+                </a:solidFill>
+              </a:defRPr>
+            </a:pPr>
+            <a:r>
+              <a:rPr lang="en-US" dirty="0"/>
+              <a:t>Key takeaway</a:t>
+            </a:r>
+          </a:p>
+          <a:p>
+            <a:pPr>
+              <a:spcAft>
+                <a:spcPts val="200"/>
+              </a:spcAft>
+              <a:defRPr sz="1800">
                 <a:solidFill>
                   <a:srgbClr val="172B4D"/>
                 </a:solidFill>
-                <a:latin typeface="Consolas"/>
               </a:defRPr>
             </a:pPr>
             <a:r>
               <a:rPr dirty="0"/>
-              <a:t>E[</a:t>
-            </a:r>
-            <a:r>
-              <a:rPr lang="en-US" dirty="0"/>
-              <a:t>3</a:t>
-            </a:r>
-            <a:r>
-              <a:rPr dirty="0"/>
-              <a:t>]</a:t>
-            </a:r>
-          </a:p>
-        </p:txBody>
-      </p:sp>
-      <p:cxnSp>
-        <p:nvCxnSpPr>
-          <p:cNvPr id="7" name="Connector 6"/>
-          <p:cNvCxnSpPr/>
-          <p:nvPr/>
-        </p:nvCxnSpPr>
-        <p:spPr>
-          <a:xfrm>
-            <a:off x="6982375" y="1691640"/>
-            <a:ext cx="685800" cy="0"/>
-          </a:xfrm>
-          <a:prstGeom prst="line">
-            <a:avLst/>
-          </a:prstGeom>
-          <a:ln w="38100">
-            <a:solidFill>
-              <a:srgbClr val="0B5CAD"/>
-            </a:solidFill>
-          </a:ln>
-        </p:spPr>
-        <p:style>
-          <a:lnRef idx="2">
-            <a:schemeClr val="accent1"/>
-          </a:lnRef>
-          <a:fillRef idx="0">
-            <a:schemeClr val="accent1"/>
-          </a:fillRef>
-          <a:effectRef idx="1">
-            <a:schemeClr val="accent1"/>
-          </a:effectRef>
-          <a:fontRef idx="minor">
-            <a:schemeClr val="tx1"/>
-          </a:fontRef>
-        </p:style>
-      </p:cxnSp>
-      <p:sp>
-        <p:nvSpPr>
-          <p:cNvPr id="8" name="Rounded Rectangle 7"/>
+              <a:t>The token ID is an index. It selects a row from the embedding matrix. The selected row is the token vector.</a:t>
+            </a:r>
+          </a:p>
+        </p:txBody>
+      </p:sp>
+      <p:sp>
+        <p:nvSpPr>
+          <p:cNvPr id="6" name="TextBox 5"/>
+          <p:cNvSpPr txBox="1"/>
+          <p:nvPr/>
+        </p:nvSpPr>
+        <p:spPr>
+          <a:xfrm>
+            <a:off x="320040" y="6473952"/>
+            <a:ext cx="11521440" cy="228600"/>
+          </a:xfrm>
+          <a:prstGeom prst="rect">
+            <a:avLst/>
+          </a:prstGeom>
+          <a:noFill/>
+        </p:spPr>
+        <p:txBody>
+          <a:bodyPr wrap="none">
+            <a:spAutoFit/>
+          </a:bodyPr>
+          <a:lstStyle/>
+          <a:p>
+            <a:pPr>
+              <a:defRPr sz="900">
+                <a:solidFill>
+                  <a:srgbClr val="52616B"/>
+                </a:solidFill>
+              </a:defRPr>
+            </a:pPr>
+            <a:r>
+              <a:t>AI Under the hood | Slide 12</a:t>
+            </a:r>
+          </a:p>
+        </p:txBody>
+      </p:sp>
+      <p:sp>
+        <p:nvSpPr>
+          <p:cNvPr id="7" name="Rounded Rectangle 3">
+            <a:extLst>
+              <a:ext uri="{FF2B5EF4-FFF2-40B4-BE49-F238E27FC236}">
+                <a16:creationId xmlns:a16="http://schemas.microsoft.com/office/drawing/2014/main" id="{4D62C980-9521-DFEE-0DCD-FEEC67E8FE40}"/>
+              </a:ext>
+            </a:extLst>
+          </p:cNvPr>
           <p:cNvSpPr/>
           <p:nvPr/>
         </p:nvSpPr>
         <p:spPr>
           <a:xfrm>
-            <a:off x="7668174" y="1228555"/>
-            <a:ext cx="3670385" cy="914400"/>
+            <a:off x="883920" y="3307531"/>
+            <a:ext cx="10424160" cy="1616949"/>
           </a:xfrm>
           <a:prstGeom prst="roundRect">
             <a:avLst/>
@@ -5545,8 +5661,8 @@
           <a:bodyPr lIns="182880" tIns="109728" rIns="182880" rtlCol="0" anchor="ctr"/>
           <a:lstStyle/>
           <a:p>
-            <a:pPr>
-              <a:defRPr sz="1600">
+            <a:pPr algn="ctr">
+              <a:defRPr sz="2200">
                 <a:solidFill>
                   <a:srgbClr val="172B4D"/>
                 </a:solidFill>
@@ -5554,143 +5670,26 @@
               </a:defRPr>
             </a:pPr>
             <a:r>
-              <a:rPr dirty="0"/>
-              <a:t>[</a:t>
-            </a:r>
-            <a:r>
               <a:rPr lang="en-US" dirty="0"/>
-              <a:t>-0.62,  0.18,  0.45, -0.09</a:t>
-            </a:r>
-            <a:r>
-              <a:rPr dirty="0"/>
-              <a:t>]</a:t>
-            </a:r>
-          </a:p>
-        </p:txBody>
-      </p:sp>
-      <p:sp>
-        <p:nvSpPr>
-          <p:cNvPr id="9" name="Rounded Rectangle 8"/>
-          <p:cNvSpPr/>
-          <p:nvPr/>
-        </p:nvSpPr>
-        <p:spPr>
-          <a:xfrm>
-            <a:off x="914400" y="3200400"/>
-            <a:ext cx="10424160" cy="1325880"/>
-          </a:xfrm>
-          <a:prstGeom prst="roundRect">
-            <a:avLst/>
-          </a:prstGeom>
-          <a:solidFill>
-            <a:srgbClr val="FFFFFF"/>
-          </a:solidFill>
-          <a:ln w="19050">
-            <a:solidFill>
-              <a:srgbClr val="0B5CAD"/>
-            </a:solidFill>
-          </a:ln>
-        </p:spPr>
-        <p:style>
-          <a:lnRef idx="1">
-            <a:schemeClr val="accent1"/>
-          </a:lnRef>
-          <a:fillRef idx="3">
-            <a:schemeClr val="accent1"/>
-          </a:fillRef>
-          <a:effectRef idx="2">
-            <a:schemeClr val="accent1"/>
-          </a:effectRef>
-          <a:fontRef idx="minor">
-            <a:schemeClr val="lt1"/>
-          </a:fontRef>
-        </p:style>
-        <p:txBody>
-          <a:bodyPr lIns="137160" tIns="91440" rIns="137160" rtlCol="0" anchor="ctr"/>
-          <a:lstStyle/>
-          <a:p>
-            <a:pPr algn="ctr">
-              <a:defRPr sz="1900" b="1">
-                <a:solidFill>
-                  <a:srgbClr val="0B2F5B"/>
-                </a:solidFill>
-              </a:defRPr>
-            </a:pPr>
-            <a:r>
-              <a:rPr dirty="0"/>
-              <a:t>Important distinction</a:t>
-            </a:r>
-          </a:p>
-          <a:p>
-            <a:pPr>
-              <a:spcAft>
-                <a:spcPts val="200"/>
-              </a:spcAft>
-              <a:defRPr sz="1800">
-                <a:solidFill>
-                  <a:srgbClr val="172B4D"/>
-                </a:solidFill>
-              </a:defRPr>
-            </a:pPr>
-            <a:r>
-              <a:rPr dirty="0">
-                <a:highlight>
-                  <a:srgbClr val="FFFF00"/>
-                </a:highlight>
-              </a:rPr>
-              <a:t>The integer </a:t>
-            </a:r>
-            <a:r>
-              <a:rPr lang="en-US" dirty="0">
-                <a:highlight>
-                  <a:srgbClr val="FFFF00"/>
-                </a:highlight>
-              </a:rPr>
-              <a:t>3</a:t>
-            </a:r>
-            <a:r>
-              <a:rPr dirty="0">
-                <a:highlight>
-                  <a:srgbClr val="FFFF00"/>
-                </a:highlight>
-              </a:rPr>
-              <a:t> does not contain the meaning of “sales.” It points to a learned row in the embedding matrix.</a:t>
-            </a:r>
-          </a:p>
-        </p:txBody>
-      </p:sp>
-      <p:sp>
-        <p:nvSpPr>
-          <p:cNvPr id="10" name="TextBox 9"/>
-          <p:cNvSpPr txBox="1"/>
-          <p:nvPr/>
-        </p:nvSpPr>
-        <p:spPr>
-          <a:xfrm>
-            <a:off x="320040" y="6473952"/>
-            <a:ext cx="11521440" cy="228600"/>
-          </a:xfrm>
-          <a:prstGeom prst="rect">
-            <a:avLst/>
-          </a:prstGeom>
-          <a:noFill/>
-        </p:spPr>
-        <p:txBody>
-          <a:bodyPr wrap="none">
-            <a:spAutoFit/>
-          </a:bodyPr>
-          <a:lstStyle/>
-          <a:p>
-            <a:pPr>
-              <a:defRPr sz="900">
-                <a:solidFill>
-                  <a:srgbClr val="52616B"/>
-                </a:solidFill>
-              </a:defRPr>
-            </a:pPr>
-            <a:r>
-              <a:t>AI Under the hood | Slide 14</a:t>
-            </a:r>
+              <a:t>Conceptually: </a:t>
+            </a:r>
+            <a:r>
+              <a:rPr lang="en-US" dirty="0" err="1"/>
+              <a:t>EmbeddingMatrix</a:t>
+            </a:r>
+            <a:r>
+              <a:rPr lang="en-US" dirty="0"/>
+              <a:t>[ </a:t>
+            </a:r>
+            <a:r>
+              <a:rPr lang="en-US" dirty="0" err="1"/>
+              <a:t>token_id</a:t>
+            </a:r>
+            <a:r>
+              <a:rPr lang="en-US" dirty="0"/>
+              <a:t> ] returns a vector</a:t>
+            </a:r>
+            <a:endParaRPr dirty="0"/>
           </a:p>
         </p:txBody>
       </p:sp>
@@ -11261,61 +11260,398 @@
       </p:grpSpPr>
       <p:pic>
         <p:nvPicPr>
-          <p:cNvPr id="2" name="MAGPAI From Question to Insight"/>
-          <p:cNvPicPr/>
-          <p:nvPr/>
+          <p:cNvPr id="6" name="Picture Placeholder 5">
+            <a:extLst>
+              <a:ext uri="{FF2B5EF4-FFF2-40B4-BE49-F238E27FC236}">
+                <a16:creationId xmlns:a16="http://schemas.microsoft.com/office/drawing/2014/main" id="{BC56227F-0E35-3518-A770-5486C9C41AE4}"/>
+              </a:ext>
+            </a:extLst>
+          </p:cNvPr>
+          <p:cNvPicPr>
+            <a:picLocks noGrp="1" noChangeAspect="1"/>
+          </p:cNvPicPr>
+          <p:nvPr>
+            <p:ph type="pic" idx="1"/>
+          </p:nvPr>
         </p:nvPicPr>
         <p:blipFill>
           <a:blip r:embed="rId2"/>
+          <a:srcRect l="3333" r="3333"/>
           <a:stretch>
             <a:fillRect/>
           </a:stretch>
         </p:blipFill>
         <p:spPr>
           <a:xfrm>
-            <a:off x="1466850" y="274320"/>
-            <a:ext cx="9258300" cy="6172200"/>
+            <a:off x="3068801" y="612775"/>
+            <a:ext cx="5486400" cy="4114800"/>
+          </a:xfrm>
+        </p:spPr>
+      </p:pic>
+      <p:sp>
+        <p:nvSpPr>
+          <p:cNvPr id="200" name="Closing dark readable overlay"/>
+          <p:cNvSpPr/>
+          <p:nvPr/>
+        </p:nvSpPr>
+        <p:spPr>
+          <a:xfrm>
+            <a:off x="0" y="0"/>
+            <a:ext cx="12192000" cy="6858000"/>
           </a:xfrm>
           <a:prstGeom prst="rect">
             <a:avLst/>
           </a:prstGeom>
-        </p:spPr>
-      </p:pic>
-      <p:sp>
-        <p:nvSpPr>
-          <p:cNvPr id="3" name="Footer"/>
-          <p:cNvSpPr txBox="1"/>
-          <p:nvPr/>
-        </p:nvSpPr>
-        <p:spPr>
-          <a:xfrm>
-            <a:off x="320040" y="6473952"/>
-            <a:ext cx="11521440" cy="228600"/>
+          <a:solidFill>
+            <a:srgbClr val="050A0F">
+              <a:alpha val="65000"/>
+            </a:srgbClr>
+          </a:solidFill>
+          <a:ln>
+            <a:noFill/>
+          </a:ln>
+        </p:spPr>
+      </p:sp>
+      <p:sp>
+        <p:nvSpPr>
+          <p:cNvPr id="201" name="Closing left ink panel"/>
+          <p:cNvSpPr/>
+          <p:nvPr/>
+        </p:nvSpPr>
+        <p:spPr>
+          <a:xfrm>
+            <a:off x="0" y="0"/>
+            <a:ext cx="7600000" cy="6858000"/>
           </a:xfrm>
           <a:prstGeom prst="rect">
             <a:avLst/>
           </a:prstGeom>
+          <a:solidFill>
+            <a:srgbClr val="07111B">
+              <a:alpha val="18000"/>
+            </a:srgbClr>
+          </a:solidFill>
+          <a:ln>
+            <a:noFill/>
+          </a:ln>
+        </p:spPr>
+      </p:sp>
+      <p:sp>
+        <p:nvSpPr>
+          <p:cNvPr id="202" name="Closing accent rule"/>
+          <p:cNvSpPr/>
+          <p:nvPr/>
+        </p:nvSpPr>
+        <p:spPr>
+          <a:xfrm>
+            <a:off x="760000" y="1070000"/>
+            <a:ext cx="3000000" cy="0"/>
+          </a:xfrm>
+          <a:prstGeom prst="rect">
+            <a:avLst/>
+          </a:prstGeom>
           <a:noFill/>
-          <a:ln/>
-        </p:spPr>
-        <p:txBody>
-          <a:bodyPr lIns="0" tIns="0" rIns="0" bIns="0" rtlCol="0" anchor="t"/>
-          <a:lstStyle/>
-          <a:p>
-            <a:pPr algn="r"/>
-            <a:r>
-              <a:rPr sz="850" dirty="0">
-                <a:solidFill>
-                  <a:srgbClr val="6B778C"/>
-                </a:solidFill>
-                <a:latin typeface="Aptos"/>
-              </a:rPr>
-              <a:t>AI Under the hood | Slide 20</a:t>
-            </a:r>
+          <a:ln w="38100">
+            <a:solidFill>
+              <a:srgbClr val="42D17A"/>
+            </a:solidFill>
+          </a:ln>
+        </p:spPr>
+      </p:sp>
+      <p:sp>
+        <p:nvSpPr>
+          <p:cNvPr id="203" name="Closing kicker"/>
+          <p:cNvSpPr/>
+          <p:nvPr/>
+        </p:nvSpPr>
+        <p:spPr>
+          <a:xfrm>
+            <a:off x="760000" y="520000"/>
+            <a:ext cx="4800000" cy="420000"/>
+          </a:xfrm>
+          <a:prstGeom prst="rect">
+            <a:avLst/>
+          </a:prstGeom>
+          <a:noFill/>
+          <a:ln>
+            <a:noFill/>
+          </a:ln>
+        </p:spPr>
+        <p:txBody>
+          <a:bodyPr wrap="square" anchor="t"/>
+          <a:lstStyle/>
+          <a:p>
+            <a:pPr algn="l">
+              <a:buNone/>
+            </a:pPr>
+            <a:r>
+              <a:rPr lang="en-US" sz="1600" b="1" dirty="0">
+                <a:solidFill>
+                  <a:srgbClr val="9AE6B4"/>
+                </a:solidFill>
+              </a:rPr>
+              <a:t>MAGPAI</a:t>
+            </a:r>
+            <a:endParaRPr lang="en-US" sz="1600" dirty="0"/>
+          </a:p>
+        </p:txBody>
+      </p:sp>
+      <p:sp>
+        <p:nvSpPr>
+          <p:cNvPr id="204" name="Closing title"/>
+          <p:cNvSpPr/>
+          <p:nvPr/>
+        </p:nvSpPr>
+        <p:spPr>
+          <a:xfrm>
+            <a:off x="730000" y="1180000"/>
+            <a:ext cx="7200000" cy="1500000"/>
+          </a:xfrm>
+          <a:prstGeom prst="rect">
+            <a:avLst/>
+          </a:prstGeom>
+          <a:noFill/>
+          <a:ln>
+            <a:noFill/>
+          </a:ln>
+        </p:spPr>
+        <p:txBody>
+          <a:bodyPr wrap="square" anchor="t"/>
+          <a:lstStyle/>
+          <a:p>
+            <a:pPr algn="l">
+              <a:buNone/>
+            </a:pPr>
+            <a:r>
+              <a:rPr lang="en-US" sz="3200" b="1" dirty="0">
+                <a:solidFill>
+                  <a:srgbClr val="FFFFFF"/>
+                </a:solidFill>
+              </a:rPr>
+              <a:t>You now know what is under the hood.</a:t>
+            </a:r>
+            <a:endParaRPr lang="en-US" sz="3200" dirty="0"/>
+          </a:p>
+        </p:txBody>
+      </p:sp>
+      <p:sp>
+        <p:nvSpPr>
+          <p:cNvPr id="205" name="Closing subtitle"/>
+          <p:cNvSpPr/>
+          <p:nvPr/>
+        </p:nvSpPr>
+        <p:spPr>
+          <a:xfrm>
+            <a:off x="780000" y="2700000"/>
+            <a:ext cx="6350000" cy="720000"/>
+          </a:xfrm>
+          <a:prstGeom prst="rect">
+            <a:avLst/>
+          </a:prstGeom>
+          <a:noFill/>
+          <a:ln>
+            <a:noFill/>
+          </a:ln>
+        </p:spPr>
+        <p:txBody>
+          <a:bodyPr wrap="square" anchor="t"/>
+          <a:lstStyle/>
+          <a:p>
+            <a:pPr algn="l">
+              <a:buNone/>
+            </a:pPr>
+            <a:r>
+              <a:rPr lang="en-US" sz="1800" b="0">
+                <a:solidFill>
+                  <a:srgbClr val="DCEAF7"/>
+                </a:solidFill>
+              </a:rPr>
+              <a:t>Words become tokens. Tokens become vectors. Vectors activate neural networks. Systems turn answers into action.</a:t>
+            </a:r>
+            <a:endParaRPr lang="en-US" sz="1800"/>
+          </a:p>
+        </p:txBody>
+      </p:sp>
+      <p:sp>
+        <p:nvSpPr>
+          <p:cNvPr id="206" name="Closing key takeaways"/>
+          <p:cNvSpPr/>
+          <p:nvPr/>
+        </p:nvSpPr>
+        <p:spPr>
+          <a:xfrm>
+            <a:off x="820000" y="3650000"/>
+            <a:ext cx="7110000" cy="1900000"/>
+          </a:xfrm>
+          <a:prstGeom prst="rect">
+            <a:avLst/>
+          </a:prstGeom>
+          <a:solidFill>
+            <a:srgbClr val="0B1B2A">
+              <a:alpha val="18000"/>
+            </a:srgbClr>
+          </a:solidFill>
+          <a:ln>
+            <a:noFill/>
+          </a:ln>
+        </p:spPr>
+        <p:txBody>
+          <a:bodyPr wrap="square" anchor="t"/>
+          <a:lstStyle/>
+          <a:p>
+            <a:pPr algn="l">
+              <a:buChar char="•"/>
+            </a:pPr>
+            <a:r>
+              <a:rPr lang="en-US" sz="1500" b="0" dirty="0">
+                <a:solidFill>
+                  <a:srgbClr val="F4F8FF"/>
+                </a:solidFill>
+              </a:rPr>
+              <a:t>AI is not magic; it is a pipeline you can inspect.</a:t>
+            </a:r>
+            <a:endParaRPr lang="en-US" sz="1500" dirty="0"/>
+          </a:p>
+          <a:p>
+            <a:pPr algn="l">
+              <a:buChar char="•"/>
+            </a:pPr>
+            <a:r>
+              <a:rPr lang="en-US" sz="1500" b="0" dirty="0">
+                <a:solidFill>
+                  <a:srgbClr val="F4F8FF"/>
+                </a:solidFill>
+              </a:rPr>
+              <a:t>Tokenization is where language first becomes structure.</a:t>
+            </a:r>
+            <a:endParaRPr lang="en-US" sz="1500" dirty="0"/>
+          </a:p>
+          <a:p>
+            <a:pPr algn="l">
+              <a:buChar char="•"/>
+            </a:pPr>
+            <a:r>
+              <a:rPr lang="en-US" sz="1500" b="0" dirty="0">
+                <a:solidFill>
+                  <a:srgbClr val="F4F8FF"/>
+                </a:solidFill>
+              </a:rPr>
+              <a:t>Embeddings are learned coordinates of meaning.</a:t>
+            </a:r>
+            <a:endParaRPr lang="en-US" sz="1500" dirty="0"/>
+          </a:p>
+          <a:p>
+            <a:pPr algn="l">
+              <a:buChar char="•"/>
+            </a:pPr>
+            <a:r>
+              <a:rPr lang="en-US" sz="1500" b="0" dirty="0">
+                <a:solidFill>
+                  <a:srgbClr val="F4F8FF"/>
+                </a:solidFill>
+              </a:rPr>
+              <a:t>Neural networks learn by changing weights and bias.</a:t>
+            </a:r>
+            <a:endParaRPr lang="en-US" sz="1500" dirty="0"/>
+          </a:p>
+          <a:p>
+            <a:pPr algn="l">
+              <a:buChar char="•"/>
+            </a:pPr>
+            <a:r>
+              <a:rPr lang="en-US" sz="1500" b="0" dirty="0">
+                <a:solidFill>
+                  <a:srgbClr val="F4F8FF"/>
+                </a:solidFill>
+              </a:rPr>
+              <a:t>Enterprise value comes when the model is connected to data, tools, and governance.</a:t>
+            </a:r>
+            <a:endParaRPr lang="en-US" sz="1500" dirty="0"/>
+          </a:p>
+        </p:txBody>
+      </p:sp>
+      <p:sp>
+        <p:nvSpPr>
+          <p:cNvPr id="207" name="Closing memorable line"/>
+          <p:cNvSpPr/>
+          <p:nvPr/>
+        </p:nvSpPr>
+        <p:spPr>
+          <a:xfrm>
+            <a:off x="835000" y="5750000"/>
+            <a:ext cx="8292222" cy="560000"/>
+          </a:xfrm>
+          <a:prstGeom prst="rect">
+            <a:avLst/>
+          </a:prstGeom>
+          <a:noFill/>
+          <a:ln>
+            <a:noFill/>
+          </a:ln>
+        </p:spPr>
+        <p:txBody>
+          <a:bodyPr wrap="square" anchor="t"/>
+          <a:lstStyle/>
+          <a:p>
+            <a:pPr algn="l">
+              <a:buNone/>
+            </a:pPr>
+            <a:r>
+              <a:rPr lang="en-US" sz="1800" b="1" dirty="0">
+                <a:solidFill>
+                  <a:srgbClr val="9AE6B4"/>
+                </a:solidFill>
+              </a:rPr>
+              <a:t>The advantage goes to teams who can see the machinery, not just use the interface.</a:t>
+            </a:r>
+            <a:endParaRPr lang="en-US" sz="1800" dirty="0"/>
+          </a:p>
+        </p:txBody>
+      </p:sp>
+      <p:sp>
+        <p:nvSpPr>
+          <p:cNvPr id="208" name="Closing footer"/>
+          <p:cNvSpPr/>
+          <p:nvPr/>
+        </p:nvSpPr>
+        <p:spPr>
+          <a:xfrm>
+            <a:off x="820000" y="6450000"/>
+            <a:ext cx="3500000" cy="260000"/>
+          </a:xfrm>
+          <a:prstGeom prst="rect">
+            <a:avLst/>
+          </a:prstGeom>
+          <a:noFill/>
+          <a:ln>
+            <a:noFill/>
+          </a:ln>
+        </p:spPr>
+        <p:txBody>
+          <a:bodyPr wrap="square" anchor="t"/>
+          <a:lstStyle/>
+          <a:p>
+            <a:pPr algn="l">
+              <a:buNone/>
+            </a:pPr>
+            <a:r>
+              <a:rPr lang="en-US" sz="1000" b="0">
+                <a:solidFill>
+                  <a:srgbClr val="A9B8C8"/>
+                </a:solidFill>
+              </a:rPr>
+              <a:t>AI Under the hood</a:t>
+            </a:r>
+            <a:endParaRPr lang="en-US" sz="1000"/>
           </a:p>
         </p:txBody>
       </p:sp>
     </p:spTree>
+    <p:extLst>
+      <p:ext uri="{BB962C8B-B14F-4D97-AF65-F5344CB8AC3E}">
+        <p14:creationId xmlns:p14="http://schemas.microsoft.com/office/powerpoint/2010/main" val="4093375280"/>
+      </p:ext>
+    </p:extLst>
   </p:cSld>
   <p:clrMapOvr>
     <a:masterClrMapping/>
@@ -11482,280 +11818,222 @@
   <p:clrMapOvr>
     <a:masterClrMapping/>
   </p:clrMapOvr>
-</p:sld>
-</file>
-
-<file path=ppt/slides/slide20.xml><?xml version="1.0" encoding="utf-8"?>
-<p:sld xmlns:a="http://schemas.openxmlformats.org/drawingml/2006/main" xmlns:r="http://schemas.openxmlformats.org/officeDocument/2006/relationships" xmlns:p="http://schemas.openxmlformats.org/presentationml/2006/main">
-  <p:cSld>
-    <p:spTree>
-      <p:nvGrpSpPr>
-        <p:cNvPr id="1" name=""/>
-        <p:cNvGrpSpPr/>
-        <p:nvPr/>
-      </p:nvGrpSpPr>
-      <p:grpSpPr>
-        <a:xfrm>
-          <a:off x="0" y="0"/>
-          <a:ext cx="0" cy="0"/>
-          <a:chOff x="0" y="0"/>
-          <a:chExt cx="0" cy="0"/>
-        </a:xfrm>
-      </p:grpSpPr>
-      <p:sp>
-        <p:nvSpPr>
-          <p:cNvPr id="2" name="TextBox 1"/>
-          <p:cNvSpPr txBox="1"/>
-          <p:nvPr/>
-        </p:nvSpPr>
-        <p:spPr>
-          <a:xfrm>
-            <a:off x="502920" y="320040"/>
-            <a:ext cx="11247120" cy="548640"/>
-          </a:xfrm>
-          <a:prstGeom prst="rect">
-            <a:avLst/>
-          </a:prstGeom>
-          <a:noFill/>
-        </p:spPr>
-        <p:txBody>
-          <a:bodyPr wrap="none">
-            <a:spAutoFit/>
-          </a:bodyPr>
-          <a:lstStyle/>
-          <a:p>
-            <a:pPr>
-              <a:defRPr sz="3000" b="1">
-                <a:solidFill>
-                  <a:srgbClr val="0B2F5B"/>
-                </a:solidFill>
-              </a:defRPr>
-            </a:pPr>
-            <a:r>
-              <a:t>Audience Takeaway</a:t>
-            </a:r>
-          </a:p>
-        </p:txBody>
-      </p:sp>
-      <p:sp>
-        <p:nvSpPr>
-          <p:cNvPr id="3" name="TextBox 2"/>
-          <p:cNvSpPr txBox="1"/>
-          <p:nvPr/>
-        </p:nvSpPr>
-        <p:spPr>
-          <a:xfrm>
-            <a:off x="530352" y="868680"/>
-            <a:ext cx="10972800" cy="365760"/>
-          </a:xfrm>
-          <a:prstGeom prst="rect">
-            <a:avLst/>
-          </a:prstGeom>
-          <a:noFill/>
-        </p:spPr>
-        <p:txBody>
-          <a:bodyPr wrap="none">
-            <a:spAutoFit/>
-          </a:bodyPr>
-          <a:lstStyle/>
-          <a:p>
-            <a:pPr>
-              <a:defRPr sz="1600">
-                <a:solidFill>
-                  <a:srgbClr val="52616B"/>
-                </a:solidFill>
-              </a:defRPr>
-            </a:pPr>
-            <a:r>
-              <a:t>The first stable mental model</a:t>
-            </a:r>
-          </a:p>
-        </p:txBody>
-      </p:sp>
-      <p:sp>
-        <p:nvSpPr>
-          <p:cNvPr id="4" name="Rounded Rectangle 3"/>
-          <p:cNvSpPr/>
-          <p:nvPr/>
-        </p:nvSpPr>
-        <p:spPr>
-          <a:xfrm>
-            <a:off x="914400" y="1463040"/>
-            <a:ext cx="10424160" cy="1097280"/>
-          </a:xfrm>
-          <a:prstGeom prst="roundRect">
-            <a:avLst/>
-          </a:prstGeom>
-          <a:solidFill>
-            <a:srgbClr val="F5F8FC"/>
-          </a:solidFill>
-          <a:ln>
-            <a:solidFill>
-              <a:srgbClr val="BED2E6"/>
-            </a:solidFill>
-          </a:ln>
-        </p:spPr>
-        <p:style>
-          <a:lnRef idx="1">
-            <a:schemeClr val="accent1"/>
-          </a:lnRef>
-          <a:fillRef idx="3">
-            <a:schemeClr val="accent1"/>
-          </a:fillRef>
-          <a:effectRef idx="2">
-            <a:schemeClr val="accent1"/>
-          </a:effectRef>
-          <a:fontRef idx="minor">
-            <a:schemeClr val="lt1"/>
-          </a:fontRef>
-        </p:style>
-        <p:txBody>
-          <a:bodyPr lIns="182880" tIns="109728" rIns="182880" rtlCol="0" anchor="ctr"/>
-          <a:lstStyle/>
-          <a:p>
-            <a:pPr algn="ctr">
-              <a:defRPr sz="2700">
-                <a:solidFill>
-                  <a:srgbClr val="172B4D"/>
-                </a:solidFill>
-                <a:latin typeface="Consolas"/>
-              </a:defRPr>
-            </a:pPr>
-            <a:r>
-              <a:t>A model never sees “sales” as a word.</a:t>
-            </a:r>
-            <a:br/>
-            <a:r>
-              <a:t>It sees a numeric pattern.</a:t>
-            </a:r>
-          </a:p>
-        </p:txBody>
-      </p:sp>
-      <p:sp>
-        <p:nvSpPr>
-          <p:cNvPr id="5" name="Rounded Rectangle 4"/>
-          <p:cNvSpPr/>
-          <p:nvPr/>
-        </p:nvSpPr>
-        <p:spPr>
-          <a:xfrm>
-            <a:off x="914400" y="2971800"/>
-            <a:ext cx="10424160" cy="1600200"/>
-          </a:xfrm>
-          <a:prstGeom prst="roundRect">
-            <a:avLst/>
-          </a:prstGeom>
-          <a:solidFill>
-            <a:srgbClr val="F5F8FC"/>
-          </a:solidFill>
-          <a:ln>
-            <a:solidFill>
-              <a:srgbClr val="BED2E6"/>
-            </a:solidFill>
-          </a:ln>
-        </p:spPr>
-        <p:style>
-          <a:lnRef idx="1">
-            <a:schemeClr val="accent1"/>
-          </a:lnRef>
-          <a:fillRef idx="3">
-            <a:schemeClr val="accent1"/>
-          </a:fillRef>
-          <a:effectRef idx="2">
-            <a:schemeClr val="accent1"/>
-          </a:effectRef>
-          <a:fontRef idx="minor">
-            <a:schemeClr val="lt1"/>
-          </a:fontRef>
-        </p:style>
-        <p:txBody>
-          <a:bodyPr lIns="182880" tIns="109728" rIns="182880" rtlCol="0" anchor="ctr"/>
-          <a:lstStyle/>
-          <a:p>
-            <a:pPr algn="ctr">
-              <a:defRPr sz="2200">
-                <a:solidFill>
-                  <a:srgbClr val="172B4D"/>
-                </a:solidFill>
-                <a:latin typeface="Consolas"/>
-              </a:defRPr>
-            </a:pPr>
-            <a:r>
-              <a:rPr dirty="0"/>
-              <a:t>Text becomes tokens.</a:t>
-            </a:r>
-            <a:br>
-              <a:rPr dirty="0"/>
-            </a:br>
-            <a:r>
-              <a:rPr dirty="0"/>
-              <a:t>Tokens become IDs.</a:t>
-            </a:r>
-            <a:br>
-              <a:rPr dirty="0"/>
-            </a:br>
-            <a:r>
-              <a:rPr dirty="0"/>
-              <a:t>IDs become vectors.</a:t>
-            </a:r>
-            <a:br>
-              <a:rPr dirty="0"/>
-            </a:br>
-            <a:r>
-              <a:rPr dirty="0"/>
-              <a:t>Vectors become an </a:t>
-            </a:r>
-            <a:r>
-              <a:rPr lang="en-US" dirty="0"/>
-              <a:t>input tensor for the NN </a:t>
-            </a:r>
-            <a:r>
-              <a:rPr dirty="0"/>
-              <a:t>model.</a:t>
-            </a:r>
-          </a:p>
-        </p:txBody>
-      </p:sp>
-      <p:sp>
-        <p:nvSpPr>
-          <p:cNvPr id="6" name="TextBox 5"/>
-          <p:cNvSpPr txBox="1"/>
-          <p:nvPr/>
-        </p:nvSpPr>
-        <p:spPr>
-          <a:xfrm>
-            <a:off x="320040" y="6473952"/>
-            <a:ext cx="11521440" cy="228600"/>
-          </a:xfrm>
-          <a:prstGeom prst="rect">
-            <a:avLst/>
-          </a:prstGeom>
-          <a:noFill/>
-        </p:spPr>
-        <p:txBody>
-          <a:bodyPr wrap="none">
-            <a:spAutoFit/>
-          </a:bodyPr>
-          <a:lstStyle/>
-          <a:p>
-            <a:pPr>
-              <a:defRPr sz="900">
-                <a:solidFill>
-                  <a:srgbClr val="52616B"/>
-                </a:solidFill>
-              </a:defRPr>
-            </a:pPr>
-            <a:r>
-              <a:t>AI Under the hood | Slide 22</a:t>
-            </a:r>
-          </a:p>
-        </p:txBody>
-      </p:sp>
-    </p:spTree>
-  </p:cSld>
-  <p:clrMapOvr>
-    <a:masterClrMapping/>
-  </p:clrMapOvr>
+  <p:timing>
+    <p:tnLst>
+      <p:par>
+        <p:cTn id="1" dur="indefinite" restart="never" nodeType="tmRoot">
+          <p:childTnLst>
+            <p:seq concurrent="1" nextAc="seek">
+              <p:cTn id="2" dur="indefinite" nodeType="mainSeq">
+                <p:childTnLst>
+                  <p:par>
+                    <p:cTn id="3" fill="hold">
+                      <p:stCondLst>
+                        <p:cond delay="indefinite"/>
+                      </p:stCondLst>
+                      <p:childTnLst>
+                        <p:par>
+                          <p:cTn id="4" fill="hold">
+                            <p:stCondLst>
+                              <p:cond delay="0"/>
+                            </p:stCondLst>
+                            <p:childTnLst>
+                              <p:par>
+                                <p:cTn id="5" presetID="2" presetClass="entr" presetSubtype="4" fill="hold" grpId="0" nodeType="clickEffect">
+                                  <p:stCondLst>
+                                    <p:cond delay="0"/>
+                                  </p:stCondLst>
+                                  <p:childTnLst>
+                                    <p:set>
+                                      <p:cBhvr>
+                                        <p:cTn id="6" dur="1" fill="hold">
+                                          <p:stCondLst>
+                                            <p:cond delay="0"/>
+                                          </p:stCondLst>
+                                        </p:cTn>
+                                        <p:tgtEl>
+                                          <p:spTgt spid="91"/>
+                                        </p:tgtEl>
+                                        <p:attrNameLst>
+                                          <p:attrName>style.visibility</p:attrName>
+                                        </p:attrNameLst>
+                                      </p:cBhvr>
+                                      <p:to>
+                                        <p:strVal val="visible"/>
+                                      </p:to>
+                                    </p:set>
+                                    <p:anim calcmode="lin" valueType="num">
+                                      <p:cBhvr additive="base">
+                                        <p:cTn id="7" dur="500" fill="hold"/>
+                                        <p:tgtEl>
+                                          <p:spTgt spid="91"/>
+                                        </p:tgtEl>
+                                        <p:attrNameLst>
+                                          <p:attrName>ppt_x</p:attrName>
+                                        </p:attrNameLst>
+                                      </p:cBhvr>
+                                      <p:tavLst>
+                                        <p:tav tm="0">
+                                          <p:val>
+                                            <p:strVal val="#ppt_x"/>
+                                          </p:val>
+                                        </p:tav>
+                                        <p:tav tm="100000">
+                                          <p:val>
+                                            <p:strVal val="#ppt_x"/>
+                                          </p:val>
+                                        </p:tav>
+                                      </p:tavLst>
+                                    </p:anim>
+                                    <p:anim calcmode="lin" valueType="num">
+                                      <p:cBhvr additive="base">
+                                        <p:cTn id="8" dur="500" fill="hold"/>
+                                        <p:tgtEl>
+                                          <p:spTgt spid="91"/>
+                                        </p:tgtEl>
+                                        <p:attrNameLst>
+                                          <p:attrName>ppt_y</p:attrName>
+                                        </p:attrNameLst>
+                                      </p:cBhvr>
+                                      <p:tavLst>
+                                        <p:tav tm="0">
+                                          <p:val>
+                                            <p:strVal val="1+#ppt_h/2"/>
+                                          </p:val>
+                                        </p:tav>
+                                        <p:tav tm="100000">
+                                          <p:val>
+                                            <p:strVal val="#ppt_y"/>
+                                          </p:val>
+                                        </p:tav>
+                                      </p:tavLst>
+                                    </p:anim>
+                                  </p:childTnLst>
+                                </p:cTn>
+                              </p:par>
+                            </p:childTnLst>
+                          </p:cTn>
+                        </p:par>
+                      </p:childTnLst>
+                    </p:cTn>
+                  </p:par>
+                  <p:par>
+                    <p:cTn id="9" fill="hold">
+                      <p:stCondLst>
+                        <p:cond delay="indefinite"/>
+                      </p:stCondLst>
+                      <p:childTnLst>
+                        <p:par>
+                          <p:cTn id="10" fill="hold">
+                            <p:stCondLst>
+                              <p:cond delay="0"/>
+                            </p:stCondLst>
+                            <p:childTnLst>
+                              <p:par>
+                                <p:cTn id="11" presetID="2" presetClass="entr" presetSubtype="4" fill="hold" grpId="0" nodeType="clickEffect">
+                                  <p:stCondLst>
+                                    <p:cond delay="0"/>
+                                  </p:stCondLst>
+                                  <p:childTnLst>
+                                    <p:set>
+                                      <p:cBhvr>
+                                        <p:cTn id="12" dur="1" fill="hold">
+                                          <p:stCondLst>
+                                            <p:cond delay="0"/>
+                                          </p:stCondLst>
+                                        </p:cTn>
+                                        <p:tgtEl>
+                                          <p:spTgt spid="92"/>
+                                        </p:tgtEl>
+                                        <p:attrNameLst>
+                                          <p:attrName>style.visibility</p:attrName>
+                                        </p:attrNameLst>
+                                      </p:cBhvr>
+                                      <p:to>
+                                        <p:strVal val="visible"/>
+                                      </p:to>
+                                    </p:set>
+                                    <p:anim calcmode="lin" valueType="num">
+                                      <p:cBhvr additive="base">
+                                        <p:cTn id="13" dur="500" fill="hold"/>
+                                        <p:tgtEl>
+                                          <p:spTgt spid="92"/>
+                                        </p:tgtEl>
+                                        <p:attrNameLst>
+                                          <p:attrName>ppt_x</p:attrName>
+                                        </p:attrNameLst>
+                                      </p:cBhvr>
+                                      <p:tavLst>
+                                        <p:tav tm="0">
+                                          <p:val>
+                                            <p:strVal val="#ppt_x"/>
+                                          </p:val>
+                                        </p:tav>
+                                        <p:tav tm="100000">
+                                          <p:val>
+                                            <p:strVal val="#ppt_x"/>
+                                          </p:val>
+                                        </p:tav>
+                                      </p:tavLst>
+                                    </p:anim>
+                                    <p:anim calcmode="lin" valueType="num">
+                                      <p:cBhvr additive="base">
+                                        <p:cTn id="14" dur="500" fill="hold"/>
+                                        <p:tgtEl>
+                                          <p:spTgt spid="92"/>
+                                        </p:tgtEl>
+                                        <p:attrNameLst>
+                                          <p:attrName>ppt_y</p:attrName>
+                                        </p:attrNameLst>
+                                      </p:cBhvr>
+                                      <p:tavLst>
+                                        <p:tav tm="0">
+                                          <p:val>
+                                            <p:strVal val="1+#ppt_h/2"/>
+                                          </p:val>
+                                        </p:tav>
+                                        <p:tav tm="100000">
+                                          <p:val>
+                                            <p:strVal val="#ppt_y"/>
+                                          </p:val>
+                                        </p:tav>
+                                      </p:tavLst>
+                                    </p:anim>
+                                  </p:childTnLst>
+                                </p:cTn>
+                              </p:par>
+                            </p:childTnLst>
+                          </p:cTn>
+                        </p:par>
+                      </p:childTnLst>
+                    </p:cTn>
+                  </p:par>
+                </p:childTnLst>
+              </p:cTn>
+              <p:prevCondLst>
+                <p:cond evt="onPrev" delay="0">
+                  <p:tgtEl>
+                    <p:sldTgt/>
+                  </p:tgtEl>
+                </p:cond>
+              </p:prevCondLst>
+              <p:nextCondLst>
+                <p:cond evt="onNext" delay="0">
+                  <p:tgtEl>
+                    <p:sldTgt/>
+                  </p:tgtEl>
+                </p:cond>
+              </p:nextCondLst>
+            </p:seq>
+          </p:childTnLst>
+        </p:cTn>
+      </p:par>
+    </p:tnLst>
+    <p:bldLst>
+      <p:bldP spid="91" grpId="0" animBg="1"/>
+      <p:bldP spid="92" grpId="0" animBg="1"/>
+    </p:bldLst>
+  </p:timing>
 </p:sld>
 </file>
 

--- a/pptx/Session_01_Tokens_v1.0.pptx
+++ b/pptx/Session_01_Tokens_v1.0.pptx
@@ -23,7 +23,8 @@
     <p:sldId id="277" r:id="rId17"/>
     <p:sldId id="270" r:id="rId18"/>
     <p:sldId id="271" r:id="rId19"/>
-    <p:sldId id="278" r:id="rId20"/>
+    <p:sldId id="279" r:id="rId20"/>
+    <p:sldId id="278" r:id="rId21"/>
   </p:sldIdLst>
   <p:sldSz cx="12192000" cy="6858000"/>
   <p:notesSz cx="6858000" cy="9144000"/>
@@ -320,7 +321,7 @@
           <a:p>
             <a:fld id="{5BCAD085-E8A6-8845-BD4E-CB4CCA059FC4}" type="datetimeFigureOut">
               <a:rPr lang="en-US" smtClean="0"/>
-              <a:t>6/4/2026</a:t>
+              <a:t>6/5/2026</a:t>
             </a:fld>
             <a:endParaRPr lang="en-US"/>
           </a:p>
@@ -488,7 +489,7 @@
           <a:p>
             <a:fld id="{5BCAD085-E8A6-8845-BD4E-CB4CCA059FC4}" type="datetimeFigureOut">
               <a:rPr lang="en-US" smtClean="0"/>
-              <a:t>6/4/2026</a:t>
+              <a:t>6/5/2026</a:t>
             </a:fld>
             <a:endParaRPr lang="en-US"/>
           </a:p>
@@ -666,7 +667,7 @@
           <a:p>
             <a:fld id="{5BCAD085-E8A6-8845-BD4E-CB4CCA059FC4}" type="datetimeFigureOut">
               <a:rPr lang="en-US" smtClean="0"/>
-              <a:t>6/4/2026</a:t>
+              <a:t>6/5/2026</a:t>
             </a:fld>
             <a:endParaRPr lang="en-US"/>
           </a:p>
@@ -834,7 +835,7 @@
           <a:p>
             <a:fld id="{5BCAD085-E8A6-8845-BD4E-CB4CCA059FC4}" type="datetimeFigureOut">
               <a:rPr lang="en-US" smtClean="0"/>
-              <a:t>6/4/2026</a:t>
+              <a:t>6/5/2026</a:t>
             </a:fld>
             <a:endParaRPr lang="en-US"/>
           </a:p>
@@ -1079,7 +1080,7 @@
           <a:p>
             <a:fld id="{5BCAD085-E8A6-8845-BD4E-CB4CCA059FC4}" type="datetimeFigureOut">
               <a:rPr lang="en-US" smtClean="0"/>
-              <a:t>6/4/2026</a:t>
+              <a:t>6/5/2026</a:t>
             </a:fld>
             <a:endParaRPr lang="en-US"/>
           </a:p>
@@ -1364,7 +1365,7 @@
           <a:p>
             <a:fld id="{5BCAD085-E8A6-8845-BD4E-CB4CCA059FC4}" type="datetimeFigureOut">
               <a:rPr lang="en-US" smtClean="0"/>
-              <a:t>6/4/2026</a:t>
+              <a:t>6/5/2026</a:t>
             </a:fld>
             <a:endParaRPr lang="en-US"/>
           </a:p>
@@ -1783,7 +1784,7 @@
           <a:p>
             <a:fld id="{5BCAD085-E8A6-8845-BD4E-CB4CCA059FC4}" type="datetimeFigureOut">
               <a:rPr lang="en-US" smtClean="0"/>
-              <a:t>6/4/2026</a:t>
+              <a:t>6/5/2026</a:t>
             </a:fld>
             <a:endParaRPr lang="en-US"/>
           </a:p>
@@ -1900,7 +1901,7 @@
           <a:p>
             <a:fld id="{5BCAD085-E8A6-8845-BD4E-CB4CCA059FC4}" type="datetimeFigureOut">
               <a:rPr lang="en-US" smtClean="0"/>
-              <a:t>6/4/2026</a:t>
+              <a:t>6/5/2026</a:t>
             </a:fld>
             <a:endParaRPr lang="en-US"/>
           </a:p>
@@ -1995,7 +1996,7 @@
           <a:p>
             <a:fld id="{5BCAD085-E8A6-8845-BD4E-CB4CCA059FC4}" type="datetimeFigureOut">
               <a:rPr lang="en-US" smtClean="0"/>
-              <a:t>6/4/2026</a:t>
+              <a:t>6/5/2026</a:t>
             </a:fld>
             <a:endParaRPr lang="en-US"/>
           </a:p>
@@ -2270,7 +2271,7 @@
           <a:p>
             <a:fld id="{5BCAD085-E8A6-8845-BD4E-CB4CCA059FC4}" type="datetimeFigureOut">
               <a:rPr lang="en-US" smtClean="0"/>
-              <a:t>6/4/2026</a:t>
+              <a:t>6/5/2026</a:t>
             </a:fld>
             <a:endParaRPr lang="en-US"/>
           </a:p>
@@ -2522,7 +2523,7 @@
           <a:p>
             <a:fld id="{5BCAD085-E8A6-8845-BD4E-CB4CCA059FC4}" type="datetimeFigureOut">
               <a:rPr lang="en-US" smtClean="0"/>
-              <a:t>6/4/2026</a:t>
+              <a:t>6/5/2026</a:t>
             </a:fld>
             <a:endParaRPr lang="en-US"/>
           </a:p>
@@ -2733,7 +2734,7 @@
           <a:p>
             <a:fld id="{5BCAD085-E8A6-8845-BD4E-CB4CCA059FC4}" type="datetimeFigureOut">
               <a:rPr lang="en-US" smtClean="0"/>
-              <a:t>6/4/2026</a:t>
+              <a:t>6/5/2026</a:t>
             </a:fld>
             <a:endParaRPr lang="en-US"/>
           </a:p>
@@ -11260,396 +11261,38 @@
       </p:grpSpPr>
       <p:pic>
         <p:nvPicPr>
-          <p:cNvPr id="6" name="Picture Placeholder 5">
+          <p:cNvPr id="3" name="Picture 2">
             <a:extLst>
               <a:ext uri="{FF2B5EF4-FFF2-40B4-BE49-F238E27FC236}">
-                <a16:creationId xmlns:a16="http://schemas.microsoft.com/office/drawing/2014/main" id="{BC56227F-0E35-3518-A770-5486C9C41AE4}"/>
+                <a16:creationId xmlns:a16="http://schemas.microsoft.com/office/drawing/2014/main" id="{D45CE668-48F2-9EC1-3F0B-A8E665B4675A}"/>
               </a:ext>
             </a:extLst>
           </p:cNvPr>
           <p:cNvPicPr>
-            <a:picLocks noGrp="1" noChangeAspect="1"/>
+            <a:picLocks noChangeAspect="1"/>
           </p:cNvPicPr>
-          <p:nvPr>
-            <p:ph type="pic" idx="1"/>
-          </p:nvPr>
+          <p:nvPr/>
         </p:nvPicPr>
         <p:blipFill>
           <a:blip r:embed="rId2"/>
-          <a:srcRect l="3333" r="3333"/>
           <a:stretch>
             <a:fillRect/>
           </a:stretch>
         </p:blipFill>
         <p:spPr>
           <a:xfrm>
-            <a:off x="3068801" y="612775"/>
-            <a:ext cx="5486400" cy="4114800"/>
-          </a:xfrm>
+            <a:off x="1564022" y="302003"/>
+            <a:ext cx="9063955" cy="6042637"/>
+          </a:xfrm>
+          <a:prstGeom prst="rect">
+            <a:avLst/>
+          </a:prstGeom>
         </p:spPr>
       </p:pic>
-      <p:sp>
-        <p:nvSpPr>
-          <p:cNvPr id="200" name="Closing dark readable overlay"/>
-          <p:cNvSpPr/>
-          <p:nvPr/>
-        </p:nvSpPr>
-        <p:spPr>
-          <a:xfrm>
-            <a:off x="0" y="0"/>
-            <a:ext cx="12192000" cy="6858000"/>
-          </a:xfrm>
-          <a:prstGeom prst="rect">
-            <a:avLst/>
-          </a:prstGeom>
-          <a:solidFill>
-            <a:srgbClr val="050A0F">
-              <a:alpha val="65000"/>
-            </a:srgbClr>
-          </a:solidFill>
-          <a:ln>
-            <a:noFill/>
-          </a:ln>
-        </p:spPr>
-      </p:sp>
-      <p:sp>
-        <p:nvSpPr>
-          <p:cNvPr id="201" name="Closing left ink panel"/>
-          <p:cNvSpPr/>
-          <p:nvPr/>
-        </p:nvSpPr>
-        <p:spPr>
-          <a:xfrm>
-            <a:off x="0" y="0"/>
-            <a:ext cx="7600000" cy="6858000"/>
-          </a:xfrm>
-          <a:prstGeom prst="rect">
-            <a:avLst/>
-          </a:prstGeom>
-          <a:solidFill>
-            <a:srgbClr val="07111B">
-              <a:alpha val="18000"/>
-            </a:srgbClr>
-          </a:solidFill>
-          <a:ln>
-            <a:noFill/>
-          </a:ln>
-        </p:spPr>
-      </p:sp>
-      <p:sp>
-        <p:nvSpPr>
-          <p:cNvPr id="202" name="Closing accent rule"/>
-          <p:cNvSpPr/>
-          <p:nvPr/>
-        </p:nvSpPr>
-        <p:spPr>
-          <a:xfrm>
-            <a:off x="760000" y="1070000"/>
-            <a:ext cx="3000000" cy="0"/>
-          </a:xfrm>
-          <a:prstGeom prst="rect">
-            <a:avLst/>
-          </a:prstGeom>
-          <a:noFill/>
-          <a:ln w="38100">
-            <a:solidFill>
-              <a:srgbClr val="42D17A"/>
-            </a:solidFill>
-          </a:ln>
-        </p:spPr>
-      </p:sp>
-      <p:sp>
-        <p:nvSpPr>
-          <p:cNvPr id="203" name="Closing kicker"/>
-          <p:cNvSpPr/>
-          <p:nvPr/>
-        </p:nvSpPr>
-        <p:spPr>
-          <a:xfrm>
-            <a:off x="760000" y="520000"/>
-            <a:ext cx="4800000" cy="420000"/>
-          </a:xfrm>
-          <a:prstGeom prst="rect">
-            <a:avLst/>
-          </a:prstGeom>
-          <a:noFill/>
-          <a:ln>
-            <a:noFill/>
-          </a:ln>
-        </p:spPr>
-        <p:txBody>
-          <a:bodyPr wrap="square" anchor="t"/>
-          <a:lstStyle/>
-          <a:p>
-            <a:pPr algn="l">
-              <a:buNone/>
-            </a:pPr>
-            <a:r>
-              <a:rPr lang="en-US" sz="1600" b="1" dirty="0">
-                <a:solidFill>
-                  <a:srgbClr val="9AE6B4"/>
-                </a:solidFill>
-              </a:rPr>
-              <a:t>MAGPAI</a:t>
-            </a:r>
-            <a:endParaRPr lang="en-US" sz="1600" dirty="0"/>
-          </a:p>
-        </p:txBody>
-      </p:sp>
-      <p:sp>
-        <p:nvSpPr>
-          <p:cNvPr id="204" name="Closing title"/>
-          <p:cNvSpPr/>
-          <p:nvPr/>
-        </p:nvSpPr>
-        <p:spPr>
-          <a:xfrm>
-            <a:off x="730000" y="1180000"/>
-            <a:ext cx="7200000" cy="1500000"/>
-          </a:xfrm>
-          <a:prstGeom prst="rect">
-            <a:avLst/>
-          </a:prstGeom>
-          <a:noFill/>
-          <a:ln>
-            <a:noFill/>
-          </a:ln>
-        </p:spPr>
-        <p:txBody>
-          <a:bodyPr wrap="square" anchor="t"/>
-          <a:lstStyle/>
-          <a:p>
-            <a:pPr algn="l">
-              <a:buNone/>
-            </a:pPr>
-            <a:r>
-              <a:rPr lang="en-US" sz="3200" b="1" dirty="0">
-                <a:solidFill>
-                  <a:srgbClr val="FFFFFF"/>
-                </a:solidFill>
-              </a:rPr>
-              <a:t>You now know what is under the hood.</a:t>
-            </a:r>
-            <a:endParaRPr lang="en-US" sz="3200" dirty="0"/>
-          </a:p>
-        </p:txBody>
-      </p:sp>
-      <p:sp>
-        <p:nvSpPr>
-          <p:cNvPr id="205" name="Closing subtitle"/>
-          <p:cNvSpPr/>
-          <p:nvPr/>
-        </p:nvSpPr>
-        <p:spPr>
-          <a:xfrm>
-            <a:off x="780000" y="2700000"/>
-            <a:ext cx="6350000" cy="720000"/>
-          </a:xfrm>
-          <a:prstGeom prst="rect">
-            <a:avLst/>
-          </a:prstGeom>
-          <a:noFill/>
-          <a:ln>
-            <a:noFill/>
-          </a:ln>
-        </p:spPr>
-        <p:txBody>
-          <a:bodyPr wrap="square" anchor="t"/>
-          <a:lstStyle/>
-          <a:p>
-            <a:pPr algn="l">
-              <a:buNone/>
-            </a:pPr>
-            <a:r>
-              <a:rPr lang="en-US" sz="1800" b="0">
-                <a:solidFill>
-                  <a:srgbClr val="DCEAF7"/>
-                </a:solidFill>
-              </a:rPr>
-              <a:t>Words become tokens. Tokens become vectors. Vectors activate neural networks. Systems turn answers into action.</a:t>
-            </a:r>
-            <a:endParaRPr lang="en-US" sz="1800"/>
-          </a:p>
-        </p:txBody>
-      </p:sp>
-      <p:sp>
-        <p:nvSpPr>
-          <p:cNvPr id="206" name="Closing key takeaways"/>
-          <p:cNvSpPr/>
-          <p:nvPr/>
-        </p:nvSpPr>
-        <p:spPr>
-          <a:xfrm>
-            <a:off x="820000" y="3650000"/>
-            <a:ext cx="7110000" cy="1900000"/>
-          </a:xfrm>
-          <a:prstGeom prst="rect">
-            <a:avLst/>
-          </a:prstGeom>
-          <a:solidFill>
-            <a:srgbClr val="0B1B2A">
-              <a:alpha val="18000"/>
-            </a:srgbClr>
-          </a:solidFill>
-          <a:ln>
-            <a:noFill/>
-          </a:ln>
-        </p:spPr>
-        <p:txBody>
-          <a:bodyPr wrap="square" anchor="t"/>
-          <a:lstStyle/>
-          <a:p>
-            <a:pPr algn="l">
-              <a:buChar char="•"/>
-            </a:pPr>
-            <a:r>
-              <a:rPr lang="en-US" sz="1500" b="0" dirty="0">
-                <a:solidFill>
-                  <a:srgbClr val="F4F8FF"/>
-                </a:solidFill>
-              </a:rPr>
-              <a:t>AI is not magic; it is a pipeline you can inspect.</a:t>
-            </a:r>
-            <a:endParaRPr lang="en-US" sz="1500" dirty="0"/>
-          </a:p>
-          <a:p>
-            <a:pPr algn="l">
-              <a:buChar char="•"/>
-            </a:pPr>
-            <a:r>
-              <a:rPr lang="en-US" sz="1500" b="0" dirty="0">
-                <a:solidFill>
-                  <a:srgbClr val="F4F8FF"/>
-                </a:solidFill>
-              </a:rPr>
-              <a:t>Tokenization is where language first becomes structure.</a:t>
-            </a:r>
-            <a:endParaRPr lang="en-US" sz="1500" dirty="0"/>
-          </a:p>
-          <a:p>
-            <a:pPr algn="l">
-              <a:buChar char="•"/>
-            </a:pPr>
-            <a:r>
-              <a:rPr lang="en-US" sz="1500" b="0" dirty="0">
-                <a:solidFill>
-                  <a:srgbClr val="F4F8FF"/>
-                </a:solidFill>
-              </a:rPr>
-              <a:t>Embeddings are learned coordinates of meaning.</a:t>
-            </a:r>
-            <a:endParaRPr lang="en-US" sz="1500" dirty="0"/>
-          </a:p>
-          <a:p>
-            <a:pPr algn="l">
-              <a:buChar char="•"/>
-            </a:pPr>
-            <a:r>
-              <a:rPr lang="en-US" sz="1500" b="0" dirty="0">
-                <a:solidFill>
-                  <a:srgbClr val="F4F8FF"/>
-                </a:solidFill>
-              </a:rPr>
-              <a:t>Neural networks learn by changing weights and bias.</a:t>
-            </a:r>
-            <a:endParaRPr lang="en-US" sz="1500" dirty="0"/>
-          </a:p>
-          <a:p>
-            <a:pPr algn="l">
-              <a:buChar char="•"/>
-            </a:pPr>
-            <a:r>
-              <a:rPr lang="en-US" sz="1500" b="0" dirty="0">
-                <a:solidFill>
-                  <a:srgbClr val="F4F8FF"/>
-                </a:solidFill>
-              </a:rPr>
-              <a:t>Enterprise value comes when the model is connected to data, tools, and governance.</a:t>
-            </a:r>
-            <a:endParaRPr lang="en-US" sz="1500" dirty="0"/>
-          </a:p>
-        </p:txBody>
-      </p:sp>
-      <p:sp>
-        <p:nvSpPr>
-          <p:cNvPr id="207" name="Closing memorable line"/>
-          <p:cNvSpPr/>
-          <p:nvPr/>
-        </p:nvSpPr>
-        <p:spPr>
-          <a:xfrm>
-            <a:off x="835000" y="5750000"/>
-            <a:ext cx="8292222" cy="560000"/>
-          </a:xfrm>
-          <a:prstGeom prst="rect">
-            <a:avLst/>
-          </a:prstGeom>
-          <a:noFill/>
-          <a:ln>
-            <a:noFill/>
-          </a:ln>
-        </p:spPr>
-        <p:txBody>
-          <a:bodyPr wrap="square" anchor="t"/>
-          <a:lstStyle/>
-          <a:p>
-            <a:pPr algn="l">
-              <a:buNone/>
-            </a:pPr>
-            <a:r>
-              <a:rPr lang="en-US" sz="1800" b="1" dirty="0">
-                <a:solidFill>
-                  <a:srgbClr val="9AE6B4"/>
-                </a:solidFill>
-              </a:rPr>
-              <a:t>The advantage goes to teams who can see the machinery, not just use the interface.</a:t>
-            </a:r>
-            <a:endParaRPr lang="en-US" sz="1800" dirty="0"/>
-          </a:p>
-        </p:txBody>
-      </p:sp>
-      <p:sp>
-        <p:nvSpPr>
-          <p:cNvPr id="208" name="Closing footer"/>
-          <p:cNvSpPr/>
-          <p:nvPr/>
-        </p:nvSpPr>
-        <p:spPr>
-          <a:xfrm>
-            <a:off x="820000" y="6450000"/>
-            <a:ext cx="3500000" cy="260000"/>
-          </a:xfrm>
-          <a:prstGeom prst="rect">
-            <a:avLst/>
-          </a:prstGeom>
-          <a:noFill/>
-          <a:ln>
-            <a:noFill/>
-          </a:ln>
-        </p:spPr>
-        <p:txBody>
-          <a:bodyPr wrap="square" anchor="t"/>
-          <a:lstStyle/>
-          <a:p>
-            <a:pPr algn="l">
-              <a:buNone/>
-            </a:pPr>
-            <a:r>
-              <a:rPr lang="en-US" sz="1000" b="0">
-                <a:solidFill>
-                  <a:srgbClr val="A9B8C8"/>
-                </a:solidFill>
-              </a:rPr>
-              <a:t>AI Under the hood</a:t>
-            </a:r>
-            <a:endParaRPr lang="en-US" sz="1000"/>
-          </a:p>
-        </p:txBody>
-      </p:sp>
     </p:spTree>
     <p:extLst>
       <p:ext uri="{BB962C8B-B14F-4D97-AF65-F5344CB8AC3E}">
-        <p14:creationId xmlns:p14="http://schemas.microsoft.com/office/powerpoint/2010/main" val="4093375280"/>
+        <p14:creationId xmlns:p14="http://schemas.microsoft.com/office/powerpoint/2010/main" val="2774029093"/>
       </p:ext>
     </p:extLst>
   </p:cSld>
@@ -12034,6 +11677,424 @@
       <p:bldP spid="92" grpId="0" animBg="1"/>
     </p:bldLst>
   </p:timing>
+</p:sld>
+</file>
+
+<file path=ppt/slides/slide20.xml><?xml version="1.0" encoding="utf-8"?>
+<p:sld xmlns:a="http://schemas.openxmlformats.org/drawingml/2006/main" xmlns:r="http://schemas.openxmlformats.org/officeDocument/2006/relationships" xmlns:p="http://schemas.openxmlformats.org/presentationml/2006/main">
+  <p:cSld>
+    <p:spTree>
+      <p:nvGrpSpPr>
+        <p:cNvPr id="1" name=""/>
+        <p:cNvGrpSpPr/>
+        <p:nvPr/>
+      </p:nvGrpSpPr>
+      <p:grpSpPr>
+        <a:xfrm>
+          <a:off x="0" y="0"/>
+          <a:ext cx="0" cy="0"/>
+          <a:chOff x="0" y="0"/>
+          <a:chExt cx="0" cy="0"/>
+        </a:xfrm>
+      </p:grpSpPr>
+      <p:pic>
+        <p:nvPicPr>
+          <p:cNvPr id="6" name="Picture Placeholder 5">
+            <a:extLst>
+              <a:ext uri="{FF2B5EF4-FFF2-40B4-BE49-F238E27FC236}">
+                <a16:creationId xmlns:a16="http://schemas.microsoft.com/office/drawing/2014/main" id="{BC56227F-0E35-3518-A770-5486C9C41AE4}"/>
+              </a:ext>
+            </a:extLst>
+          </p:cNvPr>
+          <p:cNvPicPr>
+            <a:picLocks noGrp="1" noChangeAspect="1"/>
+          </p:cNvPicPr>
+          <p:nvPr>
+            <p:ph type="pic" idx="1"/>
+          </p:nvPr>
+        </p:nvPicPr>
+        <p:blipFill>
+          <a:blip r:embed="rId2"/>
+          <a:srcRect l="3333" r="3333"/>
+          <a:stretch>
+            <a:fillRect/>
+          </a:stretch>
+        </p:blipFill>
+        <p:spPr>
+          <a:xfrm>
+            <a:off x="3068801" y="612775"/>
+            <a:ext cx="5486400" cy="4114800"/>
+          </a:xfrm>
+        </p:spPr>
+      </p:pic>
+      <p:sp>
+        <p:nvSpPr>
+          <p:cNvPr id="200" name="Closing dark readable overlay"/>
+          <p:cNvSpPr/>
+          <p:nvPr/>
+        </p:nvSpPr>
+        <p:spPr>
+          <a:xfrm>
+            <a:off x="0" y="0"/>
+            <a:ext cx="12192000" cy="6858000"/>
+          </a:xfrm>
+          <a:prstGeom prst="rect">
+            <a:avLst/>
+          </a:prstGeom>
+          <a:solidFill>
+            <a:srgbClr val="050A0F">
+              <a:alpha val="65000"/>
+            </a:srgbClr>
+          </a:solidFill>
+          <a:ln>
+            <a:noFill/>
+          </a:ln>
+        </p:spPr>
+      </p:sp>
+      <p:sp>
+        <p:nvSpPr>
+          <p:cNvPr id="201" name="Closing left ink panel"/>
+          <p:cNvSpPr/>
+          <p:nvPr/>
+        </p:nvSpPr>
+        <p:spPr>
+          <a:xfrm>
+            <a:off x="0" y="0"/>
+            <a:ext cx="7600000" cy="6858000"/>
+          </a:xfrm>
+          <a:prstGeom prst="rect">
+            <a:avLst/>
+          </a:prstGeom>
+          <a:solidFill>
+            <a:srgbClr val="07111B">
+              <a:alpha val="18000"/>
+            </a:srgbClr>
+          </a:solidFill>
+          <a:ln>
+            <a:noFill/>
+          </a:ln>
+        </p:spPr>
+      </p:sp>
+      <p:sp>
+        <p:nvSpPr>
+          <p:cNvPr id="202" name="Closing accent rule"/>
+          <p:cNvSpPr/>
+          <p:nvPr/>
+        </p:nvSpPr>
+        <p:spPr>
+          <a:xfrm>
+            <a:off x="760000" y="1070000"/>
+            <a:ext cx="3000000" cy="0"/>
+          </a:xfrm>
+          <a:prstGeom prst="rect">
+            <a:avLst/>
+          </a:prstGeom>
+          <a:noFill/>
+          <a:ln w="38100">
+            <a:solidFill>
+              <a:srgbClr val="42D17A"/>
+            </a:solidFill>
+          </a:ln>
+        </p:spPr>
+      </p:sp>
+      <p:sp>
+        <p:nvSpPr>
+          <p:cNvPr id="203" name="Closing kicker"/>
+          <p:cNvSpPr/>
+          <p:nvPr/>
+        </p:nvSpPr>
+        <p:spPr>
+          <a:xfrm>
+            <a:off x="760000" y="520000"/>
+            <a:ext cx="4800000" cy="420000"/>
+          </a:xfrm>
+          <a:prstGeom prst="rect">
+            <a:avLst/>
+          </a:prstGeom>
+          <a:noFill/>
+          <a:ln>
+            <a:noFill/>
+          </a:ln>
+        </p:spPr>
+        <p:txBody>
+          <a:bodyPr wrap="square" anchor="t"/>
+          <a:lstStyle/>
+          <a:p>
+            <a:pPr algn="l">
+              <a:buNone/>
+            </a:pPr>
+            <a:r>
+              <a:rPr lang="en-US" sz="1600" b="1" dirty="0">
+                <a:solidFill>
+                  <a:srgbClr val="9AE6B4"/>
+                </a:solidFill>
+              </a:rPr>
+              <a:t>MAGPAI</a:t>
+            </a:r>
+            <a:endParaRPr lang="en-US" sz="1600" dirty="0"/>
+          </a:p>
+        </p:txBody>
+      </p:sp>
+      <p:sp>
+        <p:nvSpPr>
+          <p:cNvPr id="204" name="Closing title"/>
+          <p:cNvSpPr/>
+          <p:nvPr/>
+        </p:nvSpPr>
+        <p:spPr>
+          <a:xfrm>
+            <a:off x="730000" y="1180000"/>
+            <a:ext cx="7200000" cy="1500000"/>
+          </a:xfrm>
+          <a:prstGeom prst="rect">
+            <a:avLst/>
+          </a:prstGeom>
+          <a:noFill/>
+          <a:ln>
+            <a:noFill/>
+          </a:ln>
+        </p:spPr>
+        <p:txBody>
+          <a:bodyPr wrap="square" anchor="t"/>
+          <a:lstStyle/>
+          <a:p>
+            <a:pPr algn="l">
+              <a:buNone/>
+            </a:pPr>
+            <a:r>
+              <a:rPr lang="en-US" sz="3200" b="1" dirty="0">
+                <a:solidFill>
+                  <a:srgbClr val="FFFFFF"/>
+                </a:solidFill>
+              </a:rPr>
+              <a:t>You now know what is under the hood.</a:t>
+            </a:r>
+            <a:endParaRPr lang="en-US" sz="3200" dirty="0"/>
+          </a:p>
+        </p:txBody>
+      </p:sp>
+      <p:sp>
+        <p:nvSpPr>
+          <p:cNvPr id="205" name="Closing subtitle"/>
+          <p:cNvSpPr/>
+          <p:nvPr/>
+        </p:nvSpPr>
+        <p:spPr>
+          <a:xfrm>
+            <a:off x="780000" y="2700000"/>
+            <a:ext cx="6350000" cy="720000"/>
+          </a:xfrm>
+          <a:prstGeom prst="rect">
+            <a:avLst/>
+          </a:prstGeom>
+          <a:noFill/>
+          <a:ln>
+            <a:noFill/>
+          </a:ln>
+        </p:spPr>
+        <p:txBody>
+          <a:bodyPr wrap="square" anchor="t"/>
+          <a:lstStyle/>
+          <a:p>
+            <a:pPr algn="l">
+              <a:buNone/>
+            </a:pPr>
+            <a:r>
+              <a:rPr lang="en-US" sz="1800" b="0">
+                <a:solidFill>
+                  <a:srgbClr val="DCEAF7"/>
+                </a:solidFill>
+              </a:rPr>
+              <a:t>Words become tokens. Tokens become vectors. Vectors activate neural networks. Systems turn answers into action.</a:t>
+            </a:r>
+            <a:endParaRPr lang="en-US" sz="1800"/>
+          </a:p>
+        </p:txBody>
+      </p:sp>
+      <p:sp>
+        <p:nvSpPr>
+          <p:cNvPr id="206" name="Closing key takeaways"/>
+          <p:cNvSpPr/>
+          <p:nvPr/>
+        </p:nvSpPr>
+        <p:spPr>
+          <a:xfrm>
+            <a:off x="820000" y="3650000"/>
+            <a:ext cx="7110000" cy="1900000"/>
+          </a:xfrm>
+          <a:prstGeom prst="rect">
+            <a:avLst/>
+          </a:prstGeom>
+          <a:solidFill>
+            <a:srgbClr val="0B1B2A">
+              <a:alpha val="18000"/>
+            </a:srgbClr>
+          </a:solidFill>
+          <a:ln>
+            <a:noFill/>
+          </a:ln>
+        </p:spPr>
+        <p:txBody>
+          <a:bodyPr wrap="square" anchor="t"/>
+          <a:lstStyle/>
+          <a:p>
+            <a:pPr algn="l">
+              <a:buChar char="•"/>
+            </a:pPr>
+            <a:r>
+              <a:rPr lang="en-US" sz="1500" b="0" dirty="0">
+                <a:solidFill>
+                  <a:srgbClr val="F4F8FF"/>
+                </a:solidFill>
+              </a:rPr>
+              <a:t>AI is not magic; it is a pipeline you can inspect.</a:t>
+            </a:r>
+            <a:endParaRPr lang="en-US" sz="1500" dirty="0"/>
+          </a:p>
+          <a:p>
+            <a:pPr algn="l">
+              <a:buChar char="•"/>
+            </a:pPr>
+            <a:r>
+              <a:rPr lang="en-US" sz="1500" b="0" dirty="0">
+                <a:solidFill>
+                  <a:srgbClr val="F4F8FF"/>
+                </a:solidFill>
+              </a:rPr>
+              <a:t>Tokenization is where language first becomes structure.</a:t>
+            </a:r>
+            <a:endParaRPr lang="en-US" sz="1500" dirty="0"/>
+          </a:p>
+          <a:p>
+            <a:pPr algn="l">
+              <a:buChar char="•"/>
+            </a:pPr>
+            <a:r>
+              <a:rPr lang="en-US" sz="1500" b="0" dirty="0">
+                <a:solidFill>
+                  <a:srgbClr val="F4F8FF"/>
+                </a:solidFill>
+              </a:rPr>
+              <a:t>Embeddings are learned coordinates of meaning.</a:t>
+            </a:r>
+            <a:endParaRPr lang="en-US" sz="1500" dirty="0"/>
+          </a:p>
+          <a:p>
+            <a:pPr algn="l">
+              <a:buChar char="•"/>
+            </a:pPr>
+            <a:r>
+              <a:rPr lang="en-US" sz="1500" b="0" dirty="0">
+                <a:solidFill>
+                  <a:srgbClr val="F4F8FF"/>
+                </a:solidFill>
+              </a:rPr>
+              <a:t>Neural networks learn by changing weights and bias.</a:t>
+            </a:r>
+            <a:endParaRPr lang="en-US" sz="1500" dirty="0"/>
+          </a:p>
+          <a:p>
+            <a:pPr algn="l">
+              <a:buChar char="•"/>
+            </a:pPr>
+            <a:r>
+              <a:rPr lang="en-US" sz="1500" b="0" dirty="0">
+                <a:solidFill>
+                  <a:srgbClr val="F4F8FF"/>
+                </a:solidFill>
+              </a:rPr>
+              <a:t>Enterprise value comes when the model is connected to data, tools, and governance.</a:t>
+            </a:r>
+            <a:endParaRPr lang="en-US" sz="1500" dirty="0"/>
+          </a:p>
+        </p:txBody>
+      </p:sp>
+      <p:sp>
+        <p:nvSpPr>
+          <p:cNvPr id="207" name="Closing memorable line"/>
+          <p:cNvSpPr/>
+          <p:nvPr/>
+        </p:nvSpPr>
+        <p:spPr>
+          <a:xfrm>
+            <a:off x="835000" y="5750000"/>
+            <a:ext cx="8292222" cy="560000"/>
+          </a:xfrm>
+          <a:prstGeom prst="rect">
+            <a:avLst/>
+          </a:prstGeom>
+          <a:noFill/>
+          <a:ln>
+            <a:noFill/>
+          </a:ln>
+        </p:spPr>
+        <p:txBody>
+          <a:bodyPr wrap="square" anchor="t"/>
+          <a:lstStyle/>
+          <a:p>
+            <a:pPr algn="l">
+              <a:buNone/>
+            </a:pPr>
+            <a:r>
+              <a:rPr lang="en-US" sz="1800" b="1" dirty="0">
+                <a:solidFill>
+                  <a:srgbClr val="9AE6B4"/>
+                </a:solidFill>
+              </a:rPr>
+              <a:t>The advantage goes to teams who can see the machinery, not just use the interface.</a:t>
+            </a:r>
+            <a:endParaRPr lang="en-US" sz="1800" dirty="0"/>
+          </a:p>
+        </p:txBody>
+      </p:sp>
+      <p:sp>
+        <p:nvSpPr>
+          <p:cNvPr id="208" name="Closing footer"/>
+          <p:cNvSpPr/>
+          <p:nvPr/>
+        </p:nvSpPr>
+        <p:spPr>
+          <a:xfrm>
+            <a:off x="820000" y="6450000"/>
+            <a:ext cx="3500000" cy="260000"/>
+          </a:xfrm>
+          <a:prstGeom prst="rect">
+            <a:avLst/>
+          </a:prstGeom>
+          <a:noFill/>
+          <a:ln>
+            <a:noFill/>
+          </a:ln>
+        </p:spPr>
+        <p:txBody>
+          <a:bodyPr wrap="square" anchor="t"/>
+          <a:lstStyle/>
+          <a:p>
+            <a:pPr algn="l">
+              <a:buNone/>
+            </a:pPr>
+            <a:r>
+              <a:rPr lang="en-US" sz="1000" b="0">
+                <a:solidFill>
+                  <a:srgbClr val="A9B8C8"/>
+                </a:solidFill>
+              </a:rPr>
+              <a:t>AI Under the hood</a:t>
+            </a:r>
+            <a:endParaRPr lang="en-US" sz="1000"/>
+          </a:p>
+        </p:txBody>
+      </p:sp>
+    </p:spTree>
+    <p:extLst>
+      <p:ext uri="{BB962C8B-B14F-4D97-AF65-F5344CB8AC3E}">
+        <p14:creationId xmlns:p14="http://schemas.microsoft.com/office/powerpoint/2010/main" val="4093375280"/>
+      </p:ext>
+    </p:extLst>
+  </p:cSld>
+  <p:clrMapOvr>
+    <a:masterClrMapping/>
+  </p:clrMapOvr>
 </p:sld>
 </file>
 
